--- a/slides/5_controller_design.pptx
+++ b/slides/5_controller_design.pptx
@@ -5,7 +5,7 @@
     <p:sldMasterId id="2147483648" r:id="rId1"/>
   </p:sldMasterIdLst>
   <p:notesMasterIdLst>
-    <p:notesMasterId r:id="rId16"/>
+    <p:notesMasterId r:id="rId19"/>
   </p:notesMasterIdLst>
   <p:sldIdLst>
     <p:sldId id="256" r:id="rId2"/>
@@ -13,15 +13,18 @@
     <p:sldId id="266" r:id="rId4"/>
     <p:sldId id="267" r:id="rId5"/>
     <p:sldId id="268" r:id="rId6"/>
-    <p:sldId id="269" r:id="rId7"/>
-    <p:sldId id="270" r:id="rId8"/>
-    <p:sldId id="271" r:id="rId9"/>
-    <p:sldId id="272" r:id="rId10"/>
-    <p:sldId id="273" r:id="rId11"/>
-    <p:sldId id="274" r:id="rId12"/>
-    <p:sldId id="275" r:id="rId13"/>
-    <p:sldId id="276" r:id="rId14"/>
-    <p:sldId id="277" r:id="rId15"/>
+    <p:sldId id="278" r:id="rId7"/>
+    <p:sldId id="276" r:id="rId8"/>
+    <p:sldId id="269" r:id="rId9"/>
+    <p:sldId id="270" r:id="rId10"/>
+    <p:sldId id="279" r:id="rId11"/>
+    <p:sldId id="280" r:id="rId12"/>
+    <p:sldId id="271" r:id="rId13"/>
+    <p:sldId id="272" r:id="rId14"/>
+    <p:sldId id="273" r:id="rId15"/>
+    <p:sldId id="274" r:id="rId16"/>
+    <p:sldId id="275" r:id="rId17"/>
+    <p:sldId id="277" r:id="rId18"/>
   </p:sldIdLst>
   <p:sldSz cx="12192000" cy="6858000"/>
   <p:notesSz cx="6858000" cy="9144000"/>
@@ -492,7 +495,7 @@
           <a:p>
             <a:fld id="{506E0FD1-891F-4B1E-916D-E9B585160BB8}" type="datetimeFigureOut">
               <a:rPr lang="en-GB" smtClean="0"/>
-              <a:t>17/02/2026</a:t>
+              <a:t>21/02/2026</a:t>
             </a:fld>
             <a:endParaRPr lang="en-GB"/>
           </a:p>
@@ -909,7 +912,7 @@
           <a:p>
             <a:fld id="{D68C3F22-27B2-44E3-9C5F-D08126455F6F}" type="datetime1">
               <a:rPr lang="en-GB" smtClean="0"/>
-              <a:t>17/02/2026</a:t>
+              <a:t>21/02/2026</a:t>
             </a:fld>
             <a:endParaRPr lang="en-GB"/>
           </a:p>
@@ -1109,7 +1112,7 @@
           <a:p>
             <a:fld id="{1CD03846-7BF6-4FB6-A921-FF3379ADBD4C}" type="datetime1">
               <a:rPr lang="en-GB" smtClean="0"/>
-              <a:t>17/02/2026</a:t>
+              <a:t>21/02/2026</a:t>
             </a:fld>
             <a:endParaRPr lang="en-GB"/>
           </a:p>
@@ -1319,7 +1322,7 @@
           <a:p>
             <a:fld id="{99E1B91A-3FD0-4144-9C84-63E9688ED2FE}" type="datetime1">
               <a:rPr lang="en-GB" smtClean="0"/>
-              <a:t>17/02/2026</a:t>
+              <a:t>21/02/2026</a:t>
             </a:fld>
             <a:endParaRPr lang="en-GB"/>
           </a:p>
@@ -1519,7 +1522,7 @@
           <a:p>
             <a:fld id="{5295ED7B-FEAD-4734-819F-93EF4B0EA908}" type="datetime1">
               <a:rPr lang="en-GB" smtClean="0"/>
-              <a:t>17/02/2026</a:t>
+              <a:t>21/02/2026</a:t>
             </a:fld>
             <a:endParaRPr lang="en-GB"/>
           </a:p>
@@ -1795,7 +1798,7 @@
           <a:p>
             <a:fld id="{D2D5D4B4-C926-4B45-8815-1ED8911179A2}" type="datetime1">
               <a:rPr lang="en-GB" smtClean="0"/>
-              <a:t>17/02/2026</a:t>
+              <a:t>21/02/2026</a:t>
             </a:fld>
             <a:endParaRPr lang="en-GB"/>
           </a:p>
@@ -2063,7 +2066,7 @@
           <a:p>
             <a:fld id="{B4C5210A-0E37-4935-93AF-69F21A5F712F}" type="datetime1">
               <a:rPr lang="en-GB" smtClean="0"/>
-              <a:t>17/02/2026</a:t>
+              <a:t>21/02/2026</a:t>
             </a:fld>
             <a:endParaRPr lang="en-GB"/>
           </a:p>
@@ -2478,7 +2481,7 @@
           <a:p>
             <a:fld id="{3D3A6B2F-436C-4691-80E8-9C890E000E9D}" type="datetime1">
               <a:rPr lang="en-GB" smtClean="0"/>
-              <a:t>17/02/2026</a:t>
+              <a:t>21/02/2026</a:t>
             </a:fld>
             <a:endParaRPr lang="en-GB"/>
           </a:p>
@@ -2620,7 +2623,7 @@
           <a:p>
             <a:fld id="{84385F4C-D74B-496F-8D21-97E3549C783B}" type="datetime1">
               <a:rPr lang="en-GB" smtClean="0"/>
-              <a:t>17/02/2026</a:t>
+              <a:t>21/02/2026</a:t>
             </a:fld>
             <a:endParaRPr lang="en-GB"/>
           </a:p>
@@ -2733,7 +2736,7 @@
           <a:p>
             <a:fld id="{0CBDCB32-C241-4703-A832-4EB47BD54E83}" type="datetime1">
               <a:rPr lang="en-GB" smtClean="0"/>
-              <a:t>17/02/2026</a:t>
+              <a:t>21/02/2026</a:t>
             </a:fld>
             <a:endParaRPr lang="en-GB"/>
           </a:p>
@@ -3046,7 +3049,7 @@
           <a:p>
             <a:fld id="{85C150FF-BE95-4D25-A16A-E368A81CBF24}" type="datetime1">
               <a:rPr lang="en-GB" smtClean="0"/>
-              <a:t>17/02/2026</a:t>
+              <a:t>21/02/2026</a:t>
             </a:fld>
             <a:endParaRPr lang="en-GB"/>
           </a:p>
@@ -3335,7 +3338,7 @@
           <a:p>
             <a:fld id="{F3C5DB4B-B349-43C9-A424-BADA723AD9F1}" type="datetime1">
               <a:rPr lang="en-GB" smtClean="0"/>
-              <a:t>17/02/2026</a:t>
+              <a:t>21/02/2026</a:t>
             </a:fld>
             <a:endParaRPr lang="en-GB"/>
           </a:p>
@@ -3578,7 +3581,7 @@
           <a:p>
             <a:fld id="{12632426-0A0C-405F-A3D0-2D11AA44702A}" type="datetime1">
               <a:rPr lang="en-GB" smtClean="0"/>
-              <a:t>17/02/2026</a:t>
+              <a:t>21/02/2026</a:t>
             </a:fld>
             <a:endParaRPr lang="en-GB"/>
           </a:p>
@@ -4089,7 +4092,7 @@
           <p:cNvPr id="2" name="Titel 1">
             <a:extLst>
               <a:ext uri="{FF2B5EF4-FFF2-40B4-BE49-F238E27FC236}">
-                <a16:creationId xmlns:a16="http://schemas.microsoft.com/office/drawing/2014/main" id="{DE638CB1-1CE5-2C1D-4952-D96FCAE8716F}"/>
+                <a16:creationId xmlns:a16="http://schemas.microsoft.com/office/drawing/2014/main" id="{2B2B3313-8B53-952E-7472-88BEF0192E8A}"/>
               </a:ext>
             </a:extLst>
           </p:cNvPr>
@@ -4107,70 +4110,102 @@
           <a:p>
             <a:r>
               <a:rPr lang="de-DE" dirty="0"/>
-              <a:t>T-</a:t>
-            </a:r>
+              <a:t>Trade-Off</a:t>
+            </a:r>
+          </a:p>
+        </p:txBody>
+      </p:sp>
+      <p:sp>
+        <p:nvSpPr>
+          <p:cNvPr id="3" name="Inhaltsplatzhalter 2">
+            <a:extLst>
+              <a:ext uri="{FF2B5EF4-FFF2-40B4-BE49-F238E27FC236}">
+                <a16:creationId xmlns:a16="http://schemas.microsoft.com/office/drawing/2014/main" id="{A5D462BA-7603-D319-52E0-A2C21EAABE4A}"/>
+              </a:ext>
+            </a:extLst>
+          </p:cNvPr>
+          <p:cNvSpPr>
+            <a:spLocks noGrp="1"/>
+          </p:cNvSpPr>
+          <p:nvPr>
+            <p:ph idx="1"/>
+          </p:nvPr>
+        </p:nvSpPr>
+        <p:spPr/>
+        <p:txBody>
+          <a:bodyPr/>
+          <a:lstStyle/>
+          <a:p>
+            <a:pPr marL="0" indent="0">
+              <a:buNone/>
+            </a:pPr>
             <a:r>
               <a:rPr lang="de-DE" dirty="0" err="1"/>
-              <a:t>Sum</a:t>
-            </a:r>
-            <a:r>
-              <a:rPr lang="de-DE" dirty="0"/>
-              <a:t> Method</a:t>
-            </a:r>
-          </a:p>
-        </p:txBody>
-      </p:sp>
-      <p:sp>
-        <p:nvSpPr>
-          <p:cNvPr id="3" name="Inhaltsplatzhalter 2">
-            <a:extLst>
-              <a:ext uri="{FF2B5EF4-FFF2-40B4-BE49-F238E27FC236}">
-                <a16:creationId xmlns:a16="http://schemas.microsoft.com/office/drawing/2014/main" id="{A1D58EA8-D03B-3C93-1C0F-F98C41CE636F}"/>
-              </a:ext>
-            </a:extLst>
-          </p:cNvPr>
-          <p:cNvSpPr>
-            <a:spLocks noGrp="1"/>
-          </p:cNvSpPr>
-          <p:nvPr>
-            <p:ph idx="1"/>
-          </p:nvPr>
-        </p:nvSpPr>
-        <p:spPr/>
-        <p:txBody>
-          <a:bodyPr/>
-          <a:lstStyle/>
-          <a:p>
+              <a:t>Disturbacne</a:t>
+            </a:r>
+            <a:r>
+              <a:rPr lang="de-DE" dirty="0"/>
+              <a:t> </a:t>
+            </a:r>
             <a:r>
               <a:rPr lang="de-DE" dirty="0" err="1"/>
-              <a:t>Based</a:t>
-            </a:r>
-            <a:r>
-              <a:rPr lang="de-DE" dirty="0"/>
-              <a:t> on </a:t>
+              <a:t>rejection</a:t>
+            </a:r>
+            <a:r>
+              <a:rPr lang="de-DE" dirty="0"/>
+              <a:t> </a:t>
             </a:r>
             <a:r>
               <a:rPr lang="de-DE" dirty="0" err="1"/>
-              <a:t>process</a:t>
-            </a:r>
-            <a:r>
-              <a:rPr lang="de-DE" dirty="0"/>
-              <a:t> time </a:t>
+              <a:t>often</a:t>
+            </a:r>
+            <a:r>
+              <a:rPr lang="de-DE" dirty="0"/>
+              <a:t> </a:t>
             </a:r>
             <a:r>
               <a:rPr lang="de-DE" dirty="0" err="1"/>
-              <a:t>constants</a:t>
+              <a:t>conflicting</a:t>
+            </a:r>
+            <a:r>
+              <a:rPr lang="de-DE" dirty="0"/>
+              <a:t> </a:t>
+            </a:r>
+            <a:r>
+              <a:rPr lang="de-DE" dirty="0" err="1"/>
+              <a:t>with</a:t>
+            </a:r>
+            <a:r>
+              <a:rPr lang="de-DE" dirty="0"/>
+              <a:t> </a:t>
+            </a:r>
+            <a:r>
+              <a:rPr lang="de-DE" dirty="0" err="1"/>
+              <a:t>tracking</a:t>
+            </a:r>
+            <a:r>
+              <a:rPr lang="de-DE" dirty="0"/>
+              <a:t> </a:t>
+            </a:r>
+            <a:r>
+              <a:rPr lang="de-DE" dirty="0" err="1"/>
+              <a:t>performance</a:t>
             </a:r>
             <a:endParaRPr lang="de-DE" dirty="0"/>
           </a:p>
           <a:p>
-            <a:r>
-              <a:rPr lang="de-DE" dirty="0"/>
-              <a:t>More </a:t>
-            </a:r>
+            <a:pPr marL="0" indent="0">
+              <a:buNone/>
+            </a:pPr>
+            <a:endParaRPr lang="de-DE" dirty="0"/>
+          </a:p>
+          <a:p>
+            <a:pPr marL="0" indent="0">
+              <a:buNone/>
+            </a:pPr>
             <a:r>
               <a:rPr lang="de-DE" dirty="0" err="1"/>
-              <a:t>conservative</a:t>
+              <a:t>You</a:t>
             </a:r>
             <a:r>
               <a:rPr lang="de-DE" dirty="0"/>
@@ -4178,14 +4213,15 @@
             </a:r>
             <a:r>
               <a:rPr lang="de-DE" dirty="0" err="1"/>
-              <a:t>tuning</a:t>
-            </a:r>
-            <a:endParaRPr lang="de-DE" dirty="0"/>
-          </a:p>
-          <a:p>
+              <a:t>cannot</a:t>
+            </a:r>
+            <a:r>
+              <a:rPr lang="de-DE" dirty="0"/>
+              <a:t> </a:t>
+            </a:r>
             <a:r>
               <a:rPr lang="de-DE" dirty="0" err="1"/>
-              <a:t>Often</a:t>
+              <a:t>optimize</a:t>
             </a:r>
             <a:r>
               <a:rPr lang="de-DE" dirty="0"/>
@@ -4193,7 +4229,55 @@
             </a:r>
             <a:r>
               <a:rPr lang="de-DE" dirty="0" err="1"/>
-              <a:t>better</a:t>
+              <a:t>both</a:t>
+            </a:r>
+            <a:r>
+              <a:rPr lang="de-DE" dirty="0"/>
+              <a:t> </a:t>
+            </a:r>
+            <a:r>
+              <a:rPr lang="de-DE" dirty="0" err="1"/>
+              <a:t>independently</a:t>
+            </a:r>
+            <a:r>
+              <a:rPr lang="de-DE" dirty="0"/>
+              <a:t>:</a:t>
+            </a:r>
+          </a:p>
+          <a:p>
+            <a:r>
+              <a:rPr lang="de-DE" dirty="0"/>
+              <a:t>Aggressive </a:t>
+            </a:r>
+            <a:r>
+              <a:rPr lang="de-DE" dirty="0" err="1"/>
+              <a:t>control</a:t>
+            </a:r>
+            <a:r>
+              <a:rPr lang="de-DE" dirty="0"/>
+              <a:t> </a:t>
+            </a:r>
+            <a:r>
+              <a:rPr lang="de-DE" dirty="0">
+                <a:sym typeface="Wingdings" pitchFamily="2" charset="2"/>
+              </a:rPr>
+              <a:t></a:t>
+            </a:r>
+            <a:r>
+              <a:rPr lang="de-DE" dirty="0"/>
+              <a:t> fast </a:t>
+            </a:r>
+            <a:r>
+              <a:rPr lang="de-DE" dirty="0" err="1"/>
+              <a:t>tracking</a:t>
+            </a:r>
+            <a:r>
+              <a:rPr lang="de-DE" dirty="0"/>
+              <a:t> but </a:t>
+            </a:r>
+            <a:r>
+              <a:rPr lang="de-DE" dirty="0" err="1"/>
+              <a:t>reduced</a:t>
             </a:r>
             <a:r>
               <a:rPr lang="de-DE" dirty="0"/>
@@ -4205,6 +4289,102 @@
             </a:r>
             <a:endParaRPr lang="de-DE" dirty="0"/>
           </a:p>
+          <a:p>
+            <a:r>
+              <a:rPr lang="de-DE" dirty="0" err="1"/>
+              <a:t>Conservative</a:t>
+            </a:r>
+            <a:r>
+              <a:rPr lang="de-DE" dirty="0"/>
+              <a:t> </a:t>
+            </a:r>
+            <a:r>
+              <a:rPr lang="de-DE" dirty="0" err="1"/>
+              <a:t>control</a:t>
+            </a:r>
+            <a:r>
+              <a:rPr lang="de-DE" dirty="0"/>
+              <a:t> </a:t>
+            </a:r>
+            <a:r>
+              <a:rPr lang="de-DE" dirty="0">
+                <a:sym typeface="Wingdings" pitchFamily="2" charset="2"/>
+              </a:rPr>
+              <a:t></a:t>
+            </a:r>
+            <a:r>
+              <a:rPr lang="de-DE" dirty="0"/>
+              <a:t> robust but </a:t>
+            </a:r>
+            <a:r>
+              <a:rPr lang="de-DE" dirty="0" err="1"/>
+              <a:t>slower</a:t>
+            </a:r>
+            <a:r>
+              <a:rPr lang="de-DE" dirty="0"/>
+              <a:t> </a:t>
+            </a:r>
+            <a:r>
+              <a:rPr lang="de-DE" dirty="0" err="1"/>
+              <a:t>disturbance</a:t>
+            </a:r>
+            <a:r>
+              <a:rPr lang="de-DE" dirty="0"/>
+              <a:t> </a:t>
+            </a:r>
+            <a:r>
+              <a:rPr lang="de-DE" dirty="0" err="1"/>
+              <a:t>rejection</a:t>
+            </a:r>
+            <a:br>
+              <a:rPr lang="de-DE" dirty="0"/>
+            </a:br>
+            <a:endParaRPr lang="de-DE" dirty="0"/>
+          </a:p>
+          <a:p>
+            <a:pPr marL="0" indent="0">
+              <a:buNone/>
+            </a:pPr>
+            <a:r>
+              <a:rPr lang="de-DE" dirty="0"/>
+              <a:t>Fundamental and </a:t>
+            </a:r>
+            <a:r>
+              <a:rPr lang="de-DE" dirty="0" err="1"/>
+              <a:t>tied</a:t>
+            </a:r>
+            <a:r>
+              <a:rPr lang="de-DE" dirty="0"/>
+              <a:t> </a:t>
+            </a:r>
+            <a:r>
+              <a:rPr lang="de-DE" dirty="0" err="1"/>
+              <a:t>to</a:t>
+            </a:r>
+            <a:r>
+              <a:rPr lang="de-DE" dirty="0"/>
+              <a:t> </a:t>
+            </a:r>
+            <a:r>
+              <a:rPr lang="de-DE" dirty="0" err="1"/>
+              <a:t>sensitivity</a:t>
+            </a:r>
+            <a:r>
+              <a:rPr lang="de-DE" dirty="0"/>
+              <a:t> </a:t>
+            </a:r>
+            <a:r>
+              <a:rPr lang="de-DE" dirty="0" err="1"/>
+              <a:t>functions</a:t>
+            </a:r>
+            <a:endParaRPr lang="de-DE" dirty="0"/>
+          </a:p>
+          <a:p>
+            <a:pPr marL="0" indent="0">
+              <a:buNone/>
+            </a:pPr>
+            <a:endParaRPr lang="de-DE" dirty="0"/>
+          </a:p>
         </p:txBody>
       </p:sp>
       <p:sp>
@@ -4212,7 +4392,7 @@
           <p:cNvPr id="4" name="Foliennummernplatzhalter 3">
             <a:extLst>
               <a:ext uri="{FF2B5EF4-FFF2-40B4-BE49-F238E27FC236}">
-                <a16:creationId xmlns:a16="http://schemas.microsoft.com/office/drawing/2014/main" id="{E7F171FE-3A4D-6228-1060-0E5E0C54399A}"/>
+                <a16:creationId xmlns:a16="http://schemas.microsoft.com/office/drawing/2014/main" id="{D3131F55-2525-457A-E453-6FE316731397}"/>
               </a:ext>
             </a:extLst>
           </p:cNvPr>
@@ -4239,7 +4419,7 @@
     </p:spTree>
     <p:extLst>
       <p:ext uri="{BB962C8B-B14F-4D97-AF65-F5344CB8AC3E}">
-        <p14:creationId xmlns:p14="http://schemas.microsoft.com/office/powerpoint/2010/main" val="2970064966"/>
+        <p14:creationId xmlns:p14="http://schemas.microsoft.com/office/powerpoint/2010/main" val="3215222083"/>
       </p:ext>
     </p:extLst>
   </p:cSld>
@@ -4271,7 +4451,7 @@
           <p:cNvPr id="2" name="Titel 1">
             <a:extLst>
               <a:ext uri="{FF2B5EF4-FFF2-40B4-BE49-F238E27FC236}">
-                <a16:creationId xmlns:a16="http://schemas.microsoft.com/office/drawing/2014/main" id="{CAC1DDF4-C472-55A2-F436-F041165734C9}"/>
+                <a16:creationId xmlns:a16="http://schemas.microsoft.com/office/drawing/2014/main" id="{40F0956D-3FB9-52EE-5450-89C1721C17BC}"/>
               </a:ext>
             </a:extLst>
           </p:cNvPr>
@@ -4288,16 +4468,12 @@
           <a:lstStyle/>
           <a:p>
             <a:r>
+              <a:rPr lang="de-DE" dirty="0"/>
+              <a:t>Lead and Lag </a:t>
+            </a:r>
+            <a:r>
               <a:rPr lang="de-DE" dirty="0" err="1"/>
-              <a:t>Sensitivity</a:t>
-            </a:r>
-            <a:r>
-              <a:rPr lang="de-DE" dirty="0"/>
-              <a:t> </a:t>
-            </a:r>
-            <a:r>
-              <a:rPr lang="de-DE" dirty="0" err="1"/>
-              <a:t>Functions</a:t>
+              <a:t>Compensators</a:t>
             </a:r>
             <a:endParaRPr lang="de-DE" dirty="0"/>
           </a:p>
@@ -4308,7 +4484,7 @@
           <p:cNvPr id="3" name="Inhaltsplatzhalter 2">
             <a:extLst>
               <a:ext uri="{FF2B5EF4-FFF2-40B4-BE49-F238E27FC236}">
-                <a16:creationId xmlns:a16="http://schemas.microsoft.com/office/drawing/2014/main" id="{1F075915-A5A5-515D-255C-C8B0D195F958}"/>
+                <a16:creationId xmlns:a16="http://schemas.microsoft.com/office/drawing/2014/main" id="{EE9B5CEF-6738-31F5-8445-82413D174528}"/>
               </a:ext>
             </a:extLst>
           </p:cNvPr>
@@ -4324,78 +4500,7 @@
           <a:bodyPr/>
           <a:lstStyle/>
           <a:p>
-            <a:r>
-              <a:rPr lang="de-DE" dirty="0" err="1"/>
-              <a:t>Measure</a:t>
-            </a:r>
-            <a:r>
-              <a:rPr lang="de-DE" dirty="0"/>
-              <a:t> </a:t>
-            </a:r>
-            <a:r>
-              <a:rPr lang="de-DE" dirty="0" err="1"/>
-              <a:t>effect</a:t>
-            </a:r>
-            <a:r>
-              <a:rPr lang="de-DE" dirty="0"/>
-              <a:t> </a:t>
-            </a:r>
-            <a:r>
-              <a:rPr lang="de-DE" dirty="0" err="1"/>
-              <a:t>of</a:t>
-            </a:r>
-            <a:r>
-              <a:rPr lang="de-DE" dirty="0"/>
-              <a:t> </a:t>
-            </a:r>
-            <a:r>
-              <a:rPr lang="de-DE" dirty="0" err="1"/>
-              <a:t>disturbances</a:t>
-            </a:r>
-            <a:r>
-              <a:rPr lang="de-DE" dirty="0"/>
-              <a:t> and </a:t>
-            </a:r>
-            <a:r>
-              <a:rPr lang="de-DE" dirty="0" err="1"/>
-              <a:t>uncertainties</a:t>
-            </a:r>
-            <a:endParaRPr lang="de-DE" dirty="0"/>
-          </a:p>
-          <a:p>
-            <a:r>
-              <a:rPr lang="de-DE" dirty="0"/>
-              <a:t>Low </a:t>
-            </a:r>
-            <a:r>
-              <a:rPr lang="de-DE" dirty="0" err="1"/>
-              <a:t>sensitivity</a:t>
-            </a:r>
-            <a:r>
-              <a:rPr lang="de-DE" dirty="0"/>
-              <a:t> </a:t>
-            </a:r>
-            <a:r>
-              <a:rPr lang="de-DE" dirty="0" err="1"/>
-              <a:t>desired</a:t>
-            </a:r>
-            <a:r>
-              <a:rPr lang="de-DE" dirty="0"/>
-              <a:t> at </a:t>
-            </a:r>
-            <a:r>
-              <a:rPr lang="de-DE" dirty="0" err="1"/>
-              <a:t>low</a:t>
-            </a:r>
-            <a:r>
-              <a:rPr lang="de-DE" dirty="0"/>
-              <a:t> </a:t>
-            </a:r>
-            <a:r>
-              <a:rPr lang="de-DE" dirty="0" err="1"/>
-              <a:t>frequencies</a:t>
-            </a:r>
-            <a:endParaRPr lang="de-DE" dirty="0"/>
+            <a:endParaRPr lang="de-DE"/>
           </a:p>
         </p:txBody>
       </p:sp>
@@ -4404,7 +4509,7 @@
           <p:cNvPr id="4" name="Foliennummernplatzhalter 3">
             <a:extLst>
               <a:ext uri="{FF2B5EF4-FFF2-40B4-BE49-F238E27FC236}">
-                <a16:creationId xmlns:a16="http://schemas.microsoft.com/office/drawing/2014/main" id="{E37D1837-255E-6C10-A17B-BA21CBEB85AA}"/>
+                <a16:creationId xmlns:a16="http://schemas.microsoft.com/office/drawing/2014/main" id="{BB4882E8-C0B3-0134-85FB-6885B49312E4}"/>
               </a:ext>
             </a:extLst>
           </p:cNvPr>
@@ -4431,7 +4536,7 @@
     </p:spTree>
     <p:extLst>
       <p:ext uri="{BB962C8B-B14F-4D97-AF65-F5344CB8AC3E}">
-        <p14:creationId xmlns:p14="http://schemas.microsoft.com/office/powerpoint/2010/main" val="3996757241"/>
+        <p14:creationId xmlns:p14="http://schemas.microsoft.com/office/powerpoint/2010/main" val="2485513528"/>
       </p:ext>
     </p:extLst>
   </p:cSld>
@@ -4463,7 +4568,7 @@
           <p:cNvPr id="2" name="Titel 1">
             <a:extLst>
               <a:ext uri="{FF2B5EF4-FFF2-40B4-BE49-F238E27FC236}">
-                <a16:creationId xmlns:a16="http://schemas.microsoft.com/office/drawing/2014/main" id="{4907BF0F-5141-ACA9-F2A6-7743A66891CF}"/>
+                <a16:creationId xmlns:a16="http://schemas.microsoft.com/office/drawing/2014/main" id="{21E29E56-0FF9-E0B7-3138-7B1645C6FCAD}"/>
               </a:ext>
             </a:extLst>
           </p:cNvPr>
@@ -4480,41 +4585,59 @@
           <a:lstStyle/>
           <a:p>
             <a:r>
+              <a:rPr lang="de-DE" dirty="0"/>
+              <a:t>PID Tuning</a:t>
+            </a:r>
+          </a:p>
+        </p:txBody>
+      </p:sp>
+      <p:sp>
+        <p:nvSpPr>
+          <p:cNvPr id="3" name="Inhaltsplatzhalter 2">
+            <a:extLst>
+              <a:ext uri="{FF2B5EF4-FFF2-40B4-BE49-F238E27FC236}">
+                <a16:creationId xmlns:a16="http://schemas.microsoft.com/office/drawing/2014/main" id="{961B2717-D9C9-04E4-EF9E-1E5F96C465D0}"/>
+              </a:ext>
+            </a:extLst>
+          </p:cNvPr>
+          <p:cNvSpPr>
+            <a:spLocks noGrp="1"/>
+          </p:cNvSpPr>
+          <p:nvPr>
+            <p:ph idx="1"/>
+          </p:nvPr>
+        </p:nvSpPr>
+        <p:spPr/>
+        <p:txBody>
+          <a:bodyPr/>
+          <a:lstStyle/>
+          <a:p>
+            <a:r>
               <a:rPr lang="de-DE" dirty="0" err="1"/>
-              <a:t>Robustness</a:t>
+              <a:t>Choose</a:t>
+            </a:r>
+            <a:r>
+              <a:rPr lang="de-DE" dirty="0"/>
+              <a:t> </a:t>
+            </a:r>
+            <a:r>
+              <a:rPr lang="de-DE" dirty="0" err="1"/>
+              <a:t>controller</a:t>
+            </a:r>
+            <a:r>
+              <a:rPr lang="de-DE" dirty="0"/>
+              <a:t> </a:t>
+            </a:r>
+            <a:r>
+              <a:rPr lang="de-DE" dirty="0" err="1"/>
+              <a:t>parameters</a:t>
             </a:r>
             <a:endParaRPr lang="de-DE" dirty="0"/>
           </a:p>
-        </p:txBody>
-      </p:sp>
-      <p:sp>
-        <p:nvSpPr>
-          <p:cNvPr id="3" name="Inhaltsplatzhalter 2">
-            <a:extLst>
-              <a:ext uri="{FF2B5EF4-FFF2-40B4-BE49-F238E27FC236}">
-                <a16:creationId xmlns:a16="http://schemas.microsoft.com/office/drawing/2014/main" id="{C4D88D4B-F47C-C5F8-466E-E710F50AD2B4}"/>
-              </a:ext>
-            </a:extLst>
-          </p:cNvPr>
-          <p:cNvSpPr>
-            <a:spLocks noGrp="1"/>
-          </p:cNvSpPr>
-          <p:nvPr>
-            <p:ph idx="1"/>
-          </p:nvPr>
-        </p:nvSpPr>
-        <p:spPr/>
-        <p:txBody>
-          <a:bodyPr/>
-          <a:lstStyle/>
-          <a:p>
-            <a:r>
-              <a:rPr lang="de-DE" dirty="0"/>
-              <a:t>Performance </a:t>
-            </a:r>
+          <a:p>
             <a:r>
               <a:rPr lang="de-DE" dirty="0" err="1"/>
-              <a:t>under</a:t>
+              <a:t>Empirical</a:t>
             </a:r>
             <a:r>
               <a:rPr lang="de-DE" dirty="0"/>
@@ -4522,40 +4645,26 @@
             </a:r>
             <a:r>
               <a:rPr lang="de-DE" dirty="0" err="1"/>
-              <a:t>uncertainty</a:t>
+              <a:t>vs</a:t>
+            </a:r>
+            <a:r>
+              <a:rPr lang="de-DE" dirty="0"/>
+              <a:t> model-</a:t>
+            </a:r>
+            <a:r>
+              <a:rPr lang="de-DE" dirty="0" err="1"/>
+              <a:t>based</a:t>
+            </a:r>
+            <a:r>
+              <a:rPr lang="de-DE" dirty="0"/>
+              <a:t> </a:t>
+            </a:r>
+            <a:r>
+              <a:rPr lang="de-DE" dirty="0" err="1"/>
+              <a:t>approaches</a:t>
             </a:r>
             <a:endParaRPr lang="de-DE" dirty="0"/>
           </a:p>
-          <a:p>
-            <a:r>
-              <a:rPr lang="de-DE" dirty="0"/>
-              <a:t>Trade-off </a:t>
-            </a:r>
-            <a:r>
-              <a:rPr lang="de-DE" dirty="0" err="1"/>
-              <a:t>with</a:t>
-            </a:r>
-            <a:r>
-              <a:rPr lang="de-DE" dirty="0"/>
-              <a:t> optimal </a:t>
-            </a:r>
-            <a:r>
-              <a:rPr lang="de-DE" dirty="0" err="1"/>
-              <a:t>performance</a:t>
-            </a:r>
-            <a:endParaRPr lang="de-DE" dirty="0"/>
-          </a:p>
-          <a:p>
-            <a:r>
-              <a:rPr lang="de-DE" dirty="0"/>
-              <a:t>Essential in real </a:t>
-            </a:r>
-            <a:r>
-              <a:rPr lang="de-DE" dirty="0" err="1"/>
-              <a:t>systems</a:t>
-            </a:r>
-            <a:endParaRPr lang="de-DE" dirty="0"/>
-          </a:p>
         </p:txBody>
       </p:sp>
       <p:sp>
@@ -4563,7 +4672,7 @@
           <p:cNvPr id="4" name="Foliennummernplatzhalter 3">
             <a:extLst>
               <a:ext uri="{FF2B5EF4-FFF2-40B4-BE49-F238E27FC236}">
-                <a16:creationId xmlns:a16="http://schemas.microsoft.com/office/drawing/2014/main" id="{0146E7BA-9A8D-15EB-A0A0-71D8F00A4086}"/>
+                <a16:creationId xmlns:a16="http://schemas.microsoft.com/office/drawing/2014/main" id="{79859E6D-0626-61A0-47B8-BA89EE898E3A}"/>
               </a:ext>
             </a:extLst>
           </p:cNvPr>
@@ -4590,7 +4699,7 @@
     </p:spTree>
     <p:extLst>
       <p:ext uri="{BB962C8B-B14F-4D97-AF65-F5344CB8AC3E}">
-        <p14:creationId xmlns:p14="http://schemas.microsoft.com/office/powerpoint/2010/main" val="2529282098"/>
+        <p14:creationId xmlns:p14="http://schemas.microsoft.com/office/powerpoint/2010/main" val="657694177"/>
       </p:ext>
     </p:extLst>
   </p:cSld>
@@ -4622,7 +4731,7 @@
           <p:cNvPr id="2" name="Titel 1">
             <a:extLst>
               <a:ext uri="{FF2B5EF4-FFF2-40B4-BE49-F238E27FC236}">
-                <a16:creationId xmlns:a16="http://schemas.microsoft.com/office/drawing/2014/main" id="{49A8D9A9-2948-F823-898A-818D2787EE1D}"/>
+                <a16:creationId xmlns:a16="http://schemas.microsoft.com/office/drawing/2014/main" id="{85BF6517-6984-9407-6B74-9C4B4219E060}"/>
               </a:ext>
             </a:extLst>
           </p:cNvPr>
@@ -4640,38 +4749,94 @@
           <a:p>
             <a:r>
               <a:rPr lang="de-DE" dirty="0"/>
-              <a:t>Root </a:t>
-            </a:r>
+              <a:t>Ziegler–Nichols Method</a:t>
+            </a:r>
+          </a:p>
+        </p:txBody>
+      </p:sp>
+      <p:sp>
+        <p:nvSpPr>
+          <p:cNvPr id="3" name="Inhaltsplatzhalter 2">
+            <a:extLst>
+              <a:ext uri="{FF2B5EF4-FFF2-40B4-BE49-F238E27FC236}">
+                <a16:creationId xmlns:a16="http://schemas.microsoft.com/office/drawing/2014/main" id="{D2DFD6F6-7882-2454-DA98-53A8C188E030}"/>
+              </a:ext>
+            </a:extLst>
+          </p:cNvPr>
+          <p:cNvSpPr>
+            <a:spLocks noGrp="1"/>
+          </p:cNvSpPr>
+          <p:nvPr>
+            <p:ph idx="1"/>
+          </p:nvPr>
+        </p:nvSpPr>
+        <p:spPr/>
+        <p:txBody>
+          <a:bodyPr/>
+          <a:lstStyle/>
+          <a:p>
             <a:r>
               <a:rPr lang="de-DE" dirty="0" err="1"/>
-              <a:t>locus</a:t>
+              <a:t>Increase</a:t>
+            </a:r>
+            <a:r>
+              <a:rPr lang="de-DE" dirty="0"/>
+              <a:t> </a:t>
+            </a:r>
+            <a:r>
+              <a:rPr lang="de-DE" dirty="0" err="1"/>
+              <a:t>gain</a:t>
+            </a:r>
+            <a:r>
+              <a:rPr lang="de-DE" dirty="0"/>
+              <a:t> </a:t>
+            </a:r>
+            <a:r>
+              <a:rPr lang="de-DE" dirty="0" err="1"/>
+              <a:t>until</a:t>
+            </a:r>
+            <a:r>
+              <a:rPr lang="de-DE" dirty="0"/>
+              <a:t> </a:t>
+            </a:r>
+            <a:r>
+              <a:rPr lang="de-DE" dirty="0" err="1"/>
+              <a:t>oscillation</a:t>
             </a:r>
             <a:endParaRPr lang="de-DE" dirty="0"/>
           </a:p>
-        </p:txBody>
-      </p:sp>
-      <p:sp>
-        <p:nvSpPr>
-          <p:cNvPr id="3" name="Inhaltsplatzhalter 2">
-            <a:extLst>
-              <a:ext uri="{FF2B5EF4-FFF2-40B4-BE49-F238E27FC236}">
-                <a16:creationId xmlns:a16="http://schemas.microsoft.com/office/drawing/2014/main" id="{F2AC5237-6BE6-8EF9-4CF2-8840AE86E957}"/>
-              </a:ext>
-            </a:extLst>
-          </p:cNvPr>
-          <p:cNvSpPr>
-            <a:spLocks noGrp="1"/>
-          </p:cNvSpPr>
-          <p:nvPr>
-            <p:ph idx="1"/>
-          </p:nvPr>
-        </p:nvSpPr>
-        <p:spPr/>
-        <p:txBody>
-          <a:bodyPr/>
-          <a:lstStyle/>
-          <a:p>
-            <a:endParaRPr lang="de-DE"/>
+          <a:p>
+            <a:r>
+              <a:rPr lang="de-DE" dirty="0"/>
+              <a:t>Use </a:t>
+            </a:r>
+            <a:r>
+              <a:rPr lang="de-DE" dirty="0" err="1"/>
+              <a:t>empirical</a:t>
+            </a:r>
+            <a:r>
+              <a:rPr lang="de-DE" dirty="0"/>
+              <a:t> </a:t>
+            </a:r>
+            <a:r>
+              <a:rPr lang="de-DE" dirty="0" err="1"/>
+              <a:t>tuning</a:t>
+            </a:r>
+            <a:r>
+              <a:rPr lang="de-DE" dirty="0"/>
+              <a:t> </a:t>
+            </a:r>
+            <a:r>
+              <a:rPr lang="de-DE" dirty="0" err="1"/>
+              <a:t>formulas</a:t>
+            </a:r>
+            <a:endParaRPr lang="de-DE" dirty="0"/>
+          </a:p>
+          <a:p>
+            <a:r>
+              <a:rPr lang="de-DE" dirty="0"/>
+              <a:t>Fast but aggressive</a:t>
+            </a:r>
           </a:p>
         </p:txBody>
       </p:sp>
@@ -4680,7 +4845,7 @@
           <p:cNvPr id="4" name="Foliennummernplatzhalter 3">
             <a:extLst>
               <a:ext uri="{FF2B5EF4-FFF2-40B4-BE49-F238E27FC236}">
-                <a16:creationId xmlns:a16="http://schemas.microsoft.com/office/drawing/2014/main" id="{D9E59EA8-C286-2451-D41E-CD3CEA13F460}"/>
+                <a16:creationId xmlns:a16="http://schemas.microsoft.com/office/drawing/2014/main" id="{8F4D5E92-4A90-3146-A07C-C04412405FF1}"/>
               </a:ext>
             </a:extLst>
           </p:cNvPr>
@@ -4707,7 +4872,7 @@
     </p:spTree>
     <p:extLst>
       <p:ext uri="{BB962C8B-B14F-4D97-AF65-F5344CB8AC3E}">
-        <p14:creationId xmlns:p14="http://schemas.microsoft.com/office/powerpoint/2010/main" val="3420749753"/>
+        <p14:creationId xmlns:p14="http://schemas.microsoft.com/office/powerpoint/2010/main" val="2536200423"/>
       </p:ext>
     </p:extLst>
   </p:cSld>
@@ -4739,7 +4904,7 @@
           <p:cNvPr id="2" name="Titel 1">
             <a:extLst>
               <a:ext uri="{FF2B5EF4-FFF2-40B4-BE49-F238E27FC236}">
-                <a16:creationId xmlns:a16="http://schemas.microsoft.com/office/drawing/2014/main" id="{4526C0AA-D9C3-34B4-74D2-760A494AEB0D}"/>
+                <a16:creationId xmlns:a16="http://schemas.microsoft.com/office/drawing/2014/main" id="{DE638CB1-1CE5-2C1D-4952-D96FCAE8716F}"/>
               </a:ext>
             </a:extLst>
           </p:cNvPr>
@@ -4757,7 +4922,15 @@
           <a:p>
             <a:r>
               <a:rPr lang="de-DE" dirty="0"/>
-              <a:t>Cascade Control</a:t>
+              <a:t>T-</a:t>
+            </a:r>
+            <a:r>
+              <a:rPr lang="de-DE" dirty="0" err="1"/>
+              <a:t>Sum</a:t>
+            </a:r>
+            <a:r>
+              <a:rPr lang="de-DE" dirty="0"/>
+              <a:t> Method</a:t>
             </a:r>
           </a:p>
         </p:txBody>
@@ -4767,7 +4940,7 @@
           <p:cNvPr id="3" name="Inhaltsplatzhalter 2">
             <a:extLst>
               <a:ext uri="{FF2B5EF4-FFF2-40B4-BE49-F238E27FC236}">
-                <a16:creationId xmlns:a16="http://schemas.microsoft.com/office/drawing/2014/main" id="{523AC845-AEF8-1D08-A3FD-8EE28F4C9D4E}"/>
+                <a16:creationId xmlns:a16="http://schemas.microsoft.com/office/drawing/2014/main" id="{A1D58EA8-D03B-3C93-1C0F-F98C41CE636F}"/>
               </a:ext>
             </a:extLst>
           </p:cNvPr>
@@ -4783,7 +4956,69 @@
           <a:bodyPr/>
           <a:lstStyle/>
           <a:p>
-            <a:endParaRPr lang="de-DE"/>
+            <a:r>
+              <a:rPr lang="de-DE" dirty="0" err="1"/>
+              <a:t>Based</a:t>
+            </a:r>
+            <a:r>
+              <a:rPr lang="de-DE" dirty="0"/>
+              <a:t> on </a:t>
+            </a:r>
+            <a:r>
+              <a:rPr lang="de-DE" dirty="0" err="1"/>
+              <a:t>process</a:t>
+            </a:r>
+            <a:r>
+              <a:rPr lang="de-DE" dirty="0"/>
+              <a:t> time </a:t>
+            </a:r>
+            <a:r>
+              <a:rPr lang="de-DE" dirty="0" err="1"/>
+              <a:t>constants</a:t>
+            </a:r>
+            <a:endParaRPr lang="de-DE" dirty="0"/>
+          </a:p>
+          <a:p>
+            <a:r>
+              <a:rPr lang="de-DE" dirty="0"/>
+              <a:t>More </a:t>
+            </a:r>
+            <a:r>
+              <a:rPr lang="de-DE" dirty="0" err="1"/>
+              <a:t>conservative</a:t>
+            </a:r>
+            <a:r>
+              <a:rPr lang="de-DE" dirty="0"/>
+              <a:t> </a:t>
+            </a:r>
+            <a:r>
+              <a:rPr lang="de-DE" dirty="0" err="1"/>
+              <a:t>tuning</a:t>
+            </a:r>
+            <a:endParaRPr lang="de-DE" dirty="0"/>
+          </a:p>
+          <a:p>
+            <a:r>
+              <a:rPr lang="de-DE" dirty="0" err="1"/>
+              <a:t>Often</a:t>
+            </a:r>
+            <a:r>
+              <a:rPr lang="de-DE" dirty="0"/>
+              <a:t> </a:t>
+            </a:r>
+            <a:r>
+              <a:rPr lang="de-DE" dirty="0" err="1"/>
+              <a:t>better</a:t>
+            </a:r>
+            <a:r>
+              <a:rPr lang="de-DE" dirty="0"/>
+              <a:t> </a:t>
+            </a:r>
+            <a:r>
+              <a:rPr lang="de-DE" dirty="0" err="1"/>
+              <a:t>robustness</a:t>
+            </a:r>
+            <a:endParaRPr lang="de-DE" dirty="0"/>
           </a:p>
         </p:txBody>
       </p:sp>
@@ -4792,7 +5027,7 @@
           <p:cNvPr id="4" name="Foliennummernplatzhalter 3">
             <a:extLst>
               <a:ext uri="{FF2B5EF4-FFF2-40B4-BE49-F238E27FC236}">
-                <a16:creationId xmlns:a16="http://schemas.microsoft.com/office/drawing/2014/main" id="{E689E192-E06F-6B6D-EA9D-F53924D4324F}"/>
+                <a16:creationId xmlns:a16="http://schemas.microsoft.com/office/drawing/2014/main" id="{E7F171FE-3A4D-6228-1060-0E5E0C54399A}"/>
               </a:ext>
             </a:extLst>
           </p:cNvPr>
@@ -4811,6 +5046,469 @@
             <a:fld id="{08C366F5-AFAD-49CB-854A-9D9E238FCA13}" type="slidenum">
               <a:rPr lang="en-GB" smtClean="0"/>
               <a:t>14</a:t>
+            </a:fld>
+            <a:endParaRPr lang="en-GB"/>
+          </a:p>
+        </p:txBody>
+      </p:sp>
+    </p:spTree>
+    <p:extLst>
+      <p:ext uri="{BB962C8B-B14F-4D97-AF65-F5344CB8AC3E}">
+        <p14:creationId xmlns:p14="http://schemas.microsoft.com/office/powerpoint/2010/main" val="2970064966"/>
+      </p:ext>
+    </p:extLst>
+  </p:cSld>
+  <p:clrMapOvr>
+    <a:masterClrMapping/>
+  </p:clrMapOvr>
+</p:sld>
+</file>
+
+<file path=ppt/slides/slide15.xml><?xml version="1.0" encoding="utf-8"?>
+<p:sld xmlns:a="http://schemas.openxmlformats.org/drawingml/2006/main" xmlns:r="http://schemas.openxmlformats.org/officeDocument/2006/relationships" xmlns:p="http://schemas.openxmlformats.org/presentationml/2006/main">
+  <p:cSld>
+    <p:spTree>
+      <p:nvGrpSpPr>
+        <p:cNvPr id="1" name=""/>
+        <p:cNvGrpSpPr/>
+        <p:nvPr/>
+      </p:nvGrpSpPr>
+      <p:grpSpPr>
+        <a:xfrm>
+          <a:off x="0" y="0"/>
+          <a:ext cx="0" cy="0"/>
+          <a:chOff x="0" y="0"/>
+          <a:chExt cx="0" cy="0"/>
+        </a:xfrm>
+      </p:grpSpPr>
+      <p:sp>
+        <p:nvSpPr>
+          <p:cNvPr id="2" name="Titel 1">
+            <a:extLst>
+              <a:ext uri="{FF2B5EF4-FFF2-40B4-BE49-F238E27FC236}">
+                <a16:creationId xmlns:a16="http://schemas.microsoft.com/office/drawing/2014/main" id="{CAC1DDF4-C472-55A2-F436-F041165734C9}"/>
+              </a:ext>
+            </a:extLst>
+          </p:cNvPr>
+          <p:cNvSpPr>
+            <a:spLocks noGrp="1"/>
+          </p:cNvSpPr>
+          <p:nvPr>
+            <p:ph type="title"/>
+          </p:nvPr>
+        </p:nvSpPr>
+        <p:spPr/>
+        <p:txBody>
+          <a:bodyPr/>
+          <a:lstStyle/>
+          <a:p>
+            <a:r>
+              <a:rPr lang="de-DE" dirty="0" err="1"/>
+              <a:t>Sensitivity</a:t>
+            </a:r>
+            <a:r>
+              <a:rPr lang="de-DE" dirty="0"/>
+              <a:t> </a:t>
+            </a:r>
+            <a:r>
+              <a:rPr lang="de-DE" dirty="0" err="1"/>
+              <a:t>Functions</a:t>
+            </a:r>
+            <a:endParaRPr lang="de-DE" dirty="0"/>
+          </a:p>
+        </p:txBody>
+      </p:sp>
+      <p:sp>
+        <p:nvSpPr>
+          <p:cNvPr id="3" name="Inhaltsplatzhalter 2">
+            <a:extLst>
+              <a:ext uri="{FF2B5EF4-FFF2-40B4-BE49-F238E27FC236}">
+                <a16:creationId xmlns:a16="http://schemas.microsoft.com/office/drawing/2014/main" id="{1F075915-A5A5-515D-255C-C8B0D195F958}"/>
+              </a:ext>
+            </a:extLst>
+          </p:cNvPr>
+          <p:cNvSpPr>
+            <a:spLocks noGrp="1"/>
+          </p:cNvSpPr>
+          <p:nvPr>
+            <p:ph idx="1"/>
+          </p:nvPr>
+        </p:nvSpPr>
+        <p:spPr/>
+        <p:txBody>
+          <a:bodyPr/>
+          <a:lstStyle/>
+          <a:p>
+            <a:r>
+              <a:rPr lang="de-DE" dirty="0" err="1"/>
+              <a:t>Measure</a:t>
+            </a:r>
+            <a:r>
+              <a:rPr lang="de-DE" dirty="0"/>
+              <a:t> </a:t>
+            </a:r>
+            <a:r>
+              <a:rPr lang="de-DE" dirty="0" err="1"/>
+              <a:t>effect</a:t>
+            </a:r>
+            <a:r>
+              <a:rPr lang="de-DE" dirty="0"/>
+              <a:t> </a:t>
+            </a:r>
+            <a:r>
+              <a:rPr lang="de-DE" dirty="0" err="1"/>
+              <a:t>of</a:t>
+            </a:r>
+            <a:r>
+              <a:rPr lang="de-DE" dirty="0"/>
+              <a:t> </a:t>
+            </a:r>
+            <a:r>
+              <a:rPr lang="de-DE" dirty="0" err="1"/>
+              <a:t>disturbances</a:t>
+            </a:r>
+            <a:r>
+              <a:rPr lang="de-DE" dirty="0"/>
+              <a:t> and </a:t>
+            </a:r>
+            <a:r>
+              <a:rPr lang="de-DE" dirty="0" err="1"/>
+              <a:t>uncertainties</a:t>
+            </a:r>
+            <a:endParaRPr lang="de-DE" dirty="0"/>
+          </a:p>
+          <a:p>
+            <a:r>
+              <a:rPr lang="de-DE" dirty="0"/>
+              <a:t>Low </a:t>
+            </a:r>
+            <a:r>
+              <a:rPr lang="de-DE" dirty="0" err="1"/>
+              <a:t>sensitivity</a:t>
+            </a:r>
+            <a:r>
+              <a:rPr lang="de-DE" dirty="0"/>
+              <a:t> </a:t>
+            </a:r>
+            <a:r>
+              <a:rPr lang="de-DE" dirty="0" err="1"/>
+              <a:t>desired</a:t>
+            </a:r>
+            <a:r>
+              <a:rPr lang="de-DE" dirty="0"/>
+              <a:t> at </a:t>
+            </a:r>
+            <a:r>
+              <a:rPr lang="de-DE" dirty="0" err="1"/>
+              <a:t>low</a:t>
+            </a:r>
+            <a:r>
+              <a:rPr lang="de-DE" dirty="0"/>
+              <a:t> </a:t>
+            </a:r>
+            <a:r>
+              <a:rPr lang="de-DE" dirty="0" err="1"/>
+              <a:t>frequencies</a:t>
+            </a:r>
+            <a:endParaRPr lang="de-DE" dirty="0"/>
+          </a:p>
+        </p:txBody>
+      </p:sp>
+      <p:sp>
+        <p:nvSpPr>
+          <p:cNvPr id="4" name="Foliennummernplatzhalter 3">
+            <a:extLst>
+              <a:ext uri="{FF2B5EF4-FFF2-40B4-BE49-F238E27FC236}">
+                <a16:creationId xmlns:a16="http://schemas.microsoft.com/office/drawing/2014/main" id="{E37D1837-255E-6C10-A17B-BA21CBEB85AA}"/>
+              </a:ext>
+            </a:extLst>
+          </p:cNvPr>
+          <p:cNvSpPr>
+            <a:spLocks noGrp="1"/>
+          </p:cNvSpPr>
+          <p:nvPr>
+            <p:ph type="sldNum" sz="quarter" idx="12"/>
+          </p:nvPr>
+        </p:nvSpPr>
+        <p:spPr/>
+        <p:txBody>
+          <a:bodyPr/>
+          <a:lstStyle/>
+          <a:p>
+            <a:fld id="{08C366F5-AFAD-49CB-854A-9D9E238FCA13}" type="slidenum">
+              <a:rPr lang="en-GB" smtClean="0"/>
+              <a:t>15</a:t>
+            </a:fld>
+            <a:endParaRPr lang="en-GB"/>
+          </a:p>
+        </p:txBody>
+      </p:sp>
+    </p:spTree>
+    <p:extLst>
+      <p:ext uri="{BB962C8B-B14F-4D97-AF65-F5344CB8AC3E}">
+        <p14:creationId xmlns:p14="http://schemas.microsoft.com/office/powerpoint/2010/main" val="3996757241"/>
+      </p:ext>
+    </p:extLst>
+  </p:cSld>
+  <p:clrMapOvr>
+    <a:masterClrMapping/>
+  </p:clrMapOvr>
+</p:sld>
+</file>
+
+<file path=ppt/slides/slide16.xml><?xml version="1.0" encoding="utf-8"?>
+<p:sld xmlns:a="http://schemas.openxmlformats.org/drawingml/2006/main" xmlns:r="http://schemas.openxmlformats.org/officeDocument/2006/relationships" xmlns:p="http://schemas.openxmlformats.org/presentationml/2006/main">
+  <p:cSld>
+    <p:spTree>
+      <p:nvGrpSpPr>
+        <p:cNvPr id="1" name=""/>
+        <p:cNvGrpSpPr/>
+        <p:nvPr/>
+      </p:nvGrpSpPr>
+      <p:grpSpPr>
+        <a:xfrm>
+          <a:off x="0" y="0"/>
+          <a:ext cx="0" cy="0"/>
+          <a:chOff x="0" y="0"/>
+          <a:chExt cx="0" cy="0"/>
+        </a:xfrm>
+      </p:grpSpPr>
+      <p:sp>
+        <p:nvSpPr>
+          <p:cNvPr id="2" name="Titel 1">
+            <a:extLst>
+              <a:ext uri="{FF2B5EF4-FFF2-40B4-BE49-F238E27FC236}">
+                <a16:creationId xmlns:a16="http://schemas.microsoft.com/office/drawing/2014/main" id="{4907BF0F-5141-ACA9-F2A6-7743A66891CF}"/>
+              </a:ext>
+            </a:extLst>
+          </p:cNvPr>
+          <p:cNvSpPr>
+            <a:spLocks noGrp="1"/>
+          </p:cNvSpPr>
+          <p:nvPr>
+            <p:ph type="title"/>
+          </p:nvPr>
+        </p:nvSpPr>
+        <p:spPr/>
+        <p:txBody>
+          <a:bodyPr/>
+          <a:lstStyle/>
+          <a:p>
+            <a:r>
+              <a:rPr lang="de-DE" dirty="0" err="1"/>
+              <a:t>Robustness</a:t>
+            </a:r>
+            <a:endParaRPr lang="de-DE" dirty="0"/>
+          </a:p>
+        </p:txBody>
+      </p:sp>
+      <p:sp>
+        <p:nvSpPr>
+          <p:cNvPr id="3" name="Inhaltsplatzhalter 2">
+            <a:extLst>
+              <a:ext uri="{FF2B5EF4-FFF2-40B4-BE49-F238E27FC236}">
+                <a16:creationId xmlns:a16="http://schemas.microsoft.com/office/drawing/2014/main" id="{C4D88D4B-F47C-C5F8-466E-E710F50AD2B4}"/>
+              </a:ext>
+            </a:extLst>
+          </p:cNvPr>
+          <p:cNvSpPr>
+            <a:spLocks noGrp="1"/>
+          </p:cNvSpPr>
+          <p:nvPr>
+            <p:ph idx="1"/>
+          </p:nvPr>
+        </p:nvSpPr>
+        <p:spPr/>
+        <p:txBody>
+          <a:bodyPr/>
+          <a:lstStyle/>
+          <a:p>
+            <a:r>
+              <a:rPr lang="de-DE" dirty="0"/>
+              <a:t>Performance </a:t>
+            </a:r>
+            <a:r>
+              <a:rPr lang="de-DE" dirty="0" err="1"/>
+              <a:t>under</a:t>
+            </a:r>
+            <a:r>
+              <a:rPr lang="de-DE" dirty="0"/>
+              <a:t> </a:t>
+            </a:r>
+            <a:r>
+              <a:rPr lang="de-DE" dirty="0" err="1"/>
+              <a:t>uncertainty</a:t>
+            </a:r>
+            <a:endParaRPr lang="de-DE" dirty="0"/>
+          </a:p>
+          <a:p>
+            <a:r>
+              <a:rPr lang="de-DE" dirty="0"/>
+              <a:t>Trade-off </a:t>
+            </a:r>
+            <a:r>
+              <a:rPr lang="de-DE" dirty="0" err="1"/>
+              <a:t>with</a:t>
+            </a:r>
+            <a:r>
+              <a:rPr lang="de-DE" dirty="0"/>
+              <a:t> optimal </a:t>
+            </a:r>
+            <a:r>
+              <a:rPr lang="de-DE" dirty="0" err="1"/>
+              <a:t>performance</a:t>
+            </a:r>
+            <a:endParaRPr lang="de-DE" dirty="0"/>
+          </a:p>
+          <a:p>
+            <a:r>
+              <a:rPr lang="de-DE" dirty="0"/>
+              <a:t>Essential in real </a:t>
+            </a:r>
+            <a:r>
+              <a:rPr lang="de-DE" dirty="0" err="1"/>
+              <a:t>systems</a:t>
+            </a:r>
+            <a:endParaRPr lang="de-DE" dirty="0"/>
+          </a:p>
+        </p:txBody>
+      </p:sp>
+      <p:sp>
+        <p:nvSpPr>
+          <p:cNvPr id="4" name="Foliennummernplatzhalter 3">
+            <a:extLst>
+              <a:ext uri="{FF2B5EF4-FFF2-40B4-BE49-F238E27FC236}">
+                <a16:creationId xmlns:a16="http://schemas.microsoft.com/office/drawing/2014/main" id="{0146E7BA-9A8D-15EB-A0A0-71D8F00A4086}"/>
+              </a:ext>
+            </a:extLst>
+          </p:cNvPr>
+          <p:cNvSpPr>
+            <a:spLocks noGrp="1"/>
+          </p:cNvSpPr>
+          <p:nvPr>
+            <p:ph type="sldNum" sz="quarter" idx="12"/>
+          </p:nvPr>
+        </p:nvSpPr>
+        <p:spPr/>
+        <p:txBody>
+          <a:bodyPr/>
+          <a:lstStyle/>
+          <a:p>
+            <a:fld id="{08C366F5-AFAD-49CB-854A-9D9E238FCA13}" type="slidenum">
+              <a:rPr lang="en-GB" smtClean="0"/>
+              <a:t>16</a:t>
+            </a:fld>
+            <a:endParaRPr lang="en-GB"/>
+          </a:p>
+        </p:txBody>
+      </p:sp>
+    </p:spTree>
+    <p:extLst>
+      <p:ext uri="{BB962C8B-B14F-4D97-AF65-F5344CB8AC3E}">
+        <p14:creationId xmlns:p14="http://schemas.microsoft.com/office/powerpoint/2010/main" val="2529282098"/>
+      </p:ext>
+    </p:extLst>
+  </p:cSld>
+  <p:clrMapOvr>
+    <a:masterClrMapping/>
+  </p:clrMapOvr>
+</p:sld>
+</file>
+
+<file path=ppt/slides/slide17.xml><?xml version="1.0" encoding="utf-8"?>
+<p:sld xmlns:a="http://schemas.openxmlformats.org/drawingml/2006/main" xmlns:r="http://schemas.openxmlformats.org/officeDocument/2006/relationships" xmlns:p="http://schemas.openxmlformats.org/presentationml/2006/main">
+  <p:cSld>
+    <p:spTree>
+      <p:nvGrpSpPr>
+        <p:cNvPr id="1" name=""/>
+        <p:cNvGrpSpPr/>
+        <p:nvPr/>
+      </p:nvGrpSpPr>
+      <p:grpSpPr>
+        <a:xfrm>
+          <a:off x="0" y="0"/>
+          <a:ext cx="0" cy="0"/>
+          <a:chOff x="0" y="0"/>
+          <a:chExt cx="0" cy="0"/>
+        </a:xfrm>
+      </p:grpSpPr>
+      <p:sp>
+        <p:nvSpPr>
+          <p:cNvPr id="2" name="Titel 1">
+            <a:extLst>
+              <a:ext uri="{FF2B5EF4-FFF2-40B4-BE49-F238E27FC236}">
+                <a16:creationId xmlns:a16="http://schemas.microsoft.com/office/drawing/2014/main" id="{4526C0AA-D9C3-34B4-74D2-760A494AEB0D}"/>
+              </a:ext>
+            </a:extLst>
+          </p:cNvPr>
+          <p:cNvSpPr>
+            <a:spLocks noGrp="1"/>
+          </p:cNvSpPr>
+          <p:nvPr>
+            <p:ph type="title"/>
+          </p:nvPr>
+        </p:nvSpPr>
+        <p:spPr/>
+        <p:txBody>
+          <a:bodyPr/>
+          <a:lstStyle/>
+          <a:p>
+            <a:r>
+              <a:rPr lang="de-DE" dirty="0"/>
+              <a:t>Cascade Control</a:t>
+            </a:r>
+          </a:p>
+        </p:txBody>
+      </p:sp>
+      <p:sp>
+        <p:nvSpPr>
+          <p:cNvPr id="3" name="Inhaltsplatzhalter 2">
+            <a:extLst>
+              <a:ext uri="{FF2B5EF4-FFF2-40B4-BE49-F238E27FC236}">
+                <a16:creationId xmlns:a16="http://schemas.microsoft.com/office/drawing/2014/main" id="{523AC845-AEF8-1D08-A3FD-8EE28F4C9D4E}"/>
+              </a:ext>
+            </a:extLst>
+          </p:cNvPr>
+          <p:cNvSpPr>
+            <a:spLocks noGrp="1"/>
+          </p:cNvSpPr>
+          <p:nvPr>
+            <p:ph idx="1"/>
+          </p:nvPr>
+        </p:nvSpPr>
+        <p:spPr/>
+        <p:txBody>
+          <a:bodyPr/>
+          <a:lstStyle/>
+          <a:p>
+            <a:endParaRPr lang="de-DE"/>
+          </a:p>
+        </p:txBody>
+      </p:sp>
+      <p:sp>
+        <p:nvSpPr>
+          <p:cNvPr id="4" name="Foliennummernplatzhalter 3">
+            <a:extLst>
+              <a:ext uri="{FF2B5EF4-FFF2-40B4-BE49-F238E27FC236}">
+                <a16:creationId xmlns:a16="http://schemas.microsoft.com/office/drawing/2014/main" id="{E689E192-E06F-6B6D-EA9D-F53924D4324F}"/>
+              </a:ext>
+            </a:extLst>
+          </p:cNvPr>
+          <p:cNvSpPr>
+            <a:spLocks noGrp="1"/>
+          </p:cNvSpPr>
+          <p:nvPr>
+            <p:ph type="sldNum" sz="quarter" idx="12"/>
+          </p:nvPr>
+        </p:nvSpPr>
+        <p:spPr/>
+        <p:txBody>
+          <a:bodyPr/>
+          <a:lstStyle/>
+          <a:p>
+            <a:fld id="{08C366F5-AFAD-49CB-854A-9D9E238FCA13}" type="slidenum">
+              <a:rPr lang="en-GB" smtClean="0"/>
+              <a:t>17</a:t>
             </a:fld>
             <a:endParaRPr lang="en-GB"/>
           </a:p>
@@ -5186,6 +5884,17 @@
           </a:p>
           <a:p>
             <a:r>
+              <a:rPr lang="de-DE" dirty="0"/>
+              <a:t>Root </a:t>
+            </a:r>
+            <a:r>
+              <a:rPr lang="de-DE" dirty="0" err="1"/>
+              <a:t>locus</a:t>
+            </a:r>
+            <a:endParaRPr lang="de-DE" dirty="0"/>
+          </a:p>
+          <a:p>
+            <a:r>
               <a:rPr lang="de-DE" dirty="0" err="1"/>
               <a:t>Setpoint</a:t>
             </a:r>
@@ -5238,17 +5947,6 @@
             <a:r>
               <a:rPr lang="de-DE" dirty="0" err="1"/>
               <a:t>robustness</a:t>
-            </a:r>
-            <a:endParaRPr lang="de-DE" dirty="0"/>
-          </a:p>
-          <a:p>
-            <a:r>
-              <a:rPr lang="de-DE" dirty="0"/>
-              <a:t>Root </a:t>
-            </a:r>
-            <a:r>
-              <a:rPr lang="de-DE" dirty="0" err="1"/>
-              <a:t>locus</a:t>
             </a:r>
             <a:endParaRPr lang="de-DE" dirty="0"/>
           </a:p>
@@ -5379,6 +6077,12 @@
             </a:r>
           </a:p>
           <a:p>
+            <a:pPr marL="0" indent="0">
+              <a:buNone/>
+            </a:pPr>
+            <a:endParaRPr lang="de-DE" dirty="0"/>
+          </a:p>
+          <a:p>
             <a:r>
               <a:rPr lang="de-DE" dirty="0"/>
               <a:t>Find a </a:t>
@@ -5387,6 +6091,12 @@
               <a:rPr lang="de-DE" dirty="0" err="1"/>
               <a:t>controller</a:t>
             </a:r>
+            <a:endParaRPr lang="de-DE" dirty="0"/>
+          </a:p>
+          <a:p>
+            <a:pPr marL="0" indent="0">
+              <a:buNone/>
+            </a:pPr>
             <a:endParaRPr lang="de-DE" dirty="0"/>
           </a:p>
           <a:p>
@@ -5514,65 +6224,520 @@
           </a:p>
         </p:txBody>
       </p:sp>
-      <p:sp>
-        <p:nvSpPr>
-          <p:cNvPr id="3" name="Inhaltsplatzhalter 2">
-            <a:extLst>
-              <a:ext uri="{FF2B5EF4-FFF2-40B4-BE49-F238E27FC236}">
-                <a16:creationId xmlns:a16="http://schemas.microsoft.com/office/drawing/2014/main" id="{E441440B-2A4C-FDB4-9214-69A27D10F9D9}"/>
-              </a:ext>
-            </a:extLst>
-          </p:cNvPr>
-          <p:cNvSpPr>
-            <a:spLocks noGrp="1"/>
-          </p:cNvSpPr>
-          <p:nvPr>
-            <p:ph idx="1"/>
-          </p:nvPr>
-        </p:nvSpPr>
-        <p:spPr/>
-        <p:txBody>
-          <a:bodyPr/>
-          <a:lstStyle/>
-          <a:p>
-            <a:r>
-              <a:rPr lang="de-DE" dirty="0"/>
-              <a:t>Error </a:t>
-            </a:r>
-            <a:r>
-              <a:rPr lang="de-DE" dirty="0" err="1"/>
-              <a:t>correction</a:t>
-            </a:r>
-            <a:endParaRPr lang="de-DE" dirty="0"/>
-          </a:p>
-          <a:p>
-            <a:r>
-              <a:rPr lang="de-DE" dirty="0" err="1"/>
-              <a:t>Disturbance</a:t>
-            </a:r>
-            <a:r>
-              <a:rPr lang="de-DE" dirty="0"/>
-              <a:t> </a:t>
-            </a:r>
-            <a:r>
-              <a:rPr lang="de-DE" dirty="0" err="1"/>
-              <a:t>rejection</a:t>
-            </a:r>
-            <a:endParaRPr lang="de-DE" dirty="0"/>
-          </a:p>
-          <a:p>
-            <a:r>
-              <a:rPr lang="de-DE" dirty="0"/>
-              <a:t>Trade-offs </a:t>
-            </a:r>
-            <a:r>
-              <a:rPr lang="de-DE" dirty="0" err="1"/>
-              <a:t>unavoidable</a:t>
-            </a:r>
-            <a:endParaRPr lang="de-DE" dirty="0"/>
-          </a:p>
-        </p:txBody>
-      </p:sp>
+      <mc:AlternateContent xmlns:mc="http://schemas.openxmlformats.org/markup-compatibility/2006">
+        <mc:Choice xmlns:a14="http://schemas.microsoft.com/office/drawing/2010/main" Requires="a14">
+          <p:sp>
+            <p:nvSpPr>
+              <p:cNvPr id="3" name="Inhaltsplatzhalter 2">
+                <a:extLst>
+                  <a:ext uri="{FF2B5EF4-FFF2-40B4-BE49-F238E27FC236}">
+                    <a16:creationId xmlns:a16="http://schemas.microsoft.com/office/drawing/2014/main" id="{E441440B-2A4C-FDB4-9214-69A27D10F9D9}"/>
+                  </a:ext>
+                </a:extLst>
+              </p:cNvPr>
+              <p:cNvSpPr>
+                <a:spLocks noGrp="1"/>
+              </p:cNvSpPr>
+              <p:nvPr>
+                <p:ph idx="1"/>
+              </p:nvPr>
+            </p:nvSpPr>
+            <p:spPr/>
+            <p:txBody>
+              <a:bodyPr>
+                <a:noAutofit/>
+              </a:bodyPr>
+              <a:lstStyle/>
+              <a:p>
+                <a:pPr marL="0" indent="0">
+                  <a:buNone/>
+                </a:pPr>
+                <a:r>
+                  <a:rPr lang="de-DE" sz="2400" dirty="0"/>
+                  <a:t>Error </a:t>
+                </a:r>
+                <a:r>
+                  <a:rPr lang="de-DE" sz="2400" dirty="0" err="1"/>
+                  <a:t>correction</a:t>
+                </a:r>
+                <a:r>
+                  <a:rPr lang="de-DE" sz="2400" dirty="0"/>
+                  <a:t>: </a:t>
+                </a:r>
+                <a:r>
+                  <a:rPr lang="de-DE" sz="2400" dirty="0" err="1"/>
+                  <a:t>controller</a:t>
+                </a:r>
+                <a:r>
+                  <a:rPr lang="de-DE" sz="2400" dirty="0"/>
+                  <a:t> </a:t>
+                </a:r>
+                <a:r>
+                  <a:rPr lang="de-DE" sz="2400" dirty="0" err="1"/>
+                  <a:t>compares</a:t>
+                </a:r>
+                <a:r>
+                  <a:rPr lang="de-DE" sz="2400" dirty="0"/>
+                  <a:t> </a:t>
+                </a:r>
+                <a:r>
+                  <a:rPr lang="de-DE" sz="2400" dirty="0" err="1"/>
+                  <a:t>measured</a:t>
+                </a:r>
+                <a:r>
+                  <a:rPr lang="de-DE" sz="2400" dirty="0"/>
+                  <a:t> </a:t>
+                </a:r>
+                <a:r>
+                  <a:rPr lang="de-DE" sz="2400" dirty="0" err="1"/>
+                  <a:t>output</a:t>
+                </a:r>
+                <a:r>
+                  <a:rPr lang="de-DE" sz="2400" dirty="0"/>
+                  <a:t> </a:t>
+                </a:r>
+                <a14:m>
+                  <m:oMath xmlns:m="http://schemas.openxmlformats.org/officeDocument/2006/math">
+                    <m:r>
+                      <a:rPr lang="de-DE" sz="2400" b="0" i="1" smtClean="0">
+                        <a:latin typeface="Cambria Math" panose="02040503050406030204" pitchFamily="18" charset="0"/>
+                      </a:rPr>
+                      <m:t>𝑦</m:t>
+                    </m:r>
+                  </m:oMath>
+                </a14:m>
+                <a:r>
+                  <a:rPr lang="de-DE" sz="2400" dirty="0"/>
+                  <a:t> to </a:t>
+                </a:r>
+                <a:r>
+                  <a:rPr lang="de-DE" sz="2400" dirty="0" err="1"/>
+                  <a:t>reference</a:t>
+                </a:r>
+                <a:r>
+                  <a:rPr lang="de-DE" sz="2400" dirty="0"/>
+                  <a:t> (</a:t>
+                </a:r>
+                <a:r>
+                  <a:rPr lang="de-DE" sz="2400" dirty="0" err="1"/>
+                  <a:t>setpoint</a:t>
+                </a:r>
+                <a:r>
+                  <a:rPr lang="de-DE" sz="2400" dirty="0"/>
+                  <a:t>) </a:t>
+                </a:r>
+                <a14:m>
+                  <m:oMath xmlns:m="http://schemas.openxmlformats.org/officeDocument/2006/math">
+                    <m:r>
+                      <a:rPr lang="de-DE" sz="2400" b="0" i="1" smtClean="0">
+                        <a:latin typeface="Cambria Math" panose="02040503050406030204" pitchFamily="18" charset="0"/>
+                      </a:rPr>
+                      <m:t>𝑟</m:t>
+                    </m:r>
+                  </m:oMath>
+                </a14:m>
+                <a:r>
+                  <a:rPr lang="de-DE" sz="2400" dirty="0"/>
+                  <a:t>, </a:t>
+                </a:r>
+                <a:r>
+                  <a:rPr lang="de-DE" sz="2400" dirty="0" err="1"/>
+                  <a:t>computes</a:t>
+                </a:r>
+                <a:r>
+                  <a:rPr lang="de-DE" sz="2400" dirty="0"/>
+                  <a:t> </a:t>
+                </a:r>
+                <a:r>
+                  <a:rPr lang="de-DE" sz="2400" dirty="0" err="1"/>
+                  <a:t>error</a:t>
+                </a:r>
+                <a:r>
+                  <a:rPr lang="de-DE" sz="2400" dirty="0"/>
+                  <a:t> </a:t>
+                </a:r>
+                <a14:m>
+                  <m:oMath xmlns:m="http://schemas.openxmlformats.org/officeDocument/2006/math">
+                    <m:r>
+                      <a:rPr lang="de-DE" sz="2400" b="0" i="1" smtClean="0">
+                        <a:latin typeface="Cambria Math" panose="02040503050406030204" pitchFamily="18" charset="0"/>
+                      </a:rPr>
+                      <m:t>𝑒</m:t>
+                    </m:r>
+                    <m:r>
+                      <a:rPr lang="de-DE" sz="2400" b="0" i="1" smtClean="0">
+                        <a:latin typeface="Cambria Math" panose="02040503050406030204" pitchFamily="18" charset="0"/>
+                      </a:rPr>
+                      <m:t>=</m:t>
+                    </m:r>
+                    <m:r>
+                      <a:rPr lang="de-DE" sz="2400" b="0" i="1" smtClean="0">
+                        <a:latin typeface="Cambria Math" panose="02040503050406030204" pitchFamily="18" charset="0"/>
+                      </a:rPr>
+                      <m:t>𝑟</m:t>
+                    </m:r>
+                    <m:r>
+                      <a:rPr lang="de-DE" sz="2400" b="0" i="1" smtClean="0">
+                        <a:latin typeface="Cambria Math" panose="02040503050406030204" pitchFamily="18" charset="0"/>
+                      </a:rPr>
+                      <m:t>−</m:t>
+                    </m:r>
+                    <m:r>
+                      <a:rPr lang="de-DE" sz="2400" b="0" i="1" smtClean="0">
+                        <a:latin typeface="Cambria Math" panose="02040503050406030204" pitchFamily="18" charset="0"/>
+                      </a:rPr>
+                      <m:t>𝑦</m:t>
+                    </m:r>
+                  </m:oMath>
+                </a14:m>
+                <a:r>
+                  <a:rPr lang="de-DE" sz="2400" dirty="0"/>
+                  <a:t>, and </a:t>
+                </a:r>
+                <a:r>
+                  <a:rPr lang="de-DE" sz="2400" dirty="0" err="1"/>
+                  <a:t>acts</a:t>
+                </a:r>
+                <a:r>
+                  <a:rPr lang="de-DE" sz="2400" dirty="0"/>
+                  <a:t> </a:t>
+                </a:r>
+                <a:r>
+                  <a:rPr lang="de-DE" sz="2400" dirty="0" err="1"/>
+                  <a:t>to</a:t>
+                </a:r>
+                <a:r>
+                  <a:rPr lang="de-DE" sz="2400" dirty="0"/>
+                  <a:t> </a:t>
+                </a:r>
+                <a:r>
+                  <a:rPr lang="de-DE" sz="2400" dirty="0" err="1"/>
+                  <a:t>reduce</a:t>
+                </a:r>
+                <a:r>
+                  <a:rPr lang="de-DE" sz="2400" dirty="0"/>
+                  <a:t> </a:t>
+                </a:r>
+                <a:r>
+                  <a:rPr lang="de-DE" sz="2400" dirty="0" err="1"/>
+                  <a:t>it</a:t>
+                </a:r>
+                <a:endParaRPr lang="de-DE" sz="2400" dirty="0"/>
+              </a:p>
+              <a:p>
+                <a:pPr marL="0" indent="0">
+                  <a:buNone/>
+                </a:pPr>
+                <a:r>
+                  <a:rPr lang="de-DE" sz="2400" dirty="0">
+                    <a:sym typeface="Wingdings" pitchFamily="2" charset="2"/>
+                  </a:rPr>
+                  <a:t> Negative </a:t>
+                </a:r>
+                <a:r>
+                  <a:rPr lang="de-DE" sz="2400" dirty="0" err="1">
+                    <a:sym typeface="Wingdings" pitchFamily="2" charset="2"/>
+                  </a:rPr>
+                  <a:t>feedback</a:t>
+                </a:r>
+                <a:r>
+                  <a:rPr lang="de-DE" sz="2400" dirty="0">
+                    <a:sym typeface="Wingdings" pitchFamily="2" charset="2"/>
+                  </a:rPr>
+                  <a:t> (p</a:t>
+                </a:r>
+                <a:r>
+                  <a:rPr lang="de-DE" sz="2400" dirty="0"/>
+                  <a:t>ositive </a:t>
+                </a:r>
+                <a:r>
+                  <a:rPr lang="de-DE" sz="2400" dirty="0" err="1"/>
+                  <a:t>feedback</a:t>
+                </a:r>
+                <a:r>
+                  <a:rPr lang="de-DE" sz="2400" dirty="0"/>
+                  <a:t> </a:t>
+                </a:r>
+                <a:r>
+                  <a:rPr lang="de-DE" sz="2400" dirty="0" err="1"/>
+                  <a:t>can</a:t>
+                </a:r>
+                <a:r>
+                  <a:rPr lang="de-DE" sz="2400" dirty="0"/>
+                  <a:t> </a:t>
+                </a:r>
+                <a:r>
+                  <a:rPr lang="de-DE" sz="2400" dirty="0" err="1"/>
+                  <a:t>increase</a:t>
+                </a:r>
+                <a:r>
+                  <a:rPr lang="de-DE" sz="2400" dirty="0"/>
+                  <a:t> </a:t>
+                </a:r>
+                <a:r>
+                  <a:rPr lang="de-DE" sz="2400" dirty="0" err="1"/>
+                  <a:t>gain</a:t>
+                </a:r>
+                <a:r>
+                  <a:rPr lang="de-DE" sz="2400" dirty="0"/>
+                  <a:t> and </a:t>
+                </a:r>
+                <a:r>
+                  <a:rPr lang="de-DE" sz="2400" dirty="0" err="1"/>
+                  <a:t>bandwidth</a:t>
+                </a:r>
+                <a:r>
+                  <a:rPr lang="de-DE" sz="2400" dirty="0"/>
+                  <a:t> but </a:t>
+                </a:r>
+                <a:r>
+                  <a:rPr lang="de-DE" sz="2400" dirty="0" err="1"/>
+                  <a:t>risks</a:t>
+                </a:r>
+                <a:r>
+                  <a:rPr lang="de-DE" sz="2400" dirty="0"/>
+                  <a:t> </a:t>
+                </a:r>
+                <a:r>
+                  <a:rPr lang="de-DE" sz="2400" dirty="0" err="1"/>
+                  <a:t>instability</a:t>
+                </a:r>
+                <a:r>
+                  <a:rPr lang="de-DE" sz="2400" dirty="0"/>
+                  <a:t>)</a:t>
+                </a:r>
+              </a:p>
+              <a:p>
+                <a:pPr marL="0" indent="0">
+                  <a:buNone/>
+                </a:pPr>
+                <a:endParaRPr lang="de-DE" sz="2400" dirty="0"/>
+              </a:p>
+              <a:p>
+                <a:r>
+                  <a:rPr lang="de-DE" sz="2400" dirty="0" err="1"/>
+                  <a:t>Stability</a:t>
+                </a:r>
+                <a:r>
+                  <a:rPr lang="de-DE" sz="2400" dirty="0"/>
+                  <a:t> </a:t>
+                </a:r>
+                <a:r>
+                  <a:rPr lang="de-DE" sz="2400" dirty="0" err="1"/>
+                  <a:t>of</a:t>
+                </a:r>
+                <a:r>
+                  <a:rPr lang="de-DE" sz="2400" dirty="0"/>
+                  <a:t> </a:t>
+                </a:r>
+                <a:r>
+                  <a:rPr lang="de-DE" sz="2400" dirty="0" err="1"/>
+                  <a:t>unstable</a:t>
+                </a:r>
+                <a:r>
+                  <a:rPr lang="de-DE" sz="2400" dirty="0"/>
+                  <a:t> </a:t>
+                </a:r>
+                <a:r>
+                  <a:rPr lang="de-DE" sz="2400" dirty="0" err="1"/>
+                  <a:t>or</a:t>
+                </a:r>
+                <a:r>
+                  <a:rPr lang="de-DE" sz="2400" dirty="0"/>
+                  <a:t> </a:t>
+                </a:r>
+                <a:r>
+                  <a:rPr lang="de-DE" sz="2400" dirty="0" err="1"/>
+                  <a:t>poorly</a:t>
+                </a:r>
+                <a:r>
+                  <a:rPr lang="de-DE" sz="2400" dirty="0"/>
+                  <a:t> </a:t>
+                </a:r>
+                <a:r>
+                  <a:rPr lang="de-DE" sz="2400" dirty="0" err="1"/>
+                  <a:t>damped</a:t>
+                </a:r>
+                <a:r>
+                  <a:rPr lang="de-DE" sz="2400" dirty="0"/>
+                  <a:t> plants</a:t>
+                </a:r>
+              </a:p>
+              <a:p>
+                <a:r>
+                  <a:rPr lang="de-DE" sz="2400" dirty="0" err="1"/>
+                  <a:t>Disturbance</a:t>
+                </a:r>
+                <a:r>
+                  <a:rPr lang="de-DE" sz="2400" dirty="0"/>
+                  <a:t> </a:t>
+                </a:r>
+                <a:r>
+                  <a:rPr lang="de-DE" sz="2400" dirty="0" err="1"/>
+                  <a:t>rejection</a:t>
+                </a:r>
+                <a:r>
+                  <a:rPr lang="de-DE" sz="2400" dirty="0"/>
+                  <a:t> (</a:t>
+                </a:r>
+                <a:r>
+                  <a:rPr lang="de-DE" sz="2400" dirty="0" err="1"/>
+                  <a:t>attenuating</a:t>
+                </a:r>
+                <a:r>
+                  <a:rPr lang="de-DE" sz="2400" dirty="0"/>
+                  <a:t> </a:t>
+                </a:r>
+                <a:r>
+                  <a:rPr lang="de-DE" sz="2400" dirty="0" err="1"/>
+                  <a:t>unknown</a:t>
+                </a:r>
+                <a:r>
+                  <a:rPr lang="de-DE" sz="2400" dirty="0"/>
+                  <a:t> </a:t>
+                </a:r>
+                <a:r>
+                  <a:rPr lang="de-DE" sz="2400" dirty="0" err="1"/>
+                  <a:t>inputs</a:t>
+                </a:r>
+                <a:r>
+                  <a:rPr lang="de-DE" sz="2400" dirty="0"/>
+                  <a:t>)</a:t>
+                </a:r>
+              </a:p>
+              <a:p>
+                <a:r>
+                  <a:rPr lang="de-DE" sz="2400" dirty="0" err="1"/>
+                  <a:t>Reduced</a:t>
+                </a:r>
+                <a:r>
+                  <a:rPr lang="de-DE" sz="2400" dirty="0"/>
+                  <a:t> </a:t>
+                </a:r>
+                <a:r>
+                  <a:rPr lang="de-DE" sz="2400" dirty="0" err="1"/>
+                  <a:t>sensitivity</a:t>
+                </a:r>
+                <a:r>
+                  <a:rPr lang="de-DE" sz="2400" dirty="0"/>
+                  <a:t> </a:t>
+                </a:r>
+                <a:r>
+                  <a:rPr lang="de-DE" sz="2400" dirty="0" err="1"/>
+                  <a:t>to</a:t>
+                </a:r>
+                <a:r>
+                  <a:rPr lang="de-DE" sz="2400" dirty="0"/>
+                  <a:t> </a:t>
+                </a:r>
+                <a:r>
+                  <a:rPr lang="de-DE" sz="2400" dirty="0" err="1"/>
+                  <a:t>model</a:t>
+                </a:r>
+                <a:r>
+                  <a:rPr lang="de-DE" sz="2400" dirty="0"/>
+                  <a:t> </a:t>
+                </a:r>
+                <a:r>
+                  <a:rPr lang="de-DE" sz="2400" dirty="0" err="1"/>
+                  <a:t>uncertainty</a:t>
+                </a:r>
+                <a:endParaRPr lang="de-DE" sz="2400" dirty="0"/>
+              </a:p>
+              <a:p>
+                <a:r>
+                  <a:rPr lang="de-DE" sz="2400" dirty="0" err="1"/>
+                  <a:t>Improved</a:t>
+                </a:r>
+                <a:r>
+                  <a:rPr lang="de-DE" sz="2400" dirty="0"/>
+                  <a:t> </a:t>
+                </a:r>
+                <a:r>
+                  <a:rPr lang="de-DE" sz="2400" dirty="0" err="1"/>
+                  <a:t>tracking</a:t>
+                </a:r>
+                <a:r>
+                  <a:rPr lang="de-DE" sz="2400" dirty="0"/>
+                  <a:t> </a:t>
+                </a:r>
+                <a:r>
+                  <a:rPr lang="de-DE" sz="2400" dirty="0" err="1"/>
+                  <a:t>accuracy</a:t>
+                </a:r>
+                <a:endParaRPr lang="de-DE" sz="2400" dirty="0"/>
+              </a:p>
+              <a:p>
+                <a:pPr marL="0" indent="0">
+                  <a:buNone/>
+                </a:pPr>
+                <a:r>
+                  <a:rPr lang="de-DE" sz="2400" dirty="0">
+                    <a:sym typeface="Wingdings" pitchFamily="2" charset="2"/>
+                  </a:rPr>
+                  <a:t> </a:t>
+                </a:r>
+                <a:r>
+                  <a:rPr lang="de-DE" sz="2400" dirty="0"/>
+                  <a:t>Trade-offs </a:t>
+                </a:r>
+                <a:r>
+                  <a:rPr lang="de-DE" sz="2400" dirty="0" err="1"/>
+                  <a:t>are</a:t>
+                </a:r>
+                <a:r>
+                  <a:rPr lang="de-DE" sz="2400" dirty="0"/>
+                  <a:t> </a:t>
+                </a:r>
+                <a:r>
+                  <a:rPr lang="de-DE" sz="2400" dirty="0" err="1"/>
+                  <a:t>unavoidable</a:t>
+                </a:r>
+                <a:endParaRPr lang="de-DE" sz="2400" dirty="0"/>
+              </a:p>
+            </p:txBody>
+          </p:sp>
+        </mc:Choice>
+        <mc:Fallback>
+          <p:sp>
+            <p:nvSpPr>
+              <p:cNvPr id="3" name="Inhaltsplatzhalter 2">
+                <a:extLst>
+                  <a:ext uri="{FF2B5EF4-FFF2-40B4-BE49-F238E27FC236}">
+                    <a16:creationId xmlns:a16="http://schemas.microsoft.com/office/drawing/2014/main" id="{E441440B-2A4C-FDB4-9214-69A27D10F9D9}"/>
+                  </a:ext>
+                </a:extLst>
+              </p:cNvPr>
+              <p:cNvSpPr>
+                <a:spLocks noGrp="1" noRot="1" noChangeAspect="1" noMove="1" noResize="1" noEditPoints="1" noAdjustHandles="1" noChangeArrowheads="1" noChangeShapeType="1" noTextEdit="1"/>
+              </p:cNvSpPr>
+              <p:nvPr>
+                <p:ph idx="1"/>
+              </p:nvPr>
+            </p:nvSpPr>
+            <p:spPr>
+              <a:blipFill>
+                <a:blip r:embed="rId2"/>
+                <a:stretch>
+                  <a:fillRect l="-965" t="-2035" b="-1744"/>
+                </a:stretch>
+              </a:blipFill>
+            </p:spPr>
+            <p:txBody>
+              <a:bodyPr/>
+              <a:lstStyle/>
+              <a:p>
+                <a:r>
+                  <a:rPr lang="de-DE">
+                    <a:noFill/>
+                  </a:rPr>
+                  <a:t> </a:t>
+                </a:r>
+              </a:p>
+            </p:txBody>
+          </p:sp>
+        </mc:Fallback>
+      </mc:AlternateContent>
       <p:sp>
         <p:nvSpPr>
           <p:cNvPr id="4" name="Foliennummernplatzhalter 3">
@@ -5637,7 +6802,7 @@
           <p:cNvPr id="2" name="Titel 1">
             <a:extLst>
               <a:ext uri="{FF2B5EF4-FFF2-40B4-BE49-F238E27FC236}">
-                <a16:creationId xmlns:a16="http://schemas.microsoft.com/office/drawing/2014/main" id="{EAA7AA7F-0AD3-029A-CD2C-81DECBA4206C}"/>
+                <a16:creationId xmlns:a16="http://schemas.microsoft.com/office/drawing/2014/main" id="{BD9F9992-F4C1-C332-3DFD-7FE2160CC34B}"/>
               </a:ext>
             </a:extLst>
           </p:cNvPr>
@@ -5654,90 +6819,668 @@
           <a:lstStyle/>
           <a:p>
             <a:r>
+              <a:rPr lang="de-DE" dirty="0"/>
+              <a:t>Loop </a:t>
+            </a:r>
+            <a:r>
               <a:rPr lang="de-DE" dirty="0" err="1"/>
-              <a:t>Setpoint</a:t>
-            </a:r>
-            <a:r>
-              <a:rPr lang="de-DE" dirty="0"/>
-              <a:t> Tracking</a:t>
-            </a:r>
-          </a:p>
-        </p:txBody>
-      </p:sp>
-      <p:sp>
-        <p:nvSpPr>
-          <p:cNvPr id="3" name="Inhaltsplatzhalter 2">
-            <a:extLst>
-              <a:ext uri="{FF2B5EF4-FFF2-40B4-BE49-F238E27FC236}">
-                <a16:creationId xmlns:a16="http://schemas.microsoft.com/office/drawing/2014/main" id="{AD876B9F-EBF9-6B58-689C-B4563742082D}"/>
-              </a:ext>
-            </a:extLst>
-          </p:cNvPr>
-          <p:cNvSpPr>
-            <a:spLocks noGrp="1"/>
-          </p:cNvSpPr>
-          <p:nvPr>
-            <p:ph idx="1"/>
-          </p:nvPr>
-        </p:nvSpPr>
-        <p:spPr/>
-        <p:txBody>
-          <a:bodyPr/>
-          <a:lstStyle/>
-          <a:p>
-            <a:r>
-              <a:rPr lang="de-DE" dirty="0"/>
-              <a:t>Response </a:t>
+              <a:t>Gain</a:t>
+            </a:r>
+            <a:r>
+              <a:rPr lang="de-DE" dirty="0"/>
+              <a:t> and </a:t>
             </a:r>
             <a:r>
               <a:rPr lang="de-DE" dirty="0" err="1"/>
-              <a:t>to</a:t>
-            </a:r>
-            <a:r>
-              <a:rPr lang="de-DE" dirty="0"/>
-              <a:t> </a:t>
-            </a:r>
-            <a:r>
-              <a:rPr lang="de-DE" dirty="0" err="1"/>
-              <a:t>reference</a:t>
-            </a:r>
-            <a:r>
-              <a:rPr lang="de-DE" dirty="0"/>
-              <a:t> </a:t>
-            </a:r>
-            <a:r>
-              <a:rPr lang="de-DE" dirty="0" err="1"/>
-              <a:t>changes</a:t>
+              <a:t>Stability</a:t>
             </a:r>
             <a:endParaRPr lang="de-DE" dirty="0"/>
           </a:p>
-          <a:p>
-            <a:r>
-              <a:rPr lang="de-DE" dirty="0"/>
-              <a:t>Focus on </a:t>
-            </a:r>
-            <a:r>
-              <a:rPr lang="de-DE" dirty="0" err="1"/>
-              <a:t>speed</a:t>
-            </a:r>
-            <a:r>
-              <a:rPr lang="de-DE" dirty="0"/>
-              <a:t> and </a:t>
-            </a:r>
-            <a:r>
-              <a:rPr lang="de-DE" dirty="0" err="1"/>
-              <a:t>accuracy</a:t>
-            </a:r>
-            <a:endParaRPr lang="de-DE" dirty="0"/>
-          </a:p>
-        </p:txBody>
-      </p:sp>
+        </p:txBody>
+      </p:sp>
+      <mc:AlternateContent xmlns:mc="http://schemas.openxmlformats.org/markup-compatibility/2006">
+        <mc:Choice xmlns:a14="http://schemas.microsoft.com/office/drawing/2010/main" Requires="a14">
+          <p:sp>
+            <p:nvSpPr>
+              <p:cNvPr id="3" name="Inhaltsplatzhalter 2">
+                <a:extLst>
+                  <a:ext uri="{FF2B5EF4-FFF2-40B4-BE49-F238E27FC236}">
+                    <a16:creationId xmlns:a16="http://schemas.microsoft.com/office/drawing/2014/main" id="{B2B87842-FB36-845C-0596-5027C3217463}"/>
+                  </a:ext>
+                </a:extLst>
+              </p:cNvPr>
+              <p:cNvSpPr>
+                <a:spLocks noGrp="1"/>
+              </p:cNvSpPr>
+              <p:nvPr>
+                <p:ph idx="1"/>
+              </p:nvPr>
+            </p:nvSpPr>
+            <p:spPr/>
+            <p:txBody>
+              <a:bodyPr>
+                <a:normAutofit/>
+              </a:bodyPr>
+              <a:lstStyle/>
+              <a:p>
+                <a:pPr marL="0" indent="0">
+                  <a:buNone/>
+                </a:pPr>
+                <a:r>
+                  <a:rPr lang="de-DE" sz="2400" dirty="0" err="1"/>
+                  <a:t>For</a:t>
+                </a:r>
+                <a:r>
+                  <a:rPr lang="de-DE" sz="2400" dirty="0"/>
+                  <a:t> plant </a:t>
+                </a:r>
+                <a14:m>
+                  <m:oMath xmlns:m="http://schemas.openxmlformats.org/officeDocument/2006/math">
+                    <m:r>
+                      <a:rPr lang="de-DE" sz="2400" b="0" i="1" smtClean="0">
+                        <a:latin typeface="Cambria Math" panose="02040503050406030204" pitchFamily="18" charset="0"/>
+                      </a:rPr>
+                      <m:t>𝐺</m:t>
+                    </m:r>
+                    <m:r>
+                      <a:rPr lang="de-DE" sz="2400" b="0" i="1" smtClean="0">
+                        <a:latin typeface="Cambria Math" panose="02040503050406030204" pitchFamily="18" charset="0"/>
+                      </a:rPr>
+                      <m:t>(</m:t>
+                    </m:r>
+                    <m:r>
+                      <a:rPr lang="de-DE" sz="2400" b="0" i="1" smtClean="0">
+                        <a:latin typeface="Cambria Math" panose="02040503050406030204" pitchFamily="18" charset="0"/>
+                      </a:rPr>
+                      <m:t>𝑠</m:t>
+                    </m:r>
+                    <m:r>
+                      <a:rPr lang="de-DE" sz="2400" b="0" i="1" smtClean="0">
+                        <a:latin typeface="Cambria Math" panose="02040503050406030204" pitchFamily="18" charset="0"/>
+                      </a:rPr>
+                      <m:t>)</m:t>
+                    </m:r>
+                  </m:oMath>
+                </a14:m>
+                <a:r>
+                  <a:rPr lang="de-DE" sz="2400" dirty="0"/>
+                  <a:t> and </a:t>
+                </a:r>
+                <a:r>
+                  <a:rPr lang="de-DE" sz="2400" dirty="0" err="1"/>
+                  <a:t>controller</a:t>
+                </a:r>
+                <a:r>
+                  <a:rPr lang="de-DE" sz="2400" dirty="0"/>
+                  <a:t> </a:t>
+                </a:r>
+                <a14:m>
+                  <m:oMath xmlns:m="http://schemas.openxmlformats.org/officeDocument/2006/math">
+                    <m:r>
+                      <a:rPr lang="de-DE" sz="2400" b="0" i="1" smtClean="0">
+                        <a:latin typeface="Cambria Math" panose="02040503050406030204" pitchFamily="18" charset="0"/>
+                      </a:rPr>
+                      <m:t>𝐶</m:t>
+                    </m:r>
+                    <m:r>
+                      <a:rPr lang="de-DE" sz="2400" b="0" i="1" smtClean="0">
+                        <a:latin typeface="Cambria Math" panose="02040503050406030204" pitchFamily="18" charset="0"/>
+                      </a:rPr>
+                      <m:t>(</m:t>
+                    </m:r>
+                    <m:r>
+                      <a:rPr lang="de-DE" sz="2400" b="0" i="1" smtClean="0">
+                        <a:latin typeface="Cambria Math" panose="02040503050406030204" pitchFamily="18" charset="0"/>
+                      </a:rPr>
+                      <m:t>𝑠</m:t>
+                    </m:r>
+                    <m:r>
+                      <a:rPr lang="de-DE" sz="2400" b="0" i="1" smtClean="0">
+                        <a:latin typeface="Cambria Math" panose="02040503050406030204" pitchFamily="18" charset="0"/>
+                      </a:rPr>
+                      <m:t>)</m:t>
+                    </m:r>
+                  </m:oMath>
+                </a14:m>
+                <a:r>
+                  <a:rPr lang="de-DE" sz="2400" dirty="0"/>
+                  <a:t>, loop </a:t>
+                </a:r>
+                <a:r>
+                  <a:rPr lang="de-DE" sz="2400" dirty="0" err="1"/>
+                  <a:t>transfer</a:t>
+                </a:r>
+                <a:r>
+                  <a:rPr lang="de-DE" sz="2400" dirty="0"/>
+                  <a:t> </a:t>
+                </a:r>
+                <a:r>
+                  <a:rPr lang="de-DE" sz="2400" dirty="0" err="1"/>
+                  <a:t>function</a:t>
+                </a:r>
+                <a:r>
+                  <a:rPr lang="de-DE" sz="2400" dirty="0"/>
+                  <a:t> </a:t>
+                </a:r>
+                <a14:m>
+                  <m:oMath xmlns:m="http://schemas.openxmlformats.org/officeDocument/2006/math">
+                    <m:r>
+                      <a:rPr lang="de-DE" sz="2400" b="0" i="1" smtClean="0">
+                        <a:latin typeface="Cambria Math" panose="02040503050406030204" pitchFamily="18" charset="0"/>
+                      </a:rPr>
+                      <m:t>𝐿</m:t>
+                    </m:r>
+                    <m:d>
+                      <m:dPr>
+                        <m:ctrlPr>
+                          <a:rPr lang="de-DE" sz="2400" b="0" i="1" smtClean="0">
+                            <a:latin typeface="Cambria Math" panose="02040503050406030204" pitchFamily="18" charset="0"/>
+                          </a:rPr>
+                        </m:ctrlPr>
+                      </m:dPr>
+                      <m:e>
+                        <m:r>
+                          <a:rPr lang="de-DE" sz="2400" b="0" i="1" smtClean="0">
+                            <a:latin typeface="Cambria Math" panose="02040503050406030204" pitchFamily="18" charset="0"/>
+                          </a:rPr>
+                          <m:t>𝑠</m:t>
+                        </m:r>
+                      </m:e>
+                    </m:d>
+                    <m:r>
+                      <a:rPr lang="de-DE" sz="2400" b="0" i="1" smtClean="0">
+                        <a:latin typeface="Cambria Math" panose="02040503050406030204" pitchFamily="18" charset="0"/>
+                      </a:rPr>
+                      <m:t>=</m:t>
+                    </m:r>
+                    <m:r>
+                      <a:rPr lang="de-DE" sz="2400" b="0" i="1" smtClean="0">
+                        <a:latin typeface="Cambria Math" panose="02040503050406030204" pitchFamily="18" charset="0"/>
+                      </a:rPr>
+                      <m:t>𝐶</m:t>
+                    </m:r>
+                    <m:d>
+                      <m:dPr>
+                        <m:ctrlPr>
+                          <a:rPr lang="de-DE" sz="2400" b="0" i="1" smtClean="0">
+                            <a:latin typeface="Cambria Math" panose="02040503050406030204" pitchFamily="18" charset="0"/>
+                          </a:rPr>
+                        </m:ctrlPr>
+                      </m:dPr>
+                      <m:e>
+                        <m:r>
+                          <a:rPr lang="de-DE" sz="2400" b="0" i="1" smtClean="0">
+                            <a:latin typeface="Cambria Math" panose="02040503050406030204" pitchFamily="18" charset="0"/>
+                          </a:rPr>
+                          <m:t>𝑠</m:t>
+                        </m:r>
+                      </m:e>
+                    </m:d>
+                    <m:r>
+                      <a:rPr lang="de-DE" sz="2400" b="0" i="1" smtClean="0">
+                        <a:latin typeface="Cambria Math" panose="02040503050406030204" pitchFamily="18" charset="0"/>
+                      </a:rPr>
+                      <m:t>𝐺</m:t>
+                    </m:r>
+                    <m:r>
+                      <a:rPr lang="de-DE" sz="2400" b="0" i="1" smtClean="0">
+                        <a:latin typeface="Cambria Math" panose="02040503050406030204" pitchFamily="18" charset="0"/>
+                      </a:rPr>
+                      <m:t>(</m:t>
+                    </m:r>
+                    <m:r>
+                      <a:rPr lang="de-DE" sz="2400" b="0" i="1" smtClean="0">
+                        <a:latin typeface="Cambria Math" panose="02040503050406030204" pitchFamily="18" charset="0"/>
+                      </a:rPr>
+                      <m:t>𝑠</m:t>
+                    </m:r>
+                    <m:r>
+                      <a:rPr lang="de-DE" sz="2400" b="0" i="1" smtClean="0">
+                        <a:latin typeface="Cambria Math" panose="02040503050406030204" pitchFamily="18" charset="0"/>
+                      </a:rPr>
+                      <m:t>)</m:t>
+                    </m:r>
+                  </m:oMath>
+                </a14:m>
+                <a:endParaRPr lang="de-DE" sz="2400" dirty="0"/>
+              </a:p>
+              <a:p>
+                <a:pPr marL="0" indent="0">
+                  <a:buNone/>
+                </a:pPr>
+                <a:r>
+                  <a:rPr lang="de-DE" sz="2400" dirty="0" err="1"/>
+                  <a:t>Closed</a:t>
+                </a:r>
+                <a:r>
+                  <a:rPr lang="de-DE" sz="2400" dirty="0"/>
+                  <a:t>-loop </a:t>
+                </a:r>
+                <a:r>
+                  <a:rPr lang="de-DE" sz="2400" dirty="0" err="1"/>
+                  <a:t>transfer</a:t>
+                </a:r>
+                <a:r>
+                  <a:rPr lang="de-DE" sz="2400" dirty="0"/>
+                  <a:t> </a:t>
+                </a:r>
+                <a:r>
+                  <a:rPr lang="de-DE" sz="2400" dirty="0" err="1"/>
+                  <a:t>function</a:t>
+                </a:r>
+                <a:r>
+                  <a:rPr lang="de-DE" sz="2400" dirty="0"/>
+                  <a:t>	</a:t>
+                </a:r>
+                <a14:m>
+                  <m:oMath xmlns:m="http://schemas.openxmlformats.org/officeDocument/2006/math">
+                    <m:r>
+                      <a:rPr lang="de-DE" sz="2400" b="0" i="1" smtClean="0">
+                        <a:latin typeface="Cambria Math" panose="02040503050406030204" pitchFamily="18" charset="0"/>
+                      </a:rPr>
+                      <m:t>𝑇</m:t>
+                    </m:r>
+                    <m:d>
+                      <m:dPr>
+                        <m:ctrlPr>
+                          <a:rPr lang="de-DE" sz="2400" b="0" i="1" smtClean="0">
+                            <a:latin typeface="Cambria Math" panose="02040503050406030204" pitchFamily="18" charset="0"/>
+                          </a:rPr>
+                        </m:ctrlPr>
+                      </m:dPr>
+                      <m:e>
+                        <m:r>
+                          <a:rPr lang="de-DE" sz="2400" b="0" i="1" smtClean="0">
+                            <a:latin typeface="Cambria Math" panose="02040503050406030204" pitchFamily="18" charset="0"/>
+                          </a:rPr>
+                          <m:t>𝑠</m:t>
+                        </m:r>
+                      </m:e>
+                    </m:d>
+                    <m:r>
+                      <a:rPr lang="de-DE" sz="2400" b="0" i="1" smtClean="0">
+                        <a:latin typeface="Cambria Math" panose="02040503050406030204" pitchFamily="18" charset="0"/>
+                      </a:rPr>
+                      <m:t>=</m:t>
+                    </m:r>
+                    <m:f>
+                      <m:fPr>
+                        <m:ctrlPr>
+                          <a:rPr lang="de-DE" sz="2400" b="0" i="1" smtClean="0">
+                            <a:latin typeface="Cambria Math" panose="02040503050406030204" pitchFamily="18" charset="0"/>
+                          </a:rPr>
+                        </m:ctrlPr>
+                      </m:fPr>
+                      <m:num>
+                        <m:r>
+                          <a:rPr lang="de-DE" sz="2400" b="0" i="1" smtClean="0">
+                            <a:latin typeface="Cambria Math" panose="02040503050406030204" pitchFamily="18" charset="0"/>
+                          </a:rPr>
+                          <m:t>𝐿</m:t>
+                        </m:r>
+                        <m:r>
+                          <a:rPr lang="de-DE" sz="2400" b="0" i="1" smtClean="0">
+                            <a:latin typeface="Cambria Math" panose="02040503050406030204" pitchFamily="18" charset="0"/>
+                          </a:rPr>
+                          <m:t>(</m:t>
+                        </m:r>
+                        <m:r>
+                          <a:rPr lang="de-DE" sz="2400" b="0" i="1" smtClean="0">
+                            <a:latin typeface="Cambria Math" panose="02040503050406030204" pitchFamily="18" charset="0"/>
+                          </a:rPr>
+                          <m:t>𝑠</m:t>
+                        </m:r>
+                        <m:r>
+                          <a:rPr lang="de-DE" sz="2400" b="0" i="1" smtClean="0">
+                            <a:latin typeface="Cambria Math" panose="02040503050406030204" pitchFamily="18" charset="0"/>
+                          </a:rPr>
+                          <m:t>)</m:t>
+                        </m:r>
+                      </m:num>
+                      <m:den>
+                        <m:r>
+                          <a:rPr lang="de-DE" sz="2400" b="0" i="1" smtClean="0">
+                            <a:latin typeface="Cambria Math" panose="02040503050406030204" pitchFamily="18" charset="0"/>
+                          </a:rPr>
+                          <m:t>1+</m:t>
+                        </m:r>
+                        <m:r>
+                          <a:rPr lang="de-DE" sz="2400" b="0" i="1" smtClean="0">
+                            <a:latin typeface="Cambria Math" panose="02040503050406030204" pitchFamily="18" charset="0"/>
+                          </a:rPr>
+                          <m:t>𝐿</m:t>
+                        </m:r>
+                        <m:r>
+                          <a:rPr lang="de-DE" sz="2400" b="0" i="1" smtClean="0">
+                            <a:latin typeface="Cambria Math" panose="02040503050406030204" pitchFamily="18" charset="0"/>
+                          </a:rPr>
+                          <m:t>(</m:t>
+                        </m:r>
+                        <m:r>
+                          <a:rPr lang="de-DE" sz="2400" b="0" i="1" smtClean="0">
+                            <a:latin typeface="Cambria Math" panose="02040503050406030204" pitchFamily="18" charset="0"/>
+                          </a:rPr>
+                          <m:t>𝑠</m:t>
+                        </m:r>
+                        <m:r>
+                          <a:rPr lang="de-DE" sz="2400" b="0" i="1" smtClean="0">
+                            <a:latin typeface="Cambria Math" panose="02040503050406030204" pitchFamily="18" charset="0"/>
+                          </a:rPr>
+                          <m:t>)</m:t>
+                        </m:r>
+                      </m:den>
+                    </m:f>
+                  </m:oMath>
+                </a14:m>
+                <a:endParaRPr lang="de-DE" sz="2400" dirty="0"/>
+              </a:p>
+              <a:p>
+                <a:pPr marL="0" indent="0">
+                  <a:buNone/>
+                </a:pPr>
+                <a:r>
+                  <a:rPr lang="de-DE" sz="2400" dirty="0" err="1"/>
+                  <a:t>Stability</a:t>
+                </a:r>
+                <a:r>
+                  <a:rPr lang="de-DE" sz="2400" dirty="0"/>
+                  <a:t> </a:t>
+                </a:r>
+                <a:r>
+                  <a:rPr lang="de-DE" sz="2400" dirty="0" err="1"/>
+                  <a:t>depends</a:t>
+                </a:r>
+                <a:r>
+                  <a:rPr lang="de-DE" sz="2400" dirty="0"/>
+                  <a:t> on </a:t>
+                </a:r>
+                <a:r>
+                  <a:rPr lang="de-DE" sz="2400" dirty="0" err="1"/>
+                  <a:t>roots</a:t>
+                </a:r>
+                <a:r>
+                  <a:rPr lang="de-DE" sz="2400" dirty="0"/>
+                  <a:t> </a:t>
+                </a:r>
+                <a:r>
+                  <a:rPr lang="de-DE" sz="2400" dirty="0" err="1"/>
+                  <a:t>of</a:t>
+                </a:r>
+                <a:r>
+                  <a:rPr lang="de-DE" sz="2400" dirty="0"/>
+                  <a:t>	</a:t>
+                </a:r>
+                <a14:m>
+                  <m:oMath xmlns:m="http://schemas.openxmlformats.org/officeDocument/2006/math">
+                    <m:r>
+                      <a:rPr lang="de-DE" sz="2400" i="1">
+                        <a:latin typeface="Cambria Math" panose="02040503050406030204" pitchFamily="18" charset="0"/>
+                      </a:rPr>
+                      <m:t>1+</m:t>
+                    </m:r>
+                    <m:r>
+                      <a:rPr lang="de-DE" sz="2400" i="1">
+                        <a:latin typeface="Cambria Math" panose="02040503050406030204" pitchFamily="18" charset="0"/>
+                      </a:rPr>
+                      <m:t>𝐿</m:t>
+                    </m:r>
+                    <m:d>
+                      <m:dPr>
+                        <m:ctrlPr>
+                          <a:rPr lang="de-DE" sz="2400" i="1">
+                            <a:latin typeface="Cambria Math" panose="02040503050406030204" pitchFamily="18" charset="0"/>
+                          </a:rPr>
+                        </m:ctrlPr>
+                      </m:dPr>
+                      <m:e>
+                        <m:r>
+                          <a:rPr lang="de-DE" sz="2400" i="1">
+                            <a:latin typeface="Cambria Math" panose="02040503050406030204" pitchFamily="18" charset="0"/>
+                          </a:rPr>
+                          <m:t>𝑠</m:t>
+                        </m:r>
+                      </m:e>
+                    </m:d>
+                    <m:r>
+                      <a:rPr lang="de-DE" sz="2400" b="0" i="1" smtClean="0">
+                        <a:latin typeface="Cambria Math" panose="02040503050406030204" pitchFamily="18" charset="0"/>
+                      </a:rPr>
+                      <m:t>=0</m:t>
+                    </m:r>
+                  </m:oMath>
+                </a14:m>
+                <a:endParaRPr lang="de-DE" sz="2400" dirty="0"/>
+              </a:p>
+              <a:p>
+                <a:pPr marL="0" indent="0">
+                  <a:buNone/>
+                </a:pPr>
+                <a:endParaRPr lang="de-DE" sz="2400" dirty="0"/>
+              </a:p>
+              <a:p>
+                <a:pPr marL="0" indent="0">
+                  <a:buNone/>
+                </a:pPr>
+                <a:r>
+                  <a:rPr lang="de-DE" sz="2400" dirty="0"/>
+                  <a:t>Key </a:t>
+                </a:r>
+                <a:r>
+                  <a:rPr lang="de-DE" sz="2400" dirty="0" err="1"/>
+                  <a:t>ideas</a:t>
+                </a:r>
+                <a:r>
+                  <a:rPr lang="de-DE" sz="2400" dirty="0"/>
+                  <a:t>:</a:t>
+                </a:r>
+              </a:p>
+              <a:p>
+                <a:r>
+                  <a:rPr lang="de-DE" sz="2400" dirty="0"/>
+                  <a:t>High loop </a:t>
+                </a:r>
+                <a:r>
+                  <a:rPr lang="de-DE" sz="2400" dirty="0" err="1"/>
+                  <a:t>gain</a:t>
+                </a:r>
+                <a:r>
+                  <a:rPr lang="de-DE" sz="2400" dirty="0"/>
+                  <a:t> at </a:t>
+                </a:r>
+                <a:r>
+                  <a:rPr lang="de-DE" sz="2400" dirty="0" err="1"/>
+                  <a:t>low</a:t>
+                </a:r>
+                <a:r>
+                  <a:rPr lang="de-DE" sz="2400" dirty="0"/>
+                  <a:t> </a:t>
+                </a:r>
+                <a:r>
+                  <a:rPr lang="de-DE" sz="2400" dirty="0" err="1"/>
+                  <a:t>frequency</a:t>
+                </a:r>
+                <a:r>
+                  <a:rPr lang="de-DE" sz="2400" dirty="0"/>
+                  <a:t> </a:t>
+                </a:r>
+                <a:r>
+                  <a:rPr lang="de-DE" sz="2400" dirty="0">
+                    <a:sym typeface="Wingdings" pitchFamily="2" charset="2"/>
+                  </a:rPr>
+                  <a:t> </a:t>
+                </a:r>
+                <a:r>
+                  <a:rPr lang="de-DE" sz="2400" dirty="0" err="1"/>
+                  <a:t>good</a:t>
+                </a:r>
+                <a:r>
+                  <a:rPr lang="de-DE" sz="2400" dirty="0"/>
+                  <a:t> </a:t>
+                </a:r>
+                <a:r>
+                  <a:rPr lang="de-DE" sz="2400" dirty="0" err="1"/>
+                  <a:t>tracking</a:t>
+                </a:r>
+                <a:r>
+                  <a:rPr lang="de-DE" sz="2400" dirty="0"/>
+                  <a:t> &amp; </a:t>
+                </a:r>
+                <a:r>
+                  <a:rPr lang="de-DE" sz="2400" dirty="0" err="1"/>
+                  <a:t>disturbance</a:t>
+                </a:r>
+                <a:r>
+                  <a:rPr lang="de-DE" sz="2400" dirty="0"/>
+                  <a:t> </a:t>
+                </a:r>
+                <a:r>
+                  <a:rPr lang="de-DE" sz="2400" dirty="0" err="1"/>
+                  <a:t>rejection</a:t>
+                </a:r>
+                <a:endParaRPr lang="de-DE" sz="2400" dirty="0"/>
+              </a:p>
+              <a:p>
+                <a:r>
+                  <a:rPr lang="de-DE" sz="2400" dirty="0"/>
+                  <a:t>Low loop </a:t>
+                </a:r>
+                <a:r>
+                  <a:rPr lang="de-DE" sz="2400" dirty="0" err="1"/>
+                  <a:t>gain</a:t>
+                </a:r>
+                <a:r>
+                  <a:rPr lang="de-DE" sz="2400" dirty="0"/>
+                  <a:t> at high </a:t>
+                </a:r>
+                <a:r>
+                  <a:rPr lang="de-DE" sz="2400" dirty="0" err="1"/>
+                  <a:t>frequency</a:t>
+                </a:r>
+                <a:r>
+                  <a:rPr lang="de-DE" sz="2400" dirty="0"/>
+                  <a:t> </a:t>
+                </a:r>
+                <a:r>
+                  <a:rPr lang="de-DE" sz="2400" dirty="0">
+                    <a:sym typeface="Wingdings" pitchFamily="2" charset="2"/>
+                  </a:rPr>
+                  <a:t> </a:t>
+                </a:r>
+                <a:r>
+                  <a:rPr lang="de-DE" sz="2400" dirty="0" err="1"/>
+                  <a:t>noise</a:t>
+                </a:r>
+                <a:r>
+                  <a:rPr lang="de-DE" sz="2400" dirty="0"/>
+                  <a:t> </a:t>
+                </a:r>
+                <a:r>
+                  <a:rPr lang="de-DE" sz="2400" dirty="0" err="1"/>
+                  <a:t>attenuation</a:t>
+                </a:r>
+                <a:r>
+                  <a:rPr lang="de-DE" sz="2400" dirty="0"/>
+                  <a:t> &amp; </a:t>
+                </a:r>
+                <a:r>
+                  <a:rPr lang="de-DE" sz="2400" dirty="0" err="1"/>
+                  <a:t>robustness</a:t>
+                </a:r>
+                <a:endParaRPr lang="de-DE" sz="2400" dirty="0"/>
+              </a:p>
+              <a:p>
+                <a:pPr marL="0" indent="0">
+                  <a:buNone/>
+                </a:pPr>
+                <a:endParaRPr lang="de-DE" sz="2400" dirty="0"/>
+              </a:p>
+              <a:p>
+                <a:pPr marL="0" indent="0">
+                  <a:buNone/>
+                </a:pPr>
+                <a:r>
+                  <a:rPr lang="de-DE" sz="2400" dirty="0"/>
+                  <a:t>Tools: </a:t>
+                </a:r>
+                <a:r>
+                  <a:rPr lang="de-DE" sz="2400" dirty="0" err="1"/>
+                  <a:t>Nyquist</a:t>
+                </a:r>
+                <a:r>
+                  <a:rPr lang="de-DE" sz="2400" dirty="0"/>
+                  <a:t> </a:t>
+                </a:r>
+                <a:r>
+                  <a:rPr lang="de-DE" sz="2400" dirty="0" err="1"/>
+                  <a:t>criterion</a:t>
+                </a:r>
+                <a:r>
+                  <a:rPr lang="de-DE" sz="2400" dirty="0"/>
+                  <a:t>, Bode </a:t>
+                </a:r>
+                <a:r>
+                  <a:rPr lang="de-DE" sz="2400" dirty="0" err="1"/>
+                  <a:t>plots</a:t>
+                </a:r>
+                <a:r>
+                  <a:rPr lang="de-DE" sz="2400" dirty="0"/>
+                  <a:t>, root </a:t>
+                </a:r>
+                <a:r>
+                  <a:rPr lang="de-DE" sz="2400" dirty="0" err="1"/>
+                  <a:t>locus</a:t>
+                </a:r>
+                <a:endParaRPr lang="de-DE" sz="2400" dirty="0"/>
+              </a:p>
+            </p:txBody>
+          </p:sp>
+        </mc:Choice>
+        <mc:Fallback>
+          <p:sp>
+            <p:nvSpPr>
+              <p:cNvPr id="3" name="Inhaltsplatzhalter 2">
+                <a:extLst>
+                  <a:ext uri="{FF2B5EF4-FFF2-40B4-BE49-F238E27FC236}">
+                    <a16:creationId xmlns:a16="http://schemas.microsoft.com/office/drawing/2014/main" id="{B2B87842-FB36-845C-0596-5027C3217463}"/>
+                  </a:ext>
+                </a:extLst>
+              </p:cNvPr>
+              <p:cNvSpPr>
+                <a:spLocks noGrp="1" noRot="1" noChangeAspect="1" noMove="1" noResize="1" noEditPoints="1" noAdjustHandles="1" noChangeArrowheads="1" noChangeShapeType="1" noTextEdit="1"/>
+              </p:cNvSpPr>
+              <p:nvPr>
+                <p:ph idx="1"/>
+              </p:nvPr>
+            </p:nvSpPr>
+            <p:spPr>
+              <a:blipFill>
+                <a:blip r:embed="rId2"/>
+                <a:stretch>
+                  <a:fillRect l="-965" t="-2035" b="-1453"/>
+                </a:stretch>
+              </a:blipFill>
+            </p:spPr>
+            <p:txBody>
+              <a:bodyPr/>
+              <a:lstStyle/>
+              <a:p>
+                <a:r>
+                  <a:rPr lang="de-DE">
+                    <a:noFill/>
+                  </a:rPr>
+                  <a:t> </a:t>
+                </a:r>
+              </a:p>
+            </p:txBody>
+          </p:sp>
+        </mc:Fallback>
+      </mc:AlternateContent>
       <p:sp>
         <p:nvSpPr>
           <p:cNvPr id="4" name="Foliennummernplatzhalter 3">
             <a:extLst>
               <a:ext uri="{FF2B5EF4-FFF2-40B4-BE49-F238E27FC236}">
-                <a16:creationId xmlns:a16="http://schemas.microsoft.com/office/drawing/2014/main" id="{A5175CAB-F6C3-5C88-A058-0446BBC5CD75}"/>
+                <a16:creationId xmlns:a16="http://schemas.microsoft.com/office/drawing/2014/main" id="{7ED1A67B-3F8F-BB68-573C-78CF7281ADD3}"/>
               </a:ext>
             </a:extLst>
           </p:cNvPr>
@@ -5764,7 +7507,7 @@
     </p:spTree>
     <p:extLst>
       <p:ext uri="{BB962C8B-B14F-4D97-AF65-F5344CB8AC3E}">
-        <p14:creationId xmlns:p14="http://schemas.microsoft.com/office/powerpoint/2010/main" val="4274022864"/>
+        <p14:creationId xmlns:p14="http://schemas.microsoft.com/office/powerpoint/2010/main" val="74713255"/>
       </p:ext>
     </p:extLst>
   </p:cSld>
@@ -5796,7 +7539,7 @@
           <p:cNvPr id="2" name="Titel 1">
             <a:extLst>
               <a:ext uri="{FF2B5EF4-FFF2-40B4-BE49-F238E27FC236}">
-                <a16:creationId xmlns:a16="http://schemas.microsoft.com/office/drawing/2014/main" id="{A75D6CDA-5613-13B6-A12F-F964112C8BA1}"/>
+                <a16:creationId xmlns:a16="http://schemas.microsoft.com/office/drawing/2014/main" id="{49A8D9A9-2948-F823-898A-818D2787EE1D}"/>
               </a:ext>
             </a:extLst>
           </p:cNvPr>
@@ -5813,16 +7556,12 @@
           <a:lstStyle/>
           <a:p>
             <a:r>
+              <a:rPr lang="de-DE" dirty="0"/>
+              <a:t>Root </a:t>
+            </a:r>
+            <a:r>
               <a:rPr lang="de-DE" dirty="0" err="1"/>
-              <a:t>Disturbance</a:t>
-            </a:r>
-            <a:r>
-              <a:rPr lang="de-DE" dirty="0"/>
-              <a:t> </a:t>
-            </a:r>
-            <a:r>
-              <a:rPr lang="de-DE" dirty="0" err="1"/>
-              <a:t>Rejection</a:t>
+              <a:t>locus</a:t>
             </a:r>
             <a:endParaRPr lang="de-DE" dirty="0"/>
           </a:p>
@@ -5833,7 +7572,7 @@
           <p:cNvPr id="3" name="Inhaltsplatzhalter 2">
             <a:extLst>
               <a:ext uri="{FF2B5EF4-FFF2-40B4-BE49-F238E27FC236}">
-                <a16:creationId xmlns:a16="http://schemas.microsoft.com/office/drawing/2014/main" id="{BA988EF8-7026-5678-C939-1A00A4DDA123}"/>
+                <a16:creationId xmlns:a16="http://schemas.microsoft.com/office/drawing/2014/main" id="{F2AC5237-6BE6-8EF9-4CF2-8840AE86E957}"/>
               </a:ext>
             </a:extLst>
           </p:cNvPr>
@@ -5849,62 +7588,7 @@
           <a:bodyPr/>
           <a:lstStyle/>
           <a:p>
-            <a:r>
-              <a:rPr lang="de-DE" dirty="0"/>
-              <a:t>Response </a:t>
-            </a:r>
-            <a:r>
-              <a:rPr lang="de-DE" dirty="0" err="1"/>
-              <a:t>to</a:t>
-            </a:r>
-            <a:r>
-              <a:rPr lang="de-DE" dirty="0"/>
-              <a:t> external </a:t>
-            </a:r>
-            <a:r>
-              <a:rPr lang="de-DE" dirty="0" err="1"/>
-              <a:t>disturbances</a:t>
-            </a:r>
-            <a:endParaRPr lang="de-DE" dirty="0"/>
-          </a:p>
-          <a:p>
-            <a:r>
-              <a:rPr lang="de-DE" dirty="0" err="1"/>
-              <a:t>Often</a:t>
-            </a:r>
-            <a:r>
-              <a:rPr lang="de-DE" dirty="0"/>
-              <a:t> </a:t>
-            </a:r>
-            <a:r>
-              <a:rPr lang="de-DE" dirty="0" err="1"/>
-              <a:t>conflicting</a:t>
-            </a:r>
-            <a:r>
-              <a:rPr lang="de-DE" dirty="0"/>
-              <a:t> </a:t>
-            </a:r>
-            <a:r>
-              <a:rPr lang="de-DE" dirty="0" err="1"/>
-              <a:t>with</a:t>
-            </a:r>
-            <a:r>
-              <a:rPr lang="de-DE" dirty="0"/>
-              <a:t> </a:t>
-            </a:r>
-            <a:r>
-              <a:rPr lang="de-DE" dirty="0" err="1"/>
-              <a:t>tracking</a:t>
-            </a:r>
-            <a:r>
-              <a:rPr lang="de-DE" dirty="0"/>
-              <a:t> </a:t>
-            </a:r>
-            <a:r>
-              <a:rPr lang="de-DE" dirty="0" err="1"/>
-              <a:t>performance</a:t>
-            </a:r>
-            <a:endParaRPr lang="de-DE" dirty="0"/>
+            <a:endParaRPr lang="de-DE"/>
           </a:p>
         </p:txBody>
       </p:sp>
@@ -5913,7 +7597,7 @@
           <p:cNvPr id="4" name="Foliennummernplatzhalter 3">
             <a:extLst>
               <a:ext uri="{FF2B5EF4-FFF2-40B4-BE49-F238E27FC236}">
-                <a16:creationId xmlns:a16="http://schemas.microsoft.com/office/drawing/2014/main" id="{CC235B7E-4A8E-FB18-44F1-A35F4584B713}"/>
+                <a16:creationId xmlns:a16="http://schemas.microsoft.com/office/drawing/2014/main" id="{D9E59EA8-C286-2451-D41E-CD3CEA13F460}"/>
               </a:ext>
             </a:extLst>
           </p:cNvPr>
@@ -5940,7 +7624,7 @@
     </p:spTree>
     <p:extLst>
       <p:ext uri="{BB962C8B-B14F-4D97-AF65-F5344CB8AC3E}">
-        <p14:creationId xmlns:p14="http://schemas.microsoft.com/office/powerpoint/2010/main" val="1626405074"/>
+        <p14:creationId xmlns:p14="http://schemas.microsoft.com/office/powerpoint/2010/main" val="3420749753"/>
       </p:ext>
     </p:extLst>
   </p:cSld>
@@ -5972,7 +7656,7 @@
           <p:cNvPr id="2" name="Titel 1">
             <a:extLst>
               <a:ext uri="{FF2B5EF4-FFF2-40B4-BE49-F238E27FC236}">
-                <a16:creationId xmlns:a16="http://schemas.microsoft.com/office/drawing/2014/main" id="{21E29E56-0FF9-E0B7-3138-7B1645C6FCAD}"/>
+                <a16:creationId xmlns:a16="http://schemas.microsoft.com/office/drawing/2014/main" id="{EAA7AA7F-0AD3-029A-CD2C-81DECBA4206C}"/>
               </a:ext>
             </a:extLst>
           </p:cNvPr>
@@ -5989,94 +7673,453 @@
           <a:lstStyle/>
           <a:p>
             <a:r>
-              <a:rPr lang="de-DE" dirty="0"/>
-              <a:t>PID Tuning</a:t>
-            </a:r>
-          </a:p>
-        </p:txBody>
-      </p:sp>
-      <p:sp>
-        <p:nvSpPr>
-          <p:cNvPr id="3" name="Inhaltsplatzhalter 2">
-            <a:extLst>
-              <a:ext uri="{FF2B5EF4-FFF2-40B4-BE49-F238E27FC236}">
-                <a16:creationId xmlns:a16="http://schemas.microsoft.com/office/drawing/2014/main" id="{961B2717-D9C9-04E4-EF9E-1E5F96C465D0}"/>
-              </a:ext>
-            </a:extLst>
-          </p:cNvPr>
-          <p:cNvSpPr>
-            <a:spLocks noGrp="1"/>
-          </p:cNvSpPr>
-          <p:nvPr>
-            <p:ph idx="1"/>
-          </p:nvPr>
-        </p:nvSpPr>
-        <p:spPr/>
-        <p:txBody>
-          <a:bodyPr/>
-          <a:lstStyle/>
-          <a:p>
-            <a:r>
               <a:rPr lang="de-DE" dirty="0" err="1"/>
-              <a:t>Choose</a:t>
-            </a:r>
-            <a:r>
-              <a:rPr lang="de-DE" dirty="0"/>
-              <a:t> </a:t>
-            </a:r>
-            <a:r>
-              <a:rPr lang="de-DE" dirty="0" err="1"/>
-              <a:t>controller</a:t>
-            </a:r>
-            <a:r>
-              <a:rPr lang="de-DE" dirty="0"/>
-              <a:t> </a:t>
-            </a:r>
-            <a:r>
-              <a:rPr lang="de-DE" dirty="0" err="1"/>
-              <a:t>parameters</a:t>
-            </a:r>
-            <a:endParaRPr lang="de-DE" dirty="0"/>
-          </a:p>
-          <a:p>
-            <a:r>
-              <a:rPr lang="de-DE" dirty="0" err="1"/>
-              <a:t>Empirical</a:t>
-            </a:r>
-            <a:r>
-              <a:rPr lang="de-DE" dirty="0"/>
-              <a:t> </a:t>
-            </a:r>
-            <a:r>
-              <a:rPr lang="de-DE" dirty="0" err="1"/>
-              <a:t>vs</a:t>
-            </a:r>
-            <a:r>
-              <a:rPr lang="de-DE" dirty="0"/>
-              <a:t> model-</a:t>
-            </a:r>
-            <a:r>
-              <a:rPr lang="de-DE" dirty="0" err="1"/>
-              <a:t>based</a:t>
-            </a:r>
-            <a:r>
-              <a:rPr lang="de-DE" dirty="0"/>
-              <a:t> </a:t>
-            </a:r>
-            <a:r>
-              <a:rPr lang="de-DE" dirty="0" err="1"/>
-              <a:t>approaches</a:t>
-            </a:r>
-            <a:endParaRPr lang="de-DE" dirty="0"/>
-          </a:p>
-        </p:txBody>
-      </p:sp>
+              <a:t>Setpoint</a:t>
+            </a:r>
+            <a:r>
+              <a:rPr lang="de-DE" dirty="0"/>
+              <a:t> Tracking</a:t>
+            </a:r>
+          </a:p>
+        </p:txBody>
+      </p:sp>
+      <mc:AlternateContent xmlns:mc="http://schemas.openxmlformats.org/markup-compatibility/2006">
+        <mc:Choice xmlns:a14="http://schemas.microsoft.com/office/drawing/2010/main" Requires="a14">
+          <p:sp>
+            <p:nvSpPr>
+              <p:cNvPr id="3" name="Inhaltsplatzhalter 2">
+                <a:extLst>
+                  <a:ext uri="{FF2B5EF4-FFF2-40B4-BE49-F238E27FC236}">
+                    <a16:creationId xmlns:a16="http://schemas.microsoft.com/office/drawing/2014/main" id="{AD876B9F-EBF9-6B58-689C-B4563742082D}"/>
+                  </a:ext>
+                </a:extLst>
+              </p:cNvPr>
+              <p:cNvSpPr>
+                <a:spLocks noGrp="1"/>
+              </p:cNvSpPr>
+              <p:nvPr>
+                <p:ph idx="1"/>
+              </p:nvPr>
+            </p:nvSpPr>
+            <p:spPr/>
+            <p:txBody>
+              <a:bodyPr>
+                <a:normAutofit fontScale="92500" lnSpcReduction="20000"/>
+              </a:bodyPr>
+              <a:lstStyle/>
+              <a:p>
+                <a:pPr marL="0" indent="0">
+                  <a:buNone/>
+                </a:pPr>
+                <a:r>
+                  <a:rPr lang="de-DE" dirty="0"/>
+                  <a:t>Response </a:t>
+                </a:r>
+                <a:r>
+                  <a:rPr lang="de-DE" dirty="0" err="1"/>
+                  <a:t>to</a:t>
+                </a:r>
+                <a:r>
+                  <a:rPr lang="de-DE" dirty="0"/>
+                  <a:t> </a:t>
+                </a:r>
+                <a:r>
+                  <a:rPr lang="de-DE" dirty="0" err="1"/>
+                  <a:t>reference</a:t>
+                </a:r>
+                <a:r>
+                  <a:rPr lang="de-DE" dirty="0"/>
+                  <a:t> </a:t>
+                </a:r>
+                <a:r>
+                  <a:rPr lang="de-DE" dirty="0" err="1"/>
+                  <a:t>changes</a:t>
+                </a:r>
+                <a:endParaRPr lang="de-DE" dirty="0"/>
+              </a:p>
+              <a:p>
+                <a:pPr marL="0" indent="0">
+                  <a:buNone/>
+                </a:pPr>
+                <a:r>
+                  <a:rPr lang="de-DE" dirty="0"/>
+                  <a:t>Transfer </a:t>
+                </a:r>
+                <a:r>
+                  <a:rPr lang="de-DE" dirty="0" err="1"/>
+                  <a:t>function</a:t>
+                </a:r>
+                <a:r>
+                  <a:rPr lang="de-DE" dirty="0"/>
+                  <a:t> </a:t>
+                </a:r>
+                <a:r>
+                  <a:rPr lang="de-DE" dirty="0" err="1"/>
+                  <a:t>from</a:t>
+                </a:r>
+                <a:r>
+                  <a:rPr lang="de-DE" dirty="0"/>
+                  <a:t> </a:t>
+                </a:r>
+                <a:r>
+                  <a:rPr lang="de-DE" dirty="0" err="1"/>
+                  <a:t>reference</a:t>
+                </a:r>
+                <a:r>
+                  <a:rPr lang="de-DE" dirty="0"/>
+                  <a:t> </a:t>
+                </a:r>
+                <a14:m>
+                  <m:oMath xmlns:m="http://schemas.openxmlformats.org/officeDocument/2006/math">
+                    <m:r>
+                      <a:rPr lang="de-DE" b="0" i="1" smtClean="0">
+                        <a:latin typeface="Cambria Math" panose="02040503050406030204" pitchFamily="18" charset="0"/>
+                      </a:rPr>
+                      <m:t>𝑟</m:t>
+                    </m:r>
+                  </m:oMath>
+                </a14:m>
+                <a:r>
+                  <a:rPr lang="de-DE" dirty="0"/>
+                  <a:t> </a:t>
+                </a:r>
+                <a:r>
+                  <a:rPr lang="de-DE" dirty="0" err="1"/>
+                  <a:t>to</a:t>
+                </a:r>
+                <a:r>
+                  <a:rPr lang="de-DE" dirty="0"/>
+                  <a:t> </a:t>
+                </a:r>
+                <a:r>
+                  <a:rPr lang="de-DE" dirty="0" err="1"/>
+                  <a:t>output</a:t>
+                </a:r>
+                <a:r>
+                  <a:rPr lang="de-DE" dirty="0"/>
+                  <a:t> </a:t>
+                </a:r>
+                <a14:m>
+                  <m:oMath xmlns:m="http://schemas.openxmlformats.org/officeDocument/2006/math">
+                    <m:r>
+                      <a:rPr lang="de-DE" b="0" i="1" smtClean="0">
+                        <a:latin typeface="Cambria Math" panose="02040503050406030204" pitchFamily="18" charset="0"/>
+                      </a:rPr>
+                      <m:t>𝑦</m:t>
+                    </m:r>
+                  </m:oMath>
+                </a14:m>
+                <a:r>
+                  <a:rPr lang="de-DE" dirty="0"/>
+                  <a:t>:</a:t>
+                </a:r>
+              </a:p>
+              <a:p>
+                <a:pPr marL="0" indent="0">
+                  <a:buNone/>
+                </a:pPr>
+                <a:r>
+                  <a:rPr lang="de-DE" dirty="0"/>
+                  <a:t>	</a:t>
+                </a:r>
+                <a14:m>
+                  <m:oMath xmlns:m="http://schemas.openxmlformats.org/officeDocument/2006/math">
+                    <m:r>
+                      <a:rPr lang="de-DE" i="1">
+                        <a:latin typeface="Cambria Math" panose="02040503050406030204" pitchFamily="18" charset="0"/>
+                      </a:rPr>
+                      <m:t>𝑇</m:t>
+                    </m:r>
+                    <m:d>
+                      <m:dPr>
+                        <m:ctrlPr>
+                          <a:rPr lang="de-DE" i="1">
+                            <a:latin typeface="Cambria Math" panose="02040503050406030204" pitchFamily="18" charset="0"/>
+                          </a:rPr>
+                        </m:ctrlPr>
+                      </m:dPr>
+                      <m:e>
+                        <m:r>
+                          <a:rPr lang="de-DE" i="1">
+                            <a:latin typeface="Cambria Math" panose="02040503050406030204" pitchFamily="18" charset="0"/>
+                          </a:rPr>
+                          <m:t>𝑠</m:t>
+                        </m:r>
+                      </m:e>
+                    </m:d>
+                    <m:r>
+                      <a:rPr lang="de-DE" i="1">
+                        <a:latin typeface="Cambria Math" panose="02040503050406030204" pitchFamily="18" charset="0"/>
+                      </a:rPr>
+                      <m:t>=</m:t>
+                    </m:r>
+                    <m:f>
+                      <m:fPr>
+                        <m:ctrlPr>
+                          <a:rPr lang="de-DE" i="1">
+                            <a:latin typeface="Cambria Math" panose="02040503050406030204" pitchFamily="18" charset="0"/>
+                          </a:rPr>
+                        </m:ctrlPr>
+                      </m:fPr>
+                      <m:num>
+                        <m:r>
+                          <a:rPr lang="de-DE" b="0" i="1" smtClean="0">
+                            <a:latin typeface="Cambria Math" panose="02040503050406030204" pitchFamily="18" charset="0"/>
+                          </a:rPr>
+                          <m:t>𝐶</m:t>
+                        </m:r>
+                        <m:r>
+                          <a:rPr lang="de-DE" b="0" i="1" smtClean="0">
+                            <a:latin typeface="Cambria Math" panose="02040503050406030204" pitchFamily="18" charset="0"/>
+                          </a:rPr>
+                          <m:t>(</m:t>
+                        </m:r>
+                        <m:r>
+                          <a:rPr lang="de-DE" b="0" i="1" smtClean="0">
+                            <a:latin typeface="Cambria Math" panose="02040503050406030204" pitchFamily="18" charset="0"/>
+                          </a:rPr>
+                          <m:t>𝑠</m:t>
+                        </m:r>
+                        <m:r>
+                          <a:rPr lang="de-DE" b="0" i="1" smtClean="0">
+                            <a:latin typeface="Cambria Math" panose="02040503050406030204" pitchFamily="18" charset="0"/>
+                          </a:rPr>
+                          <m:t>)</m:t>
+                        </m:r>
+                        <m:r>
+                          <a:rPr lang="de-DE" b="0" i="1" smtClean="0">
+                            <a:latin typeface="Cambria Math" panose="02040503050406030204" pitchFamily="18" charset="0"/>
+                          </a:rPr>
+                          <m:t>𝐺</m:t>
+                        </m:r>
+                        <m:r>
+                          <a:rPr lang="de-DE" i="1">
+                            <a:latin typeface="Cambria Math" panose="02040503050406030204" pitchFamily="18" charset="0"/>
+                          </a:rPr>
+                          <m:t>(</m:t>
+                        </m:r>
+                        <m:r>
+                          <a:rPr lang="de-DE" i="1">
+                            <a:latin typeface="Cambria Math" panose="02040503050406030204" pitchFamily="18" charset="0"/>
+                          </a:rPr>
+                          <m:t>𝑠</m:t>
+                        </m:r>
+                        <m:r>
+                          <a:rPr lang="de-DE" i="1">
+                            <a:latin typeface="Cambria Math" panose="02040503050406030204" pitchFamily="18" charset="0"/>
+                          </a:rPr>
+                          <m:t>)</m:t>
+                        </m:r>
+                      </m:num>
+                      <m:den>
+                        <m:r>
+                          <a:rPr lang="de-DE" i="1">
+                            <a:latin typeface="Cambria Math" panose="02040503050406030204" pitchFamily="18" charset="0"/>
+                          </a:rPr>
+                          <m:t>1+</m:t>
+                        </m:r>
+                        <m:r>
+                          <a:rPr lang="de-DE" b="0" i="1" smtClean="0">
+                            <a:latin typeface="Cambria Math" panose="02040503050406030204" pitchFamily="18" charset="0"/>
+                          </a:rPr>
+                          <m:t>𝐶</m:t>
+                        </m:r>
+                        <m:d>
+                          <m:dPr>
+                            <m:ctrlPr>
+                              <a:rPr lang="de-DE" b="0" i="1" smtClean="0">
+                                <a:latin typeface="Cambria Math" panose="02040503050406030204" pitchFamily="18" charset="0"/>
+                              </a:rPr>
+                            </m:ctrlPr>
+                          </m:dPr>
+                          <m:e>
+                            <m:r>
+                              <a:rPr lang="de-DE" i="1">
+                                <a:latin typeface="Cambria Math" panose="02040503050406030204" pitchFamily="18" charset="0"/>
+                              </a:rPr>
+                              <m:t>𝑠</m:t>
+                            </m:r>
+                          </m:e>
+                        </m:d>
+                        <m:r>
+                          <a:rPr lang="de-DE" b="0" i="1" smtClean="0">
+                            <a:latin typeface="Cambria Math" panose="02040503050406030204" pitchFamily="18" charset="0"/>
+                          </a:rPr>
+                          <m:t>𝐺</m:t>
+                        </m:r>
+                        <m:r>
+                          <a:rPr lang="de-DE" b="0" i="1" smtClean="0">
+                            <a:latin typeface="Cambria Math" panose="02040503050406030204" pitchFamily="18" charset="0"/>
+                          </a:rPr>
+                          <m:t>(</m:t>
+                        </m:r>
+                        <m:r>
+                          <a:rPr lang="de-DE" b="0" i="1" smtClean="0">
+                            <a:latin typeface="Cambria Math" panose="02040503050406030204" pitchFamily="18" charset="0"/>
+                          </a:rPr>
+                          <m:t>𝑠</m:t>
+                        </m:r>
+                        <m:r>
+                          <a:rPr lang="de-DE" b="0" i="1" smtClean="0">
+                            <a:latin typeface="Cambria Math" panose="02040503050406030204" pitchFamily="18" charset="0"/>
+                          </a:rPr>
+                          <m:t>)</m:t>
+                        </m:r>
+                      </m:den>
+                    </m:f>
+                  </m:oMath>
+                </a14:m>
+                <a:endParaRPr lang="de-DE" dirty="0"/>
+              </a:p>
+              <a:p>
+                <a:pPr marL="0" indent="0">
+                  <a:buNone/>
+                </a:pPr>
+                <a:endParaRPr lang="de-DE" dirty="0"/>
+              </a:p>
+              <a:p>
+                <a:pPr marL="0" indent="0">
+                  <a:buNone/>
+                </a:pPr>
+                <a:r>
+                  <a:rPr lang="de-DE" dirty="0"/>
+                  <a:t>Goals:</a:t>
+                </a:r>
+              </a:p>
+              <a:p>
+                <a:r>
+                  <a:rPr lang="de-DE" dirty="0"/>
+                  <a:t>Fast </a:t>
+                </a:r>
+                <a:r>
+                  <a:rPr lang="de-DE" dirty="0" err="1"/>
+                  <a:t>rise</a:t>
+                </a:r>
+                <a:r>
+                  <a:rPr lang="de-DE" dirty="0"/>
+                  <a:t> time</a:t>
+                </a:r>
+              </a:p>
+              <a:p>
+                <a:r>
+                  <a:rPr lang="de-DE" dirty="0"/>
+                  <a:t>Small </a:t>
+                </a:r>
+                <a:r>
+                  <a:rPr lang="de-DE" dirty="0" err="1"/>
+                  <a:t>overshoot</a:t>
+                </a:r>
+                <a:endParaRPr lang="de-DE" dirty="0"/>
+              </a:p>
+              <a:p>
+                <a:r>
+                  <a:rPr lang="de-DE" dirty="0"/>
+                  <a:t>Low </a:t>
+                </a:r>
+                <a:r>
+                  <a:rPr lang="de-DE" dirty="0" err="1"/>
+                  <a:t>steady-state</a:t>
+                </a:r>
+                <a:r>
+                  <a:rPr lang="de-DE" dirty="0"/>
+                  <a:t> </a:t>
+                </a:r>
+                <a:r>
+                  <a:rPr lang="de-DE" dirty="0" err="1"/>
+                  <a:t>error</a:t>
+                </a:r>
+                <a:br>
+                  <a:rPr lang="de-DE" dirty="0"/>
+                </a:br>
+                <a:endParaRPr lang="de-DE" dirty="0"/>
+              </a:p>
+              <a:p>
+                <a:pPr marL="0" indent="0">
+                  <a:buNone/>
+                </a:pPr>
+                <a:r>
+                  <a:rPr lang="de-DE" dirty="0"/>
+                  <a:t>High loop </a:t>
+                </a:r>
+                <a:r>
+                  <a:rPr lang="de-DE" dirty="0" err="1"/>
+                  <a:t>gain</a:t>
+                </a:r>
+                <a:r>
+                  <a:rPr lang="de-DE" dirty="0"/>
+                  <a:t> </a:t>
+                </a:r>
+                <a:r>
+                  <a:rPr lang="de-DE" dirty="0" err="1"/>
+                  <a:t>improves</a:t>
+                </a:r>
+                <a:r>
+                  <a:rPr lang="de-DE" dirty="0"/>
+                  <a:t> </a:t>
+                </a:r>
+                <a:r>
+                  <a:rPr lang="de-DE" dirty="0" err="1"/>
+                  <a:t>tracking</a:t>
+                </a:r>
+                <a:r>
+                  <a:rPr lang="de-DE" dirty="0"/>
+                  <a:t> </a:t>
+                </a:r>
+                <a:r>
+                  <a:rPr lang="de-DE" dirty="0" err="1"/>
+                  <a:t>accuracy</a:t>
+                </a:r>
+                <a:endParaRPr lang="de-DE" dirty="0"/>
+              </a:p>
+            </p:txBody>
+          </p:sp>
+        </mc:Choice>
+        <mc:Fallback>
+          <p:sp>
+            <p:nvSpPr>
+              <p:cNvPr id="3" name="Inhaltsplatzhalter 2">
+                <a:extLst>
+                  <a:ext uri="{FF2B5EF4-FFF2-40B4-BE49-F238E27FC236}">
+                    <a16:creationId xmlns:a16="http://schemas.microsoft.com/office/drawing/2014/main" id="{AD876B9F-EBF9-6B58-689C-B4563742082D}"/>
+                  </a:ext>
+                </a:extLst>
+              </p:cNvPr>
+              <p:cNvSpPr>
+                <a:spLocks noGrp="1" noRot="1" noChangeAspect="1" noMove="1" noResize="1" noEditPoints="1" noAdjustHandles="1" noChangeArrowheads="1" noChangeShapeType="1" noTextEdit="1"/>
+              </p:cNvSpPr>
+              <p:nvPr>
+                <p:ph idx="1"/>
+              </p:nvPr>
+            </p:nvSpPr>
+            <p:spPr>
+              <a:blipFill>
+                <a:blip r:embed="rId2"/>
+                <a:stretch>
+                  <a:fillRect l="-1086" t="-3488"/>
+                </a:stretch>
+              </a:blipFill>
+            </p:spPr>
+            <p:txBody>
+              <a:bodyPr/>
+              <a:lstStyle/>
+              <a:p>
+                <a:r>
+                  <a:rPr lang="de-DE">
+                    <a:noFill/>
+                  </a:rPr>
+                  <a:t> </a:t>
+                </a:r>
+              </a:p>
+            </p:txBody>
+          </p:sp>
+        </mc:Fallback>
+      </mc:AlternateContent>
       <p:sp>
         <p:nvSpPr>
           <p:cNvPr id="4" name="Foliennummernplatzhalter 3">
             <a:extLst>
               <a:ext uri="{FF2B5EF4-FFF2-40B4-BE49-F238E27FC236}">
-                <a16:creationId xmlns:a16="http://schemas.microsoft.com/office/drawing/2014/main" id="{79859E6D-0626-61A0-47B8-BA89EE898E3A}"/>
+                <a16:creationId xmlns:a16="http://schemas.microsoft.com/office/drawing/2014/main" id="{A5175CAB-F6C3-5C88-A058-0446BBC5CD75}"/>
               </a:ext>
             </a:extLst>
           </p:cNvPr>
@@ -6103,7 +8146,7 @@
     </p:spTree>
     <p:extLst>
       <p:ext uri="{BB962C8B-B14F-4D97-AF65-F5344CB8AC3E}">
-        <p14:creationId xmlns:p14="http://schemas.microsoft.com/office/powerpoint/2010/main" val="657694177"/>
+        <p14:creationId xmlns:p14="http://schemas.microsoft.com/office/powerpoint/2010/main" val="4274022864"/>
       </p:ext>
     </p:extLst>
   </p:cSld>
@@ -6135,7 +8178,7 @@
           <p:cNvPr id="2" name="Titel 1">
             <a:extLst>
               <a:ext uri="{FF2B5EF4-FFF2-40B4-BE49-F238E27FC236}">
-                <a16:creationId xmlns:a16="http://schemas.microsoft.com/office/drawing/2014/main" id="{85BF6517-6984-9407-6B74-9C4B4219E060}"/>
+                <a16:creationId xmlns:a16="http://schemas.microsoft.com/office/drawing/2014/main" id="{A75D6CDA-5613-13B6-A12F-F964112C8BA1}"/>
               </a:ext>
             </a:extLst>
           </p:cNvPr>
@@ -6152,36 +8195,8 @@
           <a:lstStyle/>
           <a:p>
             <a:r>
-              <a:rPr lang="de-DE" dirty="0"/>
-              <a:t>Ziegler–Nichols Method</a:t>
-            </a:r>
-          </a:p>
-        </p:txBody>
-      </p:sp>
-      <p:sp>
-        <p:nvSpPr>
-          <p:cNvPr id="3" name="Inhaltsplatzhalter 2">
-            <a:extLst>
-              <a:ext uri="{FF2B5EF4-FFF2-40B4-BE49-F238E27FC236}">
-                <a16:creationId xmlns:a16="http://schemas.microsoft.com/office/drawing/2014/main" id="{D2DFD6F6-7882-2454-DA98-53A8C188E030}"/>
-              </a:ext>
-            </a:extLst>
-          </p:cNvPr>
-          <p:cNvSpPr>
-            <a:spLocks noGrp="1"/>
-          </p:cNvSpPr>
-          <p:nvPr>
-            <p:ph idx="1"/>
-          </p:nvPr>
-        </p:nvSpPr>
-        <p:spPr/>
-        <p:txBody>
-          <a:bodyPr/>
-          <a:lstStyle/>
-          <a:p>
-            <a:r>
               <a:rPr lang="de-DE" dirty="0" err="1"/>
-              <a:t>Increase</a:t>
+              <a:t>Disturbance</a:t>
             </a:r>
             <a:r>
               <a:rPr lang="de-DE" dirty="0"/>
@@ -6189,67 +8204,532 @@
             </a:r>
             <a:r>
               <a:rPr lang="de-DE" dirty="0" err="1"/>
-              <a:t>gain</a:t>
-            </a:r>
-            <a:r>
-              <a:rPr lang="de-DE" dirty="0"/>
-              <a:t> </a:t>
-            </a:r>
-            <a:r>
-              <a:rPr lang="de-DE" dirty="0" err="1"/>
-              <a:t>until</a:t>
-            </a:r>
-            <a:r>
-              <a:rPr lang="de-DE" dirty="0"/>
-              <a:t> </a:t>
-            </a:r>
-            <a:r>
-              <a:rPr lang="de-DE" dirty="0" err="1"/>
-              <a:t>oscillation</a:t>
+              <a:t>Rejection</a:t>
             </a:r>
             <a:endParaRPr lang="de-DE" dirty="0"/>
           </a:p>
-          <a:p>
-            <a:r>
-              <a:rPr lang="de-DE" dirty="0"/>
-              <a:t>Use </a:t>
-            </a:r>
-            <a:r>
-              <a:rPr lang="de-DE" dirty="0" err="1"/>
-              <a:t>empirical</a:t>
-            </a:r>
-            <a:r>
-              <a:rPr lang="de-DE" dirty="0"/>
-              <a:t> </a:t>
-            </a:r>
-            <a:r>
-              <a:rPr lang="de-DE" dirty="0" err="1"/>
-              <a:t>tuning</a:t>
-            </a:r>
-            <a:r>
-              <a:rPr lang="de-DE" dirty="0"/>
-              <a:t> </a:t>
-            </a:r>
-            <a:r>
-              <a:rPr lang="de-DE" dirty="0" err="1"/>
-              <a:t>formulas</a:t>
-            </a:r>
-            <a:endParaRPr lang="de-DE" dirty="0"/>
-          </a:p>
-          <a:p>
-            <a:r>
-              <a:rPr lang="de-DE" dirty="0"/>
-              <a:t>Fast but aggressive</a:t>
-            </a:r>
-          </a:p>
-        </p:txBody>
-      </p:sp>
+        </p:txBody>
+      </p:sp>
+      <mc:AlternateContent xmlns:mc="http://schemas.openxmlformats.org/markup-compatibility/2006">
+        <mc:Choice xmlns:a14="http://schemas.microsoft.com/office/drawing/2010/main" Requires="a14">
+          <p:sp>
+            <p:nvSpPr>
+              <p:cNvPr id="3" name="Inhaltsplatzhalter 2">
+                <a:extLst>
+                  <a:ext uri="{FF2B5EF4-FFF2-40B4-BE49-F238E27FC236}">
+                    <a16:creationId xmlns:a16="http://schemas.microsoft.com/office/drawing/2014/main" id="{BA988EF8-7026-5678-C939-1A00A4DDA123}"/>
+                  </a:ext>
+                </a:extLst>
+              </p:cNvPr>
+              <p:cNvSpPr>
+                <a:spLocks noGrp="1"/>
+              </p:cNvSpPr>
+              <p:nvPr>
+                <p:ph idx="1"/>
+              </p:nvPr>
+            </p:nvSpPr>
+            <p:spPr/>
+            <p:txBody>
+              <a:bodyPr>
+                <a:normAutofit lnSpcReduction="10000"/>
+              </a:bodyPr>
+              <a:lstStyle/>
+              <a:p>
+                <a:pPr marL="0" indent="0">
+                  <a:buNone/>
+                </a:pPr>
+                <a:r>
+                  <a:rPr lang="de-DE" dirty="0"/>
+                  <a:t>Response </a:t>
+                </a:r>
+                <a:r>
+                  <a:rPr lang="de-DE" dirty="0" err="1"/>
+                  <a:t>to</a:t>
+                </a:r>
+                <a:r>
+                  <a:rPr lang="de-DE" dirty="0"/>
+                  <a:t> external </a:t>
+                </a:r>
+                <a:r>
+                  <a:rPr lang="de-DE" dirty="0" err="1"/>
+                  <a:t>disturbances</a:t>
+                </a:r>
+                <a:endParaRPr lang="de-DE" dirty="0"/>
+              </a:p>
+              <a:p>
+                <a:pPr marL="0" indent="0">
+                  <a:buNone/>
+                </a:pPr>
+                <a:r>
+                  <a:rPr lang="de-DE" dirty="0" err="1"/>
+                  <a:t>If</a:t>
+                </a:r>
+                <a:r>
+                  <a:rPr lang="de-DE" dirty="0"/>
+                  <a:t> </a:t>
+                </a:r>
+                <a:r>
+                  <a:rPr lang="de-DE" dirty="0" err="1"/>
+                  <a:t>disturbance</a:t>
+                </a:r>
+                <a:r>
+                  <a:rPr lang="de-DE" dirty="0"/>
+                  <a:t> </a:t>
+                </a:r>
+                <a14:m>
+                  <m:oMath xmlns:m="http://schemas.openxmlformats.org/officeDocument/2006/math">
+                    <m:r>
+                      <a:rPr lang="de-DE" b="0" i="1" smtClean="0">
+                        <a:latin typeface="Cambria Math" panose="02040503050406030204" pitchFamily="18" charset="0"/>
+                      </a:rPr>
+                      <m:t>𝑑</m:t>
+                    </m:r>
+                  </m:oMath>
+                </a14:m>
+                <a:r>
+                  <a:rPr lang="de-DE" dirty="0"/>
+                  <a:t> </a:t>
+                </a:r>
+                <a:r>
+                  <a:rPr lang="de-DE" dirty="0" err="1"/>
+                  <a:t>enters</a:t>
+                </a:r>
+                <a:r>
+                  <a:rPr lang="de-DE" dirty="0"/>
+                  <a:t> at plant </a:t>
+                </a:r>
+                <a:r>
+                  <a:rPr lang="de-DE" dirty="0" err="1"/>
+                  <a:t>input</a:t>
+                </a:r>
+                <a:r>
+                  <a:rPr lang="de-DE" dirty="0"/>
+                  <a:t>:</a:t>
+                </a:r>
+              </a:p>
+              <a:p>
+                <a:pPr marL="0" indent="0">
+                  <a:buNone/>
+                </a:pPr>
+                <a:r>
+                  <a:rPr lang="de-DE" dirty="0"/>
+                  <a:t>	</a:t>
+                </a:r>
+                <a14:m>
+                  <m:oMath xmlns:m="http://schemas.openxmlformats.org/officeDocument/2006/math">
+                    <m:r>
+                      <a:rPr lang="de-DE" b="0" i="1" smtClean="0">
+                        <a:latin typeface="Cambria Math" panose="02040503050406030204" pitchFamily="18" charset="0"/>
+                      </a:rPr>
+                      <m:t>𝑌</m:t>
+                    </m:r>
+                    <m:d>
+                      <m:dPr>
+                        <m:ctrlPr>
+                          <a:rPr lang="de-DE" i="1">
+                            <a:latin typeface="Cambria Math" panose="02040503050406030204" pitchFamily="18" charset="0"/>
+                          </a:rPr>
+                        </m:ctrlPr>
+                      </m:dPr>
+                      <m:e>
+                        <m:r>
+                          <a:rPr lang="de-DE" i="1">
+                            <a:latin typeface="Cambria Math" panose="02040503050406030204" pitchFamily="18" charset="0"/>
+                          </a:rPr>
+                          <m:t>𝑠</m:t>
+                        </m:r>
+                      </m:e>
+                    </m:d>
+                    <m:r>
+                      <a:rPr lang="de-DE" i="1">
+                        <a:latin typeface="Cambria Math" panose="02040503050406030204" pitchFamily="18" charset="0"/>
+                      </a:rPr>
+                      <m:t>=</m:t>
+                    </m:r>
+                    <m:f>
+                      <m:fPr>
+                        <m:ctrlPr>
+                          <a:rPr lang="de-DE" i="1">
+                            <a:latin typeface="Cambria Math" panose="02040503050406030204" pitchFamily="18" charset="0"/>
+                          </a:rPr>
+                        </m:ctrlPr>
+                      </m:fPr>
+                      <m:num>
+                        <m:r>
+                          <a:rPr lang="de-DE" i="1">
+                            <a:latin typeface="Cambria Math" panose="02040503050406030204" pitchFamily="18" charset="0"/>
+                          </a:rPr>
+                          <m:t>𝐺</m:t>
+                        </m:r>
+                        <m:d>
+                          <m:dPr>
+                            <m:ctrlPr>
+                              <a:rPr lang="de-DE" i="1">
+                                <a:latin typeface="Cambria Math" panose="02040503050406030204" pitchFamily="18" charset="0"/>
+                              </a:rPr>
+                            </m:ctrlPr>
+                          </m:dPr>
+                          <m:e>
+                            <m:r>
+                              <a:rPr lang="de-DE" i="1">
+                                <a:latin typeface="Cambria Math" panose="02040503050406030204" pitchFamily="18" charset="0"/>
+                              </a:rPr>
+                              <m:t>𝑠</m:t>
+                            </m:r>
+                          </m:e>
+                        </m:d>
+                      </m:num>
+                      <m:den>
+                        <m:r>
+                          <a:rPr lang="de-DE" i="1">
+                            <a:latin typeface="Cambria Math" panose="02040503050406030204" pitchFamily="18" charset="0"/>
+                          </a:rPr>
+                          <m:t>1+</m:t>
+                        </m:r>
+                        <m:r>
+                          <a:rPr lang="de-DE" i="1">
+                            <a:latin typeface="Cambria Math" panose="02040503050406030204" pitchFamily="18" charset="0"/>
+                          </a:rPr>
+                          <m:t>𝐶</m:t>
+                        </m:r>
+                        <m:d>
+                          <m:dPr>
+                            <m:ctrlPr>
+                              <a:rPr lang="de-DE" i="1">
+                                <a:latin typeface="Cambria Math" panose="02040503050406030204" pitchFamily="18" charset="0"/>
+                              </a:rPr>
+                            </m:ctrlPr>
+                          </m:dPr>
+                          <m:e>
+                            <m:r>
+                              <a:rPr lang="de-DE" i="1">
+                                <a:latin typeface="Cambria Math" panose="02040503050406030204" pitchFamily="18" charset="0"/>
+                              </a:rPr>
+                              <m:t>𝑠</m:t>
+                            </m:r>
+                          </m:e>
+                        </m:d>
+                        <m:r>
+                          <a:rPr lang="de-DE" i="1">
+                            <a:latin typeface="Cambria Math" panose="02040503050406030204" pitchFamily="18" charset="0"/>
+                          </a:rPr>
+                          <m:t>𝐺</m:t>
+                        </m:r>
+                        <m:d>
+                          <m:dPr>
+                            <m:ctrlPr>
+                              <a:rPr lang="de-DE" i="1">
+                                <a:latin typeface="Cambria Math" panose="02040503050406030204" pitchFamily="18" charset="0"/>
+                              </a:rPr>
+                            </m:ctrlPr>
+                          </m:dPr>
+                          <m:e>
+                            <m:r>
+                              <a:rPr lang="de-DE" i="1">
+                                <a:latin typeface="Cambria Math" panose="02040503050406030204" pitchFamily="18" charset="0"/>
+                              </a:rPr>
+                              <m:t>𝑠</m:t>
+                            </m:r>
+                          </m:e>
+                        </m:d>
+                      </m:den>
+                    </m:f>
+                    <m:r>
+                      <a:rPr lang="de-DE" b="0" i="1" smtClean="0">
+                        <a:latin typeface="Cambria Math" panose="02040503050406030204" pitchFamily="18" charset="0"/>
+                      </a:rPr>
+                      <m:t>𝐷</m:t>
+                    </m:r>
+                    <m:r>
+                      <a:rPr lang="de-DE" b="0" i="1" smtClean="0">
+                        <a:latin typeface="Cambria Math" panose="02040503050406030204" pitchFamily="18" charset="0"/>
+                      </a:rPr>
+                      <m:t>(</m:t>
+                    </m:r>
+                    <m:r>
+                      <a:rPr lang="de-DE" b="0" i="1" smtClean="0">
+                        <a:latin typeface="Cambria Math" panose="02040503050406030204" pitchFamily="18" charset="0"/>
+                      </a:rPr>
+                      <m:t>𝑠</m:t>
+                    </m:r>
+                    <m:r>
+                      <a:rPr lang="de-DE" b="0" i="1" smtClean="0">
+                        <a:latin typeface="Cambria Math" panose="02040503050406030204" pitchFamily="18" charset="0"/>
+                      </a:rPr>
+                      <m:t>)</m:t>
+                    </m:r>
+                  </m:oMath>
+                </a14:m>
+                <a:endParaRPr lang="de-DE" dirty="0"/>
+              </a:p>
+              <a:p>
+                <a:pPr marL="0" indent="0">
+                  <a:buNone/>
+                </a:pPr>
+                <a:endParaRPr lang="de-DE" dirty="0"/>
+              </a:p>
+              <a:p>
+                <a:pPr marL="0" indent="0">
+                  <a:buNone/>
+                </a:pPr>
+                <a:r>
+                  <a:rPr lang="de-DE" dirty="0" err="1"/>
+                  <a:t>Disturbance</a:t>
+                </a:r>
+                <a:r>
+                  <a:rPr lang="de-DE" dirty="0"/>
+                  <a:t> </a:t>
+                </a:r>
+                <a:r>
+                  <a:rPr lang="de-DE" dirty="0" err="1"/>
+                  <a:t>sensitivity</a:t>
+                </a:r>
+                <a:r>
+                  <a:rPr lang="de-DE" dirty="0"/>
+                  <a:t>:</a:t>
+                </a:r>
+              </a:p>
+              <a:p>
+                <a:pPr marL="0" indent="0">
+                  <a:buNone/>
+                </a:pPr>
+                <a:r>
+                  <a:rPr lang="de-DE" b="0" dirty="0"/>
+                  <a:t>	</a:t>
+                </a:r>
+                <a14:m>
+                  <m:oMath xmlns:m="http://schemas.openxmlformats.org/officeDocument/2006/math">
+                    <m:r>
+                      <a:rPr lang="de-DE" b="0" i="1" smtClean="0">
+                        <a:latin typeface="Cambria Math" panose="02040503050406030204" pitchFamily="18" charset="0"/>
+                      </a:rPr>
+                      <m:t>𝑆</m:t>
+                    </m:r>
+                    <m:d>
+                      <m:dPr>
+                        <m:ctrlPr>
+                          <a:rPr lang="de-DE" i="1">
+                            <a:latin typeface="Cambria Math" panose="02040503050406030204" pitchFamily="18" charset="0"/>
+                          </a:rPr>
+                        </m:ctrlPr>
+                      </m:dPr>
+                      <m:e>
+                        <m:r>
+                          <a:rPr lang="de-DE" i="1">
+                            <a:latin typeface="Cambria Math" panose="02040503050406030204" pitchFamily="18" charset="0"/>
+                          </a:rPr>
+                          <m:t>𝑠</m:t>
+                        </m:r>
+                      </m:e>
+                    </m:d>
+                    <m:r>
+                      <a:rPr lang="de-DE" i="1">
+                        <a:latin typeface="Cambria Math" panose="02040503050406030204" pitchFamily="18" charset="0"/>
+                      </a:rPr>
+                      <m:t>=</m:t>
+                    </m:r>
+                    <m:f>
+                      <m:fPr>
+                        <m:ctrlPr>
+                          <a:rPr lang="de-DE" i="1">
+                            <a:latin typeface="Cambria Math" panose="02040503050406030204" pitchFamily="18" charset="0"/>
+                          </a:rPr>
+                        </m:ctrlPr>
+                      </m:fPr>
+                      <m:num>
+                        <m:r>
+                          <a:rPr lang="de-DE" b="0" i="1" smtClean="0">
+                            <a:latin typeface="Cambria Math" panose="02040503050406030204" pitchFamily="18" charset="0"/>
+                          </a:rPr>
+                          <m:t>1</m:t>
+                        </m:r>
+                      </m:num>
+                      <m:den>
+                        <m:r>
+                          <a:rPr lang="de-DE" i="1">
+                            <a:latin typeface="Cambria Math" panose="02040503050406030204" pitchFamily="18" charset="0"/>
+                          </a:rPr>
+                          <m:t>1+</m:t>
+                        </m:r>
+                        <m:r>
+                          <a:rPr lang="de-DE" i="1">
+                            <a:latin typeface="Cambria Math" panose="02040503050406030204" pitchFamily="18" charset="0"/>
+                          </a:rPr>
+                          <m:t>𝐿</m:t>
+                        </m:r>
+                        <m:r>
+                          <a:rPr lang="de-DE" i="1">
+                            <a:latin typeface="Cambria Math" panose="02040503050406030204" pitchFamily="18" charset="0"/>
+                          </a:rPr>
+                          <m:t>(</m:t>
+                        </m:r>
+                        <m:r>
+                          <a:rPr lang="de-DE" i="1">
+                            <a:latin typeface="Cambria Math" panose="02040503050406030204" pitchFamily="18" charset="0"/>
+                          </a:rPr>
+                          <m:t>𝑠</m:t>
+                        </m:r>
+                        <m:r>
+                          <a:rPr lang="de-DE" i="1">
+                            <a:latin typeface="Cambria Math" panose="02040503050406030204" pitchFamily="18" charset="0"/>
+                          </a:rPr>
+                          <m:t>)</m:t>
+                        </m:r>
+                      </m:den>
+                    </m:f>
+                  </m:oMath>
+                </a14:m>
+                <a:endParaRPr lang="de-DE" dirty="0"/>
+              </a:p>
+              <a:p>
+                <a:pPr marL="0" indent="0">
+                  <a:buNone/>
+                </a:pPr>
+                <a:endParaRPr lang="de-DE" dirty="0"/>
+              </a:p>
+              <a:p>
+                <a:pPr marL="0" indent="0">
+                  <a:buNone/>
+                </a:pPr>
+                <a:r>
+                  <a:rPr lang="de-DE" dirty="0"/>
+                  <a:t>High loop </a:t>
+                </a:r>
+                <a:r>
+                  <a:rPr lang="de-DE" dirty="0" err="1"/>
+                  <a:t>gain</a:t>
+                </a:r>
+                <a:r>
+                  <a:rPr lang="de-DE" dirty="0"/>
+                  <a:t> </a:t>
+                </a:r>
+                <a:r>
+                  <a:rPr lang="de-DE" dirty="0">
+                    <a:sym typeface="Wingdings" pitchFamily="2" charset="2"/>
+                  </a:rPr>
+                  <a:t></a:t>
+                </a:r>
+                <a:r>
+                  <a:rPr lang="de-DE" dirty="0"/>
+                  <a:t> </a:t>
+                </a:r>
+                <a:r>
+                  <a:rPr lang="de-DE" dirty="0" err="1"/>
+                  <a:t>small</a:t>
+                </a:r>
+                <a:r>
+                  <a:rPr lang="de-DE" dirty="0"/>
+                  <a:t> </a:t>
+                </a:r>
+                <a14:m>
+                  <m:oMath xmlns:m="http://schemas.openxmlformats.org/officeDocument/2006/math">
+                    <m:r>
+                      <a:rPr lang="de-DE" b="0" i="1" smtClean="0">
+                        <a:latin typeface="Cambria Math" panose="02040503050406030204" pitchFamily="18" charset="0"/>
+                      </a:rPr>
+                      <m:t>𝑆</m:t>
+                    </m:r>
+                    <m:r>
+                      <a:rPr lang="de-DE" b="0" i="1" smtClean="0">
+                        <a:latin typeface="Cambria Math" panose="02040503050406030204" pitchFamily="18" charset="0"/>
+                      </a:rPr>
+                      <m:t>(</m:t>
+                    </m:r>
+                    <m:r>
+                      <a:rPr lang="de-DE" b="0" i="1" smtClean="0">
+                        <a:latin typeface="Cambria Math" panose="02040503050406030204" pitchFamily="18" charset="0"/>
+                      </a:rPr>
+                      <m:t>𝑠</m:t>
+                    </m:r>
+                    <m:r>
+                      <a:rPr lang="de-DE" b="0" i="1" smtClean="0">
+                        <a:latin typeface="Cambria Math" panose="02040503050406030204" pitchFamily="18" charset="0"/>
+                      </a:rPr>
+                      <m:t>)</m:t>
+                    </m:r>
+                  </m:oMath>
+                </a14:m>
+                <a:r>
+                  <a:rPr lang="de-DE" dirty="0"/>
+                  <a:t> </a:t>
+                </a:r>
+                <a:r>
+                  <a:rPr lang="de-DE" dirty="0">
+                    <a:sym typeface="Wingdings" pitchFamily="2" charset="2"/>
+                  </a:rPr>
+                  <a:t> </a:t>
+                </a:r>
+                <a:r>
+                  <a:rPr lang="de-DE" dirty="0" err="1"/>
+                  <a:t>good</a:t>
+                </a:r>
+                <a:r>
+                  <a:rPr lang="de-DE" dirty="0"/>
+                  <a:t> </a:t>
+                </a:r>
+                <a:r>
+                  <a:rPr lang="de-DE" dirty="0" err="1"/>
+                  <a:t>disturbance</a:t>
+                </a:r>
+                <a:r>
+                  <a:rPr lang="de-DE" dirty="0"/>
+                  <a:t> </a:t>
+                </a:r>
+                <a:r>
+                  <a:rPr lang="de-DE" dirty="0" err="1"/>
+                  <a:t>rejection</a:t>
+                </a:r>
+                <a:endParaRPr lang="de-DE" dirty="0"/>
+              </a:p>
+            </p:txBody>
+          </p:sp>
+        </mc:Choice>
+        <mc:Fallback>
+          <p:sp>
+            <p:nvSpPr>
+              <p:cNvPr id="3" name="Inhaltsplatzhalter 2">
+                <a:extLst>
+                  <a:ext uri="{FF2B5EF4-FFF2-40B4-BE49-F238E27FC236}">
+                    <a16:creationId xmlns:a16="http://schemas.microsoft.com/office/drawing/2014/main" id="{BA988EF8-7026-5678-C939-1A00A4DDA123}"/>
+                  </a:ext>
+                </a:extLst>
+              </p:cNvPr>
+              <p:cNvSpPr>
+                <a:spLocks noGrp="1" noRot="1" noChangeAspect="1" noMove="1" noResize="1" noEditPoints="1" noAdjustHandles="1" noChangeArrowheads="1" noChangeShapeType="1" noTextEdit="1"/>
+              </p:cNvSpPr>
+              <p:nvPr>
+                <p:ph idx="1"/>
+              </p:nvPr>
+            </p:nvSpPr>
+            <p:spPr>
+              <a:blipFill>
+                <a:blip r:embed="rId2"/>
+                <a:stretch>
+                  <a:fillRect l="-1206" t="-3198"/>
+                </a:stretch>
+              </a:blipFill>
+            </p:spPr>
+            <p:txBody>
+              <a:bodyPr/>
+              <a:lstStyle/>
+              <a:p>
+                <a:r>
+                  <a:rPr lang="de-DE">
+                    <a:noFill/>
+                  </a:rPr>
+                  <a:t> </a:t>
+                </a:r>
+              </a:p>
+            </p:txBody>
+          </p:sp>
+        </mc:Fallback>
+      </mc:AlternateContent>
       <p:sp>
         <p:nvSpPr>
           <p:cNvPr id="4" name="Foliennummernplatzhalter 3">
             <a:extLst>
               <a:ext uri="{FF2B5EF4-FFF2-40B4-BE49-F238E27FC236}">
-                <a16:creationId xmlns:a16="http://schemas.microsoft.com/office/drawing/2014/main" id="{8F4D5E92-4A90-3146-A07C-C04412405FF1}"/>
+                <a16:creationId xmlns:a16="http://schemas.microsoft.com/office/drawing/2014/main" id="{CC235B7E-4A8E-FB18-44F1-A35F4584B713}"/>
               </a:ext>
             </a:extLst>
           </p:cNvPr>
@@ -6276,7 +8756,7 @@
     </p:spTree>
     <p:extLst>
       <p:ext uri="{BB962C8B-B14F-4D97-AF65-F5344CB8AC3E}">
-        <p14:creationId xmlns:p14="http://schemas.microsoft.com/office/powerpoint/2010/main" val="2536200423"/>
+        <p14:creationId xmlns:p14="http://schemas.microsoft.com/office/powerpoint/2010/main" val="1626405074"/>
       </p:ext>
     </p:extLst>
   </p:cSld>

--- a/slides/5_controller_design.pptx
+++ b/slides/5_controller_design.pptx
@@ -5,7 +5,7 @@
     <p:sldMasterId id="2147483648" r:id="rId1"/>
   </p:sldMasterIdLst>
   <p:notesMasterIdLst>
-    <p:notesMasterId r:id="rId19"/>
+    <p:notesMasterId r:id="rId20"/>
   </p:notesMasterIdLst>
   <p:sldIdLst>
     <p:sldId id="256" r:id="rId2"/>
@@ -20,11 +20,12 @@
     <p:sldId id="279" r:id="rId11"/>
     <p:sldId id="280" r:id="rId12"/>
     <p:sldId id="271" r:id="rId13"/>
-    <p:sldId id="272" r:id="rId14"/>
-    <p:sldId id="273" r:id="rId15"/>
-    <p:sldId id="274" r:id="rId16"/>
-    <p:sldId id="275" r:id="rId17"/>
-    <p:sldId id="277" r:id="rId18"/>
+    <p:sldId id="293" r:id="rId14"/>
+    <p:sldId id="272" r:id="rId15"/>
+    <p:sldId id="273" r:id="rId16"/>
+    <p:sldId id="274" r:id="rId17"/>
+    <p:sldId id="275" r:id="rId18"/>
+    <p:sldId id="277" r:id="rId19"/>
   </p:sldIdLst>
   <p:sldSz cx="12192000" cy="6858000"/>
   <p:notesSz cx="6858000" cy="9144000"/>
@@ -495,7 +496,7 @@
           <a:p>
             <a:fld id="{506E0FD1-891F-4B1E-916D-E9B585160BB8}" type="datetimeFigureOut">
               <a:rPr lang="en-GB" smtClean="0"/>
-              <a:t>21/02/2026</a:t>
+              <a:t>12/03/2026</a:t>
             </a:fld>
             <a:endParaRPr lang="en-GB"/>
           </a:p>
@@ -912,7 +913,7 @@
           <a:p>
             <a:fld id="{D68C3F22-27B2-44E3-9C5F-D08126455F6F}" type="datetime1">
               <a:rPr lang="en-GB" smtClean="0"/>
-              <a:t>21/02/2026</a:t>
+              <a:t>12/03/2026</a:t>
             </a:fld>
             <a:endParaRPr lang="en-GB"/>
           </a:p>
@@ -1112,7 +1113,7 @@
           <a:p>
             <a:fld id="{1CD03846-7BF6-4FB6-A921-FF3379ADBD4C}" type="datetime1">
               <a:rPr lang="en-GB" smtClean="0"/>
-              <a:t>21/02/2026</a:t>
+              <a:t>12/03/2026</a:t>
             </a:fld>
             <a:endParaRPr lang="en-GB"/>
           </a:p>
@@ -1322,7 +1323,7 @@
           <a:p>
             <a:fld id="{99E1B91A-3FD0-4144-9C84-63E9688ED2FE}" type="datetime1">
               <a:rPr lang="en-GB" smtClean="0"/>
-              <a:t>21/02/2026</a:t>
+              <a:t>12/03/2026</a:t>
             </a:fld>
             <a:endParaRPr lang="en-GB"/>
           </a:p>
@@ -1522,7 +1523,7 @@
           <a:p>
             <a:fld id="{5295ED7B-FEAD-4734-819F-93EF4B0EA908}" type="datetime1">
               <a:rPr lang="en-GB" smtClean="0"/>
-              <a:t>21/02/2026</a:t>
+              <a:t>12/03/2026</a:t>
             </a:fld>
             <a:endParaRPr lang="en-GB"/>
           </a:p>
@@ -1798,7 +1799,7 @@
           <a:p>
             <a:fld id="{D2D5D4B4-C926-4B45-8815-1ED8911179A2}" type="datetime1">
               <a:rPr lang="en-GB" smtClean="0"/>
-              <a:t>21/02/2026</a:t>
+              <a:t>12/03/2026</a:t>
             </a:fld>
             <a:endParaRPr lang="en-GB"/>
           </a:p>
@@ -2066,7 +2067,7 @@
           <a:p>
             <a:fld id="{B4C5210A-0E37-4935-93AF-69F21A5F712F}" type="datetime1">
               <a:rPr lang="en-GB" smtClean="0"/>
-              <a:t>21/02/2026</a:t>
+              <a:t>12/03/2026</a:t>
             </a:fld>
             <a:endParaRPr lang="en-GB"/>
           </a:p>
@@ -2481,7 +2482,7 @@
           <a:p>
             <a:fld id="{3D3A6B2F-436C-4691-80E8-9C890E000E9D}" type="datetime1">
               <a:rPr lang="en-GB" smtClean="0"/>
-              <a:t>21/02/2026</a:t>
+              <a:t>12/03/2026</a:t>
             </a:fld>
             <a:endParaRPr lang="en-GB"/>
           </a:p>
@@ -2623,7 +2624,7 @@
           <a:p>
             <a:fld id="{84385F4C-D74B-496F-8D21-97E3549C783B}" type="datetime1">
               <a:rPr lang="en-GB" smtClean="0"/>
-              <a:t>21/02/2026</a:t>
+              <a:t>12/03/2026</a:t>
             </a:fld>
             <a:endParaRPr lang="en-GB"/>
           </a:p>
@@ -2736,7 +2737,7 @@
           <a:p>
             <a:fld id="{0CBDCB32-C241-4703-A832-4EB47BD54E83}" type="datetime1">
               <a:rPr lang="en-GB" smtClean="0"/>
-              <a:t>21/02/2026</a:t>
+              <a:t>12/03/2026</a:t>
             </a:fld>
             <a:endParaRPr lang="en-GB"/>
           </a:p>
@@ -3049,7 +3050,7 @@
           <a:p>
             <a:fld id="{85C150FF-BE95-4D25-A16A-E368A81CBF24}" type="datetime1">
               <a:rPr lang="en-GB" smtClean="0"/>
-              <a:t>21/02/2026</a:t>
+              <a:t>12/03/2026</a:t>
             </a:fld>
             <a:endParaRPr lang="en-GB"/>
           </a:p>
@@ -3338,7 +3339,7 @@
           <a:p>
             <a:fld id="{F3C5DB4B-B349-43C9-A424-BADA723AD9F1}" type="datetime1">
               <a:rPr lang="en-GB" smtClean="0"/>
-              <a:t>21/02/2026</a:t>
+              <a:t>12/03/2026</a:t>
             </a:fld>
             <a:endParaRPr lang="en-GB"/>
           </a:p>
@@ -3581,7 +3582,7 @@
           <a:p>
             <a:fld id="{12632426-0A0C-405F-A3D0-2D11AA44702A}" type="datetime1">
               <a:rPr lang="en-GB" smtClean="0"/>
-              <a:t>21/02/2026</a:t>
+              <a:t>12/03/2026</a:t>
             </a:fld>
             <a:endParaRPr lang="en-GB"/>
           </a:p>
@@ -4728,10 +4729,10 @@
       </p:grpSpPr>
       <p:sp>
         <p:nvSpPr>
-          <p:cNvPr id="2" name="Titel 1">
-            <a:extLst>
-              <a:ext uri="{FF2B5EF4-FFF2-40B4-BE49-F238E27FC236}">
-                <a16:creationId xmlns:a16="http://schemas.microsoft.com/office/drawing/2014/main" id="{85BF6517-6984-9407-6B74-9C4B4219E060}"/>
+          <p:cNvPr id="3" name="Titel 2">
+            <a:extLst>
+              <a:ext uri="{FF2B5EF4-FFF2-40B4-BE49-F238E27FC236}">
+                <a16:creationId xmlns:a16="http://schemas.microsoft.com/office/drawing/2014/main" id="{43551CD1-19A8-BE1B-57EE-0F4A21C39153}"/>
               </a:ext>
             </a:extLst>
           </p:cNvPr>
@@ -4749,103 +4750,617 @@
           <a:p>
             <a:r>
               <a:rPr lang="de-DE" dirty="0"/>
-              <a:t>Ziegler–Nichols Method</a:t>
-            </a:r>
-          </a:p>
-        </p:txBody>
-      </p:sp>
-      <p:sp>
-        <p:nvSpPr>
-          <p:cNvPr id="3" name="Inhaltsplatzhalter 2">
-            <a:extLst>
-              <a:ext uri="{FF2B5EF4-FFF2-40B4-BE49-F238E27FC236}">
-                <a16:creationId xmlns:a16="http://schemas.microsoft.com/office/drawing/2014/main" id="{D2DFD6F6-7882-2454-DA98-53A8C188E030}"/>
-              </a:ext>
-            </a:extLst>
-          </p:cNvPr>
-          <p:cNvSpPr>
-            <a:spLocks noGrp="1"/>
-          </p:cNvSpPr>
-          <p:nvPr>
-            <p:ph idx="1"/>
-          </p:nvPr>
-        </p:nvSpPr>
-        <p:spPr/>
-        <p:txBody>
-          <a:bodyPr/>
-          <a:lstStyle/>
-          <a:p>
-            <a:r>
-              <a:rPr lang="de-DE" dirty="0" err="1"/>
-              <a:t>Increase</a:t>
-            </a:r>
-            <a:r>
-              <a:rPr lang="de-DE" dirty="0"/>
-              <a:t> </a:t>
-            </a:r>
-            <a:r>
-              <a:rPr lang="de-DE" dirty="0" err="1"/>
-              <a:t>gain</a:t>
-            </a:r>
-            <a:r>
-              <a:rPr lang="de-DE" dirty="0"/>
-              <a:t> </a:t>
-            </a:r>
-            <a:r>
-              <a:rPr lang="de-DE" dirty="0" err="1"/>
-              <a:t>until</a:t>
-            </a:r>
-            <a:r>
-              <a:rPr lang="de-DE" dirty="0"/>
-              <a:t> </a:t>
-            </a:r>
-            <a:r>
-              <a:rPr lang="de-DE" dirty="0" err="1"/>
-              <a:t>oscillation</a:t>
-            </a:r>
-            <a:endParaRPr lang="de-DE" dirty="0"/>
-          </a:p>
-          <a:p>
-            <a:r>
-              <a:rPr lang="de-DE" dirty="0"/>
-              <a:t>Use </a:t>
-            </a:r>
-            <a:r>
-              <a:rPr lang="de-DE" dirty="0" err="1"/>
-              <a:t>empirical</a:t>
-            </a:r>
-            <a:r>
-              <a:rPr lang="de-DE" dirty="0"/>
-              <a:t> </a:t>
-            </a:r>
-            <a:r>
-              <a:rPr lang="de-DE" dirty="0" err="1"/>
-              <a:t>tuning</a:t>
-            </a:r>
-            <a:r>
-              <a:rPr lang="de-DE" dirty="0"/>
-              <a:t> </a:t>
-            </a:r>
-            <a:r>
-              <a:rPr lang="de-DE" dirty="0" err="1"/>
-              <a:t>formulas</a:t>
-            </a:r>
-            <a:endParaRPr lang="de-DE" dirty="0"/>
-          </a:p>
-          <a:p>
-            <a:r>
-              <a:rPr lang="de-DE" dirty="0"/>
-              <a:t>Fast but aggressive</a:t>
-            </a:r>
-          </a:p>
-        </p:txBody>
-      </p:sp>
-      <p:sp>
-        <p:nvSpPr>
-          <p:cNvPr id="4" name="Foliennummernplatzhalter 3">
-            <a:extLst>
-              <a:ext uri="{FF2B5EF4-FFF2-40B4-BE49-F238E27FC236}">
-                <a16:creationId xmlns:a16="http://schemas.microsoft.com/office/drawing/2014/main" id="{8F4D5E92-4A90-3146-A07C-C04412405FF1}"/>
+              <a:t>Manual PI Tuning</a:t>
+            </a:r>
+          </a:p>
+        </p:txBody>
+      </p:sp>
+      <mc:AlternateContent xmlns:mc="http://schemas.openxmlformats.org/markup-compatibility/2006">
+        <mc:Choice xmlns:a14="http://schemas.microsoft.com/office/drawing/2010/main" Requires="a14">
+          <p:sp>
+            <p:nvSpPr>
+              <p:cNvPr id="4" name="Inhaltsplatzhalter 3">
+                <a:extLst>
+                  <a:ext uri="{FF2B5EF4-FFF2-40B4-BE49-F238E27FC236}">
+                    <a16:creationId xmlns:a16="http://schemas.microsoft.com/office/drawing/2014/main" id="{31000492-FD46-6E0B-2937-3A8A79556A66}"/>
+                  </a:ext>
+                </a:extLst>
+              </p:cNvPr>
+              <p:cNvSpPr>
+                <a:spLocks noGrp="1"/>
+              </p:cNvSpPr>
+              <p:nvPr>
+                <p:ph idx="1"/>
+              </p:nvPr>
+            </p:nvSpPr>
+            <p:spPr/>
+            <p:txBody>
+              <a:bodyPr>
+                <a:normAutofit fontScale="92500" lnSpcReduction="20000"/>
+              </a:bodyPr>
+              <a:lstStyle/>
+              <a:p>
+                <a:pPr marL="0" indent="0">
+                  <a:buNone/>
+                </a:pPr>
+                <a:r>
+                  <a:rPr lang="de-DE" dirty="0"/>
+                  <a:t>Heuristic:</a:t>
+                </a:r>
+              </a:p>
+              <a:p>
+                <a:r>
+                  <a:rPr lang="de-DE" dirty="0" err="1"/>
+                  <a:t>Decide</a:t>
+                </a:r>
+                <a:r>
+                  <a:rPr lang="de-DE" dirty="0"/>
+                  <a:t> </a:t>
+                </a:r>
+                <a:r>
+                  <a:rPr lang="de-DE" dirty="0" err="1"/>
+                  <a:t>what</a:t>
+                </a:r>
+                <a:r>
+                  <a:rPr lang="de-DE" dirty="0"/>
+                  <a:t> </a:t>
+                </a:r>
+                <a:r>
+                  <a:rPr lang="de-DE" dirty="0" err="1"/>
+                  <a:t>response</a:t>
+                </a:r>
+                <a:r>
+                  <a:rPr lang="de-DE" dirty="0"/>
+                  <a:t> </a:t>
+                </a:r>
+                <a:r>
+                  <a:rPr lang="de-DE" dirty="0" err="1"/>
+                  <a:t>you</a:t>
+                </a:r>
+                <a:r>
+                  <a:rPr lang="de-DE" dirty="0"/>
+                  <a:t> </a:t>
+                </a:r>
+                <a:r>
+                  <a:rPr lang="de-DE" dirty="0" err="1"/>
+                  <a:t>want</a:t>
+                </a:r>
+                <a:r>
+                  <a:rPr lang="de-DE" dirty="0"/>
+                  <a:t> </a:t>
+                </a:r>
+                <a:r>
+                  <a:rPr lang="de-DE" dirty="0" err="1"/>
+                  <a:t>for</a:t>
+                </a:r>
+                <a:r>
+                  <a:rPr lang="de-DE" dirty="0"/>
+                  <a:t> a </a:t>
+                </a:r>
+                <a:r>
+                  <a:rPr lang="de-DE" dirty="0" err="1"/>
+                  <a:t>given</a:t>
+                </a:r>
+                <a:r>
+                  <a:rPr lang="de-DE" dirty="0"/>
+                  <a:t> </a:t>
+                </a:r>
+                <a:r>
+                  <a:rPr lang="de-DE" dirty="0" err="1"/>
+                  <a:t>error</a:t>
+                </a:r>
+                <a:endParaRPr lang="de-DE" dirty="0"/>
+              </a:p>
+              <a:p>
+                <a:r>
+                  <a:rPr lang="de-DE" dirty="0" err="1"/>
+                  <a:t>Compute</a:t>
+                </a:r>
+                <a:r>
+                  <a:rPr lang="de-DE" dirty="0"/>
+                  <a:t> </a:t>
+                </a:r>
+                <a:r>
+                  <a:rPr lang="de-DE" dirty="0" err="1"/>
+                  <a:t>the</a:t>
+                </a:r>
+                <a:r>
+                  <a:rPr lang="de-DE" dirty="0"/>
+                  <a:t> </a:t>
+                </a:r>
+                <a:r>
+                  <a:rPr lang="de-DE" dirty="0" err="1"/>
+                  <a:t>corresponding</a:t>
+                </a:r>
+                <a:r>
+                  <a:rPr lang="de-DE" dirty="0"/>
+                  <a:t> proportional </a:t>
+                </a:r>
+                <a:r>
+                  <a:rPr lang="de-DE" dirty="0" err="1"/>
+                  <a:t>gain</a:t>
+                </a:r>
+                <a:endParaRPr lang="de-DE" dirty="0"/>
+              </a:p>
+              <a:p>
+                <a:r>
+                  <a:rPr lang="de-DE" dirty="0" err="1"/>
+                  <a:t>Choose</a:t>
+                </a:r>
+                <a:r>
+                  <a:rPr lang="de-DE" dirty="0"/>
+                  <a:t> </a:t>
+                </a:r>
+                <a:r>
+                  <a:rPr lang="de-DE" dirty="0" err="1"/>
+                  <a:t>the</a:t>
+                </a:r>
+                <a:r>
+                  <a:rPr lang="de-DE" dirty="0"/>
+                  <a:t> integral </a:t>
+                </a:r>
+                <a:r>
+                  <a:rPr lang="de-DE" dirty="0" err="1"/>
+                  <a:t>gain</a:t>
+                </a:r>
+                <a:r>
+                  <a:rPr lang="de-DE" dirty="0"/>
+                  <a:t> </a:t>
+                </a:r>
+                <a:r>
+                  <a:rPr lang="de-DE" dirty="0" err="1"/>
+                  <a:t>as</a:t>
+                </a:r>
+                <a:r>
+                  <a:rPr lang="de-DE" dirty="0"/>
+                  <a:t> a </a:t>
+                </a:r>
+                <a:r>
+                  <a:rPr lang="de-DE" dirty="0" err="1"/>
+                  <a:t>fraction</a:t>
+                </a:r>
+                <a:r>
+                  <a:rPr lang="de-DE" dirty="0"/>
+                  <a:t> </a:t>
+                </a:r>
+                <a:r>
+                  <a:rPr lang="de-DE" dirty="0" err="1"/>
+                  <a:t>of</a:t>
+                </a:r>
+                <a:r>
+                  <a:rPr lang="de-DE" dirty="0"/>
+                  <a:t> </a:t>
+                </a:r>
+                <a14:m>
+                  <m:oMath xmlns:m="http://schemas.openxmlformats.org/officeDocument/2006/math">
+                    <m:r>
+                      <m:rPr>
+                        <m:sty m:val="p"/>
+                      </m:rPr>
+                      <a:rPr lang="de-DE">
+                        <a:latin typeface="Cambria Math" panose="02040503050406030204" pitchFamily="18" charset="0"/>
+                      </a:rPr>
+                      <m:t>P</m:t>
+                    </m:r>
+                  </m:oMath>
+                </a14:m>
+                <a:r>
+                  <a:rPr lang="de-DE" dirty="0"/>
+                  <a:t> (e.g., </a:t>
+                </a:r>
+                <a14:m>
+                  <m:oMath xmlns:m="http://schemas.openxmlformats.org/officeDocument/2006/math">
+                    <m:r>
+                      <m:rPr>
+                        <m:sty m:val="p"/>
+                      </m:rPr>
+                      <a:rPr lang="de-DE" b="0" i="0" smtClean="0">
+                        <a:latin typeface="Cambria Math" panose="02040503050406030204" pitchFamily="18" charset="0"/>
+                      </a:rPr>
+                      <m:t>I</m:t>
+                    </m:r>
+                    <m:r>
+                      <a:rPr lang="de-DE" b="0" i="1" smtClean="0">
+                        <a:latin typeface="Cambria Math" panose="02040503050406030204" pitchFamily="18" charset="0"/>
+                      </a:rPr>
+                      <m:t>=</m:t>
+                    </m:r>
+                    <m:f>
+                      <m:fPr>
+                        <m:type m:val="lin"/>
+                        <m:ctrlPr>
+                          <a:rPr lang="de-DE" b="0" i="1" smtClean="0">
+                            <a:latin typeface="Cambria Math" panose="02040503050406030204" pitchFamily="18" charset="0"/>
+                          </a:rPr>
+                        </m:ctrlPr>
+                      </m:fPr>
+                      <m:num>
+                        <m:r>
+                          <a:rPr lang="de-DE" b="0" i="1" smtClean="0">
+                            <a:latin typeface="Cambria Math" panose="02040503050406030204" pitchFamily="18" charset="0"/>
+                          </a:rPr>
+                          <m:t>𝑃</m:t>
+                        </m:r>
+                      </m:num>
+                      <m:den>
+                        <m:r>
+                          <a:rPr lang="de-DE" b="0" i="1" smtClean="0">
+                            <a:latin typeface="Cambria Math" panose="02040503050406030204" pitchFamily="18" charset="0"/>
+                          </a:rPr>
+                          <m:t>10</m:t>
+                        </m:r>
+                      </m:den>
+                    </m:f>
+                  </m:oMath>
+                </a14:m>
+                <a:r>
+                  <a:rPr lang="de-DE" dirty="0"/>
+                  <a:t>)</a:t>
+                </a:r>
+              </a:p>
+              <a:p>
+                <a:pPr marL="0" indent="0">
+                  <a:buNone/>
+                </a:pPr>
+                <a:endParaRPr lang="de-DE" dirty="0"/>
+              </a:p>
+              <a:p>
+                <a:pPr marL="0" indent="0">
+                  <a:buNone/>
+                </a:pPr>
+                <a:r>
+                  <a:rPr lang="de-DE" dirty="0" err="1"/>
+                  <a:t>Example</a:t>
+                </a:r>
+                <a:r>
+                  <a:rPr lang="de-DE" dirty="0"/>
+                  <a:t>: Engine Torque </a:t>
+                </a:r>
+                <a:r>
+                  <a:rPr lang="de-DE" dirty="0" err="1"/>
+                  <a:t>of</a:t>
+                </a:r>
+                <a:r>
+                  <a:rPr lang="de-DE" dirty="0"/>
+                  <a:t> a Car Engine</a:t>
+                </a:r>
+              </a:p>
+              <a:p>
+                <a:r>
+                  <a:rPr lang="de-DE" dirty="0"/>
+                  <a:t>Cruise </a:t>
+                </a:r>
+                <a:r>
+                  <a:rPr lang="de-DE" dirty="0" err="1"/>
+                  <a:t>control</a:t>
+                </a:r>
+                <a:r>
+                  <a:rPr lang="de-DE" dirty="0"/>
+                  <a:t> </a:t>
+                </a:r>
+                <a:r>
+                  <a:rPr lang="de-DE" dirty="0" err="1"/>
+                  <a:t>deviation</a:t>
+                </a:r>
+                <a:r>
+                  <a:rPr lang="de-DE" dirty="0"/>
+                  <a:t>: </a:t>
+                </a:r>
+                <a14:m>
+                  <m:oMath xmlns:m="http://schemas.openxmlformats.org/officeDocument/2006/math">
+                    <m:r>
+                      <a:rPr lang="de-DE" b="0" i="1" smtClean="0">
+                        <a:latin typeface="Cambria Math" panose="02040503050406030204" pitchFamily="18" charset="0"/>
+                      </a:rPr>
+                      <m:t>3</m:t>
+                    </m:r>
+                    <m:f>
+                      <m:fPr>
+                        <m:type m:val="lin"/>
+                        <m:ctrlPr>
+                          <a:rPr lang="de-DE" b="0" i="1" smtClean="0">
+                            <a:latin typeface="Cambria Math" panose="02040503050406030204" pitchFamily="18" charset="0"/>
+                          </a:rPr>
+                        </m:ctrlPr>
+                      </m:fPr>
+                      <m:num>
+                        <m:r>
+                          <m:rPr>
+                            <m:sty m:val="p"/>
+                          </m:rPr>
+                          <a:rPr lang="de-DE" b="0" i="0" smtClean="0">
+                            <a:latin typeface="Cambria Math" panose="02040503050406030204" pitchFamily="18" charset="0"/>
+                          </a:rPr>
+                          <m:t>m</m:t>
+                        </m:r>
+                      </m:num>
+                      <m:den>
+                        <m:r>
+                          <m:rPr>
+                            <m:sty m:val="p"/>
+                          </m:rPr>
+                          <a:rPr lang="de-DE" b="0" i="0" smtClean="0">
+                            <a:latin typeface="Cambria Math" panose="02040503050406030204" pitchFamily="18" charset="0"/>
+                          </a:rPr>
+                          <m:t>s</m:t>
+                        </m:r>
+                      </m:den>
+                    </m:f>
+                  </m:oMath>
+                </a14:m>
+                <a:endParaRPr lang="de-DE" dirty="0"/>
+              </a:p>
+              <a:p>
+                <a:r>
+                  <a:rPr lang="de-DE" dirty="0" err="1"/>
+                  <a:t>Desired</a:t>
+                </a:r>
+                <a:r>
+                  <a:rPr lang="de-DE" dirty="0"/>
+                  <a:t> </a:t>
+                </a:r>
+                <a:r>
+                  <a:rPr lang="de-DE" dirty="0" err="1"/>
+                  <a:t>torque</a:t>
+                </a:r>
+                <a:r>
+                  <a:rPr lang="de-DE" dirty="0"/>
+                  <a:t> </a:t>
+                </a:r>
+                <a:r>
+                  <a:rPr lang="de-DE" dirty="0" err="1"/>
+                  <a:t>response</a:t>
+                </a:r>
+                <a:r>
+                  <a:rPr lang="de-DE" dirty="0"/>
+                  <a:t>: </a:t>
+                </a:r>
+                <a14:m>
+                  <m:oMath xmlns:m="http://schemas.openxmlformats.org/officeDocument/2006/math">
+                    <m:r>
+                      <a:rPr lang="de-DE" b="0" i="1" smtClean="0">
+                        <a:latin typeface="Cambria Math" panose="02040503050406030204" pitchFamily="18" charset="0"/>
+                      </a:rPr>
+                      <m:t>21</m:t>
+                    </m:r>
+                    <m:r>
+                      <m:rPr>
+                        <m:sty m:val="p"/>
+                      </m:rPr>
+                      <a:rPr lang="de-DE" b="0" i="0" smtClean="0">
+                        <a:latin typeface="Cambria Math" panose="02040503050406030204" pitchFamily="18" charset="0"/>
+                      </a:rPr>
+                      <m:t>Nm</m:t>
+                    </m:r>
+                  </m:oMath>
+                </a14:m>
+                <a:endParaRPr lang="de-DE" dirty="0"/>
+              </a:p>
+              <a:p>
+                <a:pPr>
+                  <a:buFont typeface="Wingdings" pitchFamily="2" charset="2"/>
+                  <a:buChar char="à"/>
+                </a:pPr>
+                <a:r>
+                  <a:rPr lang="de-DE" dirty="0"/>
+                  <a:t> </a:t>
+                </a:r>
+                <a14:m>
+                  <m:oMath xmlns:m="http://schemas.openxmlformats.org/officeDocument/2006/math">
+                    <m:r>
+                      <m:rPr>
+                        <m:sty m:val="p"/>
+                      </m:rPr>
+                      <a:rPr lang="de-DE" b="0" i="0" smtClean="0">
+                        <a:latin typeface="Cambria Math" panose="02040503050406030204" pitchFamily="18" charset="0"/>
+                      </a:rPr>
+                      <m:t>P</m:t>
+                    </m:r>
+                    <m:r>
+                      <a:rPr lang="de-DE" b="0" i="1" smtClean="0">
+                        <a:latin typeface="Cambria Math" panose="02040503050406030204" pitchFamily="18" charset="0"/>
+                      </a:rPr>
+                      <m:t>=7</m:t>
+                    </m:r>
+                    <m:f>
+                      <m:fPr>
+                        <m:type m:val="lin"/>
+                        <m:ctrlPr>
+                          <a:rPr lang="de-DE" b="0" smtClean="0">
+                            <a:latin typeface="Cambria Math" panose="02040503050406030204" pitchFamily="18" charset="0"/>
+                          </a:rPr>
+                        </m:ctrlPr>
+                      </m:fPr>
+                      <m:num>
+                        <m:r>
+                          <m:rPr>
+                            <m:sty m:val="p"/>
+                          </m:rPr>
+                          <a:rPr lang="de-DE" b="0" i="0" smtClean="0">
+                            <a:latin typeface="Cambria Math" panose="02040503050406030204" pitchFamily="18" charset="0"/>
+                          </a:rPr>
+                          <m:t>Nm</m:t>
+                        </m:r>
+                      </m:num>
+                      <m:den>
+                        <m:d>
+                          <m:dPr>
+                            <m:ctrlPr>
+                              <a:rPr lang="de-DE" b="0" smtClean="0">
+                                <a:latin typeface="Cambria Math" panose="02040503050406030204" pitchFamily="18" charset="0"/>
+                              </a:rPr>
+                            </m:ctrlPr>
+                          </m:dPr>
+                          <m:e>
+                            <m:f>
+                              <m:fPr>
+                                <m:type m:val="lin"/>
+                                <m:ctrlPr>
+                                  <a:rPr lang="de-DE" b="0" smtClean="0">
+                                    <a:latin typeface="Cambria Math" panose="02040503050406030204" pitchFamily="18" charset="0"/>
+                                  </a:rPr>
+                                </m:ctrlPr>
+                              </m:fPr>
+                              <m:num>
+                                <m:r>
+                                  <m:rPr>
+                                    <m:sty m:val="p"/>
+                                  </m:rPr>
+                                  <a:rPr lang="de-DE" b="0" i="0" smtClean="0">
+                                    <a:latin typeface="Cambria Math" panose="02040503050406030204" pitchFamily="18" charset="0"/>
+                                  </a:rPr>
+                                  <m:t>m</m:t>
+                                </m:r>
+                              </m:num>
+                              <m:den>
+                                <m:r>
+                                  <m:rPr>
+                                    <m:sty m:val="p"/>
+                                  </m:rPr>
+                                  <a:rPr lang="de-DE" b="0" i="0" smtClean="0">
+                                    <a:latin typeface="Cambria Math" panose="02040503050406030204" pitchFamily="18" charset="0"/>
+                                  </a:rPr>
+                                  <m:t>s</m:t>
+                                </m:r>
+                              </m:den>
+                            </m:f>
+                          </m:e>
+                        </m:d>
+                      </m:den>
+                    </m:f>
+                  </m:oMath>
+                </a14:m>
+                <a:endParaRPr lang="de-DE" dirty="0"/>
+              </a:p>
+              <a:p>
+                <a:pPr>
+                  <a:buFont typeface="Wingdings" pitchFamily="2" charset="2"/>
+                  <a:buChar char="à"/>
+                </a:pPr>
+                <a:r>
+                  <a:rPr lang="de-DE" dirty="0"/>
+                  <a:t> Integral </a:t>
+                </a:r>
+                <a:r>
+                  <a:rPr lang="de-DE" dirty="0" err="1"/>
+                  <a:t>gain</a:t>
+                </a:r>
+                <a:r>
+                  <a:rPr lang="de-DE" dirty="0"/>
+                  <a:t> (</a:t>
+                </a:r>
+                <a14:m>
+                  <m:oMath xmlns:m="http://schemas.openxmlformats.org/officeDocument/2006/math">
+                    <m:f>
+                      <m:fPr>
+                        <m:type m:val="lin"/>
+                        <m:ctrlPr>
+                          <a:rPr lang="de-DE" i="1" smtClean="0">
+                            <a:latin typeface="Cambria Math" panose="02040503050406030204" pitchFamily="18" charset="0"/>
+                          </a:rPr>
+                        </m:ctrlPr>
+                      </m:fPr>
+                      <m:num>
+                        <m:r>
+                          <a:rPr lang="de-DE" b="0" i="1" smtClean="0">
+                            <a:latin typeface="Cambria Math" panose="02040503050406030204" pitchFamily="18" charset="0"/>
+                          </a:rPr>
+                          <m:t>1</m:t>
+                        </m:r>
+                      </m:num>
+                      <m:den>
+                        <m:r>
+                          <a:rPr lang="de-DE" b="0" i="1" smtClean="0">
+                            <a:latin typeface="Cambria Math" panose="02040503050406030204" pitchFamily="18" charset="0"/>
+                          </a:rPr>
+                          <m:t>10</m:t>
+                        </m:r>
+                      </m:den>
+                    </m:f>
+                  </m:oMath>
+                </a14:m>
+                <a:r>
+                  <a:rPr lang="de-DE" dirty="0"/>
+                  <a:t> </a:t>
+                </a:r>
+                <a:r>
+                  <a:rPr lang="de-DE" dirty="0" err="1"/>
+                  <a:t>rule</a:t>
+                </a:r>
+                <a:r>
+                  <a:rPr lang="de-DE" dirty="0"/>
+                  <a:t>): </a:t>
+                </a:r>
+                <a14:m>
+                  <m:oMath xmlns:m="http://schemas.openxmlformats.org/officeDocument/2006/math">
+                    <m:r>
+                      <m:rPr>
+                        <m:sty m:val="p"/>
+                      </m:rPr>
+                      <a:rPr lang="de-DE" b="0" i="0" smtClean="0">
+                        <a:latin typeface="Cambria Math" panose="02040503050406030204" pitchFamily="18" charset="0"/>
+                      </a:rPr>
+                      <m:t>I</m:t>
+                    </m:r>
+                    <m:r>
+                      <a:rPr lang="de-DE" b="0" i="1" smtClean="0">
+                        <a:latin typeface="Cambria Math" panose="02040503050406030204" pitchFamily="18" charset="0"/>
+                      </a:rPr>
+                      <m:t>=0.7</m:t>
+                    </m:r>
+                  </m:oMath>
+                </a14:m>
+                <a:endParaRPr lang="de-DE" dirty="0"/>
+              </a:p>
+            </p:txBody>
+          </p:sp>
+        </mc:Choice>
+        <mc:Fallback>
+          <p:sp>
+            <p:nvSpPr>
+              <p:cNvPr id="4" name="Inhaltsplatzhalter 3">
+                <a:extLst>
+                  <a:ext uri="{FF2B5EF4-FFF2-40B4-BE49-F238E27FC236}">
+                    <a16:creationId xmlns:a16="http://schemas.microsoft.com/office/drawing/2014/main" id="{31000492-FD46-6E0B-2937-3A8A79556A66}"/>
+                  </a:ext>
+                </a:extLst>
+              </p:cNvPr>
+              <p:cNvSpPr>
+                <a:spLocks noGrp="1" noRot="1" noChangeAspect="1" noMove="1" noResize="1" noEditPoints="1" noAdjustHandles="1" noChangeArrowheads="1" noChangeShapeType="1" noTextEdit="1"/>
+              </p:cNvSpPr>
+              <p:nvPr>
+                <p:ph idx="1"/>
+              </p:nvPr>
+            </p:nvSpPr>
+            <p:spPr>
+              <a:blipFill>
+                <a:blip r:embed="rId2"/>
+                <a:stretch>
+                  <a:fillRect l="-1086" t="-3488" b="-15407"/>
+                </a:stretch>
+              </a:blipFill>
+            </p:spPr>
+            <p:txBody>
+              <a:bodyPr/>
+              <a:lstStyle/>
+              <a:p>
+                <a:r>
+                  <a:rPr lang="de-DE">
+                    <a:noFill/>
+                  </a:rPr>
+                  <a:t> </a:t>
+                </a:r>
+              </a:p>
+            </p:txBody>
+          </p:sp>
+        </mc:Fallback>
+      </mc:AlternateContent>
+      <p:sp>
+        <p:nvSpPr>
+          <p:cNvPr id="2" name="Foliennummernplatzhalter 1">
+            <a:extLst>
+              <a:ext uri="{FF2B5EF4-FFF2-40B4-BE49-F238E27FC236}">
+                <a16:creationId xmlns:a16="http://schemas.microsoft.com/office/drawing/2014/main" id="{BB3F6194-F261-C7AC-665C-CE2363FF0F91}"/>
               </a:ext>
             </a:extLst>
           </p:cNvPr>
@@ -4872,7 +5387,7 @@
     </p:spTree>
     <p:extLst>
       <p:ext uri="{BB962C8B-B14F-4D97-AF65-F5344CB8AC3E}">
-        <p14:creationId xmlns:p14="http://schemas.microsoft.com/office/powerpoint/2010/main" val="2536200423"/>
+        <p14:creationId xmlns:p14="http://schemas.microsoft.com/office/powerpoint/2010/main" val="912741069"/>
       </p:ext>
     </p:extLst>
   </p:cSld>
@@ -4904,7 +5419,7 @@
           <p:cNvPr id="2" name="Titel 1">
             <a:extLst>
               <a:ext uri="{FF2B5EF4-FFF2-40B4-BE49-F238E27FC236}">
-                <a16:creationId xmlns:a16="http://schemas.microsoft.com/office/drawing/2014/main" id="{DE638CB1-1CE5-2C1D-4952-D96FCAE8716F}"/>
+                <a16:creationId xmlns:a16="http://schemas.microsoft.com/office/drawing/2014/main" id="{85BF6517-6984-9407-6B74-9C4B4219E060}"/>
               </a:ext>
             </a:extLst>
           </p:cNvPr>
@@ -4922,15 +5437,7 @@
           <a:p>
             <a:r>
               <a:rPr lang="de-DE" dirty="0"/>
-              <a:t>T-</a:t>
-            </a:r>
-            <a:r>
-              <a:rPr lang="de-DE" dirty="0" err="1"/>
-              <a:t>Sum</a:t>
-            </a:r>
-            <a:r>
-              <a:rPr lang="de-DE" dirty="0"/>
-              <a:t> Method</a:t>
+              <a:t>Ziegler–Nichols Method</a:t>
             </a:r>
           </a:p>
         </p:txBody>
@@ -4940,7 +5447,7 @@
           <p:cNvPr id="3" name="Inhaltsplatzhalter 2">
             <a:extLst>
               <a:ext uri="{FF2B5EF4-FFF2-40B4-BE49-F238E27FC236}">
-                <a16:creationId xmlns:a16="http://schemas.microsoft.com/office/drawing/2014/main" id="{A1D58EA8-D03B-3C93-1C0F-F98C41CE636F}"/>
+                <a16:creationId xmlns:a16="http://schemas.microsoft.com/office/drawing/2014/main" id="{D2DFD6F6-7882-2454-DA98-53A8C188E030}"/>
               </a:ext>
             </a:extLst>
           </p:cNvPr>
@@ -4958,34 +5465,7 @@
           <a:p>
             <a:r>
               <a:rPr lang="de-DE" dirty="0" err="1"/>
-              <a:t>Based</a:t>
-            </a:r>
-            <a:r>
-              <a:rPr lang="de-DE" dirty="0"/>
-              <a:t> on </a:t>
-            </a:r>
-            <a:r>
-              <a:rPr lang="de-DE" dirty="0" err="1"/>
-              <a:t>process</a:t>
-            </a:r>
-            <a:r>
-              <a:rPr lang="de-DE" dirty="0"/>
-              <a:t> time </a:t>
-            </a:r>
-            <a:r>
-              <a:rPr lang="de-DE" dirty="0" err="1"/>
-              <a:t>constants</a:t>
-            </a:r>
-            <a:endParaRPr lang="de-DE" dirty="0"/>
-          </a:p>
-          <a:p>
-            <a:r>
-              <a:rPr lang="de-DE" dirty="0"/>
-              <a:t>More </a:t>
-            </a:r>
-            <a:r>
-              <a:rPr lang="de-DE" dirty="0" err="1"/>
-              <a:t>conservative</a:t>
+              <a:t>Increase</a:t>
             </a:r>
             <a:r>
               <a:rPr lang="de-DE" dirty="0"/>
@@ -4993,14 +5473,7 @@
             </a:r>
             <a:r>
               <a:rPr lang="de-DE" dirty="0" err="1"/>
-              <a:t>tuning</a:t>
-            </a:r>
-            <a:endParaRPr lang="de-DE" dirty="0"/>
-          </a:p>
-          <a:p>
-            <a:r>
-              <a:rPr lang="de-DE" dirty="0" err="1"/>
-              <a:t>Often</a:t>
+              <a:t>gain</a:t>
             </a:r>
             <a:r>
               <a:rPr lang="de-DE" dirty="0"/>
@@ -5008,7 +5481,7 @@
             </a:r>
             <a:r>
               <a:rPr lang="de-DE" dirty="0" err="1"/>
-              <a:t>better</a:t>
+              <a:t>until</a:t>
             </a:r>
             <a:r>
               <a:rPr lang="de-DE" dirty="0"/>
@@ -5016,10 +5489,43 @@
             </a:r>
             <a:r>
               <a:rPr lang="de-DE" dirty="0" err="1"/>
-              <a:t>robustness</a:t>
+              <a:t>oscillation</a:t>
             </a:r>
             <a:endParaRPr lang="de-DE" dirty="0"/>
           </a:p>
+          <a:p>
+            <a:r>
+              <a:rPr lang="de-DE" dirty="0"/>
+              <a:t>Use </a:t>
+            </a:r>
+            <a:r>
+              <a:rPr lang="de-DE" dirty="0" err="1"/>
+              <a:t>empirical</a:t>
+            </a:r>
+            <a:r>
+              <a:rPr lang="de-DE" dirty="0"/>
+              <a:t> </a:t>
+            </a:r>
+            <a:r>
+              <a:rPr lang="de-DE" dirty="0" err="1"/>
+              <a:t>tuning</a:t>
+            </a:r>
+            <a:r>
+              <a:rPr lang="de-DE" dirty="0"/>
+              <a:t> </a:t>
+            </a:r>
+            <a:r>
+              <a:rPr lang="de-DE" dirty="0" err="1"/>
+              <a:t>formulas</a:t>
+            </a:r>
+            <a:endParaRPr lang="de-DE" dirty="0"/>
+          </a:p>
+          <a:p>
+            <a:r>
+              <a:rPr lang="de-DE" dirty="0"/>
+              <a:t>Fast but aggressive</a:t>
+            </a:r>
+          </a:p>
         </p:txBody>
       </p:sp>
       <p:sp>
@@ -5027,7 +5533,7 @@
           <p:cNvPr id="4" name="Foliennummernplatzhalter 3">
             <a:extLst>
               <a:ext uri="{FF2B5EF4-FFF2-40B4-BE49-F238E27FC236}">
-                <a16:creationId xmlns:a16="http://schemas.microsoft.com/office/drawing/2014/main" id="{E7F171FE-3A4D-6228-1060-0E5E0C54399A}"/>
+                <a16:creationId xmlns:a16="http://schemas.microsoft.com/office/drawing/2014/main" id="{8F4D5E92-4A90-3146-A07C-C04412405FF1}"/>
               </a:ext>
             </a:extLst>
           </p:cNvPr>
@@ -5054,7 +5560,7 @@
     </p:spTree>
     <p:extLst>
       <p:ext uri="{BB962C8B-B14F-4D97-AF65-F5344CB8AC3E}">
-        <p14:creationId xmlns:p14="http://schemas.microsoft.com/office/powerpoint/2010/main" val="2970064966"/>
+        <p14:creationId xmlns:p14="http://schemas.microsoft.com/office/powerpoint/2010/main" val="2536200423"/>
       </p:ext>
     </p:extLst>
   </p:cSld>
@@ -5086,7 +5592,7 @@
           <p:cNvPr id="2" name="Titel 1">
             <a:extLst>
               <a:ext uri="{FF2B5EF4-FFF2-40B4-BE49-F238E27FC236}">
-                <a16:creationId xmlns:a16="http://schemas.microsoft.com/office/drawing/2014/main" id="{CAC1DDF4-C472-55A2-F436-F041165734C9}"/>
+                <a16:creationId xmlns:a16="http://schemas.microsoft.com/office/drawing/2014/main" id="{DE638CB1-1CE5-2C1D-4952-D96FCAE8716F}"/>
               </a:ext>
             </a:extLst>
           </p:cNvPr>
@@ -5103,8 +5609,71 @@
           <a:lstStyle/>
           <a:p>
             <a:r>
+              <a:rPr lang="de-DE" dirty="0"/>
+              <a:t>T-</a:t>
+            </a:r>
+            <a:r>
               <a:rPr lang="de-DE" dirty="0" err="1"/>
-              <a:t>Sensitivity</a:t>
+              <a:t>Sum</a:t>
+            </a:r>
+            <a:r>
+              <a:rPr lang="de-DE" dirty="0"/>
+              <a:t> Method</a:t>
+            </a:r>
+          </a:p>
+        </p:txBody>
+      </p:sp>
+      <p:sp>
+        <p:nvSpPr>
+          <p:cNvPr id="3" name="Inhaltsplatzhalter 2">
+            <a:extLst>
+              <a:ext uri="{FF2B5EF4-FFF2-40B4-BE49-F238E27FC236}">
+                <a16:creationId xmlns:a16="http://schemas.microsoft.com/office/drawing/2014/main" id="{A1D58EA8-D03B-3C93-1C0F-F98C41CE636F}"/>
+              </a:ext>
+            </a:extLst>
+          </p:cNvPr>
+          <p:cNvSpPr>
+            <a:spLocks noGrp="1"/>
+          </p:cNvSpPr>
+          <p:nvPr>
+            <p:ph idx="1"/>
+          </p:nvPr>
+        </p:nvSpPr>
+        <p:spPr/>
+        <p:txBody>
+          <a:bodyPr/>
+          <a:lstStyle/>
+          <a:p>
+            <a:r>
+              <a:rPr lang="de-DE" dirty="0" err="1"/>
+              <a:t>Based</a:t>
+            </a:r>
+            <a:r>
+              <a:rPr lang="de-DE" dirty="0"/>
+              <a:t> on </a:t>
+            </a:r>
+            <a:r>
+              <a:rPr lang="de-DE" dirty="0" err="1"/>
+              <a:t>process</a:t>
+            </a:r>
+            <a:r>
+              <a:rPr lang="de-DE" dirty="0"/>
+              <a:t> time </a:t>
+            </a:r>
+            <a:r>
+              <a:rPr lang="de-DE" dirty="0" err="1"/>
+              <a:t>constants</a:t>
+            </a:r>
+            <a:endParaRPr lang="de-DE" dirty="0"/>
+          </a:p>
+          <a:p>
+            <a:r>
+              <a:rPr lang="de-DE" dirty="0"/>
+              <a:t>More </a:t>
+            </a:r>
+            <a:r>
+              <a:rPr lang="de-DE" dirty="0" err="1"/>
+              <a:t>conservative</a:t>
             </a:r>
             <a:r>
               <a:rPr lang="de-DE" dirty="0"/>
@@ -5112,36 +5681,14 @@
             </a:r>
             <a:r>
               <a:rPr lang="de-DE" dirty="0" err="1"/>
-              <a:t>Functions</a:t>
+              <a:t>tuning</a:t>
             </a:r>
             <a:endParaRPr lang="de-DE" dirty="0"/>
           </a:p>
-        </p:txBody>
-      </p:sp>
-      <p:sp>
-        <p:nvSpPr>
-          <p:cNvPr id="3" name="Inhaltsplatzhalter 2">
-            <a:extLst>
-              <a:ext uri="{FF2B5EF4-FFF2-40B4-BE49-F238E27FC236}">
-                <a16:creationId xmlns:a16="http://schemas.microsoft.com/office/drawing/2014/main" id="{1F075915-A5A5-515D-255C-C8B0D195F958}"/>
-              </a:ext>
-            </a:extLst>
-          </p:cNvPr>
-          <p:cNvSpPr>
-            <a:spLocks noGrp="1"/>
-          </p:cNvSpPr>
-          <p:nvPr>
-            <p:ph idx="1"/>
-          </p:nvPr>
-        </p:nvSpPr>
-        <p:spPr/>
-        <p:txBody>
-          <a:bodyPr/>
-          <a:lstStyle/>
           <a:p>
             <a:r>
               <a:rPr lang="de-DE" dirty="0" err="1"/>
-              <a:t>Measure</a:t>
+              <a:t>Often</a:t>
             </a:r>
             <a:r>
               <a:rPr lang="de-DE" dirty="0"/>
@@ -5149,7 +5696,7 @@
             </a:r>
             <a:r>
               <a:rPr lang="de-DE" dirty="0" err="1"/>
-              <a:t>effect</a:t>
+              <a:t>better</a:t>
             </a:r>
             <a:r>
               <a:rPr lang="de-DE" dirty="0"/>
@@ -5157,61 +5704,10 @@
             </a:r>
             <a:r>
               <a:rPr lang="de-DE" dirty="0" err="1"/>
-              <a:t>of</a:t>
-            </a:r>
-            <a:r>
-              <a:rPr lang="de-DE" dirty="0"/>
-              <a:t> </a:t>
-            </a:r>
-            <a:r>
-              <a:rPr lang="de-DE" dirty="0" err="1"/>
-              <a:t>disturbances</a:t>
-            </a:r>
-            <a:r>
-              <a:rPr lang="de-DE" dirty="0"/>
-              <a:t> and </a:t>
-            </a:r>
-            <a:r>
-              <a:rPr lang="de-DE" dirty="0" err="1"/>
-              <a:t>uncertainties</a:t>
+              <a:t>robustness</a:t>
             </a:r>
             <a:endParaRPr lang="de-DE" dirty="0"/>
           </a:p>
-          <a:p>
-            <a:r>
-              <a:rPr lang="de-DE" dirty="0"/>
-              <a:t>Low </a:t>
-            </a:r>
-            <a:r>
-              <a:rPr lang="de-DE" dirty="0" err="1"/>
-              <a:t>sensitivity</a:t>
-            </a:r>
-            <a:r>
-              <a:rPr lang="de-DE" dirty="0"/>
-              <a:t> </a:t>
-            </a:r>
-            <a:r>
-              <a:rPr lang="de-DE" dirty="0" err="1"/>
-              <a:t>desired</a:t>
-            </a:r>
-            <a:r>
-              <a:rPr lang="de-DE" dirty="0"/>
-              <a:t> at </a:t>
-            </a:r>
-            <a:r>
-              <a:rPr lang="de-DE" dirty="0" err="1"/>
-              <a:t>low</a:t>
-            </a:r>
-            <a:r>
-              <a:rPr lang="de-DE" dirty="0"/>
-              <a:t> </a:t>
-            </a:r>
-            <a:r>
-              <a:rPr lang="de-DE" dirty="0" err="1"/>
-              <a:t>frequencies</a:t>
-            </a:r>
-            <a:endParaRPr lang="de-DE" dirty="0"/>
-          </a:p>
         </p:txBody>
       </p:sp>
       <p:sp>
@@ -5219,7 +5715,7 @@
           <p:cNvPr id="4" name="Foliennummernplatzhalter 3">
             <a:extLst>
               <a:ext uri="{FF2B5EF4-FFF2-40B4-BE49-F238E27FC236}">
-                <a16:creationId xmlns:a16="http://schemas.microsoft.com/office/drawing/2014/main" id="{E37D1837-255E-6C10-A17B-BA21CBEB85AA}"/>
+                <a16:creationId xmlns:a16="http://schemas.microsoft.com/office/drawing/2014/main" id="{E7F171FE-3A4D-6228-1060-0E5E0C54399A}"/>
               </a:ext>
             </a:extLst>
           </p:cNvPr>
@@ -5246,7 +5742,7 @@
     </p:spTree>
     <p:extLst>
       <p:ext uri="{BB962C8B-B14F-4D97-AF65-F5344CB8AC3E}">
-        <p14:creationId xmlns:p14="http://schemas.microsoft.com/office/powerpoint/2010/main" val="3996757241"/>
+        <p14:creationId xmlns:p14="http://schemas.microsoft.com/office/powerpoint/2010/main" val="2970064966"/>
       </p:ext>
     </p:extLst>
   </p:cSld>
@@ -5278,7 +5774,7 @@
           <p:cNvPr id="2" name="Titel 1">
             <a:extLst>
               <a:ext uri="{FF2B5EF4-FFF2-40B4-BE49-F238E27FC236}">
-                <a16:creationId xmlns:a16="http://schemas.microsoft.com/office/drawing/2014/main" id="{4907BF0F-5141-ACA9-F2A6-7743A66891CF}"/>
+                <a16:creationId xmlns:a16="http://schemas.microsoft.com/office/drawing/2014/main" id="{CAC1DDF4-C472-55A2-F436-F041165734C9}"/>
               </a:ext>
             </a:extLst>
           </p:cNvPr>
@@ -5296,7 +5792,15 @@
           <a:p>
             <a:r>
               <a:rPr lang="de-DE" dirty="0" err="1"/>
-              <a:t>Robustness</a:t>
+              <a:t>Sensitivity</a:t>
+            </a:r>
+            <a:r>
+              <a:rPr lang="de-DE" dirty="0"/>
+              <a:t> </a:t>
+            </a:r>
+            <a:r>
+              <a:rPr lang="de-DE" dirty="0" err="1"/>
+              <a:t>Functions</a:t>
             </a:r>
             <a:endParaRPr lang="de-DE" dirty="0"/>
           </a:p>
@@ -5307,7 +5811,7 @@
           <p:cNvPr id="3" name="Inhaltsplatzhalter 2">
             <a:extLst>
               <a:ext uri="{FF2B5EF4-FFF2-40B4-BE49-F238E27FC236}">
-                <a16:creationId xmlns:a16="http://schemas.microsoft.com/office/drawing/2014/main" id="{C4D88D4B-F47C-C5F8-466E-E710F50AD2B4}"/>
+                <a16:creationId xmlns:a16="http://schemas.microsoft.com/office/drawing/2014/main" id="{1F075915-A5A5-515D-255C-C8B0D195F958}"/>
               </a:ext>
             </a:extLst>
           </p:cNvPr>
@@ -5324,12 +5828,8 @@
           <a:lstStyle/>
           <a:p>
             <a:r>
-              <a:rPr lang="de-DE" dirty="0"/>
-              <a:t>Performance </a:t>
-            </a:r>
-            <a:r>
               <a:rPr lang="de-DE" dirty="0" err="1"/>
-              <a:t>under</a:t>
+              <a:t>Measure</a:t>
             </a:r>
             <a:r>
               <a:rPr lang="de-DE" dirty="0"/>
@@ -5337,40 +5837,69 @@
             </a:r>
             <a:r>
               <a:rPr lang="de-DE" dirty="0" err="1"/>
-              <a:t>uncertainty</a:t>
+              <a:t>effect</a:t>
+            </a:r>
+            <a:r>
+              <a:rPr lang="de-DE" dirty="0"/>
+              <a:t> </a:t>
+            </a:r>
+            <a:r>
+              <a:rPr lang="de-DE" dirty="0" err="1"/>
+              <a:t>of</a:t>
+            </a:r>
+            <a:r>
+              <a:rPr lang="de-DE" dirty="0"/>
+              <a:t> </a:t>
+            </a:r>
+            <a:r>
+              <a:rPr lang="de-DE" dirty="0" err="1"/>
+              <a:t>disturbances</a:t>
+            </a:r>
+            <a:r>
+              <a:rPr lang="de-DE" dirty="0"/>
+              <a:t> and </a:t>
+            </a:r>
+            <a:r>
+              <a:rPr lang="de-DE" dirty="0" err="1"/>
+              <a:t>uncertainties</a:t>
             </a:r>
             <a:endParaRPr lang="de-DE" dirty="0"/>
           </a:p>
           <a:p>
             <a:r>
               <a:rPr lang="de-DE" dirty="0"/>
-              <a:t>Trade-off </a:t>
+              <a:t>Low </a:t>
             </a:r>
             <a:r>
               <a:rPr lang="de-DE" dirty="0" err="1"/>
-              <a:t>with</a:t>
+              <a:t>sensitivity</a:t>
             </a:r>
             <a:r>
               <a:rPr lang="de-DE" dirty="0"/>
-              <a:t> optimal </a:t>
+              <a:t> </a:t>
             </a:r>
             <a:r>
               <a:rPr lang="de-DE" dirty="0" err="1"/>
-              <a:t>performance</a:t>
+              <a:t>desired</a:t>
+            </a:r>
+            <a:r>
+              <a:rPr lang="de-DE" dirty="0"/>
+              <a:t> at </a:t>
+            </a:r>
+            <a:r>
+              <a:rPr lang="de-DE" dirty="0" err="1"/>
+              <a:t>low</a:t>
+            </a:r>
+            <a:r>
+              <a:rPr lang="de-DE" dirty="0"/>
+              <a:t> </a:t>
+            </a:r>
+            <a:r>
+              <a:rPr lang="de-DE" dirty="0" err="1"/>
+              <a:t>frequencies</a:t>
             </a:r>
             <a:endParaRPr lang="de-DE" dirty="0"/>
           </a:p>
-          <a:p>
-            <a:r>
-              <a:rPr lang="de-DE" dirty="0"/>
-              <a:t>Essential in real </a:t>
-            </a:r>
-            <a:r>
-              <a:rPr lang="de-DE" dirty="0" err="1"/>
-              <a:t>systems</a:t>
-            </a:r>
-            <a:endParaRPr lang="de-DE" dirty="0"/>
-          </a:p>
         </p:txBody>
       </p:sp>
       <p:sp>
@@ -5378,7 +5907,7 @@
           <p:cNvPr id="4" name="Foliennummernplatzhalter 3">
             <a:extLst>
               <a:ext uri="{FF2B5EF4-FFF2-40B4-BE49-F238E27FC236}">
-                <a16:creationId xmlns:a16="http://schemas.microsoft.com/office/drawing/2014/main" id="{0146E7BA-9A8D-15EB-A0A0-71D8F00A4086}"/>
+                <a16:creationId xmlns:a16="http://schemas.microsoft.com/office/drawing/2014/main" id="{E37D1837-255E-6C10-A17B-BA21CBEB85AA}"/>
               </a:ext>
             </a:extLst>
           </p:cNvPr>
@@ -5405,7 +5934,7 @@
     </p:spTree>
     <p:extLst>
       <p:ext uri="{BB962C8B-B14F-4D97-AF65-F5344CB8AC3E}">
-        <p14:creationId xmlns:p14="http://schemas.microsoft.com/office/powerpoint/2010/main" val="2529282098"/>
+        <p14:creationId xmlns:p14="http://schemas.microsoft.com/office/powerpoint/2010/main" val="3996757241"/>
       </p:ext>
     </p:extLst>
   </p:cSld>
@@ -5437,7 +5966,7 @@
           <p:cNvPr id="2" name="Titel 1">
             <a:extLst>
               <a:ext uri="{FF2B5EF4-FFF2-40B4-BE49-F238E27FC236}">
-                <a16:creationId xmlns:a16="http://schemas.microsoft.com/office/drawing/2014/main" id="{4526C0AA-D9C3-34B4-74D2-760A494AEB0D}"/>
+                <a16:creationId xmlns:a16="http://schemas.microsoft.com/office/drawing/2014/main" id="{4907BF0F-5141-ACA9-F2A6-7743A66891CF}"/>
               </a:ext>
             </a:extLst>
           </p:cNvPr>
@@ -5454,9 +5983,10 @@
           <a:lstStyle/>
           <a:p>
             <a:r>
-              <a:rPr lang="de-DE" dirty="0"/>
-              <a:t>Cascade Control</a:t>
-            </a:r>
+              <a:rPr lang="de-DE" dirty="0" err="1"/>
+              <a:t>Robustness</a:t>
+            </a:r>
+            <a:endParaRPr lang="de-DE" dirty="0"/>
           </a:p>
         </p:txBody>
       </p:sp>
@@ -5465,7 +5995,7 @@
           <p:cNvPr id="3" name="Inhaltsplatzhalter 2">
             <a:extLst>
               <a:ext uri="{FF2B5EF4-FFF2-40B4-BE49-F238E27FC236}">
-                <a16:creationId xmlns:a16="http://schemas.microsoft.com/office/drawing/2014/main" id="{523AC845-AEF8-1D08-A3FD-8EE28F4C9D4E}"/>
+                <a16:creationId xmlns:a16="http://schemas.microsoft.com/office/drawing/2014/main" id="{C4D88D4B-F47C-C5F8-466E-E710F50AD2B4}"/>
               </a:ext>
             </a:extLst>
           </p:cNvPr>
@@ -5481,7 +6011,53 @@
           <a:bodyPr/>
           <a:lstStyle/>
           <a:p>
-            <a:endParaRPr lang="de-DE"/>
+            <a:r>
+              <a:rPr lang="de-DE" dirty="0"/>
+              <a:t>Performance </a:t>
+            </a:r>
+            <a:r>
+              <a:rPr lang="de-DE" dirty="0" err="1"/>
+              <a:t>under</a:t>
+            </a:r>
+            <a:r>
+              <a:rPr lang="de-DE" dirty="0"/>
+              <a:t> </a:t>
+            </a:r>
+            <a:r>
+              <a:rPr lang="de-DE" dirty="0" err="1"/>
+              <a:t>uncertainty</a:t>
+            </a:r>
+            <a:endParaRPr lang="de-DE" dirty="0"/>
+          </a:p>
+          <a:p>
+            <a:r>
+              <a:rPr lang="de-DE" dirty="0"/>
+              <a:t>Trade-off </a:t>
+            </a:r>
+            <a:r>
+              <a:rPr lang="de-DE" dirty="0" err="1"/>
+              <a:t>with</a:t>
+            </a:r>
+            <a:r>
+              <a:rPr lang="de-DE" dirty="0"/>
+              <a:t> optimal </a:t>
+            </a:r>
+            <a:r>
+              <a:rPr lang="de-DE" dirty="0" err="1"/>
+              <a:t>performance</a:t>
+            </a:r>
+            <a:endParaRPr lang="de-DE" dirty="0"/>
+          </a:p>
+          <a:p>
+            <a:r>
+              <a:rPr lang="de-DE" dirty="0"/>
+              <a:t>Essential in real </a:t>
+            </a:r>
+            <a:r>
+              <a:rPr lang="de-DE" dirty="0" err="1"/>
+              <a:t>systems</a:t>
+            </a:r>
+            <a:endParaRPr lang="de-DE" dirty="0"/>
           </a:p>
         </p:txBody>
       </p:sp>
@@ -5490,7 +6066,7 @@
           <p:cNvPr id="4" name="Foliennummernplatzhalter 3">
             <a:extLst>
               <a:ext uri="{FF2B5EF4-FFF2-40B4-BE49-F238E27FC236}">
-                <a16:creationId xmlns:a16="http://schemas.microsoft.com/office/drawing/2014/main" id="{E689E192-E06F-6B6D-EA9D-F53924D4324F}"/>
+                <a16:creationId xmlns:a16="http://schemas.microsoft.com/office/drawing/2014/main" id="{0146E7BA-9A8D-15EB-A0A0-71D8F00A4086}"/>
               </a:ext>
             </a:extLst>
           </p:cNvPr>
@@ -5509,6 +6085,118 @@
             <a:fld id="{08C366F5-AFAD-49CB-854A-9D9E238FCA13}" type="slidenum">
               <a:rPr lang="en-GB" smtClean="0"/>
               <a:t>17</a:t>
+            </a:fld>
+            <a:endParaRPr lang="en-GB"/>
+          </a:p>
+        </p:txBody>
+      </p:sp>
+    </p:spTree>
+    <p:extLst>
+      <p:ext uri="{BB962C8B-B14F-4D97-AF65-F5344CB8AC3E}">
+        <p14:creationId xmlns:p14="http://schemas.microsoft.com/office/powerpoint/2010/main" val="2529282098"/>
+      </p:ext>
+    </p:extLst>
+  </p:cSld>
+  <p:clrMapOvr>
+    <a:masterClrMapping/>
+  </p:clrMapOvr>
+</p:sld>
+</file>
+
+<file path=ppt/slides/slide18.xml><?xml version="1.0" encoding="utf-8"?>
+<p:sld xmlns:a="http://schemas.openxmlformats.org/drawingml/2006/main" xmlns:r="http://schemas.openxmlformats.org/officeDocument/2006/relationships" xmlns:p="http://schemas.openxmlformats.org/presentationml/2006/main">
+  <p:cSld>
+    <p:spTree>
+      <p:nvGrpSpPr>
+        <p:cNvPr id="1" name=""/>
+        <p:cNvGrpSpPr/>
+        <p:nvPr/>
+      </p:nvGrpSpPr>
+      <p:grpSpPr>
+        <a:xfrm>
+          <a:off x="0" y="0"/>
+          <a:ext cx="0" cy="0"/>
+          <a:chOff x="0" y="0"/>
+          <a:chExt cx="0" cy="0"/>
+        </a:xfrm>
+      </p:grpSpPr>
+      <p:sp>
+        <p:nvSpPr>
+          <p:cNvPr id="2" name="Titel 1">
+            <a:extLst>
+              <a:ext uri="{FF2B5EF4-FFF2-40B4-BE49-F238E27FC236}">
+                <a16:creationId xmlns:a16="http://schemas.microsoft.com/office/drawing/2014/main" id="{4526C0AA-D9C3-34B4-74D2-760A494AEB0D}"/>
+              </a:ext>
+            </a:extLst>
+          </p:cNvPr>
+          <p:cNvSpPr>
+            <a:spLocks noGrp="1"/>
+          </p:cNvSpPr>
+          <p:nvPr>
+            <p:ph type="title"/>
+          </p:nvPr>
+        </p:nvSpPr>
+        <p:spPr/>
+        <p:txBody>
+          <a:bodyPr/>
+          <a:lstStyle/>
+          <a:p>
+            <a:r>
+              <a:rPr lang="de-DE" dirty="0"/>
+              <a:t>Cascade Control</a:t>
+            </a:r>
+          </a:p>
+        </p:txBody>
+      </p:sp>
+      <p:sp>
+        <p:nvSpPr>
+          <p:cNvPr id="3" name="Inhaltsplatzhalter 2">
+            <a:extLst>
+              <a:ext uri="{FF2B5EF4-FFF2-40B4-BE49-F238E27FC236}">
+                <a16:creationId xmlns:a16="http://schemas.microsoft.com/office/drawing/2014/main" id="{523AC845-AEF8-1D08-A3FD-8EE28F4C9D4E}"/>
+              </a:ext>
+            </a:extLst>
+          </p:cNvPr>
+          <p:cNvSpPr>
+            <a:spLocks noGrp="1"/>
+          </p:cNvSpPr>
+          <p:nvPr>
+            <p:ph idx="1"/>
+          </p:nvPr>
+        </p:nvSpPr>
+        <p:spPr/>
+        <p:txBody>
+          <a:bodyPr/>
+          <a:lstStyle/>
+          <a:p>
+            <a:endParaRPr lang="de-DE"/>
+          </a:p>
+        </p:txBody>
+      </p:sp>
+      <p:sp>
+        <p:nvSpPr>
+          <p:cNvPr id="4" name="Foliennummernplatzhalter 3">
+            <a:extLst>
+              <a:ext uri="{FF2B5EF4-FFF2-40B4-BE49-F238E27FC236}">
+                <a16:creationId xmlns:a16="http://schemas.microsoft.com/office/drawing/2014/main" id="{E689E192-E06F-6B6D-EA9D-F53924D4324F}"/>
+              </a:ext>
+            </a:extLst>
+          </p:cNvPr>
+          <p:cNvSpPr>
+            <a:spLocks noGrp="1"/>
+          </p:cNvSpPr>
+          <p:nvPr>
+            <p:ph type="sldNum" sz="quarter" idx="12"/>
+          </p:nvPr>
+        </p:nvSpPr>
+        <p:spPr/>
+        <p:txBody>
+          <a:bodyPr/>
+          <a:lstStyle/>
+          <a:p>
+            <a:fld id="{08C366F5-AFAD-49CB-854A-9D9E238FCA13}" type="slidenum">
+              <a:rPr lang="en-GB" smtClean="0"/>
+              <a:t>18</a:t>
             </a:fld>
             <a:endParaRPr lang="en-GB"/>
           </a:p>
@@ -6224,8 +6912,8 @@
           </a:p>
         </p:txBody>
       </p:sp>
-      <mc:AlternateContent xmlns:mc="http://schemas.openxmlformats.org/markup-compatibility/2006">
-        <mc:Choice xmlns:a14="http://schemas.microsoft.com/office/drawing/2010/main" Requires="a14">
+      <mc:AlternateContent xmlns:mc="http://schemas.openxmlformats.org/markup-compatibility/2006" xmlns:a14="http://schemas.microsoft.com/office/drawing/2010/main">
+        <mc:Choice Requires="a14">
           <p:sp>
             <p:nvSpPr>
               <p:cNvPr id="3" name="Inhaltsplatzhalter 2">
@@ -6698,7 +7386,7 @@
             </p:txBody>
           </p:sp>
         </mc:Choice>
-        <mc:Fallback>
+        <mc:Fallback xmlns="">
           <p:sp>
             <p:nvSpPr>
               <p:cNvPr id="3" name="Inhaltsplatzhalter 2">
@@ -6838,8 +7526,8 @@
           </a:p>
         </p:txBody>
       </p:sp>
-      <mc:AlternateContent xmlns:mc="http://schemas.openxmlformats.org/markup-compatibility/2006">
-        <mc:Choice xmlns:a14="http://schemas.microsoft.com/office/drawing/2010/main" Requires="a14">
+      <mc:AlternateContent xmlns:mc="http://schemas.openxmlformats.org/markup-compatibility/2006" xmlns:a14="http://schemas.microsoft.com/office/drawing/2010/main">
+        <mc:Choice Requires="a14">
           <p:sp>
             <p:nvSpPr>
               <p:cNvPr id="3" name="Inhaltsplatzhalter 2">
@@ -7435,7 +8123,7 @@
             </p:txBody>
           </p:sp>
         </mc:Choice>
-        <mc:Fallback>
+        <mc:Fallback xmlns="">
           <p:sp>
             <p:nvSpPr>
               <p:cNvPr id="3" name="Inhaltsplatzhalter 2">
@@ -7683,8 +8371,8 @@
           </a:p>
         </p:txBody>
       </p:sp>
-      <mc:AlternateContent xmlns:mc="http://schemas.openxmlformats.org/markup-compatibility/2006">
-        <mc:Choice xmlns:a14="http://schemas.microsoft.com/office/drawing/2010/main" Requires="a14">
+      <mc:AlternateContent xmlns:mc="http://schemas.openxmlformats.org/markup-compatibility/2006" xmlns:a14="http://schemas.microsoft.com/office/drawing/2010/main">
+        <mc:Choice Requires="a14">
           <p:sp>
             <p:nvSpPr>
               <p:cNvPr id="3" name="Inhaltsplatzhalter 2">
@@ -8074,7 +8762,7 @@
             </p:txBody>
           </p:sp>
         </mc:Choice>
-        <mc:Fallback>
+        <mc:Fallback xmlns="">
           <p:sp>
             <p:nvSpPr>
               <p:cNvPr id="3" name="Inhaltsplatzhalter 2">
@@ -8210,8 +8898,8 @@
           </a:p>
         </p:txBody>
       </p:sp>
-      <mc:AlternateContent xmlns:mc="http://schemas.openxmlformats.org/markup-compatibility/2006">
-        <mc:Choice xmlns:a14="http://schemas.microsoft.com/office/drawing/2010/main" Requires="a14">
+      <mc:AlternateContent xmlns:mc="http://schemas.openxmlformats.org/markup-compatibility/2006" xmlns:a14="http://schemas.microsoft.com/office/drawing/2010/main">
+        <mc:Choice Requires="a14">
           <p:sp>
             <p:nvSpPr>
               <p:cNvPr id="3" name="Inhaltsplatzhalter 2">
@@ -8684,7 +9372,7 @@
             </p:txBody>
           </p:sp>
         </mc:Choice>
-        <mc:Fallback>
+        <mc:Fallback xmlns="">
           <p:sp>
             <p:nvSpPr>
               <p:cNvPr id="3" name="Inhaltsplatzhalter 2">

--- a/slides/5_controller_design.pptx
+++ b/slides/5_controller_design.pptx
@@ -5,7 +5,7 @@
     <p:sldMasterId id="2147483648" r:id="rId1"/>
   </p:sldMasterIdLst>
   <p:notesMasterIdLst>
-    <p:notesMasterId r:id="rId20"/>
+    <p:notesMasterId r:id="rId22"/>
   </p:notesMasterIdLst>
   <p:sldIdLst>
     <p:sldId id="256" r:id="rId2"/>
@@ -22,10 +22,12 @@
     <p:sldId id="271" r:id="rId13"/>
     <p:sldId id="293" r:id="rId14"/>
     <p:sldId id="272" r:id="rId15"/>
-    <p:sldId id="273" r:id="rId16"/>
-    <p:sldId id="274" r:id="rId17"/>
-    <p:sldId id="275" r:id="rId18"/>
-    <p:sldId id="277" r:id="rId19"/>
+    <p:sldId id="294" r:id="rId16"/>
+    <p:sldId id="273" r:id="rId17"/>
+    <p:sldId id="295" r:id="rId18"/>
+    <p:sldId id="274" r:id="rId19"/>
+    <p:sldId id="275" r:id="rId20"/>
+    <p:sldId id="277" r:id="rId21"/>
   </p:sldIdLst>
   <p:sldSz cx="12192000" cy="6858000"/>
   <p:notesSz cx="6858000" cy="9144000"/>
@@ -496,7 +498,7 @@
           <a:p>
             <a:fld id="{506E0FD1-891F-4B1E-916D-E9B585160BB8}" type="datetimeFigureOut">
               <a:rPr lang="en-GB" smtClean="0"/>
-              <a:t>12/03/2026</a:t>
+              <a:t>14/03/2026</a:t>
             </a:fld>
             <a:endParaRPr lang="en-GB"/>
           </a:p>
@@ -913,7 +915,7 @@
           <a:p>
             <a:fld id="{D68C3F22-27B2-44E3-9C5F-D08126455F6F}" type="datetime1">
               <a:rPr lang="en-GB" smtClean="0"/>
-              <a:t>12/03/2026</a:t>
+              <a:t>14/03/2026</a:t>
             </a:fld>
             <a:endParaRPr lang="en-GB"/>
           </a:p>
@@ -1113,7 +1115,7 @@
           <a:p>
             <a:fld id="{1CD03846-7BF6-4FB6-A921-FF3379ADBD4C}" type="datetime1">
               <a:rPr lang="en-GB" smtClean="0"/>
-              <a:t>12/03/2026</a:t>
+              <a:t>14/03/2026</a:t>
             </a:fld>
             <a:endParaRPr lang="en-GB"/>
           </a:p>
@@ -1323,7 +1325,7 @@
           <a:p>
             <a:fld id="{99E1B91A-3FD0-4144-9C84-63E9688ED2FE}" type="datetime1">
               <a:rPr lang="en-GB" smtClean="0"/>
-              <a:t>12/03/2026</a:t>
+              <a:t>14/03/2026</a:t>
             </a:fld>
             <a:endParaRPr lang="en-GB"/>
           </a:p>
@@ -1523,7 +1525,7 @@
           <a:p>
             <a:fld id="{5295ED7B-FEAD-4734-819F-93EF4B0EA908}" type="datetime1">
               <a:rPr lang="en-GB" smtClean="0"/>
-              <a:t>12/03/2026</a:t>
+              <a:t>14/03/2026</a:t>
             </a:fld>
             <a:endParaRPr lang="en-GB"/>
           </a:p>
@@ -1799,7 +1801,7 @@
           <a:p>
             <a:fld id="{D2D5D4B4-C926-4B45-8815-1ED8911179A2}" type="datetime1">
               <a:rPr lang="en-GB" smtClean="0"/>
-              <a:t>12/03/2026</a:t>
+              <a:t>14/03/2026</a:t>
             </a:fld>
             <a:endParaRPr lang="en-GB"/>
           </a:p>
@@ -2067,7 +2069,7 @@
           <a:p>
             <a:fld id="{B4C5210A-0E37-4935-93AF-69F21A5F712F}" type="datetime1">
               <a:rPr lang="en-GB" smtClean="0"/>
-              <a:t>12/03/2026</a:t>
+              <a:t>14/03/2026</a:t>
             </a:fld>
             <a:endParaRPr lang="en-GB"/>
           </a:p>
@@ -2482,7 +2484,7 @@
           <a:p>
             <a:fld id="{3D3A6B2F-436C-4691-80E8-9C890E000E9D}" type="datetime1">
               <a:rPr lang="en-GB" smtClean="0"/>
-              <a:t>12/03/2026</a:t>
+              <a:t>14/03/2026</a:t>
             </a:fld>
             <a:endParaRPr lang="en-GB"/>
           </a:p>
@@ -2624,7 +2626,7 @@
           <a:p>
             <a:fld id="{84385F4C-D74B-496F-8D21-97E3549C783B}" type="datetime1">
               <a:rPr lang="en-GB" smtClean="0"/>
-              <a:t>12/03/2026</a:t>
+              <a:t>14/03/2026</a:t>
             </a:fld>
             <a:endParaRPr lang="en-GB"/>
           </a:p>
@@ -2737,7 +2739,7 @@
           <a:p>
             <a:fld id="{0CBDCB32-C241-4703-A832-4EB47BD54E83}" type="datetime1">
               <a:rPr lang="en-GB" smtClean="0"/>
-              <a:t>12/03/2026</a:t>
+              <a:t>14/03/2026</a:t>
             </a:fld>
             <a:endParaRPr lang="en-GB"/>
           </a:p>
@@ -3050,7 +3052,7 @@
           <a:p>
             <a:fld id="{85C150FF-BE95-4D25-A16A-E368A81CBF24}" type="datetime1">
               <a:rPr lang="en-GB" smtClean="0"/>
-              <a:t>12/03/2026</a:t>
+              <a:t>14/03/2026</a:t>
             </a:fld>
             <a:endParaRPr lang="en-GB"/>
           </a:p>
@@ -3339,7 +3341,7 @@
           <a:p>
             <a:fld id="{F3C5DB4B-B349-43C9-A424-BADA723AD9F1}" type="datetime1">
               <a:rPr lang="en-GB" smtClean="0"/>
-              <a:t>12/03/2026</a:t>
+              <a:t>14/03/2026</a:t>
             </a:fld>
             <a:endParaRPr lang="en-GB"/>
           </a:p>
@@ -3582,7 +3584,7 @@
           <a:p>
             <a:fld id="{12632426-0A0C-405F-A3D0-2D11AA44702A}" type="datetime1">
               <a:rPr lang="en-GB" smtClean="0"/>
-              <a:t>12/03/2026</a:t>
+              <a:t>14/03/2026</a:t>
             </a:fld>
             <a:endParaRPr lang="en-GB"/>
           </a:p>
@@ -4755,8 +4757,8 @@
           </a:p>
         </p:txBody>
       </p:sp>
-      <mc:AlternateContent xmlns:mc="http://schemas.openxmlformats.org/markup-compatibility/2006">
-        <mc:Choice xmlns:a14="http://schemas.microsoft.com/office/drawing/2010/main" Requires="a14">
+      <mc:AlternateContent xmlns:mc="http://schemas.openxmlformats.org/markup-compatibility/2006" xmlns:a14="http://schemas.microsoft.com/office/drawing/2010/main">
+        <mc:Choice Requires="a14">
           <p:sp>
             <p:nvSpPr>
               <p:cNvPr id="4" name="Inhaltsplatzhalter 3">
@@ -5166,7 +5168,7 @@
                       <m:fPr>
                         <m:type m:val="lin"/>
                         <m:ctrlPr>
-                          <a:rPr lang="de-DE" b="0" smtClean="0">
+                          <a:rPr lang="de-DE" b="0" i="1" smtClean="0">
                             <a:latin typeface="Cambria Math" panose="02040503050406030204" pitchFamily="18" charset="0"/>
                           </a:rPr>
                         </m:ctrlPr>
@@ -5186,7 +5188,7 @@
                         <m:d>
                           <m:dPr>
                             <m:ctrlPr>
-                              <a:rPr lang="de-DE" b="0" smtClean="0">
+                              <a:rPr lang="de-DE" b="0" i="1" smtClean="0">
                                 <a:latin typeface="Cambria Math" panose="02040503050406030204" pitchFamily="18" charset="0"/>
                               </a:rPr>
                             </m:ctrlPr>
@@ -5196,7 +5198,7 @@
                               <m:fPr>
                                 <m:type m:val="lin"/>
                                 <m:ctrlPr>
-                                  <a:rPr lang="de-DE" b="0" smtClean="0">
+                                  <a:rPr lang="de-DE" b="0" i="1" smtClean="0">
                                     <a:latin typeface="Cambria Math" panose="02040503050406030204" pitchFamily="18" charset="0"/>
                                   </a:rPr>
                                 </m:ctrlPr>
@@ -5315,7 +5317,7 @@
             </p:txBody>
           </p:sp>
         </mc:Choice>
-        <mc:Fallback>
+        <mc:Fallback xmlns="">
           <p:sp>
             <p:nvSpPr>
               <p:cNvPr id="4" name="Inhaltsplatzhalter 3">
@@ -5442,92 +5444,737 @@
           </a:p>
         </p:txBody>
       </p:sp>
-      <p:sp>
-        <p:nvSpPr>
-          <p:cNvPr id="3" name="Inhaltsplatzhalter 2">
-            <a:extLst>
-              <a:ext uri="{FF2B5EF4-FFF2-40B4-BE49-F238E27FC236}">
-                <a16:creationId xmlns:a16="http://schemas.microsoft.com/office/drawing/2014/main" id="{D2DFD6F6-7882-2454-DA98-53A8C188E030}"/>
-              </a:ext>
-            </a:extLst>
-          </p:cNvPr>
-          <p:cNvSpPr>
-            <a:spLocks noGrp="1"/>
-          </p:cNvSpPr>
-          <p:nvPr>
-            <p:ph idx="1"/>
-          </p:nvPr>
-        </p:nvSpPr>
-        <p:spPr/>
-        <p:txBody>
-          <a:bodyPr/>
-          <a:lstStyle/>
-          <a:p>
-            <a:r>
-              <a:rPr lang="de-DE" dirty="0" err="1"/>
-              <a:t>Increase</a:t>
-            </a:r>
-            <a:r>
-              <a:rPr lang="de-DE" dirty="0"/>
-              <a:t> </a:t>
-            </a:r>
-            <a:r>
-              <a:rPr lang="de-DE" dirty="0" err="1"/>
-              <a:t>gain</a:t>
-            </a:r>
-            <a:r>
-              <a:rPr lang="de-DE" dirty="0"/>
-              <a:t> </a:t>
-            </a:r>
-            <a:r>
-              <a:rPr lang="de-DE" dirty="0" err="1"/>
-              <a:t>until</a:t>
-            </a:r>
-            <a:r>
-              <a:rPr lang="de-DE" dirty="0"/>
-              <a:t> </a:t>
-            </a:r>
-            <a:r>
-              <a:rPr lang="de-DE" dirty="0" err="1"/>
-              <a:t>oscillation</a:t>
-            </a:r>
-            <a:endParaRPr lang="de-DE" dirty="0"/>
-          </a:p>
-          <a:p>
-            <a:r>
-              <a:rPr lang="de-DE" dirty="0"/>
-              <a:t>Use </a:t>
-            </a:r>
-            <a:r>
-              <a:rPr lang="de-DE" dirty="0" err="1"/>
-              <a:t>empirical</a:t>
-            </a:r>
-            <a:r>
-              <a:rPr lang="de-DE" dirty="0"/>
-              <a:t> </a:t>
-            </a:r>
-            <a:r>
-              <a:rPr lang="de-DE" dirty="0" err="1"/>
-              <a:t>tuning</a:t>
-            </a:r>
-            <a:r>
-              <a:rPr lang="de-DE" dirty="0"/>
-              <a:t> </a:t>
-            </a:r>
-            <a:r>
-              <a:rPr lang="de-DE" dirty="0" err="1"/>
-              <a:t>formulas</a:t>
-            </a:r>
-            <a:endParaRPr lang="de-DE" dirty="0"/>
-          </a:p>
-          <a:p>
-            <a:r>
-              <a:rPr lang="de-DE" dirty="0"/>
-              <a:t>Fast but aggressive</a:t>
-            </a:r>
-          </a:p>
-        </p:txBody>
-      </p:sp>
+      <mc:AlternateContent xmlns:mc="http://schemas.openxmlformats.org/markup-compatibility/2006" xmlns:a14="http://schemas.microsoft.com/office/drawing/2010/main">
+        <mc:Choice Requires="a14">
+          <p:sp>
+            <p:nvSpPr>
+              <p:cNvPr id="3" name="Inhaltsplatzhalter 2">
+                <a:extLst>
+                  <a:ext uri="{FF2B5EF4-FFF2-40B4-BE49-F238E27FC236}">
+                    <a16:creationId xmlns:a16="http://schemas.microsoft.com/office/drawing/2014/main" id="{D2DFD6F6-7882-2454-DA98-53A8C188E030}"/>
+                  </a:ext>
+                </a:extLst>
+              </p:cNvPr>
+              <p:cNvSpPr>
+                <a:spLocks noGrp="1"/>
+              </p:cNvSpPr>
+              <p:nvPr>
+                <p:ph idx="1"/>
+              </p:nvPr>
+            </p:nvSpPr>
+            <p:spPr/>
+            <p:txBody>
+              <a:bodyPr>
+                <a:normAutofit/>
+              </a:bodyPr>
+              <a:lstStyle/>
+              <a:p>
+                <a:pPr marL="0" indent="0">
+                  <a:buNone/>
+                </a:pPr>
+                <a:r>
+                  <a:rPr lang="de-DE" sz="2400" dirty="0"/>
+                  <a:t>Heuristic </a:t>
+                </a:r>
+                <a:r>
+                  <a:rPr lang="de-DE" sz="2400" dirty="0" err="1"/>
+                  <a:t>to</a:t>
+                </a:r>
+                <a:r>
+                  <a:rPr lang="de-DE" sz="2400" dirty="0"/>
+                  <a:t> </a:t>
+                </a:r>
+                <a:r>
+                  <a:rPr lang="de-DE" sz="2400" dirty="0" err="1"/>
+                  <a:t>provide</a:t>
+                </a:r>
+                <a:r>
+                  <a:rPr lang="de-DE" sz="2400" dirty="0"/>
+                  <a:t> </a:t>
+                </a:r>
+                <a:r>
+                  <a:rPr lang="de-DE" sz="2400" dirty="0" err="1"/>
+                  <a:t>practical</a:t>
+                </a:r>
+                <a:r>
+                  <a:rPr lang="de-DE" sz="2400" dirty="0"/>
+                  <a:t> </a:t>
+                </a:r>
+                <a:r>
+                  <a:rPr lang="de-DE" sz="2400" dirty="0" err="1"/>
+                  <a:t>starting</a:t>
+                </a:r>
+                <a:r>
+                  <a:rPr lang="de-DE" sz="2400" dirty="0"/>
+                  <a:t> </a:t>
+                </a:r>
+                <a:r>
+                  <a:rPr lang="de-DE" sz="2400" dirty="0" err="1"/>
+                  <a:t>values</a:t>
+                </a:r>
+                <a:r>
+                  <a:rPr lang="de-DE" sz="2400" dirty="0"/>
+                  <a:t> </a:t>
+                </a:r>
+                <a:r>
+                  <a:rPr lang="de-DE" sz="2400" dirty="0" err="1"/>
+                  <a:t>for</a:t>
+                </a:r>
+                <a:r>
+                  <a:rPr lang="de-DE" sz="2400" dirty="0"/>
+                  <a:t> P, PI, and PID </a:t>
+                </a:r>
+                <a:r>
+                  <a:rPr lang="de-DE" sz="2400" dirty="0" err="1"/>
+                  <a:t>controllers</a:t>
+                </a:r>
+                <a:endParaRPr lang="de-DE" sz="2400" dirty="0"/>
+              </a:p>
+              <a:p>
+                <a:pPr marL="0" indent="0">
+                  <a:buNone/>
+                </a:pPr>
+                <a:endParaRPr lang="de-DE" sz="2400" dirty="0"/>
+              </a:p>
+              <a:p>
+                <a:pPr marL="0" indent="0">
+                  <a:buNone/>
+                </a:pPr>
+                <a:r>
+                  <a:rPr lang="de-DE" sz="2400" dirty="0" err="1"/>
+                  <a:t>Step-by-step</a:t>
+                </a:r>
+                <a:r>
+                  <a:rPr lang="de-DE" sz="2400" dirty="0"/>
+                  <a:t> </a:t>
+                </a:r>
+                <a:r>
+                  <a:rPr lang="de-DE" sz="2400" dirty="0" err="1"/>
+                  <a:t>procedure</a:t>
+                </a:r>
+                <a:r>
+                  <a:rPr lang="de-DE" sz="2400" dirty="0"/>
+                  <a:t> (</a:t>
+                </a:r>
+                <a:r>
+                  <a:rPr lang="de-DE" sz="2400" dirty="0" err="1"/>
+                  <a:t>closed</a:t>
+                </a:r>
+                <a:r>
+                  <a:rPr lang="de-DE" sz="2400" dirty="0"/>
+                  <a:t>-loop </a:t>
+                </a:r>
+                <a:r>
+                  <a:rPr lang="de-DE" sz="2400" dirty="0" err="1"/>
+                  <a:t>method</a:t>
+                </a:r>
+                <a:r>
+                  <a:rPr lang="de-DE" sz="2400" dirty="0"/>
+                  <a:t>)</a:t>
+                </a:r>
+              </a:p>
+              <a:p>
+                <a:pPr marL="514350" indent="-514350">
+                  <a:buFont typeface="+mj-lt"/>
+                  <a:buAutoNum type="arabicPeriod"/>
+                </a:pPr>
+                <a:r>
+                  <a:rPr lang="de-DE" sz="2400" dirty="0"/>
+                  <a:t>Set </a:t>
+                </a:r>
+                <a:r>
+                  <a:rPr lang="de-DE" sz="2400" dirty="0" err="1"/>
+                  <a:t>controller</a:t>
+                </a:r>
+                <a:r>
+                  <a:rPr lang="de-DE" sz="2400" dirty="0"/>
+                  <a:t> </a:t>
+                </a:r>
+                <a:r>
+                  <a:rPr lang="de-DE" sz="2400" dirty="0" err="1"/>
+                  <a:t>to</a:t>
+                </a:r>
+                <a:r>
+                  <a:rPr lang="de-DE" sz="2400" dirty="0"/>
+                  <a:t> P-</a:t>
+                </a:r>
+                <a:r>
+                  <a:rPr lang="de-DE" sz="2400" dirty="0" err="1"/>
+                  <a:t>only</a:t>
+                </a:r>
+                <a:r>
+                  <a:rPr lang="de-DE" sz="2400" dirty="0"/>
+                  <a:t> </a:t>
+                </a:r>
+                <a:r>
+                  <a:rPr lang="de-DE" sz="2400" dirty="0" err="1"/>
+                  <a:t>mode</a:t>
+                </a:r>
+                <a:r>
+                  <a:rPr lang="de-DE" sz="2400" dirty="0"/>
+                  <a:t>: integral </a:t>
+                </a:r>
+                <a:r>
+                  <a:rPr lang="de-DE" sz="2400" dirty="0" err="1"/>
+                  <a:t>gain</a:t>
+                </a:r>
+                <a:r>
+                  <a:rPr lang="de-DE" sz="2400" dirty="0"/>
+                  <a:t> </a:t>
+                </a:r>
+                <a14:m>
+                  <m:oMath xmlns:m="http://schemas.openxmlformats.org/officeDocument/2006/math">
+                    <m:sSub>
+                      <m:sSubPr>
+                        <m:ctrlPr>
+                          <a:rPr lang="de-DE" sz="2400" i="1">
+                            <a:latin typeface="Cambria Math" panose="02040503050406030204" pitchFamily="18" charset="0"/>
+                          </a:rPr>
+                        </m:ctrlPr>
+                      </m:sSubPr>
+                      <m:e>
+                        <m:r>
+                          <a:rPr lang="de-DE" sz="2400" b="0" i="1" smtClean="0">
+                            <a:latin typeface="Cambria Math" panose="02040503050406030204" pitchFamily="18" charset="0"/>
+                          </a:rPr>
+                          <m:t>𝐾</m:t>
+                        </m:r>
+                      </m:e>
+                      <m:sub>
+                        <m:r>
+                          <a:rPr lang="de-DE" sz="2400" b="0" i="1" smtClean="0">
+                            <a:latin typeface="Cambria Math" panose="02040503050406030204" pitchFamily="18" charset="0"/>
+                          </a:rPr>
+                          <m:t>𝑖</m:t>
+                        </m:r>
+                      </m:sub>
+                    </m:sSub>
+                    <m:r>
+                      <a:rPr lang="de-DE" sz="2400" b="0" i="0" smtClean="0">
+                        <a:latin typeface="Cambria Math" panose="02040503050406030204" pitchFamily="18" charset="0"/>
+                      </a:rPr>
+                      <m:t>=0</m:t>
+                    </m:r>
+                  </m:oMath>
+                </a14:m>
+                <a:r>
+                  <a:rPr lang="de-DE" sz="2400" dirty="0"/>
+                  <a:t>, derivative </a:t>
+                </a:r>
+                <a:r>
+                  <a:rPr lang="de-DE" sz="2400" dirty="0" err="1"/>
+                  <a:t>gain</a:t>
+                </a:r>
+                <a:r>
+                  <a:rPr lang="de-DE" sz="2400" dirty="0"/>
+                  <a:t> </a:t>
+                </a:r>
+                <a14:m>
+                  <m:oMath xmlns:m="http://schemas.openxmlformats.org/officeDocument/2006/math">
+                    <m:sSub>
+                      <m:sSubPr>
+                        <m:ctrlPr>
+                          <a:rPr lang="de-DE" sz="2400" i="1">
+                            <a:latin typeface="Cambria Math" panose="02040503050406030204" pitchFamily="18" charset="0"/>
+                          </a:rPr>
+                        </m:ctrlPr>
+                      </m:sSubPr>
+                      <m:e>
+                        <m:r>
+                          <a:rPr lang="de-DE" sz="2400" b="0" i="1" smtClean="0">
+                            <a:latin typeface="Cambria Math" panose="02040503050406030204" pitchFamily="18" charset="0"/>
+                          </a:rPr>
+                          <m:t>𝐾</m:t>
+                        </m:r>
+                      </m:e>
+                      <m:sub>
+                        <m:r>
+                          <a:rPr lang="de-DE" sz="2400" b="0" i="1" smtClean="0">
+                            <a:latin typeface="Cambria Math" panose="02040503050406030204" pitchFamily="18" charset="0"/>
+                          </a:rPr>
+                          <m:t>𝑑</m:t>
+                        </m:r>
+                      </m:sub>
+                    </m:sSub>
+                    <m:r>
+                      <a:rPr lang="de-DE" sz="2400" b="0" i="1" smtClean="0">
+                        <a:latin typeface="Cambria Math" panose="02040503050406030204" pitchFamily="18" charset="0"/>
+                      </a:rPr>
+                      <m:t>=0</m:t>
+                    </m:r>
+                  </m:oMath>
+                </a14:m>
+                <a:endParaRPr lang="de-DE" sz="2400" dirty="0"/>
+              </a:p>
+              <a:p>
+                <a:pPr marL="514350" indent="-514350">
+                  <a:buFont typeface="+mj-lt"/>
+                  <a:buAutoNum type="arabicPeriod"/>
+                </a:pPr>
+                <a:r>
+                  <a:rPr lang="de-DE" sz="2400" dirty="0" err="1"/>
+                  <a:t>Gradually</a:t>
+                </a:r>
+                <a:r>
+                  <a:rPr lang="de-DE" sz="2400" dirty="0"/>
+                  <a:t> </a:t>
+                </a:r>
+                <a:r>
+                  <a:rPr lang="de-DE" sz="2400" dirty="0" err="1"/>
+                  <a:t>increase</a:t>
+                </a:r>
+                <a:r>
+                  <a:rPr lang="de-DE" sz="2400" dirty="0"/>
+                  <a:t> proportional </a:t>
+                </a:r>
+                <a:r>
+                  <a:rPr lang="de-DE" sz="2400" dirty="0" err="1"/>
+                  <a:t>gain</a:t>
+                </a:r>
+                <a:r>
+                  <a:rPr lang="de-DE" sz="2400" dirty="0"/>
+                  <a:t> </a:t>
+                </a:r>
+                <a14:m>
+                  <m:oMath xmlns:m="http://schemas.openxmlformats.org/officeDocument/2006/math">
+                    <m:sSub>
+                      <m:sSubPr>
+                        <m:ctrlPr>
+                          <a:rPr lang="de-DE" sz="2400" i="1">
+                            <a:latin typeface="Cambria Math" panose="02040503050406030204" pitchFamily="18" charset="0"/>
+                          </a:rPr>
+                        </m:ctrlPr>
+                      </m:sSubPr>
+                      <m:e>
+                        <m:r>
+                          <a:rPr lang="de-DE" sz="2400" i="1">
+                            <a:latin typeface="Cambria Math" panose="02040503050406030204" pitchFamily="18" charset="0"/>
+                          </a:rPr>
+                          <m:t>𝐾</m:t>
+                        </m:r>
+                      </m:e>
+                      <m:sub>
+                        <m:r>
+                          <a:rPr lang="de-DE" sz="2400" b="0" i="1" smtClean="0">
+                            <a:latin typeface="Cambria Math" panose="02040503050406030204" pitchFamily="18" charset="0"/>
+                          </a:rPr>
+                          <m:t>𝑝</m:t>
+                        </m:r>
+                      </m:sub>
+                    </m:sSub>
+                  </m:oMath>
+                </a14:m>
+                <a:endParaRPr lang="de-DE" sz="2400" dirty="0"/>
+              </a:p>
+              <a:p>
+                <a:pPr marL="514350" indent="-514350">
+                  <a:buFont typeface="+mj-lt"/>
+                  <a:buAutoNum type="arabicPeriod"/>
+                </a:pPr>
+                <a:r>
+                  <a:rPr lang="de-DE" sz="2400" dirty="0"/>
+                  <a:t>Find </a:t>
+                </a:r>
+                <a:r>
+                  <a:rPr lang="de-DE" sz="2400" dirty="0" err="1"/>
+                  <a:t>the</a:t>
+                </a:r>
+                <a:r>
+                  <a:rPr lang="de-DE" sz="2400" dirty="0"/>
+                  <a:t> </a:t>
+                </a:r>
+                <a:r>
+                  <a:rPr lang="de-DE" sz="2400" dirty="0" err="1"/>
+                  <a:t>point</a:t>
+                </a:r>
+                <a:r>
+                  <a:rPr lang="de-DE" sz="2400" dirty="0"/>
+                  <a:t> </a:t>
+                </a:r>
+                <a:r>
+                  <a:rPr lang="de-DE" sz="2400" dirty="0" err="1"/>
+                  <a:t>where</a:t>
+                </a:r>
+                <a:r>
+                  <a:rPr lang="de-DE" sz="2400" dirty="0"/>
+                  <a:t> </a:t>
+                </a:r>
+                <a:r>
+                  <a:rPr lang="de-DE" sz="2400" dirty="0" err="1"/>
+                  <a:t>the</a:t>
+                </a:r>
+                <a:r>
+                  <a:rPr lang="de-DE" sz="2400" dirty="0"/>
+                  <a:t> </a:t>
+                </a:r>
+                <a:r>
+                  <a:rPr lang="de-DE" sz="2400" dirty="0" err="1"/>
+                  <a:t>system</a:t>
+                </a:r>
+                <a:r>
+                  <a:rPr lang="de-DE" sz="2400" dirty="0"/>
+                  <a:t> </a:t>
+                </a:r>
+                <a:r>
+                  <a:rPr lang="de-DE" sz="2400" dirty="0" err="1"/>
+                  <a:t>output</a:t>
+                </a:r>
+                <a:r>
+                  <a:rPr lang="de-DE" sz="2400" dirty="0"/>
+                  <a:t> </a:t>
+                </a:r>
+                <a:r>
+                  <a:rPr lang="de-DE" sz="2400" dirty="0" err="1"/>
+                  <a:t>shows</a:t>
+                </a:r>
+                <a:r>
+                  <a:rPr lang="de-DE" sz="2400" dirty="0"/>
+                  <a:t> </a:t>
+                </a:r>
+                <a:r>
+                  <a:rPr lang="de-DE" sz="2400" dirty="0" err="1"/>
+                  <a:t>continuous</a:t>
+                </a:r>
+                <a:r>
+                  <a:rPr lang="de-DE" sz="2400" dirty="0"/>
+                  <a:t> </a:t>
+                </a:r>
+                <a:r>
+                  <a:rPr lang="de-DE" sz="2400" dirty="0" err="1"/>
+                  <a:t>sustained</a:t>
+                </a:r>
+                <a:r>
+                  <a:rPr lang="de-DE" sz="2400" dirty="0"/>
+                  <a:t> </a:t>
+                </a:r>
+                <a:r>
+                  <a:rPr lang="de-DE" sz="2400" dirty="0" err="1"/>
+                  <a:t>oscillations</a:t>
+                </a:r>
+                <a:endParaRPr lang="de-DE" sz="2400" dirty="0"/>
+              </a:p>
+              <a:p>
+                <a:pPr marL="514350" indent="-514350">
+                  <a:buFont typeface="+mj-lt"/>
+                  <a:buAutoNum type="arabicPeriod"/>
+                </a:pPr>
+                <a:r>
+                  <a:rPr lang="de-DE" sz="2400" dirty="0" err="1"/>
+                  <a:t>Record</a:t>
+                </a:r>
+                <a:r>
+                  <a:rPr lang="de-DE" sz="2400" dirty="0"/>
+                  <a:t> </a:t>
+                </a:r>
+                <a:r>
+                  <a:rPr lang="de-DE" sz="2400" dirty="0" err="1"/>
+                  <a:t>ultimate</a:t>
+                </a:r>
+                <a:r>
+                  <a:rPr lang="de-DE" sz="2400" dirty="0"/>
+                  <a:t> </a:t>
+                </a:r>
+                <a:r>
+                  <a:rPr lang="de-DE" sz="2400" dirty="0" err="1"/>
+                  <a:t>gain</a:t>
+                </a:r>
+                <a:r>
+                  <a:rPr lang="de-DE" sz="2400" dirty="0"/>
+                  <a:t> </a:t>
+                </a:r>
+                <a14:m>
+                  <m:oMath xmlns:m="http://schemas.openxmlformats.org/officeDocument/2006/math">
+                    <m:sSub>
+                      <m:sSubPr>
+                        <m:ctrlPr>
+                          <a:rPr lang="de-DE" sz="2400" i="1">
+                            <a:latin typeface="Cambria Math" panose="02040503050406030204" pitchFamily="18" charset="0"/>
+                          </a:rPr>
+                        </m:ctrlPr>
+                      </m:sSubPr>
+                      <m:e>
+                        <m:r>
+                          <a:rPr lang="de-DE" sz="2400" b="0" i="1" smtClean="0">
+                            <a:latin typeface="Cambria Math" panose="02040503050406030204" pitchFamily="18" charset="0"/>
+                          </a:rPr>
+                          <m:t>𝐾</m:t>
+                        </m:r>
+                      </m:e>
+                      <m:sub>
+                        <m:r>
+                          <a:rPr lang="de-DE" sz="2400" b="0" i="1" smtClean="0">
+                            <a:latin typeface="Cambria Math" panose="02040503050406030204" pitchFamily="18" charset="0"/>
+                          </a:rPr>
+                          <m:t>𝑢</m:t>
+                        </m:r>
+                      </m:sub>
+                    </m:sSub>
+                  </m:oMath>
+                </a14:m>
+                <a:r>
+                  <a:rPr lang="de-DE" sz="2400" dirty="0"/>
+                  <a:t> (</a:t>
+                </a:r>
+                <a:r>
+                  <a:rPr lang="de-DE" sz="2400" dirty="0" err="1"/>
+                  <a:t>gain</a:t>
+                </a:r>
+                <a:r>
+                  <a:rPr lang="de-DE" sz="2400" dirty="0"/>
+                  <a:t> at </a:t>
+                </a:r>
+                <a:r>
+                  <a:rPr lang="de-DE" sz="2400" dirty="0" err="1"/>
+                  <a:t>oscillation</a:t>
+                </a:r>
+                <a:r>
+                  <a:rPr lang="de-DE" sz="2400" dirty="0"/>
+                  <a:t>) and </a:t>
+                </a:r>
+                <a:r>
+                  <a:rPr lang="de-DE" sz="2400" dirty="0" err="1"/>
+                  <a:t>ultimate</a:t>
+                </a:r>
+                <a:r>
+                  <a:rPr lang="de-DE" sz="2400" dirty="0"/>
+                  <a:t> </a:t>
+                </a:r>
+                <a:r>
+                  <a:rPr lang="de-DE" sz="2400" dirty="0" err="1"/>
+                  <a:t>period</a:t>
+                </a:r>
+                <a:r>
+                  <a:rPr lang="de-DE" sz="2400" dirty="0"/>
+                  <a:t> </a:t>
+                </a:r>
+                <a14:m>
+                  <m:oMath xmlns:m="http://schemas.openxmlformats.org/officeDocument/2006/math">
+                    <m:sSub>
+                      <m:sSubPr>
+                        <m:ctrlPr>
+                          <a:rPr lang="de-DE" sz="2400" i="1">
+                            <a:latin typeface="Cambria Math" panose="02040503050406030204" pitchFamily="18" charset="0"/>
+                          </a:rPr>
+                        </m:ctrlPr>
+                      </m:sSubPr>
+                      <m:e>
+                        <m:r>
+                          <a:rPr lang="de-DE" sz="2400" b="0" i="1" smtClean="0">
+                            <a:latin typeface="Cambria Math" panose="02040503050406030204" pitchFamily="18" charset="0"/>
+                          </a:rPr>
+                          <m:t>𝑇</m:t>
+                        </m:r>
+                      </m:e>
+                      <m:sub>
+                        <m:r>
+                          <a:rPr lang="de-DE" sz="2400" b="0" i="1" smtClean="0">
+                            <a:latin typeface="Cambria Math" panose="02040503050406030204" pitchFamily="18" charset="0"/>
+                          </a:rPr>
+                          <m:t>𝑢</m:t>
+                        </m:r>
+                      </m:sub>
+                    </m:sSub>
+                  </m:oMath>
+                </a14:m>
+                <a:r>
+                  <a:rPr lang="de-DE" sz="2400" dirty="0"/>
+                  <a:t> (</a:t>
+                </a:r>
+                <a:r>
+                  <a:rPr lang="de-DE" sz="2400" dirty="0" err="1"/>
+                  <a:t>oscillation</a:t>
+                </a:r>
+                <a:r>
+                  <a:rPr lang="de-DE" sz="2400" dirty="0"/>
+                  <a:t> </a:t>
+                </a:r>
+                <a:r>
+                  <a:rPr lang="de-DE" sz="2400" dirty="0" err="1"/>
+                  <a:t>period</a:t>
+                </a:r>
+                <a:r>
+                  <a:rPr lang="de-DE" sz="2400" dirty="0"/>
+                  <a:t>)</a:t>
+                </a:r>
+              </a:p>
+              <a:p>
+                <a:pPr marL="514350" indent="-514350">
+                  <a:buFont typeface="+mj-lt"/>
+                  <a:buAutoNum type="arabicPeriod"/>
+                </a:pPr>
+                <a:r>
+                  <a:rPr lang="de-DE" sz="2400" dirty="0"/>
+                  <a:t>Use </a:t>
+                </a:r>
+                <a14:m>
+                  <m:oMath xmlns:m="http://schemas.openxmlformats.org/officeDocument/2006/math">
+                    <m:sSub>
+                      <m:sSubPr>
+                        <m:ctrlPr>
+                          <a:rPr lang="de-DE" sz="2400" i="1" smtClean="0">
+                            <a:latin typeface="Cambria Math" panose="02040503050406030204" pitchFamily="18" charset="0"/>
+                          </a:rPr>
+                        </m:ctrlPr>
+                      </m:sSubPr>
+                      <m:e>
+                        <m:r>
+                          <a:rPr lang="de-DE" sz="2400" b="0" i="1" smtClean="0">
+                            <a:latin typeface="Cambria Math" panose="02040503050406030204" pitchFamily="18" charset="0"/>
+                          </a:rPr>
+                          <m:t>𝐾</m:t>
+                        </m:r>
+                      </m:e>
+                      <m:sub>
+                        <m:r>
+                          <a:rPr lang="de-DE" sz="2400" b="0" i="1" smtClean="0">
+                            <a:latin typeface="Cambria Math" panose="02040503050406030204" pitchFamily="18" charset="0"/>
+                          </a:rPr>
+                          <m:t>𝑢</m:t>
+                        </m:r>
+                      </m:sub>
+                    </m:sSub>
+                  </m:oMath>
+                </a14:m>
+                <a:r>
+                  <a:rPr lang="de-DE" sz="2400" dirty="0"/>
+                  <a:t> and </a:t>
+                </a:r>
+                <a14:m>
+                  <m:oMath xmlns:m="http://schemas.openxmlformats.org/officeDocument/2006/math">
+                    <m:sSub>
+                      <m:sSubPr>
+                        <m:ctrlPr>
+                          <a:rPr lang="de-DE" sz="2400" i="1" smtClean="0">
+                            <a:latin typeface="Cambria Math" panose="02040503050406030204" pitchFamily="18" charset="0"/>
+                          </a:rPr>
+                        </m:ctrlPr>
+                      </m:sSubPr>
+                      <m:e>
+                        <m:r>
+                          <a:rPr lang="de-DE" sz="2400" b="0" i="1" smtClean="0">
+                            <a:latin typeface="Cambria Math" panose="02040503050406030204" pitchFamily="18" charset="0"/>
+                          </a:rPr>
+                          <m:t>𝑇</m:t>
+                        </m:r>
+                      </m:e>
+                      <m:sub>
+                        <m:r>
+                          <a:rPr lang="de-DE" sz="2400" b="0" i="1" smtClean="0">
+                            <a:latin typeface="Cambria Math" panose="02040503050406030204" pitchFamily="18" charset="0"/>
+                          </a:rPr>
+                          <m:t>𝑢</m:t>
+                        </m:r>
+                      </m:sub>
+                    </m:sSub>
+                  </m:oMath>
+                </a14:m>
+                <a:r>
+                  <a:rPr lang="de-DE" sz="2400" dirty="0"/>
+                  <a:t> </a:t>
+                </a:r>
+                <a:r>
+                  <a:rPr lang="de-DE" sz="2400" dirty="0" err="1"/>
+                  <a:t>to</a:t>
+                </a:r>
+                <a:r>
+                  <a:rPr lang="de-DE" sz="2400" dirty="0"/>
+                  <a:t> </a:t>
+                </a:r>
+                <a:r>
+                  <a:rPr lang="de-DE" sz="2400" dirty="0" err="1"/>
+                  <a:t>compute</a:t>
+                </a:r>
+                <a:r>
+                  <a:rPr lang="de-DE" sz="2400" dirty="0"/>
+                  <a:t> </a:t>
+                </a:r>
+                <a:r>
+                  <a:rPr lang="de-DE" sz="2400" dirty="0" err="1"/>
+                  <a:t>tuning</a:t>
+                </a:r>
+                <a:r>
+                  <a:rPr lang="de-DE" sz="2400" dirty="0"/>
+                  <a:t> </a:t>
+                </a:r>
+                <a:r>
+                  <a:rPr lang="de-DE" sz="2400" dirty="0" err="1"/>
+                  <a:t>parameters</a:t>
+                </a:r>
+                <a:r>
+                  <a:rPr lang="de-DE" sz="2400" dirty="0"/>
+                  <a:t> </a:t>
+                </a:r>
+                <a:r>
+                  <a:rPr lang="de-DE" sz="2400" dirty="0">
+                    <a:sym typeface="Wingdings" pitchFamily="2" charset="2"/>
+                  </a:rPr>
+                  <a:t> </a:t>
+                </a:r>
+                <a:r>
+                  <a:rPr lang="de-DE" sz="2400" dirty="0" err="1"/>
+                  <a:t>empirical</a:t>
+                </a:r>
+                <a:r>
+                  <a:rPr lang="de-DE" sz="2400" dirty="0"/>
+                  <a:t> </a:t>
+                </a:r>
+                <a:r>
+                  <a:rPr lang="de-DE" sz="2400" dirty="0" err="1"/>
+                  <a:t>tuning</a:t>
+                </a:r>
+                <a:r>
+                  <a:rPr lang="de-DE" sz="2400" dirty="0"/>
+                  <a:t> </a:t>
+                </a:r>
+                <a:r>
+                  <a:rPr lang="de-DE" sz="2400" dirty="0" err="1"/>
+                  <a:t>formulas</a:t>
+                </a:r>
+                <a:endParaRPr lang="de-DE" sz="2400" dirty="0"/>
+              </a:p>
+            </p:txBody>
+          </p:sp>
+        </mc:Choice>
+        <mc:Fallback xmlns="">
+          <p:sp>
+            <p:nvSpPr>
+              <p:cNvPr id="3" name="Inhaltsplatzhalter 2">
+                <a:extLst>
+                  <a:ext uri="{FF2B5EF4-FFF2-40B4-BE49-F238E27FC236}">
+                    <a16:creationId xmlns:a16="http://schemas.microsoft.com/office/drawing/2014/main" id="{D2DFD6F6-7882-2454-DA98-53A8C188E030}"/>
+                  </a:ext>
+                </a:extLst>
+              </p:cNvPr>
+              <p:cNvSpPr>
+                <a:spLocks noGrp="1" noRot="1" noChangeAspect="1" noMove="1" noResize="1" noEditPoints="1" noAdjustHandles="1" noChangeArrowheads="1" noChangeShapeType="1" noTextEdit="1"/>
+              </p:cNvSpPr>
+              <p:nvPr>
+                <p:ph idx="1"/>
+              </p:nvPr>
+            </p:nvSpPr>
+            <p:spPr>
+              <a:blipFill>
+                <a:blip r:embed="rId2"/>
+                <a:stretch>
+                  <a:fillRect l="-965" t="-2035" b="-2035"/>
+                </a:stretch>
+              </a:blipFill>
+            </p:spPr>
+            <p:txBody>
+              <a:bodyPr/>
+              <a:lstStyle/>
+              <a:p>
+                <a:r>
+                  <a:rPr lang="de-DE">
+                    <a:noFill/>
+                  </a:rPr>
+                  <a:t> </a:t>
+                </a:r>
+              </a:p>
+            </p:txBody>
+          </p:sp>
+        </mc:Fallback>
+      </mc:AlternateContent>
       <p:sp>
         <p:nvSpPr>
           <p:cNvPr id="4" name="Foliennummernplatzhalter 3">
@@ -5592,7 +6239,7 @@
           <p:cNvPr id="2" name="Titel 1">
             <a:extLst>
               <a:ext uri="{FF2B5EF4-FFF2-40B4-BE49-F238E27FC236}">
-                <a16:creationId xmlns:a16="http://schemas.microsoft.com/office/drawing/2014/main" id="{DE638CB1-1CE5-2C1D-4952-D96FCAE8716F}"/>
+                <a16:creationId xmlns:a16="http://schemas.microsoft.com/office/drawing/2014/main" id="{B1C35ED3-47DC-A12E-E092-8ADAE3F43AB2}"/>
               </a:ext>
             </a:extLst>
           </p:cNvPr>
@@ -5610,25 +6257,17 @@
           <a:p>
             <a:r>
               <a:rPr lang="de-DE" dirty="0"/>
-              <a:t>T-</a:t>
-            </a:r>
-            <a:r>
-              <a:rPr lang="de-DE" dirty="0" err="1"/>
-              <a:t>Sum</a:t>
-            </a:r>
-            <a:r>
-              <a:rPr lang="de-DE" dirty="0"/>
-              <a:t> Method</a:t>
+              <a:t>Ziegler–Nichols Tuning Rules</a:t>
             </a:r>
           </a:p>
         </p:txBody>
       </p:sp>
       <p:sp>
         <p:nvSpPr>
-          <p:cNvPr id="3" name="Inhaltsplatzhalter 2">
+          <p:cNvPr id="7" name="Inhaltsplatzhalter 6">
             <a:extLst>
               <a:ext uri="{FF2B5EF4-FFF2-40B4-BE49-F238E27FC236}">
-                <a16:creationId xmlns:a16="http://schemas.microsoft.com/office/drawing/2014/main" id="{A1D58EA8-D03B-3C93-1C0F-F98C41CE636F}"/>
+                <a16:creationId xmlns:a16="http://schemas.microsoft.com/office/drawing/2014/main" id="{A4652D0E-1C3C-66CB-917B-330CE9B422E5}"/>
               </a:ext>
             </a:extLst>
           </p:cNvPr>
@@ -5636,7 +6275,230 @@
             <a:spLocks noGrp="1"/>
           </p:cNvSpPr>
           <p:nvPr>
-            <p:ph idx="1"/>
+            <p:ph sz="half" idx="1"/>
+          </p:nvPr>
+        </p:nvSpPr>
+        <p:spPr>
+          <a:xfrm>
+            <a:off x="838200" y="4683759"/>
+            <a:ext cx="5181600" cy="1493203"/>
+          </a:xfrm>
+        </p:spPr>
+        <p:txBody>
+          <a:bodyPr>
+            <a:normAutofit fontScale="77500" lnSpcReduction="20000"/>
+          </a:bodyPr>
+          <a:lstStyle/>
+          <a:p>
+            <a:pPr marL="0" indent="0">
+              <a:buNone/>
+            </a:pPr>
+            <a:r>
+              <a:rPr lang="de-DE" dirty="0"/>
+              <a:t>Advantages:</a:t>
+            </a:r>
+          </a:p>
+          <a:p>
+            <a:r>
+              <a:rPr lang="de-DE" dirty="0"/>
+              <a:t>Simple experimental </a:t>
+            </a:r>
+            <a:r>
+              <a:rPr lang="de-DE" dirty="0" err="1"/>
+              <a:t>procedure</a:t>
+            </a:r>
+            <a:endParaRPr lang="de-DE" dirty="0"/>
+          </a:p>
+          <a:p>
+            <a:r>
+              <a:rPr lang="de-DE" dirty="0" err="1"/>
+              <a:t>Widely</a:t>
+            </a:r>
+            <a:r>
+              <a:rPr lang="de-DE" dirty="0"/>
+              <a:t> </a:t>
+            </a:r>
+            <a:r>
+              <a:rPr lang="de-DE" dirty="0" err="1"/>
+              <a:t>used</a:t>
+            </a:r>
+            <a:r>
+              <a:rPr lang="de-DE" dirty="0"/>
+              <a:t> </a:t>
+            </a:r>
+            <a:r>
+              <a:rPr lang="de-DE" dirty="0" err="1"/>
+              <a:t>for</a:t>
+            </a:r>
+            <a:r>
+              <a:rPr lang="de-DE" dirty="0"/>
+              <a:t> initial PID </a:t>
+            </a:r>
+            <a:r>
+              <a:rPr lang="de-DE" dirty="0" err="1"/>
+              <a:t>tuning</a:t>
+            </a:r>
+            <a:endParaRPr lang="de-DE" dirty="0"/>
+          </a:p>
+        </p:txBody>
+      </p:sp>
+      <p:sp>
+        <p:nvSpPr>
+          <p:cNvPr id="8" name="Inhaltsplatzhalter 7">
+            <a:extLst>
+              <a:ext uri="{FF2B5EF4-FFF2-40B4-BE49-F238E27FC236}">
+                <a16:creationId xmlns:a16="http://schemas.microsoft.com/office/drawing/2014/main" id="{F23D638C-F929-816F-8867-F4B81D71D9F3}"/>
+              </a:ext>
+            </a:extLst>
+          </p:cNvPr>
+          <p:cNvSpPr>
+            <a:spLocks noGrp="1"/>
+          </p:cNvSpPr>
+          <p:nvPr>
+            <p:ph sz="half" idx="2"/>
+          </p:nvPr>
+        </p:nvSpPr>
+        <p:spPr>
+          <a:xfrm>
+            <a:off x="6172200" y="4683758"/>
+            <a:ext cx="5181600" cy="1672591"/>
+          </a:xfrm>
+        </p:spPr>
+        <p:txBody>
+          <a:bodyPr>
+            <a:normAutofit fontScale="77500" lnSpcReduction="20000"/>
+          </a:bodyPr>
+          <a:lstStyle/>
+          <a:p>
+            <a:pPr marL="0" indent="0">
+              <a:buNone/>
+            </a:pPr>
+            <a:r>
+              <a:rPr lang="de-DE" dirty="0" err="1"/>
+              <a:t>Limitations</a:t>
+            </a:r>
+            <a:r>
+              <a:rPr lang="de-DE" dirty="0"/>
+              <a:t>:</a:t>
+            </a:r>
+          </a:p>
+          <a:p>
+            <a:r>
+              <a:rPr lang="de-DE" dirty="0"/>
+              <a:t>Can </a:t>
+            </a:r>
+            <a:r>
+              <a:rPr lang="de-DE" dirty="0" err="1"/>
+              <a:t>produce</a:t>
+            </a:r>
+            <a:r>
+              <a:rPr lang="de-DE" dirty="0"/>
+              <a:t> large </a:t>
+            </a:r>
+            <a:r>
+              <a:rPr lang="de-DE" dirty="0" err="1"/>
+              <a:t>overshoot</a:t>
+            </a:r>
+            <a:endParaRPr lang="de-DE" dirty="0"/>
+          </a:p>
+          <a:p>
+            <a:r>
+              <a:rPr lang="de-DE" dirty="0"/>
+              <a:t>Not ideal </a:t>
+            </a:r>
+            <a:r>
+              <a:rPr lang="de-DE" dirty="0" err="1"/>
+              <a:t>for</a:t>
+            </a:r>
+            <a:r>
+              <a:rPr lang="de-DE" dirty="0"/>
+              <a:t> </a:t>
+            </a:r>
+            <a:r>
+              <a:rPr lang="de-DE" dirty="0" err="1"/>
+              <a:t>highly</a:t>
+            </a:r>
+            <a:r>
+              <a:rPr lang="de-DE" dirty="0"/>
+              <a:t> </a:t>
+            </a:r>
+            <a:r>
+              <a:rPr lang="de-DE" dirty="0" err="1"/>
+              <a:t>nonlinear</a:t>
+            </a:r>
+            <a:r>
+              <a:rPr lang="de-DE" dirty="0"/>
+              <a:t> </a:t>
+            </a:r>
+            <a:r>
+              <a:rPr lang="de-DE" dirty="0" err="1"/>
+              <a:t>or</a:t>
+            </a:r>
+            <a:r>
+              <a:rPr lang="de-DE" dirty="0"/>
+              <a:t> </a:t>
+            </a:r>
+            <a:r>
+              <a:rPr lang="de-DE" dirty="0" err="1"/>
+              <a:t>unstable</a:t>
+            </a:r>
+            <a:r>
+              <a:rPr lang="de-DE" dirty="0"/>
+              <a:t> </a:t>
+            </a:r>
+            <a:r>
+              <a:rPr lang="de-DE" dirty="0" err="1"/>
+              <a:t>systems</a:t>
+            </a:r>
+            <a:endParaRPr lang="de-DE" dirty="0"/>
+          </a:p>
+          <a:p>
+            <a:r>
+              <a:rPr lang="de-DE" dirty="0" err="1"/>
+              <a:t>Often</a:t>
+            </a:r>
+            <a:r>
+              <a:rPr lang="de-DE" dirty="0"/>
+              <a:t> </a:t>
+            </a:r>
+            <a:r>
+              <a:rPr lang="de-DE" dirty="0" err="1"/>
+              <a:t>requires</a:t>
+            </a:r>
+            <a:r>
+              <a:rPr lang="de-DE" dirty="0"/>
+              <a:t> </a:t>
+            </a:r>
+            <a:r>
+              <a:rPr lang="de-DE" dirty="0" err="1"/>
+              <a:t>finetuning</a:t>
+            </a:r>
+            <a:r>
+              <a:rPr lang="de-DE" dirty="0"/>
+              <a:t> </a:t>
+            </a:r>
+            <a:r>
+              <a:rPr lang="de-DE" dirty="0" err="1"/>
+              <a:t>afterward</a:t>
+            </a:r>
+            <a:endParaRPr lang="de-DE" dirty="0"/>
+          </a:p>
+        </p:txBody>
+      </p:sp>
+      <p:sp>
+        <p:nvSpPr>
+          <p:cNvPr id="4" name="Foliennummernplatzhalter 3">
+            <a:extLst>
+              <a:ext uri="{FF2B5EF4-FFF2-40B4-BE49-F238E27FC236}">
+                <a16:creationId xmlns:a16="http://schemas.microsoft.com/office/drawing/2014/main" id="{714D16D6-54DC-F658-520B-EA40DEC90009}"/>
+              </a:ext>
+            </a:extLst>
+          </p:cNvPr>
+          <p:cNvSpPr>
+            <a:spLocks noGrp="1"/>
+          </p:cNvSpPr>
+          <p:nvPr>
+            <p:ph type="sldNum" sz="quarter" idx="12"/>
           </p:nvPr>
         </p:nvSpPr>
         <p:spPr/>
@@ -5644,72 +6506,3109 @@
           <a:bodyPr/>
           <a:lstStyle/>
           <a:p>
-            <a:r>
-              <a:rPr lang="de-DE" dirty="0" err="1"/>
-              <a:t>Based</a:t>
-            </a:r>
-            <a:r>
-              <a:rPr lang="de-DE" dirty="0"/>
-              <a:t> on </a:t>
-            </a:r>
-            <a:r>
-              <a:rPr lang="de-DE" dirty="0" err="1"/>
-              <a:t>process</a:t>
-            </a:r>
-            <a:r>
-              <a:rPr lang="de-DE" dirty="0"/>
-              <a:t> time </a:t>
-            </a:r>
-            <a:r>
-              <a:rPr lang="de-DE" dirty="0" err="1"/>
-              <a:t>constants</a:t>
-            </a:r>
-            <a:endParaRPr lang="de-DE" dirty="0"/>
-          </a:p>
-          <a:p>
-            <a:r>
-              <a:rPr lang="de-DE" dirty="0"/>
-              <a:t>More </a:t>
-            </a:r>
-            <a:r>
-              <a:rPr lang="de-DE" dirty="0" err="1"/>
-              <a:t>conservative</a:t>
-            </a:r>
-            <a:r>
-              <a:rPr lang="de-DE" dirty="0"/>
-              <a:t> </a:t>
-            </a:r>
-            <a:r>
-              <a:rPr lang="de-DE" dirty="0" err="1"/>
-              <a:t>tuning</a:t>
-            </a:r>
-            <a:endParaRPr lang="de-DE" dirty="0"/>
-          </a:p>
-          <a:p>
-            <a:r>
-              <a:rPr lang="de-DE" dirty="0" err="1"/>
-              <a:t>Often</a:t>
-            </a:r>
-            <a:r>
-              <a:rPr lang="de-DE" dirty="0"/>
-              <a:t> </a:t>
-            </a:r>
-            <a:r>
-              <a:rPr lang="de-DE" dirty="0" err="1"/>
-              <a:t>better</a:t>
-            </a:r>
-            <a:r>
-              <a:rPr lang="de-DE" dirty="0"/>
-              <a:t> </a:t>
-            </a:r>
-            <a:r>
-              <a:rPr lang="de-DE" dirty="0" err="1"/>
-              <a:t>robustness</a:t>
-            </a:r>
-            <a:endParaRPr lang="de-DE" dirty="0"/>
+            <a:fld id="{08C366F5-AFAD-49CB-854A-9D9E238FCA13}" type="slidenum">
+              <a:rPr lang="en-GB" smtClean="0"/>
+              <a:t>15</a:t>
+            </a:fld>
+            <a:endParaRPr lang="en-GB"/>
           </a:p>
         </p:txBody>
       </p:sp>
+      <mc:AlternateContent xmlns:mc="http://schemas.openxmlformats.org/markup-compatibility/2006" xmlns:a14="http://schemas.microsoft.com/office/drawing/2010/main">
+        <mc:Choice Requires="a14">
+          <p:graphicFrame>
+            <p:nvGraphicFramePr>
+              <p:cNvPr id="5" name="Tabelle 4">
+                <a:extLst>
+                  <a:ext uri="{FF2B5EF4-FFF2-40B4-BE49-F238E27FC236}">
+                    <a16:creationId xmlns:a16="http://schemas.microsoft.com/office/drawing/2014/main" id="{CAA86835-02BD-1191-0E8E-FFAF0EBF24C5}"/>
+                  </a:ext>
+                </a:extLst>
+              </p:cNvPr>
+              <p:cNvGraphicFramePr>
+                <a:graphicFrameLocks noGrp="1"/>
+              </p:cNvGraphicFramePr>
+              <p:nvPr>
+                <p:extLst>
+                  <p:ext uri="{D42A27DB-BD31-4B8C-83A1-F6EECF244321}">
+                    <p14:modId xmlns:p14="http://schemas.microsoft.com/office/powerpoint/2010/main" val="2899256763"/>
+                  </p:ext>
+                </p:extLst>
+              </p:nvPr>
+            </p:nvGraphicFramePr>
+            <p:xfrm>
+              <a:off x="838200" y="1917985"/>
+              <a:ext cx="10515600" cy="2105533"/>
+            </p:xfrm>
+            <a:graphic>
+              <a:graphicData uri="http://schemas.openxmlformats.org/drawingml/2006/table">
+                <a:tbl>
+                  <a:tblPr/>
+                  <a:tblGrid>
+                    <a:gridCol w="2628900">
+                      <a:extLst>
+                        <a:ext uri="{9D8B030D-6E8A-4147-A177-3AD203B41FA5}">
+                          <a16:colId xmlns:a16="http://schemas.microsoft.com/office/drawing/2014/main" val="2068899635"/>
+                        </a:ext>
+                      </a:extLst>
+                    </a:gridCol>
+                    <a:gridCol w="2628900">
+                      <a:extLst>
+                        <a:ext uri="{9D8B030D-6E8A-4147-A177-3AD203B41FA5}">
+                          <a16:colId xmlns:a16="http://schemas.microsoft.com/office/drawing/2014/main" val="1475338881"/>
+                        </a:ext>
+                      </a:extLst>
+                    </a:gridCol>
+                    <a:gridCol w="2628900">
+                      <a:extLst>
+                        <a:ext uri="{9D8B030D-6E8A-4147-A177-3AD203B41FA5}">
+                          <a16:colId xmlns:a16="http://schemas.microsoft.com/office/drawing/2014/main" val="3621335237"/>
+                        </a:ext>
+                      </a:extLst>
+                    </a:gridCol>
+                    <a:gridCol w="2628900">
+                      <a:extLst>
+                        <a:ext uri="{9D8B030D-6E8A-4147-A177-3AD203B41FA5}">
+                          <a16:colId xmlns:a16="http://schemas.microsoft.com/office/drawing/2014/main" val="3493297568"/>
+                        </a:ext>
+                      </a:extLst>
+                    </a:gridCol>
+                  </a:tblGrid>
+                  <a:tr h="0">
+                    <a:tc>
+                      <a:txBody>
+                        <a:bodyPr/>
+                        <a:lstStyle/>
+                        <a:p>
+                          <a:pPr algn="ctr">
+                            <a:buNone/>
+                          </a:pPr>
+                          <a:r>
+                            <a:rPr lang="de-DE" sz="2800" b="0" dirty="0"/>
+                            <a:t>Controller Type</a:t>
+                          </a:r>
+                        </a:p>
+                      </a:txBody>
+                      <a:tcPr anchor="ctr">
+                        <a:lnL w="12700" cap="flat" cmpd="sng" algn="ctr">
+                          <a:solidFill>
+                            <a:schemeClr val="tx1"/>
+                          </a:solidFill>
+                          <a:prstDash val="solid"/>
+                          <a:round/>
+                          <a:headEnd type="none" w="med" len="med"/>
+                          <a:tailEnd type="none" w="med" len="med"/>
+                        </a:lnL>
+                        <a:lnR w="12700" cap="flat" cmpd="sng" algn="ctr">
+                          <a:solidFill>
+                            <a:schemeClr val="tx1"/>
+                          </a:solidFill>
+                          <a:prstDash val="solid"/>
+                          <a:round/>
+                          <a:headEnd type="none" w="med" len="med"/>
+                          <a:tailEnd type="none" w="med" len="med"/>
+                        </a:lnR>
+                        <a:lnT w="12700" cap="flat" cmpd="sng" algn="ctr">
+                          <a:solidFill>
+                            <a:schemeClr val="tx1"/>
+                          </a:solidFill>
+                          <a:prstDash val="solid"/>
+                          <a:round/>
+                          <a:headEnd type="none" w="med" len="med"/>
+                          <a:tailEnd type="none" w="med" len="med"/>
+                        </a:lnT>
+                        <a:lnB w="12700" cap="flat" cmpd="sng" algn="ctr">
+                          <a:solidFill>
+                            <a:schemeClr val="tx1"/>
+                          </a:solidFill>
+                          <a:prstDash val="solid"/>
+                          <a:round/>
+                          <a:headEnd type="none" w="med" len="med"/>
+                          <a:tailEnd type="none" w="med" len="med"/>
+                        </a:lnB>
+                        <a:noFill/>
+                      </a:tcPr>
+                    </a:tc>
+                    <a:tc>
+                      <a:txBody>
+                        <a:bodyPr/>
+                        <a:lstStyle/>
+                        <a:p>
+                          <a:pPr>
+                            <a:buNone/>
+                          </a:pPr>
+                          <a14:m>
+                            <m:oMathPara xmlns:m="http://schemas.openxmlformats.org/officeDocument/2006/math">
+                              <m:oMathParaPr>
+                                <m:jc m:val="center"/>
+                              </m:oMathParaPr>
+                              <m:oMath xmlns:m="http://schemas.openxmlformats.org/officeDocument/2006/math">
+                                <m:sSub>
+                                  <m:sSubPr>
+                                    <m:ctrlPr>
+                                      <a:rPr lang="de-DE" sz="2800" i="1" smtClean="0">
+                                        <a:latin typeface="Cambria Math" panose="02040503050406030204" pitchFamily="18" charset="0"/>
+                                      </a:rPr>
+                                    </m:ctrlPr>
+                                  </m:sSubPr>
+                                  <m:e>
+                                    <m:r>
+                                      <a:rPr lang="de-DE" sz="2800" b="0" i="1" smtClean="0">
+                                        <a:latin typeface="Cambria Math" panose="02040503050406030204" pitchFamily="18" charset="0"/>
+                                      </a:rPr>
+                                      <m:t>𝐾</m:t>
+                                    </m:r>
+                                  </m:e>
+                                  <m:sub>
+                                    <m:r>
+                                      <a:rPr lang="de-DE" sz="2800" b="0" i="1" smtClean="0">
+                                        <a:latin typeface="Cambria Math" panose="02040503050406030204" pitchFamily="18" charset="0"/>
+                                      </a:rPr>
+                                      <m:t>𝑝</m:t>
+                                    </m:r>
+                                  </m:sub>
+                                </m:sSub>
+                              </m:oMath>
+                            </m:oMathPara>
+                          </a14:m>
+                          <a:endParaRPr lang="de-DE" sz="2800" dirty="0"/>
+                        </a:p>
+                      </a:txBody>
+                      <a:tcPr anchor="ctr">
+                        <a:lnL w="12700" cap="flat" cmpd="sng" algn="ctr">
+                          <a:solidFill>
+                            <a:schemeClr val="tx1"/>
+                          </a:solidFill>
+                          <a:prstDash val="solid"/>
+                          <a:round/>
+                          <a:headEnd type="none" w="med" len="med"/>
+                          <a:tailEnd type="none" w="med" len="med"/>
+                        </a:lnL>
+                        <a:lnR w="12700" cap="flat" cmpd="sng" algn="ctr">
+                          <a:solidFill>
+                            <a:schemeClr val="tx1"/>
+                          </a:solidFill>
+                          <a:prstDash val="solid"/>
+                          <a:round/>
+                          <a:headEnd type="none" w="med" len="med"/>
+                          <a:tailEnd type="none" w="med" len="med"/>
+                        </a:lnR>
+                        <a:lnT w="12700" cap="flat" cmpd="sng" algn="ctr">
+                          <a:solidFill>
+                            <a:schemeClr val="tx1"/>
+                          </a:solidFill>
+                          <a:prstDash val="solid"/>
+                          <a:round/>
+                          <a:headEnd type="none" w="med" len="med"/>
+                          <a:tailEnd type="none" w="med" len="med"/>
+                        </a:lnT>
+                        <a:lnB w="12700" cap="flat" cmpd="sng" algn="ctr">
+                          <a:solidFill>
+                            <a:schemeClr val="tx1"/>
+                          </a:solidFill>
+                          <a:prstDash val="solid"/>
+                          <a:round/>
+                          <a:headEnd type="none" w="med" len="med"/>
+                          <a:tailEnd type="none" w="med" len="med"/>
+                        </a:lnB>
+                        <a:noFill/>
+                      </a:tcPr>
+                    </a:tc>
+                    <a:tc>
+                      <a:txBody>
+                        <a:bodyPr/>
+                        <a:lstStyle/>
+                        <a:p>
+                          <a:pPr>
+                            <a:buNone/>
+                          </a:pPr>
+                          <a14:m>
+                            <m:oMathPara xmlns:m="http://schemas.openxmlformats.org/officeDocument/2006/math">
+                              <m:oMathParaPr>
+                                <m:jc m:val="centerGroup"/>
+                              </m:oMathParaPr>
+                              <m:oMath xmlns:m="http://schemas.openxmlformats.org/officeDocument/2006/math">
+                                <m:sSub>
+                                  <m:sSubPr>
+                                    <m:ctrlPr>
+                                      <a:rPr lang="de-DE" sz="2800" i="1" smtClean="0">
+                                        <a:latin typeface="Cambria Math" panose="02040503050406030204" pitchFamily="18" charset="0"/>
+                                      </a:rPr>
+                                    </m:ctrlPr>
+                                  </m:sSubPr>
+                                  <m:e>
+                                    <m:r>
+                                      <a:rPr lang="de-DE" sz="2800" b="0" i="1" smtClean="0">
+                                        <a:latin typeface="Cambria Math" panose="02040503050406030204" pitchFamily="18" charset="0"/>
+                                      </a:rPr>
+                                      <m:t>𝑇</m:t>
+                                    </m:r>
+                                  </m:e>
+                                  <m:sub>
+                                    <m:r>
+                                      <a:rPr lang="de-DE" sz="2800" b="0" i="1" smtClean="0">
+                                        <a:latin typeface="Cambria Math" panose="02040503050406030204" pitchFamily="18" charset="0"/>
+                                      </a:rPr>
+                                      <m:t>𝑖</m:t>
+                                    </m:r>
+                                  </m:sub>
+                                </m:sSub>
+                              </m:oMath>
+                            </m:oMathPara>
+                          </a14:m>
+                          <a:endParaRPr lang="de-DE" sz="2800" dirty="0"/>
+                        </a:p>
+                      </a:txBody>
+                      <a:tcPr anchor="ctr">
+                        <a:lnL w="12700" cap="flat" cmpd="sng" algn="ctr">
+                          <a:solidFill>
+                            <a:schemeClr val="tx1"/>
+                          </a:solidFill>
+                          <a:prstDash val="solid"/>
+                          <a:round/>
+                          <a:headEnd type="none" w="med" len="med"/>
+                          <a:tailEnd type="none" w="med" len="med"/>
+                        </a:lnL>
+                        <a:lnR w="12700" cap="flat" cmpd="sng" algn="ctr">
+                          <a:solidFill>
+                            <a:schemeClr val="tx1"/>
+                          </a:solidFill>
+                          <a:prstDash val="solid"/>
+                          <a:round/>
+                          <a:headEnd type="none" w="med" len="med"/>
+                          <a:tailEnd type="none" w="med" len="med"/>
+                        </a:lnR>
+                        <a:lnT w="12700" cap="flat" cmpd="sng" algn="ctr">
+                          <a:solidFill>
+                            <a:schemeClr val="tx1"/>
+                          </a:solidFill>
+                          <a:prstDash val="solid"/>
+                          <a:round/>
+                          <a:headEnd type="none" w="med" len="med"/>
+                          <a:tailEnd type="none" w="med" len="med"/>
+                        </a:lnT>
+                        <a:lnB w="12700" cap="flat" cmpd="sng" algn="ctr">
+                          <a:solidFill>
+                            <a:schemeClr val="tx1"/>
+                          </a:solidFill>
+                          <a:prstDash val="solid"/>
+                          <a:round/>
+                          <a:headEnd type="none" w="med" len="med"/>
+                          <a:tailEnd type="none" w="med" len="med"/>
+                        </a:lnB>
+                        <a:noFill/>
+                      </a:tcPr>
+                    </a:tc>
+                    <a:tc>
+                      <a:txBody>
+                        <a:bodyPr/>
+                        <a:lstStyle/>
+                        <a:p>
+                          <a:pPr>
+                            <a:buNone/>
+                          </a:pPr>
+                          <a14:m>
+                            <m:oMathPara xmlns:m="http://schemas.openxmlformats.org/officeDocument/2006/math">
+                              <m:oMathParaPr>
+                                <m:jc m:val="centerGroup"/>
+                              </m:oMathParaPr>
+                              <m:oMath xmlns:m="http://schemas.openxmlformats.org/officeDocument/2006/math">
+                                <m:sSub>
+                                  <m:sSubPr>
+                                    <m:ctrlPr>
+                                      <a:rPr lang="de-DE" sz="2800" i="1" smtClean="0">
+                                        <a:latin typeface="Cambria Math" panose="02040503050406030204" pitchFamily="18" charset="0"/>
+                                      </a:rPr>
+                                    </m:ctrlPr>
+                                  </m:sSubPr>
+                                  <m:e>
+                                    <m:r>
+                                      <a:rPr lang="de-DE" sz="2800" b="0" i="1" smtClean="0">
+                                        <a:latin typeface="Cambria Math" panose="02040503050406030204" pitchFamily="18" charset="0"/>
+                                      </a:rPr>
+                                      <m:t>𝑇</m:t>
+                                    </m:r>
+                                  </m:e>
+                                  <m:sub>
+                                    <m:r>
+                                      <a:rPr lang="de-DE" sz="2800" b="0" i="1" smtClean="0">
+                                        <a:latin typeface="Cambria Math" panose="02040503050406030204" pitchFamily="18" charset="0"/>
+                                      </a:rPr>
+                                      <m:t>𝑑</m:t>
+                                    </m:r>
+                                  </m:sub>
+                                </m:sSub>
+                              </m:oMath>
+                            </m:oMathPara>
+                          </a14:m>
+                          <a:endParaRPr lang="de-DE" sz="2800" dirty="0"/>
+                        </a:p>
+                      </a:txBody>
+                      <a:tcPr anchor="ctr">
+                        <a:lnL w="12700" cap="flat" cmpd="sng" algn="ctr">
+                          <a:solidFill>
+                            <a:schemeClr val="tx1"/>
+                          </a:solidFill>
+                          <a:prstDash val="solid"/>
+                          <a:round/>
+                          <a:headEnd type="none" w="med" len="med"/>
+                          <a:tailEnd type="none" w="med" len="med"/>
+                        </a:lnL>
+                        <a:lnR w="12700" cap="flat" cmpd="sng" algn="ctr">
+                          <a:solidFill>
+                            <a:schemeClr val="tx1"/>
+                          </a:solidFill>
+                          <a:prstDash val="solid"/>
+                          <a:round/>
+                          <a:headEnd type="none" w="med" len="med"/>
+                          <a:tailEnd type="none" w="med" len="med"/>
+                        </a:lnR>
+                        <a:lnT w="12700" cap="flat" cmpd="sng" algn="ctr">
+                          <a:solidFill>
+                            <a:schemeClr val="tx1"/>
+                          </a:solidFill>
+                          <a:prstDash val="solid"/>
+                          <a:round/>
+                          <a:headEnd type="none" w="med" len="med"/>
+                          <a:tailEnd type="none" w="med" len="med"/>
+                        </a:lnT>
+                        <a:lnB w="12700" cap="flat" cmpd="sng" algn="ctr">
+                          <a:solidFill>
+                            <a:schemeClr val="tx1"/>
+                          </a:solidFill>
+                          <a:prstDash val="solid"/>
+                          <a:round/>
+                          <a:headEnd type="none" w="med" len="med"/>
+                          <a:tailEnd type="none" w="med" len="med"/>
+                        </a:lnB>
+                        <a:noFill/>
+                      </a:tcPr>
+                    </a:tc>
+                    <a:extLst>
+                      <a:ext uri="{0D108BD9-81ED-4DB2-BD59-A6C34878D82A}">
+                        <a16:rowId xmlns:a16="http://schemas.microsoft.com/office/drawing/2014/main" val="3658282415"/>
+                      </a:ext>
+                    </a:extLst>
+                  </a:tr>
+                  <a:tr h="0">
+                    <a:tc>
+                      <a:txBody>
+                        <a:bodyPr/>
+                        <a:lstStyle/>
+                        <a:p>
+                          <a:pPr algn="ctr">
+                            <a:buNone/>
+                          </a:pPr>
+                          <a:r>
+                            <a:rPr lang="de-DE" sz="2800" dirty="0"/>
+                            <a:t>P</a:t>
+                          </a:r>
+                        </a:p>
+                      </a:txBody>
+                      <a:tcPr anchor="ctr">
+                        <a:lnL w="12700" cap="flat" cmpd="sng" algn="ctr">
+                          <a:solidFill>
+                            <a:schemeClr val="tx1"/>
+                          </a:solidFill>
+                          <a:prstDash val="solid"/>
+                          <a:round/>
+                          <a:headEnd type="none" w="med" len="med"/>
+                          <a:tailEnd type="none" w="med" len="med"/>
+                        </a:lnL>
+                        <a:lnR w="12700" cap="flat" cmpd="sng" algn="ctr">
+                          <a:solidFill>
+                            <a:schemeClr val="tx1"/>
+                          </a:solidFill>
+                          <a:prstDash val="solid"/>
+                          <a:round/>
+                          <a:headEnd type="none" w="med" len="med"/>
+                          <a:tailEnd type="none" w="med" len="med"/>
+                        </a:lnR>
+                        <a:lnT w="12700" cap="flat" cmpd="sng" algn="ctr">
+                          <a:solidFill>
+                            <a:schemeClr val="tx1"/>
+                          </a:solidFill>
+                          <a:prstDash val="solid"/>
+                          <a:round/>
+                          <a:headEnd type="none" w="med" len="med"/>
+                          <a:tailEnd type="none" w="med" len="med"/>
+                        </a:lnT>
+                        <a:lnB w="12700" cap="flat" cmpd="sng" algn="ctr">
+                          <a:solidFill>
+                            <a:schemeClr val="tx1"/>
+                          </a:solidFill>
+                          <a:prstDash val="solid"/>
+                          <a:round/>
+                          <a:headEnd type="none" w="med" len="med"/>
+                          <a:tailEnd type="none" w="med" len="med"/>
+                        </a:lnB>
+                        <a:noFill/>
+                      </a:tcPr>
+                    </a:tc>
+                    <a:tc>
+                      <a:txBody>
+                        <a:bodyPr/>
+                        <a:lstStyle/>
+                        <a:p>
+                          <a:pPr>
+                            <a:buNone/>
+                          </a:pPr>
+                          <a14:m>
+                            <m:oMathPara xmlns:m="http://schemas.openxmlformats.org/officeDocument/2006/math">
+                              <m:oMathParaPr>
+                                <m:jc m:val="centerGroup"/>
+                              </m:oMathParaPr>
+                              <m:oMath xmlns:m="http://schemas.openxmlformats.org/officeDocument/2006/math">
+                                <m:r>
+                                  <a:rPr lang="de-DE" sz="2800" b="0" i="0" smtClean="0">
+                                    <a:latin typeface="Cambria Math" panose="02040503050406030204" pitchFamily="18" charset="0"/>
+                                  </a:rPr>
+                                  <m:t>0.5 </m:t>
+                                </m:r>
+                                <m:sSub>
+                                  <m:sSubPr>
+                                    <m:ctrlPr>
+                                      <a:rPr lang="de-DE" sz="2800" i="1" smtClean="0">
+                                        <a:latin typeface="Cambria Math" panose="02040503050406030204" pitchFamily="18" charset="0"/>
+                                      </a:rPr>
+                                    </m:ctrlPr>
+                                  </m:sSubPr>
+                                  <m:e>
+                                    <m:r>
+                                      <a:rPr lang="de-DE" sz="2800" b="0" i="1" smtClean="0">
+                                        <a:latin typeface="Cambria Math" panose="02040503050406030204" pitchFamily="18" charset="0"/>
+                                      </a:rPr>
+                                      <m:t>𝐾</m:t>
+                                    </m:r>
+                                  </m:e>
+                                  <m:sub>
+                                    <m:r>
+                                      <a:rPr lang="de-DE" sz="2800" b="0" i="1" smtClean="0">
+                                        <a:latin typeface="Cambria Math" panose="02040503050406030204" pitchFamily="18" charset="0"/>
+                                      </a:rPr>
+                                      <m:t>𝑢</m:t>
+                                    </m:r>
+                                  </m:sub>
+                                </m:sSub>
+                              </m:oMath>
+                            </m:oMathPara>
+                          </a14:m>
+                          <a:endParaRPr lang="de-DE" sz="2800" dirty="0"/>
+                        </a:p>
+                      </a:txBody>
+                      <a:tcPr anchor="ctr">
+                        <a:lnL w="12700" cap="flat" cmpd="sng" algn="ctr">
+                          <a:solidFill>
+                            <a:schemeClr val="tx1"/>
+                          </a:solidFill>
+                          <a:prstDash val="solid"/>
+                          <a:round/>
+                          <a:headEnd type="none" w="med" len="med"/>
+                          <a:tailEnd type="none" w="med" len="med"/>
+                        </a:lnL>
+                        <a:lnR w="12700" cap="flat" cmpd="sng" algn="ctr">
+                          <a:solidFill>
+                            <a:schemeClr val="tx1"/>
+                          </a:solidFill>
+                          <a:prstDash val="solid"/>
+                          <a:round/>
+                          <a:headEnd type="none" w="med" len="med"/>
+                          <a:tailEnd type="none" w="med" len="med"/>
+                        </a:lnR>
+                        <a:lnT w="12700" cap="flat" cmpd="sng" algn="ctr">
+                          <a:solidFill>
+                            <a:schemeClr val="tx1"/>
+                          </a:solidFill>
+                          <a:prstDash val="solid"/>
+                          <a:round/>
+                          <a:headEnd type="none" w="med" len="med"/>
+                          <a:tailEnd type="none" w="med" len="med"/>
+                        </a:lnT>
+                        <a:lnB w="12700" cap="flat" cmpd="sng" algn="ctr">
+                          <a:solidFill>
+                            <a:schemeClr val="tx1"/>
+                          </a:solidFill>
+                          <a:prstDash val="solid"/>
+                          <a:round/>
+                          <a:headEnd type="none" w="med" len="med"/>
+                          <a:tailEnd type="none" w="med" len="med"/>
+                        </a:lnB>
+                        <a:noFill/>
+                      </a:tcPr>
+                    </a:tc>
+                    <a:tc>
+                      <a:txBody>
+                        <a:bodyPr/>
+                        <a:lstStyle/>
+                        <a:p>
+                          <a:pPr algn="ctr">
+                            <a:buNone/>
+                          </a:pPr>
+                          <a:r>
+                            <a:rPr lang="de-DE" sz="2800" dirty="0"/>
+                            <a:t>–</a:t>
+                          </a:r>
+                        </a:p>
+                      </a:txBody>
+                      <a:tcPr anchor="ctr">
+                        <a:lnL w="12700" cap="flat" cmpd="sng" algn="ctr">
+                          <a:solidFill>
+                            <a:schemeClr val="tx1"/>
+                          </a:solidFill>
+                          <a:prstDash val="solid"/>
+                          <a:round/>
+                          <a:headEnd type="none" w="med" len="med"/>
+                          <a:tailEnd type="none" w="med" len="med"/>
+                        </a:lnL>
+                        <a:lnR w="12700" cap="flat" cmpd="sng" algn="ctr">
+                          <a:solidFill>
+                            <a:schemeClr val="tx1"/>
+                          </a:solidFill>
+                          <a:prstDash val="solid"/>
+                          <a:round/>
+                          <a:headEnd type="none" w="med" len="med"/>
+                          <a:tailEnd type="none" w="med" len="med"/>
+                        </a:lnR>
+                        <a:lnT w="12700" cap="flat" cmpd="sng" algn="ctr">
+                          <a:solidFill>
+                            <a:schemeClr val="tx1"/>
+                          </a:solidFill>
+                          <a:prstDash val="solid"/>
+                          <a:round/>
+                          <a:headEnd type="none" w="med" len="med"/>
+                          <a:tailEnd type="none" w="med" len="med"/>
+                        </a:lnT>
+                        <a:lnB w="12700" cap="flat" cmpd="sng" algn="ctr">
+                          <a:solidFill>
+                            <a:schemeClr val="tx1"/>
+                          </a:solidFill>
+                          <a:prstDash val="solid"/>
+                          <a:round/>
+                          <a:headEnd type="none" w="med" len="med"/>
+                          <a:tailEnd type="none" w="med" len="med"/>
+                        </a:lnB>
+                        <a:noFill/>
+                      </a:tcPr>
+                    </a:tc>
+                    <a:tc>
+                      <a:txBody>
+                        <a:bodyPr/>
+                        <a:lstStyle/>
+                        <a:p>
+                          <a:pPr algn="ctr">
+                            <a:buNone/>
+                          </a:pPr>
+                          <a:r>
+                            <a:rPr lang="de-DE" sz="2800" dirty="0"/>
+                            <a:t>–</a:t>
+                          </a:r>
+                        </a:p>
+                      </a:txBody>
+                      <a:tcPr anchor="ctr">
+                        <a:lnL w="12700" cap="flat" cmpd="sng" algn="ctr">
+                          <a:solidFill>
+                            <a:schemeClr val="tx1"/>
+                          </a:solidFill>
+                          <a:prstDash val="solid"/>
+                          <a:round/>
+                          <a:headEnd type="none" w="med" len="med"/>
+                          <a:tailEnd type="none" w="med" len="med"/>
+                        </a:lnL>
+                        <a:lnR w="12700" cap="flat" cmpd="sng" algn="ctr">
+                          <a:solidFill>
+                            <a:schemeClr val="tx1"/>
+                          </a:solidFill>
+                          <a:prstDash val="solid"/>
+                          <a:round/>
+                          <a:headEnd type="none" w="med" len="med"/>
+                          <a:tailEnd type="none" w="med" len="med"/>
+                        </a:lnR>
+                        <a:lnT w="12700" cap="flat" cmpd="sng" algn="ctr">
+                          <a:solidFill>
+                            <a:schemeClr val="tx1"/>
+                          </a:solidFill>
+                          <a:prstDash val="solid"/>
+                          <a:round/>
+                          <a:headEnd type="none" w="med" len="med"/>
+                          <a:tailEnd type="none" w="med" len="med"/>
+                        </a:lnT>
+                        <a:lnB w="12700" cap="flat" cmpd="sng" algn="ctr">
+                          <a:solidFill>
+                            <a:schemeClr val="tx1"/>
+                          </a:solidFill>
+                          <a:prstDash val="solid"/>
+                          <a:round/>
+                          <a:headEnd type="none" w="med" len="med"/>
+                          <a:tailEnd type="none" w="med" len="med"/>
+                        </a:lnB>
+                        <a:noFill/>
+                      </a:tcPr>
+                    </a:tc>
+                    <a:extLst>
+                      <a:ext uri="{0D108BD9-81ED-4DB2-BD59-A6C34878D82A}">
+                        <a16:rowId xmlns:a16="http://schemas.microsoft.com/office/drawing/2014/main" val="3126706014"/>
+                      </a:ext>
+                    </a:extLst>
+                  </a:tr>
+                  <a:tr h="0">
+                    <a:tc>
+                      <a:txBody>
+                        <a:bodyPr/>
+                        <a:lstStyle/>
+                        <a:p>
+                          <a:pPr algn="ctr">
+                            <a:buNone/>
+                          </a:pPr>
+                          <a:r>
+                            <a:rPr lang="de-DE" sz="2800" dirty="0"/>
+                            <a:t>PI</a:t>
+                          </a:r>
+                        </a:p>
+                      </a:txBody>
+                      <a:tcPr anchor="ctr">
+                        <a:lnL w="12700" cap="flat" cmpd="sng" algn="ctr">
+                          <a:solidFill>
+                            <a:schemeClr val="tx1"/>
+                          </a:solidFill>
+                          <a:prstDash val="solid"/>
+                          <a:round/>
+                          <a:headEnd type="none" w="med" len="med"/>
+                          <a:tailEnd type="none" w="med" len="med"/>
+                        </a:lnL>
+                        <a:lnR w="12700" cap="flat" cmpd="sng" algn="ctr">
+                          <a:solidFill>
+                            <a:schemeClr val="tx1"/>
+                          </a:solidFill>
+                          <a:prstDash val="solid"/>
+                          <a:round/>
+                          <a:headEnd type="none" w="med" len="med"/>
+                          <a:tailEnd type="none" w="med" len="med"/>
+                        </a:lnR>
+                        <a:lnT w="12700" cap="flat" cmpd="sng" algn="ctr">
+                          <a:solidFill>
+                            <a:schemeClr val="tx1"/>
+                          </a:solidFill>
+                          <a:prstDash val="solid"/>
+                          <a:round/>
+                          <a:headEnd type="none" w="med" len="med"/>
+                          <a:tailEnd type="none" w="med" len="med"/>
+                        </a:lnT>
+                        <a:lnB w="12700" cap="flat" cmpd="sng" algn="ctr">
+                          <a:solidFill>
+                            <a:schemeClr val="tx1"/>
+                          </a:solidFill>
+                          <a:prstDash val="solid"/>
+                          <a:round/>
+                          <a:headEnd type="none" w="med" len="med"/>
+                          <a:tailEnd type="none" w="med" len="med"/>
+                        </a:lnB>
+                        <a:noFill/>
+                      </a:tcPr>
+                    </a:tc>
+                    <a:tc>
+                      <a:txBody>
+                        <a:bodyPr/>
+                        <a:lstStyle/>
+                        <a:p>
+                          <a:pPr>
+                            <a:buNone/>
+                          </a:pPr>
+                          <a14:m>
+                            <m:oMathPara xmlns:m="http://schemas.openxmlformats.org/officeDocument/2006/math">
+                              <m:oMathParaPr>
+                                <m:jc m:val="centerGroup"/>
+                              </m:oMathParaPr>
+                              <m:oMath xmlns:m="http://schemas.openxmlformats.org/officeDocument/2006/math">
+                                <m:r>
+                                  <a:rPr lang="de-DE" sz="2800" b="0" i="0" smtClean="0">
+                                    <a:latin typeface="Cambria Math" panose="02040503050406030204" pitchFamily="18" charset="0"/>
+                                  </a:rPr>
+                                  <m:t>0.45 </m:t>
+                                </m:r>
+                                <m:sSub>
+                                  <m:sSubPr>
+                                    <m:ctrlPr>
+                                      <a:rPr lang="de-DE" sz="2800" i="1" smtClean="0">
+                                        <a:latin typeface="Cambria Math" panose="02040503050406030204" pitchFamily="18" charset="0"/>
+                                      </a:rPr>
+                                    </m:ctrlPr>
+                                  </m:sSubPr>
+                                  <m:e>
+                                    <m:r>
+                                      <a:rPr lang="de-DE" sz="2800" b="0" i="1" smtClean="0">
+                                        <a:latin typeface="Cambria Math" panose="02040503050406030204" pitchFamily="18" charset="0"/>
+                                      </a:rPr>
+                                      <m:t>𝐾</m:t>
+                                    </m:r>
+                                  </m:e>
+                                  <m:sub>
+                                    <m:r>
+                                      <a:rPr lang="de-DE" sz="2800" b="0" i="1" smtClean="0">
+                                        <a:latin typeface="Cambria Math" panose="02040503050406030204" pitchFamily="18" charset="0"/>
+                                      </a:rPr>
+                                      <m:t>𝑢</m:t>
+                                    </m:r>
+                                  </m:sub>
+                                </m:sSub>
+                              </m:oMath>
+                            </m:oMathPara>
+                          </a14:m>
+                          <a:endParaRPr lang="de-DE" sz="2800" dirty="0"/>
+                        </a:p>
+                      </a:txBody>
+                      <a:tcPr anchor="ctr">
+                        <a:lnL w="12700" cap="flat" cmpd="sng" algn="ctr">
+                          <a:solidFill>
+                            <a:schemeClr val="tx1"/>
+                          </a:solidFill>
+                          <a:prstDash val="solid"/>
+                          <a:round/>
+                          <a:headEnd type="none" w="med" len="med"/>
+                          <a:tailEnd type="none" w="med" len="med"/>
+                        </a:lnL>
+                        <a:lnR w="12700" cap="flat" cmpd="sng" algn="ctr">
+                          <a:solidFill>
+                            <a:schemeClr val="tx1"/>
+                          </a:solidFill>
+                          <a:prstDash val="solid"/>
+                          <a:round/>
+                          <a:headEnd type="none" w="med" len="med"/>
+                          <a:tailEnd type="none" w="med" len="med"/>
+                        </a:lnR>
+                        <a:lnT w="12700" cap="flat" cmpd="sng" algn="ctr">
+                          <a:solidFill>
+                            <a:schemeClr val="tx1"/>
+                          </a:solidFill>
+                          <a:prstDash val="solid"/>
+                          <a:round/>
+                          <a:headEnd type="none" w="med" len="med"/>
+                          <a:tailEnd type="none" w="med" len="med"/>
+                        </a:lnT>
+                        <a:lnB w="12700" cap="flat" cmpd="sng" algn="ctr">
+                          <a:solidFill>
+                            <a:schemeClr val="tx1"/>
+                          </a:solidFill>
+                          <a:prstDash val="solid"/>
+                          <a:round/>
+                          <a:headEnd type="none" w="med" len="med"/>
+                          <a:tailEnd type="none" w="med" len="med"/>
+                        </a:lnB>
+                        <a:noFill/>
+                      </a:tcPr>
+                    </a:tc>
+                    <a:tc>
+                      <a:txBody>
+                        <a:bodyPr/>
+                        <a:lstStyle/>
+                        <a:p>
+                          <a:pPr>
+                            <a:buNone/>
+                          </a:pPr>
+                          <a14:m>
+                            <m:oMathPara xmlns:m="http://schemas.openxmlformats.org/officeDocument/2006/math">
+                              <m:oMathParaPr>
+                                <m:jc m:val="centerGroup"/>
+                              </m:oMathParaPr>
+                              <m:oMath xmlns:m="http://schemas.openxmlformats.org/officeDocument/2006/math">
+                                <m:f>
+                                  <m:fPr>
+                                    <m:type m:val="lin"/>
+                                    <m:ctrlPr>
+                                      <a:rPr lang="de-DE" sz="2800" b="0" i="1" smtClean="0">
+                                        <a:latin typeface="Cambria Math" panose="02040503050406030204" pitchFamily="18" charset="0"/>
+                                      </a:rPr>
+                                    </m:ctrlPr>
+                                  </m:fPr>
+                                  <m:num>
+                                    <m:sSub>
+                                      <m:sSubPr>
+                                        <m:ctrlPr>
+                                          <a:rPr lang="de-DE" sz="2800" i="1" smtClean="0">
+                                            <a:latin typeface="Cambria Math" panose="02040503050406030204" pitchFamily="18" charset="0"/>
+                                          </a:rPr>
+                                        </m:ctrlPr>
+                                      </m:sSubPr>
+                                      <m:e>
+                                        <m:r>
+                                          <a:rPr lang="de-DE" sz="2800" b="0" i="1" smtClean="0">
+                                            <a:latin typeface="Cambria Math" panose="02040503050406030204" pitchFamily="18" charset="0"/>
+                                          </a:rPr>
+                                          <m:t>𝑇</m:t>
+                                        </m:r>
+                                      </m:e>
+                                      <m:sub>
+                                        <m:r>
+                                          <a:rPr lang="de-DE" sz="2800" b="0" i="1" smtClean="0">
+                                            <a:latin typeface="Cambria Math" panose="02040503050406030204" pitchFamily="18" charset="0"/>
+                                          </a:rPr>
+                                          <m:t>𝑢</m:t>
+                                        </m:r>
+                                      </m:sub>
+                                    </m:sSub>
+                                  </m:num>
+                                  <m:den>
+                                    <m:r>
+                                      <a:rPr lang="de-DE" sz="2800" b="0" i="1" smtClean="0">
+                                        <a:latin typeface="Cambria Math" panose="02040503050406030204" pitchFamily="18" charset="0"/>
+                                      </a:rPr>
+                                      <m:t>1.2</m:t>
+                                    </m:r>
+                                  </m:den>
+                                </m:f>
+                              </m:oMath>
+                            </m:oMathPara>
+                          </a14:m>
+                          <a:endParaRPr lang="de-DE" sz="2800" dirty="0"/>
+                        </a:p>
+                      </a:txBody>
+                      <a:tcPr anchor="ctr">
+                        <a:lnL w="12700" cap="flat" cmpd="sng" algn="ctr">
+                          <a:solidFill>
+                            <a:schemeClr val="tx1"/>
+                          </a:solidFill>
+                          <a:prstDash val="solid"/>
+                          <a:round/>
+                          <a:headEnd type="none" w="med" len="med"/>
+                          <a:tailEnd type="none" w="med" len="med"/>
+                        </a:lnL>
+                        <a:lnR w="12700" cap="flat" cmpd="sng" algn="ctr">
+                          <a:solidFill>
+                            <a:schemeClr val="tx1"/>
+                          </a:solidFill>
+                          <a:prstDash val="solid"/>
+                          <a:round/>
+                          <a:headEnd type="none" w="med" len="med"/>
+                          <a:tailEnd type="none" w="med" len="med"/>
+                        </a:lnR>
+                        <a:lnT w="12700" cap="flat" cmpd="sng" algn="ctr">
+                          <a:solidFill>
+                            <a:schemeClr val="tx1"/>
+                          </a:solidFill>
+                          <a:prstDash val="solid"/>
+                          <a:round/>
+                          <a:headEnd type="none" w="med" len="med"/>
+                          <a:tailEnd type="none" w="med" len="med"/>
+                        </a:lnT>
+                        <a:lnB w="12700" cap="flat" cmpd="sng" algn="ctr">
+                          <a:solidFill>
+                            <a:schemeClr val="tx1"/>
+                          </a:solidFill>
+                          <a:prstDash val="solid"/>
+                          <a:round/>
+                          <a:headEnd type="none" w="med" len="med"/>
+                          <a:tailEnd type="none" w="med" len="med"/>
+                        </a:lnB>
+                        <a:noFill/>
+                      </a:tcPr>
+                    </a:tc>
+                    <a:tc>
+                      <a:txBody>
+                        <a:bodyPr/>
+                        <a:lstStyle/>
+                        <a:p>
+                          <a:pPr algn="ctr">
+                            <a:buNone/>
+                          </a:pPr>
+                          <a:r>
+                            <a:rPr lang="de-DE" sz="2800" dirty="0"/>
+                            <a:t>–</a:t>
+                          </a:r>
+                        </a:p>
+                      </a:txBody>
+                      <a:tcPr anchor="ctr">
+                        <a:lnL w="12700" cap="flat" cmpd="sng" algn="ctr">
+                          <a:solidFill>
+                            <a:schemeClr val="tx1"/>
+                          </a:solidFill>
+                          <a:prstDash val="solid"/>
+                          <a:round/>
+                          <a:headEnd type="none" w="med" len="med"/>
+                          <a:tailEnd type="none" w="med" len="med"/>
+                        </a:lnL>
+                        <a:lnR w="12700" cap="flat" cmpd="sng" algn="ctr">
+                          <a:solidFill>
+                            <a:schemeClr val="tx1"/>
+                          </a:solidFill>
+                          <a:prstDash val="solid"/>
+                          <a:round/>
+                          <a:headEnd type="none" w="med" len="med"/>
+                          <a:tailEnd type="none" w="med" len="med"/>
+                        </a:lnR>
+                        <a:lnT w="12700" cap="flat" cmpd="sng" algn="ctr">
+                          <a:solidFill>
+                            <a:schemeClr val="tx1"/>
+                          </a:solidFill>
+                          <a:prstDash val="solid"/>
+                          <a:round/>
+                          <a:headEnd type="none" w="med" len="med"/>
+                          <a:tailEnd type="none" w="med" len="med"/>
+                        </a:lnT>
+                        <a:lnB w="12700" cap="flat" cmpd="sng" algn="ctr">
+                          <a:solidFill>
+                            <a:schemeClr val="tx1"/>
+                          </a:solidFill>
+                          <a:prstDash val="solid"/>
+                          <a:round/>
+                          <a:headEnd type="none" w="med" len="med"/>
+                          <a:tailEnd type="none" w="med" len="med"/>
+                        </a:lnB>
+                        <a:noFill/>
+                      </a:tcPr>
+                    </a:tc>
+                    <a:extLst>
+                      <a:ext uri="{0D108BD9-81ED-4DB2-BD59-A6C34878D82A}">
+                        <a16:rowId xmlns:a16="http://schemas.microsoft.com/office/drawing/2014/main" val="3332635837"/>
+                      </a:ext>
+                    </a:extLst>
+                  </a:tr>
+                  <a:tr h="0">
+                    <a:tc>
+                      <a:txBody>
+                        <a:bodyPr/>
+                        <a:lstStyle/>
+                        <a:p>
+                          <a:pPr algn="ctr">
+                            <a:buNone/>
+                          </a:pPr>
+                          <a:r>
+                            <a:rPr lang="de-DE" sz="2800" dirty="0"/>
+                            <a:t>PID</a:t>
+                          </a:r>
+                        </a:p>
+                      </a:txBody>
+                      <a:tcPr anchor="ctr">
+                        <a:lnL w="12700" cap="flat" cmpd="sng" algn="ctr">
+                          <a:solidFill>
+                            <a:schemeClr val="tx1"/>
+                          </a:solidFill>
+                          <a:prstDash val="solid"/>
+                          <a:round/>
+                          <a:headEnd type="none" w="med" len="med"/>
+                          <a:tailEnd type="none" w="med" len="med"/>
+                        </a:lnL>
+                        <a:lnR w="12700" cap="flat" cmpd="sng" algn="ctr">
+                          <a:solidFill>
+                            <a:schemeClr val="tx1"/>
+                          </a:solidFill>
+                          <a:prstDash val="solid"/>
+                          <a:round/>
+                          <a:headEnd type="none" w="med" len="med"/>
+                          <a:tailEnd type="none" w="med" len="med"/>
+                        </a:lnR>
+                        <a:lnT w="12700" cap="flat" cmpd="sng" algn="ctr">
+                          <a:solidFill>
+                            <a:schemeClr val="tx1"/>
+                          </a:solidFill>
+                          <a:prstDash val="solid"/>
+                          <a:round/>
+                          <a:headEnd type="none" w="med" len="med"/>
+                          <a:tailEnd type="none" w="med" len="med"/>
+                        </a:lnT>
+                        <a:lnB w="12700" cap="flat" cmpd="sng" algn="ctr">
+                          <a:solidFill>
+                            <a:schemeClr val="tx1"/>
+                          </a:solidFill>
+                          <a:prstDash val="solid"/>
+                          <a:round/>
+                          <a:headEnd type="none" w="med" len="med"/>
+                          <a:tailEnd type="none" w="med" len="med"/>
+                        </a:lnB>
+                        <a:noFill/>
+                      </a:tcPr>
+                    </a:tc>
+                    <a:tc>
+                      <a:txBody>
+                        <a:bodyPr/>
+                        <a:lstStyle/>
+                        <a:p>
+                          <a:pPr>
+                            <a:buNone/>
+                          </a:pPr>
+                          <a14:m>
+                            <m:oMathPara xmlns:m="http://schemas.openxmlformats.org/officeDocument/2006/math">
+                              <m:oMathParaPr>
+                                <m:jc m:val="centerGroup"/>
+                              </m:oMathParaPr>
+                              <m:oMath xmlns:m="http://schemas.openxmlformats.org/officeDocument/2006/math">
+                                <m:r>
+                                  <a:rPr lang="de-DE" sz="2800" b="0" i="0" smtClean="0">
+                                    <a:latin typeface="Cambria Math" panose="02040503050406030204" pitchFamily="18" charset="0"/>
+                                  </a:rPr>
+                                  <m:t>0.6 </m:t>
+                                </m:r>
+                                <m:sSub>
+                                  <m:sSubPr>
+                                    <m:ctrlPr>
+                                      <a:rPr lang="de-DE" sz="2800" i="1" smtClean="0">
+                                        <a:latin typeface="Cambria Math" panose="02040503050406030204" pitchFamily="18" charset="0"/>
+                                      </a:rPr>
+                                    </m:ctrlPr>
+                                  </m:sSubPr>
+                                  <m:e>
+                                    <m:r>
+                                      <a:rPr lang="de-DE" sz="2800" b="0" i="1" smtClean="0">
+                                        <a:latin typeface="Cambria Math" panose="02040503050406030204" pitchFamily="18" charset="0"/>
+                                      </a:rPr>
+                                      <m:t>𝐾</m:t>
+                                    </m:r>
+                                  </m:e>
+                                  <m:sub>
+                                    <m:r>
+                                      <a:rPr lang="de-DE" sz="2800" b="0" i="1" smtClean="0">
+                                        <a:latin typeface="Cambria Math" panose="02040503050406030204" pitchFamily="18" charset="0"/>
+                                      </a:rPr>
+                                      <m:t>𝑢</m:t>
+                                    </m:r>
+                                  </m:sub>
+                                </m:sSub>
+                              </m:oMath>
+                            </m:oMathPara>
+                          </a14:m>
+                          <a:endParaRPr lang="de-DE" sz="2800" dirty="0"/>
+                        </a:p>
+                      </a:txBody>
+                      <a:tcPr anchor="ctr">
+                        <a:lnL w="12700" cap="flat" cmpd="sng" algn="ctr">
+                          <a:solidFill>
+                            <a:schemeClr val="tx1"/>
+                          </a:solidFill>
+                          <a:prstDash val="solid"/>
+                          <a:round/>
+                          <a:headEnd type="none" w="med" len="med"/>
+                          <a:tailEnd type="none" w="med" len="med"/>
+                        </a:lnL>
+                        <a:lnR w="12700" cap="flat" cmpd="sng" algn="ctr">
+                          <a:solidFill>
+                            <a:schemeClr val="tx1"/>
+                          </a:solidFill>
+                          <a:prstDash val="solid"/>
+                          <a:round/>
+                          <a:headEnd type="none" w="med" len="med"/>
+                          <a:tailEnd type="none" w="med" len="med"/>
+                        </a:lnR>
+                        <a:lnT w="12700" cap="flat" cmpd="sng" algn="ctr">
+                          <a:solidFill>
+                            <a:schemeClr val="tx1"/>
+                          </a:solidFill>
+                          <a:prstDash val="solid"/>
+                          <a:round/>
+                          <a:headEnd type="none" w="med" len="med"/>
+                          <a:tailEnd type="none" w="med" len="med"/>
+                        </a:lnT>
+                        <a:lnB w="12700" cap="flat" cmpd="sng" algn="ctr">
+                          <a:solidFill>
+                            <a:schemeClr val="tx1"/>
+                          </a:solidFill>
+                          <a:prstDash val="solid"/>
+                          <a:round/>
+                          <a:headEnd type="none" w="med" len="med"/>
+                          <a:tailEnd type="none" w="med" len="med"/>
+                        </a:lnB>
+                        <a:noFill/>
+                      </a:tcPr>
+                    </a:tc>
+                    <a:tc>
+                      <a:txBody>
+                        <a:bodyPr/>
+                        <a:lstStyle/>
+                        <a:p>
+                          <a:pPr>
+                            <a:buNone/>
+                          </a:pPr>
+                          <a14:m>
+                            <m:oMathPara xmlns:m="http://schemas.openxmlformats.org/officeDocument/2006/math">
+                              <m:oMathParaPr>
+                                <m:jc m:val="centerGroup"/>
+                              </m:oMathParaPr>
+                              <m:oMath xmlns:m="http://schemas.openxmlformats.org/officeDocument/2006/math">
+                                <m:f>
+                                  <m:fPr>
+                                    <m:type m:val="lin"/>
+                                    <m:ctrlPr>
+                                      <a:rPr lang="de-DE" sz="2800" i="1" smtClean="0">
+                                        <a:latin typeface="Cambria Math" panose="02040503050406030204" pitchFamily="18" charset="0"/>
+                                      </a:rPr>
+                                    </m:ctrlPr>
+                                  </m:fPr>
+                                  <m:num>
+                                    <m:sSub>
+                                      <m:sSubPr>
+                                        <m:ctrlPr>
+                                          <a:rPr lang="de-DE" sz="2800" i="1" smtClean="0">
+                                            <a:latin typeface="Cambria Math" panose="02040503050406030204" pitchFamily="18" charset="0"/>
+                                          </a:rPr>
+                                        </m:ctrlPr>
+                                      </m:sSubPr>
+                                      <m:e>
+                                        <m:r>
+                                          <a:rPr lang="de-DE" sz="2800" b="0" i="1" smtClean="0">
+                                            <a:latin typeface="Cambria Math" panose="02040503050406030204" pitchFamily="18" charset="0"/>
+                                          </a:rPr>
+                                          <m:t>𝑇</m:t>
+                                        </m:r>
+                                      </m:e>
+                                      <m:sub>
+                                        <m:r>
+                                          <a:rPr lang="de-DE" sz="2800" b="0" i="1" smtClean="0">
+                                            <a:latin typeface="Cambria Math" panose="02040503050406030204" pitchFamily="18" charset="0"/>
+                                          </a:rPr>
+                                          <m:t>𝑢</m:t>
+                                        </m:r>
+                                      </m:sub>
+                                    </m:sSub>
+                                  </m:num>
+                                  <m:den>
+                                    <m:r>
+                                      <a:rPr lang="de-DE" sz="2800" b="0" i="1" smtClean="0">
+                                        <a:latin typeface="Cambria Math" panose="02040503050406030204" pitchFamily="18" charset="0"/>
+                                      </a:rPr>
+                                      <m:t>2</m:t>
+                                    </m:r>
+                                  </m:den>
+                                </m:f>
+                              </m:oMath>
+                            </m:oMathPara>
+                          </a14:m>
+                          <a:endParaRPr lang="de-DE" sz="2800" dirty="0"/>
+                        </a:p>
+                      </a:txBody>
+                      <a:tcPr anchor="ctr">
+                        <a:lnL w="12700" cap="flat" cmpd="sng" algn="ctr">
+                          <a:solidFill>
+                            <a:schemeClr val="tx1"/>
+                          </a:solidFill>
+                          <a:prstDash val="solid"/>
+                          <a:round/>
+                          <a:headEnd type="none" w="med" len="med"/>
+                          <a:tailEnd type="none" w="med" len="med"/>
+                        </a:lnL>
+                        <a:lnR w="12700" cap="flat" cmpd="sng" algn="ctr">
+                          <a:solidFill>
+                            <a:schemeClr val="tx1"/>
+                          </a:solidFill>
+                          <a:prstDash val="solid"/>
+                          <a:round/>
+                          <a:headEnd type="none" w="med" len="med"/>
+                          <a:tailEnd type="none" w="med" len="med"/>
+                        </a:lnR>
+                        <a:lnT w="12700" cap="flat" cmpd="sng" algn="ctr">
+                          <a:solidFill>
+                            <a:schemeClr val="tx1"/>
+                          </a:solidFill>
+                          <a:prstDash val="solid"/>
+                          <a:round/>
+                          <a:headEnd type="none" w="med" len="med"/>
+                          <a:tailEnd type="none" w="med" len="med"/>
+                        </a:lnT>
+                        <a:lnB w="12700" cap="flat" cmpd="sng" algn="ctr">
+                          <a:solidFill>
+                            <a:schemeClr val="tx1"/>
+                          </a:solidFill>
+                          <a:prstDash val="solid"/>
+                          <a:round/>
+                          <a:headEnd type="none" w="med" len="med"/>
+                          <a:tailEnd type="none" w="med" len="med"/>
+                        </a:lnB>
+                        <a:noFill/>
+                      </a:tcPr>
+                    </a:tc>
+                    <a:tc>
+                      <a:txBody>
+                        <a:bodyPr/>
+                        <a:lstStyle/>
+                        <a:p>
+                          <a:pPr>
+                            <a:buNone/>
+                          </a:pPr>
+                          <a14:m>
+                            <m:oMathPara xmlns:m="http://schemas.openxmlformats.org/officeDocument/2006/math">
+                              <m:oMathParaPr>
+                                <m:jc m:val="centerGroup"/>
+                              </m:oMathParaPr>
+                              <m:oMath xmlns:m="http://schemas.openxmlformats.org/officeDocument/2006/math">
+                                <m:f>
+                                  <m:fPr>
+                                    <m:type m:val="lin"/>
+                                    <m:ctrlPr>
+                                      <a:rPr lang="de-DE" sz="2800" b="0" i="1" smtClean="0">
+                                        <a:latin typeface="Cambria Math" panose="02040503050406030204" pitchFamily="18" charset="0"/>
+                                      </a:rPr>
+                                    </m:ctrlPr>
+                                  </m:fPr>
+                                  <m:num>
+                                    <m:sSub>
+                                      <m:sSubPr>
+                                        <m:ctrlPr>
+                                          <a:rPr lang="de-DE" sz="2800" i="1" smtClean="0">
+                                            <a:latin typeface="Cambria Math" panose="02040503050406030204" pitchFamily="18" charset="0"/>
+                                          </a:rPr>
+                                        </m:ctrlPr>
+                                      </m:sSubPr>
+                                      <m:e>
+                                        <m:r>
+                                          <a:rPr lang="de-DE" sz="2800" b="0" i="1" smtClean="0">
+                                            <a:latin typeface="Cambria Math" panose="02040503050406030204" pitchFamily="18" charset="0"/>
+                                          </a:rPr>
+                                          <m:t>𝑇</m:t>
+                                        </m:r>
+                                      </m:e>
+                                      <m:sub>
+                                        <m:r>
+                                          <a:rPr lang="de-DE" sz="2800" b="0" i="1" smtClean="0">
+                                            <a:latin typeface="Cambria Math" panose="02040503050406030204" pitchFamily="18" charset="0"/>
+                                          </a:rPr>
+                                          <m:t>𝑢</m:t>
+                                        </m:r>
+                                      </m:sub>
+                                    </m:sSub>
+                                  </m:num>
+                                  <m:den>
+                                    <m:r>
+                                      <a:rPr lang="de-DE" sz="2800" b="0" i="1" smtClean="0">
+                                        <a:latin typeface="Cambria Math" panose="02040503050406030204" pitchFamily="18" charset="0"/>
+                                      </a:rPr>
+                                      <m:t>8</m:t>
+                                    </m:r>
+                                  </m:den>
+                                </m:f>
+                              </m:oMath>
+                            </m:oMathPara>
+                          </a14:m>
+                          <a:endParaRPr lang="de-DE" sz="2800" dirty="0"/>
+                        </a:p>
+                      </a:txBody>
+                      <a:tcPr anchor="ctr">
+                        <a:lnL w="12700" cap="flat" cmpd="sng" algn="ctr">
+                          <a:solidFill>
+                            <a:schemeClr val="tx1"/>
+                          </a:solidFill>
+                          <a:prstDash val="solid"/>
+                          <a:round/>
+                          <a:headEnd type="none" w="med" len="med"/>
+                          <a:tailEnd type="none" w="med" len="med"/>
+                        </a:lnL>
+                        <a:lnR w="12700" cap="flat" cmpd="sng" algn="ctr">
+                          <a:solidFill>
+                            <a:schemeClr val="tx1"/>
+                          </a:solidFill>
+                          <a:prstDash val="solid"/>
+                          <a:round/>
+                          <a:headEnd type="none" w="med" len="med"/>
+                          <a:tailEnd type="none" w="med" len="med"/>
+                        </a:lnR>
+                        <a:lnT w="12700" cap="flat" cmpd="sng" algn="ctr">
+                          <a:solidFill>
+                            <a:schemeClr val="tx1"/>
+                          </a:solidFill>
+                          <a:prstDash val="solid"/>
+                          <a:round/>
+                          <a:headEnd type="none" w="med" len="med"/>
+                          <a:tailEnd type="none" w="med" len="med"/>
+                        </a:lnT>
+                        <a:lnB w="12700" cap="flat" cmpd="sng" algn="ctr">
+                          <a:solidFill>
+                            <a:schemeClr val="tx1"/>
+                          </a:solidFill>
+                          <a:prstDash val="solid"/>
+                          <a:round/>
+                          <a:headEnd type="none" w="med" len="med"/>
+                          <a:tailEnd type="none" w="med" len="med"/>
+                        </a:lnB>
+                        <a:noFill/>
+                      </a:tcPr>
+                    </a:tc>
+                    <a:extLst>
+                      <a:ext uri="{0D108BD9-81ED-4DB2-BD59-A6C34878D82A}">
+                        <a16:rowId xmlns:a16="http://schemas.microsoft.com/office/drawing/2014/main" val="2032865249"/>
+                      </a:ext>
+                    </a:extLst>
+                  </a:tr>
+                </a:tbl>
+              </a:graphicData>
+            </a:graphic>
+          </p:graphicFrame>
+        </mc:Choice>
+        <mc:Fallback xmlns="">
+          <p:graphicFrame>
+            <p:nvGraphicFramePr>
+              <p:cNvPr id="5" name="Tabelle 4">
+                <a:extLst>
+                  <a:ext uri="{FF2B5EF4-FFF2-40B4-BE49-F238E27FC236}">
+                    <a16:creationId xmlns:a16="http://schemas.microsoft.com/office/drawing/2014/main" id="{CAA86835-02BD-1191-0E8E-FFAF0EBF24C5}"/>
+                  </a:ext>
+                </a:extLst>
+              </p:cNvPr>
+              <p:cNvGraphicFramePr>
+                <a:graphicFrameLocks noGrp="1"/>
+              </p:cNvGraphicFramePr>
+              <p:nvPr>
+                <p:extLst>
+                  <p:ext uri="{D42A27DB-BD31-4B8C-83A1-F6EECF244321}">
+                    <p14:modId xmlns:p14="http://schemas.microsoft.com/office/powerpoint/2010/main" val="2899256763"/>
+                  </p:ext>
+                </p:extLst>
+              </p:nvPr>
+            </p:nvGraphicFramePr>
+            <p:xfrm>
+              <a:off x="838200" y="1917985"/>
+              <a:ext cx="10515600" cy="2105533"/>
+            </p:xfrm>
+            <a:graphic>
+              <a:graphicData uri="http://schemas.openxmlformats.org/drawingml/2006/table">
+                <a:tbl>
+                  <a:tblPr/>
+                  <a:tblGrid>
+                    <a:gridCol w="2628900">
+                      <a:extLst>
+                        <a:ext uri="{9D8B030D-6E8A-4147-A177-3AD203B41FA5}">
+                          <a16:colId xmlns:a16="http://schemas.microsoft.com/office/drawing/2014/main" val="2068899635"/>
+                        </a:ext>
+                      </a:extLst>
+                    </a:gridCol>
+                    <a:gridCol w="2628900">
+                      <a:extLst>
+                        <a:ext uri="{9D8B030D-6E8A-4147-A177-3AD203B41FA5}">
+                          <a16:colId xmlns:a16="http://schemas.microsoft.com/office/drawing/2014/main" val="1475338881"/>
+                        </a:ext>
+                      </a:extLst>
+                    </a:gridCol>
+                    <a:gridCol w="2628900">
+                      <a:extLst>
+                        <a:ext uri="{9D8B030D-6E8A-4147-A177-3AD203B41FA5}">
+                          <a16:colId xmlns:a16="http://schemas.microsoft.com/office/drawing/2014/main" val="3621335237"/>
+                        </a:ext>
+                      </a:extLst>
+                    </a:gridCol>
+                    <a:gridCol w="2628900">
+                      <a:extLst>
+                        <a:ext uri="{9D8B030D-6E8A-4147-A177-3AD203B41FA5}">
+                          <a16:colId xmlns:a16="http://schemas.microsoft.com/office/drawing/2014/main" val="3493297568"/>
+                        </a:ext>
+                      </a:extLst>
+                    </a:gridCol>
+                  </a:tblGrid>
+                  <a:tr h="551053">
+                    <a:tc>
+                      <a:txBody>
+                        <a:bodyPr/>
+                        <a:lstStyle/>
+                        <a:p>
+                          <a:pPr algn="ctr">
+                            <a:buNone/>
+                          </a:pPr>
+                          <a:r>
+                            <a:rPr lang="de-DE" sz="2800" b="0" dirty="0"/>
+                            <a:t>Controller Type</a:t>
+                          </a:r>
+                        </a:p>
+                      </a:txBody>
+                      <a:tcPr anchor="ctr">
+                        <a:lnL w="12700" cap="flat" cmpd="sng" algn="ctr">
+                          <a:solidFill>
+                            <a:schemeClr val="tx1"/>
+                          </a:solidFill>
+                          <a:prstDash val="solid"/>
+                          <a:round/>
+                          <a:headEnd type="none" w="med" len="med"/>
+                          <a:tailEnd type="none" w="med" len="med"/>
+                        </a:lnL>
+                        <a:lnR w="12700" cap="flat" cmpd="sng" algn="ctr">
+                          <a:solidFill>
+                            <a:schemeClr val="tx1"/>
+                          </a:solidFill>
+                          <a:prstDash val="solid"/>
+                          <a:round/>
+                          <a:headEnd type="none" w="med" len="med"/>
+                          <a:tailEnd type="none" w="med" len="med"/>
+                        </a:lnR>
+                        <a:lnT w="12700" cap="flat" cmpd="sng" algn="ctr">
+                          <a:solidFill>
+                            <a:schemeClr val="tx1"/>
+                          </a:solidFill>
+                          <a:prstDash val="solid"/>
+                          <a:round/>
+                          <a:headEnd type="none" w="med" len="med"/>
+                          <a:tailEnd type="none" w="med" len="med"/>
+                        </a:lnT>
+                        <a:lnB w="12700" cap="flat" cmpd="sng" algn="ctr">
+                          <a:solidFill>
+                            <a:schemeClr val="tx1"/>
+                          </a:solidFill>
+                          <a:prstDash val="solid"/>
+                          <a:round/>
+                          <a:headEnd type="none" w="med" len="med"/>
+                          <a:tailEnd type="none" w="med" len="med"/>
+                        </a:lnB>
+                        <a:noFill/>
+                      </a:tcPr>
+                    </a:tc>
+                    <a:tc>
+                      <a:txBody>
+                        <a:bodyPr/>
+                        <a:lstStyle/>
+                        <a:p>
+                          <a:endParaRPr lang="de-DE"/>
+                        </a:p>
+                      </a:txBody>
+                      <a:tcPr anchor="ctr">
+                        <a:lnL w="12700" cap="flat" cmpd="sng" algn="ctr">
+                          <a:solidFill>
+                            <a:schemeClr val="tx1"/>
+                          </a:solidFill>
+                          <a:prstDash val="solid"/>
+                          <a:round/>
+                          <a:headEnd type="none" w="med" len="med"/>
+                          <a:tailEnd type="none" w="med" len="med"/>
+                        </a:lnL>
+                        <a:lnR w="12700" cap="flat" cmpd="sng" algn="ctr">
+                          <a:solidFill>
+                            <a:schemeClr val="tx1"/>
+                          </a:solidFill>
+                          <a:prstDash val="solid"/>
+                          <a:round/>
+                          <a:headEnd type="none" w="med" len="med"/>
+                          <a:tailEnd type="none" w="med" len="med"/>
+                        </a:lnR>
+                        <a:lnT w="12700" cap="flat" cmpd="sng" algn="ctr">
+                          <a:solidFill>
+                            <a:schemeClr val="tx1"/>
+                          </a:solidFill>
+                          <a:prstDash val="solid"/>
+                          <a:round/>
+                          <a:headEnd type="none" w="med" len="med"/>
+                          <a:tailEnd type="none" w="med" len="med"/>
+                        </a:lnT>
+                        <a:lnB w="12700" cap="flat" cmpd="sng" algn="ctr">
+                          <a:solidFill>
+                            <a:schemeClr val="tx1"/>
+                          </a:solidFill>
+                          <a:prstDash val="solid"/>
+                          <a:round/>
+                          <a:headEnd type="none" w="med" len="med"/>
+                          <a:tailEnd type="none" w="med" len="med"/>
+                        </a:lnB>
+                        <a:blipFill>
+                          <a:blip r:embed="rId2"/>
+                          <a:stretch>
+                            <a:fillRect l="-100483" t="-9302" r="-200966" b="-474419"/>
+                          </a:stretch>
+                        </a:blipFill>
+                      </a:tcPr>
+                    </a:tc>
+                    <a:tc>
+                      <a:txBody>
+                        <a:bodyPr/>
+                        <a:lstStyle/>
+                        <a:p>
+                          <a:endParaRPr lang="de-DE"/>
+                        </a:p>
+                      </a:txBody>
+                      <a:tcPr anchor="ctr">
+                        <a:lnL w="12700" cap="flat" cmpd="sng" algn="ctr">
+                          <a:solidFill>
+                            <a:schemeClr val="tx1"/>
+                          </a:solidFill>
+                          <a:prstDash val="solid"/>
+                          <a:round/>
+                          <a:headEnd type="none" w="med" len="med"/>
+                          <a:tailEnd type="none" w="med" len="med"/>
+                        </a:lnL>
+                        <a:lnR w="12700" cap="flat" cmpd="sng" algn="ctr">
+                          <a:solidFill>
+                            <a:schemeClr val="tx1"/>
+                          </a:solidFill>
+                          <a:prstDash val="solid"/>
+                          <a:round/>
+                          <a:headEnd type="none" w="med" len="med"/>
+                          <a:tailEnd type="none" w="med" len="med"/>
+                        </a:lnR>
+                        <a:lnT w="12700" cap="flat" cmpd="sng" algn="ctr">
+                          <a:solidFill>
+                            <a:schemeClr val="tx1"/>
+                          </a:solidFill>
+                          <a:prstDash val="solid"/>
+                          <a:round/>
+                          <a:headEnd type="none" w="med" len="med"/>
+                          <a:tailEnd type="none" w="med" len="med"/>
+                        </a:lnT>
+                        <a:lnB w="12700" cap="flat" cmpd="sng" algn="ctr">
+                          <a:solidFill>
+                            <a:schemeClr val="tx1"/>
+                          </a:solidFill>
+                          <a:prstDash val="solid"/>
+                          <a:round/>
+                          <a:headEnd type="none" w="med" len="med"/>
+                          <a:tailEnd type="none" w="med" len="med"/>
+                        </a:lnB>
+                        <a:blipFill>
+                          <a:blip r:embed="rId2"/>
+                          <a:stretch>
+                            <a:fillRect l="-200483" t="-9302" r="-100966" b="-474419"/>
+                          </a:stretch>
+                        </a:blipFill>
+                      </a:tcPr>
+                    </a:tc>
+                    <a:tc>
+                      <a:txBody>
+                        <a:bodyPr/>
+                        <a:lstStyle/>
+                        <a:p>
+                          <a:endParaRPr lang="de-DE"/>
+                        </a:p>
+                      </a:txBody>
+                      <a:tcPr anchor="ctr">
+                        <a:lnL w="12700" cap="flat" cmpd="sng" algn="ctr">
+                          <a:solidFill>
+                            <a:schemeClr val="tx1"/>
+                          </a:solidFill>
+                          <a:prstDash val="solid"/>
+                          <a:round/>
+                          <a:headEnd type="none" w="med" len="med"/>
+                          <a:tailEnd type="none" w="med" len="med"/>
+                        </a:lnL>
+                        <a:lnR w="12700" cap="flat" cmpd="sng" algn="ctr">
+                          <a:solidFill>
+                            <a:schemeClr val="tx1"/>
+                          </a:solidFill>
+                          <a:prstDash val="solid"/>
+                          <a:round/>
+                          <a:headEnd type="none" w="med" len="med"/>
+                          <a:tailEnd type="none" w="med" len="med"/>
+                        </a:lnR>
+                        <a:lnT w="12700" cap="flat" cmpd="sng" algn="ctr">
+                          <a:solidFill>
+                            <a:schemeClr val="tx1"/>
+                          </a:solidFill>
+                          <a:prstDash val="solid"/>
+                          <a:round/>
+                          <a:headEnd type="none" w="med" len="med"/>
+                          <a:tailEnd type="none" w="med" len="med"/>
+                        </a:lnT>
+                        <a:lnB w="12700" cap="flat" cmpd="sng" algn="ctr">
+                          <a:solidFill>
+                            <a:schemeClr val="tx1"/>
+                          </a:solidFill>
+                          <a:prstDash val="solid"/>
+                          <a:round/>
+                          <a:headEnd type="none" w="med" len="med"/>
+                          <a:tailEnd type="none" w="med" len="med"/>
+                        </a:lnB>
+                        <a:blipFill>
+                          <a:blip r:embed="rId2"/>
+                          <a:stretch>
+                            <a:fillRect l="-300483" t="-9302" r="-966" b="-474419"/>
+                          </a:stretch>
+                        </a:blipFill>
+                      </a:tcPr>
+                    </a:tc>
+                    <a:extLst>
+                      <a:ext uri="{0D108BD9-81ED-4DB2-BD59-A6C34878D82A}">
+                        <a16:rowId xmlns:a16="http://schemas.microsoft.com/office/drawing/2014/main" val="3658282415"/>
+                      </a:ext>
+                    </a:extLst>
+                  </a:tr>
+                  <a:tr h="518160">
+                    <a:tc>
+                      <a:txBody>
+                        <a:bodyPr/>
+                        <a:lstStyle/>
+                        <a:p>
+                          <a:pPr algn="ctr">
+                            <a:buNone/>
+                          </a:pPr>
+                          <a:r>
+                            <a:rPr lang="de-DE" sz="2800" dirty="0"/>
+                            <a:t>P</a:t>
+                          </a:r>
+                        </a:p>
+                      </a:txBody>
+                      <a:tcPr anchor="ctr">
+                        <a:lnL w="12700" cap="flat" cmpd="sng" algn="ctr">
+                          <a:solidFill>
+                            <a:schemeClr val="tx1"/>
+                          </a:solidFill>
+                          <a:prstDash val="solid"/>
+                          <a:round/>
+                          <a:headEnd type="none" w="med" len="med"/>
+                          <a:tailEnd type="none" w="med" len="med"/>
+                        </a:lnL>
+                        <a:lnR w="12700" cap="flat" cmpd="sng" algn="ctr">
+                          <a:solidFill>
+                            <a:schemeClr val="tx1"/>
+                          </a:solidFill>
+                          <a:prstDash val="solid"/>
+                          <a:round/>
+                          <a:headEnd type="none" w="med" len="med"/>
+                          <a:tailEnd type="none" w="med" len="med"/>
+                        </a:lnR>
+                        <a:lnT w="12700" cap="flat" cmpd="sng" algn="ctr">
+                          <a:solidFill>
+                            <a:schemeClr val="tx1"/>
+                          </a:solidFill>
+                          <a:prstDash val="solid"/>
+                          <a:round/>
+                          <a:headEnd type="none" w="med" len="med"/>
+                          <a:tailEnd type="none" w="med" len="med"/>
+                        </a:lnT>
+                        <a:lnB w="12700" cap="flat" cmpd="sng" algn="ctr">
+                          <a:solidFill>
+                            <a:schemeClr val="tx1"/>
+                          </a:solidFill>
+                          <a:prstDash val="solid"/>
+                          <a:round/>
+                          <a:headEnd type="none" w="med" len="med"/>
+                          <a:tailEnd type="none" w="med" len="med"/>
+                        </a:lnB>
+                        <a:noFill/>
+                      </a:tcPr>
+                    </a:tc>
+                    <a:tc>
+                      <a:txBody>
+                        <a:bodyPr/>
+                        <a:lstStyle/>
+                        <a:p>
+                          <a:endParaRPr lang="de-DE"/>
+                        </a:p>
+                      </a:txBody>
+                      <a:tcPr anchor="ctr">
+                        <a:lnL w="12700" cap="flat" cmpd="sng" algn="ctr">
+                          <a:solidFill>
+                            <a:schemeClr val="tx1"/>
+                          </a:solidFill>
+                          <a:prstDash val="solid"/>
+                          <a:round/>
+                          <a:headEnd type="none" w="med" len="med"/>
+                          <a:tailEnd type="none" w="med" len="med"/>
+                        </a:lnL>
+                        <a:lnR w="12700" cap="flat" cmpd="sng" algn="ctr">
+                          <a:solidFill>
+                            <a:schemeClr val="tx1"/>
+                          </a:solidFill>
+                          <a:prstDash val="solid"/>
+                          <a:round/>
+                          <a:headEnd type="none" w="med" len="med"/>
+                          <a:tailEnd type="none" w="med" len="med"/>
+                        </a:lnR>
+                        <a:lnT w="12700" cap="flat" cmpd="sng" algn="ctr">
+                          <a:solidFill>
+                            <a:schemeClr val="tx1"/>
+                          </a:solidFill>
+                          <a:prstDash val="solid"/>
+                          <a:round/>
+                          <a:headEnd type="none" w="med" len="med"/>
+                          <a:tailEnd type="none" w="med" len="med"/>
+                        </a:lnT>
+                        <a:lnB w="12700" cap="flat" cmpd="sng" algn="ctr">
+                          <a:solidFill>
+                            <a:schemeClr val="tx1"/>
+                          </a:solidFill>
+                          <a:prstDash val="solid"/>
+                          <a:round/>
+                          <a:headEnd type="none" w="med" len="med"/>
+                          <a:tailEnd type="none" w="med" len="med"/>
+                        </a:lnB>
+                        <a:blipFill>
+                          <a:blip r:embed="rId2"/>
+                          <a:stretch>
+                            <a:fillRect l="-100483" t="-114634" r="-200966" b="-397561"/>
+                          </a:stretch>
+                        </a:blipFill>
+                      </a:tcPr>
+                    </a:tc>
+                    <a:tc>
+                      <a:txBody>
+                        <a:bodyPr/>
+                        <a:lstStyle/>
+                        <a:p>
+                          <a:pPr algn="ctr">
+                            <a:buNone/>
+                          </a:pPr>
+                          <a:r>
+                            <a:rPr lang="de-DE" sz="2800" dirty="0"/>
+                            <a:t>–</a:t>
+                          </a:r>
+                        </a:p>
+                      </a:txBody>
+                      <a:tcPr anchor="ctr">
+                        <a:lnL w="12700" cap="flat" cmpd="sng" algn="ctr">
+                          <a:solidFill>
+                            <a:schemeClr val="tx1"/>
+                          </a:solidFill>
+                          <a:prstDash val="solid"/>
+                          <a:round/>
+                          <a:headEnd type="none" w="med" len="med"/>
+                          <a:tailEnd type="none" w="med" len="med"/>
+                        </a:lnL>
+                        <a:lnR w="12700" cap="flat" cmpd="sng" algn="ctr">
+                          <a:solidFill>
+                            <a:schemeClr val="tx1"/>
+                          </a:solidFill>
+                          <a:prstDash val="solid"/>
+                          <a:round/>
+                          <a:headEnd type="none" w="med" len="med"/>
+                          <a:tailEnd type="none" w="med" len="med"/>
+                        </a:lnR>
+                        <a:lnT w="12700" cap="flat" cmpd="sng" algn="ctr">
+                          <a:solidFill>
+                            <a:schemeClr val="tx1"/>
+                          </a:solidFill>
+                          <a:prstDash val="solid"/>
+                          <a:round/>
+                          <a:headEnd type="none" w="med" len="med"/>
+                          <a:tailEnd type="none" w="med" len="med"/>
+                        </a:lnT>
+                        <a:lnB w="12700" cap="flat" cmpd="sng" algn="ctr">
+                          <a:solidFill>
+                            <a:schemeClr val="tx1"/>
+                          </a:solidFill>
+                          <a:prstDash val="solid"/>
+                          <a:round/>
+                          <a:headEnd type="none" w="med" len="med"/>
+                          <a:tailEnd type="none" w="med" len="med"/>
+                        </a:lnB>
+                        <a:noFill/>
+                      </a:tcPr>
+                    </a:tc>
+                    <a:tc>
+                      <a:txBody>
+                        <a:bodyPr/>
+                        <a:lstStyle/>
+                        <a:p>
+                          <a:pPr algn="ctr">
+                            <a:buNone/>
+                          </a:pPr>
+                          <a:r>
+                            <a:rPr lang="de-DE" sz="2800" dirty="0"/>
+                            <a:t>–</a:t>
+                          </a:r>
+                        </a:p>
+                      </a:txBody>
+                      <a:tcPr anchor="ctr">
+                        <a:lnL w="12700" cap="flat" cmpd="sng" algn="ctr">
+                          <a:solidFill>
+                            <a:schemeClr val="tx1"/>
+                          </a:solidFill>
+                          <a:prstDash val="solid"/>
+                          <a:round/>
+                          <a:headEnd type="none" w="med" len="med"/>
+                          <a:tailEnd type="none" w="med" len="med"/>
+                        </a:lnL>
+                        <a:lnR w="12700" cap="flat" cmpd="sng" algn="ctr">
+                          <a:solidFill>
+                            <a:schemeClr val="tx1"/>
+                          </a:solidFill>
+                          <a:prstDash val="solid"/>
+                          <a:round/>
+                          <a:headEnd type="none" w="med" len="med"/>
+                          <a:tailEnd type="none" w="med" len="med"/>
+                        </a:lnR>
+                        <a:lnT w="12700" cap="flat" cmpd="sng" algn="ctr">
+                          <a:solidFill>
+                            <a:schemeClr val="tx1"/>
+                          </a:solidFill>
+                          <a:prstDash val="solid"/>
+                          <a:round/>
+                          <a:headEnd type="none" w="med" len="med"/>
+                          <a:tailEnd type="none" w="med" len="med"/>
+                        </a:lnT>
+                        <a:lnB w="12700" cap="flat" cmpd="sng" algn="ctr">
+                          <a:solidFill>
+                            <a:schemeClr val="tx1"/>
+                          </a:solidFill>
+                          <a:prstDash val="solid"/>
+                          <a:round/>
+                          <a:headEnd type="none" w="med" len="med"/>
+                          <a:tailEnd type="none" w="med" len="med"/>
+                        </a:lnB>
+                        <a:noFill/>
+                      </a:tcPr>
+                    </a:tc>
+                    <a:extLst>
+                      <a:ext uri="{0D108BD9-81ED-4DB2-BD59-A6C34878D82A}">
+                        <a16:rowId xmlns:a16="http://schemas.microsoft.com/office/drawing/2014/main" val="3126706014"/>
+                      </a:ext>
+                    </a:extLst>
+                  </a:tr>
+                  <a:tr h="518160">
+                    <a:tc>
+                      <a:txBody>
+                        <a:bodyPr/>
+                        <a:lstStyle/>
+                        <a:p>
+                          <a:pPr algn="ctr">
+                            <a:buNone/>
+                          </a:pPr>
+                          <a:r>
+                            <a:rPr lang="de-DE" sz="2800" dirty="0"/>
+                            <a:t>PI</a:t>
+                          </a:r>
+                        </a:p>
+                      </a:txBody>
+                      <a:tcPr anchor="ctr">
+                        <a:lnL w="12700" cap="flat" cmpd="sng" algn="ctr">
+                          <a:solidFill>
+                            <a:schemeClr val="tx1"/>
+                          </a:solidFill>
+                          <a:prstDash val="solid"/>
+                          <a:round/>
+                          <a:headEnd type="none" w="med" len="med"/>
+                          <a:tailEnd type="none" w="med" len="med"/>
+                        </a:lnL>
+                        <a:lnR w="12700" cap="flat" cmpd="sng" algn="ctr">
+                          <a:solidFill>
+                            <a:schemeClr val="tx1"/>
+                          </a:solidFill>
+                          <a:prstDash val="solid"/>
+                          <a:round/>
+                          <a:headEnd type="none" w="med" len="med"/>
+                          <a:tailEnd type="none" w="med" len="med"/>
+                        </a:lnR>
+                        <a:lnT w="12700" cap="flat" cmpd="sng" algn="ctr">
+                          <a:solidFill>
+                            <a:schemeClr val="tx1"/>
+                          </a:solidFill>
+                          <a:prstDash val="solid"/>
+                          <a:round/>
+                          <a:headEnd type="none" w="med" len="med"/>
+                          <a:tailEnd type="none" w="med" len="med"/>
+                        </a:lnT>
+                        <a:lnB w="12700" cap="flat" cmpd="sng" algn="ctr">
+                          <a:solidFill>
+                            <a:schemeClr val="tx1"/>
+                          </a:solidFill>
+                          <a:prstDash val="solid"/>
+                          <a:round/>
+                          <a:headEnd type="none" w="med" len="med"/>
+                          <a:tailEnd type="none" w="med" len="med"/>
+                        </a:lnB>
+                        <a:noFill/>
+                      </a:tcPr>
+                    </a:tc>
+                    <a:tc>
+                      <a:txBody>
+                        <a:bodyPr/>
+                        <a:lstStyle/>
+                        <a:p>
+                          <a:endParaRPr lang="de-DE"/>
+                        </a:p>
+                      </a:txBody>
+                      <a:tcPr anchor="ctr">
+                        <a:lnL w="12700" cap="flat" cmpd="sng" algn="ctr">
+                          <a:solidFill>
+                            <a:schemeClr val="tx1"/>
+                          </a:solidFill>
+                          <a:prstDash val="solid"/>
+                          <a:round/>
+                          <a:headEnd type="none" w="med" len="med"/>
+                          <a:tailEnd type="none" w="med" len="med"/>
+                        </a:lnL>
+                        <a:lnR w="12700" cap="flat" cmpd="sng" algn="ctr">
+                          <a:solidFill>
+                            <a:schemeClr val="tx1"/>
+                          </a:solidFill>
+                          <a:prstDash val="solid"/>
+                          <a:round/>
+                          <a:headEnd type="none" w="med" len="med"/>
+                          <a:tailEnd type="none" w="med" len="med"/>
+                        </a:lnR>
+                        <a:lnT w="12700" cap="flat" cmpd="sng" algn="ctr">
+                          <a:solidFill>
+                            <a:schemeClr val="tx1"/>
+                          </a:solidFill>
+                          <a:prstDash val="solid"/>
+                          <a:round/>
+                          <a:headEnd type="none" w="med" len="med"/>
+                          <a:tailEnd type="none" w="med" len="med"/>
+                        </a:lnT>
+                        <a:lnB w="12700" cap="flat" cmpd="sng" algn="ctr">
+                          <a:solidFill>
+                            <a:schemeClr val="tx1"/>
+                          </a:solidFill>
+                          <a:prstDash val="solid"/>
+                          <a:round/>
+                          <a:headEnd type="none" w="med" len="med"/>
+                          <a:tailEnd type="none" w="med" len="med"/>
+                        </a:lnB>
+                        <a:blipFill>
+                          <a:blip r:embed="rId2"/>
+                          <a:stretch>
+                            <a:fillRect l="-100483" t="-214634" r="-200966" b="-297561"/>
+                          </a:stretch>
+                        </a:blipFill>
+                      </a:tcPr>
+                    </a:tc>
+                    <a:tc>
+                      <a:txBody>
+                        <a:bodyPr/>
+                        <a:lstStyle/>
+                        <a:p>
+                          <a:endParaRPr lang="de-DE"/>
+                        </a:p>
+                      </a:txBody>
+                      <a:tcPr anchor="ctr">
+                        <a:lnL w="12700" cap="flat" cmpd="sng" algn="ctr">
+                          <a:solidFill>
+                            <a:schemeClr val="tx1"/>
+                          </a:solidFill>
+                          <a:prstDash val="solid"/>
+                          <a:round/>
+                          <a:headEnd type="none" w="med" len="med"/>
+                          <a:tailEnd type="none" w="med" len="med"/>
+                        </a:lnL>
+                        <a:lnR w="12700" cap="flat" cmpd="sng" algn="ctr">
+                          <a:solidFill>
+                            <a:schemeClr val="tx1"/>
+                          </a:solidFill>
+                          <a:prstDash val="solid"/>
+                          <a:round/>
+                          <a:headEnd type="none" w="med" len="med"/>
+                          <a:tailEnd type="none" w="med" len="med"/>
+                        </a:lnR>
+                        <a:lnT w="12700" cap="flat" cmpd="sng" algn="ctr">
+                          <a:solidFill>
+                            <a:schemeClr val="tx1"/>
+                          </a:solidFill>
+                          <a:prstDash val="solid"/>
+                          <a:round/>
+                          <a:headEnd type="none" w="med" len="med"/>
+                          <a:tailEnd type="none" w="med" len="med"/>
+                        </a:lnT>
+                        <a:lnB w="12700" cap="flat" cmpd="sng" algn="ctr">
+                          <a:solidFill>
+                            <a:schemeClr val="tx1"/>
+                          </a:solidFill>
+                          <a:prstDash val="solid"/>
+                          <a:round/>
+                          <a:headEnd type="none" w="med" len="med"/>
+                          <a:tailEnd type="none" w="med" len="med"/>
+                        </a:lnB>
+                        <a:blipFill>
+                          <a:blip r:embed="rId2"/>
+                          <a:stretch>
+                            <a:fillRect l="-200483" t="-214634" r="-100966" b="-297561"/>
+                          </a:stretch>
+                        </a:blipFill>
+                      </a:tcPr>
+                    </a:tc>
+                    <a:tc>
+                      <a:txBody>
+                        <a:bodyPr/>
+                        <a:lstStyle/>
+                        <a:p>
+                          <a:pPr algn="ctr">
+                            <a:buNone/>
+                          </a:pPr>
+                          <a:r>
+                            <a:rPr lang="de-DE" sz="2800" dirty="0"/>
+                            <a:t>–</a:t>
+                          </a:r>
+                        </a:p>
+                      </a:txBody>
+                      <a:tcPr anchor="ctr">
+                        <a:lnL w="12700" cap="flat" cmpd="sng" algn="ctr">
+                          <a:solidFill>
+                            <a:schemeClr val="tx1"/>
+                          </a:solidFill>
+                          <a:prstDash val="solid"/>
+                          <a:round/>
+                          <a:headEnd type="none" w="med" len="med"/>
+                          <a:tailEnd type="none" w="med" len="med"/>
+                        </a:lnL>
+                        <a:lnR w="12700" cap="flat" cmpd="sng" algn="ctr">
+                          <a:solidFill>
+                            <a:schemeClr val="tx1"/>
+                          </a:solidFill>
+                          <a:prstDash val="solid"/>
+                          <a:round/>
+                          <a:headEnd type="none" w="med" len="med"/>
+                          <a:tailEnd type="none" w="med" len="med"/>
+                        </a:lnR>
+                        <a:lnT w="12700" cap="flat" cmpd="sng" algn="ctr">
+                          <a:solidFill>
+                            <a:schemeClr val="tx1"/>
+                          </a:solidFill>
+                          <a:prstDash val="solid"/>
+                          <a:round/>
+                          <a:headEnd type="none" w="med" len="med"/>
+                          <a:tailEnd type="none" w="med" len="med"/>
+                        </a:lnT>
+                        <a:lnB w="12700" cap="flat" cmpd="sng" algn="ctr">
+                          <a:solidFill>
+                            <a:schemeClr val="tx1"/>
+                          </a:solidFill>
+                          <a:prstDash val="solid"/>
+                          <a:round/>
+                          <a:headEnd type="none" w="med" len="med"/>
+                          <a:tailEnd type="none" w="med" len="med"/>
+                        </a:lnB>
+                        <a:noFill/>
+                      </a:tcPr>
+                    </a:tc>
+                    <a:extLst>
+                      <a:ext uri="{0D108BD9-81ED-4DB2-BD59-A6C34878D82A}">
+                        <a16:rowId xmlns:a16="http://schemas.microsoft.com/office/drawing/2014/main" val="3332635837"/>
+                      </a:ext>
+                    </a:extLst>
+                  </a:tr>
+                  <a:tr h="518160">
+                    <a:tc>
+                      <a:txBody>
+                        <a:bodyPr/>
+                        <a:lstStyle/>
+                        <a:p>
+                          <a:pPr algn="ctr">
+                            <a:buNone/>
+                          </a:pPr>
+                          <a:r>
+                            <a:rPr lang="de-DE" sz="2800" dirty="0"/>
+                            <a:t>PID</a:t>
+                          </a:r>
+                        </a:p>
+                      </a:txBody>
+                      <a:tcPr anchor="ctr">
+                        <a:lnL w="12700" cap="flat" cmpd="sng" algn="ctr">
+                          <a:solidFill>
+                            <a:schemeClr val="tx1"/>
+                          </a:solidFill>
+                          <a:prstDash val="solid"/>
+                          <a:round/>
+                          <a:headEnd type="none" w="med" len="med"/>
+                          <a:tailEnd type="none" w="med" len="med"/>
+                        </a:lnL>
+                        <a:lnR w="12700" cap="flat" cmpd="sng" algn="ctr">
+                          <a:solidFill>
+                            <a:schemeClr val="tx1"/>
+                          </a:solidFill>
+                          <a:prstDash val="solid"/>
+                          <a:round/>
+                          <a:headEnd type="none" w="med" len="med"/>
+                          <a:tailEnd type="none" w="med" len="med"/>
+                        </a:lnR>
+                        <a:lnT w="12700" cap="flat" cmpd="sng" algn="ctr">
+                          <a:solidFill>
+                            <a:schemeClr val="tx1"/>
+                          </a:solidFill>
+                          <a:prstDash val="solid"/>
+                          <a:round/>
+                          <a:headEnd type="none" w="med" len="med"/>
+                          <a:tailEnd type="none" w="med" len="med"/>
+                        </a:lnT>
+                        <a:lnB w="12700" cap="flat" cmpd="sng" algn="ctr">
+                          <a:solidFill>
+                            <a:schemeClr val="tx1"/>
+                          </a:solidFill>
+                          <a:prstDash val="solid"/>
+                          <a:round/>
+                          <a:headEnd type="none" w="med" len="med"/>
+                          <a:tailEnd type="none" w="med" len="med"/>
+                        </a:lnB>
+                        <a:noFill/>
+                      </a:tcPr>
+                    </a:tc>
+                    <a:tc>
+                      <a:txBody>
+                        <a:bodyPr/>
+                        <a:lstStyle/>
+                        <a:p>
+                          <a:endParaRPr lang="de-DE"/>
+                        </a:p>
+                      </a:txBody>
+                      <a:tcPr anchor="ctr">
+                        <a:lnL w="12700" cap="flat" cmpd="sng" algn="ctr">
+                          <a:solidFill>
+                            <a:schemeClr val="tx1"/>
+                          </a:solidFill>
+                          <a:prstDash val="solid"/>
+                          <a:round/>
+                          <a:headEnd type="none" w="med" len="med"/>
+                          <a:tailEnd type="none" w="med" len="med"/>
+                        </a:lnL>
+                        <a:lnR w="12700" cap="flat" cmpd="sng" algn="ctr">
+                          <a:solidFill>
+                            <a:schemeClr val="tx1"/>
+                          </a:solidFill>
+                          <a:prstDash val="solid"/>
+                          <a:round/>
+                          <a:headEnd type="none" w="med" len="med"/>
+                          <a:tailEnd type="none" w="med" len="med"/>
+                        </a:lnR>
+                        <a:lnT w="12700" cap="flat" cmpd="sng" algn="ctr">
+                          <a:solidFill>
+                            <a:schemeClr val="tx1"/>
+                          </a:solidFill>
+                          <a:prstDash val="solid"/>
+                          <a:round/>
+                          <a:headEnd type="none" w="med" len="med"/>
+                          <a:tailEnd type="none" w="med" len="med"/>
+                        </a:lnT>
+                        <a:lnB w="12700" cap="flat" cmpd="sng" algn="ctr">
+                          <a:solidFill>
+                            <a:schemeClr val="tx1"/>
+                          </a:solidFill>
+                          <a:prstDash val="solid"/>
+                          <a:round/>
+                          <a:headEnd type="none" w="med" len="med"/>
+                          <a:tailEnd type="none" w="med" len="med"/>
+                        </a:lnB>
+                        <a:blipFill>
+                          <a:blip r:embed="rId2"/>
+                          <a:stretch>
+                            <a:fillRect l="-100483" t="-314634" r="-200966" b="-197561"/>
+                          </a:stretch>
+                        </a:blipFill>
+                      </a:tcPr>
+                    </a:tc>
+                    <a:tc>
+                      <a:txBody>
+                        <a:bodyPr/>
+                        <a:lstStyle/>
+                        <a:p>
+                          <a:endParaRPr lang="de-DE"/>
+                        </a:p>
+                      </a:txBody>
+                      <a:tcPr anchor="ctr">
+                        <a:lnL w="12700" cap="flat" cmpd="sng" algn="ctr">
+                          <a:solidFill>
+                            <a:schemeClr val="tx1"/>
+                          </a:solidFill>
+                          <a:prstDash val="solid"/>
+                          <a:round/>
+                          <a:headEnd type="none" w="med" len="med"/>
+                          <a:tailEnd type="none" w="med" len="med"/>
+                        </a:lnL>
+                        <a:lnR w="12700" cap="flat" cmpd="sng" algn="ctr">
+                          <a:solidFill>
+                            <a:schemeClr val="tx1"/>
+                          </a:solidFill>
+                          <a:prstDash val="solid"/>
+                          <a:round/>
+                          <a:headEnd type="none" w="med" len="med"/>
+                          <a:tailEnd type="none" w="med" len="med"/>
+                        </a:lnR>
+                        <a:lnT w="12700" cap="flat" cmpd="sng" algn="ctr">
+                          <a:solidFill>
+                            <a:schemeClr val="tx1"/>
+                          </a:solidFill>
+                          <a:prstDash val="solid"/>
+                          <a:round/>
+                          <a:headEnd type="none" w="med" len="med"/>
+                          <a:tailEnd type="none" w="med" len="med"/>
+                        </a:lnT>
+                        <a:lnB w="12700" cap="flat" cmpd="sng" algn="ctr">
+                          <a:solidFill>
+                            <a:schemeClr val="tx1"/>
+                          </a:solidFill>
+                          <a:prstDash val="solid"/>
+                          <a:round/>
+                          <a:headEnd type="none" w="med" len="med"/>
+                          <a:tailEnd type="none" w="med" len="med"/>
+                        </a:lnB>
+                        <a:blipFill>
+                          <a:blip r:embed="rId2"/>
+                          <a:stretch>
+                            <a:fillRect l="-200483" t="-314634" r="-100966" b="-197561"/>
+                          </a:stretch>
+                        </a:blipFill>
+                      </a:tcPr>
+                    </a:tc>
+                    <a:tc>
+                      <a:txBody>
+                        <a:bodyPr/>
+                        <a:lstStyle/>
+                        <a:p>
+                          <a:endParaRPr lang="de-DE"/>
+                        </a:p>
+                      </a:txBody>
+                      <a:tcPr anchor="ctr">
+                        <a:lnL w="12700" cap="flat" cmpd="sng" algn="ctr">
+                          <a:solidFill>
+                            <a:schemeClr val="tx1"/>
+                          </a:solidFill>
+                          <a:prstDash val="solid"/>
+                          <a:round/>
+                          <a:headEnd type="none" w="med" len="med"/>
+                          <a:tailEnd type="none" w="med" len="med"/>
+                        </a:lnL>
+                        <a:lnR w="12700" cap="flat" cmpd="sng" algn="ctr">
+                          <a:solidFill>
+                            <a:schemeClr val="tx1"/>
+                          </a:solidFill>
+                          <a:prstDash val="solid"/>
+                          <a:round/>
+                          <a:headEnd type="none" w="med" len="med"/>
+                          <a:tailEnd type="none" w="med" len="med"/>
+                        </a:lnR>
+                        <a:lnT w="12700" cap="flat" cmpd="sng" algn="ctr">
+                          <a:solidFill>
+                            <a:schemeClr val="tx1"/>
+                          </a:solidFill>
+                          <a:prstDash val="solid"/>
+                          <a:round/>
+                          <a:headEnd type="none" w="med" len="med"/>
+                          <a:tailEnd type="none" w="med" len="med"/>
+                        </a:lnT>
+                        <a:lnB w="12700" cap="flat" cmpd="sng" algn="ctr">
+                          <a:solidFill>
+                            <a:schemeClr val="tx1"/>
+                          </a:solidFill>
+                          <a:prstDash val="solid"/>
+                          <a:round/>
+                          <a:headEnd type="none" w="med" len="med"/>
+                          <a:tailEnd type="none" w="med" len="med"/>
+                        </a:lnB>
+                        <a:blipFill>
+                          <a:blip r:embed="rId2"/>
+                          <a:stretch>
+                            <a:fillRect l="-300483" t="-314634" r="-966" b="-197561"/>
+                          </a:stretch>
+                        </a:blipFill>
+                      </a:tcPr>
+                    </a:tc>
+                    <a:extLst>
+                      <a:ext uri="{0D108BD9-81ED-4DB2-BD59-A6C34878D82A}">
+                        <a16:rowId xmlns:a16="http://schemas.microsoft.com/office/drawing/2014/main" val="2032865249"/>
+                      </a:ext>
+                    </a:extLst>
+                  </a:tr>
+                </a:tbl>
+              </a:graphicData>
+            </a:graphic>
+          </p:graphicFrame>
+        </mc:Fallback>
+      </mc:AlternateContent>
+      <mc:AlternateContent xmlns:mc="http://schemas.openxmlformats.org/markup-compatibility/2006">
+        <mc:Choice xmlns:a14="http://schemas.microsoft.com/office/drawing/2010/main" Requires="a14">
+          <p:sp>
+            <p:nvSpPr>
+              <p:cNvPr id="10" name="Textfeld 9">
+                <a:extLst>
+                  <a:ext uri="{FF2B5EF4-FFF2-40B4-BE49-F238E27FC236}">
+                    <a16:creationId xmlns:a16="http://schemas.microsoft.com/office/drawing/2014/main" id="{FCCEFD7E-8DB6-E03E-4C0E-0644D0A4DACB}"/>
+                  </a:ext>
+                </a:extLst>
+              </p:cNvPr>
+              <p:cNvSpPr txBox="1"/>
+              <p:nvPr/>
+            </p:nvSpPr>
+            <p:spPr>
+              <a:xfrm>
+                <a:off x="9705785" y="365124"/>
+                <a:ext cx="1648015" cy="795731"/>
+              </a:xfrm>
+              <a:prstGeom prst="rect">
+                <a:avLst/>
+              </a:prstGeom>
+              <a:noFill/>
+            </p:spPr>
+            <p:txBody>
+              <a:bodyPr wrap="none" lIns="0" tIns="0" rIns="0" bIns="0" rtlCol="0">
+                <a:spAutoFit/>
+              </a:bodyPr>
+              <a:lstStyle/>
+              <a:p>
+                <a14:m>
+                  <m:oMathPara xmlns:m="http://schemas.openxmlformats.org/officeDocument/2006/math">
+                    <m:oMathParaPr>
+                      <m:jc m:val="centerGroup"/>
+                    </m:oMathParaPr>
+                    <m:oMath xmlns:m="http://schemas.openxmlformats.org/officeDocument/2006/math">
+                      <m:sSub>
+                        <m:sSubPr>
+                          <m:ctrlPr>
+                            <a:rPr lang="de-DE" sz="2400" i="1" smtClean="0">
+                              <a:latin typeface="Cambria Math" panose="02040503050406030204" pitchFamily="18" charset="0"/>
+                            </a:rPr>
+                          </m:ctrlPr>
+                        </m:sSubPr>
+                        <m:e>
+                          <m:r>
+                            <a:rPr lang="de-DE" sz="2400" b="0" i="1" smtClean="0">
+                              <a:latin typeface="Cambria Math" panose="02040503050406030204" pitchFamily="18" charset="0"/>
+                            </a:rPr>
+                            <m:t>𝐾</m:t>
+                          </m:r>
+                        </m:e>
+                        <m:sub>
+                          <m:r>
+                            <a:rPr lang="de-DE" sz="2400" b="0" i="1" smtClean="0">
+                              <a:latin typeface="Cambria Math" panose="02040503050406030204" pitchFamily="18" charset="0"/>
+                            </a:rPr>
+                            <m:t>𝑖</m:t>
+                          </m:r>
+                        </m:sub>
+                      </m:sSub>
+                      <m:r>
+                        <a:rPr lang="de-DE" sz="2400" b="0" i="1" smtClean="0">
+                          <a:latin typeface="Cambria Math" panose="02040503050406030204" pitchFamily="18" charset="0"/>
+                        </a:rPr>
+                        <m:t>=</m:t>
+                      </m:r>
+                      <m:f>
+                        <m:fPr>
+                          <m:type m:val="lin"/>
+                          <m:ctrlPr>
+                            <a:rPr lang="de-DE" sz="2400" b="0" i="1" smtClean="0">
+                              <a:latin typeface="Cambria Math" panose="02040503050406030204" pitchFamily="18" charset="0"/>
+                            </a:rPr>
+                          </m:ctrlPr>
+                        </m:fPr>
+                        <m:num>
+                          <m:sSub>
+                            <m:sSubPr>
+                              <m:ctrlPr>
+                                <a:rPr lang="de-DE" sz="2400" b="0" i="1" smtClean="0">
+                                  <a:latin typeface="Cambria Math" panose="02040503050406030204" pitchFamily="18" charset="0"/>
+                                </a:rPr>
+                              </m:ctrlPr>
+                            </m:sSubPr>
+                            <m:e>
+                              <m:r>
+                                <a:rPr lang="de-DE" sz="2400" b="0" i="1" smtClean="0">
+                                  <a:latin typeface="Cambria Math" panose="02040503050406030204" pitchFamily="18" charset="0"/>
+                                </a:rPr>
+                                <m:t>𝐾</m:t>
+                              </m:r>
+                            </m:e>
+                            <m:sub>
+                              <m:r>
+                                <a:rPr lang="de-DE" sz="2400" b="0" i="1" smtClean="0">
+                                  <a:latin typeface="Cambria Math" panose="02040503050406030204" pitchFamily="18" charset="0"/>
+                                </a:rPr>
+                                <m:t>𝑝</m:t>
+                              </m:r>
+                            </m:sub>
+                          </m:sSub>
+                        </m:num>
+                        <m:den>
+                          <m:sSub>
+                            <m:sSubPr>
+                              <m:ctrlPr>
+                                <a:rPr lang="de-DE" sz="2400" b="0" i="1" smtClean="0">
+                                  <a:latin typeface="Cambria Math" panose="02040503050406030204" pitchFamily="18" charset="0"/>
+                                </a:rPr>
+                              </m:ctrlPr>
+                            </m:sSubPr>
+                            <m:e>
+                              <m:r>
+                                <a:rPr lang="de-DE" sz="2400" b="0" i="1" smtClean="0">
+                                  <a:latin typeface="Cambria Math" panose="02040503050406030204" pitchFamily="18" charset="0"/>
+                                </a:rPr>
+                                <m:t>𝑇</m:t>
+                              </m:r>
+                            </m:e>
+                            <m:sub>
+                              <m:r>
+                                <a:rPr lang="de-DE" sz="2400" b="0" i="1" smtClean="0">
+                                  <a:latin typeface="Cambria Math" panose="02040503050406030204" pitchFamily="18" charset="0"/>
+                                </a:rPr>
+                                <m:t>𝑖</m:t>
+                              </m:r>
+                            </m:sub>
+                          </m:sSub>
+                        </m:den>
+                      </m:f>
+                    </m:oMath>
+                  </m:oMathPara>
+                </a14:m>
+                <a:endParaRPr lang="de-DE" sz="2400" dirty="0"/>
+              </a:p>
+              <a:p>
+                <a14:m>
+                  <m:oMathPara xmlns:m="http://schemas.openxmlformats.org/officeDocument/2006/math">
+                    <m:oMathParaPr>
+                      <m:jc m:val="centerGroup"/>
+                    </m:oMathParaPr>
+                    <m:oMath xmlns:m="http://schemas.openxmlformats.org/officeDocument/2006/math">
+                      <m:sSub>
+                        <m:sSubPr>
+                          <m:ctrlPr>
+                            <a:rPr lang="de-DE" sz="2400" i="1">
+                              <a:latin typeface="Cambria Math" panose="02040503050406030204" pitchFamily="18" charset="0"/>
+                            </a:rPr>
+                          </m:ctrlPr>
+                        </m:sSubPr>
+                        <m:e>
+                          <m:r>
+                            <a:rPr lang="de-DE" sz="2400" i="1">
+                              <a:latin typeface="Cambria Math" panose="02040503050406030204" pitchFamily="18" charset="0"/>
+                            </a:rPr>
+                            <m:t>𝐾</m:t>
+                          </m:r>
+                        </m:e>
+                        <m:sub>
+                          <m:r>
+                            <a:rPr lang="de-DE" sz="2400" b="0" i="1" smtClean="0">
+                              <a:latin typeface="Cambria Math" panose="02040503050406030204" pitchFamily="18" charset="0"/>
+                            </a:rPr>
+                            <m:t>𝑑</m:t>
+                          </m:r>
+                        </m:sub>
+                      </m:sSub>
+                      <m:r>
+                        <a:rPr lang="de-DE" sz="2400" i="1">
+                          <a:latin typeface="Cambria Math" panose="02040503050406030204" pitchFamily="18" charset="0"/>
+                        </a:rPr>
+                        <m:t>=</m:t>
+                      </m:r>
+                      <m:f>
+                        <m:fPr>
+                          <m:type m:val="lin"/>
+                          <m:ctrlPr>
+                            <a:rPr lang="de-DE" sz="2400" i="1">
+                              <a:latin typeface="Cambria Math" panose="02040503050406030204" pitchFamily="18" charset="0"/>
+                            </a:rPr>
+                          </m:ctrlPr>
+                        </m:fPr>
+                        <m:num>
+                          <m:sSub>
+                            <m:sSubPr>
+                              <m:ctrlPr>
+                                <a:rPr lang="de-DE" sz="2400" i="1">
+                                  <a:latin typeface="Cambria Math" panose="02040503050406030204" pitchFamily="18" charset="0"/>
+                                </a:rPr>
+                              </m:ctrlPr>
+                            </m:sSubPr>
+                            <m:e>
+                              <m:r>
+                                <a:rPr lang="de-DE" sz="2400" i="1">
+                                  <a:latin typeface="Cambria Math" panose="02040503050406030204" pitchFamily="18" charset="0"/>
+                                </a:rPr>
+                                <m:t>𝐾</m:t>
+                              </m:r>
+                            </m:e>
+                            <m:sub>
+                              <m:r>
+                                <a:rPr lang="de-DE" sz="2400" i="1">
+                                  <a:latin typeface="Cambria Math" panose="02040503050406030204" pitchFamily="18" charset="0"/>
+                                </a:rPr>
+                                <m:t>𝑝</m:t>
+                              </m:r>
+                            </m:sub>
+                          </m:sSub>
+                        </m:num>
+                        <m:den>
+                          <m:sSub>
+                            <m:sSubPr>
+                              <m:ctrlPr>
+                                <a:rPr lang="de-DE" sz="2400" i="1">
+                                  <a:latin typeface="Cambria Math" panose="02040503050406030204" pitchFamily="18" charset="0"/>
+                                </a:rPr>
+                              </m:ctrlPr>
+                            </m:sSubPr>
+                            <m:e>
+                              <m:r>
+                                <a:rPr lang="de-DE" sz="2400" i="1">
+                                  <a:latin typeface="Cambria Math" panose="02040503050406030204" pitchFamily="18" charset="0"/>
+                                </a:rPr>
+                                <m:t>𝑇</m:t>
+                              </m:r>
+                            </m:e>
+                            <m:sub>
+                              <m:r>
+                                <a:rPr lang="de-DE" sz="2400" b="0" i="1" smtClean="0">
+                                  <a:latin typeface="Cambria Math" panose="02040503050406030204" pitchFamily="18" charset="0"/>
+                                </a:rPr>
+                                <m:t>𝑑</m:t>
+                              </m:r>
+                            </m:sub>
+                          </m:sSub>
+                        </m:den>
+                      </m:f>
+                    </m:oMath>
+                  </m:oMathPara>
+                </a14:m>
+                <a:endParaRPr lang="de-DE" sz="2400" dirty="0"/>
+              </a:p>
+            </p:txBody>
+          </p:sp>
+        </mc:Choice>
+        <mc:Fallback>
+          <p:sp>
+            <p:nvSpPr>
+              <p:cNvPr id="10" name="Textfeld 9">
+                <a:extLst>
+                  <a:ext uri="{FF2B5EF4-FFF2-40B4-BE49-F238E27FC236}">
+                    <a16:creationId xmlns:a16="http://schemas.microsoft.com/office/drawing/2014/main" id="{FCCEFD7E-8DB6-E03E-4C0E-0644D0A4DACB}"/>
+                  </a:ext>
+                </a:extLst>
+              </p:cNvPr>
+              <p:cNvSpPr txBox="1">
+                <a:spLocks noRot="1" noChangeAspect="1" noMove="1" noResize="1" noEditPoints="1" noAdjustHandles="1" noChangeArrowheads="1" noChangeShapeType="1" noTextEdit="1"/>
+              </p:cNvSpPr>
+              <p:nvPr/>
+            </p:nvSpPr>
+            <p:spPr>
+              <a:xfrm>
+                <a:off x="9705785" y="365124"/>
+                <a:ext cx="1648015" cy="795731"/>
+              </a:xfrm>
+              <a:prstGeom prst="rect">
+                <a:avLst/>
+              </a:prstGeom>
+              <a:blipFill>
+                <a:blip r:embed="rId3"/>
+                <a:stretch>
+                  <a:fillRect l="-4580" t="-78125" r="-2290" b="-114063"/>
+                </a:stretch>
+              </a:blipFill>
+            </p:spPr>
+            <p:txBody>
+              <a:bodyPr/>
+              <a:lstStyle/>
+              <a:p>
+                <a:r>
+                  <a:rPr lang="de-DE">
+                    <a:noFill/>
+                  </a:rPr>
+                  <a:t> </a:t>
+                </a:r>
+              </a:p>
+            </p:txBody>
+          </p:sp>
+        </mc:Fallback>
+      </mc:AlternateContent>
+    </p:spTree>
+    <p:extLst>
+      <p:ext uri="{BB962C8B-B14F-4D97-AF65-F5344CB8AC3E}">
+        <p14:creationId xmlns:p14="http://schemas.microsoft.com/office/powerpoint/2010/main" val="62549041"/>
+      </p:ext>
+    </p:extLst>
+  </p:cSld>
+  <p:clrMapOvr>
+    <a:masterClrMapping/>
+  </p:clrMapOvr>
+</p:sld>
+</file>
+
+<file path=ppt/slides/slide16.xml><?xml version="1.0" encoding="utf-8"?>
+<p:sld xmlns:a="http://schemas.openxmlformats.org/drawingml/2006/main" xmlns:r="http://schemas.openxmlformats.org/officeDocument/2006/relationships" xmlns:p="http://schemas.openxmlformats.org/presentationml/2006/main">
+  <p:cSld>
+    <p:spTree>
+      <p:nvGrpSpPr>
+        <p:cNvPr id="1" name=""/>
+        <p:cNvGrpSpPr/>
+        <p:nvPr/>
+      </p:nvGrpSpPr>
+      <p:grpSpPr>
+        <a:xfrm>
+          <a:off x="0" y="0"/>
+          <a:ext cx="0" cy="0"/>
+          <a:chOff x="0" y="0"/>
+          <a:chExt cx="0" cy="0"/>
+        </a:xfrm>
+      </p:grpSpPr>
+      <p:sp>
+        <p:nvSpPr>
+          <p:cNvPr id="2" name="Titel 1">
+            <a:extLst>
+              <a:ext uri="{FF2B5EF4-FFF2-40B4-BE49-F238E27FC236}">
+                <a16:creationId xmlns:a16="http://schemas.microsoft.com/office/drawing/2014/main" id="{DE638CB1-1CE5-2C1D-4952-D96FCAE8716F}"/>
+              </a:ext>
+            </a:extLst>
+          </p:cNvPr>
+          <p:cNvSpPr>
+            <a:spLocks noGrp="1"/>
+          </p:cNvSpPr>
+          <p:nvPr>
+            <p:ph type="title"/>
+          </p:nvPr>
+        </p:nvSpPr>
+        <p:spPr/>
+        <p:txBody>
+          <a:bodyPr>
+            <a:normAutofit/>
+          </a:bodyPr>
+          <a:lstStyle/>
+          <a:p>
+            <a:r>
+              <a:rPr lang="de-DE" dirty="0"/>
+              <a:t>T-</a:t>
+            </a:r>
+            <a:r>
+              <a:rPr lang="de-DE" dirty="0" err="1"/>
+              <a:t>Sum</a:t>
+            </a:r>
+            <a:r>
+              <a:rPr lang="de-DE" dirty="0"/>
+              <a:t> (Time-</a:t>
+            </a:r>
+            <a:r>
+              <a:rPr lang="de-DE" dirty="0" err="1"/>
+              <a:t>Sum</a:t>
+            </a:r>
+            <a:r>
+              <a:rPr lang="de-DE" dirty="0"/>
+              <a:t>) Method</a:t>
+            </a:r>
+          </a:p>
+        </p:txBody>
+      </p:sp>
+      <mc:AlternateContent xmlns:mc="http://schemas.openxmlformats.org/markup-compatibility/2006">
+        <mc:Choice xmlns:a14="http://schemas.microsoft.com/office/drawing/2010/main" Requires="a14">
+          <p:sp>
+            <p:nvSpPr>
+              <p:cNvPr id="3" name="Inhaltsplatzhalter 2">
+                <a:extLst>
+                  <a:ext uri="{FF2B5EF4-FFF2-40B4-BE49-F238E27FC236}">
+                    <a16:creationId xmlns:a16="http://schemas.microsoft.com/office/drawing/2014/main" id="{A1D58EA8-D03B-3C93-1C0F-F98C41CE636F}"/>
+                  </a:ext>
+                </a:extLst>
+              </p:cNvPr>
+              <p:cNvSpPr>
+                <a:spLocks noGrp="1"/>
+              </p:cNvSpPr>
+              <p:nvPr>
+                <p:ph idx="1"/>
+              </p:nvPr>
+            </p:nvSpPr>
+            <p:spPr/>
+            <p:txBody>
+              <a:bodyPr>
+                <a:normAutofit/>
+              </a:bodyPr>
+              <a:lstStyle/>
+              <a:p>
+                <a:r>
+                  <a:rPr lang="de-DE" sz="2400" dirty="0" err="1"/>
+                  <a:t>Evaluate</a:t>
+                </a:r>
+                <a:r>
+                  <a:rPr lang="de-DE" sz="2400" dirty="0"/>
+                  <a:t> </a:t>
+                </a:r>
+                <a:r>
+                  <a:rPr lang="de-DE" sz="2400" dirty="0" err="1"/>
+                  <a:t>control</a:t>
+                </a:r>
+                <a:r>
+                  <a:rPr lang="de-DE" sz="2400" dirty="0"/>
+                  <a:t> </a:t>
+                </a:r>
+                <a:r>
+                  <a:rPr lang="de-DE" sz="2400" dirty="0" err="1"/>
+                  <a:t>system</a:t>
+                </a:r>
+                <a:r>
+                  <a:rPr lang="de-DE" sz="2400" dirty="0"/>
+                  <a:t> </a:t>
+                </a:r>
+                <a:r>
+                  <a:rPr lang="de-DE" sz="2400" dirty="0" err="1"/>
+                  <a:t>performance</a:t>
+                </a:r>
+                <a:r>
+                  <a:rPr lang="de-DE" sz="2400" dirty="0"/>
+                  <a:t> </a:t>
+                </a:r>
+                <a:r>
+                  <a:rPr lang="de-DE" sz="2400" dirty="0" err="1"/>
+                  <a:t>based</a:t>
+                </a:r>
+                <a:r>
+                  <a:rPr lang="de-DE" sz="2400" dirty="0"/>
+                  <a:t> on </a:t>
+                </a:r>
+                <a:r>
+                  <a:rPr lang="de-DE" sz="2400" dirty="0" err="1"/>
+                  <a:t>accumulated</a:t>
+                </a:r>
+                <a:r>
+                  <a:rPr lang="de-DE" sz="2400" dirty="0"/>
+                  <a:t> </a:t>
+                </a:r>
+                <a:r>
+                  <a:rPr lang="de-DE" sz="2400" dirty="0" err="1"/>
+                  <a:t>error</a:t>
+                </a:r>
+                <a:r>
+                  <a:rPr lang="de-DE" sz="2400" dirty="0"/>
+                  <a:t> </a:t>
+                </a:r>
+                <a:r>
+                  <a:rPr lang="de-DE" sz="2400" dirty="0" err="1"/>
+                  <a:t>over</a:t>
+                </a:r>
+                <a:r>
+                  <a:rPr lang="de-DE" sz="2400" dirty="0"/>
+                  <a:t> time</a:t>
+                </a:r>
+              </a:p>
+              <a:p>
+                <a:r>
+                  <a:rPr lang="de-DE" sz="2400" dirty="0" err="1"/>
+                  <a:t>Often</a:t>
+                </a:r>
+                <a:r>
+                  <a:rPr lang="de-DE" sz="2400" dirty="0"/>
+                  <a:t> </a:t>
+                </a:r>
+                <a:r>
+                  <a:rPr lang="de-DE" sz="2400" dirty="0" err="1"/>
+                  <a:t>used</a:t>
+                </a:r>
+                <a:r>
+                  <a:rPr lang="de-DE" sz="2400" dirty="0"/>
+                  <a:t> </a:t>
+                </a:r>
+                <a:r>
+                  <a:rPr lang="de-DE" sz="2400" dirty="0" err="1"/>
+                  <a:t>to</a:t>
+                </a:r>
+                <a:r>
+                  <a:rPr lang="de-DE" sz="2400" dirty="0"/>
+                  <a:t> </a:t>
+                </a:r>
+                <a:r>
+                  <a:rPr lang="de-DE" sz="2400" dirty="0" err="1"/>
+                  <a:t>compare</a:t>
+                </a:r>
+                <a:r>
+                  <a:rPr lang="de-DE" sz="2400" dirty="0"/>
+                  <a:t> different </a:t>
+                </a:r>
+                <a:r>
+                  <a:rPr lang="de-DE" sz="2400" dirty="0" err="1"/>
+                  <a:t>controller</a:t>
+                </a:r>
+                <a:r>
+                  <a:rPr lang="de-DE" sz="2400" dirty="0"/>
+                  <a:t> </a:t>
+                </a:r>
+                <a:r>
+                  <a:rPr lang="de-DE" sz="2400" dirty="0" err="1"/>
+                  <a:t>tunings</a:t>
+                </a:r>
+                <a:r>
+                  <a:rPr lang="de-DE" sz="2400" dirty="0"/>
+                  <a:t> (e.g., PID </a:t>
+                </a:r>
+                <a:r>
+                  <a:rPr lang="de-DE" sz="2400" dirty="0" err="1"/>
+                  <a:t>settings</a:t>
+                </a:r>
+                <a:r>
+                  <a:rPr lang="de-DE" sz="2400" dirty="0"/>
+                  <a:t>)</a:t>
+                </a:r>
+              </a:p>
+              <a:p>
+                <a:pPr marL="0" indent="0">
+                  <a:buNone/>
+                </a:pPr>
+                <a:endParaRPr lang="de-DE" sz="2400" dirty="0"/>
+              </a:p>
+              <a:p>
+                <a:pPr marL="0" indent="0">
+                  <a:buNone/>
+                </a:pPr>
+                <a:r>
+                  <a:rPr lang="de-DE" sz="2400" dirty="0"/>
+                  <a:t>Key Idea: </a:t>
+                </a:r>
+                <a:r>
+                  <a:rPr lang="de-DE" sz="2400" dirty="0" err="1"/>
+                  <a:t>Measure</a:t>
+                </a:r>
+                <a:r>
+                  <a:rPr lang="de-DE" sz="2400" dirty="0"/>
+                  <a:t> </a:t>
+                </a:r>
+                <a:r>
+                  <a:rPr lang="de-DE" sz="2400" dirty="0" err="1"/>
+                  <a:t>how</a:t>
+                </a:r>
+                <a:r>
+                  <a:rPr lang="de-DE" sz="2400" dirty="0"/>
+                  <a:t> </a:t>
+                </a:r>
+                <a:r>
+                  <a:rPr lang="de-DE" sz="2400" dirty="0" err="1"/>
+                  <a:t>much</a:t>
+                </a:r>
+                <a:r>
+                  <a:rPr lang="de-DE" sz="2400" dirty="0"/>
+                  <a:t> </a:t>
+                </a:r>
+                <a:r>
+                  <a:rPr lang="de-DE" sz="2400" dirty="0" err="1"/>
+                  <a:t>control</a:t>
+                </a:r>
+                <a:r>
+                  <a:rPr lang="de-DE" sz="2400" dirty="0"/>
+                  <a:t> </a:t>
+                </a:r>
+                <a:r>
+                  <a:rPr lang="de-DE" sz="2400" dirty="0" err="1"/>
+                  <a:t>error</a:t>
+                </a:r>
+                <a:r>
+                  <a:rPr lang="de-DE" sz="2400" dirty="0"/>
+                  <a:t> </a:t>
+                </a:r>
+                <a:r>
+                  <a:rPr lang="de-DE" sz="2400" dirty="0" err="1"/>
+                  <a:t>accumulates</a:t>
+                </a:r>
+                <a:r>
+                  <a:rPr lang="de-DE" sz="2400" dirty="0"/>
+                  <a:t> </a:t>
+                </a:r>
+                <a:r>
+                  <a:rPr lang="de-DE" sz="2400" dirty="0" err="1"/>
+                  <a:t>over</a:t>
+                </a:r>
+                <a:r>
+                  <a:rPr lang="de-DE" sz="2400" dirty="0"/>
+                  <a:t> time</a:t>
+                </a:r>
+              </a:p>
+              <a:p>
+                <a:pPr marL="0" indent="0">
+                  <a:buNone/>
+                </a:pPr>
+                <a14:m>
+                  <m:oMathPara xmlns:m="http://schemas.openxmlformats.org/officeDocument/2006/math">
+                    <m:oMathParaPr>
+                      <m:jc m:val="centerGroup"/>
+                    </m:oMathParaPr>
+                    <m:oMath xmlns:m="http://schemas.openxmlformats.org/officeDocument/2006/math">
+                      <m:sSub>
+                        <m:sSubPr>
+                          <m:ctrlPr>
+                            <a:rPr lang="de-DE" sz="2400" i="1">
+                              <a:latin typeface="Cambria Math" panose="02040503050406030204" pitchFamily="18" charset="0"/>
+                            </a:rPr>
+                          </m:ctrlPr>
+                        </m:sSubPr>
+                        <m:e>
+                          <m:r>
+                            <a:rPr lang="de-DE" sz="2400" i="1">
+                              <a:latin typeface="Cambria Math" panose="02040503050406030204" pitchFamily="18" charset="0"/>
+                            </a:rPr>
+                            <m:t>𝑇</m:t>
+                          </m:r>
+                        </m:e>
+                        <m:sub>
+                          <m:r>
+                            <m:rPr>
+                              <m:sty m:val="p"/>
+                            </m:rPr>
+                            <a:rPr lang="de-DE" sz="2400">
+                              <a:latin typeface="Cambria Math" panose="02040503050406030204" pitchFamily="18" charset="0"/>
+                            </a:rPr>
+                            <m:t>sum</m:t>
+                          </m:r>
+                        </m:sub>
+                      </m:sSub>
+                      <m:r>
+                        <a:rPr lang="de-DE" sz="2400" i="1">
+                          <a:latin typeface="Cambria Math" panose="02040503050406030204" pitchFamily="18" charset="0"/>
+                        </a:rPr>
+                        <m:t>=</m:t>
+                      </m:r>
+                      <m:nary>
+                        <m:naryPr>
+                          <m:chr m:val="∑"/>
+                          <m:subHide m:val="on"/>
+                          <m:supHide m:val="on"/>
+                          <m:ctrlPr>
+                            <a:rPr lang="de-DE" sz="2400" i="1">
+                              <a:latin typeface="Cambria Math" panose="02040503050406030204" pitchFamily="18" charset="0"/>
+                            </a:rPr>
+                          </m:ctrlPr>
+                        </m:naryPr>
+                        <m:sub/>
+                        <m:sup/>
+                        <m:e>
+                          <m:d>
+                            <m:dPr>
+                              <m:begChr m:val="|"/>
+                              <m:endChr m:val="|"/>
+                              <m:ctrlPr>
+                                <a:rPr lang="de-DE" sz="2400" i="1">
+                                  <a:latin typeface="Cambria Math" panose="02040503050406030204" pitchFamily="18" charset="0"/>
+                                </a:rPr>
+                              </m:ctrlPr>
+                            </m:dPr>
+                            <m:e>
+                              <m:r>
+                                <a:rPr lang="de-DE" sz="2400" i="1">
+                                  <a:latin typeface="Cambria Math" panose="02040503050406030204" pitchFamily="18" charset="0"/>
+                                </a:rPr>
+                                <m:t>𝑒</m:t>
+                              </m:r>
+                              <m:r>
+                                <a:rPr lang="de-DE" sz="2400" i="1">
+                                  <a:latin typeface="Cambria Math" panose="02040503050406030204" pitchFamily="18" charset="0"/>
+                                </a:rPr>
+                                <m:t>(</m:t>
+                              </m:r>
+                              <m:r>
+                                <a:rPr lang="de-DE" sz="2400" i="1">
+                                  <a:latin typeface="Cambria Math" panose="02040503050406030204" pitchFamily="18" charset="0"/>
+                                </a:rPr>
+                                <m:t>𝑡</m:t>
+                              </m:r>
+                              <m:r>
+                                <a:rPr lang="de-DE" sz="2400" i="1">
+                                  <a:latin typeface="Cambria Math" panose="02040503050406030204" pitchFamily="18" charset="0"/>
+                                </a:rPr>
+                                <m:t>)</m:t>
+                              </m:r>
+                            </m:e>
+                          </m:d>
+                          <m:r>
+                            <a:rPr lang="de-DE" sz="2400" i="1">
+                              <a:latin typeface="Cambria Math" panose="02040503050406030204" pitchFamily="18" charset="0"/>
+                              <a:ea typeface="Cambria Math" panose="02040503050406030204" pitchFamily="18" charset="0"/>
+                            </a:rPr>
+                            <m:t>∙</m:t>
+                          </m:r>
+                          <m:r>
+                            <m:rPr>
+                              <m:sty m:val="p"/>
+                            </m:rPr>
+                            <a:rPr lang="el-GR" sz="2400" i="1">
+                              <a:latin typeface="Cambria Math" panose="02040503050406030204" pitchFamily="18" charset="0"/>
+                              <a:ea typeface="Cambria Math" panose="02040503050406030204" pitchFamily="18" charset="0"/>
+                            </a:rPr>
+                            <m:t>Δ</m:t>
+                          </m:r>
+                          <m:r>
+                            <a:rPr lang="de-DE" sz="2400" i="1">
+                              <a:latin typeface="Cambria Math" panose="02040503050406030204" pitchFamily="18" charset="0"/>
+                              <a:ea typeface="Cambria Math" panose="02040503050406030204" pitchFamily="18" charset="0"/>
+                            </a:rPr>
+                            <m:t>𝑡</m:t>
+                          </m:r>
+                        </m:e>
+                      </m:nary>
+                    </m:oMath>
+                  </m:oMathPara>
+                </a14:m>
+                <a:endParaRPr lang="de-DE" sz="2400" dirty="0"/>
+              </a:p>
+              <a:p>
+                <a:pPr marL="0" indent="0">
+                  <a:buNone/>
+                </a:pPr>
+                <a:endParaRPr lang="de-DE" sz="2400" dirty="0"/>
+              </a:p>
+              <a:p>
+                <a:pPr marL="0" indent="0">
+                  <a:buNone/>
+                </a:pPr>
+                <a:r>
+                  <a:rPr lang="de-DE" sz="2400" dirty="0">
+                    <a:sym typeface="Wingdings" pitchFamily="2" charset="2"/>
+                  </a:rPr>
+                  <a:t> </a:t>
+                </a:r>
+                <a:r>
+                  <a:rPr lang="de-DE" sz="2400" dirty="0" err="1"/>
+                  <a:t>controller</a:t>
+                </a:r>
+                <a:r>
+                  <a:rPr lang="de-DE" sz="2400" dirty="0"/>
+                  <a:t> </a:t>
+                </a:r>
+                <a:r>
+                  <a:rPr lang="de-DE" sz="2400" dirty="0" err="1"/>
+                  <a:t>with</a:t>
+                </a:r>
+                <a:r>
+                  <a:rPr lang="de-DE" sz="2400" dirty="0"/>
+                  <a:t> </a:t>
+                </a:r>
+                <a:r>
+                  <a:rPr lang="de-DE" sz="2400" dirty="0" err="1"/>
+                  <a:t>smallest</a:t>
+                </a:r>
+                <a:r>
+                  <a:rPr lang="de-DE" sz="2400" dirty="0"/>
+                  <a:t> total </a:t>
+                </a:r>
+                <a:r>
+                  <a:rPr lang="de-DE" sz="2400" dirty="0" err="1"/>
+                  <a:t>accumulated</a:t>
+                </a:r>
+                <a:r>
+                  <a:rPr lang="de-DE" sz="2400" dirty="0"/>
+                  <a:t> </a:t>
+                </a:r>
+                <a:r>
+                  <a:rPr lang="de-DE" sz="2400" dirty="0" err="1"/>
+                  <a:t>error</a:t>
+                </a:r>
+                <a:r>
+                  <a:rPr lang="de-DE" sz="2400" dirty="0"/>
+                  <a:t> </a:t>
+                </a:r>
+                <a:r>
+                  <a:rPr lang="de-DE" sz="2400" dirty="0" err="1"/>
+                  <a:t>generally</a:t>
+                </a:r>
+                <a:r>
+                  <a:rPr lang="de-DE" sz="2400" dirty="0"/>
+                  <a:t> </a:t>
+                </a:r>
+                <a:r>
+                  <a:rPr lang="de-DE" sz="2400" dirty="0" err="1"/>
+                  <a:t>performs</a:t>
+                </a:r>
+                <a:r>
+                  <a:rPr lang="de-DE" sz="2400" dirty="0"/>
+                  <a:t> </a:t>
+                </a:r>
+                <a:r>
+                  <a:rPr lang="de-DE" sz="2400" dirty="0" err="1"/>
+                  <a:t>best</a:t>
+                </a:r>
+                <a:endParaRPr lang="de-DE" sz="2400" dirty="0"/>
+              </a:p>
+            </p:txBody>
+          </p:sp>
+        </mc:Choice>
+        <mc:Fallback>
+          <p:sp>
+            <p:nvSpPr>
+              <p:cNvPr id="3" name="Inhaltsplatzhalter 2">
+                <a:extLst>
+                  <a:ext uri="{FF2B5EF4-FFF2-40B4-BE49-F238E27FC236}">
+                    <a16:creationId xmlns:a16="http://schemas.microsoft.com/office/drawing/2014/main" id="{A1D58EA8-D03B-3C93-1C0F-F98C41CE636F}"/>
+                  </a:ext>
+                </a:extLst>
+              </p:cNvPr>
+              <p:cNvSpPr>
+                <a:spLocks noGrp="1" noRot="1" noChangeAspect="1" noMove="1" noResize="1" noEditPoints="1" noAdjustHandles="1" noChangeArrowheads="1" noChangeShapeType="1" noTextEdit="1"/>
+              </p:cNvSpPr>
+              <p:nvPr>
+                <p:ph idx="1"/>
+              </p:nvPr>
+            </p:nvSpPr>
+            <p:spPr>
+              <a:blipFill>
+                <a:blip r:embed="rId2"/>
+                <a:stretch>
+                  <a:fillRect l="-965" t="-2035" b="-1744"/>
+                </a:stretch>
+              </a:blipFill>
+            </p:spPr>
+            <p:txBody>
+              <a:bodyPr/>
+              <a:lstStyle/>
+              <a:p>
+                <a:r>
+                  <a:rPr lang="de-DE">
+                    <a:noFill/>
+                  </a:rPr>
+                  <a:t> </a:t>
+                </a:r>
+              </a:p>
+            </p:txBody>
+          </p:sp>
+        </mc:Fallback>
+      </mc:AlternateContent>
       <p:sp>
         <p:nvSpPr>
           <p:cNvPr id="4" name="Foliennummernplatzhalter 3">
@@ -5733,12 +9632,523 @@
           <a:p>
             <a:fld id="{08C366F5-AFAD-49CB-854A-9D9E238FCA13}" type="slidenum">
               <a:rPr lang="en-GB" smtClean="0"/>
-              <a:t>15</a:t>
+              <a:t>16</a:t>
             </a:fld>
             <a:endParaRPr lang="en-GB"/>
           </a:p>
         </p:txBody>
       </p:sp>
+      <p:sp>
+        <p:nvSpPr>
+          <p:cNvPr id="5" name="Textfeld 4">
+            <a:extLst>
+              <a:ext uri="{FF2B5EF4-FFF2-40B4-BE49-F238E27FC236}">
+                <a16:creationId xmlns:a16="http://schemas.microsoft.com/office/drawing/2014/main" id="{6D2B805F-4D25-CF89-BB24-0FD05062B981}"/>
+              </a:ext>
+            </a:extLst>
+          </p:cNvPr>
+          <p:cNvSpPr txBox="1"/>
+          <p:nvPr/>
+        </p:nvSpPr>
+        <p:spPr>
+          <a:xfrm>
+            <a:off x="7930117" y="4029350"/>
+            <a:ext cx="2275366" cy="430887"/>
+          </a:xfrm>
+          <a:prstGeom prst="rect">
+            <a:avLst/>
+          </a:prstGeom>
+          <a:noFill/>
+        </p:spPr>
+        <p:txBody>
+          <a:bodyPr wrap="none" rtlCol="0">
+            <a:spAutoFit/>
+          </a:bodyPr>
+          <a:lstStyle/>
+          <a:p>
+            <a:r>
+              <a:rPr lang="de-DE" sz="2200" dirty="0" err="1"/>
+              <a:t>sampling</a:t>
+            </a:r>
+            <a:r>
+              <a:rPr lang="de-DE" sz="2200" dirty="0"/>
+              <a:t> </a:t>
+            </a:r>
+            <a:r>
+              <a:rPr lang="de-DE" sz="2200" dirty="0" err="1"/>
+              <a:t>interval</a:t>
+            </a:r>
+            <a:endParaRPr lang="de-DE" sz="2200" dirty="0"/>
+          </a:p>
+        </p:txBody>
+      </p:sp>
+      <p:sp>
+        <p:nvSpPr>
+          <p:cNvPr id="6" name="Textfeld 5">
+            <a:extLst>
+              <a:ext uri="{FF2B5EF4-FFF2-40B4-BE49-F238E27FC236}">
+                <a16:creationId xmlns:a16="http://schemas.microsoft.com/office/drawing/2014/main" id="{AEB389B3-8E9D-9C2D-6DA3-72CCF0253FD9}"/>
+              </a:ext>
+            </a:extLst>
+          </p:cNvPr>
+          <p:cNvSpPr txBox="1"/>
+          <p:nvPr/>
+        </p:nvSpPr>
+        <p:spPr>
+          <a:xfrm>
+            <a:off x="5557773" y="4295594"/>
+            <a:ext cx="1696618" cy="430887"/>
+          </a:xfrm>
+          <a:prstGeom prst="rect">
+            <a:avLst/>
+          </a:prstGeom>
+          <a:noFill/>
+        </p:spPr>
+        <p:txBody>
+          <a:bodyPr wrap="none" rtlCol="0">
+            <a:spAutoFit/>
+          </a:bodyPr>
+          <a:lstStyle/>
+          <a:p>
+            <a:r>
+              <a:rPr lang="de-DE" sz="2200" dirty="0" err="1"/>
+              <a:t>control</a:t>
+            </a:r>
+            <a:r>
+              <a:rPr lang="de-DE" sz="2200" dirty="0"/>
+              <a:t> </a:t>
+            </a:r>
+            <a:r>
+              <a:rPr lang="de-DE" sz="2200" dirty="0" err="1"/>
+              <a:t>error</a:t>
+            </a:r>
+            <a:endParaRPr lang="de-DE" sz="2200" dirty="0"/>
+          </a:p>
+        </p:txBody>
+      </p:sp>
+      <p:cxnSp>
+        <p:nvCxnSpPr>
+          <p:cNvPr id="8" name="Gerade Verbindung mit Pfeil 7">
+            <a:extLst>
+              <a:ext uri="{FF2B5EF4-FFF2-40B4-BE49-F238E27FC236}">
+                <a16:creationId xmlns:a16="http://schemas.microsoft.com/office/drawing/2014/main" id="{D991F0A8-A7A1-2C53-F07F-C19A57DA8B01}"/>
+              </a:ext>
+            </a:extLst>
+          </p:cNvPr>
+          <p:cNvCxnSpPr>
+            <a:cxnSpLocks/>
+            <a:stCxn id="5" idx="1"/>
+          </p:cNvCxnSpPr>
+          <p:nvPr/>
+        </p:nvCxnSpPr>
+        <p:spPr>
+          <a:xfrm flipH="1" flipV="1">
+            <a:off x="7457440" y="4013200"/>
+            <a:ext cx="472677" cy="231594"/>
+          </a:xfrm>
+          <a:prstGeom prst="straightConnector1">
+            <a:avLst/>
+          </a:prstGeom>
+          <a:ln>
+            <a:tailEnd type="triangle"/>
+          </a:ln>
+        </p:spPr>
+        <p:style>
+          <a:lnRef idx="2">
+            <a:schemeClr val="accent1"/>
+          </a:lnRef>
+          <a:fillRef idx="0">
+            <a:schemeClr val="accent1"/>
+          </a:fillRef>
+          <a:effectRef idx="1">
+            <a:schemeClr val="accent1"/>
+          </a:effectRef>
+          <a:fontRef idx="minor">
+            <a:schemeClr val="tx1"/>
+          </a:fontRef>
+        </p:style>
+      </p:cxnSp>
+      <p:cxnSp>
+        <p:nvCxnSpPr>
+          <p:cNvPr id="10" name="Gerade Verbindung mit Pfeil 9">
+            <a:extLst>
+              <a:ext uri="{FF2B5EF4-FFF2-40B4-BE49-F238E27FC236}">
+                <a16:creationId xmlns:a16="http://schemas.microsoft.com/office/drawing/2014/main" id="{81F7C321-D5BB-F766-9704-929ECBBD11A8}"/>
+              </a:ext>
+            </a:extLst>
+          </p:cNvPr>
+          <p:cNvCxnSpPr>
+            <a:cxnSpLocks/>
+            <a:stCxn id="6" idx="0"/>
+          </p:cNvCxnSpPr>
+          <p:nvPr/>
+        </p:nvCxnSpPr>
+        <p:spPr>
+          <a:xfrm flipV="1">
+            <a:off x="6406082" y="4064000"/>
+            <a:ext cx="0" cy="231594"/>
+          </a:xfrm>
+          <a:prstGeom prst="straightConnector1">
+            <a:avLst/>
+          </a:prstGeom>
+          <a:ln>
+            <a:tailEnd type="triangle"/>
+          </a:ln>
+        </p:spPr>
+        <p:style>
+          <a:lnRef idx="2">
+            <a:schemeClr val="accent1"/>
+          </a:lnRef>
+          <a:fillRef idx="0">
+            <a:schemeClr val="accent1"/>
+          </a:fillRef>
+          <a:effectRef idx="1">
+            <a:schemeClr val="accent1"/>
+          </a:effectRef>
+          <a:fontRef idx="minor">
+            <a:schemeClr val="tx1"/>
+          </a:fontRef>
+        </p:style>
+      </p:cxnSp>
+      <p:sp>
+        <p:nvSpPr>
+          <p:cNvPr id="11" name="Textfeld 10">
+            <a:extLst>
+              <a:ext uri="{FF2B5EF4-FFF2-40B4-BE49-F238E27FC236}">
+                <a16:creationId xmlns:a16="http://schemas.microsoft.com/office/drawing/2014/main" id="{3D70AB15-7FF0-BCA6-96F2-4071AED8B17A}"/>
+              </a:ext>
+            </a:extLst>
+          </p:cNvPr>
+          <p:cNvSpPr txBox="1"/>
+          <p:nvPr/>
+        </p:nvSpPr>
+        <p:spPr>
+          <a:xfrm>
+            <a:off x="1566232" y="4029350"/>
+            <a:ext cx="2529836" cy="646331"/>
+          </a:xfrm>
+          <a:prstGeom prst="rect">
+            <a:avLst/>
+          </a:prstGeom>
+          <a:noFill/>
+        </p:spPr>
+        <p:txBody>
+          <a:bodyPr wrap="square" rtlCol="0">
+            <a:spAutoFit/>
+          </a:bodyPr>
+          <a:lstStyle/>
+          <a:p>
+            <a:r>
+              <a:rPr lang="de-DE" dirty="0" err="1"/>
+              <a:t>accumulated</a:t>
+            </a:r>
+            <a:r>
+              <a:rPr lang="de-DE" dirty="0"/>
+              <a:t> </a:t>
+            </a:r>
+            <a:r>
+              <a:rPr lang="de-DE" dirty="0" err="1"/>
+              <a:t>error</a:t>
+            </a:r>
+            <a:r>
+              <a:rPr lang="de-DE" dirty="0"/>
+              <a:t> </a:t>
+            </a:r>
+            <a:r>
+              <a:rPr lang="de-DE" dirty="0" err="1"/>
+              <a:t>over</a:t>
+            </a:r>
+            <a:r>
+              <a:rPr lang="de-DE" dirty="0"/>
+              <a:t> </a:t>
+            </a:r>
+            <a:r>
+              <a:rPr lang="de-DE" dirty="0" err="1"/>
+              <a:t>the</a:t>
+            </a:r>
+            <a:r>
+              <a:rPr lang="de-DE" dirty="0"/>
+              <a:t> </a:t>
+            </a:r>
+            <a:r>
+              <a:rPr lang="de-DE" dirty="0" err="1"/>
+              <a:t>evaluation</a:t>
+            </a:r>
+            <a:r>
+              <a:rPr lang="de-DE" dirty="0"/>
+              <a:t> </a:t>
+            </a:r>
+            <a:r>
+              <a:rPr lang="de-DE" dirty="0" err="1"/>
+              <a:t>period</a:t>
+            </a:r>
+            <a:endParaRPr lang="de-DE" dirty="0"/>
+          </a:p>
+        </p:txBody>
+      </p:sp>
+      <p:cxnSp>
+        <p:nvCxnSpPr>
+          <p:cNvPr id="13" name="Gerade Verbindung mit Pfeil 12">
+            <a:extLst>
+              <a:ext uri="{FF2B5EF4-FFF2-40B4-BE49-F238E27FC236}">
+                <a16:creationId xmlns:a16="http://schemas.microsoft.com/office/drawing/2014/main" id="{10851A8A-9AE2-2913-9911-C40F3E0B05EA}"/>
+              </a:ext>
+            </a:extLst>
+          </p:cNvPr>
+          <p:cNvCxnSpPr>
+            <a:cxnSpLocks/>
+            <a:stCxn id="11" idx="3"/>
+          </p:cNvCxnSpPr>
+          <p:nvPr/>
+        </p:nvCxnSpPr>
+        <p:spPr>
+          <a:xfrm flipV="1">
+            <a:off x="4096068" y="4013200"/>
+            <a:ext cx="613397" cy="339316"/>
+          </a:xfrm>
+          <a:prstGeom prst="straightConnector1">
+            <a:avLst/>
+          </a:prstGeom>
+          <a:ln>
+            <a:tailEnd type="triangle"/>
+          </a:ln>
+        </p:spPr>
+        <p:style>
+          <a:lnRef idx="2">
+            <a:schemeClr val="accent1"/>
+          </a:lnRef>
+          <a:fillRef idx="0">
+            <a:schemeClr val="accent1"/>
+          </a:fillRef>
+          <a:effectRef idx="1">
+            <a:schemeClr val="accent1"/>
+          </a:effectRef>
+          <a:fontRef idx="minor">
+            <a:schemeClr val="tx1"/>
+          </a:fontRef>
+        </p:style>
+      </p:cxnSp>
+      <mc:AlternateContent xmlns:mc="http://schemas.openxmlformats.org/markup-compatibility/2006">
+        <mc:Choice xmlns:a14="http://schemas.microsoft.com/office/drawing/2010/main" Requires="a14">
+          <p:sp>
+            <p:nvSpPr>
+              <p:cNvPr id="15" name="Textfeld 14">
+                <a:extLst>
+                  <a:ext uri="{FF2B5EF4-FFF2-40B4-BE49-F238E27FC236}">
+                    <a16:creationId xmlns:a16="http://schemas.microsoft.com/office/drawing/2014/main" id="{CCD5C81C-F129-47FD-25F2-66F07975978B}"/>
+                  </a:ext>
+                </a:extLst>
+              </p:cNvPr>
+              <p:cNvSpPr txBox="1"/>
+              <p:nvPr/>
+            </p:nvSpPr>
+            <p:spPr>
+              <a:xfrm>
+                <a:off x="3048000" y="5569484"/>
+                <a:ext cx="6096000" cy="830997"/>
+              </a:xfrm>
+              <a:prstGeom prst="rect">
+                <a:avLst/>
+              </a:prstGeom>
+              <a:noFill/>
+              <a:ln>
+                <a:solidFill>
+                  <a:schemeClr val="tx1"/>
+                </a:solidFill>
+              </a:ln>
+            </p:spPr>
+            <p:txBody>
+              <a:bodyPr wrap="square">
+                <a:spAutoFit/>
+              </a:bodyPr>
+              <a:lstStyle/>
+              <a:p>
+                <a:r>
+                  <a:rPr lang="de-DE" sz="2400" dirty="0" err="1"/>
+                  <a:t>smaller</a:t>
+                </a:r>
+                <a:r>
+                  <a:rPr lang="de-DE" sz="2400" b="1" dirty="0"/>
+                  <a:t> </a:t>
+                </a:r>
+                <a14:m>
+                  <m:oMath xmlns:m="http://schemas.openxmlformats.org/officeDocument/2006/math">
+                    <m:sSub>
+                      <m:sSubPr>
+                        <m:ctrlPr>
+                          <a:rPr lang="de-DE" sz="2400" i="1">
+                            <a:latin typeface="Cambria Math" panose="02040503050406030204" pitchFamily="18" charset="0"/>
+                          </a:rPr>
+                        </m:ctrlPr>
+                      </m:sSubPr>
+                      <m:e>
+                        <m:r>
+                          <a:rPr lang="de-DE" sz="2400" i="1">
+                            <a:latin typeface="Cambria Math" panose="02040503050406030204" pitchFamily="18" charset="0"/>
+                          </a:rPr>
+                          <m:t>𝑇</m:t>
+                        </m:r>
+                      </m:e>
+                      <m:sub>
+                        <m:r>
+                          <m:rPr>
+                            <m:sty m:val="p"/>
+                          </m:rPr>
+                          <a:rPr lang="de-DE" sz="2400">
+                            <a:latin typeface="Cambria Math" panose="02040503050406030204" pitchFamily="18" charset="0"/>
+                          </a:rPr>
+                          <m:t>sum</m:t>
+                        </m:r>
+                      </m:sub>
+                    </m:sSub>
+                  </m:oMath>
+                </a14:m>
+                <a:r>
+                  <a:rPr lang="de-DE" sz="2400" dirty="0"/>
+                  <a:t>: </a:t>
+                </a:r>
+                <a:r>
+                  <a:rPr lang="de-DE" sz="2400" dirty="0" err="1"/>
+                  <a:t>better</a:t>
+                </a:r>
+                <a:r>
+                  <a:rPr lang="de-DE" sz="2400" dirty="0"/>
+                  <a:t> </a:t>
+                </a:r>
+                <a:r>
+                  <a:rPr lang="de-DE" sz="2400" dirty="0" err="1"/>
+                  <a:t>control</a:t>
+                </a:r>
+                <a:r>
+                  <a:rPr lang="de-DE" sz="2400" dirty="0"/>
+                  <a:t> </a:t>
+                </a:r>
+                <a:r>
+                  <a:rPr lang="de-DE" sz="2400" dirty="0" err="1"/>
+                  <a:t>performance</a:t>
+                </a:r>
+                <a:endParaRPr lang="de-DE" sz="2400" dirty="0"/>
+              </a:p>
+              <a:p>
+                <a:r>
+                  <a:rPr lang="de-DE" sz="2400" dirty="0"/>
+                  <a:t>larger</a:t>
+                </a:r>
+                <a:r>
+                  <a:rPr lang="de-DE" sz="2400" b="1" dirty="0"/>
+                  <a:t> </a:t>
+                </a:r>
+                <a14:m>
+                  <m:oMath xmlns:m="http://schemas.openxmlformats.org/officeDocument/2006/math">
+                    <m:sSub>
+                      <m:sSubPr>
+                        <m:ctrlPr>
+                          <a:rPr lang="de-DE" sz="2400" i="1">
+                            <a:latin typeface="Cambria Math" panose="02040503050406030204" pitchFamily="18" charset="0"/>
+                          </a:rPr>
+                        </m:ctrlPr>
+                      </m:sSubPr>
+                      <m:e>
+                        <m:r>
+                          <a:rPr lang="de-DE" sz="2400" i="1">
+                            <a:latin typeface="Cambria Math" panose="02040503050406030204" pitchFamily="18" charset="0"/>
+                          </a:rPr>
+                          <m:t>𝑇</m:t>
+                        </m:r>
+                      </m:e>
+                      <m:sub>
+                        <m:r>
+                          <m:rPr>
+                            <m:sty m:val="p"/>
+                          </m:rPr>
+                          <a:rPr lang="de-DE" sz="2400">
+                            <a:latin typeface="Cambria Math" panose="02040503050406030204" pitchFamily="18" charset="0"/>
+                          </a:rPr>
+                          <m:t>sum</m:t>
+                        </m:r>
+                      </m:sub>
+                    </m:sSub>
+                  </m:oMath>
+                </a14:m>
+                <a:r>
+                  <a:rPr lang="de-DE" sz="2400" dirty="0"/>
+                  <a:t>: larger </a:t>
+                </a:r>
+                <a:r>
+                  <a:rPr lang="de-DE" sz="2400" dirty="0" err="1"/>
+                  <a:t>or</a:t>
+                </a:r>
+                <a:r>
+                  <a:rPr lang="de-DE" sz="2400" dirty="0"/>
+                  <a:t> </a:t>
+                </a:r>
+                <a:r>
+                  <a:rPr lang="de-DE" sz="2400" dirty="0" err="1"/>
+                  <a:t>longer</a:t>
+                </a:r>
+                <a:r>
+                  <a:rPr lang="de-DE" sz="2400" dirty="0"/>
+                  <a:t>-lasting </a:t>
+                </a:r>
+                <a:r>
+                  <a:rPr lang="de-DE" sz="2400" dirty="0" err="1"/>
+                  <a:t>deviations</a:t>
+                </a:r>
+                <a:endParaRPr lang="de-DE" sz="2400" dirty="0"/>
+              </a:p>
+            </p:txBody>
+          </p:sp>
+        </mc:Choice>
+        <mc:Fallback>
+          <p:sp>
+            <p:nvSpPr>
+              <p:cNvPr id="15" name="Textfeld 14">
+                <a:extLst>
+                  <a:ext uri="{FF2B5EF4-FFF2-40B4-BE49-F238E27FC236}">
+                    <a16:creationId xmlns:a16="http://schemas.microsoft.com/office/drawing/2014/main" id="{CCD5C81C-F129-47FD-25F2-66F07975978B}"/>
+                  </a:ext>
+                </a:extLst>
+              </p:cNvPr>
+              <p:cNvSpPr txBox="1">
+                <a:spLocks noRot="1" noChangeAspect="1" noMove="1" noResize="1" noEditPoints="1" noAdjustHandles="1" noChangeArrowheads="1" noChangeShapeType="1" noTextEdit="1"/>
+              </p:cNvSpPr>
+              <p:nvPr/>
+            </p:nvSpPr>
+            <p:spPr>
+              <a:xfrm>
+                <a:off x="3048000" y="5569484"/>
+                <a:ext cx="6096000" cy="830997"/>
+              </a:xfrm>
+              <a:prstGeom prst="rect">
+                <a:avLst/>
+              </a:prstGeom>
+              <a:blipFill>
+                <a:blip r:embed="rId3"/>
+                <a:stretch>
+                  <a:fillRect l="-1452" t="-5970" r="-1452" b="-16418"/>
+                </a:stretch>
+              </a:blipFill>
+              <a:ln>
+                <a:solidFill>
+                  <a:schemeClr val="tx1"/>
+                </a:solidFill>
+              </a:ln>
+            </p:spPr>
+            <p:txBody>
+              <a:bodyPr/>
+              <a:lstStyle/>
+              <a:p>
+                <a:r>
+                  <a:rPr lang="de-DE">
+                    <a:noFill/>
+                  </a:rPr>
+                  <a:t> </a:t>
+                </a:r>
+              </a:p>
+            </p:txBody>
+          </p:sp>
+        </mc:Fallback>
+      </mc:AlternateContent>
     </p:spTree>
     <p:extLst>
       <p:ext uri="{BB962C8B-B14F-4D97-AF65-F5344CB8AC3E}">
@@ -5752,7 +10162,703 @@
 </p:sld>
 </file>
 
-<file path=ppt/slides/slide16.xml><?xml version="1.0" encoding="utf-8"?>
+<file path=ppt/slides/slide17.xml><?xml version="1.0" encoding="utf-8"?>
+<p:sld xmlns:a="http://schemas.openxmlformats.org/drawingml/2006/main" xmlns:r="http://schemas.openxmlformats.org/officeDocument/2006/relationships" xmlns:p="http://schemas.openxmlformats.org/presentationml/2006/main">
+  <p:cSld>
+    <p:spTree>
+      <p:nvGrpSpPr>
+        <p:cNvPr id="1" name=""/>
+        <p:cNvGrpSpPr/>
+        <p:nvPr/>
+      </p:nvGrpSpPr>
+      <p:grpSpPr>
+        <a:xfrm>
+          <a:off x="0" y="0"/>
+          <a:ext cx="0" cy="0"/>
+          <a:chOff x="0" y="0"/>
+          <a:chExt cx="0" cy="0"/>
+        </a:xfrm>
+      </p:grpSpPr>
+      <p:sp>
+        <p:nvSpPr>
+          <p:cNvPr id="2" name="Titel 1">
+            <a:extLst>
+              <a:ext uri="{FF2B5EF4-FFF2-40B4-BE49-F238E27FC236}">
+                <a16:creationId xmlns:a16="http://schemas.microsoft.com/office/drawing/2014/main" id="{3781D303-60CB-1EB0-720A-6B61311B8BF4}"/>
+              </a:ext>
+            </a:extLst>
+          </p:cNvPr>
+          <p:cNvSpPr>
+            <a:spLocks noGrp="1"/>
+          </p:cNvSpPr>
+          <p:nvPr>
+            <p:ph type="title"/>
+          </p:nvPr>
+        </p:nvSpPr>
+        <p:spPr/>
+        <p:txBody>
+          <a:bodyPr/>
+          <a:lstStyle/>
+          <a:p>
+            <a:r>
+              <a:rPr lang="de-DE" dirty="0"/>
+              <a:t>T-</a:t>
+            </a:r>
+            <a:r>
+              <a:rPr lang="de-DE" dirty="0" err="1"/>
+              <a:t>Sum</a:t>
+            </a:r>
+            <a:r>
+              <a:rPr lang="de-DE" dirty="0"/>
+              <a:t> </a:t>
+            </a:r>
+            <a:r>
+              <a:rPr lang="de-DE" dirty="0" err="1"/>
+              <a:t>Procedure</a:t>
+            </a:r>
+            <a:endParaRPr lang="de-DE" dirty="0"/>
+          </a:p>
+        </p:txBody>
+      </p:sp>
+      <mc:AlternateContent xmlns:mc="http://schemas.openxmlformats.org/markup-compatibility/2006">
+        <mc:Choice xmlns:a14="http://schemas.microsoft.com/office/drawing/2010/main" Requires="a14">
+          <p:sp>
+            <p:nvSpPr>
+              <p:cNvPr id="3" name="Inhaltsplatzhalter 2">
+                <a:extLst>
+                  <a:ext uri="{FF2B5EF4-FFF2-40B4-BE49-F238E27FC236}">
+                    <a16:creationId xmlns:a16="http://schemas.microsoft.com/office/drawing/2014/main" id="{ACECE7EE-5665-B2A1-8E8D-1C38701BD968}"/>
+                  </a:ext>
+                </a:extLst>
+              </p:cNvPr>
+              <p:cNvSpPr>
+                <a:spLocks noGrp="1"/>
+              </p:cNvSpPr>
+              <p:nvPr>
+                <p:ph idx="1"/>
+              </p:nvPr>
+            </p:nvSpPr>
+            <p:spPr/>
+            <p:txBody>
+              <a:bodyPr>
+                <a:normAutofit/>
+              </a:bodyPr>
+              <a:lstStyle/>
+              <a:p>
+                <a:pPr marL="514350" indent="-514350">
+                  <a:buFont typeface="+mj-lt"/>
+                  <a:buAutoNum type="arabicPeriod"/>
+                </a:pPr>
+                <a:r>
+                  <a:rPr lang="de-DE" sz="2600" dirty="0"/>
+                  <a:t>Apply a </a:t>
+                </a:r>
+                <a:r>
+                  <a:rPr lang="de-DE" sz="2600" dirty="0" err="1"/>
+                  <a:t>test</a:t>
+                </a:r>
+                <a:r>
+                  <a:rPr lang="de-DE" sz="2600" dirty="0"/>
+                  <a:t> </a:t>
+                </a:r>
+                <a:r>
+                  <a:rPr lang="de-DE" sz="2600" dirty="0" err="1"/>
+                  <a:t>input</a:t>
+                </a:r>
+                <a:r>
+                  <a:rPr lang="de-DE" sz="2600" dirty="0"/>
+                  <a:t> (</a:t>
+                </a:r>
+                <a:r>
+                  <a:rPr lang="de-DE" sz="2600" dirty="0" err="1"/>
+                  <a:t>often</a:t>
+                </a:r>
+                <a:r>
+                  <a:rPr lang="de-DE" sz="2600" dirty="0"/>
+                  <a:t> a </a:t>
+                </a:r>
+                <a:r>
+                  <a:rPr lang="de-DE" sz="2600" dirty="0" err="1"/>
+                  <a:t>step</a:t>
+                </a:r>
+                <a:r>
+                  <a:rPr lang="de-DE" sz="2600" dirty="0"/>
+                  <a:t> </a:t>
+                </a:r>
+                <a:r>
+                  <a:rPr lang="de-DE" sz="2600" dirty="0" err="1"/>
+                  <a:t>input</a:t>
+                </a:r>
+                <a:r>
+                  <a:rPr lang="de-DE" sz="2600" dirty="0"/>
+                  <a:t>)</a:t>
+                </a:r>
+              </a:p>
+              <a:p>
+                <a:pPr marL="514350" indent="-514350">
+                  <a:buFont typeface="+mj-lt"/>
+                  <a:buAutoNum type="arabicPeriod"/>
+                </a:pPr>
+                <a:r>
+                  <a:rPr lang="de-DE" sz="2600" dirty="0" err="1"/>
+                  <a:t>Measure</a:t>
+                </a:r>
+                <a:r>
+                  <a:rPr lang="de-DE" sz="2600" dirty="0"/>
+                  <a:t> </a:t>
+                </a:r>
+                <a:r>
+                  <a:rPr lang="de-DE" sz="2600" dirty="0" err="1"/>
+                  <a:t>the</a:t>
+                </a:r>
+                <a:r>
+                  <a:rPr lang="de-DE" sz="2600" dirty="0"/>
+                  <a:t> </a:t>
+                </a:r>
+                <a:r>
+                  <a:rPr lang="de-DE" sz="2600" dirty="0" err="1"/>
+                  <a:t>system</a:t>
+                </a:r>
+                <a:r>
+                  <a:rPr lang="de-DE" sz="2600" dirty="0"/>
+                  <a:t> </a:t>
+                </a:r>
+                <a:r>
+                  <a:rPr lang="de-DE" sz="2600" dirty="0" err="1"/>
+                  <a:t>output</a:t>
+                </a:r>
+                <a:r>
+                  <a:rPr lang="de-DE" sz="2600" dirty="0"/>
+                  <a:t> </a:t>
+                </a:r>
+                <a:r>
+                  <a:rPr lang="de-DE" sz="2600" dirty="0" err="1"/>
+                  <a:t>response</a:t>
+                </a:r>
+                <a:endParaRPr lang="de-DE" sz="2600" dirty="0"/>
+              </a:p>
+              <a:p>
+                <a:pPr marL="514350" indent="-514350">
+                  <a:buFont typeface="+mj-lt"/>
+                  <a:buAutoNum type="arabicPeriod"/>
+                </a:pPr>
+                <a:r>
+                  <a:rPr lang="de-DE" sz="2600" dirty="0" err="1"/>
+                  <a:t>Calculate</a:t>
+                </a:r>
+                <a:r>
+                  <a:rPr lang="de-DE" sz="2600" dirty="0"/>
+                  <a:t> </a:t>
+                </a:r>
+                <a:r>
+                  <a:rPr lang="de-DE" sz="2600" dirty="0" err="1"/>
+                  <a:t>the</a:t>
+                </a:r>
+                <a:r>
+                  <a:rPr lang="de-DE" sz="2600" dirty="0"/>
+                  <a:t> </a:t>
+                </a:r>
+                <a:r>
+                  <a:rPr lang="de-DE" sz="2600" dirty="0" err="1"/>
+                  <a:t>error</a:t>
+                </a:r>
+                <a:r>
+                  <a:rPr lang="de-DE" sz="2600" dirty="0"/>
+                  <a:t> </a:t>
+                </a:r>
+                <a:r>
+                  <a:rPr lang="de-DE" sz="2600" dirty="0" err="1"/>
+                  <a:t>signal</a:t>
+                </a:r>
+                <a:r>
+                  <a:rPr lang="de-DE" sz="2600" dirty="0"/>
+                  <a:t>:		</a:t>
+                </a:r>
+                <a14:m>
+                  <m:oMath xmlns:m="http://schemas.openxmlformats.org/officeDocument/2006/math">
+                    <m:r>
+                      <a:rPr lang="de-DE" sz="2600" b="0" i="1" smtClean="0">
+                        <a:latin typeface="Cambria Math" panose="02040503050406030204" pitchFamily="18" charset="0"/>
+                      </a:rPr>
+                      <m:t>𝑒</m:t>
+                    </m:r>
+                    <m:d>
+                      <m:dPr>
+                        <m:ctrlPr>
+                          <a:rPr lang="de-DE" sz="2600" b="0" i="1" smtClean="0">
+                            <a:latin typeface="Cambria Math" panose="02040503050406030204" pitchFamily="18" charset="0"/>
+                          </a:rPr>
+                        </m:ctrlPr>
+                      </m:dPr>
+                      <m:e>
+                        <m:r>
+                          <a:rPr lang="de-DE" sz="2600" b="0" i="1" smtClean="0">
+                            <a:latin typeface="Cambria Math" panose="02040503050406030204" pitchFamily="18" charset="0"/>
+                          </a:rPr>
+                          <m:t>𝑡</m:t>
+                        </m:r>
+                      </m:e>
+                    </m:d>
+                    <m:r>
+                      <a:rPr lang="de-DE" sz="2600" b="0" i="1" smtClean="0">
+                        <a:latin typeface="Cambria Math" panose="02040503050406030204" pitchFamily="18" charset="0"/>
+                      </a:rPr>
+                      <m:t>=</m:t>
+                    </m:r>
+                    <m:r>
+                      <a:rPr lang="de-DE" sz="2600" b="0" i="1" smtClean="0">
+                        <a:latin typeface="Cambria Math" panose="02040503050406030204" pitchFamily="18" charset="0"/>
+                      </a:rPr>
+                      <m:t>𝑟</m:t>
+                    </m:r>
+                    <m:d>
+                      <m:dPr>
+                        <m:ctrlPr>
+                          <a:rPr lang="de-DE" sz="2600" b="0" i="1" smtClean="0">
+                            <a:latin typeface="Cambria Math" panose="02040503050406030204" pitchFamily="18" charset="0"/>
+                          </a:rPr>
+                        </m:ctrlPr>
+                      </m:dPr>
+                      <m:e>
+                        <m:r>
+                          <a:rPr lang="de-DE" sz="2600" b="0" i="1" smtClean="0">
+                            <a:latin typeface="Cambria Math" panose="02040503050406030204" pitchFamily="18" charset="0"/>
+                          </a:rPr>
+                          <m:t>𝑡</m:t>
+                        </m:r>
+                      </m:e>
+                    </m:d>
+                    <m:r>
+                      <a:rPr lang="de-DE" sz="2600" b="0" i="1" smtClean="0">
+                        <a:latin typeface="Cambria Math" panose="02040503050406030204" pitchFamily="18" charset="0"/>
+                      </a:rPr>
+                      <m:t>−</m:t>
+                    </m:r>
+                    <m:r>
+                      <a:rPr lang="de-DE" sz="2600" b="0" i="1" smtClean="0">
+                        <a:latin typeface="Cambria Math" panose="02040503050406030204" pitchFamily="18" charset="0"/>
+                      </a:rPr>
+                      <m:t>𝑦</m:t>
+                    </m:r>
+                    <m:r>
+                      <a:rPr lang="de-DE" sz="2600" b="0" i="1" smtClean="0">
+                        <a:latin typeface="Cambria Math" panose="02040503050406030204" pitchFamily="18" charset="0"/>
+                      </a:rPr>
+                      <m:t>(</m:t>
+                    </m:r>
+                    <m:r>
+                      <a:rPr lang="de-DE" sz="2600" b="0" i="1" smtClean="0">
+                        <a:latin typeface="Cambria Math" panose="02040503050406030204" pitchFamily="18" charset="0"/>
+                      </a:rPr>
+                      <m:t>𝑡</m:t>
+                    </m:r>
+                    <m:r>
+                      <a:rPr lang="de-DE" sz="2600" b="0" i="1" smtClean="0">
+                        <a:latin typeface="Cambria Math" panose="02040503050406030204" pitchFamily="18" charset="0"/>
+                      </a:rPr>
+                      <m:t>)</m:t>
+                    </m:r>
+                  </m:oMath>
+                </a14:m>
+                <a:endParaRPr lang="de-DE" sz="2600" dirty="0"/>
+              </a:p>
+              <a:p>
+                <a:pPr marL="514350" indent="-514350">
+                  <a:buFont typeface="+mj-lt"/>
+                  <a:buAutoNum type="arabicPeriod"/>
+                </a:pPr>
+                <a:r>
+                  <a:rPr lang="de-DE" sz="2600" dirty="0" err="1"/>
+                  <a:t>Sum</a:t>
+                </a:r>
+                <a:r>
+                  <a:rPr lang="de-DE" sz="2600" dirty="0"/>
+                  <a:t> </a:t>
+                </a:r>
+                <a:r>
+                  <a:rPr lang="de-DE" sz="2600" dirty="0" err="1"/>
+                  <a:t>the</a:t>
+                </a:r>
+                <a:r>
+                  <a:rPr lang="de-DE" sz="2600" dirty="0"/>
+                  <a:t> </a:t>
+                </a:r>
+                <a:r>
+                  <a:rPr lang="de-DE" sz="2600" dirty="0" err="1"/>
+                  <a:t>error</a:t>
+                </a:r>
+                <a:r>
+                  <a:rPr lang="de-DE" sz="2600" dirty="0"/>
+                  <a:t> </a:t>
+                </a:r>
+                <a:r>
+                  <a:rPr lang="de-DE" sz="2600" dirty="0" err="1"/>
+                  <a:t>over</a:t>
+                </a:r>
+                <a:r>
+                  <a:rPr lang="de-DE" sz="2600" dirty="0"/>
+                  <a:t> </a:t>
+                </a:r>
+                <a:r>
+                  <a:rPr lang="de-DE" sz="2600" dirty="0" err="1"/>
+                  <a:t>the</a:t>
+                </a:r>
+                <a:r>
+                  <a:rPr lang="de-DE" sz="2600" dirty="0"/>
+                  <a:t> </a:t>
+                </a:r>
+                <a:r>
+                  <a:rPr lang="de-DE" sz="2600" dirty="0" err="1"/>
+                  <a:t>observation</a:t>
+                </a:r>
+                <a:r>
+                  <a:rPr lang="de-DE" sz="2600" dirty="0"/>
+                  <a:t> time</a:t>
+                </a:r>
+              </a:p>
+              <a:p>
+                <a:pPr marL="0" indent="0">
+                  <a:buNone/>
+                </a:pPr>
+                <a:endParaRPr lang="de-DE" sz="2600" dirty="0"/>
+              </a:p>
+              <a:p>
+                <a:pPr marL="0" indent="0">
+                  <a:buNone/>
+                </a:pPr>
+                <a:r>
+                  <a:rPr lang="de-DE" sz="2600" dirty="0" err="1"/>
+                  <a:t>Limitations</a:t>
+                </a:r>
+                <a:endParaRPr lang="de-DE" sz="2600" dirty="0"/>
+              </a:p>
+              <a:p>
+                <a:r>
+                  <a:rPr lang="de-DE" sz="2600" dirty="0" err="1"/>
+                  <a:t>Does</a:t>
+                </a:r>
+                <a:r>
+                  <a:rPr lang="de-DE" sz="2600" dirty="0"/>
+                  <a:t> not </a:t>
+                </a:r>
+                <a:r>
+                  <a:rPr lang="de-DE" sz="2600" dirty="0" err="1"/>
+                  <a:t>distinguish</a:t>
+                </a:r>
+                <a:r>
+                  <a:rPr lang="de-DE" sz="2600" dirty="0"/>
+                  <a:t> </a:t>
+                </a:r>
+                <a:r>
+                  <a:rPr lang="de-DE" sz="2600" dirty="0" err="1"/>
+                  <a:t>between</a:t>
+                </a:r>
+                <a:r>
+                  <a:rPr lang="de-DE" sz="2600" dirty="0"/>
+                  <a:t> fast </a:t>
+                </a:r>
+                <a:r>
+                  <a:rPr lang="de-DE" sz="2600" dirty="0" err="1"/>
+                  <a:t>oscillations</a:t>
+                </a:r>
+                <a:r>
+                  <a:rPr lang="de-DE" sz="2600" dirty="0"/>
+                  <a:t> and slow </a:t>
+                </a:r>
+                <a:r>
+                  <a:rPr lang="de-DE" sz="2600" dirty="0" err="1"/>
+                  <a:t>drift</a:t>
+                </a:r>
+                <a:endParaRPr lang="de-DE" sz="2600" dirty="0"/>
+              </a:p>
+              <a:p>
+                <a:r>
+                  <a:rPr lang="de-DE" sz="2600" dirty="0" err="1"/>
+                  <a:t>Requires</a:t>
+                </a:r>
+                <a:r>
+                  <a:rPr lang="de-DE" sz="2600" dirty="0"/>
+                  <a:t> a </a:t>
+                </a:r>
+                <a:r>
+                  <a:rPr lang="de-DE" sz="2600" dirty="0" err="1"/>
+                  <a:t>defined</a:t>
+                </a:r>
+                <a:r>
+                  <a:rPr lang="de-DE" sz="2600" dirty="0"/>
+                  <a:t> </a:t>
+                </a:r>
+                <a:r>
+                  <a:rPr lang="de-DE" sz="2600" dirty="0" err="1"/>
+                  <a:t>evaluation</a:t>
+                </a:r>
+                <a:r>
+                  <a:rPr lang="de-DE" sz="2600" dirty="0"/>
+                  <a:t> time </a:t>
+                </a:r>
+                <a:r>
+                  <a:rPr lang="de-DE" sz="2600" dirty="0" err="1"/>
+                  <a:t>window</a:t>
+                </a:r>
+                <a:endParaRPr lang="de-DE" sz="2600" dirty="0"/>
+              </a:p>
+            </p:txBody>
+          </p:sp>
+        </mc:Choice>
+        <mc:Fallback>
+          <p:sp>
+            <p:nvSpPr>
+              <p:cNvPr id="3" name="Inhaltsplatzhalter 2">
+                <a:extLst>
+                  <a:ext uri="{FF2B5EF4-FFF2-40B4-BE49-F238E27FC236}">
+                    <a16:creationId xmlns:a16="http://schemas.microsoft.com/office/drawing/2014/main" id="{ACECE7EE-5665-B2A1-8E8D-1C38701BD968}"/>
+                  </a:ext>
+                </a:extLst>
+              </p:cNvPr>
+              <p:cNvSpPr>
+                <a:spLocks noGrp="1" noRot="1" noChangeAspect="1" noMove="1" noResize="1" noEditPoints="1" noAdjustHandles="1" noChangeArrowheads="1" noChangeShapeType="1" noTextEdit="1"/>
+              </p:cNvSpPr>
+              <p:nvPr>
+                <p:ph idx="1"/>
+              </p:nvPr>
+            </p:nvSpPr>
+            <p:spPr>
+              <a:blipFill>
+                <a:blip r:embed="rId2"/>
+                <a:stretch>
+                  <a:fillRect l="-1086" t="-2035"/>
+                </a:stretch>
+              </a:blipFill>
+            </p:spPr>
+            <p:txBody>
+              <a:bodyPr/>
+              <a:lstStyle/>
+              <a:p>
+                <a:r>
+                  <a:rPr lang="de-DE">
+                    <a:noFill/>
+                  </a:rPr>
+                  <a:t> </a:t>
+                </a:r>
+              </a:p>
+            </p:txBody>
+          </p:sp>
+        </mc:Fallback>
+      </mc:AlternateContent>
+      <p:sp>
+        <p:nvSpPr>
+          <p:cNvPr id="4" name="Foliennummernplatzhalter 3">
+            <a:extLst>
+              <a:ext uri="{FF2B5EF4-FFF2-40B4-BE49-F238E27FC236}">
+                <a16:creationId xmlns:a16="http://schemas.microsoft.com/office/drawing/2014/main" id="{4A283222-7F08-29EE-89CE-C725D989ECB6}"/>
+              </a:ext>
+            </a:extLst>
+          </p:cNvPr>
+          <p:cNvSpPr>
+            <a:spLocks noGrp="1"/>
+          </p:cNvSpPr>
+          <p:nvPr>
+            <p:ph type="sldNum" sz="quarter" idx="12"/>
+          </p:nvPr>
+        </p:nvSpPr>
+        <p:spPr/>
+        <p:txBody>
+          <a:bodyPr/>
+          <a:lstStyle/>
+          <a:p>
+            <a:fld id="{08C366F5-AFAD-49CB-854A-9D9E238FCA13}" type="slidenum">
+              <a:rPr lang="en-GB" smtClean="0"/>
+              <a:t>17</a:t>
+            </a:fld>
+            <a:endParaRPr lang="en-GB"/>
+          </a:p>
+        </p:txBody>
+      </p:sp>
+      <p:sp>
+        <p:nvSpPr>
+          <p:cNvPr id="5" name="Textfeld 4">
+            <a:extLst>
+              <a:ext uri="{FF2B5EF4-FFF2-40B4-BE49-F238E27FC236}">
+                <a16:creationId xmlns:a16="http://schemas.microsoft.com/office/drawing/2014/main" id="{010418D4-9C6C-6A85-6838-8607CBD90DE0}"/>
+              </a:ext>
+            </a:extLst>
+          </p:cNvPr>
+          <p:cNvSpPr txBox="1"/>
+          <p:nvPr/>
+        </p:nvSpPr>
+        <p:spPr>
+          <a:xfrm>
+            <a:off x="7441221" y="1852930"/>
+            <a:ext cx="2297873" cy="461665"/>
+          </a:xfrm>
+          <a:prstGeom prst="rect">
+            <a:avLst/>
+          </a:prstGeom>
+          <a:noFill/>
+        </p:spPr>
+        <p:txBody>
+          <a:bodyPr wrap="none" rtlCol="0">
+            <a:spAutoFit/>
+          </a:bodyPr>
+          <a:lstStyle/>
+          <a:p>
+            <a:r>
+              <a:rPr lang="de-DE" sz="2400" dirty="0" err="1"/>
+              <a:t>reference</a:t>
+            </a:r>
+            <a:r>
+              <a:rPr lang="de-DE" sz="2400" dirty="0"/>
+              <a:t> </a:t>
+            </a:r>
+            <a:r>
+              <a:rPr lang="de-DE" sz="2400" dirty="0" err="1"/>
+              <a:t>signal</a:t>
+            </a:r>
+            <a:endParaRPr lang="de-DE" sz="2400" dirty="0"/>
+          </a:p>
+        </p:txBody>
+      </p:sp>
+      <p:sp>
+        <p:nvSpPr>
+          <p:cNvPr id="6" name="Textfeld 5">
+            <a:extLst>
+              <a:ext uri="{FF2B5EF4-FFF2-40B4-BE49-F238E27FC236}">
+                <a16:creationId xmlns:a16="http://schemas.microsoft.com/office/drawing/2014/main" id="{830BCDD8-ADE1-A91F-7730-F97885685CAE}"/>
+              </a:ext>
+            </a:extLst>
+          </p:cNvPr>
+          <p:cNvSpPr txBox="1"/>
+          <p:nvPr/>
+        </p:nvSpPr>
+        <p:spPr>
+          <a:xfrm>
+            <a:off x="7818120" y="3681869"/>
+            <a:ext cx="2084994" cy="461665"/>
+          </a:xfrm>
+          <a:prstGeom prst="rect">
+            <a:avLst/>
+          </a:prstGeom>
+          <a:noFill/>
+        </p:spPr>
+        <p:txBody>
+          <a:bodyPr wrap="none" rtlCol="0">
+            <a:spAutoFit/>
+          </a:bodyPr>
+          <a:lstStyle/>
+          <a:p>
+            <a:r>
+              <a:rPr lang="de-DE" sz="2400" dirty="0" err="1"/>
+              <a:t>system</a:t>
+            </a:r>
+            <a:r>
+              <a:rPr lang="de-DE" sz="2400" dirty="0"/>
+              <a:t> </a:t>
+            </a:r>
+            <a:r>
+              <a:rPr lang="de-DE" sz="2400" dirty="0" err="1"/>
+              <a:t>output</a:t>
+            </a:r>
+            <a:endParaRPr lang="de-DE" sz="2400" dirty="0"/>
+          </a:p>
+        </p:txBody>
+      </p:sp>
+      <p:cxnSp>
+        <p:nvCxnSpPr>
+          <p:cNvPr id="8" name="Gerade Verbindung mit Pfeil 7">
+            <a:extLst>
+              <a:ext uri="{FF2B5EF4-FFF2-40B4-BE49-F238E27FC236}">
+                <a16:creationId xmlns:a16="http://schemas.microsoft.com/office/drawing/2014/main" id="{73BE7460-FA2C-027B-D78F-049D01C68FEB}"/>
+              </a:ext>
+            </a:extLst>
+          </p:cNvPr>
+          <p:cNvCxnSpPr>
+            <a:cxnSpLocks/>
+            <a:stCxn id="5" idx="2"/>
+          </p:cNvCxnSpPr>
+          <p:nvPr/>
+        </p:nvCxnSpPr>
+        <p:spPr>
+          <a:xfrm flipH="1">
+            <a:off x="7818120" y="2314595"/>
+            <a:ext cx="772038" cy="438765"/>
+          </a:xfrm>
+          <a:prstGeom prst="straightConnector1">
+            <a:avLst/>
+          </a:prstGeom>
+          <a:ln>
+            <a:tailEnd type="triangle"/>
+          </a:ln>
+        </p:spPr>
+        <p:style>
+          <a:lnRef idx="2">
+            <a:schemeClr val="accent1"/>
+          </a:lnRef>
+          <a:fillRef idx="0">
+            <a:schemeClr val="accent1"/>
+          </a:fillRef>
+          <a:effectRef idx="1">
+            <a:schemeClr val="accent1"/>
+          </a:effectRef>
+          <a:fontRef idx="minor">
+            <a:schemeClr val="tx1"/>
+          </a:fontRef>
+        </p:style>
+      </p:cxnSp>
+      <p:cxnSp>
+        <p:nvCxnSpPr>
+          <p:cNvPr id="10" name="Gerade Verbindung mit Pfeil 9">
+            <a:extLst>
+              <a:ext uri="{FF2B5EF4-FFF2-40B4-BE49-F238E27FC236}">
+                <a16:creationId xmlns:a16="http://schemas.microsoft.com/office/drawing/2014/main" id="{736FD56C-BF2E-B2B4-F249-4138DA102A13}"/>
+              </a:ext>
+            </a:extLst>
+          </p:cNvPr>
+          <p:cNvCxnSpPr>
+            <a:stCxn id="6" idx="0"/>
+          </p:cNvCxnSpPr>
+          <p:nvPr/>
+        </p:nvCxnSpPr>
+        <p:spPr>
+          <a:xfrm flipH="1" flipV="1">
+            <a:off x="8590158" y="3230880"/>
+            <a:ext cx="270459" cy="450989"/>
+          </a:xfrm>
+          <a:prstGeom prst="straightConnector1">
+            <a:avLst/>
+          </a:prstGeom>
+          <a:ln>
+            <a:tailEnd type="triangle"/>
+          </a:ln>
+        </p:spPr>
+        <p:style>
+          <a:lnRef idx="2">
+            <a:schemeClr val="accent1"/>
+          </a:lnRef>
+          <a:fillRef idx="0">
+            <a:schemeClr val="accent1"/>
+          </a:fillRef>
+          <a:effectRef idx="1">
+            <a:schemeClr val="accent1"/>
+          </a:effectRef>
+          <a:fontRef idx="minor">
+            <a:schemeClr val="tx1"/>
+          </a:fontRef>
+        </p:style>
+      </p:cxnSp>
+    </p:spTree>
+    <p:extLst>
+      <p:ext uri="{BB962C8B-B14F-4D97-AF65-F5344CB8AC3E}">
+        <p14:creationId xmlns:p14="http://schemas.microsoft.com/office/powerpoint/2010/main" val="1081946494"/>
+      </p:ext>
+    </p:extLst>
+  </p:cSld>
+  <p:clrMapOvr>
+    <a:masterClrMapping/>
+  </p:clrMapOvr>
+</p:sld>
+</file>
+
+<file path=ppt/slides/slide18.xml><?xml version="1.0" encoding="utf-8"?>
 <p:sld xmlns:a="http://schemas.openxmlformats.org/drawingml/2006/main" xmlns:r="http://schemas.openxmlformats.org/officeDocument/2006/relationships" xmlns:p="http://schemas.openxmlformats.org/presentationml/2006/main">
   <p:cSld>
     <p:spTree>
@@ -5925,7 +11031,7 @@
           <a:p>
             <a:fld id="{08C366F5-AFAD-49CB-854A-9D9E238FCA13}" type="slidenum">
               <a:rPr lang="en-GB" smtClean="0"/>
-              <a:t>16</a:t>
+              <a:t>18</a:t>
             </a:fld>
             <a:endParaRPr lang="en-GB"/>
           </a:p>
@@ -5944,7 +11050,7 @@
 </p:sld>
 </file>
 
-<file path=ppt/slides/slide17.xml><?xml version="1.0" encoding="utf-8"?>
+<file path=ppt/slides/slide19.xml><?xml version="1.0" encoding="utf-8"?>
 <p:sld xmlns:a="http://schemas.openxmlformats.org/drawingml/2006/main" xmlns:r="http://schemas.openxmlformats.org/officeDocument/2006/relationships" xmlns:p="http://schemas.openxmlformats.org/presentationml/2006/main">
   <p:cSld>
     <p:spTree>
@@ -6084,7 +11190,7 @@
           <a:p>
             <a:fld id="{08C366F5-AFAD-49CB-854A-9D9E238FCA13}" type="slidenum">
               <a:rPr lang="en-GB" smtClean="0"/>
-              <a:t>17</a:t>
+              <a:t>19</a:t>
             </a:fld>
             <a:endParaRPr lang="en-GB"/>
           </a:p>
@@ -6094,118 +11200,6 @@
     <p:extLst>
       <p:ext uri="{BB962C8B-B14F-4D97-AF65-F5344CB8AC3E}">
         <p14:creationId xmlns:p14="http://schemas.microsoft.com/office/powerpoint/2010/main" val="2529282098"/>
-      </p:ext>
-    </p:extLst>
-  </p:cSld>
-  <p:clrMapOvr>
-    <a:masterClrMapping/>
-  </p:clrMapOvr>
-</p:sld>
-</file>
-
-<file path=ppt/slides/slide18.xml><?xml version="1.0" encoding="utf-8"?>
-<p:sld xmlns:a="http://schemas.openxmlformats.org/drawingml/2006/main" xmlns:r="http://schemas.openxmlformats.org/officeDocument/2006/relationships" xmlns:p="http://schemas.openxmlformats.org/presentationml/2006/main">
-  <p:cSld>
-    <p:spTree>
-      <p:nvGrpSpPr>
-        <p:cNvPr id="1" name=""/>
-        <p:cNvGrpSpPr/>
-        <p:nvPr/>
-      </p:nvGrpSpPr>
-      <p:grpSpPr>
-        <a:xfrm>
-          <a:off x="0" y="0"/>
-          <a:ext cx="0" cy="0"/>
-          <a:chOff x="0" y="0"/>
-          <a:chExt cx="0" cy="0"/>
-        </a:xfrm>
-      </p:grpSpPr>
-      <p:sp>
-        <p:nvSpPr>
-          <p:cNvPr id="2" name="Titel 1">
-            <a:extLst>
-              <a:ext uri="{FF2B5EF4-FFF2-40B4-BE49-F238E27FC236}">
-                <a16:creationId xmlns:a16="http://schemas.microsoft.com/office/drawing/2014/main" id="{4526C0AA-D9C3-34B4-74D2-760A494AEB0D}"/>
-              </a:ext>
-            </a:extLst>
-          </p:cNvPr>
-          <p:cNvSpPr>
-            <a:spLocks noGrp="1"/>
-          </p:cNvSpPr>
-          <p:nvPr>
-            <p:ph type="title"/>
-          </p:nvPr>
-        </p:nvSpPr>
-        <p:spPr/>
-        <p:txBody>
-          <a:bodyPr/>
-          <a:lstStyle/>
-          <a:p>
-            <a:r>
-              <a:rPr lang="de-DE" dirty="0"/>
-              <a:t>Cascade Control</a:t>
-            </a:r>
-          </a:p>
-        </p:txBody>
-      </p:sp>
-      <p:sp>
-        <p:nvSpPr>
-          <p:cNvPr id="3" name="Inhaltsplatzhalter 2">
-            <a:extLst>
-              <a:ext uri="{FF2B5EF4-FFF2-40B4-BE49-F238E27FC236}">
-                <a16:creationId xmlns:a16="http://schemas.microsoft.com/office/drawing/2014/main" id="{523AC845-AEF8-1D08-A3FD-8EE28F4C9D4E}"/>
-              </a:ext>
-            </a:extLst>
-          </p:cNvPr>
-          <p:cNvSpPr>
-            <a:spLocks noGrp="1"/>
-          </p:cNvSpPr>
-          <p:nvPr>
-            <p:ph idx="1"/>
-          </p:nvPr>
-        </p:nvSpPr>
-        <p:spPr/>
-        <p:txBody>
-          <a:bodyPr/>
-          <a:lstStyle/>
-          <a:p>
-            <a:endParaRPr lang="de-DE"/>
-          </a:p>
-        </p:txBody>
-      </p:sp>
-      <p:sp>
-        <p:nvSpPr>
-          <p:cNvPr id="4" name="Foliennummernplatzhalter 3">
-            <a:extLst>
-              <a:ext uri="{FF2B5EF4-FFF2-40B4-BE49-F238E27FC236}">
-                <a16:creationId xmlns:a16="http://schemas.microsoft.com/office/drawing/2014/main" id="{E689E192-E06F-6B6D-EA9D-F53924D4324F}"/>
-              </a:ext>
-            </a:extLst>
-          </p:cNvPr>
-          <p:cNvSpPr>
-            <a:spLocks noGrp="1"/>
-          </p:cNvSpPr>
-          <p:nvPr>
-            <p:ph type="sldNum" sz="quarter" idx="12"/>
-          </p:nvPr>
-        </p:nvSpPr>
-        <p:spPr/>
-        <p:txBody>
-          <a:bodyPr/>
-          <a:lstStyle/>
-          <a:p>
-            <a:fld id="{08C366F5-AFAD-49CB-854A-9D9E238FCA13}" type="slidenum">
-              <a:rPr lang="en-GB" smtClean="0"/>
-              <a:t>18</a:t>
-            </a:fld>
-            <a:endParaRPr lang="en-GB"/>
-          </a:p>
-        </p:txBody>
-      </p:sp>
-    </p:spTree>
-    <p:extLst>
-      <p:ext uri="{BB962C8B-B14F-4D97-AF65-F5344CB8AC3E}">
-        <p14:creationId xmlns:p14="http://schemas.microsoft.com/office/powerpoint/2010/main" val="101948529"/>
       </p:ext>
     </p:extLst>
   </p:cSld>
@@ -6485,6 +11479,118 @@
     <p:extLst>
       <p:ext uri="{BB962C8B-B14F-4D97-AF65-F5344CB8AC3E}">
         <p14:creationId xmlns:p14="http://schemas.microsoft.com/office/powerpoint/2010/main" val="310336692"/>
+      </p:ext>
+    </p:extLst>
+  </p:cSld>
+  <p:clrMapOvr>
+    <a:masterClrMapping/>
+  </p:clrMapOvr>
+</p:sld>
+</file>
+
+<file path=ppt/slides/slide20.xml><?xml version="1.0" encoding="utf-8"?>
+<p:sld xmlns:a="http://schemas.openxmlformats.org/drawingml/2006/main" xmlns:r="http://schemas.openxmlformats.org/officeDocument/2006/relationships" xmlns:p="http://schemas.openxmlformats.org/presentationml/2006/main">
+  <p:cSld>
+    <p:spTree>
+      <p:nvGrpSpPr>
+        <p:cNvPr id="1" name=""/>
+        <p:cNvGrpSpPr/>
+        <p:nvPr/>
+      </p:nvGrpSpPr>
+      <p:grpSpPr>
+        <a:xfrm>
+          <a:off x="0" y="0"/>
+          <a:ext cx="0" cy="0"/>
+          <a:chOff x="0" y="0"/>
+          <a:chExt cx="0" cy="0"/>
+        </a:xfrm>
+      </p:grpSpPr>
+      <p:sp>
+        <p:nvSpPr>
+          <p:cNvPr id="2" name="Titel 1">
+            <a:extLst>
+              <a:ext uri="{FF2B5EF4-FFF2-40B4-BE49-F238E27FC236}">
+                <a16:creationId xmlns:a16="http://schemas.microsoft.com/office/drawing/2014/main" id="{4526C0AA-D9C3-34B4-74D2-760A494AEB0D}"/>
+              </a:ext>
+            </a:extLst>
+          </p:cNvPr>
+          <p:cNvSpPr>
+            <a:spLocks noGrp="1"/>
+          </p:cNvSpPr>
+          <p:nvPr>
+            <p:ph type="title"/>
+          </p:nvPr>
+        </p:nvSpPr>
+        <p:spPr/>
+        <p:txBody>
+          <a:bodyPr/>
+          <a:lstStyle/>
+          <a:p>
+            <a:r>
+              <a:rPr lang="de-DE" dirty="0"/>
+              <a:t>Cascade Control</a:t>
+            </a:r>
+          </a:p>
+        </p:txBody>
+      </p:sp>
+      <p:sp>
+        <p:nvSpPr>
+          <p:cNvPr id="3" name="Inhaltsplatzhalter 2">
+            <a:extLst>
+              <a:ext uri="{FF2B5EF4-FFF2-40B4-BE49-F238E27FC236}">
+                <a16:creationId xmlns:a16="http://schemas.microsoft.com/office/drawing/2014/main" id="{523AC845-AEF8-1D08-A3FD-8EE28F4C9D4E}"/>
+              </a:ext>
+            </a:extLst>
+          </p:cNvPr>
+          <p:cNvSpPr>
+            <a:spLocks noGrp="1"/>
+          </p:cNvSpPr>
+          <p:nvPr>
+            <p:ph idx="1"/>
+          </p:nvPr>
+        </p:nvSpPr>
+        <p:spPr/>
+        <p:txBody>
+          <a:bodyPr/>
+          <a:lstStyle/>
+          <a:p>
+            <a:endParaRPr lang="de-DE"/>
+          </a:p>
+        </p:txBody>
+      </p:sp>
+      <p:sp>
+        <p:nvSpPr>
+          <p:cNvPr id="4" name="Foliennummernplatzhalter 3">
+            <a:extLst>
+              <a:ext uri="{FF2B5EF4-FFF2-40B4-BE49-F238E27FC236}">
+                <a16:creationId xmlns:a16="http://schemas.microsoft.com/office/drawing/2014/main" id="{E689E192-E06F-6B6D-EA9D-F53924D4324F}"/>
+              </a:ext>
+            </a:extLst>
+          </p:cNvPr>
+          <p:cNvSpPr>
+            <a:spLocks noGrp="1"/>
+          </p:cNvSpPr>
+          <p:nvPr>
+            <p:ph type="sldNum" sz="quarter" idx="12"/>
+          </p:nvPr>
+        </p:nvSpPr>
+        <p:spPr/>
+        <p:txBody>
+          <a:bodyPr/>
+          <a:lstStyle/>
+          <a:p>
+            <a:fld id="{08C366F5-AFAD-49CB-854A-9D9E238FCA13}" type="slidenum">
+              <a:rPr lang="en-GB" smtClean="0"/>
+              <a:t>20</a:t>
+            </a:fld>
+            <a:endParaRPr lang="en-GB"/>
+          </a:p>
+        </p:txBody>
+      </p:sp>
+    </p:spTree>
+    <p:extLst>
+      <p:ext uri="{BB962C8B-B14F-4D97-AF65-F5344CB8AC3E}">
+        <p14:creationId xmlns:p14="http://schemas.microsoft.com/office/powerpoint/2010/main" val="101948529"/>
       </p:ext>
     </p:extLst>
   </p:cSld>

--- a/slides/5_controller_design.pptx
+++ b/slides/5_controller_design.pptx
@@ -9748,6 +9748,221 @@
           </a:p>
         </p:txBody>
       </p:sp>
+      <mc:AlternateContent xmlns:mc="http://schemas.openxmlformats.org/markup-compatibility/2006">
+        <mc:Choice xmlns:a14="http://schemas.microsoft.com/office/drawing/2010/main" Requires="a14">
+          <p:sp>
+            <p:nvSpPr>
+              <p:cNvPr id="6" name="Textfeld 5">
+                <a:extLst>
+                  <a:ext uri="{FF2B5EF4-FFF2-40B4-BE49-F238E27FC236}">
+                    <a16:creationId xmlns:a16="http://schemas.microsoft.com/office/drawing/2014/main" id="{06645750-740B-7872-739A-7EEB1CFD5D0A}"/>
+                  </a:ext>
+                </a:extLst>
+              </p:cNvPr>
+              <p:cNvSpPr txBox="1"/>
+              <p:nvPr/>
+            </p:nvSpPr>
+            <p:spPr>
+              <a:xfrm>
+                <a:off x="6156960" y="365125"/>
+                <a:ext cx="5196840" cy="769441"/>
+              </a:xfrm>
+              <a:prstGeom prst="rect">
+                <a:avLst/>
+              </a:prstGeom>
+              <a:noFill/>
+            </p:spPr>
+            <p:txBody>
+              <a:bodyPr wrap="square">
+                <a:spAutoFit/>
+              </a:bodyPr>
+              <a:lstStyle/>
+              <a:p>
+                <a:pPr>
+                  <a:buNone/>
+                </a:pPr>
+                <a14:m>
+                  <m:oMath xmlns:m="http://schemas.openxmlformats.org/officeDocument/2006/math">
+                    <m:r>
+                      <a:rPr lang="de-DE" sz="2200" i="1" smtClean="0">
+                        <a:latin typeface="Cambria Math" panose="02040503050406030204" pitchFamily="18" charset="0"/>
+                      </a:rPr>
+                      <m:t>𝑆</m:t>
+                    </m:r>
+                    <m:d>
+                      <m:dPr>
+                        <m:ctrlPr>
+                          <a:rPr lang="de-DE" sz="2200" i="1">
+                            <a:latin typeface="Cambria Math" panose="02040503050406030204" pitchFamily="18" charset="0"/>
+                          </a:rPr>
+                        </m:ctrlPr>
+                      </m:dPr>
+                      <m:e>
+                        <m:r>
+                          <a:rPr lang="de-DE" sz="2200" i="1">
+                            <a:latin typeface="Cambria Math" panose="02040503050406030204" pitchFamily="18" charset="0"/>
+                          </a:rPr>
+                          <m:t>𝑠</m:t>
+                        </m:r>
+                      </m:e>
+                    </m:d>
+                  </m:oMath>
+                </a14:m>
+                <a:r>
+                  <a:rPr lang="de-DE" sz="2200" dirty="0"/>
+                  <a:t>: </a:t>
+                </a:r>
+                <a:r>
+                  <a:rPr lang="de-DE" sz="2200" dirty="0" err="1"/>
+                  <a:t>how</a:t>
+                </a:r>
+                <a:r>
+                  <a:rPr lang="de-DE" sz="2200" dirty="0"/>
+                  <a:t> </a:t>
+                </a:r>
+                <a:r>
+                  <a:rPr lang="de-DE" sz="2200" dirty="0" err="1"/>
+                  <a:t>disturbances</a:t>
+                </a:r>
+                <a:r>
+                  <a:rPr lang="de-DE" sz="2200" dirty="0"/>
+                  <a:t> </a:t>
+                </a:r>
+                <a:r>
+                  <a:rPr lang="de-DE" sz="2200" dirty="0" err="1"/>
+                  <a:t>affect</a:t>
+                </a:r>
+                <a:r>
+                  <a:rPr lang="de-DE" sz="2200" dirty="0"/>
+                  <a:t> </a:t>
+                </a:r>
+                <a:r>
+                  <a:rPr lang="de-DE" sz="2200" dirty="0" err="1"/>
+                  <a:t>the</a:t>
+                </a:r>
+                <a:r>
+                  <a:rPr lang="de-DE" sz="2200" dirty="0"/>
+                  <a:t> </a:t>
+                </a:r>
+                <a:r>
+                  <a:rPr lang="de-DE" sz="2200" dirty="0" err="1"/>
+                  <a:t>output</a:t>
+                </a:r>
+                <a:endParaRPr lang="de-DE" sz="2200" dirty="0"/>
+              </a:p>
+              <a:p>
+                <a:pPr>
+                  <a:buNone/>
+                </a:pPr>
+                <a14:m>
+                  <m:oMath xmlns:m="http://schemas.openxmlformats.org/officeDocument/2006/math">
+                    <m:r>
+                      <a:rPr lang="de-DE" sz="2200" b="0" i="1" smtClean="0">
+                        <a:latin typeface="Cambria Math" panose="02040503050406030204" pitchFamily="18" charset="0"/>
+                      </a:rPr>
+                      <m:t>𝑇</m:t>
+                    </m:r>
+                    <m:d>
+                      <m:dPr>
+                        <m:ctrlPr>
+                          <a:rPr lang="de-DE" sz="2200" i="1">
+                            <a:latin typeface="Cambria Math" panose="02040503050406030204" pitchFamily="18" charset="0"/>
+                          </a:rPr>
+                        </m:ctrlPr>
+                      </m:dPr>
+                      <m:e>
+                        <m:r>
+                          <a:rPr lang="de-DE" sz="2200" i="1">
+                            <a:latin typeface="Cambria Math" panose="02040503050406030204" pitchFamily="18" charset="0"/>
+                          </a:rPr>
+                          <m:t>𝑠</m:t>
+                        </m:r>
+                      </m:e>
+                    </m:d>
+                  </m:oMath>
+                </a14:m>
+                <a:r>
+                  <a:rPr lang="de-DE" sz="2200" dirty="0"/>
+                  <a:t>: </a:t>
+                </a:r>
+                <a:r>
+                  <a:rPr lang="de-DE" sz="2200" dirty="0" err="1"/>
+                  <a:t>how</a:t>
+                </a:r>
+                <a:r>
+                  <a:rPr lang="de-DE" sz="2200" dirty="0"/>
+                  <a:t> </a:t>
+                </a:r>
+                <a:r>
+                  <a:rPr lang="de-DE" sz="2200" dirty="0" err="1"/>
+                  <a:t>reference</a:t>
+                </a:r>
+                <a:r>
+                  <a:rPr lang="de-DE" sz="2200" dirty="0"/>
+                  <a:t> and </a:t>
+                </a:r>
+                <a:r>
+                  <a:rPr lang="de-DE" sz="2200" dirty="0" err="1"/>
+                  <a:t>noise</a:t>
+                </a:r>
+                <a:r>
+                  <a:rPr lang="de-DE" sz="2200" dirty="0"/>
+                  <a:t> </a:t>
+                </a:r>
+                <a:r>
+                  <a:rPr lang="de-DE" sz="2200" dirty="0" err="1"/>
+                  <a:t>propagate</a:t>
+                </a:r>
+                <a:endParaRPr lang="de-DE" sz="2200" dirty="0"/>
+              </a:p>
+            </p:txBody>
+          </p:sp>
+        </mc:Choice>
+        <mc:Fallback>
+          <p:sp>
+            <p:nvSpPr>
+              <p:cNvPr id="6" name="Textfeld 5">
+                <a:extLst>
+                  <a:ext uri="{FF2B5EF4-FFF2-40B4-BE49-F238E27FC236}">
+                    <a16:creationId xmlns:a16="http://schemas.microsoft.com/office/drawing/2014/main" id="{06645750-740B-7872-739A-7EEB1CFD5D0A}"/>
+                  </a:ext>
+                </a:extLst>
+              </p:cNvPr>
+              <p:cNvSpPr txBox="1">
+                <a:spLocks noRot="1" noChangeAspect="1" noMove="1" noResize="1" noEditPoints="1" noAdjustHandles="1" noChangeArrowheads="1" noChangeShapeType="1" noTextEdit="1"/>
+              </p:cNvSpPr>
+              <p:nvPr/>
+            </p:nvSpPr>
+            <p:spPr>
+              <a:xfrm>
+                <a:off x="6156960" y="365125"/>
+                <a:ext cx="5196840" cy="769441"/>
+              </a:xfrm>
+              <a:prstGeom prst="rect">
+                <a:avLst/>
+              </a:prstGeom>
+              <a:blipFill>
+                <a:blip r:embed="rId3"/>
+                <a:stretch>
+                  <a:fillRect t="-4839" b="-14516"/>
+                </a:stretch>
+              </a:blipFill>
+            </p:spPr>
+            <p:txBody>
+              <a:bodyPr/>
+              <a:lstStyle/>
+              <a:p>
+                <a:r>
+                  <a:rPr lang="de-DE">
+                    <a:noFill/>
+                  </a:rPr>
+                  <a:t> </a:t>
+                </a:r>
+              </a:p>
+            </p:txBody>
+          </p:sp>
+        </mc:Fallback>
+      </mc:AlternateContent>
     </p:spTree>
     <p:extLst>
       <p:ext uri="{BB962C8B-B14F-4D97-AF65-F5344CB8AC3E}">
@@ -11372,121 +11587,339 @@
             </a:r>
             <a:r>
               <a:rPr lang="de-DE" dirty="0"/>
-              <a:t> Loop Shaping Approach</a:t>
+              <a:t> Loop Shaping Workflow</a:t>
             </a:r>
           </a:p>
         </p:txBody>
       </p:sp>
-      <p:sp>
-        <p:nvSpPr>
-          <p:cNvPr id="3" name="Inhaltsplatzhalter 2">
-            <a:extLst>
-              <a:ext uri="{FF2B5EF4-FFF2-40B4-BE49-F238E27FC236}">
-                <a16:creationId xmlns:a16="http://schemas.microsoft.com/office/drawing/2014/main" id="{6914AE74-D0FB-9E3A-A44D-F505D1E09498}"/>
-              </a:ext>
-            </a:extLst>
-          </p:cNvPr>
-          <p:cNvSpPr>
-            <a:spLocks noGrp="1"/>
-          </p:cNvSpPr>
-          <p:nvPr>
-            <p:ph idx="1"/>
-          </p:nvPr>
-        </p:nvSpPr>
-        <p:spPr/>
-        <p:txBody>
-          <a:bodyPr/>
-          <a:lstStyle/>
-          <a:p>
-            <a:r>
-              <a:rPr lang="de-DE" dirty="0" err="1"/>
-              <a:t>adjust</a:t>
-            </a:r>
-            <a:r>
-              <a:rPr lang="de-DE" dirty="0"/>
-              <a:t> </a:t>
-            </a:r>
-            <a:r>
-              <a:rPr lang="de-DE" dirty="0" err="1"/>
-              <a:t>controller</a:t>
-            </a:r>
-            <a:r>
-              <a:rPr lang="de-DE" dirty="0"/>
-              <a:t> </a:t>
-            </a:r>
-            <a:r>
-              <a:rPr lang="de-DE" dirty="0" err="1"/>
-              <a:t>gain</a:t>
-            </a:r>
-            <a:endParaRPr lang="de-DE" dirty="0"/>
-          </a:p>
-          <a:p>
-            <a:r>
-              <a:rPr lang="de-DE" dirty="0" err="1"/>
-              <a:t>add</a:t>
-            </a:r>
-            <a:r>
-              <a:rPr lang="de-DE" dirty="0"/>
-              <a:t> </a:t>
-            </a:r>
-            <a:r>
-              <a:rPr lang="de-DE" dirty="0" err="1"/>
-              <a:t>lead</a:t>
-            </a:r>
-            <a:r>
-              <a:rPr lang="de-DE" dirty="0"/>
-              <a:t>/lag </a:t>
-            </a:r>
-            <a:r>
-              <a:rPr lang="de-DE" dirty="0" err="1"/>
-              <a:t>compensators</a:t>
-            </a:r>
-            <a:endParaRPr lang="de-DE" dirty="0"/>
-          </a:p>
-          <a:p>
-            <a:r>
-              <a:rPr lang="de-DE" dirty="0"/>
-              <a:t>check </a:t>
-            </a:r>
-            <a:r>
-              <a:rPr lang="de-DE" dirty="0" err="1"/>
-              <a:t>gain</a:t>
-            </a:r>
-            <a:r>
-              <a:rPr lang="de-DE" dirty="0"/>
-              <a:t> &amp; </a:t>
-            </a:r>
-            <a:r>
-              <a:rPr lang="de-DE" dirty="0" err="1"/>
-              <a:t>phase</a:t>
-            </a:r>
-            <a:r>
-              <a:rPr lang="de-DE" dirty="0"/>
-              <a:t> </a:t>
-            </a:r>
-            <a:r>
-              <a:rPr lang="de-DE" dirty="0" err="1"/>
-              <a:t>margins</a:t>
-            </a:r>
-            <a:endParaRPr lang="de-DE" dirty="0"/>
-          </a:p>
-          <a:p>
-            <a:pPr marL="0" indent="0">
-              <a:buNone/>
-            </a:pPr>
-            <a:endParaRPr lang="de-DE" dirty="0"/>
-          </a:p>
-          <a:p>
-            <a:pPr marL="0" indent="0">
-              <a:buNone/>
-            </a:pPr>
-            <a:r>
-              <a:rPr lang="de-DE" dirty="0"/>
-              <a:t>…</a:t>
-            </a:r>
-          </a:p>
-        </p:txBody>
-      </p:sp>
+      <mc:AlternateContent xmlns:mc="http://schemas.openxmlformats.org/markup-compatibility/2006">
+        <mc:Choice xmlns:a14="http://schemas.microsoft.com/office/drawing/2010/main" Requires="a14">
+          <p:sp>
+            <p:nvSpPr>
+              <p:cNvPr id="3" name="Inhaltsplatzhalter 2">
+                <a:extLst>
+                  <a:ext uri="{FF2B5EF4-FFF2-40B4-BE49-F238E27FC236}">
+                    <a16:creationId xmlns:a16="http://schemas.microsoft.com/office/drawing/2014/main" id="{6914AE74-D0FB-9E3A-A44D-F505D1E09498}"/>
+                  </a:ext>
+                </a:extLst>
+              </p:cNvPr>
+              <p:cNvSpPr>
+                <a:spLocks noGrp="1"/>
+              </p:cNvSpPr>
+              <p:nvPr>
+                <p:ph idx="1"/>
+              </p:nvPr>
+            </p:nvSpPr>
+            <p:spPr/>
+            <p:txBody>
+              <a:bodyPr>
+                <a:normAutofit/>
+              </a:bodyPr>
+              <a:lstStyle/>
+              <a:p>
+                <a:r>
+                  <a:rPr lang="de-DE" dirty="0"/>
+                  <a:t>Analyze plant </a:t>
+                </a:r>
+                <a:r>
+                  <a:rPr lang="de-DE" dirty="0" err="1"/>
+                  <a:t>frequency</a:t>
+                </a:r>
+                <a:r>
+                  <a:rPr lang="de-DE" dirty="0"/>
+                  <a:t> </a:t>
+                </a:r>
+                <a:r>
+                  <a:rPr lang="de-DE" dirty="0" err="1"/>
+                  <a:t>response</a:t>
+                </a:r>
+                <a:r>
+                  <a:rPr lang="de-DE" dirty="0"/>
+                  <a:t> </a:t>
+                </a:r>
+                <a14:m>
+                  <m:oMath xmlns:m="http://schemas.openxmlformats.org/officeDocument/2006/math">
+                    <m:r>
+                      <a:rPr lang="de-DE" b="0" i="1" smtClean="0">
+                        <a:latin typeface="Cambria Math" panose="02040503050406030204" pitchFamily="18" charset="0"/>
+                      </a:rPr>
+                      <m:t>𝐺</m:t>
+                    </m:r>
+                    <m:d>
+                      <m:dPr>
+                        <m:ctrlPr>
+                          <a:rPr lang="de-DE" b="0" i="1" smtClean="0">
+                            <a:latin typeface="Cambria Math" panose="02040503050406030204" pitchFamily="18" charset="0"/>
+                          </a:rPr>
+                        </m:ctrlPr>
+                      </m:dPr>
+                      <m:e>
+                        <m:r>
+                          <a:rPr lang="de-DE" b="0" i="1" smtClean="0">
+                            <a:latin typeface="Cambria Math" panose="02040503050406030204" pitchFamily="18" charset="0"/>
+                          </a:rPr>
+                          <m:t>𝑗</m:t>
+                        </m:r>
+                        <m:r>
+                          <a:rPr lang="de-DE" b="0" i="1" smtClean="0">
+                            <a:latin typeface="Cambria Math" panose="02040503050406030204" pitchFamily="18" charset="0"/>
+                            <a:ea typeface="Cambria Math" panose="02040503050406030204" pitchFamily="18" charset="0"/>
+                          </a:rPr>
+                          <m:t>𝜔</m:t>
+                        </m:r>
+                      </m:e>
+                    </m:d>
+                  </m:oMath>
+                </a14:m>
+                <a:endParaRPr lang="de-DE" dirty="0"/>
+              </a:p>
+              <a:p>
+                <a:r>
+                  <a:rPr lang="de-DE" dirty="0" err="1"/>
+                  <a:t>Choose</a:t>
+                </a:r>
+                <a:r>
+                  <a:rPr lang="de-DE" dirty="0"/>
+                  <a:t> </a:t>
+                </a:r>
+                <a:r>
+                  <a:rPr lang="de-DE" dirty="0" err="1"/>
+                  <a:t>desired</a:t>
+                </a:r>
+                <a:r>
+                  <a:rPr lang="de-DE" dirty="0"/>
+                  <a:t> </a:t>
+                </a:r>
+                <a:r>
+                  <a:rPr lang="de-DE" dirty="0" err="1"/>
+                  <a:t>crossover</a:t>
+                </a:r>
+                <a:r>
+                  <a:rPr lang="de-DE" dirty="0"/>
+                  <a:t> </a:t>
+                </a:r>
+                <a:r>
+                  <a:rPr lang="de-DE" dirty="0" err="1"/>
+                  <a:t>frequency</a:t>
+                </a:r>
+                <a:r>
+                  <a:rPr lang="de-DE" dirty="0"/>
+                  <a:t> (</a:t>
+                </a:r>
+                <a:r>
+                  <a:rPr lang="de-DE" dirty="0" err="1"/>
+                  <a:t>bandwidth</a:t>
+                </a:r>
+                <a:r>
+                  <a:rPr lang="de-DE" dirty="0"/>
+                  <a:t>)</a:t>
+                </a:r>
+              </a:p>
+              <a:p>
+                <a:r>
+                  <a:rPr lang="de-DE" dirty="0" err="1"/>
+                  <a:t>Adjust</a:t>
+                </a:r>
+                <a:r>
+                  <a:rPr lang="de-DE" dirty="0"/>
+                  <a:t> </a:t>
+                </a:r>
+                <a:r>
+                  <a:rPr lang="de-DE" dirty="0" err="1"/>
+                  <a:t>controller</a:t>
+                </a:r>
+                <a:r>
+                  <a:rPr lang="de-DE" dirty="0"/>
+                  <a:t> </a:t>
+                </a:r>
+                <a:r>
+                  <a:rPr lang="de-DE" dirty="0" err="1"/>
+                  <a:t>gain</a:t>
+                </a:r>
+                <a:r>
+                  <a:rPr lang="de-DE" dirty="0"/>
+                  <a:t> </a:t>
+                </a:r>
+                <a:r>
+                  <a:rPr lang="de-DE" dirty="0" err="1"/>
+                  <a:t>to</a:t>
+                </a:r>
+                <a:r>
+                  <a:rPr lang="de-DE" dirty="0"/>
+                  <a:t> </a:t>
+                </a:r>
+                <a:r>
+                  <a:rPr lang="de-DE" dirty="0" err="1"/>
+                  <a:t>set</a:t>
+                </a:r>
+                <a:r>
+                  <a:rPr lang="de-DE" dirty="0"/>
+                  <a:t> </a:t>
+                </a:r>
+                <a:r>
+                  <a:rPr lang="de-DE" dirty="0" err="1"/>
+                  <a:t>crossover</a:t>
+                </a:r>
+                <a:endParaRPr lang="de-DE" dirty="0"/>
+              </a:p>
+              <a:p>
+                <a:r>
+                  <a:rPr lang="de-DE" dirty="0"/>
+                  <a:t>Add </a:t>
+                </a:r>
+                <a:r>
+                  <a:rPr lang="de-DE" dirty="0" err="1"/>
+                  <a:t>phase</a:t>
+                </a:r>
+                <a:r>
+                  <a:rPr lang="de-DE" dirty="0"/>
+                  <a:t> </a:t>
+                </a:r>
+                <a:r>
+                  <a:rPr lang="de-DE" dirty="0" err="1"/>
+                  <a:t>lead</a:t>
+                </a:r>
+                <a:r>
+                  <a:rPr lang="de-DE" dirty="0"/>
+                  <a:t> </a:t>
+                </a:r>
+                <a:r>
+                  <a:rPr lang="de-DE" dirty="0" err="1"/>
+                  <a:t>to</a:t>
+                </a:r>
+                <a:r>
+                  <a:rPr lang="de-DE" dirty="0"/>
+                  <a:t> </a:t>
+                </a:r>
+                <a:r>
+                  <a:rPr lang="de-DE" dirty="0" err="1"/>
+                  <a:t>improve</a:t>
+                </a:r>
+                <a:r>
+                  <a:rPr lang="de-DE" dirty="0"/>
+                  <a:t> </a:t>
+                </a:r>
+                <a:r>
+                  <a:rPr lang="de-DE" dirty="0" err="1"/>
+                  <a:t>stability</a:t>
+                </a:r>
+                <a:r>
+                  <a:rPr lang="de-DE" dirty="0"/>
+                  <a:t> </a:t>
+                </a:r>
+                <a:r>
+                  <a:rPr lang="de-DE" dirty="0" err="1"/>
+                  <a:t>margins</a:t>
+                </a:r>
+                <a:endParaRPr lang="de-DE" dirty="0"/>
+              </a:p>
+              <a:p>
+                <a:r>
+                  <a:rPr lang="de-DE" dirty="0"/>
+                  <a:t>Add lag </a:t>
+                </a:r>
+                <a:r>
+                  <a:rPr lang="de-DE" dirty="0" err="1"/>
+                  <a:t>for</a:t>
+                </a:r>
+                <a:r>
+                  <a:rPr lang="de-DE" dirty="0"/>
+                  <a:t> </a:t>
+                </a:r>
+                <a:r>
+                  <a:rPr lang="de-DE" dirty="0" err="1"/>
+                  <a:t>improved</a:t>
+                </a:r>
+                <a:r>
+                  <a:rPr lang="de-DE" dirty="0"/>
+                  <a:t> </a:t>
+                </a:r>
+                <a:r>
+                  <a:rPr lang="de-DE" dirty="0" err="1"/>
+                  <a:t>low-frequency</a:t>
+                </a:r>
+                <a:r>
+                  <a:rPr lang="de-DE" dirty="0"/>
+                  <a:t> </a:t>
+                </a:r>
+                <a:r>
+                  <a:rPr lang="de-DE" dirty="0" err="1"/>
+                  <a:t>tracking</a:t>
+                </a:r>
+                <a:endParaRPr lang="de-DE" dirty="0"/>
+              </a:p>
+              <a:p>
+                <a:r>
+                  <a:rPr lang="de-DE" dirty="0" err="1"/>
+                  <a:t>Verify</a:t>
+                </a:r>
+                <a:r>
+                  <a:rPr lang="de-DE" dirty="0"/>
+                  <a:t> </a:t>
+                </a:r>
+                <a:r>
+                  <a:rPr lang="de-DE" dirty="0" err="1"/>
+                  <a:t>margins</a:t>
+                </a:r>
+                <a:r>
+                  <a:rPr lang="de-DE" dirty="0"/>
+                  <a:t> and time-domain </a:t>
+                </a:r>
+                <a:r>
+                  <a:rPr lang="de-DE" dirty="0" err="1"/>
+                  <a:t>response</a:t>
+                </a:r>
+                <a:endParaRPr lang="de-DE" dirty="0"/>
+              </a:p>
+              <a:p>
+                <a:pPr marL="0" indent="0">
+                  <a:buNone/>
+                </a:pPr>
+                <a:endParaRPr lang="de-DE" dirty="0"/>
+              </a:p>
+            </p:txBody>
+          </p:sp>
+        </mc:Choice>
+        <mc:Fallback>
+          <p:sp>
+            <p:nvSpPr>
+              <p:cNvPr id="3" name="Inhaltsplatzhalter 2">
+                <a:extLst>
+                  <a:ext uri="{FF2B5EF4-FFF2-40B4-BE49-F238E27FC236}">
+                    <a16:creationId xmlns:a16="http://schemas.microsoft.com/office/drawing/2014/main" id="{6914AE74-D0FB-9E3A-A44D-F505D1E09498}"/>
+                  </a:ext>
+                </a:extLst>
+              </p:cNvPr>
+              <p:cNvSpPr>
+                <a:spLocks noGrp="1" noRot="1" noChangeAspect="1" noMove="1" noResize="1" noEditPoints="1" noAdjustHandles="1" noChangeArrowheads="1" noChangeShapeType="1" noTextEdit="1"/>
+              </p:cNvSpPr>
+              <p:nvPr>
+                <p:ph idx="1"/>
+              </p:nvPr>
+            </p:nvSpPr>
+            <p:spPr>
+              <a:blipFill>
+                <a:blip r:embed="rId2"/>
+                <a:stretch>
+                  <a:fillRect l="-1086" t="-2326"/>
+                </a:stretch>
+              </a:blipFill>
+            </p:spPr>
+            <p:txBody>
+              <a:bodyPr/>
+              <a:lstStyle/>
+              <a:p>
+                <a:r>
+                  <a:rPr lang="de-DE">
+                    <a:noFill/>
+                  </a:rPr>
+                  <a:t> </a:t>
+                </a:r>
+              </a:p>
+            </p:txBody>
+          </p:sp>
+        </mc:Fallback>
+      </mc:AlternateContent>
       <p:sp>
         <p:nvSpPr>
           <p:cNvPr id="4" name="Foliennummernplatzhalter 3">
@@ -11597,7 +12030,9 @@
         </p:nvSpPr>
         <p:spPr/>
         <p:txBody>
-          <a:bodyPr/>
+          <a:bodyPr>
+            <a:normAutofit lnSpcReduction="10000"/>
+          </a:bodyPr>
           <a:lstStyle/>
           <a:p>
             <a:pPr marL="0" indent="0">
@@ -11605,16 +12040,85 @@
             </a:pPr>
             <a:r>
               <a:rPr lang="de-DE" dirty="0"/>
-              <a:t>… </a:t>
+              <a:t>Lead </a:t>
             </a:r>
             <a:r>
               <a:rPr lang="de-DE" dirty="0" err="1"/>
-              <a:t>refinement</a:t>
+              <a:t>compensator</a:t>
             </a:r>
             <a:r>
               <a:rPr lang="de-DE" dirty="0"/>
-              <a:t> …</a:t>
-            </a:r>
+              <a:t>:</a:t>
+            </a:r>
+          </a:p>
+          <a:p>
+            <a:r>
+              <a:rPr lang="de-DE" dirty="0" err="1"/>
+              <a:t>increases</a:t>
+            </a:r>
+            <a:r>
+              <a:rPr lang="de-DE" dirty="0"/>
+              <a:t> </a:t>
+            </a:r>
+            <a:r>
+              <a:rPr lang="de-DE" dirty="0" err="1"/>
+              <a:t>phase</a:t>
+            </a:r>
+            <a:r>
+              <a:rPr lang="de-DE" dirty="0"/>
+              <a:t> </a:t>
+            </a:r>
+            <a:r>
+              <a:rPr lang="de-DE" dirty="0" err="1"/>
+              <a:t>margin</a:t>
+            </a:r>
+            <a:endParaRPr lang="de-DE" dirty="0"/>
+          </a:p>
+          <a:p>
+            <a:r>
+              <a:rPr lang="de-DE" dirty="0" err="1"/>
+              <a:t>improves</a:t>
+            </a:r>
+            <a:r>
+              <a:rPr lang="de-DE" dirty="0"/>
+              <a:t> </a:t>
+            </a:r>
+            <a:r>
+              <a:rPr lang="de-DE" dirty="0" err="1"/>
+              <a:t>stability</a:t>
+            </a:r>
+            <a:r>
+              <a:rPr lang="de-DE" dirty="0"/>
+              <a:t> and transient </a:t>
+            </a:r>
+            <a:r>
+              <a:rPr lang="de-DE" dirty="0" err="1"/>
+              <a:t>response</a:t>
+            </a:r>
+            <a:endParaRPr lang="de-DE" dirty="0"/>
+          </a:p>
+          <a:p>
+            <a:r>
+              <a:rPr lang="de-DE" dirty="0" err="1"/>
+              <a:t>increases</a:t>
+            </a:r>
+            <a:r>
+              <a:rPr lang="de-DE" dirty="0"/>
+              <a:t> </a:t>
+            </a:r>
+            <a:r>
+              <a:rPr lang="de-DE" dirty="0" err="1"/>
+              <a:t>system</a:t>
+            </a:r>
+            <a:r>
+              <a:rPr lang="de-DE" dirty="0"/>
+              <a:t> </a:t>
+            </a:r>
+            <a:r>
+              <a:rPr lang="de-DE" dirty="0" err="1"/>
+              <a:t>bandwidth</a:t>
+            </a:r>
+            <a:endParaRPr lang="de-DE" dirty="0"/>
           </a:p>
           <a:p>
             <a:pPr marL="0" indent="0">
@@ -11628,8 +12132,109 @@
             </a:pPr>
             <a:r>
               <a:rPr lang="de-DE" dirty="0"/>
-              <a:t>…</a:t>
-            </a:r>
+              <a:t>Lag </a:t>
+            </a:r>
+            <a:r>
+              <a:rPr lang="de-DE" dirty="0" err="1"/>
+              <a:t>compensator</a:t>
+            </a:r>
+            <a:r>
+              <a:rPr lang="de-DE" dirty="0"/>
+              <a:t>:</a:t>
+            </a:r>
+          </a:p>
+          <a:p>
+            <a:r>
+              <a:rPr lang="de-DE" dirty="0" err="1"/>
+              <a:t>increases</a:t>
+            </a:r>
+            <a:r>
+              <a:rPr lang="de-DE" dirty="0"/>
+              <a:t> </a:t>
+            </a:r>
+            <a:r>
+              <a:rPr lang="de-DE" dirty="0" err="1"/>
+              <a:t>low-frequency</a:t>
+            </a:r>
+            <a:r>
+              <a:rPr lang="de-DE" dirty="0"/>
+              <a:t> </a:t>
+            </a:r>
+            <a:r>
+              <a:rPr lang="de-DE" dirty="0" err="1"/>
+              <a:t>gain</a:t>
+            </a:r>
+            <a:endParaRPr lang="de-DE" dirty="0"/>
+          </a:p>
+          <a:p>
+            <a:r>
+              <a:rPr lang="de-DE" dirty="0" err="1"/>
+              <a:t>improves</a:t>
+            </a:r>
+            <a:r>
+              <a:rPr lang="de-DE" dirty="0"/>
+              <a:t> </a:t>
+            </a:r>
+            <a:r>
+              <a:rPr lang="de-DE" dirty="0" err="1"/>
+              <a:t>steady-state</a:t>
+            </a:r>
+            <a:r>
+              <a:rPr lang="de-DE" dirty="0"/>
+              <a:t> </a:t>
+            </a:r>
+            <a:r>
+              <a:rPr lang="de-DE" dirty="0" err="1"/>
+              <a:t>tracking</a:t>
+            </a:r>
+            <a:r>
+              <a:rPr lang="de-DE" dirty="0"/>
+              <a:t> </a:t>
+            </a:r>
+            <a:r>
+              <a:rPr lang="de-DE" dirty="0" err="1"/>
+              <a:t>accuracy</a:t>
+            </a:r>
+            <a:endParaRPr lang="de-DE" dirty="0"/>
+          </a:p>
+          <a:p>
+            <a:r>
+              <a:rPr lang="de-DE" dirty="0" err="1"/>
+              <a:t>has</a:t>
+            </a:r>
+            <a:r>
+              <a:rPr lang="de-DE" dirty="0"/>
+              <a:t> </a:t>
+            </a:r>
+            <a:r>
+              <a:rPr lang="de-DE" dirty="0" err="1"/>
+              <a:t>little</a:t>
+            </a:r>
+            <a:r>
+              <a:rPr lang="de-DE" dirty="0"/>
+              <a:t> </a:t>
+            </a:r>
+            <a:r>
+              <a:rPr lang="de-DE" dirty="0" err="1"/>
+              <a:t>influence</a:t>
+            </a:r>
+            <a:r>
+              <a:rPr lang="de-DE" dirty="0"/>
+              <a:t> on </a:t>
+            </a:r>
+            <a:r>
+              <a:rPr lang="de-DE" dirty="0" err="1"/>
+              <a:t>phase</a:t>
+            </a:r>
+            <a:r>
+              <a:rPr lang="de-DE" dirty="0"/>
+              <a:t> </a:t>
+            </a:r>
+            <a:r>
+              <a:rPr lang="de-DE" dirty="0" err="1"/>
+              <a:t>margin</a:t>
+            </a:r>
+            <a:endParaRPr lang="de-DE" dirty="0"/>
           </a:p>
         </p:txBody>
       </p:sp>
@@ -11725,341 +12330,700 @@
           </a:p>
         </p:txBody>
       </p:sp>
-      <p:sp>
-        <p:nvSpPr>
-          <p:cNvPr id="3" name="Inhaltsplatzhalter 2">
-            <a:extLst>
-              <a:ext uri="{FF2B5EF4-FFF2-40B4-BE49-F238E27FC236}">
-                <a16:creationId xmlns:a16="http://schemas.microsoft.com/office/drawing/2014/main" id="{F2AC5237-6BE6-8EF9-4CF2-8840AE86E957}"/>
-              </a:ext>
-            </a:extLst>
-          </p:cNvPr>
-          <p:cNvSpPr>
-            <a:spLocks noGrp="1"/>
-          </p:cNvSpPr>
-          <p:nvPr>
-            <p:ph idx="1"/>
-          </p:nvPr>
-        </p:nvSpPr>
-        <p:spPr/>
-        <p:txBody>
-          <a:bodyPr/>
-          <a:lstStyle/>
-          <a:p>
-            <a:r>
-              <a:rPr lang="de-DE" dirty="0" err="1"/>
-              <a:t>You</a:t>
-            </a:r>
-            <a:r>
-              <a:rPr lang="de-DE" dirty="0"/>
-              <a:t> </a:t>
-            </a:r>
-            <a:r>
-              <a:rPr lang="de-DE" dirty="0" err="1"/>
-              <a:t>analyze</a:t>
-            </a:r>
-            <a:r>
-              <a:rPr lang="de-DE" dirty="0"/>
-              <a:t> </a:t>
-            </a:r>
-            <a:r>
-              <a:rPr lang="de-DE" dirty="0" err="1"/>
-              <a:t>the</a:t>
-            </a:r>
-            <a:r>
-              <a:rPr lang="de-DE" dirty="0"/>
-              <a:t> </a:t>
-            </a:r>
-            <a:r>
-              <a:rPr lang="de-DE" dirty="0" err="1"/>
-              <a:t>poles</a:t>
-            </a:r>
-            <a:r>
-              <a:rPr lang="de-DE" dirty="0"/>
-              <a:t> </a:t>
-            </a:r>
-            <a:r>
-              <a:rPr lang="de-DE" dirty="0" err="1"/>
-              <a:t>of</a:t>
-            </a:r>
-            <a:r>
-              <a:rPr lang="de-DE" dirty="0"/>
-              <a:t> </a:t>
-            </a:r>
-            <a:r>
-              <a:rPr lang="de-DE" dirty="0" err="1"/>
-              <a:t>the</a:t>
-            </a:r>
-            <a:r>
-              <a:rPr lang="de-DE" dirty="0"/>
-              <a:t> </a:t>
-            </a:r>
-            <a:r>
-              <a:rPr lang="de-DE" dirty="0" err="1"/>
-              <a:t>closed</a:t>
-            </a:r>
-            <a:r>
-              <a:rPr lang="de-DE" dirty="0"/>
-              <a:t>-loop </a:t>
-            </a:r>
-            <a:r>
-              <a:rPr lang="de-DE" dirty="0" err="1"/>
-              <a:t>system</a:t>
-            </a:r>
-            <a:r>
-              <a:rPr lang="de-DE" dirty="0"/>
-              <a:t> </a:t>
-            </a:r>
-            <a:r>
-              <a:rPr lang="de-DE" dirty="0" err="1"/>
-              <a:t>as</a:t>
-            </a:r>
-            <a:r>
-              <a:rPr lang="de-DE" dirty="0"/>
-              <a:t> a </a:t>
-            </a:r>
-            <a:r>
-              <a:rPr lang="de-DE" dirty="0" err="1"/>
-              <a:t>function</a:t>
-            </a:r>
-            <a:r>
-              <a:rPr lang="de-DE" dirty="0"/>
-              <a:t> </a:t>
-            </a:r>
-            <a:r>
-              <a:rPr lang="de-DE" dirty="0" err="1"/>
-              <a:t>of</a:t>
-            </a:r>
-            <a:r>
-              <a:rPr lang="de-DE" dirty="0"/>
-              <a:t> </a:t>
-            </a:r>
-            <a:r>
-              <a:rPr lang="de-DE" dirty="0" err="1"/>
-              <a:t>controller</a:t>
-            </a:r>
-            <a:r>
-              <a:rPr lang="de-DE" dirty="0"/>
-              <a:t> </a:t>
-            </a:r>
-            <a:r>
-              <a:rPr lang="de-DE" dirty="0" err="1"/>
-              <a:t>gain</a:t>
-            </a:r>
-            <a:r>
-              <a:rPr lang="de-DE" dirty="0"/>
-              <a:t> K.</a:t>
-            </a:r>
-          </a:p>
-          <a:p>
-            <a:r>
-              <a:rPr lang="de-DE" dirty="0"/>
-              <a:t>The root </a:t>
-            </a:r>
-            <a:r>
-              <a:rPr lang="de-DE" dirty="0" err="1"/>
-              <a:t>locus</a:t>
-            </a:r>
-            <a:r>
-              <a:rPr lang="de-DE" dirty="0"/>
-              <a:t> </a:t>
-            </a:r>
-            <a:r>
-              <a:rPr lang="de-DE" dirty="0" err="1"/>
-              <a:t>shows</a:t>
-            </a:r>
-            <a:r>
-              <a:rPr lang="de-DE" dirty="0"/>
-              <a:t> </a:t>
-            </a:r>
-            <a:r>
-              <a:rPr lang="de-DE" dirty="0" err="1"/>
-              <a:t>how</a:t>
-            </a:r>
-            <a:r>
-              <a:rPr lang="de-DE" dirty="0"/>
-              <a:t> loop </a:t>
-            </a:r>
-            <a:r>
-              <a:rPr lang="de-DE" dirty="0" err="1"/>
-              <a:t>gain</a:t>
-            </a:r>
-            <a:r>
-              <a:rPr lang="de-DE" dirty="0"/>
-              <a:t> L(s) = K G(s) </a:t>
-            </a:r>
-            <a:r>
-              <a:rPr lang="de-DE" dirty="0" err="1"/>
-              <a:t>affects</a:t>
-            </a:r>
-            <a:r>
-              <a:rPr lang="de-DE" dirty="0"/>
-              <a:t> pole </a:t>
-            </a:r>
-            <a:r>
-              <a:rPr lang="de-DE" dirty="0" err="1"/>
-              <a:t>locations</a:t>
-            </a:r>
-            <a:r>
-              <a:rPr lang="de-DE" dirty="0"/>
-              <a:t>.</a:t>
-            </a:r>
-          </a:p>
-          <a:p>
-            <a:r>
-              <a:rPr lang="de-DE" dirty="0" err="1"/>
-              <a:t>You</a:t>
-            </a:r>
-            <a:r>
-              <a:rPr lang="de-DE" dirty="0"/>
-              <a:t> </a:t>
-            </a:r>
-            <a:r>
-              <a:rPr lang="de-DE" dirty="0" err="1"/>
-              <a:t>choose</a:t>
-            </a:r>
-            <a:r>
-              <a:rPr lang="de-DE" dirty="0"/>
-              <a:t> K (</a:t>
-            </a:r>
-            <a:r>
-              <a:rPr lang="de-DE" dirty="0" err="1"/>
-              <a:t>or</a:t>
-            </a:r>
-            <a:r>
-              <a:rPr lang="de-DE" dirty="0"/>
-              <a:t> C(s)) </a:t>
-            </a:r>
-            <a:r>
-              <a:rPr lang="de-DE" dirty="0" err="1"/>
-              <a:t>to</a:t>
-            </a:r>
-            <a:r>
-              <a:rPr lang="de-DE" dirty="0"/>
-              <a:t> </a:t>
-            </a:r>
-            <a:r>
-              <a:rPr lang="de-DE" dirty="0" err="1"/>
-              <a:t>place</a:t>
-            </a:r>
-            <a:r>
-              <a:rPr lang="de-DE" dirty="0"/>
-              <a:t> </a:t>
-            </a:r>
-            <a:r>
-              <a:rPr lang="de-DE" dirty="0" err="1"/>
-              <a:t>poles</a:t>
-            </a:r>
-            <a:r>
-              <a:rPr lang="de-DE" dirty="0"/>
-              <a:t> </a:t>
-            </a:r>
-            <a:r>
-              <a:rPr lang="de-DE" dirty="0" err="1"/>
-              <a:t>for</a:t>
-            </a:r>
-            <a:r>
-              <a:rPr lang="de-DE" dirty="0"/>
-              <a:t> </a:t>
-            </a:r>
-            <a:r>
-              <a:rPr lang="de-DE" dirty="0" err="1"/>
-              <a:t>desired</a:t>
-            </a:r>
-            <a:r>
-              <a:rPr lang="de-DE" dirty="0"/>
-              <a:t> transient </a:t>
-            </a:r>
-            <a:r>
-              <a:rPr lang="de-DE" dirty="0" err="1"/>
-              <a:t>behavior</a:t>
-            </a:r>
-            <a:r>
-              <a:rPr lang="de-DE" dirty="0"/>
-              <a:t>, </a:t>
-            </a:r>
-            <a:r>
-              <a:rPr lang="de-DE" dirty="0" err="1"/>
-              <a:t>which</a:t>
-            </a:r>
-            <a:r>
-              <a:rPr lang="de-DE" dirty="0"/>
-              <a:t> </a:t>
-            </a:r>
-            <a:r>
-              <a:rPr lang="de-DE" dirty="0" err="1"/>
-              <a:t>is</a:t>
-            </a:r>
-            <a:r>
-              <a:rPr lang="de-DE" dirty="0"/>
-              <a:t> </a:t>
-            </a:r>
-            <a:r>
-              <a:rPr lang="de-DE" dirty="0" err="1"/>
-              <a:t>equivalent</a:t>
-            </a:r>
-            <a:r>
-              <a:rPr lang="de-DE" dirty="0"/>
-              <a:t> </a:t>
-            </a:r>
-            <a:r>
-              <a:rPr lang="de-DE" dirty="0" err="1"/>
-              <a:t>to</a:t>
-            </a:r>
-            <a:r>
-              <a:rPr lang="de-DE" dirty="0"/>
-              <a:t> </a:t>
-            </a:r>
-            <a:r>
-              <a:rPr lang="de-DE" dirty="0" err="1"/>
-              <a:t>shaping</a:t>
-            </a:r>
-            <a:r>
-              <a:rPr lang="de-DE" dirty="0"/>
-              <a:t> </a:t>
-            </a:r>
-            <a:r>
-              <a:rPr lang="de-DE" dirty="0" err="1"/>
-              <a:t>the</a:t>
-            </a:r>
-            <a:r>
-              <a:rPr lang="de-DE" dirty="0"/>
-              <a:t> </a:t>
-            </a:r>
-            <a:r>
-              <a:rPr lang="de-DE" dirty="0" err="1"/>
-              <a:t>low-frequency</a:t>
-            </a:r>
-            <a:r>
-              <a:rPr lang="de-DE" dirty="0"/>
-              <a:t> loop </a:t>
-            </a:r>
-            <a:r>
-              <a:rPr lang="de-DE" dirty="0" err="1"/>
-              <a:t>gain</a:t>
-            </a:r>
-            <a:r>
-              <a:rPr lang="de-DE" dirty="0"/>
-              <a:t>.</a:t>
-            </a:r>
-          </a:p>
-          <a:p>
-            <a:pPr marL="0" indent="0">
-              <a:buNone/>
-            </a:pPr>
-            <a:endParaRPr lang="de-DE" dirty="0"/>
-          </a:p>
-          <a:p>
-            <a:pPr marL="0" indent="0">
-              <a:buNone/>
-            </a:pPr>
-            <a:r>
-              <a:rPr lang="de-DE" dirty="0"/>
-              <a:t>…</a:t>
-            </a:r>
-          </a:p>
-        </p:txBody>
-      </p:sp>
+      <mc:AlternateContent xmlns:mc="http://schemas.openxmlformats.org/markup-compatibility/2006">
+        <mc:Choice xmlns:a14="http://schemas.microsoft.com/office/drawing/2010/main" Requires="a14">
+          <p:sp>
+            <p:nvSpPr>
+              <p:cNvPr id="3" name="Inhaltsplatzhalter 2">
+                <a:extLst>
+                  <a:ext uri="{FF2B5EF4-FFF2-40B4-BE49-F238E27FC236}">
+                    <a16:creationId xmlns:a16="http://schemas.microsoft.com/office/drawing/2014/main" id="{F2AC5237-6BE6-8EF9-4CF2-8840AE86E957}"/>
+                  </a:ext>
+                </a:extLst>
+              </p:cNvPr>
+              <p:cNvSpPr>
+                <a:spLocks noGrp="1"/>
+              </p:cNvSpPr>
+              <p:nvPr>
+                <p:ph idx="1"/>
+              </p:nvPr>
+            </p:nvSpPr>
+            <p:spPr/>
+            <p:txBody>
+              <a:bodyPr>
+                <a:normAutofit fontScale="85000" lnSpcReduction="20000"/>
+              </a:bodyPr>
+              <a:lstStyle/>
+              <a:p>
+                <a:pPr marL="0" indent="0">
+                  <a:buNone/>
+                </a:pPr>
+                <a:r>
+                  <a:rPr lang="de-DE" dirty="0"/>
+                  <a:t>Analyze </a:t>
+                </a:r>
+                <a:r>
+                  <a:rPr lang="de-DE" dirty="0" err="1"/>
+                  <a:t>poles</a:t>
+                </a:r>
+                <a:r>
+                  <a:rPr lang="de-DE" dirty="0"/>
+                  <a:t> </a:t>
+                </a:r>
+                <a:r>
+                  <a:rPr lang="de-DE" dirty="0" err="1"/>
+                  <a:t>of</a:t>
+                </a:r>
+                <a:r>
+                  <a:rPr lang="de-DE" dirty="0"/>
+                  <a:t> </a:t>
+                </a:r>
+                <a:r>
+                  <a:rPr lang="de-DE" dirty="0" err="1"/>
+                  <a:t>closed</a:t>
+                </a:r>
+                <a:r>
+                  <a:rPr lang="de-DE" dirty="0"/>
+                  <a:t>-loop </a:t>
+                </a:r>
+                <a:r>
+                  <a:rPr lang="de-DE" dirty="0" err="1"/>
+                  <a:t>system</a:t>
+                </a:r>
+                <a:r>
+                  <a:rPr lang="de-DE" dirty="0"/>
+                  <a:t> </a:t>
+                </a:r>
+                <a:r>
+                  <a:rPr lang="de-DE" dirty="0" err="1"/>
+                  <a:t>as</a:t>
+                </a:r>
+                <a:r>
+                  <a:rPr lang="de-DE" dirty="0"/>
+                  <a:t> a </a:t>
+                </a:r>
+                <a:r>
+                  <a:rPr lang="de-DE" dirty="0" err="1"/>
+                  <a:t>function</a:t>
+                </a:r>
+                <a:r>
+                  <a:rPr lang="de-DE" dirty="0"/>
+                  <a:t> </a:t>
+                </a:r>
+                <a:r>
+                  <a:rPr lang="de-DE" dirty="0" err="1"/>
+                  <a:t>of</a:t>
+                </a:r>
+                <a:r>
+                  <a:rPr lang="de-DE" dirty="0"/>
+                  <a:t> </a:t>
+                </a:r>
+                <a:r>
+                  <a:rPr lang="de-DE" dirty="0" err="1"/>
+                  <a:t>controller</a:t>
+                </a:r>
+                <a:r>
+                  <a:rPr lang="de-DE" dirty="0"/>
+                  <a:t> </a:t>
+                </a:r>
+                <a:r>
+                  <a:rPr lang="de-DE" dirty="0" err="1"/>
+                  <a:t>gain</a:t>
+                </a:r>
+                <a:r>
+                  <a:rPr lang="de-DE" dirty="0"/>
+                  <a:t> </a:t>
+                </a:r>
+                <a14:m>
+                  <m:oMath xmlns:m="http://schemas.openxmlformats.org/officeDocument/2006/math">
+                    <m:r>
+                      <a:rPr lang="de-DE" b="0" i="1" smtClean="0">
+                        <a:latin typeface="Cambria Math" panose="02040503050406030204" pitchFamily="18" charset="0"/>
+                      </a:rPr>
+                      <m:t>𝐾</m:t>
+                    </m:r>
+                  </m:oMath>
+                </a14:m>
+                <a:endParaRPr lang="de-DE" dirty="0"/>
+              </a:p>
+              <a:p>
+                <a:pPr marL="0" indent="0">
+                  <a:buNone/>
+                </a:pPr>
+                <a:endParaRPr lang="de-DE" dirty="0">
+                  <a:sym typeface="Wingdings" pitchFamily="2" charset="2"/>
+                </a:endParaRPr>
+              </a:p>
+              <a:p>
+                <a:pPr marL="0" indent="0">
+                  <a:buNone/>
+                </a:pPr>
+                <a:r>
+                  <a:rPr lang="de-DE" dirty="0">
+                    <a:sym typeface="Wingdings" pitchFamily="2" charset="2"/>
+                  </a:rPr>
+                  <a:t>R</a:t>
+                </a:r>
+                <a:r>
+                  <a:rPr lang="de-DE" dirty="0"/>
+                  <a:t>oot </a:t>
+                </a:r>
+                <a:r>
+                  <a:rPr lang="de-DE" dirty="0" err="1"/>
+                  <a:t>locus</a:t>
+                </a:r>
+                <a:r>
+                  <a:rPr lang="de-DE" dirty="0"/>
+                  <a:t> </a:t>
+                </a:r>
+                <a:r>
+                  <a:rPr lang="de-DE" dirty="0" err="1"/>
+                  <a:t>shows</a:t>
+                </a:r>
+                <a:r>
+                  <a:rPr lang="de-DE" dirty="0"/>
+                  <a:t> </a:t>
+                </a:r>
+                <a:r>
+                  <a:rPr lang="de-DE" dirty="0" err="1"/>
+                  <a:t>how</a:t>
+                </a:r>
+                <a:r>
+                  <a:rPr lang="de-DE" dirty="0"/>
+                  <a:t> loop </a:t>
+                </a:r>
+                <a:r>
+                  <a:rPr lang="de-DE" dirty="0" err="1"/>
+                  <a:t>gain</a:t>
+                </a:r>
+                <a:r>
+                  <a:rPr lang="de-DE" dirty="0"/>
+                  <a:t> </a:t>
+                </a:r>
+                <a14:m>
+                  <m:oMath xmlns:m="http://schemas.openxmlformats.org/officeDocument/2006/math">
+                    <m:r>
+                      <a:rPr lang="de-DE" b="0" i="1" smtClean="0">
+                        <a:latin typeface="Cambria Math" panose="02040503050406030204" pitchFamily="18" charset="0"/>
+                      </a:rPr>
+                      <m:t>𝐿</m:t>
+                    </m:r>
+                    <m:d>
+                      <m:dPr>
+                        <m:ctrlPr>
+                          <a:rPr lang="de-DE" b="0" i="1" smtClean="0">
+                            <a:latin typeface="Cambria Math" panose="02040503050406030204" pitchFamily="18" charset="0"/>
+                          </a:rPr>
+                        </m:ctrlPr>
+                      </m:dPr>
+                      <m:e>
+                        <m:r>
+                          <a:rPr lang="de-DE" b="0" i="1" smtClean="0">
+                            <a:latin typeface="Cambria Math" panose="02040503050406030204" pitchFamily="18" charset="0"/>
+                          </a:rPr>
+                          <m:t>𝑠</m:t>
+                        </m:r>
+                      </m:e>
+                    </m:d>
+                    <m:r>
+                      <a:rPr lang="de-DE" b="0" i="1" smtClean="0">
+                        <a:latin typeface="Cambria Math" panose="02040503050406030204" pitchFamily="18" charset="0"/>
+                      </a:rPr>
+                      <m:t>=</m:t>
+                    </m:r>
+                    <m:r>
+                      <a:rPr lang="de-DE" b="0" i="1" smtClean="0">
+                        <a:latin typeface="Cambria Math" panose="02040503050406030204" pitchFamily="18" charset="0"/>
+                      </a:rPr>
+                      <m:t>𝐾</m:t>
+                    </m:r>
+                    <m:r>
+                      <a:rPr lang="de-DE" b="0" i="1" smtClean="0">
+                        <a:latin typeface="Cambria Math" panose="02040503050406030204" pitchFamily="18" charset="0"/>
+                      </a:rPr>
+                      <m:t> </m:t>
+                    </m:r>
+                    <m:r>
+                      <a:rPr lang="de-DE" b="0" i="1" smtClean="0">
+                        <a:latin typeface="Cambria Math" panose="02040503050406030204" pitchFamily="18" charset="0"/>
+                      </a:rPr>
+                      <m:t>𝐺</m:t>
+                    </m:r>
+                    <m:r>
+                      <a:rPr lang="de-DE" b="0" i="1" smtClean="0">
+                        <a:latin typeface="Cambria Math" panose="02040503050406030204" pitchFamily="18" charset="0"/>
+                      </a:rPr>
+                      <m:t>(</m:t>
+                    </m:r>
+                    <m:r>
+                      <a:rPr lang="de-DE" b="0" i="1" smtClean="0">
+                        <a:latin typeface="Cambria Math" panose="02040503050406030204" pitchFamily="18" charset="0"/>
+                      </a:rPr>
+                      <m:t>𝑠</m:t>
+                    </m:r>
+                    <m:r>
+                      <a:rPr lang="de-DE" b="0" i="1" smtClean="0">
+                        <a:latin typeface="Cambria Math" panose="02040503050406030204" pitchFamily="18" charset="0"/>
+                      </a:rPr>
+                      <m:t>)</m:t>
+                    </m:r>
+                  </m:oMath>
+                </a14:m>
+                <a:r>
+                  <a:rPr lang="de-DE" dirty="0"/>
+                  <a:t> </a:t>
+                </a:r>
+                <a:r>
+                  <a:rPr lang="de-DE" dirty="0" err="1"/>
+                  <a:t>affects</a:t>
+                </a:r>
+                <a:r>
+                  <a:rPr lang="de-DE" dirty="0"/>
+                  <a:t> pole </a:t>
+                </a:r>
+                <a:r>
+                  <a:rPr lang="de-DE" dirty="0" err="1"/>
+                  <a:t>locations</a:t>
+                </a:r>
+                <a:endParaRPr lang="de-DE" dirty="0"/>
+              </a:p>
+              <a:p>
+                <a:pPr marL="0" indent="0">
+                  <a:buNone/>
+                </a:pPr>
+                <a:r>
+                  <a:rPr lang="de-DE" dirty="0">
+                    <a:sym typeface="Wingdings" pitchFamily="2" charset="2"/>
+                  </a:rPr>
+                  <a:t> </a:t>
+                </a:r>
+                <a:r>
+                  <a:rPr lang="de-DE" dirty="0" err="1">
+                    <a:sym typeface="Wingdings" pitchFamily="2" charset="2"/>
+                  </a:rPr>
+                  <a:t>C</a:t>
+                </a:r>
+                <a:r>
+                  <a:rPr lang="de-DE" dirty="0" err="1"/>
+                  <a:t>hoose</a:t>
+                </a:r>
+                <a:r>
+                  <a:rPr lang="de-DE" dirty="0"/>
+                  <a:t> </a:t>
+                </a:r>
+                <a14:m>
+                  <m:oMath xmlns:m="http://schemas.openxmlformats.org/officeDocument/2006/math">
+                    <m:r>
+                      <a:rPr lang="de-DE" i="1">
+                        <a:latin typeface="Cambria Math" panose="02040503050406030204" pitchFamily="18" charset="0"/>
+                      </a:rPr>
+                      <m:t>𝐾</m:t>
+                    </m:r>
+                  </m:oMath>
+                </a14:m>
+                <a:r>
+                  <a:rPr lang="de-DE" dirty="0"/>
+                  <a:t> (</a:t>
+                </a:r>
+                <a:r>
+                  <a:rPr lang="de-DE" dirty="0" err="1"/>
+                  <a:t>or</a:t>
+                </a:r>
+                <a:r>
+                  <a:rPr lang="de-DE" dirty="0"/>
+                  <a:t> </a:t>
+                </a:r>
+                <a14:m>
+                  <m:oMath xmlns:m="http://schemas.openxmlformats.org/officeDocument/2006/math">
+                    <m:r>
+                      <a:rPr lang="de-DE" b="0" i="1" smtClean="0">
+                        <a:latin typeface="Cambria Math" panose="02040503050406030204" pitchFamily="18" charset="0"/>
+                      </a:rPr>
+                      <m:t>𝐶</m:t>
+                    </m:r>
+                    <m:r>
+                      <a:rPr lang="de-DE" b="0" i="1" smtClean="0">
+                        <a:latin typeface="Cambria Math" panose="02040503050406030204" pitchFamily="18" charset="0"/>
+                      </a:rPr>
+                      <m:t>(</m:t>
+                    </m:r>
+                    <m:r>
+                      <a:rPr lang="de-DE" b="0" i="1" smtClean="0">
+                        <a:latin typeface="Cambria Math" panose="02040503050406030204" pitchFamily="18" charset="0"/>
+                      </a:rPr>
+                      <m:t>𝑠</m:t>
+                    </m:r>
+                    <m:r>
+                      <a:rPr lang="de-DE" b="0" i="1" smtClean="0">
+                        <a:latin typeface="Cambria Math" panose="02040503050406030204" pitchFamily="18" charset="0"/>
+                      </a:rPr>
+                      <m:t>)</m:t>
+                    </m:r>
+                  </m:oMath>
+                </a14:m>
+                <a:r>
+                  <a:rPr lang="de-DE" dirty="0"/>
+                  <a:t>) </a:t>
+                </a:r>
+                <a:r>
+                  <a:rPr lang="de-DE" dirty="0" err="1"/>
+                  <a:t>to</a:t>
+                </a:r>
+                <a:r>
+                  <a:rPr lang="de-DE" dirty="0"/>
+                  <a:t> </a:t>
+                </a:r>
+                <a:r>
+                  <a:rPr lang="de-DE" dirty="0" err="1"/>
+                  <a:t>place</a:t>
+                </a:r>
+                <a:r>
+                  <a:rPr lang="de-DE" dirty="0"/>
+                  <a:t> </a:t>
+                </a:r>
+                <a:r>
+                  <a:rPr lang="de-DE" dirty="0" err="1"/>
+                  <a:t>poles</a:t>
+                </a:r>
+                <a:r>
+                  <a:rPr lang="de-DE" dirty="0"/>
+                  <a:t> </a:t>
+                </a:r>
+                <a:r>
+                  <a:rPr lang="de-DE" dirty="0" err="1"/>
+                  <a:t>for</a:t>
+                </a:r>
+                <a:r>
+                  <a:rPr lang="de-DE" dirty="0"/>
+                  <a:t> </a:t>
+                </a:r>
+                <a:r>
+                  <a:rPr lang="de-DE" dirty="0" err="1"/>
+                  <a:t>desired</a:t>
+                </a:r>
+                <a:r>
+                  <a:rPr lang="de-DE" dirty="0"/>
+                  <a:t> transient </a:t>
+                </a:r>
+                <a:r>
+                  <a:rPr lang="de-DE" dirty="0" err="1"/>
+                  <a:t>behavior</a:t>
+                </a:r>
+                <a:r>
+                  <a:rPr lang="de-DE" dirty="0"/>
+                  <a:t> (</a:t>
+                </a:r>
+                <a:r>
+                  <a:rPr lang="de-DE" dirty="0" err="1"/>
+                  <a:t>settling</a:t>
+                </a:r>
+                <a:r>
+                  <a:rPr lang="de-DE" dirty="0"/>
+                  <a:t> time, </a:t>
+                </a:r>
+                <a:r>
+                  <a:rPr lang="de-DE" dirty="0" err="1"/>
+                  <a:t>damping</a:t>
+                </a:r>
+                <a:r>
+                  <a:rPr lang="de-DE" dirty="0"/>
+                  <a:t> </a:t>
+                </a:r>
+                <a:r>
+                  <a:rPr lang="de-DE" dirty="0" err="1"/>
+                  <a:t>ratio</a:t>
+                </a:r>
+                <a:r>
+                  <a:rPr lang="de-DE" dirty="0"/>
+                  <a:t>, </a:t>
+                </a:r>
+                <a:r>
+                  <a:rPr lang="de-DE" dirty="0" err="1"/>
+                  <a:t>stability</a:t>
+                </a:r>
+                <a:r>
+                  <a:rPr lang="de-DE" dirty="0"/>
+                  <a:t> </a:t>
+                </a:r>
+                <a:r>
+                  <a:rPr lang="de-DE" dirty="0" err="1"/>
+                  <a:t>margin</a:t>
+                </a:r>
+                <a:r>
+                  <a:rPr lang="de-DE" dirty="0"/>
+                  <a:t>)</a:t>
+                </a:r>
+              </a:p>
+              <a:p>
+                <a:pPr marL="0" indent="0">
+                  <a:buNone/>
+                </a:pPr>
+                <a:r>
+                  <a:rPr lang="de-DE" dirty="0"/>
+                  <a:t>(</a:t>
+                </a:r>
+                <a:r>
+                  <a:rPr lang="de-DE" dirty="0" err="1"/>
+                  <a:t>equivalent</a:t>
+                </a:r>
+                <a:r>
+                  <a:rPr lang="de-DE" dirty="0"/>
+                  <a:t> </a:t>
+                </a:r>
+                <a:r>
+                  <a:rPr lang="de-DE" dirty="0" err="1"/>
+                  <a:t>to</a:t>
+                </a:r>
+                <a:r>
+                  <a:rPr lang="de-DE" dirty="0"/>
+                  <a:t> </a:t>
+                </a:r>
+                <a:r>
+                  <a:rPr lang="de-DE" dirty="0" err="1"/>
+                  <a:t>shaping</a:t>
+                </a:r>
+                <a:r>
+                  <a:rPr lang="de-DE" dirty="0"/>
+                  <a:t> </a:t>
+                </a:r>
+                <a:r>
+                  <a:rPr lang="de-DE" dirty="0" err="1"/>
+                  <a:t>the</a:t>
+                </a:r>
+                <a:r>
+                  <a:rPr lang="de-DE" dirty="0"/>
+                  <a:t> </a:t>
+                </a:r>
+                <a:r>
+                  <a:rPr lang="de-DE" dirty="0" err="1"/>
+                  <a:t>low-frequency</a:t>
+                </a:r>
+                <a:r>
+                  <a:rPr lang="de-DE" dirty="0"/>
+                  <a:t> loop </a:t>
+                </a:r>
+                <a:r>
+                  <a:rPr lang="de-DE" dirty="0" err="1"/>
+                  <a:t>gain</a:t>
+                </a:r>
+                <a:r>
+                  <a:rPr lang="de-DE" dirty="0"/>
+                  <a:t>)</a:t>
+                </a:r>
+              </a:p>
+              <a:p>
+                <a:pPr marL="0" indent="0">
+                  <a:buNone/>
+                </a:pPr>
+                <a:endParaRPr lang="de-DE" dirty="0"/>
+              </a:p>
+              <a:p>
+                <a:pPr marL="0" indent="0">
+                  <a:buNone/>
+                </a:pPr>
+                <a:r>
+                  <a:rPr lang="de-DE" dirty="0"/>
+                  <a:t>Interpretation:</a:t>
+                </a:r>
+              </a:p>
+              <a:p>
+                <a:r>
+                  <a:rPr lang="de-DE" dirty="0"/>
+                  <a:t>Poles </a:t>
+                </a:r>
+                <a:r>
+                  <a:rPr lang="de-DE" dirty="0" err="1"/>
+                  <a:t>moving</a:t>
+                </a:r>
+                <a:r>
+                  <a:rPr lang="de-DE" dirty="0"/>
+                  <a:t> </a:t>
+                </a:r>
+                <a:r>
+                  <a:rPr lang="de-DE" dirty="0" err="1"/>
+                  <a:t>toward</a:t>
+                </a:r>
+                <a:r>
+                  <a:rPr lang="de-DE" dirty="0"/>
+                  <a:t> </a:t>
+                </a:r>
+                <a:r>
+                  <a:rPr lang="de-DE" dirty="0" err="1"/>
+                  <a:t>the</a:t>
+                </a:r>
+                <a:r>
+                  <a:rPr lang="de-DE" dirty="0"/>
+                  <a:t> </a:t>
+                </a:r>
+                <a:r>
+                  <a:rPr lang="de-DE" dirty="0" err="1"/>
+                  <a:t>right</a:t>
+                </a:r>
+                <a:r>
+                  <a:rPr lang="de-DE" dirty="0"/>
+                  <a:t> half-plane </a:t>
+                </a:r>
+                <a:r>
+                  <a:rPr lang="de-DE" dirty="0">
+                    <a:sym typeface="Wingdings" pitchFamily="2" charset="2"/>
+                  </a:rPr>
+                  <a:t></a:t>
+                </a:r>
+                <a:r>
+                  <a:rPr lang="de-DE" dirty="0"/>
+                  <a:t> </a:t>
+                </a:r>
+                <a:r>
+                  <a:rPr lang="de-DE" dirty="0" err="1"/>
+                  <a:t>instability</a:t>
+                </a:r>
+                <a:endParaRPr lang="de-DE" dirty="0"/>
+              </a:p>
+              <a:p>
+                <a:r>
+                  <a:rPr lang="de-DE" dirty="0"/>
+                  <a:t>Poles </a:t>
+                </a:r>
+                <a:r>
+                  <a:rPr lang="de-DE" dirty="0" err="1"/>
+                  <a:t>further</a:t>
+                </a:r>
+                <a:r>
+                  <a:rPr lang="de-DE" dirty="0"/>
+                  <a:t> </a:t>
+                </a:r>
+                <a:r>
+                  <a:rPr lang="de-DE" dirty="0" err="1"/>
+                  <a:t>left</a:t>
+                </a:r>
+                <a:r>
+                  <a:rPr lang="de-DE" dirty="0"/>
+                  <a:t> </a:t>
+                </a:r>
+                <a:r>
+                  <a:rPr lang="de-DE" dirty="0">
+                    <a:sym typeface="Wingdings" pitchFamily="2" charset="2"/>
+                  </a:rPr>
+                  <a:t></a:t>
+                </a:r>
+                <a:r>
+                  <a:rPr lang="de-DE" dirty="0"/>
+                  <a:t> </a:t>
+                </a:r>
+                <a:r>
+                  <a:rPr lang="de-DE" dirty="0" err="1"/>
+                  <a:t>faster</a:t>
+                </a:r>
+                <a:r>
+                  <a:rPr lang="de-DE" dirty="0"/>
+                  <a:t> </a:t>
+                </a:r>
+                <a:r>
+                  <a:rPr lang="de-DE" dirty="0" err="1"/>
+                  <a:t>dynamics</a:t>
+                </a:r>
+                <a:endParaRPr lang="de-DE" dirty="0"/>
+              </a:p>
+              <a:p>
+                <a:r>
+                  <a:rPr lang="de-DE" dirty="0" err="1"/>
+                  <a:t>Complex</a:t>
+                </a:r>
+                <a:r>
+                  <a:rPr lang="de-DE" dirty="0"/>
+                  <a:t> </a:t>
+                </a:r>
+                <a:r>
+                  <a:rPr lang="de-DE" dirty="0" err="1"/>
+                  <a:t>poles</a:t>
+                </a:r>
+                <a:r>
+                  <a:rPr lang="de-DE" dirty="0"/>
+                  <a:t> </a:t>
+                </a:r>
+                <a:r>
+                  <a:rPr lang="de-DE" dirty="0" err="1"/>
+                  <a:t>with</a:t>
+                </a:r>
+                <a:r>
+                  <a:rPr lang="de-DE" dirty="0"/>
+                  <a:t> </a:t>
+                </a:r>
+                <a:r>
+                  <a:rPr lang="de-DE" dirty="0" err="1"/>
+                  <a:t>small</a:t>
+                </a:r>
+                <a:r>
+                  <a:rPr lang="de-DE" dirty="0"/>
+                  <a:t> </a:t>
+                </a:r>
+                <a:r>
+                  <a:rPr lang="de-DE" dirty="0" err="1"/>
+                  <a:t>damping</a:t>
+                </a:r>
+                <a:r>
+                  <a:rPr lang="de-DE" dirty="0"/>
+                  <a:t> </a:t>
+                </a:r>
+                <a:r>
+                  <a:rPr lang="de-DE" dirty="0">
+                    <a:sym typeface="Wingdings" pitchFamily="2" charset="2"/>
+                  </a:rPr>
+                  <a:t></a:t>
+                </a:r>
+                <a:r>
+                  <a:rPr lang="de-DE" dirty="0"/>
+                  <a:t> </a:t>
+                </a:r>
+                <a:r>
+                  <a:rPr lang="de-DE" dirty="0" err="1"/>
+                  <a:t>oscillations</a:t>
+                </a:r>
+                <a:endParaRPr lang="de-DE" dirty="0"/>
+              </a:p>
+            </p:txBody>
+          </p:sp>
+        </mc:Choice>
+        <mc:Fallback>
+          <p:sp>
+            <p:nvSpPr>
+              <p:cNvPr id="3" name="Inhaltsplatzhalter 2">
+                <a:extLst>
+                  <a:ext uri="{FF2B5EF4-FFF2-40B4-BE49-F238E27FC236}">
+                    <a16:creationId xmlns:a16="http://schemas.microsoft.com/office/drawing/2014/main" id="{F2AC5237-6BE6-8EF9-4CF2-8840AE86E957}"/>
+                  </a:ext>
+                </a:extLst>
+              </p:cNvPr>
+              <p:cNvSpPr>
+                <a:spLocks noGrp="1" noRot="1" noChangeAspect="1" noMove="1" noResize="1" noEditPoints="1" noAdjustHandles="1" noChangeArrowheads="1" noChangeShapeType="1" noTextEdit="1"/>
+              </p:cNvSpPr>
+              <p:nvPr>
+                <p:ph idx="1"/>
+              </p:nvPr>
+            </p:nvSpPr>
+            <p:spPr>
+              <a:blipFill>
+                <a:blip r:embed="rId2"/>
+                <a:stretch>
+                  <a:fillRect l="-965" t="-3198"/>
+                </a:stretch>
+              </a:blipFill>
+            </p:spPr>
+            <p:txBody>
+              <a:bodyPr/>
+              <a:lstStyle/>
+              <a:p>
+                <a:r>
+                  <a:rPr lang="de-DE">
+                    <a:noFill/>
+                  </a:rPr>
+                  <a:t> </a:t>
+                </a:r>
+              </a:p>
+            </p:txBody>
+          </p:sp>
+        </mc:Fallback>
+      </mc:AlternateContent>
       <p:sp>
         <p:nvSpPr>
           <p:cNvPr id="4" name="Foliennummernplatzhalter 3">
@@ -12426,246 +13390,538 @@
           </a:p>
         </p:txBody>
       </p:sp>
-      <p:sp>
-        <p:nvSpPr>
-          <p:cNvPr id="3" name="Inhaltsplatzhalter 2">
-            <a:extLst>
-              <a:ext uri="{FF2B5EF4-FFF2-40B4-BE49-F238E27FC236}">
-                <a16:creationId xmlns:a16="http://schemas.microsoft.com/office/drawing/2014/main" id="{9922CB98-5200-2FB8-E31C-9B515916A3C0}"/>
-              </a:ext>
-            </a:extLst>
-          </p:cNvPr>
-          <p:cNvSpPr>
-            <a:spLocks noGrp="1"/>
-          </p:cNvSpPr>
-          <p:nvPr>
-            <p:ph idx="1"/>
-          </p:nvPr>
-        </p:nvSpPr>
-        <p:spPr/>
-        <p:txBody>
-          <a:bodyPr/>
-          <a:lstStyle/>
-          <a:p>
-            <a:r>
-              <a:rPr lang="de-DE" dirty="0" err="1"/>
-              <a:t>You</a:t>
-            </a:r>
-            <a:r>
-              <a:rPr lang="de-DE" dirty="0"/>
-              <a:t> design C(s) </a:t>
-            </a:r>
-            <a:r>
-              <a:rPr lang="de-DE" dirty="0" err="1"/>
-              <a:t>from</a:t>
-            </a:r>
-            <a:r>
-              <a:rPr lang="de-DE" dirty="0"/>
-              <a:t> a plant </a:t>
-            </a:r>
-            <a:r>
-              <a:rPr lang="de-DE" dirty="0" err="1"/>
-              <a:t>model</a:t>
-            </a:r>
-            <a:r>
-              <a:rPr lang="de-DE" dirty="0"/>
-              <a:t> so </a:t>
-            </a:r>
-            <a:r>
-              <a:rPr lang="de-DE" dirty="0" err="1"/>
-              <a:t>that</a:t>
-            </a:r>
-            <a:r>
-              <a:rPr lang="de-DE" dirty="0"/>
-              <a:t> </a:t>
-            </a:r>
-            <a:r>
-              <a:rPr lang="de-DE" dirty="0" err="1"/>
-              <a:t>the</a:t>
-            </a:r>
-            <a:r>
-              <a:rPr lang="de-DE" dirty="0"/>
-              <a:t> </a:t>
-            </a:r>
-            <a:r>
-              <a:rPr lang="de-DE" dirty="0" err="1"/>
-              <a:t>closed</a:t>
-            </a:r>
-            <a:r>
-              <a:rPr lang="de-DE" dirty="0"/>
-              <a:t>-loop </a:t>
-            </a:r>
-            <a:r>
-              <a:rPr lang="de-DE" dirty="0" err="1"/>
-              <a:t>response</a:t>
-            </a:r>
-            <a:r>
-              <a:rPr lang="de-DE" dirty="0"/>
-              <a:t> </a:t>
-            </a:r>
-            <a:r>
-              <a:rPr lang="de-DE" dirty="0" err="1"/>
-              <a:t>behaves</a:t>
-            </a:r>
-            <a:r>
-              <a:rPr lang="de-DE" dirty="0"/>
-              <a:t> like a </a:t>
-            </a:r>
-            <a:r>
-              <a:rPr lang="de-DE" dirty="0" err="1"/>
-              <a:t>desired</a:t>
-            </a:r>
-            <a:r>
-              <a:rPr lang="de-DE" dirty="0"/>
-              <a:t> first-order/</a:t>
-            </a:r>
-            <a:r>
-              <a:rPr lang="de-DE" dirty="0" err="1"/>
-              <a:t>second</a:t>
-            </a:r>
-            <a:r>
-              <a:rPr lang="de-DE" dirty="0"/>
-              <a:t>-order </a:t>
-            </a:r>
-            <a:r>
-              <a:rPr lang="de-DE" dirty="0" err="1"/>
-              <a:t>system</a:t>
-            </a:r>
-            <a:r>
-              <a:rPr lang="de-DE" dirty="0"/>
-              <a:t>.</a:t>
-            </a:r>
-          </a:p>
-          <a:p>
-            <a:r>
-              <a:rPr lang="de-DE" dirty="0"/>
-              <a:t>This </a:t>
-            </a:r>
-            <a:r>
-              <a:rPr lang="de-DE" dirty="0" err="1"/>
-              <a:t>is</a:t>
-            </a:r>
-            <a:r>
-              <a:rPr lang="de-DE" dirty="0"/>
-              <a:t> explicit loop </a:t>
-            </a:r>
-            <a:r>
-              <a:rPr lang="de-DE" dirty="0" err="1"/>
-              <a:t>shaping</a:t>
-            </a:r>
-            <a:r>
-              <a:rPr lang="de-DE" dirty="0"/>
-              <a:t>, </a:t>
-            </a:r>
-            <a:r>
-              <a:rPr lang="de-DE" dirty="0" err="1"/>
-              <a:t>because</a:t>
-            </a:r>
-            <a:r>
-              <a:rPr lang="de-DE" dirty="0"/>
-              <a:t> </a:t>
-            </a:r>
-            <a:r>
-              <a:rPr lang="de-DE" dirty="0" err="1"/>
-              <a:t>you</a:t>
-            </a:r>
-            <a:r>
-              <a:rPr lang="de-DE" dirty="0"/>
-              <a:t> </a:t>
-            </a:r>
-            <a:r>
-              <a:rPr lang="de-DE" dirty="0" err="1"/>
-              <a:t>set</a:t>
-            </a:r>
-            <a:r>
-              <a:rPr lang="de-DE" dirty="0"/>
-              <a:t> </a:t>
-            </a:r>
-            <a:r>
-              <a:rPr lang="de-DE" dirty="0" err="1"/>
-              <a:t>the</a:t>
-            </a:r>
-            <a:r>
-              <a:rPr lang="de-DE" dirty="0"/>
-              <a:t> </a:t>
-            </a:r>
-            <a:r>
-              <a:rPr lang="de-DE" dirty="0" err="1"/>
-              <a:t>effective</a:t>
-            </a:r>
-            <a:r>
-              <a:rPr lang="de-DE" dirty="0"/>
-              <a:t> L(s) = C(s)G(s) </a:t>
-            </a:r>
-            <a:r>
-              <a:rPr lang="de-DE" dirty="0" err="1"/>
-              <a:t>to</a:t>
-            </a:r>
-            <a:r>
-              <a:rPr lang="de-DE" dirty="0"/>
-              <a:t> </a:t>
-            </a:r>
-            <a:r>
-              <a:rPr lang="de-DE" dirty="0" err="1"/>
-              <a:t>achieve</a:t>
-            </a:r>
-            <a:r>
-              <a:rPr lang="de-DE" dirty="0"/>
-              <a:t> </a:t>
-            </a:r>
-            <a:r>
-              <a:rPr lang="de-DE" dirty="0" err="1"/>
-              <a:t>the</a:t>
-            </a:r>
-            <a:r>
-              <a:rPr lang="de-DE" dirty="0"/>
-              <a:t> </a:t>
-            </a:r>
-            <a:r>
-              <a:rPr lang="de-DE" dirty="0" err="1"/>
-              <a:t>target</a:t>
-            </a:r>
-            <a:r>
-              <a:rPr lang="de-DE" dirty="0"/>
-              <a:t> </a:t>
-            </a:r>
-            <a:r>
-              <a:rPr lang="de-DE" dirty="0" err="1"/>
-              <a:t>bandwidth</a:t>
-            </a:r>
-            <a:r>
-              <a:rPr lang="de-DE" dirty="0"/>
-              <a:t> and </a:t>
-            </a:r>
-            <a:r>
-              <a:rPr lang="de-DE" dirty="0" err="1"/>
-              <a:t>robustness</a:t>
-            </a:r>
-            <a:r>
-              <a:rPr lang="de-DE" dirty="0"/>
-              <a:t>.</a:t>
-            </a:r>
-          </a:p>
-          <a:p>
-            <a:pPr marL="0" indent="0">
-              <a:buNone/>
-            </a:pPr>
-            <a:endParaRPr lang="de-DE" dirty="0"/>
-          </a:p>
-          <a:p>
-            <a:pPr marL="0" indent="0">
-              <a:buNone/>
-            </a:pPr>
-            <a:r>
-              <a:rPr lang="de-DE" dirty="0"/>
-              <a:t>…</a:t>
-            </a:r>
-          </a:p>
-          <a:p>
-            <a:endParaRPr lang="de-DE" dirty="0"/>
-          </a:p>
-        </p:txBody>
-      </p:sp>
+      <mc:AlternateContent xmlns:mc="http://schemas.openxmlformats.org/markup-compatibility/2006">
+        <mc:Choice xmlns:a14="http://schemas.microsoft.com/office/drawing/2010/main" Requires="a14">
+          <p:sp>
+            <p:nvSpPr>
+              <p:cNvPr id="3" name="Inhaltsplatzhalter 2">
+                <a:extLst>
+                  <a:ext uri="{FF2B5EF4-FFF2-40B4-BE49-F238E27FC236}">
+                    <a16:creationId xmlns:a16="http://schemas.microsoft.com/office/drawing/2014/main" id="{9922CB98-5200-2FB8-E31C-9B515916A3C0}"/>
+                  </a:ext>
+                </a:extLst>
+              </p:cNvPr>
+              <p:cNvSpPr>
+                <a:spLocks noGrp="1"/>
+              </p:cNvSpPr>
+              <p:nvPr>
+                <p:ph idx="1"/>
+              </p:nvPr>
+            </p:nvSpPr>
+            <p:spPr/>
+            <p:txBody>
+              <a:bodyPr>
+                <a:normAutofit fontScale="70000" lnSpcReduction="20000"/>
+              </a:bodyPr>
+              <a:lstStyle/>
+              <a:p>
+                <a:pPr marL="0" indent="0">
+                  <a:buNone/>
+                </a:pPr>
+                <a:r>
+                  <a:rPr lang="de-DE" sz="2900" dirty="0"/>
+                  <a:t>Design </a:t>
+                </a:r>
+                <a14:m>
+                  <m:oMath xmlns:m="http://schemas.openxmlformats.org/officeDocument/2006/math">
+                    <m:r>
+                      <a:rPr lang="de-DE" sz="2900" i="1">
+                        <a:latin typeface="Cambria Math" panose="02040503050406030204" pitchFamily="18" charset="0"/>
+                      </a:rPr>
+                      <m:t>𝐶</m:t>
+                    </m:r>
+                    <m:r>
+                      <a:rPr lang="de-DE" sz="2900" i="1">
+                        <a:latin typeface="Cambria Math" panose="02040503050406030204" pitchFamily="18" charset="0"/>
+                      </a:rPr>
+                      <m:t>(</m:t>
+                    </m:r>
+                    <m:r>
+                      <a:rPr lang="de-DE" sz="2900" i="1">
+                        <a:latin typeface="Cambria Math" panose="02040503050406030204" pitchFamily="18" charset="0"/>
+                      </a:rPr>
+                      <m:t>𝑠</m:t>
+                    </m:r>
+                    <m:r>
+                      <a:rPr lang="de-DE" sz="2900" i="1">
+                        <a:latin typeface="Cambria Math" panose="02040503050406030204" pitchFamily="18" charset="0"/>
+                      </a:rPr>
+                      <m:t>)</m:t>
+                    </m:r>
+                  </m:oMath>
+                </a14:m>
+                <a:r>
+                  <a:rPr lang="de-DE" sz="2900" dirty="0"/>
+                  <a:t> </a:t>
+                </a:r>
+                <a:r>
+                  <a:rPr lang="de-DE" sz="2900" dirty="0" err="1"/>
+                  <a:t>from</a:t>
+                </a:r>
+                <a:r>
+                  <a:rPr lang="de-DE" sz="2900" dirty="0"/>
+                  <a:t> a plant </a:t>
+                </a:r>
+                <a:r>
+                  <a:rPr lang="de-DE" sz="2900" dirty="0" err="1"/>
+                  <a:t>model</a:t>
+                </a:r>
+                <a:r>
+                  <a:rPr lang="de-DE" sz="2900" dirty="0"/>
+                  <a:t> so </a:t>
+                </a:r>
+                <a:r>
+                  <a:rPr lang="de-DE" sz="2900" dirty="0" err="1"/>
+                  <a:t>that</a:t>
+                </a:r>
+                <a:r>
+                  <a:rPr lang="de-DE" sz="2900" dirty="0"/>
+                  <a:t> </a:t>
+                </a:r>
+                <a:r>
+                  <a:rPr lang="de-DE" sz="2900" dirty="0" err="1"/>
+                  <a:t>closed</a:t>
+                </a:r>
+                <a:r>
+                  <a:rPr lang="de-DE" sz="2900" dirty="0"/>
+                  <a:t>-loop </a:t>
+                </a:r>
+                <a:r>
+                  <a:rPr lang="de-DE" sz="2900" dirty="0" err="1"/>
+                  <a:t>response</a:t>
+                </a:r>
+                <a:r>
+                  <a:rPr lang="de-DE" sz="2900" dirty="0"/>
+                  <a:t> </a:t>
+                </a:r>
+                <a:r>
+                  <a:rPr lang="de-DE" sz="2900" dirty="0" err="1"/>
+                  <a:t>behaves</a:t>
+                </a:r>
+                <a:r>
+                  <a:rPr lang="de-DE" sz="2900" dirty="0"/>
+                  <a:t> like a </a:t>
+                </a:r>
+                <a:r>
+                  <a:rPr lang="de-DE" sz="2900" dirty="0" err="1"/>
+                  <a:t>desired</a:t>
+                </a:r>
+                <a:r>
+                  <a:rPr lang="de-DE" sz="2900" dirty="0"/>
+                  <a:t> first-order/</a:t>
+                </a:r>
+                <a:r>
+                  <a:rPr lang="de-DE" sz="2900" dirty="0" err="1"/>
+                  <a:t>second</a:t>
+                </a:r>
+                <a:r>
+                  <a:rPr lang="de-DE" sz="2900" dirty="0"/>
+                  <a:t>-order </a:t>
+                </a:r>
+                <a:r>
+                  <a:rPr lang="de-DE" sz="2900" dirty="0" err="1"/>
+                  <a:t>system</a:t>
+                </a:r>
+                <a:endParaRPr lang="de-DE" sz="2900" dirty="0"/>
+              </a:p>
+              <a:p>
+                <a:pPr marL="0" indent="0">
+                  <a:buNone/>
+                </a:pPr>
+                <a:r>
+                  <a:rPr lang="de-DE" sz="2900" dirty="0"/>
+                  <a:t>Explicit loop </a:t>
+                </a:r>
+                <a:r>
+                  <a:rPr lang="de-DE" sz="2900" dirty="0" err="1"/>
+                  <a:t>shaping</a:t>
+                </a:r>
+                <a:r>
+                  <a:rPr lang="de-DE" sz="2900" dirty="0"/>
+                  <a:t>: </a:t>
+                </a:r>
+                <a:r>
+                  <a:rPr lang="de-DE" sz="2900" dirty="0" err="1"/>
+                  <a:t>set</a:t>
+                </a:r>
+                <a:r>
+                  <a:rPr lang="de-DE" sz="2900" dirty="0"/>
+                  <a:t> </a:t>
+                </a:r>
+                <a:r>
+                  <a:rPr lang="de-DE" sz="2900" dirty="0" err="1"/>
+                  <a:t>effective</a:t>
+                </a:r>
+                <a:r>
+                  <a:rPr lang="de-DE" sz="2900" dirty="0"/>
+                  <a:t> </a:t>
+                </a:r>
+                <a14:m>
+                  <m:oMath xmlns:m="http://schemas.openxmlformats.org/officeDocument/2006/math">
+                    <m:r>
+                      <a:rPr lang="de-DE" sz="2900" i="1">
+                        <a:latin typeface="Cambria Math" panose="02040503050406030204" pitchFamily="18" charset="0"/>
+                      </a:rPr>
+                      <m:t>𝐿</m:t>
+                    </m:r>
+                    <m:d>
+                      <m:dPr>
+                        <m:ctrlPr>
+                          <a:rPr lang="de-DE" sz="2900" i="1">
+                            <a:latin typeface="Cambria Math" panose="02040503050406030204" pitchFamily="18" charset="0"/>
+                          </a:rPr>
+                        </m:ctrlPr>
+                      </m:dPr>
+                      <m:e>
+                        <m:r>
+                          <a:rPr lang="de-DE" sz="2900" i="1">
+                            <a:latin typeface="Cambria Math" panose="02040503050406030204" pitchFamily="18" charset="0"/>
+                          </a:rPr>
+                          <m:t>𝑠</m:t>
+                        </m:r>
+                      </m:e>
+                    </m:d>
+                    <m:r>
+                      <a:rPr lang="de-DE" sz="2900" i="1">
+                        <a:latin typeface="Cambria Math" panose="02040503050406030204" pitchFamily="18" charset="0"/>
+                      </a:rPr>
+                      <m:t>=</m:t>
+                    </m:r>
+                    <m:r>
+                      <a:rPr lang="de-DE" sz="2900" i="1">
+                        <a:latin typeface="Cambria Math" panose="02040503050406030204" pitchFamily="18" charset="0"/>
+                      </a:rPr>
+                      <m:t>𝐾</m:t>
+                    </m:r>
+                    <m:r>
+                      <a:rPr lang="de-DE" sz="2900" i="1">
+                        <a:latin typeface="Cambria Math" panose="02040503050406030204" pitchFamily="18" charset="0"/>
+                      </a:rPr>
+                      <m:t> </m:t>
+                    </m:r>
+                    <m:r>
+                      <a:rPr lang="de-DE" sz="2900" i="1">
+                        <a:latin typeface="Cambria Math" panose="02040503050406030204" pitchFamily="18" charset="0"/>
+                      </a:rPr>
+                      <m:t>𝐺</m:t>
+                    </m:r>
+                    <m:r>
+                      <a:rPr lang="de-DE" sz="2900" i="1">
+                        <a:latin typeface="Cambria Math" panose="02040503050406030204" pitchFamily="18" charset="0"/>
+                      </a:rPr>
+                      <m:t>(</m:t>
+                    </m:r>
+                    <m:r>
+                      <a:rPr lang="de-DE" sz="2900" i="1">
+                        <a:latin typeface="Cambria Math" panose="02040503050406030204" pitchFamily="18" charset="0"/>
+                      </a:rPr>
+                      <m:t>𝑠</m:t>
+                    </m:r>
+                    <m:r>
+                      <a:rPr lang="de-DE" sz="2900" i="1">
+                        <a:latin typeface="Cambria Math" panose="02040503050406030204" pitchFamily="18" charset="0"/>
+                      </a:rPr>
+                      <m:t>)</m:t>
+                    </m:r>
+                  </m:oMath>
+                </a14:m>
+                <a:r>
+                  <a:rPr lang="de-DE" sz="2900" dirty="0"/>
+                  <a:t> </a:t>
+                </a:r>
+                <a:r>
+                  <a:rPr lang="de-DE" sz="2900" dirty="0" err="1"/>
+                  <a:t>to</a:t>
+                </a:r>
+                <a:r>
+                  <a:rPr lang="de-DE" sz="2900" dirty="0"/>
+                  <a:t> </a:t>
+                </a:r>
+                <a:r>
+                  <a:rPr lang="de-DE" sz="2900" dirty="0" err="1"/>
+                  <a:t>achieve</a:t>
+                </a:r>
+                <a:r>
+                  <a:rPr lang="de-DE" sz="2900" dirty="0"/>
+                  <a:t> </a:t>
+                </a:r>
+                <a:r>
+                  <a:rPr lang="de-DE" sz="2900" dirty="0" err="1"/>
+                  <a:t>target</a:t>
+                </a:r>
+                <a:r>
+                  <a:rPr lang="de-DE" sz="2900" dirty="0"/>
+                  <a:t> </a:t>
+                </a:r>
+                <a:r>
+                  <a:rPr lang="de-DE" sz="2900" dirty="0" err="1"/>
+                  <a:t>bandwidth</a:t>
+                </a:r>
+                <a:r>
+                  <a:rPr lang="de-DE" sz="2900" dirty="0"/>
+                  <a:t> and </a:t>
+                </a:r>
+                <a:r>
+                  <a:rPr lang="de-DE" sz="2900" dirty="0" err="1"/>
+                  <a:t>robustness</a:t>
+                </a:r>
+                <a:endParaRPr lang="de-DE" sz="2900" dirty="0"/>
+              </a:p>
+              <a:p>
+                <a:pPr marL="0" indent="0">
+                  <a:buNone/>
+                </a:pPr>
+                <a:endParaRPr lang="de-DE" sz="2900" dirty="0"/>
+              </a:p>
+              <a:p>
+                <a:pPr marL="0" indent="0">
+                  <a:buNone/>
+                </a:pPr>
+                <a:r>
+                  <a:rPr lang="de-DE" sz="2900" dirty="0"/>
+                  <a:t>Advantages:</a:t>
+                </a:r>
+              </a:p>
+              <a:p>
+                <a:r>
+                  <a:rPr lang="de-DE" sz="2900" dirty="0" err="1"/>
+                  <a:t>systematic</a:t>
+                </a:r>
+                <a:r>
+                  <a:rPr lang="de-DE" sz="2900" dirty="0"/>
+                  <a:t> </a:t>
+                </a:r>
+                <a:r>
+                  <a:rPr lang="de-DE" sz="2900" dirty="0" err="1"/>
+                  <a:t>controller</a:t>
+                </a:r>
+                <a:r>
+                  <a:rPr lang="de-DE" sz="2900" dirty="0"/>
+                  <a:t> design </a:t>
+                </a:r>
+                <a:r>
+                  <a:rPr lang="de-DE" sz="2900" dirty="0" err="1"/>
+                  <a:t>based</a:t>
+                </a:r>
+                <a:r>
+                  <a:rPr lang="de-DE" sz="2900" dirty="0"/>
+                  <a:t> on plant </a:t>
+                </a:r>
+                <a:r>
+                  <a:rPr lang="de-DE" sz="2900" dirty="0" err="1"/>
+                  <a:t>model</a:t>
+                </a:r>
+                <a:endParaRPr lang="de-DE" sz="2900" dirty="0"/>
+              </a:p>
+              <a:p>
+                <a:r>
+                  <a:rPr lang="de-DE" sz="2900" dirty="0"/>
+                  <a:t>explicit trade-off </a:t>
+                </a:r>
+                <a:r>
+                  <a:rPr lang="de-DE" sz="2900" dirty="0" err="1"/>
+                  <a:t>between</a:t>
+                </a:r>
+                <a:r>
+                  <a:rPr lang="de-DE" sz="2900" dirty="0"/>
+                  <a:t> </a:t>
+                </a:r>
+                <a:r>
+                  <a:rPr lang="de-DE" sz="2900" dirty="0" err="1"/>
+                  <a:t>performance</a:t>
+                </a:r>
+                <a:r>
+                  <a:rPr lang="de-DE" sz="2900" dirty="0"/>
+                  <a:t> and </a:t>
+                </a:r>
+                <a:r>
+                  <a:rPr lang="de-DE" sz="2900" dirty="0" err="1"/>
+                  <a:t>robustness</a:t>
+                </a:r>
+                <a:endParaRPr lang="de-DE" sz="2900" dirty="0"/>
+              </a:p>
+              <a:p>
+                <a:r>
+                  <a:rPr lang="de-DE" sz="2900" dirty="0" err="1"/>
+                  <a:t>often</a:t>
+                </a:r>
+                <a:r>
+                  <a:rPr lang="de-DE" sz="2900" dirty="0"/>
+                  <a:t> </a:t>
+                </a:r>
+                <a:r>
+                  <a:rPr lang="de-DE" sz="2900" dirty="0" err="1"/>
+                  <a:t>leads</a:t>
+                </a:r>
+                <a:r>
+                  <a:rPr lang="de-DE" sz="2900" dirty="0"/>
+                  <a:t> </a:t>
+                </a:r>
+                <a:r>
+                  <a:rPr lang="de-DE" sz="2900" dirty="0" err="1"/>
+                  <a:t>to</a:t>
+                </a:r>
+                <a:r>
+                  <a:rPr lang="de-DE" sz="2900" dirty="0"/>
+                  <a:t> simple PI </a:t>
+                </a:r>
+                <a:r>
+                  <a:rPr lang="de-DE" sz="2900" dirty="0" err="1"/>
+                  <a:t>or</a:t>
+                </a:r>
+                <a:r>
+                  <a:rPr lang="de-DE" sz="2900" dirty="0"/>
+                  <a:t> PID </a:t>
+                </a:r>
+                <a:r>
+                  <a:rPr lang="de-DE" sz="2900" dirty="0" err="1"/>
+                  <a:t>structures</a:t>
+                </a:r>
+                <a:endParaRPr lang="de-DE" sz="2900" dirty="0"/>
+              </a:p>
+              <a:p>
+                <a:pPr marL="0" indent="0">
+                  <a:buNone/>
+                </a:pPr>
+                <a:endParaRPr lang="de-DE" sz="2900" dirty="0"/>
+              </a:p>
+              <a:p>
+                <a:pPr marL="0" indent="0">
+                  <a:buNone/>
+                </a:pPr>
+                <a:r>
+                  <a:rPr lang="de-DE" sz="2900" dirty="0" err="1"/>
+                  <a:t>Limitations</a:t>
+                </a:r>
+                <a:r>
+                  <a:rPr lang="de-DE" sz="2900" dirty="0"/>
+                  <a:t>:</a:t>
+                </a:r>
+              </a:p>
+              <a:p>
+                <a:r>
+                  <a:rPr lang="de-DE" sz="2900" dirty="0" err="1"/>
+                  <a:t>requires</a:t>
+                </a:r>
+                <a:r>
+                  <a:rPr lang="de-DE" sz="2900" dirty="0"/>
+                  <a:t> </a:t>
+                </a:r>
+                <a:r>
+                  <a:rPr lang="de-DE" sz="2900" dirty="0" err="1"/>
+                  <a:t>reasonably</a:t>
+                </a:r>
+                <a:r>
+                  <a:rPr lang="de-DE" sz="2900" dirty="0"/>
+                  <a:t> </a:t>
+                </a:r>
+                <a:r>
+                  <a:rPr lang="de-DE" sz="2900" dirty="0" err="1"/>
+                  <a:t>accurate</a:t>
+                </a:r>
+                <a:r>
+                  <a:rPr lang="de-DE" sz="2900" dirty="0"/>
+                  <a:t> plant </a:t>
+                </a:r>
+                <a:r>
+                  <a:rPr lang="de-DE" sz="2900" dirty="0" err="1"/>
+                  <a:t>model</a:t>
+                </a:r>
+                <a:endParaRPr lang="de-DE" sz="2900" dirty="0"/>
+              </a:p>
+              <a:p>
+                <a:r>
+                  <a:rPr lang="de-DE" sz="2900" dirty="0" err="1"/>
+                  <a:t>performance</a:t>
+                </a:r>
+                <a:r>
+                  <a:rPr lang="de-DE" sz="2900" dirty="0"/>
+                  <a:t> </a:t>
+                </a:r>
+                <a:r>
+                  <a:rPr lang="de-DE" sz="2900" dirty="0" err="1"/>
+                  <a:t>degrades</a:t>
+                </a:r>
+                <a:r>
+                  <a:rPr lang="de-DE" sz="2900" dirty="0"/>
+                  <a:t> </a:t>
+                </a:r>
+                <a:r>
+                  <a:rPr lang="de-DE" sz="2900" dirty="0" err="1"/>
+                  <a:t>if</a:t>
+                </a:r>
+                <a:r>
+                  <a:rPr lang="de-DE" sz="2900" dirty="0"/>
+                  <a:t> </a:t>
+                </a:r>
+                <a:r>
+                  <a:rPr lang="de-DE" sz="2900" dirty="0" err="1"/>
+                  <a:t>model</a:t>
+                </a:r>
+                <a:r>
+                  <a:rPr lang="de-DE" sz="2900" dirty="0"/>
+                  <a:t> </a:t>
+                </a:r>
+                <a:r>
+                  <a:rPr lang="de-DE" sz="2900" dirty="0" err="1"/>
+                  <a:t>mismatch</a:t>
+                </a:r>
+                <a:r>
+                  <a:rPr lang="de-DE" sz="2900" dirty="0"/>
+                  <a:t> </a:t>
+                </a:r>
+                <a:r>
+                  <a:rPr lang="de-DE" sz="2900" dirty="0" err="1"/>
+                  <a:t>is</a:t>
+                </a:r>
+                <a:r>
+                  <a:rPr lang="de-DE" sz="2900" dirty="0"/>
+                  <a:t> large</a:t>
+                </a:r>
+              </a:p>
+            </p:txBody>
+          </p:sp>
+        </mc:Choice>
+        <mc:Fallback>
+          <p:sp>
+            <p:nvSpPr>
+              <p:cNvPr id="3" name="Inhaltsplatzhalter 2">
+                <a:extLst>
+                  <a:ext uri="{FF2B5EF4-FFF2-40B4-BE49-F238E27FC236}">
+                    <a16:creationId xmlns:a16="http://schemas.microsoft.com/office/drawing/2014/main" id="{9922CB98-5200-2FB8-E31C-9B515916A3C0}"/>
+                  </a:ext>
+                </a:extLst>
+              </p:cNvPr>
+              <p:cNvSpPr>
+                <a:spLocks noGrp="1" noRot="1" noChangeAspect="1" noMove="1" noResize="1" noEditPoints="1" noAdjustHandles="1" noChangeArrowheads="1" noChangeShapeType="1" noTextEdit="1"/>
+              </p:cNvSpPr>
+              <p:nvPr>
+                <p:ph idx="1"/>
+              </p:nvPr>
+            </p:nvSpPr>
+            <p:spPr>
+              <a:blipFill>
+                <a:blip r:embed="rId2"/>
+                <a:stretch>
+                  <a:fillRect l="-724" t="-2035"/>
+                </a:stretch>
+              </a:blipFill>
+            </p:spPr>
+            <p:txBody>
+              <a:bodyPr/>
+              <a:lstStyle/>
+              <a:p>
+                <a:r>
+                  <a:rPr lang="de-DE">
+                    <a:noFill/>
+                  </a:rPr>
+                  <a:t> </a:t>
+                </a:r>
+              </a:p>
+            </p:txBody>
+          </p:sp>
+        </mc:Fallback>
+      </mc:AlternateContent>
       <p:sp>
         <p:nvSpPr>
           <p:cNvPr id="4" name="Foliennummernplatzhalter 3">
@@ -12753,207 +14009,596 @@
           </a:p>
         </p:txBody>
       </p:sp>
-      <p:sp>
-        <p:nvSpPr>
-          <p:cNvPr id="3" name="Inhaltsplatzhalter 2">
-            <a:extLst>
-              <a:ext uri="{FF2B5EF4-FFF2-40B4-BE49-F238E27FC236}">
-                <a16:creationId xmlns:a16="http://schemas.microsoft.com/office/drawing/2014/main" id="{5AC4A9C3-17AC-7387-6BD0-D57386930B09}"/>
-              </a:ext>
-            </a:extLst>
-          </p:cNvPr>
-          <p:cNvSpPr>
-            <a:spLocks noGrp="1"/>
-          </p:cNvSpPr>
-          <p:nvPr>
-            <p:ph idx="1"/>
-          </p:nvPr>
-        </p:nvSpPr>
-        <p:spPr/>
-        <p:txBody>
-          <a:bodyPr/>
-          <a:lstStyle/>
-          <a:p>
-            <a:r>
-              <a:rPr lang="de-DE" dirty="0" err="1"/>
-              <a:t>You</a:t>
-            </a:r>
-            <a:r>
-              <a:rPr lang="de-DE" dirty="0"/>
-              <a:t> </a:t>
-            </a:r>
-            <a:r>
-              <a:rPr lang="de-DE" dirty="0" err="1"/>
-              <a:t>select</a:t>
-            </a:r>
-            <a:r>
-              <a:rPr lang="de-DE" dirty="0"/>
-              <a:t> C(s) so </a:t>
-            </a:r>
-            <a:r>
-              <a:rPr lang="de-DE" dirty="0" err="1"/>
-              <a:t>that</a:t>
-            </a:r>
-            <a:r>
-              <a:rPr lang="de-DE" dirty="0"/>
-              <a:t> </a:t>
-            </a:r>
-            <a:r>
-              <a:rPr lang="de-DE" dirty="0" err="1"/>
-              <a:t>closed</a:t>
-            </a:r>
-            <a:r>
-              <a:rPr lang="de-DE" dirty="0"/>
-              <a:t>-loop </a:t>
-            </a:r>
-            <a:r>
-              <a:rPr lang="de-DE" dirty="0" err="1"/>
-              <a:t>poles</a:t>
-            </a:r>
-            <a:r>
-              <a:rPr lang="de-DE" dirty="0"/>
-              <a:t> </a:t>
-            </a:r>
-            <a:r>
-              <a:rPr lang="de-DE" dirty="0" err="1"/>
-              <a:t>are</a:t>
-            </a:r>
-            <a:r>
-              <a:rPr lang="de-DE" dirty="0"/>
-              <a:t> at </a:t>
-            </a:r>
-            <a:r>
-              <a:rPr lang="de-DE" dirty="0" err="1"/>
-              <a:t>desired</a:t>
-            </a:r>
-            <a:r>
-              <a:rPr lang="de-DE" dirty="0"/>
-              <a:t> </a:t>
-            </a:r>
-            <a:r>
-              <a:rPr lang="de-DE" dirty="0" err="1"/>
-              <a:t>locations</a:t>
-            </a:r>
-            <a:r>
-              <a:rPr lang="de-DE" dirty="0"/>
-              <a:t>.</a:t>
-            </a:r>
-          </a:p>
-          <a:p>
-            <a:r>
-              <a:rPr lang="de-DE" dirty="0" err="1"/>
-              <a:t>Since</a:t>
-            </a:r>
-            <a:r>
-              <a:rPr lang="de-DE" dirty="0"/>
-              <a:t> </a:t>
-            </a:r>
-            <a:r>
-              <a:rPr lang="de-DE" dirty="0" err="1"/>
-              <a:t>closed</a:t>
-            </a:r>
-            <a:r>
-              <a:rPr lang="de-DE" dirty="0"/>
-              <a:t>-loop </a:t>
-            </a:r>
-            <a:r>
-              <a:rPr lang="de-DE" dirty="0" err="1"/>
-              <a:t>poles</a:t>
-            </a:r>
-            <a:r>
-              <a:rPr lang="de-DE" dirty="0"/>
-              <a:t> </a:t>
-            </a:r>
-            <a:r>
-              <a:rPr lang="de-DE" dirty="0" err="1"/>
-              <a:t>are</a:t>
-            </a:r>
-            <a:r>
-              <a:rPr lang="de-DE" dirty="0"/>
-              <a:t> </a:t>
-            </a:r>
-            <a:r>
-              <a:rPr lang="de-DE" dirty="0" err="1"/>
-              <a:t>roots</a:t>
-            </a:r>
-            <a:r>
-              <a:rPr lang="de-DE" dirty="0"/>
-              <a:t> </a:t>
-            </a:r>
-            <a:r>
-              <a:rPr lang="de-DE" dirty="0" err="1"/>
-              <a:t>of</a:t>
-            </a:r>
-            <a:r>
-              <a:rPr lang="de-DE" dirty="0"/>
-              <a:t> 1 + L(s) = 0, </a:t>
-            </a:r>
-            <a:r>
-              <a:rPr lang="de-DE" dirty="0" err="1"/>
-              <a:t>choosing</a:t>
-            </a:r>
-            <a:r>
-              <a:rPr lang="de-DE" dirty="0"/>
-              <a:t> pole </a:t>
-            </a:r>
-            <a:r>
-              <a:rPr lang="de-DE" dirty="0" err="1"/>
-              <a:t>locations</a:t>
-            </a:r>
-            <a:r>
-              <a:rPr lang="de-DE" dirty="0"/>
-              <a:t> </a:t>
-            </a:r>
-            <a:r>
-              <a:rPr lang="de-DE" dirty="0" err="1"/>
-              <a:t>is</a:t>
-            </a:r>
-            <a:r>
-              <a:rPr lang="de-DE" dirty="0"/>
-              <a:t> </a:t>
-            </a:r>
-            <a:r>
-              <a:rPr lang="de-DE" dirty="0" err="1"/>
-              <a:t>directly</a:t>
-            </a:r>
-            <a:r>
-              <a:rPr lang="de-DE" dirty="0"/>
-              <a:t> </a:t>
-            </a:r>
-            <a:r>
-              <a:rPr lang="de-DE" dirty="0" err="1"/>
-              <a:t>shaping</a:t>
-            </a:r>
-            <a:r>
-              <a:rPr lang="de-DE" dirty="0"/>
-              <a:t> L(s) in </a:t>
-            </a:r>
-            <a:r>
-              <a:rPr lang="de-DE" dirty="0" err="1"/>
-              <a:t>the</a:t>
-            </a:r>
-            <a:r>
-              <a:rPr lang="de-DE" dirty="0"/>
-              <a:t> s-plane.</a:t>
-            </a:r>
-          </a:p>
-          <a:p>
-            <a:pPr marL="0" indent="0">
-              <a:buNone/>
-            </a:pPr>
-            <a:endParaRPr lang="de-DE" dirty="0"/>
-          </a:p>
-          <a:p>
-            <a:pPr marL="0" indent="0">
-              <a:buNone/>
-            </a:pPr>
-            <a:r>
-              <a:rPr lang="de-DE" dirty="0"/>
-              <a:t>…</a:t>
-            </a:r>
-          </a:p>
-        </p:txBody>
-      </p:sp>
+      <mc:AlternateContent xmlns:mc="http://schemas.openxmlformats.org/markup-compatibility/2006">
+        <mc:Choice xmlns:a14="http://schemas.microsoft.com/office/drawing/2010/main" Requires="a14">
+          <p:sp>
+            <p:nvSpPr>
+              <p:cNvPr id="3" name="Inhaltsplatzhalter 2">
+                <a:extLst>
+                  <a:ext uri="{FF2B5EF4-FFF2-40B4-BE49-F238E27FC236}">
+                    <a16:creationId xmlns:a16="http://schemas.microsoft.com/office/drawing/2014/main" id="{5AC4A9C3-17AC-7387-6BD0-D57386930B09}"/>
+                  </a:ext>
+                </a:extLst>
+              </p:cNvPr>
+              <p:cNvSpPr>
+                <a:spLocks noGrp="1"/>
+              </p:cNvSpPr>
+              <p:nvPr>
+                <p:ph idx="1"/>
+              </p:nvPr>
+            </p:nvSpPr>
+            <p:spPr/>
+            <p:txBody>
+              <a:bodyPr>
+                <a:normAutofit fontScale="77500" lnSpcReduction="20000"/>
+              </a:bodyPr>
+              <a:lstStyle/>
+              <a:p>
+                <a:pPr marL="0" indent="0">
+                  <a:buNone/>
+                </a:pPr>
+                <a:r>
+                  <a:rPr lang="de-DE" dirty="0"/>
+                  <a:t>Select </a:t>
+                </a:r>
+                <a14:m>
+                  <m:oMath xmlns:m="http://schemas.openxmlformats.org/officeDocument/2006/math">
+                    <m:r>
+                      <a:rPr lang="de-DE" i="1">
+                        <a:latin typeface="Cambria Math" panose="02040503050406030204" pitchFamily="18" charset="0"/>
+                      </a:rPr>
+                      <m:t>𝐶</m:t>
+                    </m:r>
+                    <m:d>
+                      <m:dPr>
+                        <m:ctrlPr>
+                          <a:rPr lang="de-DE" i="1">
+                            <a:latin typeface="Cambria Math" panose="02040503050406030204" pitchFamily="18" charset="0"/>
+                          </a:rPr>
+                        </m:ctrlPr>
+                      </m:dPr>
+                      <m:e>
+                        <m:r>
+                          <a:rPr lang="de-DE" i="1">
+                            <a:latin typeface="Cambria Math" panose="02040503050406030204" pitchFamily="18" charset="0"/>
+                          </a:rPr>
+                          <m:t>𝑠</m:t>
+                        </m:r>
+                      </m:e>
+                    </m:d>
+                  </m:oMath>
+                </a14:m>
+                <a:r>
+                  <a:rPr lang="de-DE" dirty="0"/>
+                  <a:t> so </a:t>
+                </a:r>
+                <a:r>
+                  <a:rPr lang="de-DE" dirty="0" err="1"/>
+                  <a:t>that</a:t>
+                </a:r>
+                <a:r>
+                  <a:rPr lang="de-DE" dirty="0"/>
+                  <a:t> </a:t>
+                </a:r>
+                <a:r>
+                  <a:rPr lang="de-DE" dirty="0" err="1"/>
+                  <a:t>closed</a:t>
+                </a:r>
+                <a:r>
+                  <a:rPr lang="de-DE" dirty="0"/>
+                  <a:t>-loop </a:t>
+                </a:r>
+                <a:r>
+                  <a:rPr lang="de-DE" dirty="0" err="1"/>
+                  <a:t>poles</a:t>
+                </a:r>
+                <a:r>
+                  <a:rPr lang="de-DE" dirty="0"/>
+                  <a:t> </a:t>
+                </a:r>
+                <a:r>
+                  <a:rPr lang="de-DE" dirty="0" err="1"/>
+                  <a:t>are</a:t>
+                </a:r>
+                <a:r>
+                  <a:rPr lang="de-DE" dirty="0"/>
+                  <a:t> at </a:t>
+                </a:r>
+                <a:r>
+                  <a:rPr lang="de-DE" dirty="0" err="1"/>
+                  <a:t>desired</a:t>
+                </a:r>
+                <a:r>
+                  <a:rPr lang="de-DE" dirty="0"/>
+                  <a:t> </a:t>
+                </a:r>
+                <a:r>
+                  <a:rPr lang="de-DE" dirty="0" err="1"/>
+                  <a:t>locations</a:t>
+                </a:r>
+                <a:endParaRPr lang="de-DE" dirty="0"/>
+              </a:p>
+              <a:p>
+                <a:pPr marL="0" indent="0">
+                  <a:buNone/>
+                </a:pPr>
+                <a:r>
+                  <a:rPr lang="de-DE" dirty="0" err="1"/>
+                  <a:t>Closed</a:t>
+                </a:r>
+                <a:r>
+                  <a:rPr lang="de-DE" dirty="0"/>
+                  <a:t>-loop </a:t>
+                </a:r>
+                <a:r>
+                  <a:rPr lang="de-DE" dirty="0" err="1"/>
+                  <a:t>poles</a:t>
+                </a:r>
+                <a:r>
+                  <a:rPr lang="de-DE" dirty="0"/>
+                  <a:t> </a:t>
+                </a:r>
+                <a:r>
+                  <a:rPr lang="de-DE" dirty="0" err="1"/>
+                  <a:t>are</a:t>
+                </a:r>
+                <a:r>
+                  <a:rPr lang="de-DE" dirty="0"/>
+                  <a:t> </a:t>
+                </a:r>
+                <a:r>
+                  <a:rPr lang="de-DE" dirty="0" err="1"/>
+                  <a:t>roots</a:t>
+                </a:r>
+                <a:r>
+                  <a:rPr lang="de-DE" dirty="0"/>
+                  <a:t> </a:t>
+                </a:r>
+                <a:r>
+                  <a:rPr lang="de-DE" dirty="0" err="1"/>
+                  <a:t>of</a:t>
+                </a:r>
+                <a:r>
+                  <a:rPr lang="de-DE" dirty="0"/>
+                  <a:t> </a:t>
+                </a:r>
+                <a14:m>
+                  <m:oMath xmlns:m="http://schemas.openxmlformats.org/officeDocument/2006/math">
+                    <m:r>
+                      <a:rPr lang="de-DE" b="0" i="1" smtClean="0">
+                        <a:latin typeface="Cambria Math" panose="02040503050406030204" pitchFamily="18" charset="0"/>
+                      </a:rPr>
+                      <m:t>1+</m:t>
+                    </m:r>
+                    <m:r>
+                      <a:rPr lang="de-DE" b="0" i="1" smtClean="0">
+                        <a:latin typeface="Cambria Math" panose="02040503050406030204" pitchFamily="18" charset="0"/>
+                      </a:rPr>
+                      <m:t>𝐿</m:t>
+                    </m:r>
+                    <m:d>
+                      <m:dPr>
+                        <m:ctrlPr>
+                          <a:rPr lang="de-DE" b="0" i="1" smtClean="0">
+                            <a:latin typeface="Cambria Math" panose="02040503050406030204" pitchFamily="18" charset="0"/>
+                          </a:rPr>
+                        </m:ctrlPr>
+                      </m:dPr>
+                      <m:e>
+                        <m:r>
+                          <a:rPr lang="de-DE" b="0" i="1" smtClean="0">
+                            <a:latin typeface="Cambria Math" panose="02040503050406030204" pitchFamily="18" charset="0"/>
+                          </a:rPr>
+                          <m:t>𝑠</m:t>
+                        </m:r>
+                      </m:e>
+                    </m:d>
+                    <m:r>
+                      <a:rPr lang="de-DE" b="0" i="1" smtClean="0">
+                        <a:latin typeface="Cambria Math" panose="02040503050406030204" pitchFamily="18" charset="0"/>
+                      </a:rPr>
+                      <m:t>=0</m:t>
+                    </m:r>
+                  </m:oMath>
+                </a14:m>
+                <a:endParaRPr lang="de-DE" dirty="0">
+                  <a:sym typeface="Wingdings" pitchFamily="2" charset="2"/>
+                </a:endParaRPr>
+              </a:p>
+              <a:p>
+                <a:pPr marL="0" indent="0">
+                  <a:buNone/>
+                </a:pPr>
+                <a:r>
+                  <a:rPr lang="de-DE" dirty="0">
+                    <a:sym typeface="Wingdings" pitchFamily="2" charset="2"/>
+                  </a:rPr>
+                  <a:t> </a:t>
+                </a:r>
+                <a:r>
+                  <a:rPr lang="de-DE" dirty="0" err="1"/>
+                  <a:t>choosing</a:t>
+                </a:r>
+                <a:r>
+                  <a:rPr lang="de-DE" dirty="0"/>
+                  <a:t> pole </a:t>
+                </a:r>
+                <a:r>
+                  <a:rPr lang="de-DE" dirty="0" err="1"/>
+                  <a:t>locations</a:t>
+                </a:r>
+                <a:r>
+                  <a:rPr lang="de-DE" dirty="0"/>
+                  <a:t> </a:t>
+                </a:r>
+                <a:r>
+                  <a:rPr lang="de-DE" dirty="0" err="1"/>
+                  <a:t>directly</a:t>
+                </a:r>
+                <a:r>
+                  <a:rPr lang="de-DE" dirty="0"/>
+                  <a:t> </a:t>
+                </a:r>
+                <a:r>
+                  <a:rPr lang="de-DE" dirty="0" err="1"/>
+                  <a:t>shapes</a:t>
+                </a:r>
+                <a:r>
+                  <a:rPr lang="de-DE" dirty="0"/>
+                  <a:t> </a:t>
+                </a:r>
+                <a14:m>
+                  <m:oMath xmlns:m="http://schemas.openxmlformats.org/officeDocument/2006/math">
+                    <m:r>
+                      <a:rPr lang="de-DE" b="0" i="1" smtClean="0">
+                        <a:latin typeface="Cambria Math" panose="02040503050406030204" pitchFamily="18" charset="0"/>
+                      </a:rPr>
+                      <m:t>𝐿</m:t>
+                    </m:r>
+                    <m:r>
+                      <a:rPr lang="de-DE" b="0" i="1" smtClean="0">
+                        <a:latin typeface="Cambria Math" panose="02040503050406030204" pitchFamily="18" charset="0"/>
+                      </a:rPr>
+                      <m:t>(</m:t>
+                    </m:r>
+                    <m:r>
+                      <a:rPr lang="de-DE" b="0" i="1" smtClean="0">
+                        <a:latin typeface="Cambria Math" panose="02040503050406030204" pitchFamily="18" charset="0"/>
+                      </a:rPr>
+                      <m:t>𝑠</m:t>
+                    </m:r>
+                    <m:r>
+                      <a:rPr lang="de-DE" b="0" i="1" smtClean="0">
+                        <a:latin typeface="Cambria Math" panose="02040503050406030204" pitchFamily="18" charset="0"/>
+                      </a:rPr>
+                      <m:t>)</m:t>
+                    </m:r>
+                  </m:oMath>
+                </a14:m>
+                <a:r>
+                  <a:rPr lang="de-DE" dirty="0"/>
+                  <a:t> in </a:t>
+                </a:r>
+                <a:r>
+                  <a:rPr lang="de-DE" dirty="0" err="1"/>
+                  <a:t>the</a:t>
+                </a:r>
+                <a:r>
+                  <a:rPr lang="de-DE" dirty="0"/>
+                  <a:t> s-plane</a:t>
+                </a:r>
+              </a:p>
+              <a:p>
+                <a:pPr marL="0" indent="0">
+                  <a:buNone/>
+                </a:pPr>
+                <a:endParaRPr lang="de-DE" dirty="0"/>
+              </a:p>
+              <a:p>
+                <a:pPr marL="0" indent="0">
+                  <a:buNone/>
+                </a:pPr>
+                <a:r>
+                  <a:rPr lang="de-DE" dirty="0" err="1"/>
+                  <a:t>Typical</a:t>
+                </a:r>
+                <a:r>
+                  <a:rPr lang="de-DE" dirty="0"/>
+                  <a:t> </a:t>
+                </a:r>
+                <a:r>
+                  <a:rPr lang="de-DE" dirty="0" err="1"/>
+                  <a:t>steps</a:t>
+                </a:r>
+                <a:r>
+                  <a:rPr lang="de-DE" dirty="0"/>
+                  <a:t>:</a:t>
+                </a:r>
+              </a:p>
+              <a:p>
+                <a:pPr marL="514350" indent="-514350">
+                  <a:buFont typeface="+mj-lt"/>
+                  <a:buAutoNum type="arabicPeriod"/>
+                </a:pPr>
+                <a:r>
+                  <a:rPr lang="de-DE" dirty="0" err="1"/>
+                  <a:t>Obtain</a:t>
+                </a:r>
+                <a:r>
+                  <a:rPr lang="de-DE" dirty="0"/>
+                  <a:t> plant </a:t>
+                </a:r>
+                <a:r>
+                  <a:rPr lang="de-DE" dirty="0" err="1"/>
+                  <a:t>model</a:t>
+                </a:r>
+                <a:endParaRPr lang="de-DE" dirty="0"/>
+              </a:p>
+              <a:p>
+                <a:pPr marL="514350" indent="-514350">
+                  <a:buFont typeface="+mj-lt"/>
+                  <a:buAutoNum type="arabicPeriod"/>
+                </a:pPr>
+                <a:r>
+                  <a:rPr lang="de-DE" dirty="0" err="1"/>
+                  <a:t>Determine</a:t>
+                </a:r>
+                <a:r>
+                  <a:rPr lang="de-DE" dirty="0"/>
+                  <a:t> </a:t>
+                </a:r>
+                <a:r>
+                  <a:rPr lang="de-DE" dirty="0" err="1"/>
+                  <a:t>desired</a:t>
+                </a:r>
+                <a:r>
+                  <a:rPr lang="de-DE" dirty="0"/>
+                  <a:t> pole </a:t>
+                </a:r>
+                <a:r>
+                  <a:rPr lang="de-DE" dirty="0" err="1"/>
+                  <a:t>locations</a:t>
+                </a:r>
+                <a:r>
+                  <a:rPr lang="de-DE" dirty="0"/>
+                  <a:t> </a:t>
+                </a:r>
+                <a:r>
+                  <a:rPr lang="de-DE" dirty="0" err="1"/>
+                  <a:t>from</a:t>
+                </a:r>
+                <a:r>
+                  <a:rPr lang="de-DE" dirty="0"/>
+                  <a:t> </a:t>
+                </a:r>
+                <a:r>
+                  <a:rPr lang="de-DE" dirty="0" err="1"/>
+                  <a:t>performance</a:t>
+                </a:r>
+                <a:r>
+                  <a:rPr lang="de-DE" dirty="0"/>
+                  <a:t> </a:t>
+                </a:r>
+                <a:r>
+                  <a:rPr lang="de-DE" dirty="0" err="1"/>
+                  <a:t>requirements</a:t>
+                </a:r>
+                <a:endParaRPr lang="de-DE" dirty="0"/>
+              </a:p>
+              <a:p>
+                <a:pPr marL="514350" indent="-514350">
+                  <a:buFont typeface="+mj-lt"/>
+                  <a:buAutoNum type="arabicPeriod"/>
+                </a:pPr>
+                <a:r>
+                  <a:rPr lang="de-DE" dirty="0" err="1"/>
+                  <a:t>Compute</a:t>
+                </a:r>
+                <a:r>
+                  <a:rPr lang="de-DE" dirty="0"/>
+                  <a:t> </a:t>
+                </a:r>
+                <a:r>
+                  <a:rPr lang="de-DE" dirty="0" err="1"/>
+                  <a:t>controller</a:t>
+                </a:r>
+                <a:r>
+                  <a:rPr lang="de-DE" dirty="0"/>
+                  <a:t> </a:t>
+                </a:r>
+                <a:r>
+                  <a:rPr lang="de-DE" dirty="0" err="1"/>
+                  <a:t>parameters</a:t>
+                </a:r>
+                <a:r>
+                  <a:rPr lang="de-DE" dirty="0"/>
+                  <a:t> so </a:t>
+                </a:r>
+                <a:r>
+                  <a:rPr lang="de-DE" dirty="0" err="1"/>
+                  <a:t>closed</a:t>
+                </a:r>
+                <a:r>
+                  <a:rPr lang="de-DE" dirty="0"/>
+                  <a:t>-loop </a:t>
+                </a:r>
+                <a:r>
+                  <a:rPr lang="de-DE" dirty="0" err="1"/>
+                  <a:t>poles</a:t>
+                </a:r>
+                <a:r>
+                  <a:rPr lang="de-DE" dirty="0"/>
+                  <a:t> match </a:t>
+                </a:r>
+                <a:r>
+                  <a:rPr lang="de-DE" dirty="0" err="1"/>
+                  <a:t>targets</a:t>
+                </a:r>
+                <a:endParaRPr lang="de-DE" dirty="0"/>
+              </a:p>
+              <a:p>
+                <a:pPr marL="0" indent="0">
+                  <a:buNone/>
+                </a:pPr>
+                <a:endParaRPr lang="de-DE" dirty="0"/>
+              </a:p>
+              <a:p>
+                <a:r>
+                  <a:rPr lang="de-DE" dirty="0"/>
+                  <a:t>Advantage: </a:t>
+                </a:r>
+                <a:r>
+                  <a:rPr lang="de-DE" dirty="0" err="1"/>
+                  <a:t>direct</a:t>
+                </a:r>
+                <a:r>
+                  <a:rPr lang="de-DE" dirty="0"/>
+                  <a:t> </a:t>
+                </a:r>
+                <a:r>
+                  <a:rPr lang="de-DE" dirty="0" err="1"/>
+                  <a:t>control</a:t>
+                </a:r>
+                <a:r>
+                  <a:rPr lang="de-DE" dirty="0"/>
+                  <a:t> </a:t>
+                </a:r>
+                <a:r>
+                  <a:rPr lang="de-DE" dirty="0" err="1"/>
+                  <a:t>over</a:t>
+                </a:r>
+                <a:r>
+                  <a:rPr lang="de-DE" dirty="0"/>
+                  <a:t> </a:t>
+                </a:r>
+                <a:r>
+                  <a:rPr lang="de-DE" dirty="0" err="1"/>
+                  <a:t>system</a:t>
+                </a:r>
+                <a:r>
+                  <a:rPr lang="de-DE" dirty="0"/>
+                  <a:t> </a:t>
+                </a:r>
+                <a:r>
+                  <a:rPr lang="de-DE" dirty="0" err="1"/>
+                  <a:t>dynamics</a:t>
+                </a:r>
+                <a:endParaRPr lang="de-DE" dirty="0"/>
+              </a:p>
+              <a:p>
+                <a:r>
+                  <a:rPr lang="de-DE" dirty="0" err="1"/>
+                  <a:t>Limitations</a:t>
+                </a:r>
+                <a:r>
+                  <a:rPr lang="de-DE" dirty="0"/>
+                  <a:t>: </a:t>
+                </a:r>
+                <a:r>
+                  <a:rPr lang="de-DE" dirty="0" err="1"/>
+                  <a:t>requires</a:t>
+                </a:r>
+                <a:r>
+                  <a:rPr lang="de-DE" dirty="0"/>
+                  <a:t> </a:t>
+                </a:r>
+                <a:r>
+                  <a:rPr lang="de-DE" dirty="0" err="1"/>
+                  <a:t>accurate</a:t>
+                </a:r>
+                <a:r>
+                  <a:rPr lang="de-DE" dirty="0"/>
+                  <a:t> </a:t>
+                </a:r>
+                <a:r>
+                  <a:rPr lang="de-DE" dirty="0" err="1"/>
+                  <a:t>model</a:t>
+                </a:r>
+                <a:r>
+                  <a:rPr lang="de-DE" dirty="0"/>
+                  <a:t> and </a:t>
+                </a:r>
+                <a:r>
+                  <a:rPr lang="de-DE" dirty="0" err="1"/>
+                  <a:t>may</a:t>
+                </a:r>
+                <a:r>
+                  <a:rPr lang="de-DE" dirty="0"/>
+                  <a:t> </a:t>
+                </a:r>
+                <a:r>
+                  <a:rPr lang="de-DE" dirty="0" err="1"/>
+                  <a:t>require</a:t>
+                </a:r>
+                <a:r>
+                  <a:rPr lang="de-DE" dirty="0"/>
+                  <a:t> </a:t>
+                </a:r>
+                <a:r>
+                  <a:rPr lang="de-DE" dirty="0" err="1"/>
+                  <a:t>higher</a:t>
+                </a:r>
+                <a:r>
+                  <a:rPr lang="de-DE" dirty="0"/>
+                  <a:t>-order </a:t>
+                </a:r>
+                <a:r>
+                  <a:rPr lang="de-DE" dirty="0" err="1"/>
+                  <a:t>controller</a:t>
+                </a:r>
+                <a:r>
+                  <a:rPr lang="de-DE" dirty="0"/>
+                  <a:t> </a:t>
+                </a:r>
+                <a:r>
+                  <a:rPr lang="de-DE" dirty="0" err="1"/>
+                  <a:t>structures</a:t>
+                </a:r>
+                <a:endParaRPr lang="de-DE" dirty="0"/>
+              </a:p>
+            </p:txBody>
+          </p:sp>
+        </mc:Choice>
+        <mc:Fallback>
+          <p:sp>
+            <p:nvSpPr>
+              <p:cNvPr id="3" name="Inhaltsplatzhalter 2">
+                <a:extLst>
+                  <a:ext uri="{FF2B5EF4-FFF2-40B4-BE49-F238E27FC236}">
+                    <a16:creationId xmlns:a16="http://schemas.microsoft.com/office/drawing/2014/main" id="{5AC4A9C3-17AC-7387-6BD0-D57386930B09}"/>
+                  </a:ext>
+                </a:extLst>
+              </p:cNvPr>
+              <p:cNvSpPr>
+                <a:spLocks noGrp="1" noRot="1" noChangeAspect="1" noMove="1" noResize="1" noEditPoints="1" noAdjustHandles="1" noChangeArrowheads="1" noChangeShapeType="1" noTextEdit="1"/>
+              </p:cNvSpPr>
+              <p:nvPr>
+                <p:ph idx="1"/>
+              </p:nvPr>
+            </p:nvSpPr>
+            <p:spPr>
+              <a:blipFill>
+                <a:blip r:embed="rId2"/>
+                <a:stretch>
+                  <a:fillRect l="-844" t="-2616"/>
+                </a:stretch>
+              </a:blipFill>
+            </p:spPr>
+            <p:txBody>
+              <a:bodyPr/>
+              <a:lstStyle/>
+              <a:p>
+                <a:r>
+                  <a:rPr lang="de-DE">
+                    <a:noFill/>
+                  </a:rPr>
+                  <a:t> </a:t>
+                </a:r>
+              </a:p>
+            </p:txBody>
+          </p:sp>
+        </mc:Fallback>
+      </mc:AlternateContent>
       <p:sp>
         <p:nvSpPr>
           <p:cNvPr id="4" name="Foliennummernplatzhalter 3">
@@ -13045,242 +14690,482 @@
           </a:p>
         </p:txBody>
       </p:sp>
-      <p:sp>
-        <p:nvSpPr>
-          <p:cNvPr id="3" name="Inhaltsplatzhalter 2">
-            <a:extLst>
-              <a:ext uri="{FF2B5EF4-FFF2-40B4-BE49-F238E27FC236}">
-                <a16:creationId xmlns:a16="http://schemas.microsoft.com/office/drawing/2014/main" id="{A25B1BFB-C345-4C10-3FE3-385B457EAAC1}"/>
-              </a:ext>
-            </a:extLst>
-          </p:cNvPr>
-          <p:cNvSpPr>
-            <a:spLocks noGrp="1"/>
-          </p:cNvSpPr>
-          <p:nvPr>
-            <p:ph idx="1"/>
-          </p:nvPr>
-        </p:nvSpPr>
-        <p:spPr/>
-        <p:txBody>
-          <a:bodyPr/>
-          <a:lstStyle/>
-          <a:p>
-            <a:r>
-              <a:rPr lang="de-DE" dirty="0" err="1"/>
-              <a:t>You</a:t>
-            </a:r>
-            <a:r>
-              <a:rPr lang="de-DE" dirty="0"/>
-              <a:t> </a:t>
-            </a:r>
-            <a:r>
-              <a:rPr lang="de-DE" dirty="0" err="1"/>
-              <a:t>define</a:t>
-            </a:r>
-            <a:r>
-              <a:rPr lang="de-DE" dirty="0"/>
-              <a:t> a </a:t>
-            </a:r>
-            <a:r>
-              <a:rPr lang="de-DE" dirty="0" err="1"/>
-              <a:t>cost</a:t>
-            </a:r>
-            <a:r>
-              <a:rPr lang="de-DE" dirty="0"/>
-              <a:t> </a:t>
-            </a:r>
-            <a:r>
-              <a:rPr lang="de-DE" dirty="0" err="1"/>
-              <a:t>function</a:t>
-            </a:r>
-            <a:r>
-              <a:rPr lang="de-DE" dirty="0"/>
-              <a:t> (e.g., integral </a:t>
-            </a:r>
-            <a:r>
-              <a:rPr lang="de-DE" dirty="0" err="1"/>
-              <a:t>of</a:t>
-            </a:r>
-            <a:r>
-              <a:rPr lang="de-DE" dirty="0"/>
-              <a:t> </a:t>
-            </a:r>
-            <a:r>
-              <a:rPr lang="de-DE" dirty="0" err="1"/>
-              <a:t>squared</a:t>
-            </a:r>
-            <a:r>
-              <a:rPr lang="de-DE" dirty="0"/>
-              <a:t> </a:t>
-            </a:r>
-            <a:r>
-              <a:rPr lang="de-DE" dirty="0" err="1"/>
-              <a:t>error</a:t>
-            </a:r>
-            <a:r>
-              <a:rPr lang="de-DE" dirty="0"/>
-              <a:t>, </a:t>
-            </a:r>
-            <a:r>
-              <a:rPr lang="de-DE" dirty="0" err="1"/>
-              <a:t>sensitivity</a:t>
-            </a:r>
-            <a:r>
-              <a:rPr lang="de-DE" dirty="0"/>
-              <a:t> </a:t>
-            </a:r>
-            <a:r>
-              <a:rPr lang="de-DE" dirty="0" err="1"/>
-              <a:t>norms</a:t>
-            </a:r>
-            <a:r>
-              <a:rPr lang="de-DE" dirty="0"/>
-              <a:t>) and </a:t>
-            </a:r>
-            <a:r>
-              <a:rPr lang="de-DE" dirty="0" err="1"/>
-              <a:t>choose</a:t>
-            </a:r>
-            <a:r>
-              <a:rPr lang="de-DE" dirty="0"/>
-              <a:t> C(s) </a:t>
-            </a:r>
-            <a:r>
-              <a:rPr lang="de-DE" dirty="0" err="1"/>
-              <a:t>to</a:t>
-            </a:r>
-            <a:r>
-              <a:rPr lang="de-DE" dirty="0"/>
-              <a:t> </a:t>
-            </a:r>
-            <a:r>
-              <a:rPr lang="de-DE" dirty="0" err="1"/>
-              <a:t>minimize</a:t>
-            </a:r>
-            <a:r>
-              <a:rPr lang="de-DE" dirty="0"/>
-              <a:t> it.</a:t>
-            </a:r>
-          </a:p>
-          <a:p>
-            <a:r>
-              <a:rPr lang="de-DE" dirty="0" err="1"/>
-              <a:t>Minimizing</a:t>
-            </a:r>
-            <a:r>
-              <a:rPr lang="de-DE" dirty="0"/>
-              <a:t> </a:t>
-            </a:r>
-            <a:r>
-              <a:rPr lang="de-DE" dirty="0" err="1"/>
-              <a:t>these</a:t>
-            </a:r>
-            <a:r>
-              <a:rPr lang="de-DE" dirty="0"/>
-              <a:t> </a:t>
-            </a:r>
-            <a:r>
-              <a:rPr lang="de-DE" dirty="0" err="1"/>
-              <a:t>criteria</a:t>
-            </a:r>
-            <a:r>
-              <a:rPr lang="de-DE" dirty="0"/>
-              <a:t> </a:t>
-            </a:r>
-            <a:r>
-              <a:rPr lang="de-DE" dirty="0" err="1"/>
-              <a:t>implicitly</a:t>
-            </a:r>
-            <a:r>
-              <a:rPr lang="de-DE" dirty="0"/>
-              <a:t> </a:t>
-            </a:r>
-            <a:r>
-              <a:rPr lang="de-DE" dirty="0" err="1"/>
-              <a:t>shapes</a:t>
-            </a:r>
-            <a:r>
-              <a:rPr lang="de-DE" dirty="0"/>
-              <a:t> L(s) </a:t>
-            </a:r>
-            <a:r>
-              <a:rPr lang="de-DE" dirty="0" err="1"/>
-              <a:t>to</a:t>
-            </a:r>
-            <a:r>
-              <a:rPr lang="de-DE" dirty="0"/>
-              <a:t> </a:t>
-            </a:r>
-            <a:r>
-              <a:rPr lang="de-DE" dirty="0" err="1"/>
-              <a:t>balance</a:t>
-            </a:r>
-            <a:r>
-              <a:rPr lang="de-DE" dirty="0"/>
-              <a:t> </a:t>
-            </a:r>
-            <a:r>
-              <a:rPr lang="de-DE" dirty="0" err="1"/>
-              <a:t>tracking</a:t>
-            </a:r>
-            <a:r>
-              <a:rPr lang="de-DE" dirty="0"/>
-              <a:t>, </a:t>
-            </a:r>
-            <a:r>
-              <a:rPr lang="de-DE" dirty="0" err="1"/>
-              <a:t>disturbance</a:t>
-            </a:r>
-            <a:r>
-              <a:rPr lang="de-DE" dirty="0"/>
-              <a:t> </a:t>
-            </a:r>
-            <a:r>
-              <a:rPr lang="de-DE" dirty="0" err="1"/>
-              <a:t>rejection</a:t>
-            </a:r>
-            <a:r>
-              <a:rPr lang="de-DE" dirty="0"/>
-              <a:t>, </a:t>
-            </a:r>
-            <a:r>
-              <a:rPr lang="de-DE" dirty="0" err="1"/>
-              <a:t>noise</a:t>
-            </a:r>
-            <a:r>
-              <a:rPr lang="de-DE" dirty="0"/>
-              <a:t>, and </a:t>
-            </a:r>
-            <a:r>
-              <a:rPr lang="de-DE" dirty="0" err="1"/>
-              <a:t>robustness</a:t>
-            </a:r>
-            <a:r>
-              <a:rPr lang="de-DE" dirty="0"/>
-              <a:t>.</a:t>
-            </a:r>
-          </a:p>
-          <a:p>
-            <a:pPr marL="0" indent="0">
-              <a:buNone/>
-            </a:pPr>
-            <a:endParaRPr lang="de-DE" dirty="0"/>
-          </a:p>
-          <a:p>
-            <a:pPr marL="0" indent="0">
-              <a:buNone/>
-            </a:pPr>
-            <a:r>
-              <a:rPr lang="de-DE" dirty="0"/>
-              <a:t>...</a:t>
-            </a:r>
-          </a:p>
-          <a:p>
-            <a:endParaRPr lang="de-DE" dirty="0"/>
-          </a:p>
-        </p:txBody>
-      </p:sp>
+      <mc:AlternateContent xmlns:mc="http://schemas.openxmlformats.org/markup-compatibility/2006">
+        <mc:Choice xmlns:a14="http://schemas.microsoft.com/office/drawing/2010/main" Requires="a14">
+          <p:sp>
+            <p:nvSpPr>
+              <p:cNvPr id="3" name="Inhaltsplatzhalter 2">
+                <a:extLst>
+                  <a:ext uri="{FF2B5EF4-FFF2-40B4-BE49-F238E27FC236}">
+                    <a16:creationId xmlns:a16="http://schemas.microsoft.com/office/drawing/2014/main" id="{A25B1BFB-C345-4C10-3FE3-385B457EAAC1}"/>
+                  </a:ext>
+                </a:extLst>
+              </p:cNvPr>
+              <p:cNvSpPr>
+                <a:spLocks noGrp="1"/>
+              </p:cNvSpPr>
+              <p:nvPr>
+                <p:ph idx="1"/>
+              </p:nvPr>
+            </p:nvSpPr>
+            <p:spPr/>
+            <p:txBody>
+              <a:bodyPr>
+                <a:normAutofit lnSpcReduction="10000"/>
+              </a:bodyPr>
+              <a:lstStyle/>
+              <a:p>
+                <a:pPr marL="0" indent="0">
+                  <a:buNone/>
+                </a:pPr>
+                <a:r>
+                  <a:rPr lang="de-DE" dirty="0" err="1"/>
+                  <a:t>Define</a:t>
+                </a:r>
+                <a:r>
+                  <a:rPr lang="de-DE" dirty="0"/>
+                  <a:t> a </a:t>
+                </a:r>
+                <a:r>
+                  <a:rPr lang="de-DE" dirty="0" err="1"/>
+                  <a:t>cost</a:t>
+                </a:r>
+                <a:r>
+                  <a:rPr lang="de-DE" dirty="0"/>
+                  <a:t> </a:t>
+                </a:r>
+                <a:r>
+                  <a:rPr lang="de-DE" dirty="0" err="1"/>
+                  <a:t>function</a:t>
+                </a:r>
+                <a:r>
+                  <a:rPr lang="de-DE" dirty="0"/>
+                  <a:t> (e.g., integral </a:t>
+                </a:r>
+                <a:r>
+                  <a:rPr lang="de-DE" dirty="0" err="1"/>
+                  <a:t>of</a:t>
+                </a:r>
+                <a:r>
+                  <a:rPr lang="de-DE" dirty="0"/>
+                  <a:t> </a:t>
+                </a:r>
+                <a:r>
+                  <a:rPr lang="de-DE" dirty="0" err="1"/>
+                  <a:t>squared</a:t>
+                </a:r>
+                <a:r>
+                  <a:rPr lang="de-DE" dirty="0"/>
+                  <a:t> </a:t>
+                </a:r>
+                <a:r>
+                  <a:rPr lang="de-DE" dirty="0" err="1"/>
+                  <a:t>error</a:t>
+                </a:r>
+                <a:r>
+                  <a:rPr lang="de-DE" dirty="0"/>
+                  <a:t>, </a:t>
+                </a:r>
+                <a:r>
+                  <a:rPr lang="de-DE" dirty="0" err="1"/>
+                  <a:t>sensitivity</a:t>
+                </a:r>
+                <a:r>
+                  <a:rPr lang="de-DE" dirty="0"/>
+                  <a:t> </a:t>
+                </a:r>
+                <a:r>
+                  <a:rPr lang="de-DE" dirty="0" err="1"/>
+                  <a:t>norms</a:t>
+                </a:r>
+                <a:r>
+                  <a:rPr lang="de-DE" dirty="0"/>
+                  <a:t>) and </a:t>
+                </a:r>
+                <a:r>
+                  <a:rPr lang="de-DE" dirty="0" err="1"/>
+                  <a:t>adjust</a:t>
+                </a:r>
+                <a:r>
+                  <a:rPr lang="de-DE" dirty="0"/>
+                  <a:t> </a:t>
+                </a:r>
+                <a:r>
+                  <a:rPr lang="de-DE" dirty="0" err="1"/>
+                  <a:t>paramters</a:t>
+                </a:r>
+                <a:r>
+                  <a:rPr lang="de-DE" dirty="0"/>
+                  <a:t> </a:t>
+                </a:r>
+                <a:r>
+                  <a:rPr lang="de-DE" dirty="0" err="1"/>
+                  <a:t>of</a:t>
+                </a:r>
+                <a:r>
+                  <a:rPr lang="de-DE" dirty="0"/>
+                  <a:t> </a:t>
+                </a:r>
+                <a14:m>
+                  <m:oMath xmlns:m="http://schemas.openxmlformats.org/officeDocument/2006/math">
+                    <m:r>
+                      <a:rPr lang="de-DE" b="0" i="1" smtClean="0">
+                        <a:latin typeface="Cambria Math" panose="02040503050406030204" pitchFamily="18" charset="0"/>
+                      </a:rPr>
+                      <m:t>𝐶</m:t>
+                    </m:r>
+                    <m:r>
+                      <a:rPr lang="de-DE" b="0" i="1" smtClean="0">
+                        <a:latin typeface="Cambria Math" panose="02040503050406030204" pitchFamily="18" charset="0"/>
+                      </a:rPr>
+                      <m:t>(</m:t>
+                    </m:r>
+                    <m:r>
+                      <a:rPr lang="de-DE" b="0" i="1" smtClean="0">
+                        <a:latin typeface="Cambria Math" panose="02040503050406030204" pitchFamily="18" charset="0"/>
+                      </a:rPr>
+                      <m:t>𝑠</m:t>
+                    </m:r>
+                    <m:r>
+                      <a:rPr lang="de-DE" b="0" i="1" smtClean="0">
+                        <a:latin typeface="Cambria Math" panose="02040503050406030204" pitchFamily="18" charset="0"/>
+                      </a:rPr>
+                      <m:t>)</m:t>
+                    </m:r>
+                  </m:oMath>
+                </a14:m>
+                <a:r>
+                  <a:rPr lang="de-DE" dirty="0"/>
+                  <a:t> </a:t>
+                </a:r>
+                <a:r>
+                  <a:rPr lang="de-DE" dirty="0" err="1"/>
+                  <a:t>to</a:t>
+                </a:r>
+                <a:r>
+                  <a:rPr lang="de-DE" dirty="0"/>
+                  <a:t> </a:t>
+                </a:r>
+                <a:r>
+                  <a:rPr lang="de-DE" dirty="0" err="1"/>
+                  <a:t>minimize</a:t>
+                </a:r>
+                <a:r>
+                  <a:rPr lang="de-DE" dirty="0"/>
+                  <a:t> </a:t>
+                </a:r>
+                <a:r>
+                  <a:rPr lang="de-DE" dirty="0" err="1"/>
+                  <a:t>it</a:t>
+                </a:r>
+                <a:endParaRPr lang="de-DE" dirty="0"/>
+              </a:p>
+              <a:p>
+                <a:pPr marL="0" indent="0">
+                  <a:buNone/>
+                </a:pPr>
+                <a:endParaRPr lang="de-DE" dirty="0"/>
+              </a:p>
+              <a:p>
+                <a:pPr marL="0" indent="0">
+                  <a:buNone/>
+                </a:pPr>
+                <a:r>
+                  <a:rPr lang="de-DE" dirty="0">
+                    <a:sym typeface="Wingdings" pitchFamily="2" charset="2"/>
+                  </a:rPr>
+                  <a:t> </a:t>
+                </a:r>
+                <a:r>
+                  <a:rPr lang="de-DE" dirty="0" err="1">
+                    <a:sym typeface="Wingdings" pitchFamily="2" charset="2"/>
+                  </a:rPr>
+                  <a:t>I</a:t>
+                </a:r>
+                <a:r>
+                  <a:rPr lang="de-DE" dirty="0" err="1"/>
+                  <a:t>mplicitly</a:t>
+                </a:r>
+                <a:r>
+                  <a:rPr lang="de-DE" dirty="0"/>
+                  <a:t> </a:t>
+                </a:r>
+                <a:r>
+                  <a:rPr lang="de-DE" dirty="0" err="1"/>
+                  <a:t>shapes</a:t>
+                </a:r>
+                <a:r>
+                  <a:rPr lang="de-DE" dirty="0"/>
+                  <a:t> </a:t>
+                </a:r>
+                <a14:m>
+                  <m:oMath xmlns:m="http://schemas.openxmlformats.org/officeDocument/2006/math">
+                    <m:r>
+                      <a:rPr lang="de-DE" b="0" i="1" smtClean="0">
+                        <a:latin typeface="Cambria Math" panose="02040503050406030204" pitchFamily="18" charset="0"/>
+                      </a:rPr>
+                      <m:t>𝐿</m:t>
+                    </m:r>
+                    <m:r>
+                      <a:rPr lang="de-DE" i="1">
+                        <a:latin typeface="Cambria Math" panose="02040503050406030204" pitchFamily="18" charset="0"/>
+                      </a:rPr>
+                      <m:t>(</m:t>
+                    </m:r>
+                    <m:r>
+                      <a:rPr lang="de-DE" i="1">
+                        <a:latin typeface="Cambria Math" panose="02040503050406030204" pitchFamily="18" charset="0"/>
+                      </a:rPr>
+                      <m:t>𝑠</m:t>
+                    </m:r>
+                    <m:r>
+                      <a:rPr lang="de-DE" i="1">
+                        <a:latin typeface="Cambria Math" panose="02040503050406030204" pitchFamily="18" charset="0"/>
+                      </a:rPr>
+                      <m:t>)</m:t>
+                    </m:r>
+                  </m:oMath>
+                </a14:m>
+                <a:r>
+                  <a:rPr lang="de-DE" dirty="0"/>
+                  <a:t> </a:t>
+                </a:r>
+                <a:r>
+                  <a:rPr lang="de-DE" dirty="0" err="1"/>
+                  <a:t>to</a:t>
+                </a:r>
+                <a:r>
+                  <a:rPr lang="de-DE" dirty="0"/>
+                  <a:t> </a:t>
+                </a:r>
+                <a:r>
+                  <a:rPr lang="de-DE" dirty="0" err="1"/>
+                  <a:t>balance</a:t>
+                </a:r>
+                <a:r>
+                  <a:rPr lang="de-DE" dirty="0"/>
+                  <a:t> </a:t>
+                </a:r>
+                <a:r>
+                  <a:rPr lang="de-DE" dirty="0" err="1"/>
+                  <a:t>tracking</a:t>
+                </a:r>
+                <a:r>
+                  <a:rPr lang="de-DE" dirty="0"/>
+                  <a:t>, </a:t>
+                </a:r>
+                <a:r>
+                  <a:rPr lang="de-DE" dirty="0" err="1"/>
+                  <a:t>disturbance</a:t>
+                </a:r>
+                <a:r>
+                  <a:rPr lang="de-DE" dirty="0"/>
+                  <a:t> </a:t>
+                </a:r>
+                <a:r>
+                  <a:rPr lang="de-DE" dirty="0" err="1"/>
+                  <a:t>rejection</a:t>
+                </a:r>
+                <a:r>
+                  <a:rPr lang="de-DE" dirty="0"/>
+                  <a:t>, </a:t>
+                </a:r>
+                <a:r>
+                  <a:rPr lang="de-DE" dirty="0" err="1"/>
+                  <a:t>noise</a:t>
+                </a:r>
+                <a:r>
+                  <a:rPr lang="de-DE" dirty="0"/>
+                  <a:t>, and </a:t>
+                </a:r>
+                <a:r>
+                  <a:rPr lang="de-DE" dirty="0" err="1"/>
+                  <a:t>robustness</a:t>
+                </a:r>
+                <a:endParaRPr lang="de-DE" dirty="0"/>
+              </a:p>
+              <a:p>
+                <a:pPr marL="0" indent="0">
+                  <a:buNone/>
+                </a:pPr>
+                <a:endParaRPr lang="de-DE" dirty="0"/>
+              </a:p>
+              <a:p>
+                <a:r>
+                  <a:rPr lang="de-DE" dirty="0"/>
+                  <a:t>Advantages: </a:t>
+                </a:r>
+                <a:r>
+                  <a:rPr lang="de-DE" dirty="0" err="1"/>
+                  <a:t>systematic</a:t>
+                </a:r>
+                <a:r>
+                  <a:rPr lang="de-DE" dirty="0"/>
+                  <a:t> and </a:t>
+                </a:r>
+                <a:r>
+                  <a:rPr lang="de-DE" dirty="0" err="1"/>
+                  <a:t>automated</a:t>
+                </a:r>
+                <a:r>
+                  <a:rPr lang="de-DE" dirty="0"/>
+                  <a:t> </a:t>
+                </a:r>
+                <a:r>
+                  <a:rPr lang="de-DE" dirty="0" err="1"/>
+                  <a:t>tuning</a:t>
+                </a:r>
+                <a:r>
+                  <a:rPr lang="de-DE" dirty="0"/>
+                  <a:t>, </a:t>
+                </a:r>
+                <a:r>
+                  <a:rPr lang="de-DE" dirty="0" err="1"/>
+                  <a:t>allows</a:t>
+                </a:r>
+                <a:r>
+                  <a:rPr lang="de-DE" dirty="0"/>
+                  <a:t> </a:t>
+                </a:r>
+                <a:r>
+                  <a:rPr lang="de-DE" dirty="0" err="1"/>
+                  <a:t>inclusion</a:t>
+                </a:r>
+                <a:r>
+                  <a:rPr lang="de-DE" dirty="0"/>
+                  <a:t> </a:t>
+                </a:r>
+                <a:r>
+                  <a:rPr lang="de-DE" dirty="0" err="1"/>
+                  <a:t>of</a:t>
+                </a:r>
+                <a:r>
+                  <a:rPr lang="de-DE" dirty="0"/>
+                  <a:t> </a:t>
+                </a:r>
+                <a:r>
+                  <a:rPr lang="de-DE" dirty="0" err="1"/>
+                  <a:t>constraints</a:t>
+                </a:r>
+                <a:endParaRPr lang="de-DE" dirty="0"/>
+              </a:p>
+              <a:p>
+                <a:r>
+                  <a:rPr lang="de-DE" dirty="0" err="1"/>
+                  <a:t>Limitations</a:t>
+                </a:r>
+                <a:r>
+                  <a:rPr lang="de-DE" dirty="0"/>
+                  <a:t>: </a:t>
+                </a:r>
+                <a:r>
+                  <a:rPr lang="de-DE" dirty="0" err="1"/>
+                  <a:t>requires</a:t>
+                </a:r>
+                <a:r>
+                  <a:rPr lang="de-DE" dirty="0"/>
+                  <a:t> </a:t>
+                </a:r>
+                <a:r>
+                  <a:rPr lang="de-DE" dirty="0" err="1"/>
+                  <a:t>numerical</a:t>
+                </a:r>
+                <a:r>
+                  <a:rPr lang="de-DE" dirty="0"/>
+                  <a:t> </a:t>
+                </a:r>
+                <a:r>
+                  <a:rPr lang="de-DE" dirty="0" err="1"/>
+                  <a:t>optimization</a:t>
+                </a:r>
+                <a:r>
+                  <a:rPr lang="de-DE" dirty="0"/>
+                  <a:t>, </a:t>
+                </a:r>
+                <a:r>
+                  <a:rPr lang="de-DE" dirty="0" err="1"/>
+                  <a:t>results</a:t>
+                </a:r>
+                <a:r>
+                  <a:rPr lang="de-DE" dirty="0"/>
+                  <a:t> </a:t>
+                </a:r>
+                <a:r>
+                  <a:rPr lang="de-DE" dirty="0" err="1"/>
+                  <a:t>depend</a:t>
+                </a:r>
+                <a:r>
+                  <a:rPr lang="de-DE" dirty="0"/>
+                  <a:t> on </a:t>
+                </a:r>
+                <a:r>
+                  <a:rPr lang="de-DE" dirty="0" err="1"/>
+                  <a:t>chosen</a:t>
+                </a:r>
+                <a:r>
+                  <a:rPr lang="de-DE" dirty="0"/>
+                  <a:t> </a:t>
+                </a:r>
+                <a:r>
+                  <a:rPr lang="de-DE" dirty="0" err="1"/>
+                  <a:t>cost</a:t>
+                </a:r>
+                <a:r>
+                  <a:rPr lang="de-DE" dirty="0"/>
+                  <a:t> </a:t>
+                </a:r>
+                <a:r>
+                  <a:rPr lang="de-DE" dirty="0" err="1"/>
+                  <a:t>function</a:t>
+                </a:r>
+                <a:endParaRPr lang="de-DE" dirty="0"/>
+              </a:p>
+              <a:p>
+                <a:endParaRPr lang="de-DE" dirty="0"/>
+              </a:p>
+            </p:txBody>
+          </p:sp>
+        </mc:Choice>
+        <mc:Fallback>
+          <p:sp>
+            <p:nvSpPr>
+              <p:cNvPr id="3" name="Inhaltsplatzhalter 2">
+                <a:extLst>
+                  <a:ext uri="{FF2B5EF4-FFF2-40B4-BE49-F238E27FC236}">
+                    <a16:creationId xmlns:a16="http://schemas.microsoft.com/office/drawing/2014/main" id="{A25B1BFB-C345-4C10-3FE3-385B457EAAC1}"/>
+                  </a:ext>
+                </a:extLst>
+              </p:cNvPr>
+              <p:cNvSpPr>
+                <a:spLocks noGrp="1" noRot="1" noChangeAspect="1" noMove="1" noResize="1" noEditPoints="1" noAdjustHandles="1" noChangeArrowheads="1" noChangeShapeType="1" noTextEdit="1"/>
+              </p:cNvSpPr>
+              <p:nvPr>
+                <p:ph idx="1"/>
+              </p:nvPr>
+            </p:nvSpPr>
+            <p:spPr>
+              <a:blipFill>
+                <a:blip r:embed="rId2"/>
+                <a:stretch>
+                  <a:fillRect l="-1206" t="-3198" r="-1448"/>
+                </a:stretch>
+              </a:blipFill>
+            </p:spPr>
+            <p:txBody>
+              <a:bodyPr/>
+              <a:lstStyle/>
+              <a:p>
+                <a:r>
+                  <a:rPr lang="de-DE">
+                    <a:noFill/>
+                  </a:rPr>
+                  <a:t> </a:t>
+                </a:r>
+              </a:p>
+            </p:txBody>
+          </p:sp>
+        </mc:Fallback>
+      </mc:AlternateContent>
       <p:sp>
         <p:nvSpPr>
           <p:cNvPr id="4" name="Foliennummernplatzhalter 3">
@@ -13386,7 +15271,9 @@
         </p:nvSpPr>
         <p:spPr/>
         <p:txBody>
-          <a:bodyPr/>
+          <a:bodyPr>
+            <a:normAutofit fontScale="92500" lnSpcReduction="10000"/>
+          </a:bodyPr>
           <a:lstStyle/>
           <a:p>
             <a:pPr marL="0" indent="0">
@@ -13394,15 +15281,107 @@
             </a:pPr>
             <a:r>
               <a:rPr lang="de-DE" dirty="0"/>
-              <a:t>… multi-loop </a:t>
-            </a:r>
+              <a:t>Concept:</a:t>
+            </a:r>
+          </a:p>
+          <a:p>
             <a:r>
               <a:rPr lang="de-DE" dirty="0" err="1"/>
-              <a:t>architecture</a:t>
+              <a:t>Two</a:t>
             </a:r>
             <a:r>
               <a:rPr lang="de-DE" dirty="0"/>
-              <a:t> …</a:t>
+              <a:t> </a:t>
+            </a:r>
+            <a:r>
+              <a:rPr lang="de-DE" dirty="0" err="1"/>
+              <a:t>controllers</a:t>
+            </a:r>
+            <a:r>
+              <a:rPr lang="de-DE" dirty="0"/>
+              <a:t> </a:t>
+            </a:r>
+            <a:r>
+              <a:rPr lang="de-DE" dirty="0" err="1"/>
+              <a:t>arranged</a:t>
+            </a:r>
+            <a:r>
+              <a:rPr lang="de-DE" dirty="0"/>
+              <a:t> in </a:t>
+            </a:r>
+            <a:r>
+              <a:rPr lang="de-DE" dirty="0" err="1"/>
+              <a:t>nested</a:t>
+            </a:r>
+            <a:r>
+              <a:rPr lang="de-DE" dirty="0"/>
+              <a:t> </a:t>
+            </a:r>
+            <a:r>
+              <a:rPr lang="de-DE" dirty="0" err="1"/>
+              <a:t>loops</a:t>
+            </a:r>
+            <a:endParaRPr lang="de-DE" dirty="0"/>
+          </a:p>
+          <a:p>
+            <a:r>
+              <a:rPr lang="de-DE" dirty="0" err="1"/>
+              <a:t>Inner</a:t>
+            </a:r>
+            <a:r>
+              <a:rPr lang="de-DE" dirty="0"/>
+              <a:t> loop </a:t>
+            </a:r>
+            <a:r>
+              <a:rPr lang="de-DE" dirty="0" err="1"/>
+              <a:t>controls</a:t>
+            </a:r>
+            <a:r>
+              <a:rPr lang="de-DE" dirty="0"/>
+              <a:t> a fast </a:t>
+            </a:r>
+            <a:r>
+              <a:rPr lang="de-DE" dirty="0" err="1"/>
+              <a:t>subsystem</a:t>
+            </a:r>
+            <a:endParaRPr lang="de-DE" dirty="0"/>
+          </a:p>
+          <a:p>
+            <a:r>
+              <a:rPr lang="de-DE" dirty="0"/>
+              <a:t>Outer loop </a:t>
+            </a:r>
+            <a:r>
+              <a:rPr lang="de-DE" dirty="0" err="1"/>
+              <a:t>controls</a:t>
+            </a:r>
+            <a:r>
+              <a:rPr lang="de-DE" dirty="0"/>
+              <a:t> </a:t>
+            </a:r>
+            <a:r>
+              <a:rPr lang="de-DE" dirty="0" err="1"/>
+              <a:t>the</a:t>
+            </a:r>
+            <a:r>
+              <a:rPr lang="de-DE" dirty="0"/>
+              <a:t> </a:t>
+            </a:r>
+            <a:r>
+              <a:rPr lang="de-DE" dirty="0" err="1"/>
+              <a:t>main</a:t>
+            </a:r>
+            <a:r>
+              <a:rPr lang="de-DE" dirty="0"/>
+              <a:t> </a:t>
+            </a:r>
+            <a:r>
+              <a:rPr lang="de-DE" dirty="0" err="1"/>
+              <a:t>process</a:t>
+            </a:r>
+            <a:r>
+              <a:rPr lang="de-DE" dirty="0"/>
+              <a:t> variable</a:t>
             </a:r>
           </a:p>
           <a:p>
@@ -13417,8 +15396,213 @@
             </a:pPr>
             <a:r>
               <a:rPr lang="de-DE" dirty="0"/>
-              <a:t>…</a:t>
-            </a:r>
+              <a:t>Advantages: </a:t>
+            </a:r>
+            <a:r>
+              <a:rPr lang="de-DE" dirty="0" err="1"/>
+              <a:t>improved</a:t>
+            </a:r>
+            <a:r>
+              <a:rPr lang="de-DE" dirty="0"/>
+              <a:t> </a:t>
+            </a:r>
+            <a:r>
+              <a:rPr lang="de-DE" dirty="0" err="1"/>
+              <a:t>disturbance</a:t>
+            </a:r>
+            <a:r>
+              <a:rPr lang="de-DE" dirty="0"/>
+              <a:t> </a:t>
+            </a:r>
+            <a:r>
+              <a:rPr lang="de-DE" dirty="0" err="1"/>
+              <a:t>rejection</a:t>
+            </a:r>
+            <a:r>
+              <a:rPr lang="de-DE" dirty="0"/>
+              <a:t>, </a:t>
+            </a:r>
+            <a:r>
+              <a:rPr lang="de-DE" dirty="0" err="1"/>
+              <a:t>faster</a:t>
+            </a:r>
+            <a:r>
+              <a:rPr lang="de-DE" dirty="0"/>
+              <a:t> </a:t>
+            </a:r>
+            <a:r>
+              <a:rPr lang="de-DE" dirty="0" err="1"/>
+              <a:t>response</a:t>
+            </a:r>
+            <a:r>
+              <a:rPr lang="de-DE" dirty="0"/>
+              <a:t> </a:t>
+            </a:r>
+            <a:r>
+              <a:rPr lang="de-DE" dirty="0" err="1"/>
+              <a:t>to</a:t>
+            </a:r>
+            <a:r>
+              <a:rPr lang="de-DE" dirty="0"/>
+              <a:t> internal </a:t>
+            </a:r>
+            <a:r>
+              <a:rPr lang="de-DE" dirty="0" err="1"/>
+              <a:t>disturbances</a:t>
+            </a:r>
+            <a:r>
+              <a:rPr lang="de-DE" dirty="0"/>
+              <a:t>, </a:t>
+            </a:r>
+            <a:r>
+              <a:rPr lang="de-DE" dirty="0" err="1"/>
+              <a:t>reduced</a:t>
+            </a:r>
+            <a:r>
+              <a:rPr lang="de-DE" dirty="0"/>
+              <a:t> </a:t>
+            </a:r>
+            <a:r>
+              <a:rPr lang="de-DE" dirty="0" err="1"/>
+              <a:t>effect</a:t>
+            </a:r>
+            <a:r>
+              <a:rPr lang="de-DE" dirty="0"/>
+              <a:t> </a:t>
+            </a:r>
+            <a:r>
+              <a:rPr lang="de-DE" dirty="0" err="1"/>
+              <a:t>of</a:t>
+            </a:r>
+            <a:r>
+              <a:rPr lang="de-DE" dirty="0"/>
+              <a:t> </a:t>
+            </a:r>
+            <a:r>
+              <a:rPr lang="de-DE" dirty="0" err="1"/>
+              <a:t>actuator</a:t>
+            </a:r>
+            <a:r>
+              <a:rPr lang="de-DE" dirty="0"/>
+              <a:t> </a:t>
+            </a:r>
+            <a:r>
+              <a:rPr lang="de-DE" dirty="0" err="1"/>
+              <a:t>nonlinearities</a:t>
+            </a:r>
+            <a:endParaRPr lang="de-DE" dirty="0"/>
+          </a:p>
+          <a:p>
+            <a:pPr marL="0" indent="0">
+              <a:buNone/>
+            </a:pPr>
+            <a:endParaRPr lang="de-DE" dirty="0"/>
+          </a:p>
+          <a:p>
+            <a:pPr marL="0" indent="0">
+              <a:buNone/>
+            </a:pPr>
+            <a:r>
+              <a:rPr lang="de-DE" dirty="0" err="1"/>
+              <a:t>Typical</a:t>
+            </a:r>
+            <a:r>
+              <a:rPr lang="de-DE" dirty="0"/>
+              <a:t> </a:t>
+            </a:r>
+            <a:r>
+              <a:rPr lang="de-DE" dirty="0" err="1"/>
+              <a:t>applications</a:t>
+            </a:r>
+            <a:r>
+              <a:rPr lang="de-DE" dirty="0"/>
+              <a:t>: </a:t>
+            </a:r>
+            <a:r>
+              <a:rPr lang="de-DE" dirty="0" err="1"/>
+              <a:t>motor</a:t>
+            </a:r>
+            <a:r>
+              <a:rPr lang="de-DE" dirty="0"/>
+              <a:t> </a:t>
+            </a:r>
+            <a:r>
+              <a:rPr lang="de-DE" dirty="0" err="1"/>
+              <a:t>speed</a:t>
+            </a:r>
+            <a:r>
+              <a:rPr lang="de-DE" dirty="0"/>
+              <a:t> + </a:t>
+            </a:r>
+            <a:r>
+              <a:rPr lang="de-DE" dirty="0" err="1"/>
+              <a:t>torque</a:t>
+            </a:r>
+            <a:r>
+              <a:rPr lang="de-DE" dirty="0"/>
+              <a:t> </a:t>
+            </a:r>
+            <a:r>
+              <a:rPr lang="de-DE" dirty="0" err="1"/>
+              <a:t>control</a:t>
+            </a:r>
+            <a:r>
+              <a:rPr lang="de-DE" dirty="0"/>
+              <a:t>, </a:t>
+            </a:r>
+            <a:r>
+              <a:rPr lang="de-DE" dirty="0" err="1"/>
+              <a:t>temperature</a:t>
+            </a:r>
+            <a:r>
+              <a:rPr lang="de-DE" dirty="0"/>
+              <a:t> </a:t>
+            </a:r>
+            <a:r>
+              <a:rPr lang="de-DE" dirty="0" err="1"/>
+              <a:t>control</a:t>
+            </a:r>
+            <a:r>
+              <a:rPr lang="de-DE" dirty="0"/>
+              <a:t> </a:t>
+            </a:r>
+            <a:r>
+              <a:rPr lang="de-DE" dirty="0" err="1"/>
+              <a:t>with</a:t>
+            </a:r>
+            <a:r>
+              <a:rPr lang="de-DE" dirty="0"/>
+              <a:t> </a:t>
+            </a:r>
+            <a:r>
+              <a:rPr lang="de-DE" dirty="0" err="1"/>
+              <a:t>flow</a:t>
+            </a:r>
+            <a:r>
+              <a:rPr lang="de-DE" dirty="0"/>
+              <a:t> loop, </a:t>
+            </a:r>
+            <a:r>
+              <a:rPr lang="de-DE" dirty="0" err="1"/>
+              <a:t>robotics</a:t>
+            </a:r>
+            <a:r>
+              <a:rPr lang="de-DE" dirty="0"/>
+              <a:t> and </a:t>
+            </a:r>
+            <a:r>
+              <a:rPr lang="de-DE" dirty="0" err="1"/>
+              <a:t>process</a:t>
+            </a:r>
+            <a:r>
+              <a:rPr lang="de-DE" dirty="0"/>
+              <a:t> </a:t>
+            </a:r>
+            <a:r>
+              <a:rPr lang="de-DE" dirty="0" err="1"/>
+              <a:t>control</a:t>
+            </a:r>
+            <a:endParaRPr lang="de-DE" dirty="0"/>
           </a:p>
         </p:txBody>
       </p:sp>
@@ -22540,8 +24724,8 @@
           </a:p>
         </p:txBody>
       </p:sp>
-      <mc:AlternateContent xmlns:mc="http://schemas.openxmlformats.org/markup-compatibility/2006" xmlns:a14="http://schemas.microsoft.com/office/drawing/2010/main">
-        <mc:Choice Requires="a14">
+      <mc:AlternateContent xmlns:mc="http://schemas.openxmlformats.org/markup-compatibility/2006">
+        <mc:Choice xmlns:a14="http://schemas.microsoft.com/office/drawing/2010/main" Requires="a14">
           <p:sp>
             <p:nvSpPr>
               <p:cNvPr id="3" name="Inhaltsplatzhalter 2">
@@ -22561,7 +24745,7 @@
             <p:spPr/>
             <p:txBody>
               <a:bodyPr>
-                <a:normAutofit/>
+                <a:noAutofit/>
               </a:bodyPr>
               <a:lstStyle/>
               <a:p>
@@ -22691,6 +24875,46 @@
                     </m:sSub>
                   </m:oMath>
                 </a14:m>
+                <a:r>
+                  <a:rPr lang="de-DE" sz="2400" dirty="0"/>
+                  <a:t> </a:t>
+                </a:r>
+                <a:r>
+                  <a:rPr lang="de-DE" sz="2400" dirty="0" err="1"/>
+                  <a:t>to</a:t>
+                </a:r>
+                <a:r>
+                  <a:rPr lang="de-DE" sz="2400" dirty="0"/>
+                  <a:t> </a:t>
+                </a:r>
+                <a:r>
+                  <a:rPr lang="de-DE" sz="2400" dirty="0" err="1"/>
+                  <a:t>achieve</a:t>
+                </a:r>
+                <a:r>
+                  <a:rPr lang="de-DE" sz="2400" dirty="0"/>
+                  <a:t> </a:t>
+                </a:r>
+                <a:r>
+                  <a:rPr lang="de-DE" sz="2400" dirty="0" err="1"/>
+                  <a:t>desired</a:t>
+                </a:r>
+                <a:r>
+                  <a:rPr lang="de-DE" sz="2400" dirty="0"/>
+                  <a:t> </a:t>
+                </a:r>
+                <a:r>
+                  <a:rPr lang="de-DE" sz="2400" dirty="0" err="1"/>
+                  <a:t>closed</a:t>
+                </a:r>
+                <a:r>
+                  <a:rPr lang="de-DE" sz="2400" dirty="0"/>
+                  <a:t>-loop </a:t>
+                </a:r>
+                <a:r>
+                  <a:rPr lang="de-DE" sz="2400" dirty="0" err="1"/>
+                  <a:t>behavior</a:t>
+                </a:r>
                 <a:endParaRPr lang="de-DE" sz="2400" dirty="0"/>
               </a:p>
               <a:p>
@@ -22704,14 +24928,171 @@
                   <a:buNone/>
                 </a:pPr>
                 <a:r>
+                  <a:rPr lang="de-DE" sz="2400" dirty="0" err="1"/>
+                  <a:t>Typical</a:t>
+                </a:r>
+                <a:r>
                   <a:rPr lang="de-DE" sz="2400" dirty="0"/>
-                  <a:t>…</a:t>
-                </a:r>
+                  <a:t> </a:t>
+                </a:r>
+                <a:r>
+                  <a:rPr lang="de-DE" sz="2400" dirty="0" err="1"/>
+                  <a:t>tuning</a:t>
+                </a:r>
+                <a:r>
+                  <a:rPr lang="de-DE" sz="2400" dirty="0"/>
+                  <a:t> </a:t>
+                </a:r>
+                <a:r>
+                  <a:rPr lang="de-DE" sz="2400" dirty="0" err="1"/>
+                  <a:t>objectives</a:t>
+                </a:r>
+                <a:r>
+                  <a:rPr lang="de-DE" sz="2400" dirty="0"/>
+                  <a:t>: </a:t>
+                </a:r>
+                <a:r>
+                  <a:rPr lang="de-DE" sz="2400" dirty="0" err="1"/>
+                  <a:t>acceptable</a:t>
+                </a:r>
+                <a:r>
+                  <a:rPr lang="de-DE" sz="2400" dirty="0"/>
+                  <a:t> </a:t>
+                </a:r>
+                <a:r>
+                  <a:rPr lang="de-DE" sz="2400" dirty="0" err="1"/>
+                  <a:t>rise</a:t>
+                </a:r>
+                <a:r>
+                  <a:rPr lang="de-DE" sz="2400" dirty="0"/>
+                  <a:t> time, limited </a:t>
+                </a:r>
+                <a:r>
+                  <a:rPr lang="de-DE" sz="2400" dirty="0" err="1"/>
+                  <a:t>overshoot</a:t>
+                </a:r>
+                <a:r>
+                  <a:rPr lang="de-DE" sz="2400" dirty="0"/>
+                  <a:t>, </a:t>
+                </a:r>
+                <a:r>
+                  <a:rPr lang="de-DE" sz="2400" dirty="0" err="1"/>
+                  <a:t>small</a:t>
+                </a:r>
+                <a:r>
+                  <a:rPr lang="de-DE" sz="2400" dirty="0"/>
+                  <a:t> </a:t>
+                </a:r>
+                <a:r>
+                  <a:rPr lang="de-DE" sz="2400" dirty="0" err="1"/>
+                  <a:t>steady-state</a:t>
+                </a:r>
+                <a:r>
+                  <a:rPr lang="de-DE" sz="2400" dirty="0"/>
+                  <a:t> </a:t>
+                </a:r>
+                <a:r>
+                  <a:rPr lang="de-DE" sz="2400" dirty="0" err="1"/>
+                  <a:t>error</a:t>
+                </a:r>
+                <a:r>
+                  <a:rPr lang="de-DE" sz="2400" dirty="0"/>
+                  <a:t>, </a:t>
+                </a:r>
+                <a:r>
+                  <a:rPr lang="de-DE" sz="2400" dirty="0" err="1"/>
+                  <a:t>sufficient</a:t>
+                </a:r>
+                <a:r>
+                  <a:rPr lang="de-DE" sz="2400" dirty="0"/>
+                  <a:t> </a:t>
+                </a:r>
+                <a:r>
+                  <a:rPr lang="de-DE" sz="2400" dirty="0" err="1"/>
+                  <a:t>stability</a:t>
+                </a:r>
+                <a:r>
+                  <a:rPr lang="de-DE" sz="2400" dirty="0"/>
+                  <a:t> </a:t>
+                </a:r>
+                <a:r>
+                  <a:rPr lang="de-DE" sz="2400" dirty="0" err="1"/>
+                  <a:t>margin</a:t>
+                </a:r>
+                <a:endParaRPr lang="de-DE" sz="2400" dirty="0"/>
+              </a:p>
+              <a:p>
+                <a:pPr marL="0" indent="0">
+                  <a:buNone/>
+                </a:pPr>
+                <a:endParaRPr lang="de-DE" sz="2400" dirty="0"/>
+              </a:p>
+              <a:p>
+                <a:pPr marL="0" indent="0">
+                  <a:buNone/>
+                </a:pPr>
+                <a:r>
+                  <a:rPr lang="de-DE" sz="2400" dirty="0"/>
+                  <a:t>Tuning </a:t>
+                </a:r>
+                <a:r>
+                  <a:rPr lang="de-DE" sz="2400" dirty="0" err="1"/>
+                  <a:t>approaches</a:t>
+                </a:r>
+                <a:r>
+                  <a:rPr lang="de-DE" sz="2400" dirty="0"/>
+                  <a:t>:</a:t>
+                </a:r>
+              </a:p>
+              <a:p>
+                <a:r>
+                  <a:rPr lang="de-DE" sz="2400" dirty="0"/>
+                  <a:t>model-</a:t>
+                </a:r>
+                <a:r>
+                  <a:rPr lang="de-DE" sz="2400" dirty="0" err="1"/>
+                  <a:t>based</a:t>
+                </a:r>
+                <a:r>
+                  <a:rPr lang="de-DE" sz="2400" dirty="0"/>
+                  <a:t> design (</a:t>
+                </a:r>
+                <a:r>
+                  <a:rPr lang="de-DE" sz="2400" dirty="0" err="1"/>
+                  <a:t>analytical</a:t>
+                </a:r>
+                <a:r>
+                  <a:rPr lang="de-DE" sz="2400" dirty="0"/>
+                  <a:t>)</a:t>
+                </a:r>
+              </a:p>
+              <a:p>
+                <a:r>
+                  <a:rPr lang="de-DE" sz="2400" dirty="0" err="1"/>
+                  <a:t>empirical</a:t>
+                </a:r>
+                <a:r>
+                  <a:rPr lang="de-DE" sz="2400" dirty="0"/>
+                  <a:t> </a:t>
+                </a:r>
+                <a:r>
+                  <a:rPr lang="de-DE" sz="2400" dirty="0" err="1"/>
+                  <a:t>tuning</a:t>
+                </a:r>
+                <a:r>
+                  <a:rPr lang="de-DE" sz="2400" dirty="0"/>
+                  <a:t> </a:t>
+                </a:r>
+                <a:r>
+                  <a:rPr lang="de-DE" sz="2400" dirty="0" err="1"/>
+                  <a:t>rules</a:t>
+                </a:r>
+                <a:endParaRPr lang="de-DE" sz="2400" dirty="0"/>
               </a:p>
             </p:txBody>
           </p:sp>
         </mc:Choice>
-        <mc:Fallback xmlns="">
+        <mc:Fallback>
           <p:sp>
             <p:nvSpPr>
               <p:cNvPr id="3" name="Inhaltsplatzhalter 2">

--- a/slides/5_controller_design.pptx
+++ b/slides/5_controller_design.pptx
@@ -5,7 +5,7 @@
     <p:sldMasterId id="2147483648" r:id="rId1"/>
   </p:sldMasterIdLst>
   <p:notesMasterIdLst>
-    <p:notesMasterId r:id="rId31"/>
+    <p:notesMasterId r:id="rId36"/>
   </p:notesMasterIdLst>
   <p:sldIdLst>
     <p:sldId id="256" r:id="rId2"/>
@@ -37,6 +37,11 @@
     <p:sldId id="294" r:id="rId28"/>
     <p:sldId id="273" r:id="rId29"/>
     <p:sldId id="295" r:id="rId30"/>
+    <p:sldId id="323" r:id="rId31"/>
+    <p:sldId id="325" r:id="rId32"/>
+    <p:sldId id="327" r:id="rId33"/>
+    <p:sldId id="326" r:id="rId34"/>
+    <p:sldId id="324" r:id="rId35"/>
   </p:sldIdLst>
   <p:sldSz cx="12192000" cy="6858000"/>
   <p:notesSz cx="6858000" cy="9144000"/>
@@ -507,7 +512,7 @@
           <a:p>
             <a:fld id="{506E0FD1-891F-4B1E-916D-E9B585160BB8}" type="datetimeFigureOut">
               <a:rPr lang="en-GB" smtClean="0"/>
-              <a:t>16/03/2026</a:t>
+              <a:t>29/04/2026</a:t>
             </a:fld>
             <a:endParaRPr lang="en-GB"/>
           </a:p>
@@ -924,7 +929,7 @@
           <a:p>
             <a:fld id="{D68C3F22-27B2-44E3-9C5F-D08126455F6F}" type="datetime1">
               <a:rPr lang="en-GB" smtClean="0"/>
-              <a:t>16/03/2026</a:t>
+              <a:t>29/04/2026</a:t>
             </a:fld>
             <a:endParaRPr lang="en-GB"/>
           </a:p>
@@ -1124,7 +1129,7 @@
           <a:p>
             <a:fld id="{1CD03846-7BF6-4FB6-A921-FF3379ADBD4C}" type="datetime1">
               <a:rPr lang="en-GB" smtClean="0"/>
-              <a:t>16/03/2026</a:t>
+              <a:t>29/04/2026</a:t>
             </a:fld>
             <a:endParaRPr lang="en-GB"/>
           </a:p>
@@ -1334,7 +1339,7 @@
           <a:p>
             <a:fld id="{99E1B91A-3FD0-4144-9C84-63E9688ED2FE}" type="datetime1">
               <a:rPr lang="en-GB" smtClean="0"/>
-              <a:t>16/03/2026</a:t>
+              <a:t>29/04/2026</a:t>
             </a:fld>
             <a:endParaRPr lang="en-GB"/>
           </a:p>
@@ -1534,7 +1539,7 @@
           <a:p>
             <a:fld id="{5295ED7B-FEAD-4734-819F-93EF4B0EA908}" type="datetime1">
               <a:rPr lang="en-GB" smtClean="0"/>
-              <a:t>16/03/2026</a:t>
+              <a:t>29/04/2026</a:t>
             </a:fld>
             <a:endParaRPr lang="en-GB"/>
           </a:p>
@@ -1810,7 +1815,7 @@
           <a:p>
             <a:fld id="{D2D5D4B4-C926-4B45-8815-1ED8911179A2}" type="datetime1">
               <a:rPr lang="en-GB" smtClean="0"/>
-              <a:t>16/03/2026</a:t>
+              <a:t>29/04/2026</a:t>
             </a:fld>
             <a:endParaRPr lang="en-GB"/>
           </a:p>
@@ -2078,7 +2083,7 @@
           <a:p>
             <a:fld id="{B4C5210A-0E37-4935-93AF-69F21A5F712F}" type="datetime1">
               <a:rPr lang="en-GB" smtClean="0"/>
-              <a:t>16/03/2026</a:t>
+              <a:t>29/04/2026</a:t>
             </a:fld>
             <a:endParaRPr lang="en-GB"/>
           </a:p>
@@ -2493,7 +2498,7 @@
           <a:p>
             <a:fld id="{3D3A6B2F-436C-4691-80E8-9C890E000E9D}" type="datetime1">
               <a:rPr lang="en-GB" smtClean="0"/>
-              <a:t>16/03/2026</a:t>
+              <a:t>29/04/2026</a:t>
             </a:fld>
             <a:endParaRPr lang="en-GB"/>
           </a:p>
@@ -2635,7 +2640,7 @@
           <a:p>
             <a:fld id="{84385F4C-D74B-496F-8D21-97E3549C783B}" type="datetime1">
               <a:rPr lang="en-GB" smtClean="0"/>
-              <a:t>16/03/2026</a:t>
+              <a:t>29/04/2026</a:t>
             </a:fld>
             <a:endParaRPr lang="en-GB"/>
           </a:p>
@@ -2748,7 +2753,7 @@
           <a:p>
             <a:fld id="{0CBDCB32-C241-4703-A832-4EB47BD54E83}" type="datetime1">
               <a:rPr lang="en-GB" smtClean="0"/>
-              <a:t>16/03/2026</a:t>
+              <a:t>29/04/2026</a:t>
             </a:fld>
             <a:endParaRPr lang="en-GB"/>
           </a:p>
@@ -3061,7 +3066,7 @@
           <a:p>
             <a:fld id="{85C150FF-BE95-4D25-A16A-E368A81CBF24}" type="datetime1">
               <a:rPr lang="en-GB" smtClean="0"/>
-              <a:t>16/03/2026</a:t>
+              <a:t>29/04/2026</a:t>
             </a:fld>
             <a:endParaRPr lang="en-GB"/>
           </a:p>
@@ -3350,7 +3355,7 @@
           <a:p>
             <a:fld id="{F3C5DB4B-B349-43C9-A424-BADA723AD9F1}" type="datetime1">
               <a:rPr lang="en-GB" smtClean="0"/>
-              <a:t>16/03/2026</a:t>
+              <a:t>29/04/2026</a:t>
             </a:fld>
             <a:endParaRPr lang="en-GB"/>
           </a:p>
@@ -3593,7 +3598,7 @@
           <a:p>
             <a:fld id="{12632426-0A0C-405F-A3D0-2D11AA44702A}" type="datetime1">
               <a:rPr lang="en-GB" smtClean="0"/>
-              <a:t>16/03/2026</a:t>
+              <a:t>29/04/2026</a:t>
             </a:fld>
             <a:endParaRPr lang="en-GB"/>
           </a:p>
@@ -9748,8 +9753,8 @@
           </a:p>
         </p:txBody>
       </p:sp>
-      <mc:AlternateContent xmlns:mc="http://schemas.openxmlformats.org/markup-compatibility/2006">
-        <mc:Choice xmlns:a14="http://schemas.microsoft.com/office/drawing/2010/main" Requires="a14">
+      <mc:AlternateContent xmlns:mc="http://schemas.openxmlformats.org/markup-compatibility/2006" xmlns:a14="http://schemas.microsoft.com/office/drawing/2010/main">
+        <mc:Choice Requires="a14">
           <p:sp>
             <p:nvSpPr>
               <p:cNvPr id="6" name="Textfeld 5">
@@ -9918,7 +9923,7 @@
             </p:txBody>
           </p:sp>
         </mc:Choice>
-        <mc:Fallback>
+        <mc:Fallback xmlns="">
           <p:sp>
             <p:nvSpPr>
               <p:cNvPr id="6" name="Textfeld 5">
@@ -11592,8 +11597,8 @@
           </a:p>
         </p:txBody>
       </p:sp>
-      <mc:AlternateContent xmlns:mc="http://schemas.openxmlformats.org/markup-compatibility/2006">
-        <mc:Choice xmlns:a14="http://schemas.microsoft.com/office/drawing/2010/main" Requires="a14">
+      <mc:AlternateContent xmlns:mc="http://schemas.openxmlformats.org/markup-compatibility/2006" xmlns:a14="http://schemas.microsoft.com/office/drawing/2010/main">
+        <mc:Choice Requires="a14">
           <p:sp>
             <p:nvSpPr>
               <p:cNvPr id="3" name="Inhaltsplatzhalter 2">
@@ -11880,7 +11885,7 @@
             </p:txBody>
           </p:sp>
         </mc:Choice>
-        <mc:Fallback>
+        <mc:Fallback xmlns="">
           <p:sp>
             <p:nvSpPr>
               <p:cNvPr id="3" name="Inhaltsplatzhalter 2">
@@ -12330,8 +12335,8 @@
           </a:p>
         </p:txBody>
       </p:sp>
-      <mc:AlternateContent xmlns:mc="http://schemas.openxmlformats.org/markup-compatibility/2006">
-        <mc:Choice xmlns:a14="http://schemas.microsoft.com/office/drawing/2010/main" Requires="a14">
+      <mc:AlternateContent xmlns:mc="http://schemas.openxmlformats.org/markup-compatibility/2006" xmlns:a14="http://schemas.microsoft.com/office/drawing/2010/main">
+        <mc:Choice Requires="a14">
           <p:sp>
             <p:nvSpPr>
               <p:cNvPr id="3" name="Inhaltsplatzhalter 2">
@@ -12984,7 +12989,7 @@
             </p:txBody>
           </p:sp>
         </mc:Choice>
-        <mc:Fallback>
+        <mc:Fallback xmlns="">
           <p:sp>
             <p:nvSpPr>
               <p:cNvPr id="3" name="Inhaltsplatzhalter 2">
@@ -13390,8 +13395,8 @@
           </a:p>
         </p:txBody>
       </p:sp>
-      <mc:AlternateContent xmlns:mc="http://schemas.openxmlformats.org/markup-compatibility/2006">
-        <mc:Choice xmlns:a14="http://schemas.microsoft.com/office/drawing/2010/main" Requires="a14">
+      <mc:AlternateContent xmlns:mc="http://schemas.openxmlformats.org/markup-compatibility/2006" xmlns:a14="http://schemas.microsoft.com/office/drawing/2010/main">
+        <mc:Choice Requires="a14">
           <p:sp>
             <p:nvSpPr>
               <p:cNvPr id="3" name="Inhaltsplatzhalter 2">
@@ -13882,7 +13887,7 @@
             </p:txBody>
           </p:sp>
         </mc:Choice>
-        <mc:Fallback>
+        <mc:Fallback xmlns="">
           <p:sp>
             <p:nvSpPr>
               <p:cNvPr id="3" name="Inhaltsplatzhalter 2">
@@ -14009,8 +14014,8 @@
           </a:p>
         </p:txBody>
       </p:sp>
-      <mc:AlternateContent xmlns:mc="http://schemas.openxmlformats.org/markup-compatibility/2006">
-        <mc:Choice xmlns:a14="http://schemas.microsoft.com/office/drawing/2010/main" Requires="a14">
+      <mc:AlternateContent xmlns:mc="http://schemas.openxmlformats.org/markup-compatibility/2006" xmlns:a14="http://schemas.microsoft.com/office/drawing/2010/main">
+        <mc:Choice Requires="a14">
           <p:sp>
             <p:nvSpPr>
               <p:cNvPr id="3" name="Inhaltsplatzhalter 2">
@@ -14559,7 +14564,7 @@
             </p:txBody>
           </p:sp>
         </mc:Choice>
-        <mc:Fallback>
+        <mc:Fallback xmlns="">
           <p:sp>
             <p:nvSpPr>
               <p:cNvPr id="3" name="Inhaltsplatzhalter 2">
@@ -14690,8 +14695,8 @@
           </a:p>
         </p:txBody>
       </p:sp>
-      <mc:AlternateContent xmlns:mc="http://schemas.openxmlformats.org/markup-compatibility/2006">
-        <mc:Choice xmlns:a14="http://schemas.microsoft.com/office/drawing/2010/main" Requires="a14">
+      <mc:AlternateContent xmlns:mc="http://schemas.openxmlformats.org/markup-compatibility/2006" xmlns:a14="http://schemas.microsoft.com/office/drawing/2010/main">
+        <mc:Choice Requires="a14">
           <p:sp>
             <p:nvSpPr>
               <p:cNvPr id="3" name="Inhaltsplatzhalter 2">
@@ -15126,7 +15131,7 @@
             </p:txBody>
           </p:sp>
         </mc:Choice>
-        <mc:Fallback>
+        <mc:Fallback xmlns="">
           <p:sp>
             <p:nvSpPr>
               <p:cNvPr id="3" name="Inhaltsplatzhalter 2">
@@ -23684,6 +23689,1843 @@
 </p:sld>
 </file>
 
+<file path=ppt/slides/slide30.xml><?xml version="1.0" encoding="utf-8"?>
+<p:sld xmlns:a="http://schemas.openxmlformats.org/drawingml/2006/main" xmlns:r="http://schemas.openxmlformats.org/officeDocument/2006/relationships" xmlns:p="http://schemas.openxmlformats.org/presentationml/2006/main">
+  <p:cSld>
+    <p:spTree>
+      <p:nvGrpSpPr>
+        <p:cNvPr id="1" name=""/>
+        <p:cNvGrpSpPr/>
+        <p:nvPr/>
+      </p:nvGrpSpPr>
+      <p:grpSpPr>
+        <a:xfrm>
+          <a:off x="0" y="0"/>
+          <a:ext cx="0" cy="0"/>
+          <a:chOff x="0" y="0"/>
+          <a:chExt cx="0" cy="0"/>
+        </a:xfrm>
+      </p:grpSpPr>
+      <p:sp>
+        <p:nvSpPr>
+          <p:cNvPr id="2" name="Titel 1">
+            <a:extLst>
+              <a:ext uri="{FF2B5EF4-FFF2-40B4-BE49-F238E27FC236}">
+                <a16:creationId xmlns:a16="http://schemas.microsoft.com/office/drawing/2014/main" id="{84A91FBE-99C9-8927-00D6-37A02814FEED}"/>
+              </a:ext>
+            </a:extLst>
+          </p:cNvPr>
+          <p:cNvSpPr>
+            <a:spLocks noGrp="1"/>
+          </p:cNvSpPr>
+          <p:nvPr>
+            <p:ph type="title"/>
+          </p:nvPr>
+        </p:nvSpPr>
+        <p:spPr/>
+        <p:txBody>
+          <a:bodyPr/>
+          <a:lstStyle/>
+          <a:p>
+            <a:r>
+              <a:rPr lang="de-DE" dirty="0" err="1"/>
+              <a:t>Exercise</a:t>
+            </a:r>
+            <a:r>
+              <a:rPr lang="de-DE" dirty="0"/>
+              <a:t> 1</a:t>
+            </a:r>
+          </a:p>
+        </p:txBody>
+      </p:sp>
+      <mc:AlternateContent xmlns:mc="http://schemas.openxmlformats.org/markup-compatibility/2006">
+        <mc:Choice xmlns:a14="http://schemas.microsoft.com/office/drawing/2010/main" Requires="a14">
+          <p:sp>
+            <p:nvSpPr>
+              <p:cNvPr id="3" name="Inhaltsplatzhalter 2">
+                <a:extLst>
+                  <a:ext uri="{FF2B5EF4-FFF2-40B4-BE49-F238E27FC236}">
+                    <a16:creationId xmlns:a16="http://schemas.microsoft.com/office/drawing/2014/main" id="{38216210-F69F-3C6C-AC3B-7B8F37B23DFF}"/>
+                  </a:ext>
+                </a:extLst>
+              </p:cNvPr>
+              <p:cNvSpPr>
+                <a:spLocks noGrp="1"/>
+              </p:cNvSpPr>
+              <p:nvPr>
+                <p:ph idx="1"/>
+              </p:nvPr>
+            </p:nvSpPr>
+            <p:spPr>
+              <a:xfrm>
+                <a:off x="838200" y="1825625"/>
+                <a:ext cx="11209774" cy="4351338"/>
+              </a:xfrm>
+            </p:spPr>
+            <p:txBody>
+              <a:bodyPr>
+                <a:normAutofit/>
+              </a:bodyPr>
+              <a:lstStyle/>
+              <a:p>
+                <a:pPr marL="0" indent="0">
+                  <a:buNone/>
+                </a:pPr>
+                <a:r>
+                  <a:rPr lang="de-DE" dirty="0"/>
+                  <a:t>Consider a </a:t>
+                </a:r>
+                <a:r>
+                  <a:rPr lang="de-DE" dirty="0" err="1"/>
+                  <a:t>unity</a:t>
+                </a:r>
+                <a:r>
+                  <a:rPr lang="de-DE" dirty="0"/>
+                  <a:t> </a:t>
+                </a:r>
+                <a:r>
+                  <a:rPr lang="de-DE" dirty="0" err="1"/>
+                  <a:t>feedback</a:t>
+                </a:r>
+                <a:r>
+                  <a:rPr lang="de-DE" dirty="0"/>
+                  <a:t> </a:t>
+                </a:r>
+                <a:r>
+                  <a:rPr lang="de-DE" dirty="0" err="1"/>
+                  <a:t>system</a:t>
+                </a:r>
+                <a:r>
+                  <a:rPr lang="de-DE" dirty="0"/>
+                  <a:t> </a:t>
+                </a:r>
+                <a:r>
+                  <a:rPr lang="de-DE" dirty="0" err="1"/>
+                  <a:t>with</a:t>
+                </a:r>
+                <a:r>
+                  <a:rPr lang="de-DE" dirty="0"/>
+                  <a:t> open-loop </a:t>
+                </a:r>
+                <a:r>
+                  <a:rPr lang="de-DE" dirty="0" err="1"/>
+                  <a:t>transfer</a:t>
+                </a:r>
+                <a:r>
+                  <a:rPr lang="de-DE" dirty="0"/>
+                  <a:t> </a:t>
+                </a:r>
+                <a:r>
+                  <a:rPr lang="de-DE" dirty="0" err="1"/>
+                  <a:t>function</a:t>
+                </a:r>
+                <a:r>
+                  <a:rPr lang="de-DE" dirty="0"/>
+                  <a:t>:</a:t>
+                </a:r>
+              </a:p>
+              <a:p>
+                <a:pPr marL="0" indent="0">
+                  <a:buNone/>
+                </a:pPr>
+                <a:r>
+                  <a:rPr lang="de-DE" b="0" dirty="0"/>
+                  <a:t>	</a:t>
+                </a:r>
+                <a14:m>
+                  <m:oMath xmlns:m="http://schemas.openxmlformats.org/officeDocument/2006/math">
+                    <m:r>
+                      <a:rPr lang="de-DE" b="0" i="1" smtClean="0">
+                        <a:latin typeface="Cambria Math" panose="02040503050406030204" pitchFamily="18" charset="0"/>
+                      </a:rPr>
+                      <m:t>𝐺</m:t>
+                    </m:r>
+                    <m:d>
+                      <m:dPr>
+                        <m:ctrlPr>
+                          <a:rPr lang="de-DE" b="0" i="1" smtClean="0">
+                            <a:latin typeface="Cambria Math" panose="02040503050406030204" pitchFamily="18" charset="0"/>
+                          </a:rPr>
+                        </m:ctrlPr>
+                      </m:dPr>
+                      <m:e>
+                        <m:r>
+                          <a:rPr lang="de-DE" b="0" i="1" smtClean="0">
+                            <a:latin typeface="Cambria Math" panose="02040503050406030204" pitchFamily="18" charset="0"/>
+                          </a:rPr>
+                          <m:t>𝑠</m:t>
+                        </m:r>
+                      </m:e>
+                    </m:d>
+                    <m:r>
+                      <a:rPr lang="de-DE" b="0" i="1" smtClean="0">
+                        <a:latin typeface="Cambria Math" panose="02040503050406030204" pitchFamily="18" charset="0"/>
+                      </a:rPr>
+                      <m:t>=</m:t>
+                    </m:r>
+                    <m:f>
+                      <m:fPr>
+                        <m:ctrlPr>
+                          <a:rPr lang="de-DE" b="0" i="1" smtClean="0">
+                            <a:latin typeface="Cambria Math" panose="02040503050406030204" pitchFamily="18" charset="0"/>
+                          </a:rPr>
+                        </m:ctrlPr>
+                      </m:fPr>
+                      <m:num>
+                        <m:r>
+                          <a:rPr lang="de-DE" b="0" i="1" smtClean="0">
+                            <a:latin typeface="Cambria Math" panose="02040503050406030204" pitchFamily="18" charset="0"/>
+                          </a:rPr>
+                          <m:t>1</m:t>
+                        </m:r>
+                        <m:r>
+                          <a:rPr lang="de-DE" b="0" i="1" smtClean="0">
+                            <a:latin typeface="Cambria Math" panose="02040503050406030204" pitchFamily="18" charset="0"/>
+                          </a:rPr>
+                          <m:t>0</m:t>
+                        </m:r>
+                      </m:num>
+                      <m:den>
+                        <m:r>
+                          <a:rPr lang="de-DE" b="0" i="1" smtClean="0">
+                            <a:latin typeface="Cambria Math" panose="02040503050406030204" pitchFamily="18" charset="0"/>
+                          </a:rPr>
+                          <m:t>𝑠</m:t>
+                        </m:r>
+                        <m:r>
+                          <a:rPr lang="de-DE" b="0" i="1" smtClean="0">
+                            <a:latin typeface="Cambria Math" panose="02040503050406030204" pitchFamily="18" charset="0"/>
+                          </a:rPr>
+                          <m:t>+2</m:t>
+                        </m:r>
+                      </m:den>
+                    </m:f>
+                  </m:oMath>
+                </a14:m>
+                <a:endParaRPr lang="de-DE" dirty="0"/>
+              </a:p>
+              <a:p>
+                <a:pPr marL="0" indent="0">
+                  <a:buNone/>
+                </a:pPr>
+                <a:endParaRPr lang="de-DE" dirty="0"/>
+              </a:p>
+              <a:p>
+                <a:r>
+                  <a:rPr lang="de-DE" dirty="0"/>
+                  <a:t>Write </a:t>
+                </a:r>
+                <a:r>
+                  <a:rPr lang="de-DE" dirty="0" err="1"/>
+                  <a:t>the</a:t>
+                </a:r>
+                <a:r>
+                  <a:rPr lang="de-DE" dirty="0"/>
+                  <a:t> </a:t>
+                </a:r>
+                <a:r>
+                  <a:rPr lang="de-DE" dirty="0" err="1"/>
+                  <a:t>closed</a:t>
+                </a:r>
+                <a:r>
+                  <a:rPr lang="de-DE" dirty="0"/>
+                  <a:t>-loop </a:t>
+                </a:r>
+                <a:r>
+                  <a:rPr lang="de-DE" dirty="0" err="1"/>
+                  <a:t>transfer</a:t>
+                </a:r>
+                <a:r>
+                  <a:rPr lang="de-DE" dirty="0"/>
+                  <a:t> </a:t>
+                </a:r>
+                <a:r>
+                  <a:rPr lang="de-DE" dirty="0" err="1"/>
+                  <a:t>function</a:t>
+                </a:r>
+                <a:r>
+                  <a:rPr lang="de-DE" dirty="0"/>
+                  <a:t>.</a:t>
+                </a:r>
+              </a:p>
+              <a:p>
+                <a:r>
+                  <a:rPr lang="de-DE" dirty="0" err="1"/>
+                  <a:t>Determine</a:t>
+                </a:r>
+                <a:r>
+                  <a:rPr lang="de-DE" dirty="0"/>
+                  <a:t> </a:t>
+                </a:r>
+                <a:r>
+                  <a:rPr lang="de-DE" dirty="0" err="1"/>
+                  <a:t>the</a:t>
+                </a:r>
+                <a:r>
+                  <a:rPr lang="de-DE" dirty="0"/>
+                  <a:t> </a:t>
+                </a:r>
+                <a:r>
+                  <a:rPr lang="de-DE" dirty="0" err="1"/>
+                  <a:t>steady-state</a:t>
+                </a:r>
+                <a:r>
+                  <a:rPr lang="de-DE" dirty="0"/>
+                  <a:t> </a:t>
+                </a:r>
+                <a:r>
+                  <a:rPr lang="de-DE" dirty="0" err="1"/>
+                  <a:t>gain</a:t>
+                </a:r>
+                <a:r>
+                  <a:rPr lang="de-DE" dirty="0"/>
+                  <a:t>.</a:t>
+                </a:r>
+              </a:p>
+              <a:p>
+                <a:r>
+                  <a:rPr lang="de-DE" dirty="0" err="1"/>
+                  <a:t>Explain</a:t>
+                </a:r>
+                <a:r>
+                  <a:rPr lang="de-DE" dirty="0"/>
+                  <a:t> </a:t>
+                </a:r>
+                <a:r>
+                  <a:rPr lang="de-DE" dirty="0" err="1"/>
+                  <a:t>how</a:t>
+                </a:r>
+                <a:r>
+                  <a:rPr lang="de-DE" dirty="0"/>
+                  <a:t> </a:t>
+                </a:r>
+                <a:r>
+                  <a:rPr lang="de-DE" dirty="0" err="1"/>
+                  <a:t>feedback</a:t>
+                </a:r>
+                <a:r>
+                  <a:rPr lang="de-DE" dirty="0"/>
+                  <a:t> </a:t>
+                </a:r>
+                <a:r>
+                  <a:rPr lang="de-DE" dirty="0" err="1"/>
+                  <a:t>changes</a:t>
+                </a:r>
+                <a:r>
+                  <a:rPr lang="de-DE" dirty="0"/>
+                  <a:t> </a:t>
+                </a:r>
+                <a:r>
+                  <a:rPr lang="de-DE" dirty="0" err="1"/>
+                  <a:t>system</a:t>
+                </a:r>
+                <a:r>
+                  <a:rPr lang="de-DE" dirty="0"/>
+                  <a:t> </a:t>
+                </a:r>
+                <a:r>
+                  <a:rPr lang="de-DE" dirty="0" err="1"/>
+                  <a:t>behavior</a:t>
+                </a:r>
+                <a:r>
+                  <a:rPr lang="de-DE" dirty="0"/>
+                  <a:t>.</a:t>
+                </a:r>
+              </a:p>
+            </p:txBody>
+          </p:sp>
+        </mc:Choice>
+        <mc:Fallback>
+          <p:sp>
+            <p:nvSpPr>
+              <p:cNvPr id="3" name="Inhaltsplatzhalter 2">
+                <a:extLst>
+                  <a:ext uri="{FF2B5EF4-FFF2-40B4-BE49-F238E27FC236}">
+                    <a16:creationId xmlns:a16="http://schemas.microsoft.com/office/drawing/2014/main" id="{38216210-F69F-3C6C-AC3B-7B8F37B23DFF}"/>
+                  </a:ext>
+                </a:extLst>
+              </p:cNvPr>
+              <p:cNvSpPr>
+                <a:spLocks noGrp="1" noRot="1" noChangeAspect="1" noMove="1" noResize="1" noEditPoints="1" noAdjustHandles="1" noChangeArrowheads="1" noChangeShapeType="1" noTextEdit="1"/>
+              </p:cNvSpPr>
+              <p:nvPr>
+                <p:ph idx="1"/>
+              </p:nvPr>
+            </p:nvSpPr>
+            <p:spPr>
+              <a:xfrm>
+                <a:off x="838200" y="1825625"/>
+                <a:ext cx="11209774" cy="4351338"/>
+              </a:xfrm>
+              <a:blipFill>
+                <a:blip r:embed="rId2"/>
+                <a:stretch>
+                  <a:fillRect l="-1133" t="-2326"/>
+                </a:stretch>
+              </a:blipFill>
+            </p:spPr>
+            <p:txBody>
+              <a:bodyPr/>
+              <a:lstStyle/>
+              <a:p>
+                <a:r>
+                  <a:rPr lang="de-DE">
+                    <a:noFill/>
+                  </a:rPr>
+                  <a:t> </a:t>
+                </a:r>
+              </a:p>
+            </p:txBody>
+          </p:sp>
+        </mc:Fallback>
+      </mc:AlternateContent>
+      <p:sp>
+        <p:nvSpPr>
+          <p:cNvPr id="4" name="Foliennummernplatzhalter 3">
+            <a:extLst>
+              <a:ext uri="{FF2B5EF4-FFF2-40B4-BE49-F238E27FC236}">
+                <a16:creationId xmlns:a16="http://schemas.microsoft.com/office/drawing/2014/main" id="{A9BE623A-89FC-8C25-F95D-A8CA62EA59EA}"/>
+              </a:ext>
+            </a:extLst>
+          </p:cNvPr>
+          <p:cNvSpPr>
+            <a:spLocks noGrp="1"/>
+          </p:cNvSpPr>
+          <p:nvPr>
+            <p:ph type="sldNum" sz="quarter" idx="12"/>
+          </p:nvPr>
+        </p:nvSpPr>
+        <p:spPr/>
+        <p:txBody>
+          <a:bodyPr/>
+          <a:lstStyle/>
+          <a:p>
+            <a:fld id="{08C366F5-AFAD-49CB-854A-9D9E238FCA13}" type="slidenum">
+              <a:rPr lang="en-GB" smtClean="0"/>
+              <a:t>30</a:t>
+            </a:fld>
+            <a:endParaRPr lang="en-GB"/>
+          </a:p>
+        </p:txBody>
+      </p:sp>
+    </p:spTree>
+    <p:extLst>
+      <p:ext uri="{BB962C8B-B14F-4D97-AF65-F5344CB8AC3E}">
+        <p14:creationId xmlns:p14="http://schemas.microsoft.com/office/powerpoint/2010/main" val="2588928886"/>
+      </p:ext>
+    </p:extLst>
+  </p:cSld>
+  <p:clrMapOvr>
+    <a:masterClrMapping/>
+  </p:clrMapOvr>
+</p:sld>
+</file>
+
+<file path=ppt/slides/slide31.xml><?xml version="1.0" encoding="utf-8"?>
+<p:sld xmlns:a="http://schemas.openxmlformats.org/drawingml/2006/main" xmlns:r="http://schemas.openxmlformats.org/officeDocument/2006/relationships" xmlns:p="http://schemas.openxmlformats.org/presentationml/2006/main">
+  <p:cSld>
+    <p:spTree>
+      <p:nvGrpSpPr>
+        <p:cNvPr id="1" name="">
+          <a:extLst>
+            <a:ext uri="{FF2B5EF4-FFF2-40B4-BE49-F238E27FC236}">
+              <a16:creationId xmlns:a16="http://schemas.microsoft.com/office/drawing/2014/main" id="{6BEC6007-DFC2-BF7E-8A29-89421AE2C4CE}"/>
+            </a:ext>
+          </a:extLst>
+        </p:cNvPr>
+        <p:cNvGrpSpPr/>
+        <p:nvPr/>
+      </p:nvGrpSpPr>
+      <p:grpSpPr>
+        <a:xfrm>
+          <a:off x="0" y="0"/>
+          <a:ext cx="0" cy="0"/>
+          <a:chOff x="0" y="0"/>
+          <a:chExt cx="0" cy="0"/>
+        </a:xfrm>
+      </p:grpSpPr>
+      <p:sp>
+        <p:nvSpPr>
+          <p:cNvPr id="2" name="Titel 1">
+            <a:extLst>
+              <a:ext uri="{FF2B5EF4-FFF2-40B4-BE49-F238E27FC236}">
+                <a16:creationId xmlns:a16="http://schemas.microsoft.com/office/drawing/2014/main" id="{8332DB9E-7240-E9E6-8D30-3C3544054CA0}"/>
+              </a:ext>
+            </a:extLst>
+          </p:cNvPr>
+          <p:cNvSpPr>
+            <a:spLocks noGrp="1"/>
+          </p:cNvSpPr>
+          <p:nvPr>
+            <p:ph type="title"/>
+          </p:nvPr>
+        </p:nvSpPr>
+        <p:spPr/>
+        <p:txBody>
+          <a:bodyPr/>
+          <a:lstStyle/>
+          <a:p>
+            <a:r>
+              <a:rPr lang="de-DE" dirty="0" err="1"/>
+              <a:t>Exercise</a:t>
+            </a:r>
+            <a:r>
+              <a:rPr lang="de-DE" dirty="0"/>
+              <a:t> 2</a:t>
+            </a:r>
+          </a:p>
+        </p:txBody>
+      </p:sp>
+      <mc:AlternateContent xmlns:mc="http://schemas.openxmlformats.org/markup-compatibility/2006">
+        <mc:Choice xmlns:a14="http://schemas.microsoft.com/office/drawing/2010/main" Requires="a14">
+          <p:sp>
+            <p:nvSpPr>
+              <p:cNvPr id="3" name="Inhaltsplatzhalter 2">
+                <a:extLst>
+                  <a:ext uri="{FF2B5EF4-FFF2-40B4-BE49-F238E27FC236}">
+                    <a16:creationId xmlns:a16="http://schemas.microsoft.com/office/drawing/2014/main" id="{3F41C9FC-B415-C9EE-CCA7-E4BB802E0B67}"/>
+                  </a:ext>
+                </a:extLst>
+              </p:cNvPr>
+              <p:cNvSpPr>
+                <a:spLocks noGrp="1"/>
+              </p:cNvSpPr>
+              <p:nvPr>
+                <p:ph idx="1"/>
+              </p:nvPr>
+            </p:nvSpPr>
+            <p:spPr>
+              <a:xfrm>
+                <a:off x="838200" y="1825625"/>
+                <a:ext cx="11209774" cy="4351338"/>
+              </a:xfrm>
+            </p:spPr>
+            <p:txBody>
+              <a:bodyPr>
+                <a:normAutofit/>
+              </a:bodyPr>
+              <a:lstStyle/>
+              <a:p>
+                <a:pPr marL="0" indent="0">
+                  <a:buNone/>
+                </a:pPr>
+                <a:r>
+                  <a:rPr lang="de-DE" dirty="0"/>
+                  <a:t>Given </a:t>
+                </a:r>
+                <a:r>
+                  <a:rPr lang="de-DE" dirty="0" err="1"/>
+                  <a:t>is</a:t>
+                </a:r>
+                <a:r>
+                  <a:rPr lang="de-DE" dirty="0"/>
+                  <a:t> a </a:t>
+                </a:r>
+                <a:r>
+                  <a:rPr lang="de-DE" dirty="0" err="1"/>
+                  <a:t>lead</a:t>
+                </a:r>
+                <a:r>
+                  <a:rPr lang="de-DE" dirty="0"/>
+                  <a:t> </a:t>
+                </a:r>
+                <a:r>
+                  <a:rPr lang="de-DE" dirty="0" err="1"/>
+                  <a:t>compensator</a:t>
+                </a:r>
+                <a:r>
+                  <a:rPr lang="de-DE" dirty="0"/>
+                  <a:t>:</a:t>
+                </a:r>
+              </a:p>
+              <a:p>
+                <a:pPr marL="0" indent="0">
+                  <a:buNone/>
+                </a:pPr>
+                <a:r>
+                  <a:rPr lang="de-DE" b="0" dirty="0"/>
+                  <a:t>	</a:t>
+                </a:r>
+                <a14:m>
+                  <m:oMath xmlns:m="http://schemas.openxmlformats.org/officeDocument/2006/math">
+                    <m:r>
+                      <a:rPr lang="de-DE" b="0" i="1" smtClean="0">
+                        <a:latin typeface="Cambria Math" panose="02040503050406030204" pitchFamily="18" charset="0"/>
+                      </a:rPr>
+                      <m:t>𝐶</m:t>
+                    </m:r>
+                    <m:d>
+                      <m:dPr>
+                        <m:ctrlPr>
+                          <a:rPr lang="de-DE" b="0" i="1" smtClean="0">
+                            <a:latin typeface="Cambria Math" panose="02040503050406030204" pitchFamily="18" charset="0"/>
+                          </a:rPr>
+                        </m:ctrlPr>
+                      </m:dPr>
+                      <m:e>
+                        <m:r>
+                          <a:rPr lang="de-DE" b="0" i="1" smtClean="0">
+                            <a:latin typeface="Cambria Math" panose="02040503050406030204" pitchFamily="18" charset="0"/>
+                          </a:rPr>
+                          <m:t>𝑠</m:t>
+                        </m:r>
+                      </m:e>
+                    </m:d>
+                    <m:r>
+                      <a:rPr lang="de-DE" b="0" i="1" smtClean="0">
+                        <a:latin typeface="Cambria Math" panose="02040503050406030204" pitchFamily="18" charset="0"/>
+                      </a:rPr>
+                      <m:t>=</m:t>
+                    </m:r>
+                    <m:f>
+                      <m:fPr>
+                        <m:ctrlPr>
+                          <a:rPr lang="de-DE" b="0" i="1" smtClean="0">
+                            <a:latin typeface="Cambria Math" panose="02040503050406030204" pitchFamily="18" charset="0"/>
+                          </a:rPr>
+                        </m:ctrlPr>
+                      </m:fPr>
+                      <m:num>
+                        <m:r>
+                          <a:rPr lang="de-DE" b="0" i="1" smtClean="0">
+                            <a:latin typeface="Cambria Math" panose="02040503050406030204" pitchFamily="18" charset="0"/>
+                          </a:rPr>
+                          <m:t>𝑠</m:t>
+                        </m:r>
+                        <m:r>
+                          <a:rPr lang="de-DE" b="0" i="1" smtClean="0">
+                            <a:latin typeface="Cambria Math" panose="02040503050406030204" pitchFamily="18" charset="0"/>
+                          </a:rPr>
+                          <m:t>+5</m:t>
+                        </m:r>
+                      </m:num>
+                      <m:den>
+                        <m:r>
+                          <a:rPr lang="de-DE" b="0" i="1" smtClean="0">
+                            <a:latin typeface="Cambria Math" panose="02040503050406030204" pitchFamily="18" charset="0"/>
+                          </a:rPr>
+                          <m:t>𝑠</m:t>
+                        </m:r>
+                        <m:r>
+                          <a:rPr lang="de-DE" b="0" i="1" smtClean="0">
+                            <a:latin typeface="Cambria Math" panose="02040503050406030204" pitchFamily="18" charset="0"/>
+                          </a:rPr>
+                          <m:t>+20</m:t>
+                        </m:r>
+                      </m:den>
+                    </m:f>
+                  </m:oMath>
+                </a14:m>
+                <a:endParaRPr lang="de-DE" dirty="0"/>
+              </a:p>
+              <a:p>
+                <a:pPr marL="0" indent="0">
+                  <a:buNone/>
+                </a:pPr>
+                <a:endParaRPr lang="de-DE" dirty="0"/>
+              </a:p>
+              <a:p>
+                <a:r>
+                  <a:rPr lang="de-DE" dirty="0" err="1"/>
+                  <a:t>Identify</a:t>
+                </a:r>
+                <a:r>
+                  <a:rPr lang="de-DE" dirty="0"/>
+                  <a:t> </a:t>
+                </a:r>
+                <a:r>
+                  <a:rPr lang="de-DE" dirty="0" err="1"/>
+                  <a:t>zero</a:t>
+                </a:r>
+                <a:r>
+                  <a:rPr lang="de-DE" dirty="0"/>
+                  <a:t> and pole.</a:t>
+                </a:r>
+              </a:p>
+              <a:p>
+                <a:r>
+                  <a:rPr lang="de-DE" dirty="0" err="1"/>
+                  <a:t>Explain</a:t>
+                </a:r>
+                <a:r>
+                  <a:rPr lang="de-DE" dirty="0"/>
+                  <a:t> </a:t>
+                </a:r>
+                <a:r>
+                  <a:rPr lang="de-DE" dirty="0" err="1"/>
+                  <a:t>its</a:t>
+                </a:r>
+                <a:r>
+                  <a:rPr lang="de-DE" dirty="0"/>
+                  <a:t> </a:t>
+                </a:r>
+                <a:r>
+                  <a:rPr lang="de-DE" dirty="0" err="1"/>
+                  <a:t>effect</a:t>
+                </a:r>
+                <a:r>
+                  <a:rPr lang="de-DE" dirty="0"/>
+                  <a:t> on </a:t>
+                </a:r>
+                <a:r>
+                  <a:rPr lang="de-DE" dirty="0" err="1"/>
+                  <a:t>phase</a:t>
+                </a:r>
+                <a:r>
+                  <a:rPr lang="de-DE" dirty="0"/>
+                  <a:t> and </a:t>
+                </a:r>
+                <a:r>
+                  <a:rPr lang="de-DE" dirty="0" err="1"/>
+                  <a:t>stability</a:t>
+                </a:r>
+                <a:r>
+                  <a:rPr lang="de-DE" dirty="0"/>
+                  <a:t>.</a:t>
+                </a:r>
+              </a:p>
+            </p:txBody>
+          </p:sp>
+        </mc:Choice>
+        <mc:Fallback>
+          <p:sp>
+            <p:nvSpPr>
+              <p:cNvPr id="3" name="Inhaltsplatzhalter 2">
+                <a:extLst>
+                  <a:ext uri="{FF2B5EF4-FFF2-40B4-BE49-F238E27FC236}">
+                    <a16:creationId xmlns:a16="http://schemas.microsoft.com/office/drawing/2014/main" id="{3F41C9FC-B415-C9EE-CCA7-E4BB802E0B67}"/>
+                  </a:ext>
+                </a:extLst>
+              </p:cNvPr>
+              <p:cNvSpPr>
+                <a:spLocks noGrp="1" noRot="1" noChangeAspect="1" noMove="1" noResize="1" noEditPoints="1" noAdjustHandles="1" noChangeArrowheads="1" noChangeShapeType="1" noTextEdit="1"/>
+              </p:cNvSpPr>
+              <p:nvPr>
+                <p:ph idx="1"/>
+              </p:nvPr>
+            </p:nvSpPr>
+            <p:spPr>
+              <a:xfrm>
+                <a:off x="838200" y="1825625"/>
+                <a:ext cx="11209774" cy="4351338"/>
+              </a:xfrm>
+              <a:blipFill>
+                <a:blip r:embed="rId2"/>
+                <a:stretch>
+                  <a:fillRect l="-1133" t="-2326"/>
+                </a:stretch>
+              </a:blipFill>
+            </p:spPr>
+            <p:txBody>
+              <a:bodyPr/>
+              <a:lstStyle/>
+              <a:p>
+                <a:r>
+                  <a:rPr lang="de-DE">
+                    <a:noFill/>
+                  </a:rPr>
+                  <a:t> </a:t>
+                </a:r>
+              </a:p>
+            </p:txBody>
+          </p:sp>
+        </mc:Fallback>
+      </mc:AlternateContent>
+      <p:sp>
+        <p:nvSpPr>
+          <p:cNvPr id="4" name="Foliennummernplatzhalter 3">
+            <a:extLst>
+              <a:ext uri="{FF2B5EF4-FFF2-40B4-BE49-F238E27FC236}">
+                <a16:creationId xmlns:a16="http://schemas.microsoft.com/office/drawing/2014/main" id="{A278E718-AC32-BBAB-0569-7FE34D123ED0}"/>
+              </a:ext>
+            </a:extLst>
+          </p:cNvPr>
+          <p:cNvSpPr>
+            <a:spLocks noGrp="1"/>
+          </p:cNvSpPr>
+          <p:nvPr>
+            <p:ph type="sldNum" sz="quarter" idx="12"/>
+          </p:nvPr>
+        </p:nvSpPr>
+        <p:spPr/>
+        <p:txBody>
+          <a:bodyPr/>
+          <a:lstStyle/>
+          <a:p>
+            <a:fld id="{08C366F5-AFAD-49CB-854A-9D9E238FCA13}" type="slidenum">
+              <a:rPr lang="en-GB" smtClean="0"/>
+              <a:t>31</a:t>
+            </a:fld>
+            <a:endParaRPr lang="en-GB"/>
+          </a:p>
+        </p:txBody>
+      </p:sp>
+    </p:spTree>
+    <p:extLst>
+      <p:ext uri="{BB962C8B-B14F-4D97-AF65-F5344CB8AC3E}">
+        <p14:creationId xmlns:p14="http://schemas.microsoft.com/office/powerpoint/2010/main" val="3281713745"/>
+      </p:ext>
+    </p:extLst>
+  </p:cSld>
+  <p:clrMapOvr>
+    <a:masterClrMapping/>
+  </p:clrMapOvr>
+</p:sld>
+</file>
+
+<file path=ppt/slides/slide32.xml><?xml version="1.0" encoding="utf-8"?>
+<p:sld xmlns:a="http://schemas.openxmlformats.org/drawingml/2006/main" xmlns:r="http://schemas.openxmlformats.org/officeDocument/2006/relationships" xmlns:p="http://schemas.openxmlformats.org/presentationml/2006/main">
+  <p:cSld>
+    <p:spTree>
+      <p:nvGrpSpPr>
+        <p:cNvPr id="1" name="">
+          <a:extLst>
+            <a:ext uri="{FF2B5EF4-FFF2-40B4-BE49-F238E27FC236}">
+              <a16:creationId xmlns:a16="http://schemas.microsoft.com/office/drawing/2014/main" id="{4B1AB95F-0E16-2288-B6A6-7D1F1A3E665D}"/>
+            </a:ext>
+          </a:extLst>
+        </p:cNvPr>
+        <p:cNvGrpSpPr/>
+        <p:nvPr/>
+      </p:nvGrpSpPr>
+      <p:grpSpPr>
+        <a:xfrm>
+          <a:off x="0" y="0"/>
+          <a:ext cx="0" cy="0"/>
+          <a:chOff x="0" y="0"/>
+          <a:chExt cx="0" cy="0"/>
+        </a:xfrm>
+      </p:grpSpPr>
+      <p:sp>
+        <p:nvSpPr>
+          <p:cNvPr id="2" name="Titel 1">
+            <a:extLst>
+              <a:ext uri="{FF2B5EF4-FFF2-40B4-BE49-F238E27FC236}">
+                <a16:creationId xmlns:a16="http://schemas.microsoft.com/office/drawing/2014/main" id="{366764C2-2921-4FDE-AF32-5AF7B9C73920}"/>
+              </a:ext>
+            </a:extLst>
+          </p:cNvPr>
+          <p:cNvSpPr>
+            <a:spLocks noGrp="1"/>
+          </p:cNvSpPr>
+          <p:nvPr>
+            <p:ph type="title"/>
+          </p:nvPr>
+        </p:nvSpPr>
+        <p:spPr/>
+        <p:txBody>
+          <a:bodyPr/>
+          <a:lstStyle/>
+          <a:p>
+            <a:r>
+              <a:rPr lang="de-DE" dirty="0" err="1"/>
+              <a:t>Exercise</a:t>
+            </a:r>
+            <a:r>
+              <a:rPr lang="de-DE" dirty="0"/>
+              <a:t> 3</a:t>
+            </a:r>
+          </a:p>
+        </p:txBody>
+      </p:sp>
+      <mc:AlternateContent xmlns:mc="http://schemas.openxmlformats.org/markup-compatibility/2006">
+        <mc:Choice xmlns:a14="http://schemas.microsoft.com/office/drawing/2010/main" Requires="a14">
+          <p:sp>
+            <p:nvSpPr>
+              <p:cNvPr id="3" name="Inhaltsplatzhalter 2">
+                <a:extLst>
+                  <a:ext uri="{FF2B5EF4-FFF2-40B4-BE49-F238E27FC236}">
+                    <a16:creationId xmlns:a16="http://schemas.microsoft.com/office/drawing/2014/main" id="{9F9FB25F-4475-A1E5-F1A4-9131C65ADD83}"/>
+                  </a:ext>
+                </a:extLst>
+              </p:cNvPr>
+              <p:cNvSpPr>
+                <a:spLocks noGrp="1"/>
+              </p:cNvSpPr>
+              <p:nvPr>
+                <p:ph idx="1"/>
+              </p:nvPr>
+            </p:nvSpPr>
+            <p:spPr>
+              <a:xfrm>
+                <a:off x="838200" y="1825625"/>
+                <a:ext cx="11209774" cy="4351338"/>
+              </a:xfrm>
+            </p:spPr>
+            <p:txBody>
+              <a:bodyPr>
+                <a:normAutofit/>
+              </a:bodyPr>
+              <a:lstStyle/>
+              <a:p>
+                <a:pPr marL="0" indent="0">
+                  <a:buNone/>
+                </a:pPr>
+                <a:r>
+                  <a:rPr lang="de-DE" dirty="0"/>
+                  <a:t>Given </a:t>
+                </a:r>
+                <a:r>
+                  <a:rPr lang="de-DE" dirty="0" err="1"/>
+                  <a:t>is</a:t>
+                </a:r>
+                <a:r>
+                  <a:rPr lang="de-DE" dirty="0"/>
+                  <a:t> a lag </a:t>
+                </a:r>
+                <a:r>
+                  <a:rPr lang="de-DE" dirty="0" err="1"/>
+                  <a:t>compensator</a:t>
+                </a:r>
+                <a:r>
+                  <a:rPr lang="de-DE" dirty="0"/>
+                  <a:t>:</a:t>
+                </a:r>
+              </a:p>
+              <a:p>
+                <a:pPr marL="0" indent="0">
+                  <a:buNone/>
+                </a:pPr>
+                <a:r>
+                  <a:rPr lang="de-DE" b="0" dirty="0"/>
+                  <a:t>	</a:t>
+                </a:r>
+                <a14:m>
+                  <m:oMath xmlns:m="http://schemas.openxmlformats.org/officeDocument/2006/math">
+                    <m:r>
+                      <a:rPr lang="de-DE" b="0" i="1" smtClean="0">
+                        <a:latin typeface="Cambria Math" panose="02040503050406030204" pitchFamily="18" charset="0"/>
+                      </a:rPr>
+                      <m:t>𝐶</m:t>
+                    </m:r>
+                    <m:d>
+                      <m:dPr>
+                        <m:ctrlPr>
+                          <a:rPr lang="de-DE" b="0" i="1" smtClean="0">
+                            <a:latin typeface="Cambria Math" panose="02040503050406030204" pitchFamily="18" charset="0"/>
+                          </a:rPr>
+                        </m:ctrlPr>
+                      </m:dPr>
+                      <m:e>
+                        <m:r>
+                          <a:rPr lang="de-DE" b="0" i="1" smtClean="0">
+                            <a:latin typeface="Cambria Math" panose="02040503050406030204" pitchFamily="18" charset="0"/>
+                          </a:rPr>
+                          <m:t>𝑠</m:t>
+                        </m:r>
+                      </m:e>
+                    </m:d>
+                    <m:r>
+                      <a:rPr lang="de-DE" b="0" i="1" smtClean="0">
+                        <a:latin typeface="Cambria Math" panose="02040503050406030204" pitchFamily="18" charset="0"/>
+                      </a:rPr>
+                      <m:t>=</m:t>
+                    </m:r>
+                    <m:f>
+                      <m:fPr>
+                        <m:ctrlPr>
+                          <a:rPr lang="de-DE" b="0" i="1" smtClean="0">
+                            <a:latin typeface="Cambria Math" panose="02040503050406030204" pitchFamily="18" charset="0"/>
+                          </a:rPr>
+                        </m:ctrlPr>
+                      </m:fPr>
+                      <m:num>
+                        <m:r>
+                          <a:rPr lang="de-DE" b="0" i="1" smtClean="0">
+                            <a:latin typeface="Cambria Math" panose="02040503050406030204" pitchFamily="18" charset="0"/>
+                          </a:rPr>
+                          <m:t>𝑠</m:t>
+                        </m:r>
+                        <m:r>
+                          <a:rPr lang="de-DE" b="0" i="1" smtClean="0">
+                            <a:latin typeface="Cambria Math" panose="02040503050406030204" pitchFamily="18" charset="0"/>
+                          </a:rPr>
+                          <m:t>+1</m:t>
+                        </m:r>
+                      </m:num>
+                      <m:den>
+                        <m:r>
+                          <a:rPr lang="de-DE" b="0" i="1" smtClean="0">
+                            <a:latin typeface="Cambria Math" panose="02040503050406030204" pitchFamily="18" charset="0"/>
+                          </a:rPr>
+                          <m:t>𝑠</m:t>
+                        </m:r>
+                        <m:r>
+                          <a:rPr lang="de-DE" b="0" i="1" smtClean="0">
+                            <a:latin typeface="Cambria Math" panose="02040503050406030204" pitchFamily="18" charset="0"/>
+                          </a:rPr>
+                          <m:t>+0.1</m:t>
+                        </m:r>
+                      </m:den>
+                    </m:f>
+                  </m:oMath>
+                </a14:m>
+                <a:endParaRPr lang="de-DE" dirty="0"/>
+              </a:p>
+              <a:p>
+                <a:pPr marL="0" indent="0">
+                  <a:buNone/>
+                </a:pPr>
+                <a:endParaRPr lang="de-DE" dirty="0"/>
+              </a:p>
+              <a:p>
+                <a:pPr marL="0" indent="0">
+                  <a:buNone/>
+                </a:pPr>
+                <a:r>
+                  <a:rPr lang="de-DE" dirty="0" err="1"/>
+                  <a:t>Explain</a:t>
+                </a:r>
+                <a:r>
+                  <a:rPr lang="de-DE" dirty="0"/>
+                  <a:t> </a:t>
+                </a:r>
+                <a:r>
+                  <a:rPr lang="de-DE" dirty="0" err="1"/>
+                  <a:t>its</a:t>
+                </a:r>
+                <a:r>
+                  <a:rPr lang="de-DE" dirty="0"/>
+                  <a:t> </a:t>
+                </a:r>
+                <a:r>
+                  <a:rPr lang="de-DE" dirty="0" err="1"/>
+                  <a:t>effect</a:t>
+                </a:r>
+                <a:r>
+                  <a:rPr lang="de-DE" dirty="0"/>
+                  <a:t> and </a:t>
+                </a:r>
+                <a:r>
+                  <a:rPr lang="de-DE" dirty="0" err="1"/>
+                  <a:t>main</a:t>
+                </a:r>
+                <a:r>
+                  <a:rPr lang="de-DE" dirty="0"/>
+                  <a:t> </a:t>
+                </a:r>
+                <a:r>
+                  <a:rPr lang="de-DE" dirty="0" err="1"/>
+                  <a:t>purpose</a:t>
+                </a:r>
+                <a:r>
+                  <a:rPr lang="de-DE" dirty="0"/>
+                  <a:t>.</a:t>
+                </a:r>
+              </a:p>
+            </p:txBody>
+          </p:sp>
+        </mc:Choice>
+        <mc:Fallback>
+          <p:sp>
+            <p:nvSpPr>
+              <p:cNvPr id="3" name="Inhaltsplatzhalter 2">
+                <a:extLst>
+                  <a:ext uri="{FF2B5EF4-FFF2-40B4-BE49-F238E27FC236}">
+                    <a16:creationId xmlns:a16="http://schemas.microsoft.com/office/drawing/2014/main" id="{9F9FB25F-4475-A1E5-F1A4-9131C65ADD83}"/>
+                  </a:ext>
+                </a:extLst>
+              </p:cNvPr>
+              <p:cNvSpPr>
+                <a:spLocks noGrp="1" noRot="1" noChangeAspect="1" noMove="1" noResize="1" noEditPoints="1" noAdjustHandles="1" noChangeArrowheads="1" noChangeShapeType="1" noTextEdit="1"/>
+              </p:cNvSpPr>
+              <p:nvPr>
+                <p:ph idx="1"/>
+              </p:nvPr>
+            </p:nvSpPr>
+            <p:spPr>
+              <a:xfrm>
+                <a:off x="838200" y="1825625"/>
+                <a:ext cx="11209774" cy="4351338"/>
+              </a:xfrm>
+              <a:blipFill>
+                <a:blip r:embed="rId2"/>
+                <a:stretch>
+                  <a:fillRect l="-1133" t="-2326"/>
+                </a:stretch>
+              </a:blipFill>
+            </p:spPr>
+            <p:txBody>
+              <a:bodyPr/>
+              <a:lstStyle/>
+              <a:p>
+                <a:r>
+                  <a:rPr lang="de-DE">
+                    <a:noFill/>
+                  </a:rPr>
+                  <a:t> </a:t>
+                </a:r>
+              </a:p>
+            </p:txBody>
+          </p:sp>
+        </mc:Fallback>
+      </mc:AlternateContent>
+      <p:sp>
+        <p:nvSpPr>
+          <p:cNvPr id="4" name="Foliennummernplatzhalter 3">
+            <a:extLst>
+              <a:ext uri="{FF2B5EF4-FFF2-40B4-BE49-F238E27FC236}">
+                <a16:creationId xmlns:a16="http://schemas.microsoft.com/office/drawing/2014/main" id="{55E0F816-D8B8-E216-4160-4B51EBCC9574}"/>
+              </a:ext>
+            </a:extLst>
+          </p:cNvPr>
+          <p:cNvSpPr>
+            <a:spLocks noGrp="1"/>
+          </p:cNvSpPr>
+          <p:nvPr>
+            <p:ph type="sldNum" sz="quarter" idx="12"/>
+          </p:nvPr>
+        </p:nvSpPr>
+        <p:spPr/>
+        <p:txBody>
+          <a:bodyPr/>
+          <a:lstStyle/>
+          <a:p>
+            <a:fld id="{08C366F5-AFAD-49CB-854A-9D9E238FCA13}" type="slidenum">
+              <a:rPr lang="en-GB" smtClean="0"/>
+              <a:t>32</a:t>
+            </a:fld>
+            <a:endParaRPr lang="en-GB"/>
+          </a:p>
+        </p:txBody>
+      </p:sp>
+    </p:spTree>
+    <p:extLst>
+      <p:ext uri="{BB962C8B-B14F-4D97-AF65-F5344CB8AC3E}">
+        <p14:creationId xmlns:p14="http://schemas.microsoft.com/office/powerpoint/2010/main" val="1403985815"/>
+      </p:ext>
+    </p:extLst>
+  </p:cSld>
+  <p:clrMapOvr>
+    <a:masterClrMapping/>
+  </p:clrMapOvr>
+</p:sld>
+</file>
+
+<file path=ppt/slides/slide33.xml><?xml version="1.0" encoding="utf-8"?>
+<p:sld xmlns:a="http://schemas.openxmlformats.org/drawingml/2006/main" xmlns:r="http://schemas.openxmlformats.org/officeDocument/2006/relationships" xmlns:p="http://schemas.openxmlformats.org/presentationml/2006/main">
+  <p:cSld>
+    <p:spTree>
+      <p:nvGrpSpPr>
+        <p:cNvPr id="1" name="">
+          <a:extLst>
+            <a:ext uri="{FF2B5EF4-FFF2-40B4-BE49-F238E27FC236}">
+              <a16:creationId xmlns:a16="http://schemas.microsoft.com/office/drawing/2014/main" id="{A57F6C02-B76C-26EC-31D8-092A4D3442D9}"/>
+            </a:ext>
+          </a:extLst>
+        </p:cNvPr>
+        <p:cNvGrpSpPr/>
+        <p:nvPr/>
+      </p:nvGrpSpPr>
+      <p:grpSpPr>
+        <a:xfrm>
+          <a:off x="0" y="0"/>
+          <a:ext cx="0" cy="0"/>
+          <a:chOff x="0" y="0"/>
+          <a:chExt cx="0" cy="0"/>
+        </a:xfrm>
+      </p:grpSpPr>
+      <p:sp>
+        <p:nvSpPr>
+          <p:cNvPr id="2" name="Titel 1">
+            <a:extLst>
+              <a:ext uri="{FF2B5EF4-FFF2-40B4-BE49-F238E27FC236}">
+                <a16:creationId xmlns:a16="http://schemas.microsoft.com/office/drawing/2014/main" id="{D0BBB9DB-2391-F45F-C305-794AB1A1C748}"/>
+              </a:ext>
+            </a:extLst>
+          </p:cNvPr>
+          <p:cNvSpPr>
+            <a:spLocks noGrp="1"/>
+          </p:cNvSpPr>
+          <p:nvPr>
+            <p:ph type="title"/>
+          </p:nvPr>
+        </p:nvSpPr>
+        <p:spPr/>
+        <p:txBody>
+          <a:bodyPr/>
+          <a:lstStyle/>
+          <a:p>
+            <a:r>
+              <a:rPr lang="de-DE" dirty="0" err="1"/>
+              <a:t>Exercise</a:t>
+            </a:r>
+            <a:r>
+              <a:rPr lang="de-DE" dirty="0"/>
+              <a:t> 4</a:t>
+            </a:r>
+          </a:p>
+        </p:txBody>
+      </p:sp>
+      <mc:AlternateContent xmlns:mc="http://schemas.openxmlformats.org/markup-compatibility/2006">
+        <mc:Choice xmlns:a14="http://schemas.microsoft.com/office/drawing/2010/main" Requires="a14">
+          <p:sp>
+            <p:nvSpPr>
+              <p:cNvPr id="3" name="Inhaltsplatzhalter 2">
+                <a:extLst>
+                  <a:ext uri="{FF2B5EF4-FFF2-40B4-BE49-F238E27FC236}">
+                    <a16:creationId xmlns:a16="http://schemas.microsoft.com/office/drawing/2014/main" id="{198A360F-2DDF-7424-20A6-3D89EA49CFA4}"/>
+                  </a:ext>
+                </a:extLst>
+              </p:cNvPr>
+              <p:cNvSpPr>
+                <a:spLocks noGrp="1"/>
+              </p:cNvSpPr>
+              <p:nvPr>
+                <p:ph idx="1"/>
+              </p:nvPr>
+            </p:nvSpPr>
+            <p:spPr>
+              <a:xfrm>
+                <a:off x="838200" y="1825625"/>
+                <a:ext cx="11209774" cy="4351338"/>
+              </a:xfrm>
+            </p:spPr>
+            <p:txBody>
+              <a:bodyPr>
+                <a:normAutofit/>
+              </a:bodyPr>
+              <a:lstStyle/>
+              <a:p>
+                <a:pPr marL="0" indent="0">
+                  <a:buNone/>
+                </a:pPr>
+                <a:r>
+                  <a:rPr lang="de-DE" dirty="0"/>
+                  <a:t>Given:</a:t>
+                </a:r>
+              </a:p>
+              <a:p>
+                <a:pPr marL="0" indent="0">
+                  <a:buNone/>
+                </a:pPr>
+                <a:r>
+                  <a:rPr lang="de-DE" b="0" dirty="0"/>
+                  <a:t>	</a:t>
+                </a:r>
+                <a14:m>
+                  <m:oMath xmlns:m="http://schemas.openxmlformats.org/officeDocument/2006/math">
+                    <m:r>
+                      <a:rPr lang="de-DE" b="0" i="1" smtClean="0">
+                        <a:latin typeface="Cambria Math" panose="02040503050406030204" pitchFamily="18" charset="0"/>
+                      </a:rPr>
+                      <m:t>𝐺</m:t>
+                    </m:r>
+                    <m:d>
+                      <m:dPr>
+                        <m:ctrlPr>
+                          <a:rPr lang="de-DE" b="0" i="1" smtClean="0">
+                            <a:latin typeface="Cambria Math" panose="02040503050406030204" pitchFamily="18" charset="0"/>
+                          </a:rPr>
+                        </m:ctrlPr>
+                      </m:dPr>
+                      <m:e>
+                        <m:r>
+                          <a:rPr lang="de-DE" b="0" i="1" smtClean="0">
+                            <a:latin typeface="Cambria Math" panose="02040503050406030204" pitchFamily="18" charset="0"/>
+                          </a:rPr>
+                          <m:t>𝑠</m:t>
+                        </m:r>
+                      </m:e>
+                    </m:d>
+                    <m:r>
+                      <a:rPr lang="de-DE" b="0" i="1" smtClean="0">
+                        <a:latin typeface="Cambria Math" panose="02040503050406030204" pitchFamily="18" charset="0"/>
+                      </a:rPr>
+                      <m:t>=</m:t>
+                    </m:r>
+                    <m:f>
+                      <m:fPr>
+                        <m:ctrlPr>
+                          <a:rPr lang="de-DE" b="0" i="1" smtClean="0">
+                            <a:latin typeface="Cambria Math" panose="02040503050406030204" pitchFamily="18" charset="0"/>
+                          </a:rPr>
+                        </m:ctrlPr>
+                      </m:fPr>
+                      <m:num>
+                        <m:r>
+                          <a:rPr lang="de-DE" b="0" i="1" smtClean="0">
+                            <a:latin typeface="Cambria Math" panose="02040503050406030204" pitchFamily="18" charset="0"/>
+                          </a:rPr>
+                          <m:t>𝐾</m:t>
+                        </m:r>
+                      </m:num>
+                      <m:den>
+                        <m:r>
+                          <a:rPr lang="de-DE" b="0" i="1" smtClean="0">
+                            <a:latin typeface="Cambria Math" panose="02040503050406030204" pitchFamily="18" charset="0"/>
+                          </a:rPr>
+                          <m:t>𝑠</m:t>
+                        </m:r>
+                        <m:r>
+                          <a:rPr lang="de-DE" b="0" i="1" smtClean="0">
+                            <a:latin typeface="Cambria Math" panose="02040503050406030204" pitchFamily="18" charset="0"/>
+                          </a:rPr>
+                          <m:t>(</m:t>
+                        </m:r>
+                        <m:r>
+                          <a:rPr lang="de-DE" b="0" i="1" smtClean="0">
+                            <a:latin typeface="Cambria Math" panose="02040503050406030204" pitchFamily="18" charset="0"/>
+                          </a:rPr>
+                          <m:t>𝑠</m:t>
+                        </m:r>
+                        <m:r>
+                          <a:rPr lang="de-DE" b="0" i="1" smtClean="0">
+                            <a:latin typeface="Cambria Math" panose="02040503050406030204" pitchFamily="18" charset="0"/>
+                          </a:rPr>
+                          <m:t>+2)</m:t>
+                        </m:r>
+                      </m:den>
+                    </m:f>
+                  </m:oMath>
+                </a14:m>
+                <a:endParaRPr lang="de-DE" dirty="0"/>
+              </a:p>
+              <a:p>
+                <a:pPr marL="0" indent="0">
+                  <a:buNone/>
+                </a:pPr>
+                <a:endParaRPr lang="de-DE" dirty="0"/>
+              </a:p>
+              <a:p>
+                <a:r>
+                  <a:rPr lang="de-DE" dirty="0" err="1"/>
+                  <a:t>Identify</a:t>
+                </a:r>
+                <a:r>
+                  <a:rPr lang="de-DE" dirty="0"/>
+                  <a:t> </a:t>
+                </a:r>
+                <a:r>
+                  <a:rPr lang="de-DE" dirty="0" err="1"/>
+                  <a:t>poles</a:t>
+                </a:r>
+                <a:r>
+                  <a:rPr lang="de-DE" dirty="0"/>
+                  <a:t> and </a:t>
+                </a:r>
+                <a:r>
+                  <a:rPr lang="de-DE" dirty="0" err="1"/>
+                  <a:t>zeros</a:t>
+                </a:r>
+                <a:r>
+                  <a:rPr lang="de-DE" dirty="0"/>
+                  <a:t>.</a:t>
+                </a:r>
+              </a:p>
+              <a:p>
+                <a:r>
+                  <a:rPr lang="de-DE" dirty="0" err="1"/>
+                  <a:t>Describe</a:t>
+                </a:r>
+                <a:r>
+                  <a:rPr lang="de-DE" dirty="0"/>
+                  <a:t> root </a:t>
+                </a:r>
+                <a:r>
+                  <a:rPr lang="de-DE" dirty="0" err="1"/>
+                  <a:t>locus</a:t>
+                </a:r>
+                <a:r>
+                  <a:rPr lang="de-DE" dirty="0"/>
+                  <a:t> </a:t>
+                </a:r>
+                <a:r>
+                  <a:rPr lang="de-DE" dirty="0" err="1"/>
+                  <a:t>behavior</a:t>
+                </a:r>
+                <a:r>
+                  <a:rPr lang="de-DE" dirty="0"/>
+                  <a:t> </a:t>
+                </a:r>
+                <a:r>
+                  <a:rPr lang="de-DE" dirty="0" err="1"/>
+                  <a:t>as</a:t>
+                </a:r>
+                <a:r>
+                  <a:rPr lang="de-DE" dirty="0"/>
+                  <a:t> </a:t>
+                </a:r>
+                <a14:m>
+                  <m:oMath xmlns:m="http://schemas.openxmlformats.org/officeDocument/2006/math">
+                    <m:r>
+                      <a:rPr lang="de-DE" i="1">
+                        <a:latin typeface="Cambria Math" panose="02040503050406030204" pitchFamily="18" charset="0"/>
+                      </a:rPr>
+                      <m:t>𝐾</m:t>
+                    </m:r>
+                  </m:oMath>
+                </a14:m>
+                <a:r>
+                  <a:rPr lang="de-DE" dirty="0"/>
+                  <a:t> </a:t>
+                </a:r>
+                <a:r>
+                  <a:rPr lang="de-DE" dirty="0" err="1"/>
+                  <a:t>increases</a:t>
+                </a:r>
+                <a:r>
+                  <a:rPr lang="de-DE" dirty="0"/>
+                  <a:t>.</a:t>
+                </a:r>
+              </a:p>
+            </p:txBody>
+          </p:sp>
+        </mc:Choice>
+        <mc:Fallback>
+          <p:sp>
+            <p:nvSpPr>
+              <p:cNvPr id="3" name="Inhaltsplatzhalter 2">
+                <a:extLst>
+                  <a:ext uri="{FF2B5EF4-FFF2-40B4-BE49-F238E27FC236}">
+                    <a16:creationId xmlns:a16="http://schemas.microsoft.com/office/drawing/2014/main" id="{198A360F-2DDF-7424-20A6-3D89EA49CFA4}"/>
+                  </a:ext>
+                </a:extLst>
+              </p:cNvPr>
+              <p:cNvSpPr>
+                <a:spLocks noGrp="1" noRot="1" noChangeAspect="1" noMove="1" noResize="1" noEditPoints="1" noAdjustHandles="1" noChangeArrowheads="1" noChangeShapeType="1" noTextEdit="1"/>
+              </p:cNvSpPr>
+              <p:nvPr>
+                <p:ph idx="1"/>
+              </p:nvPr>
+            </p:nvSpPr>
+            <p:spPr>
+              <a:xfrm>
+                <a:off x="838200" y="1825625"/>
+                <a:ext cx="11209774" cy="4351338"/>
+              </a:xfrm>
+              <a:blipFill>
+                <a:blip r:embed="rId2"/>
+                <a:stretch>
+                  <a:fillRect l="-1133" t="-2326"/>
+                </a:stretch>
+              </a:blipFill>
+            </p:spPr>
+            <p:txBody>
+              <a:bodyPr/>
+              <a:lstStyle/>
+              <a:p>
+                <a:r>
+                  <a:rPr lang="de-DE">
+                    <a:noFill/>
+                  </a:rPr>
+                  <a:t> </a:t>
+                </a:r>
+              </a:p>
+            </p:txBody>
+          </p:sp>
+        </mc:Fallback>
+      </mc:AlternateContent>
+      <p:sp>
+        <p:nvSpPr>
+          <p:cNvPr id="4" name="Foliennummernplatzhalter 3">
+            <a:extLst>
+              <a:ext uri="{FF2B5EF4-FFF2-40B4-BE49-F238E27FC236}">
+                <a16:creationId xmlns:a16="http://schemas.microsoft.com/office/drawing/2014/main" id="{1BFB523C-09A0-A5B5-CA01-2B24E43C27C8}"/>
+              </a:ext>
+            </a:extLst>
+          </p:cNvPr>
+          <p:cNvSpPr>
+            <a:spLocks noGrp="1"/>
+          </p:cNvSpPr>
+          <p:nvPr>
+            <p:ph type="sldNum" sz="quarter" idx="12"/>
+          </p:nvPr>
+        </p:nvSpPr>
+        <p:spPr/>
+        <p:txBody>
+          <a:bodyPr/>
+          <a:lstStyle/>
+          <a:p>
+            <a:fld id="{08C366F5-AFAD-49CB-854A-9D9E238FCA13}" type="slidenum">
+              <a:rPr lang="en-GB" smtClean="0"/>
+              <a:t>33</a:t>
+            </a:fld>
+            <a:endParaRPr lang="en-GB"/>
+          </a:p>
+        </p:txBody>
+      </p:sp>
+    </p:spTree>
+    <p:extLst>
+      <p:ext uri="{BB962C8B-B14F-4D97-AF65-F5344CB8AC3E}">
+        <p14:creationId xmlns:p14="http://schemas.microsoft.com/office/powerpoint/2010/main" val="964026670"/>
+      </p:ext>
+    </p:extLst>
+  </p:cSld>
+  <p:clrMapOvr>
+    <a:masterClrMapping/>
+  </p:clrMapOvr>
+</p:sld>
+</file>
+
+<file path=ppt/slides/slide34.xml><?xml version="1.0" encoding="utf-8"?>
+<p:sld xmlns:a="http://schemas.openxmlformats.org/drawingml/2006/main" xmlns:r="http://schemas.openxmlformats.org/officeDocument/2006/relationships" xmlns:p="http://schemas.openxmlformats.org/presentationml/2006/main">
+  <p:cSld>
+    <p:spTree>
+      <p:nvGrpSpPr>
+        <p:cNvPr id="1" name="">
+          <a:extLst>
+            <a:ext uri="{FF2B5EF4-FFF2-40B4-BE49-F238E27FC236}">
+              <a16:creationId xmlns:a16="http://schemas.microsoft.com/office/drawing/2014/main" id="{EB11750E-344E-79C4-B36C-3A231D2A6A45}"/>
+            </a:ext>
+          </a:extLst>
+        </p:cNvPr>
+        <p:cNvGrpSpPr/>
+        <p:nvPr/>
+      </p:nvGrpSpPr>
+      <p:grpSpPr>
+        <a:xfrm>
+          <a:off x="0" y="0"/>
+          <a:ext cx="0" cy="0"/>
+          <a:chOff x="0" y="0"/>
+          <a:chExt cx="0" cy="0"/>
+        </a:xfrm>
+      </p:grpSpPr>
+      <p:sp>
+        <p:nvSpPr>
+          <p:cNvPr id="2" name="Titel 1">
+            <a:extLst>
+              <a:ext uri="{FF2B5EF4-FFF2-40B4-BE49-F238E27FC236}">
+                <a16:creationId xmlns:a16="http://schemas.microsoft.com/office/drawing/2014/main" id="{DF8BE6AE-94A9-660B-C547-C36493103BA2}"/>
+              </a:ext>
+            </a:extLst>
+          </p:cNvPr>
+          <p:cNvSpPr>
+            <a:spLocks noGrp="1"/>
+          </p:cNvSpPr>
+          <p:nvPr>
+            <p:ph type="title"/>
+          </p:nvPr>
+        </p:nvSpPr>
+        <p:spPr/>
+        <p:txBody>
+          <a:bodyPr/>
+          <a:lstStyle/>
+          <a:p>
+            <a:r>
+              <a:rPr lang="de-DE" dirty="0" err="1"/>
+              <a:t>Exercise</a:t>
+            </a:r>
+            <a:r>
+              <a:rPr lang="de-DE" dirty="0"/>
+              <a:t> 5</a:t>
+            </a:r>
+          </a:p>
+        </p:txBody>
+      </p:sp>
+      <mc:AlternateContent xmlns:mc="http://schemas.openxmlformats.org/markup-compatibility/2006">
+        <mc:Choice xmlns:a14="http://schemas.microsoft.com/office/drawing/2010/main" Requires="a14">
+          <p:sp>
+            <p:nvSpPr>
+              <p:cNvPr id="3" name="Inhaltsplatzhalter 2">
+                <a:extLst>
+                  <a:ext uri="{FF2B5EF4-FFF2-40B4-BE49-F238E27FC236}">
+                    <a16:creationId xmlns:a16="http://schemas.microsoft.com/office/drawing/2014/main" id="{37F81FBF-7147-D154-D093-A7CFAAEFC961}"/>
+                  </a:ext>
+                </a:extLst>
+              </p:cNvPr>
+              <p:cNvSpPr>
+                <a:spLocks noGrp="1"/>
+              </p:cNvSpPr>
+              <p:nvPr>
+                <p:ph idx="1"/>
+              </p:nvPr>
+            </p:nvSpPr>
+            <p:spPr>
+              <a:xfrm>
+                <a:off x="838200" y="1825625"/>
+                <a:ext cx="11209774" cy="4351338"/>
+              </a:xfrm>
+            </p:spPr>
+            <p:txBody>
+              <a:bodyPr>
+                <a:normAutofit/>
+              </a:bodyPr>
+              <a:lstStyle/>
+              <a:p>
+                <a:pPr marL="0" indent="0">
+                  <a:buNone/>
+                </a:pPr>
+                <a:r>
+                  <a:rPr lang="de-DE" dirty="0"/>
+                  <a:t>A </a:t>
+                </a:r>
+                <a:r>
+                  <a:rPr lang="de-DE" dirty="0" err="1"/>
+                  <a:t>system</a:t>
+                </a:r>
+                <a:r>
+                  <a:rPr lang="de-DE" dirty="0"/>
+                  <a:t> </a:t>
+                </a:r>
+                <a:r>
+                  <a:rPr lang="de-DE" dirty="0" err="1"/>
+                  <a:t>reaches</a:t>
+                </a:r>
+                <a:r>
+                  <a:rPr lang="de-DE" dirty="0"/>
+                  <a:t> </a:t>
+                </a:r>
+                <a:r>
+                  <a:rPr lang="de-DE" dirty="0" err="1"/>
+                  <a:t>sustained</a:t>
+                </a:r>
+                <a:r>
+                  <a:rPr lang="de-DE" dirty="0"/>
+                  <a:t> </a:t>
+                </a:r>
+                <a:r>
+                  <a:rPr lang="de-DE" dirty="0" err="1"/>
+                  <a:t>oscillations</a:t>
+                </a:r>
+                <a:r>
+                  <a:rPr lang="de-DE" dirty="0"/>
+                  <a:t> at:</a:t>
+                </a:r>
+              </a:p>
+              <a:p>
+                <a:r>
+                  <a:rPr lang="de-DE" dirty="0"/>
+                  <a:t>Ultimate </a:t>
+                </a:r>
+                <a:r>
+                  <a:rPr lang="de-DE" dirty="0" err="1"/>
+                  <a:t>gain</a:t>
+                </a:r>
+                <a:r>
+                  <a:rPr lang="de-DE" dirty="0"/>
+                  <a:t>: </a:t>
+                </a:r>
+                <a14:m>
+                  <m:oMath xmlns:m="http://schemas.openxmlformats.org/officeDocument/2006/math">
+                    <m:sSub>
+                      <m:sSubPr>
+                        <m:ctrlPr>
+                          <a:rPr lang="de-DE" i="1" smtClean="0">
+                            <a:latin typeface="Cambria Math" panose="02040503050406030204" pitchFamily="18" charset="0"/>
+                          </a:rPr>
+                        </m:ctrlPr>
+                      </m:sSubPr>
+                      <m:e>
+                        <m:r>
+                          <a:rPr lang="de-DE" b="0" i="1" smtClean="0">
+                            <a:latin typeface="Cambria Math" panose="02040503050406030204" pitchFamily="18" charset="0"/>
+                          </a:rPr>
+                          <m:t>𝐾</m:t>
+                        </m:r>
+                      </m:e>
+                      <m:sub>
+                        <m:r>
+                          <a:rPr lang="de-DE" b="0" i="1" smtClean="0">
+                            <a:latin typeface="Cambria Math" panose="02040503050406030204" pitchFamily="18" charset="0"/>
+                          </a:rPr>
+                          <m:t>𝑢</m:t>
+                        </m:r>
+                      </m:sub>
+                    </m:sSub>
+                    <m:r>
+                      <a:rPr lang="de-DE" b="0" i="1" smtClean="0">
+                        <a:latin typeface="Cambria Math" panose="02040503050406030204" pitchFamily="18" charset="0"/>
+                      </a:rPr>
+                      <m:t>=8</m:t>
+                    </m:r>
+                  </m:oMath>
+                </a14:m>
+                <a:endParaRPr lang="de-DE" dirty="0"/>
+              </a:p>
+              <a:p>
+                <a:r>
+                  <a:rPr lang="de-DE" dirty="0" err="1"/>
+                  <a:t>Oscillation</a:t>
+                </a:r>
+                <a:r>
+                  <a:rPr lang="de-DE" dirty="0"/>
+                  <a:t> </a:t>
+                </a:r>
+                <a:r>
+                  <a:rPr lang="de-DE" dirty="0" err="1"/>
+                  <a:t>period</a:t>
+                </a:r>
+                <a:r>
+                  <a:rPr lang="de-DE" dirty="0"/>
+                  <a:t>: </a:t>
+                </a:r>
+                <a14:m>
+                  <m:oMath xmlns:m="http://schemas.openxmlformats.org/officeDocument/2006/math">
+                    <m:sSub>
+                      <m:sSubPr>
+                        <m:ctrlPr>
+                          <a:rPr lang="de-DE" i="1" smtClean="0">
+                            <a:latin typeface="Cambria Math" panose="02040503050406030204" pitchFamily="18" charset="0"/>
+                          </a:rPr>
+                        </m:ctrlPr>
+                      </m:sSubPr>
+                      <m:e>
+                        <m:r>
+                          <a:rPr lang="de-DE" b="0" i="1" smtClean="0">
+                            <a:latin typeface="Cambria Math" panose="02040503050406030204" pitchFamily="18" charset="0"/>
+                          </a:rPr>
+                          <m:t>𝑇</m:t>
+                        </m:r>
+                      </m:e>
+                      <m:sub>
+                        <m:r>
+                          <a:rPr lang="de-DE" b="0" i="1" smtClean="0">
+                            <a:latin typeface="Cambria Math" panose="02040503050406030204" pitchFamily="18" charset="0"/>
+                          </a:rPr>
+                          <m:t>𝑢</m:t>
+                        </m:r>
+                      </m:sub>
+                    </m:sSub>
+                    <m:r>
+                      <a:rPr lang="de-DE" b="0" i="1" smtClean="0">
+                        <a:latin typeface="Cambria Math" panose="02040503050406030204" pitchFamily="18" charset="0"/>
+                      </a:rPr>
+                      <m:t>=2</m:t>
+                    </m:r>
+                    <m:r>
+                      <a:rPr lang="de-DE" b="0" i="0" smtClean="0">
+                        <a:latin typeface="Cambria Math" panose="02040503050406030204" pitchFamily="18" charset="0"/>
+                      </a:rPr>
+                      <m:t> </m:t>
+                    </m:r>
+                    <m:r>
+                      <m:rPr>
+                        <m:sty m:val="p"/>
+                      </m:rPr>
+                      <a:rPr lang="de-DE" b="0" i="0" smtClean="0">
+                        <a:latin typeface="Cambria Math" panose="02040503050406030204" pitchFamily="18" charset="0"/>
+                      </a:rPr>
+                      <m:t>s</m:t>
+                    </m:r>
+                  </m:oMath>
+                </a14:m>
+                <a:endParaRPr lang="de-DE" dirty="0"/>
+              </a:p>
+              <a:p>
+                <a:pPr marL="0" indent="0">
+                  <a:buNone/>
+                </a:pPr>
+                <a:endParaRPr lang="de-DE" dirty="0"/>
+              </a:p>
+              <a:p>
+                <a:pPr marL="0" indent="0">
+                  <a:buNone/>
+                </a:pPr>
+                <a:r>
+                  <a:rPr lang="de-DE" dirty="0" err="1"/>
+                  <a:t>Compute</a:t>
+                </a:r>
+                <a:r>
+                  <a:rPr lang="de-DE" dirty="0"/>
+                  <a:t> PID </a:t>
+                </a:r>
+                <a:r>
+                  <a:rPr lang="de-DE" dirty="0" err="1"/>
+                  <a:t>parameters</a:t>
+                </a:r>
+                <a:r>
+                  <a:rPr lang="de-DE" dirty="0"/>
+                  <a:t> </a:t>
+                </a:r>
+                <a:r>
+                  <a:rPr lang="de-DE" dirty="0" err="1"/>
+                  <a:t>using</a:t>
+                </a:r>
+                <a:r>
+                  <a:rPr lang="de-DE" dirty="0"/>
+                  <a:t> Ziegler–Nichols.</a:t>
+                </a:r>
+              </a:p>
+            </p:txBody>
+          </p:sp>
+        </mc:Choice>
+        <mc:Fallback>
+          <p:sp>
+            <p:nvSpPr>
+              <p:cNvPr id="3" name="Inhaltsplatzhalter 2">
+                <a:extLst>
+                  <a:ext uri="{FF2B5EF4-FFF2-40B4-BE49-F238E27FC236}">
+                    <a16:creationId xmlns:a16="http://schemas.microsoft.com/office/drawing/2014/main" id="{37F81FBF-7147-D154-D093-A7CFAAEFC961}"/>
+                  </a:ext>
+                </a:extLst>
+              </p:cNvPr>
+              <p:cNvSpPr>
+                <a:spLocks noGrp="1" noRot="1" noChangeAspect="1" noMove="1" noResize="1" noEditPoints="1" noAdjustHandles="1" noChangeArrowheads="1" noChangeShapeType="1" noTextEdit="1"/>
+              </p:cNvSpPr>
+              <p:nvPr>
+                <p:ph idx="1"/>
+              </p:nvPr>
+            </p:nvSpPr>
+            <p:spPr>
+              <a:xfrm>
+                <a:off x="838200" y="1825625"/>
+                <a:ext cx="11209774" cy="4351338"/>
+              </a:xfrm>
+              <a:blipFill>
+                <a:blip r:embed="rId2"/>
+                <a:stretch>
+                  <a:fillRect l="-1133" t="-2326"/>
+                </a:stretch>
+              </a:blipFill>
+            </p:spPr>
+            <p:txBody>
+              <a:bodyPr/>
+              <a:lstStyle/>
+              <a:p>
+                <a:r>
+                  <a:rPr lang="de-DE">
+                    <a:noFill/>
+                  </a:rPr>
+                  <a:t> </a:t>
+                </a:r>
+              </a:p>
+            </p:txBody>
+          </p:sp>
+        </mc:Fallback>
+      </mc:AlternateContent>
+      <p:sp>
+        <p:nvSpPr>
+          <p:cNvPr id="4" name="Foliennummernplatzhalter 3">
+            <a:extLst>
+              <a:ext uri="{FF2B5EF4-FFF2-40B4-BE49-F238E27FC236}">
+                <a16:creationId xmlns:a16="http://schemas.microsoft.com/office/drawing/2014/main" id="{D6AFC19A-8BF5-1ADC-3D3D-0120CD69706B}"/>
+              </a:ext>
+            </a:extLst>
+          </p:cNvPr>
+          <p:cNvSpPr>
+            <a:spLocks noGrp="1"/>
+          </p:cNvSpPr>
+          <p:nvPr>
+            <p:ph type="sldNum" sz="quarter" idx="12"/>
+          </p:nvPr>
+        </p:nvSpPr>
+        <p:spPr/>
+        <p:txBody>
+          <a:bodyPr/>
+          <a:lstStyle/>
+          <a:p>
+            <a:fld id="{08C366F5-AFAD-49CB-854A-9D9E238FCA13}" type="slidenum">
+              <a:rPr lang="en-GB" smtClean="0"/>
+              <a:t>34</a:t>
+            </a:fld>
+            <a:endParaRPr lang="en-GB"/>
+          </a:p>
+        </p:txBody>
+      </p:sp>
+    </p:spTree>
+    <p:extLst>
+      <p:ext uri="{BB962C8B-B14F-4D97-AF65-F5344CB8AC3E}">
+        <p14:creationId xmlns:p14="http://schemas.microsoft.com/office/powerpoint/2010/main" val="3720972019"/>
+      </p:ext>
+    </p:extLst>
+  </p:cSld>
+  <p:clrMapOvr>
+    <a:masterClrMapping/>
+  </p:clrMapOvr>
+</p:sld>
+</file>
+
 <file path=ppt/slides/slide4.xml><?xml version="1.0" encoding="utf-8"?>
 <p:sld xmlns:a="http://schemas.openxmlformats.org/drawingml/2006/main" xmlns:r="http://schemas.openxmlformats.org/officeDocument/2006/relationships" xmlns:p="http://schemas.openxmlformats.org/presentationml/2006/main">
   <p:cSld>
@@ -24724,8 +26566,8 @@
           </a:p>
         </p:txBody>
       </p:sp>
-      <mc:AlternateContent xmlns:mc="http://schemas.openxmlformats.org/markup-compatibility/2006">
-        <mc:Choice xmlns:a14="http://schemas.microsoft.com/office/drawing/2010/main" Requires="a14">
+      <mc:AlternateContent xmlns:mc="http://schemas.openxmlformats.org/markup-compatibility/2006" xmlns:a14="http://schemas.microsoft.com/office/drawing/2010/main">
+        <mc:Choice Requires="a14">
           <p:sp>
             <p:nvSpPr>
               <p:cNvPr id="3" name="Inhaltsplatzhalter 2">
@@ -25092,7 +26934,7 @@
             </p:txBody>
           </p:sp>
         </mc:Choice>
-        <mc:Fallback>
+        <mc:Fallback xmlns="">
           <p:sp>
             <p:nvSpPr>
               <p:cNvPr id="3" name="Inhaltsplatzhalter 2">

--- a/slides/5_controller_design.pptx
+++ b/slides/5_controller_design.pptx
@@ -17385,8 +17385,8 @@
           </a:p>
         </p:txBody>
       </p:sp>
-      <mc:AlternateContent xmlns:mc="http://schemas.openxmlformats.org/markup-compatibility/2006" xmlns:a14="http://schemas.microsoft.com/office/drawing/2010/main">
-        <mc:Choice Requires="a14">
+      <mc:AlternateContent xmlns:mc="http://schemas.openxmlformats.org/markup-compatibility/2006">
+        <mc:Choice xmlns:a14="http://schemas.microsoft.com/office/drawing/2010/main" Requires="a14">
           <p:sp>
             <p:nvSpPr>
               <p:cNvPr id="4" name="Inhaltsplatzhalter 3">
@@ -17510,6 +17510,39 @@
                   <a:rPr lang="de-DE" dirty="0" err="1"/>
                   <a:t>gain</a:t>
                 </a:r>
+                <a:r>
+                  <a:rPr lang="de-DE" dirty="0"/>
+                  <a:t> </a:t>
+                </a:r>
+                <a14:m>
+                  <m:oMath xmlns:m="http://schemas.openxmlformats.org/officeDocument/2006/math">
+                    <m:sSub>
+                      <m:sSubPr>
+                        <m:ctrlPr>
+                          <a:rPr lang="de-DE" i="1">
+                            <a:latin typeface="Cambria Math" panose="02040503050406030204" pitchFamily="18" charset="0"/>
+                          </a:rPr>
+                        </m:ctrlPr>
+                      </m:sSubPr>
+                      <m:e>
+                        <m:r>
+                          <a:rPr lang="de-DE" i="1">
+                            <a:latin typeface="Cambria Math" panose="02040503050406030204" pitchFamily="18" charset="0"/>
+                          </a:rPr>
+                          <m:t>𝐾</m:t>
+                        </m:r>
+                      </m:e>
+                      <m:sub>
+                        <m:r>
+                          <a:rPr lang="de-DE" i="1">
+                            <a:latin typeface="Cambria Math" panose="02040503050406030204" pitchFamily="18" charset="0"/>
+                          </a:rPr>
+                          <m:t>𝑝</m:t>
+                        </m:r>
+                      </m:sub>
+                    </m:sSub>
+                  </m:oMath>
+                </a14:m>
                 <a:endParaRPr lang="de-DE" dirty="0"/>
               </a:p>
               <a:p>
@@ -17537,6 +17570,39 @@
                   <a:rPr lang="de-DE" dirty="0"/>
                   <a:t> </a:t>
                 </a:r>
+                <a14:m>
+                  <m:oMath xmlns:m="http://schemas.openxmlformats.org/officeDocument/2006/math">
+                    <m:sSub>
+                      <m:sSubPr>
+                        <m:ctrlPr>
+                          <a:rPr lang="de-DE" i="1">
+                            <a:latin typeface="Cambria Math" panose="02040503050406030204" pitchFamily="18" charset="0"/>
+                          </a:rPr>
+                        </m:ctrlPr>
+                      </m:sSubPr>
+                      <m:e>
+                        <m:r>
+                          <a:rPr lang="de-DE" i="1">
+                            <a:latin typeface="Cambria Math" panose="02040503050406030204" pitchFamily="18" charset="0"/>
+                          </a:rPr>
+                          <m:t>𝐾</m:t>
+                        </m:r>
+                      </m:e>
+                      <m:sub>
+                        <m:r>
+                          <a:rPr lang="de-DE" i="1">
+                            <a:latin typeface="Cambria Math" panose="02040503050406030204" pitchFamily="18" charset="0"/>
+                          </a:rPr>
+                          <m:t>𝑖</m:t>
+                        </m:r>
+                      </m:sub>
+                    </m:sSub>
+                  </m:oMath>
+                </a14:m>
+                <a:r>
+                  <a:rPr lang="de-DE" dirty="0"/>
+                  <a:t> </a:t>
+                </a:r>
                 <a:r>
                   <a:rPr lang="de-DE" dirty="0" err="1"/>
                   <a:t>as</a:t>
@@ -17563,15 +17629,31 @@
                 </a:r>
                 <a14:m>
                   <m:oMath xmlns:m="http://schemas.openxmlformats.org/officeDocument/2006/math">
-                    <m:r>
-                      <m:rPr>
-                        <m:sty m:val="p"/>
-                      </m:rPr>
-                      <a:rPr lang="de-DE">
-                        <a:latin typeface="Cambria Math" panose="02040503050406030204" pitchFamily="18" charset="0"/>
-                      </a:rPr>
-                      <m:t>P</m:t>
-                    </m:r>
+                    <m:sSub>
+                      <m:sSubPr>
+                        <m:ctrlPr>
+                          <a:rPr lang="de-DE" i="1">
+                            <a:latin typeface="Cambria Math" panose="02040503050406030204" pitchFamily="18" charset="0"/>
+                          </a:rPr>
+                        </m:ctrlPr>
+                      </m:sSubPr>
+                      <m:e>
+                        <m:r>
+                          <a:rPr lang="de-DE" i="1">
+                            <a:latin typeface="Cambria Math" panose="02040503050406030204" pitchFamily="18" charset="0"/>
+                          </a:rPr>
+                          <m:t>𝐾</m:t>
+                        </m:r>
+                      </m:e>
+                      <m:sub>
+                        <m:r>
+                          <a:rPr lang="de-DE" i="1">
+                            <a:latin typeface="Cambria Math" panose="02040503050406030204" pitchFamily="18" charset="0"/>
+                          </a:rPr>
+                          <m:t>𝑝</m:t>
+                        </m:r>
+                      </m:sub>
+                    </m:sSub>
                   </m:oMath>
                 </a14:m>
                 <a:r>
@@ -17580,15 +17662,31 @@
                 </a:r>
                 <a14:m>
                   <m:oMath xmlns:m="http://schemas.openxmlformats.org/officeDocument/2006/math">
-                    <m:r>
-                      <m:rPr>
-                        <m:sty m:val="p"/>
-                      </m:rPr>
-                      <a:rPr lang="de-DE" b="0" i="0" smtClean="0">
-                        <a:latin typeface="Cambria Math" panose="02040503050406030204" pitchFamily="18" charset="0"/>
-                      </a:rPr>
-                      <m:t>I</m:t>
-                    </m:r>
+                    <m:sSub>
+                      <m:sSubPr>
+                        <m:ctrlPr>
+                          <a:rPr lang="de-DE" i="1">
+                            <a:latin typeface="Cambria Math" panose="02040503050406030204" pitchFamily="18" charset="0"/>
+                          </a:rPr>
+                        </m:ctrlPr>
+                      </m:sSubPr>
+                      <m:e>
+                        <m:r>
+                          <a:rPr lang="de-DE" i="1">
+                            <a:latin typeface="Cambria Math" panose="02040503050406030204" pitchFamily="18" charset="0"/>
+                          </a:rPr>
+                          <m:t>𝐾</m:t>
+                        </m:r>
+                      </m:e>
+                      <m:sub>
+                        <m:r>
+                          <a:rPr lang="de-DE" i="1">
+                            <a:latin typeface="Cambria Math" panose="02040503050406030204" pitchFamily="18" charset="0"/>
+                          </a:rPr>
+                          <m:t>𝑖</m:t>
+                        </m:r>
+                      </m:sub>
+                    </m:sSub>
                     <m:r>
                       <a:rPr lang="de-DE" b="0" i="1" smtClean="0">
                         <a:latin typeface="Cambria Math" panose="02040503050406030204" pitchFamily="18" charset="0"/>
@@ -17605,12 +17703,31 @@
                         </m:ctrlPr>
                       </m:fPr>
                       <m:num>
-                        <m:r>
-                          <a:rPr lang="de-DE" b="0" i="1" smtClean="0">
-                            <a:latin typeface="Cambria Math" panose="02040503050406030204" pitchFamily="18" charset="0"/>
-                          </a:rPr>
-                          <m:t>𝑃</m:t>
-                        </m:r>
+                        <m:sSub>
+                          <m:sSubPr>
+                            <m:ctrlPr>
+                              <a:rPr lang="de-DE" i="1">
+                                <a:latin typeface="Cambria Math" panose="02040503050406030204" pitchFamily="18" charset="0"/>
+                              </a:rPr>
+                            </m:ctrlPr>
+                          </m:sSubPr>
+                          <m:e>
+                            <m:r>
+                              <a:rPr lang="de-DE" i="1">
+                                <a:latin typeface="Cambria Math" panose="02040503050406030204" pitchFamily="18" charset="0"/>
+                              </a:rPr>
+                              <m:t>𝐾</m:t>
+                            </m:r>
+                          </m:e>
+                          <m:sub>
+                            <m:r>
+                              <a:rPr lang="de-DE" i="1">
+                                <a:latin typeface="Cambria Math" panose="02040503050406030204" pitchFamily="18" charset="0"/>
+                              </a:rPr>
+                              <m:t>𝑝</m:t>
+                            </m:r>
+                          </m:sub>
+                        </m:sSub>
                       </m:num>
                       <m:den>
                         <m:r>
@@ -17777,15 +17894,31 @@
                 </a:r>
                 <a14:m>
                   <m:oMath xmlns:m="http://schemas.openxmlformats.org/officeDocument/2006/math">
-                    <m:r>
-                      <m:rPr>
-                        <m:sty m:val="p"/>
-                      </m:rPr>
-                      <a:rPr lang="de-DE" b="0" i="0" smtClean="0">
-                        <a:latin typeface="Cambria Math" panose="02040503050406030204" pitchFamily="18" charset="0"/>
-                      </a:rPr>
-                      <m:t>P</m:t>
-                    </m:r>
+                    <m:sSub>
+                      <m:sSubPr>
+                        <m:ctrlPr>
+                          <a:rPr lang="de-DE" i="1">
+                            <a:latin typeface="Cambria Math" panose="02040503050406030204" pitchFamily="18" charset="0"/>
+                          </a:rPr>
+                        </m:ctrlPr>
+                      </m:sSubPr>
+                      <m:e>
+                        <m:r>
+                          <a:rPr lang="de-DE" i="1">
+                            <a:latin typeface="Cambria Math" panose="02040503050406030204" pitchFamily="18" charset="0"/>
+                          </a:rPr>
+                          <m:t>𝐾</m:t>
+                        </m:r>
+                      </m:e>
+                      <m:sub>
+                        <m:r>
+                          <a:rPr lang="de-DE" b="0" i="1" smtClean="0">
+                            <a:latin typeface="Cambria Math" panose="02040503050406030204" pitchFamily="18" charset="0"/>
+                          </a:rPr>
+                          <m:t>𝑝</m:t>
+                        </m:r>
+                      </m:sub>
+                    </m:sSub>
                     <m:r>
                       <a:rPr lang="de-DE" b="0" i="1" smtClean="0">
                         <a:latin typeface="Cambria Math" panose="02040503050406030204" pitchFamily="18" charset="0"/>
@@ -17923,15 +18056,31 @@
                 </a:r>
                 <a14:m>
                   <m:oMath xmlns:m="http://schemas.openxmlformats.org/officeDocument/2006/math">
-                    <m:r>
-                      <m:rPr>
-                        <m:sty m:val="p"/>
-                      </m:rPr>
-                      <a:rPr lang="de-DE" b="0" i="0" smtClean="0">
-                        <a:latin typeface="Cambria Math" panose="02040503050406030204" pitchFamily="18" charset="0"/>
-                      </a:rPr>
-                      <m:t>I</m:t>
-                    </m:r>
+                    <m:sSub>
+                      <m:sSubPr>
+                        <m:ctrlPr>
+                          <a:rPr lang="de-DE" i="1">
+                            <a:latin typeface="Cambria Math" panose="02040503050406030204" pitchFamily="18" charset="0"/>
+                          </a:rPr>
+                        </m:ctrlPr>
+                      </m:sSubPr>
+                      <m:e>
+                        <m:r>
+                          <a:rPr lang="de-DE" i="1">
+                            <a:latin typeface="Cambria Math" panose="02040503050406030204" pitchFamily="18" charset="0"/>
+                          </a:rPr>
+                          <m:t>𝐾</m:t>
+                        </m:r>
+                      </m:e>
+                      <m:sub>
+                        <m:r>
+                          <a:rPr lang="de-DE" i="1">
+                            <a:latin typeface="Cambria Math" panose="02040503050406030204" pitchFamily="18" charset="0"/>
+                          </a:rPr>
+                          <m:t>𝑖</m:t>
+                        </m:r>
+                      </m:sub>
+                    </m:sSub>
                     <m:r>
                       <a:rPr lang="de-DE" b="0" i="1" smtClean="0">
                         <a:latin typeface="Cambria Math" panose="02040503050406030204" pitchFamily="18" charset="0"/>
@@ -17945,7 +18094,7 @@
             </p:txBody>
           </p:sp>
         </mc:Choice>
-        <mc:Fallback xmlns="">
+        <mc:Fallback>
           <p:sp>
             <p:nvSpPr>
               <p:cNvPr id="4" name="Inhaltsplatzhalter 3">
@@ -17966,7 +18115,7 @@
               <a:blipFill>
                 <a:blip r:embed="rId2"/>
                 <a:stretch>
-                  <a:fillRect l="-1086" t="-3488" b="-15407"/>
+                  <a:fillRect l="-1086" t="-3488" b="-16860"/>
                 </a:stretch>
               </a:blipFill>
             </p:spPr>
@@ -23738,8 +23887,8 @@
           </a:p>
         </p:txBody>
       </p:sp>
-      <mc:AlternateContent xmlns:mc="http://schemas.openxmlformats.org/markup-compatibility/2006">
-        <mc:Choice xmlns:a14="http://schemas.microsoft.com/office/drawing/2010/main" Requires="a14">
+      <mc:AlternateContent xmlns:mc="http://schemas.openxmlformats.org/markup-compatibility/2006" xmlns:a14="http://schemas.microsoft.com/office/drawing/2010/main">
+        <mc:Choice Requires="a14">
           <p:sp>
             <p:nvSpPr>
               <p:cNvPr id="3" name="Inhaltsplatzhalter 2">
@@ -23876,13 +24025,7 @@
                           <a:rPr lang="de-DE" b="0" i="1" smtClean="0">
                             <a:latin typeface="Cambria Math" panose="02040503050406030204" pitchFamily="18" charset="0"/>
                           </a:rPr>
-                          <m:t>1</m:t>
-                        </m:r>
-                        <m:r>
-                          <a:rPr lang="de-DE" b="0" i="1" smtClean="0">
-                            <a:latin typeface="Cambria Math" panose="02040503050406030204" pitchFamily="18" charset="0"/>
-                          </a:rPr>
-                          <m:t>0</m:t>
+                          <m:t>10</m:t>
                         </m:r>
                       </m:num>
                       <m:den>
@@ -24035,7 +24178,7 @@
             </p:txBody>
           </p:sp>
         </mc:Choice>
-        <mc:Fallback>
+        <mc:Fallback xmlns="">
           <p:sp>
             <p:nvSpPr>
               <p:cNvPr id="3" name="Inhaltsplatzhalter 2">
@@ -24176,8 +24319,8 @@
           </a:p>
         </p:txBody>
       </p:sp>
-      <mc:AlternateContent xmlns:mc="http://schemas.openxmlformats.org/markup-compatibility/2006">
-        <mc:Choice xmlns:a14="http://schemas.microsoft.com/office/drawing/2010/main" Requires="a14">
+      <mc:AlternateContent xmlns:mc="http://schemas.openxmlformats.org/markup-compatibility/2006" xmlns:a14="http://schemas.microsoft.com/office/drawing/2010/main">
+        <mc:Choice Requires="a14">
           <p:sp>
             <p:nvSpPr>
               <p:cNvPr id="3" name="Inhaltsplatzhalter 2">
@@ -24387,7 +24530,7 @@
             </p:txBody>
           </p:sp>
         </mc:Choice>
-        <mc:Fallback>
+        <mc:Fallback xmlns="">
           <p:sp>
             <p:nvSpPr>
               <p:cNvPr id="3" name="Inhaltsplatzhalter 2">
@@ -24528,8 +24671,8 @@
           </a:p>
         </p:txBody>
       </p:sp>
-      <mc:AlternateContent xmlns:mc="http://schemas.openxmlformats.org/markup-compatibility/2006">
-        <mc:Choice xmlns:a14="http://schemas.microsoft.com/office/drawing/2010/main" Requires="a14">
+      <mc:AlternateContent xmlns:mc="http://schemas.openxmlformats.org/markup-compatibility/2006" xmlns:a14="http://schemas.microsoft.com/office/drawing/2010/main">
+        <mc:Choice Requires="a14">
           <p:sp>
             <p:nvSpPr>
               <p:cNvPr id="3" name="Inhaltsplatzhalter 2">
@@ -24716,7 +24859,7 @@
             </p:txBody>
           </p:sp>
         </mc:Choice>
-        <mc:Fallback>
+        <mc:Fallback xmlns="">
           <p:sp>
             <p:nvSpPr>
               <p:cNvPr id="3" name="Inhaltsplatzhalter 2">
@@ -24857,8 +25000,8 @@
           </a:p>
         </p:txBody>
       </p:sp>
-      <mc:AlternateContent xmlns:mc="http://schemas.openxmlformats.org/markup-compatibility/2006">
-        <mc:Choice xmlns:a14="http://schemas.microsoft.com/office/drawing/2010/main" Requires="a14">
+      <mc:AlternateContent xmlns:mc="http://schemas.openxmlformats.org/markup-compatibility/2006" xmlns:a14="http://schemas.microsoft.com/office/drawing/2010/main">
+        <mc:Choice Requires="a14">
           <p:sp>
             <p:nvSpPr>
               <p:cNvPr id="3" name="Inhaltsplatzhalter 2">
@@ -25072,7 +25215,7 @@
             </p:txBody>
           </p:sp>
         </mc:Choice>
-        <mc:Fallback>
+        <mc:Fallback xmlns="">
           <p:sp>
             <p:nvSpPr>
               <p:cNvPr id="3" name="Inhaltsplatzhalter 2">
@@ -25213,8 +25356,8 @@
           </a:p>
         </p:txBody>
       </p:sp>
-      <mc:AlternateContent xmlns:mc="http://schemas.openxmlformats.org/markup-compatibility/2006">
-        <mc:Choice xmlns:a14="http://schemas.microsoft.com/office/drawing/2010/main" Requires="a14">
+      <mc:AlternateContent xmlns:mc="http://schemas.openxmlformats.org/markup-compatibility/2006" xmlns:a14="http://schemas.microsoft.com/office/drawing/2010/main">
+        <mc:Choice Requires="a14">
           <p:sp>
             <p:nvSpPr>
               <p:cNvPr id="3" name="Inhaltsplatzhalter 2">
@@ -25440,7 +25583,7 @@
             </p:txBody>
           </p:sp>
         </mc:Choice>
-        <mc:Fallback>
+        <mc:Fallback xmlns="">
           <p:sp>
             <p:nvSpPr>
               <p:cNvPr id="3" name="Inhaltsplatzhalter 2">

--- a/slides/5_controller_design.pptx
+++ b/slides/5_controller_design.pptx
@@ -512,7 +512,7 @@
           <a:p>
             <a:fld id="{506E0FD1-891F-4B1E-916D-E9B585160BB8}" type="datetimeFigureOut">
               <a:rPr lang="en-GB" smtClean="0"/>
-              <a:t>29/04/2026</a:t>
+              <a:t>05/05/2026</a:t>
             </a:fld>
             <a:endParaRPr lang="en-GB"/>
           </a:p>
@@ -929,7 +929,7 @@
           <a:p>
             <a:fld id="{D68C3F22-27B2-44E3-9C5F-D08126455F6F}" type="datetime1">
               <a:rPr lang="en-GB" smtClean="0"/>
-              <a:t>29/04/2026</a:t>
+              <a:t>05/05/2026</a:t>
             </a:fld>
             <a:endParaRPr lang="en-GB"/>
           </a:p>
@@ -1129,7 +1129,7 @@
           <a:p>
             <a:fld id="{1CD03846-7BF6-4FB6-A921-FF3379ADBD4C}" type="datetime1">
               <a:rPr lang="en-GB" smtClean="0"/>
-              <a:t>29/04/2026</a:t>
+              <a:t>05/05/2026</a:t>
             </a:fld>
             <a:endParaRPr lang="en-GB"/>
           </a:p>
@@ -1339,7 +1339,7 @@
           <a:p>
             <a:fld id="{99E1B91A-3FD0-4144-9C84-63E9688ED2FE}" type="datetime1">
               <a:rPr lang="en-GB" smtClean="0"/>
-              <a:t>29/04/2026</a:t>
+              <a:t>05/05/2026</a:t>
             </a:fld>
             <a:endParaRPr lang="en-GB"/>
           </a:p>
@@ -1539,7 +1539,7 @@
           <a:p>
             <a:fld id="{5295ED7B-FEAD-4734-819F-93EF4B0EA908}" type="datetime1">
               <a:rPr lang="en-GB" smtClean="0"/>
-              <a:t>29/04/2026</a:t>
+              <a:t>05/05/2026</a:t>
             </a:fld>
             <a:endParaRPr lang="en-GB"/>
           </a:p>
@@ -1815,7 +1815,7 @@
           <a:p>
             <a:fld id="{D2D5D4B4-C926-4B45-8815-1ED8911179A2}" type="datetime1">
               <a:rPr lang="en-GB" smtClean="0"/>
-              <a:t>29/04/2026</a:t>
+              <a:t>05/05/2026</a:t>
             </a:fld>
             <a:endParaRPr lang="en-GB"/>
           </a:p>
@@ -2083,7 +2083,7 @@
           <a:p>
             <a:fld id="{B4C5210A-0E37-4935-93AF-69F21A5F712F}" type="datetime1">
               <a:rPr lang="en-GB" smtClean="0"/>
-              <a:t>29/04/2026</a:t>
+              <a:t>05/05/2026</a:t>
             </a:fld>
             <a:endParaRPr lang="en-GB"/>
           </a:p>
@@ -2498,7 +2498,7 @@
           <a:p>
             <a:fld id="{3D3A6B2F-436C-4691-80E8-9C890E000E9D}" type="datetime1">
               <a:rPr lang="en-GB" smtClean="0"/>
-              <a:t>29/04/2026</a:t>
+              <a:t>05/05/2026</a:t>
             </a:fld>
             <a:endParaRPr lang="en-GB"/>
           </a:p>
@@ -2640,7 +2640,7 @@
           <a:p>
             <a:fld id="{84385F4C-D74B-496F-8D21-97E3549C783B}" type="datetime1">
               <a:rPr lang="en-GB" smtClean="0"/>
-              <a:t>29/04/2026</a:t>
+              <a:t>05/05/2026</a:t>
             </a:fld>
             <a:endParaRPr lang="en-GB"/>
           </a:p>
@@ -2753,7 +2753,7 @@
           <a:p>
             <a:fld id="{0CBDCB32-C241-4703-A832-4EB47BD54E83}" type="datetime1">
               <a:rPr lang="en-GB" smtClean="0"/>
-              <a:t>29/04/2026</a:t>
+              <a:t>05/05/2026</a:t>
             </a:fld>
             <a:endParaRPr lang="en-GB"/>
           </a:p>
@@ -3066,7 +3066,7 @@
           <a:p>
             <a:fld id="{85C150FF-BE95-4D25-A16A-E368A81CBF24}" type="datetime1">
               <a:rPr lang="en-GB" smtClean="0"/>
-              <a:t>29/04/2026</a:t>
+              <a:t>05/05/2026</a:t>
             </a:fld>
             <a:endParaRPr lang="en-GB"/>
           </a:p>
@@ -3355,7 +3355,7 @@
           <a:p>
             <a:fld id="{F3C5DB4B-B349-43C9-A424-BADA723AD9F1}" type="datetime1">
               <a:rPr lang="en-GB" smtClean="0"/>
-              <a:t>29/04/2026</a:t>
+              <a:t>05/05/2026</a:t>
             </a:fld>
             <a:endParaRPr lang="en-GB"/>
           </a:p>
@@ -3598,7 +3598,7 @@
           <a:p>
             <a:fld id="{12632426-0A0C-405F-A3D0-2D11AA44702A}" type="datetime1">
               <a:rPr lang="en-GB" smtClean="0"/>
-              <a:t>29/04/2026</a:t>
+              <a:t>05/05/2026</a:t>
             </a:fld>
             <a:endParaRPr lang="en-GB"/>
           </a:p>
@@ -17385,8 +17385,8 @@
           </a:p>
         </p:txBody>
       </p:sp>
-      <mc:AlternateContent xmlns:mc="http://schemas.openxmlformats.org/markup-compatibility/2006">
-        <mc:Choice xmlns:a14="http://schemas.microsoft.com/office/drawing/2010/main" Requires="a14">
+      <mc:AlternateContent xmlns:mc="http://schemas.openxmlformats.org/markup-compatibility/2006" xmlns:a14="http://schemas.microsoft.com/office/drawing/2010/main">
+        <mc:Choice Requires="a14">
           <p:sp>
             <p:nvSpPr>
               <p:cNvPr id="4" name="Inhaltsplatzhalter 3">
@@ -18094,7 +18094,7 @@
             </p:txBody>
           </p:sp>
         </mc:Choice>
-        <mc:Fallback>
+        <mc:Fallback xmlns="">
           <p:sp>
             <p:nvSpPr>
               <p:cNvPr id="4" name="Inhaltsplatzhalter 3">
@@ -26234,8 +26234,8 @@
           </a:p>
         </p:txBody>
       </p:sp>
-      <mc:AlternateContent xmlns:mc="http://schemas.openxmlformats.org/markup-compatibility/2006" xmlns:a14="http://schemas.microsoft.com/office/drawing/2010/main">
-        <mc:Choice Requires="a14">
+      <mc:AlternateContent xmlns:mc="http://schemas.openxmlformats.org/markup-compatibility/2006">
+        <mc:Choice xmlns:a14="http://schemas.microsoft.com/office/drawing/2010/main" Requires="a14">
           <p:sp>
             <p:nvSpPr>
               <p:cNvPr id="3" name="Inhaltsplatzhalter 2">
@@ -26319,20 +26319,6 @@
                         <a:latin typeface="Cambria Math" panose="02040503050406030204" pitchFamily="18" charset="0"/>
                       </a:rPr>
                       <m:t>𝑦</m:t>
-                    </m:r>
-                  </m:oMath>
-                </a14:m>
-                <a:r>
-                  <a:rPr lang="de-DE" sz="2600" dirty="0"/>
-                  <a:t> </a:t>
-                </a:r>
-                <a14:m>
-                  <m:oMath xmlns:m="http://schemas.openxmlformats.org/officeDocument/2006/math">
-                    <m:r>
-                      <a:rPr lang="de-DE" sz="2600" b="0" i="1" smtClean="0">
-                        <a:latin typeface="Cambria Math" panose="02040503050406030204" pitchFamily="18" charset="0"/>
-                      </a:rPr>
-                      <m:t>𝑟</m:t>
                     </m:r>
                   </m:oMath>
                 </a14:m>
@@ -26582,7 +26568,7 @@
             </p:txBody>
           </p:sp>
         </mc:Choice>
-        <mc:Fallback xmlns="">
+        <mc:Fallback>
           <p:sp>
             <p:nvSpPr>
               <p:cNvPr id="3" name="Inhaltsplatzhalter 2">

--- a/slides/5_controller_design.pptx
+++ b/slides/5_controller_design.pptx
@@ -512,7 +512,7 @@
           <a:p>
             <a:fld id="{506E0FD1-891F-4B1E-916D-E9B585160BB8}" type="datetimeFigureOut">
               <a:rPr lang="en-GB" smtClean="0"/>
-              <a:t>05/05/2026</a:t>
+              <a:t>06/05/2026</a:t>
             </a:fld>
             <a:endParaRPr lang="en-GB"/>
           </a:p>
@@ -929,7 +929,7 @@
           <a:p>
             <a:fld id="{D68C3F22-27B2-44E3-9C5F-D08126455F6F}" type="datetime1">
               <a:rPr lang="en-GB" smtClean="0"/>
-              <a:t>05/05/2026</a:t>
+              <a:t>06/05/2026</a:t>
             </a:fld>
             <a:endParaRPr lang="en-GB"/>
           </a:p>
@@ -1129,7 +1129,7 @@
           <a:p>
             <a:fld id="{1CD03846-7BF6-4FB6-A921-FF3379ADBD4C}" type="datetime1">
               <a:rPr lang="en-GB" smtClean="0"/>
-              <a:t>05/05/2026</a:t>
+              <a:t>06/05/2026</a:t>
             </a:fld>
             <a:endParaRPr lang="en-GB"/>
           </a:p>
@@ -1339,7 +1339,7 @@
           <a:p>
             <a:fld id="{99E1B91A-3FD0-4144-9C84-63E9688ED2FE}" type="datetime1">
               <a:rPr lang="en-GB" smtClean="0"/>
-              <a:t>05/05/2026</a:t>
+              <a:t>06/05/2026</a:t>
             </a:fld>
             <a:endParaRPr lang="en-GB"/>
           </a:p>
@@ -1539,7 +1539,7 @@
           <a:p>
             <a:fld id="{5295ED7B-FEAD-4734-819F-93EF4B0EA908}" type="datetime1">
               <a:rPr lang="en-GB" smtClean="0"/>
-              <a:t>05/05/2026</a:t>
+              <a:t>06/05/2026</a:t>
             </a:fld>
             <a:endParaRPr lang="en-GB"/>
           </a:p>
@@ -1815,7 +1815,7 @@
           <a:p>
             <a:fld id="{D2D5D4B4-C926-4B45-8815-1ED8911179A2}" type="datetime1">
               <a:rPr lang="en-GB" smtClean="0"/>
-              <a:t>05/05/2026</a:t>
+              <a:t>06/05/2026</a:t>
             </a:fld>
             <a:endParaRPr lang="en-GB"/>
           </a:p>
@@ -2083,7 +2083,7 @@
           <a:p>
             <a:fld id="{B4C5210A-0E37-4935-93AF-69F21A5F712F}" type="datetime1">
               <a:rPr lang="en-GB" smtClean="0"/>
-              <a:t>05/05/2026</a:t>
+              <a:t>06/05/2026</a:t>
             </a:fld>
             <a:endParaRPr lang="en-GB"/>
           </a:p>
@@ -2498,7 +2498,7 @@
           <a:p>
             <a:fld id="{3D3A6B2F-436C-4691-80E8-9C890E000E9D}" type="datetime1">
               <a:rPr lang="en-GB" smtClean="0"/>
-              <a:t>05/05/2026</a:t>
+              <a:t>06/05/2026</a:t>
             </a:fld>
             <a:endParaRPr lang="en-GB"/>
           </a:p>
@@ -2640,7 +2640,7 @@
           <a:p>
             <a:fld id="{84385F4C-D74B-496F-8D21-97E3549C783B}" type="datetime1">
               <a:rPr lang="en-GB" smtClean="0"/>
-              <a:t>05/05/2026</a:t>
+              <a:t>06/05/2026</a:t>
             </a:fld>
             <a:endParaRPr lang="en-GB"/>
           </a:p>
@@ -2753,7 +2753,7 @@
           <a:p>
             <a:fld id="{0CBDCB32-C241-4703-A832-4EB47BD54E83}" type="datetime1">
               <a:rPr lang="en-GB" smtClean="0"/>
-              <a:t>05/05/2026</a:t>
+              <a:t>06/05/2026</a:t>
             </a:fld>
             <a:endParaRPr lang="en-GB"/>
           </a:p>
@@ -3066,7 +3066,7 @@
           <a:p>
             <a:fld id="{85C150FF-BE95-4D25-A16A-E368A81CBF24}" type="datetime1">
               <a:rPr lang="en-GB" smtClean="0"/>
-              <a:t>05/05/2026</a:t>
+              <a:t>06/05/2026</a:t>
             </a:fld>
             <a:endParaRPr lang="en-GB"/>
           </a:p>
@@ -3355,7 +3355,7 @@
           <a:p>
             <a:fld id="{F3C5DB4B-B349-43C9-A424-BADA723AD9F1}" type="datetime1">
               <a:rPr lang="en-GB" smtClean="0"/>
-              <a:t>05/05/2026</a:t>
+              <a:t>06/05/2026</a:t>
             </a:fld>
             <a:endParaRPr lang="en-GB"/>
           </a:p>
@@ -3598,7 +3598,7 @@
           <a:p>
             <a:fld id="{12632426-0A0C-405F-A3D0-2D11AA44702A}" type="datetime1">
               <a:rPr lang="en-GB" smtClean="0"/>
-              <a:t>05/05/2026</a:t>
+              <a:t>06/05/2026</a:t>
             </a:fld>
             <a:endParaRPr lang="en-GB"/>
           </a:p>
@@ -13395,8 +13395,8 @@
           </a:p>
         </p:txBody>
       </p:sp>
-      <mc:AlternateContent xmlns:mc="http://schemas.openxmlformats.org/markup-compatibility/2006" xmlns:a14="http://schemas.microsoft.com/office/drawing/2010/main">
-        <mc:Choice Requires="a14">
+      <mc:AlternateContent xmlns:mc="http://schemas.openxmlformats.org/markup-compatibility/2006">
+        <mc:Choice xmlns:a14="http://schemas.microsoft.com/office/drawing/2010/main" Requires="a14">
           <p:sp>
             <p:nvSpPr>
               <p:cNvPr id="3" name="Inhaltsplatzhalter 2">
@@ -13413,10 +13413,15 @@
                 <p:ph idx="1"/>
               </p:nvPr>
             </p:nvSpPr>
-            <p:spPr/>
+            <p:spPr>
+              <a:xfrm>
+                <a:off x="838200" y="1690688"/>
+                <a:ext cx="10515600" cy="5030787"/>
+              </a:xfrm>
+            </p:spPr>
             <p:txBody>
               <a:bodyPr>
-                <a:normAutofit fontScale="70000" lnSpcReduction="20000"/>
+                <a:noAutofit/>
               </a:bodyPr>
               <a:lstStyle/>
               <a:p>
@@ -13424,162 +13429,106 @@
                   <a:buNone/>
                 </a:pPr>
                 <a:r>
-                  <a:rPr lang="de-DE" sz="2900" dirty="0"/>
-                  <a:t>Design </a:t>
-                </a:r>
-                <a14:m>
-                  <m:oMath xmlns:m="http://schemas.openxmlformats.org/officeDocument/2006/math">
-                    <m:r>
-                      <a:rPr lang="de-DE" sz="2900" i="1">
-                        <a:latin typeface="Cambria Math" panose="02040503050406030204" pitchFamily="18" charset="0"/>
-                      </a:rPr>
-                      <m:t>𝐶</m:t>
-                    </m:r>
-                    <m:r>
-                      <a:rPr lang="de-DE" sz="2900" i="1">
-                        <a:latin typeface="Cambria Math" panose="02040503050406030204" pitchFamily="18" charset="0"/>
-                      </a:rPr>
-                      <m:t>(</m:t>
-                    </m:r>
-                    <m:r>
-                      <a:rPr lang="de-DE" sz="2900" i="1">
-                        <a:latin typeface="Cambria Math" panose="02040503050406030204" pitchFamily="18" charset="0"/>
-                      </a:rPr>
-                      <m:t>𝑠</m:t>
-                    </m:r>
-                    <m:r>
-                      <a:rPr lang="de-DE" sz="2900" i="1">
-                        <a:latin typeface="Cambria Math" panose="02040503050406030204" pitchFamily="18" charset="0"/>
-                      </a:rPr>
-                      <m:t>)</m:t>
-                    </m:r>
-                  </m:oMath>
-                </a14:m>
-                <a:r>
-                  <a:rPr lang="de-DE" sz="2900" dirty="0"/>
-                  <a:t> </a:t>
-                </a:r>
-                <a:r>
-                  <a:rPr lang="de-DE" sz="2900" dirty="0" err="1"/>
-                  <a:t>from</a:t>
-                </a:r>
-                <a:r>
-                  <a:rPr lang="de-DE" sz="2900" dirty="0"/>
-                  <a:t> a plant </a:t>
-                </a:r>
-                <a:r>
-                  <a:rPr lang="de-DE" sz="2900" dirty="0" err="1"/>
+                  <a:rPr lang="de-DE" sz="2400" dirty="0"/>
+                  <a:t>Invert </a:t>
+                </a:r>
+                <a:r>
+                  <a:rPr lang="de-DE" sz="2400" dirty="0" err="1"/>
+                  <a:t>the</a:t>
+                </a:r>
+                <a:r>
+                  <a:rPr lang="de-DE" sz="2400" dirty="0"/>
+                  <a:t> </a:t>
+                </a:r>
+                <a:r>
+                  <a:rPr lang="de-DE" sz="2400" dirty="0" err="1"/>
                   <a:t>model</a:t>
                 </a:r>
                 <a:r>
-                  <a:rPr lang="de-DE" sz="2900" dirty="0"/>
-                  <a:t> so </a:t>
-                </a:r>
-                <a:r>
-                  <a:rPr lang="de-DE" sz="2900" dirty="0" err="1"/>
-                  <a:t>that</a:t>
-                </a:r>
-                <a:r>
-                  <a:rPr lang="de-DE" sz="2900" dirty="0"/>
-                  <a:t> </a:t>
-                </a:r>
-                <a:r>
-                  <a:rPr lang="de-DE" sz="2900" dirty="0" err="1"/>
-                  <a:t>closed</a:t>
-                </a:r>
-                <a:r>
-                  <a:rPr lang="de-DE" sz="2900" dirty="0"/>
-                  <a:t>-loop </a:t>
-                </a:r>
-                <a:r>
-                  <a:rPr lang="de-DE" sz="2900" dirty="0" err="1"/>
-                  <a:t>response</a:t>
-                </a:r>
-                <a:r>
-                  <a:rPr lang="de-DE" sz="2900" dirty="0"/>
-                  <a:t> </a:t>
-                </a:r>
-                <a:r>
-                  <a:rPr lang="de-DE" sz="2900" dirty="0" err="1"/>
-                  <a:t>behaves</a:t>
-                </a:r>
-                <a:r>
-                  <a:rPr lang="de-DE" sz="2900" dirty="0"/>
-                  <a:t> like a </a:t>
-                </a:r>
-                <a:r>
-                  <a:rPr lang="de-DE" sz="2900" dirty="0" err="1"/>
-                  <a:t>desired</a:t>
-                </a:r>
-                <a:r>
-                  <a:rPr lang="de-DE" sz="2900" dirty="0"/>
-                  <a:t> first-order/</a:t>
-                </a:r>
-                <a:r>
-                  <a:rPr lang="de-DE" sz="2900" dirty="0" err="1"/>
-                  <a:t>second</a:t>
-                </a:r>
-                <a:r>
-                  <a:rPr lang="de-DE" sz="2900" dirty="0"/>
-                  <a:t>-order </a:t>
-                </a:r>
-                <a:r>
-                  <a:rPr lang="de-DE" sz="2900" dirty="0" err="1"/>
-                  <a:t>system</a:t>
-                </a:r>
-                <a:endParaRPr lang="de-DE" sz="2900" dirty="0"/>
+                  <a:rPr lang="de-DE" sz="2400" dirty="0"/>
+                  <a:t>, </a:t>
+                </a:r>
+                <a:r>
+                  <a:rPr lang="de-DE" sz="2400" dirty="0" err="1"/>
+                  <a:t>then</a:t>
+                </a:r>
+                <a:r>
+                  <a:rPr lang="de-DE" sz="2400" dirty="0"/>
+                  <a:t> </a:t>
+                </a:r>
+                <a:r>
+                  <a:rPr lang="de-DE" sz="2400" dirty="0" err="1"/>
+                  <a:t>filter</a:t>
+                </a:r>
+                <a:r>
+                  <a:rPr lang="de-DE" sz="2400" dirty="0"/>
+                  <a:t> </a:t>
+                </a:r>
+                <a:r>
+                  <a:rPr lang="de-DE" sz="2400" dirty="0" err="1"/>
+                  <a:t>it</a:t>
+                </a:r>
+                <a:r>
+                  <a:rPr lang="de-DE" sz="2400" dirty="0"/>
+                  <a:t> </a:t>
+                </a:r>
+                <a:r>
+                  <a:rPr lang="de-DE" sz="2400" dirty="0" err="1"/>
+                  <a:t>to</a:t>
+                </a:r>
+                <a:r>
+                  <a:rPr lang="de-DE" sz="2400" dirty="0"/>
+                  <a:t> </a:t>
+                </a:r>
+                <a:r>
+                  <a:rPr lang="de-DE" sz="2400" dirty="0" err="1"/>
+                  <a:t>get</a:t>
+                </a:r>
+                <a:r>
+                  <a:rPr lang="de-DE" sz="2400" dirty="0"/>
+                  <a:t> a robust and </a:t>
+                </a:r>
+                <a:r>
+                  <a:rPr lang="de-DE" sz="2400" dirty="0" err="1"/>
+                  <a:t>tunable</a:t>
+                </a:r>
+                <a:r>
+                  <a:rPr lang="de-DE" sz="2400" dirty="0"/>
+                  <a:t> </a:t>
+                </a:r>
+                <a:r>
+                  <a:rPr lang="de-DE" sz="2400" dirty="0" err="1"/>
+                  <a:t>controller</a:t>
+                </a:r>
+                <a:endParaRPr lang="de-DE" sz="2400" dirty="0"/>
               </a:p>
               <a:p>
                 <a:pPr marL="0" indent="0">
                   <a:buNone/>
                 </a:pPr>
                 <a:r>
-                  <a:rPr lang="de-DE" sz="2900" dirty="0"/>
-                  <a:t>Explicit loop </a:t>
-                </a:r>
-                <a:r>
-                  <a:rPr lang="de-DE" sz="2900" dirty="0" err="1"/>
-                  <a:t>shaping</a:t>
-                </a:r>
-                <a:r>
-                  <a:rPr lang="de-DE" sz="2900" dirty="0"/>
-                  <a:t>: </a:t>
-                </a:r>
-                <a:r>
-                  <a:rPr lang="de-DE" sz="2900" dirty="0" err="1"/>
-                  <a:t>set</a:t>
-                </a:r>
-                <a:r>
-                  <a:rPr lang="de-DE" sz="2900" dirty="0"/>
-                  <a:t> </a:t>
-                </a:r>
-                <a:r>
-                  <a:rPr lang="de-DE" sz="2900" dirty="0" err="1"/>
-                  <a:t>effective</a:t>
-                </a:r>
-                <a:r>
-                  <a:rPr lang="de-DE" sz="2900" dirty="0"/>
-                  <a:t> </a:t>
+                  <a:rPr lang="de-DE" sz="2400" b="0" dirty="0"/>
+                  <a:t>	</a:t>
                 </a:r>
                 <a14:m>
                   <m:oMath xmlns:m="http://schemas.openxmlformats.org/officeDocument/2006/math">
                     <m:r>
-                      <a:rPr lang="de-DE" sz="2900" i="1">
+                      <a:rPr lang="de-DE" sz="2400" b="0" i="1" smtClean="0">
                         <a:latin typeface="Cambria Math" panose="02040503050406030204" pitchFamily="18" charset="0"/>
                       </a:rPr>
-                      <m:t>𝐿</m:t>
+                      <m:t>𝐶</m:t>
                     </m:r>
                     <m:d>
                       <m:dPr>
                         <m:ctrlPr>
-                          <a:rPr lang="de-DE" sz="2900" i="1">
+                          <a:rPr lang="de-DE" sz="2400" b="0" i="1" smtClean="0">
                             <a:latin typeface="Cambria Math" panose="02040503050406030204" pitchFamily="18" charset="0"/>
                           </a:rPr>
                         </m:ctrlPr>
                       </m:dPr>
                       <m:e>
                         <m:r>
-                          <a:rPr lang="de-DE" sz="2900" i="1">
+                          <a:rPr lang="de-DE" sz="2400" b="0" i="1" smtClean="0">
                             <a:latin typeface="Cambria Math" panose="02040503050406030204" pitchFamily="18" charset="0"/>
                           </a:rPr>
                           <m:t>𝑠</m:t>
@@ -13587,307 +13536,489 @@
                       </m:e>
                     </m:d>
                     <m:r>
-                      <a:rPr lang="de-DE" sz="2900" i="1">
+                      <a:rPr lang="de-DE" sz="2400" b="0" i="1" smtClean="0">
                         <a:latin typeface="Cambria Math" panose="02040503050406030204" pitchFamily="18" charset="0"/>
                       </a:rPr>
                       <m:t>=</m:t>
                     </m:r>
+                    <m:sSup>
+                      <m:sSupPr>
+                        <m:ctrlPr>
+                          <a:rPr lang="de-DE" sz="2400" b="0" i="1" smtClean="0">
+                            <a:latin typeface="Cambria Math" panose="02040503050406030204" pitchFamily="18" charset="0"/>
+                          </a:rPr>
+                        </m:ctrlPr>
+                      </m:sSupPr>
+                      <m:e>
+                        <m:r>
+                          <a:rPr lang="de-DE" sz="2400" b="0" i="1" smtClean="0">
+                            <a:latin typeface="Cambria Math" panose="02040503050406030204" pitchFamily="18" charset="0"/>
+                          </a:rPr>
+                          <m:t>𝐺</m:t>
+                        </m:r>
+                      </m:e>
+                      <m:sup>
+                        <m:r>
+                          <a:rPr lang="de-DE" sz="2400" b="0" i="1" smtClean="0">
+                            <a:latin typeface="Cambria Math" panose="02040503050406030204" pitchFamily="18" charset="0"/>
+                          </a:rPr>
+                          <m:t>−1</m:t>
+                        </m:r>
+                      </m:sup>
+                    </m:sSup>
+                    <m:d>
+                      <m:dPr>
+                        <m:ctrlPr>
+                          <a:rPr lang="de-DE" sz="2400" b="0" i="1" smtClean="0">
+                            <a:latin typeface="Cambria Math" panose="02040503050406030204" pitchFamily="18" charset="0"/>
+                          </a:rPr>
+                        </m:ctrlPr>
+                      </m:dPr>
+                      <m:e>
+                        <m:r>
+                          <a:rPr lang="de-DE" sz="2400" b="0" i="1" smtClean="0">
+                            <a:latin typeface="Cambria Math" panose="02040503050406030204" pitchFamily="18" charset="0"/>
+                          </a:rPr>
+                          <m:t>𝑠</m:t>
+                        </m:r>
+                      </m:e>
+                    </m:d>
                     <m:r>
-                      <a:rPr lang="de-DE" sz="2900" i="1">
+                      <a:rPr lang="de-DE" sz="2400" b="0" i="1" smtClean="0">
                         <a:latin typeface="Cambria Math" panose="02040503050406030204" pitchFamily="18" charset="0"/>
                       </a:rPr>
-                      <m:t>𝐾</m:t>
+                      <m:t>𝐹</m:t>
                     </m:r>
-                    <m:r>
-                      <a:rPr lang="de-DE" sz="2900" i="1">
-                        <a:latin typeface="Cambria Math" panose="02040503050406030204" pitchFamily="18" charset="0"/>
-                      </a:rPr>
-                      <m:t> </m:t>
-                    </m:r>
-                    <m:r>
-                      <a:rPr lang="de-DE" sz="2900" i="1">
-                        <a:latin typeface="Cambria Math" panose="02040503050406030204" pitchFamily="18" charset="0"/>
-                      </a:rPr>
-                      <m:t>𝐺</m:t>
-                    </m:r>
-                    <m:r>
-                      <a:rPr lang="de-DE" sz="2900" i="1">
-                        <a:latin typeface="Cambria Math" panose="02040503050406030204" pitchFamily="18" charset="0"/>
-                      </a:rPr>
-                      <m:t>(</m:t>
-                    </m:r>
-                    <m:r>
-                      <a:rPr lang="de-DE" sz="2900" i="1">
-                        <a:latin typeface="Cambria Math" panose="02040503050406030204" pitchFamily="18" charset="0"/>
-                      </a:rPr>
-                      <m:t>𝑠</m:t>
-                    </m:r>
-                    <m:r>
-                      <a:rPr lang="de-DE" sz="2900" i="1">
-                        <a:latin typeface="Cambria Math" panose="02040503050406030204" pitchFamily="18" charset="0"/>
-                      </a:rPr>
-                      <m:t>)</m:t>
-                    </m:r>
+                    <m:d>
+                      <m:dPr>
+                        <m:ctrlPr>
+                          <a:rPr lang="de-DE" sz="2400" b="0" i="1" smtClean="0">
+                            <a:latin typeface="Cambria Math" panose="02040503050406030204" pitchFamily="18" charset="0"/>
+                          </a:rPr>
+                        </m:ctrlPr>
+                      </m:dPr>
+                      <m:e>
+                        <m:r>
+                          <a:rPr lang="de-DE" sz="2400" b="0" i="1" smtClean="0">
+                            <a:latin typeface="Cambria Math" panose="02040503050406030204" pitchFamily="18" charset="0"/>
+                          </a:rPr>
+                          <m:t>𝑠</m:t>
+                        </m:r>
+                      </m:e>
+                    </m:d>
                   </m:oMath>
                 </a14:m>
                 <a:r>
-                  <a:rPr lang="de-DE" sz="2900" dirty="0"/>
-                  <a:t> </a:t>
-                </a:r>
-                <a:r>
-                  <a:rPr lang="de-DE" sz="2900" dirty="0" err="1"/>
-                  <a:t>to</a:t>
-                </a:r>
-                <a:r>
-                  <a:rPr lang="de-DE" sz="2900" dirty="0"/>
-                  <a:t> </a:t>
-                </a:r>
-                <a:r>
-                  <a:rPr lang="de-DE" sz="2900" dirty="0" err="1"/>
-                  <a:t>achieve</a:t>
-                </a:r>
-                <a:r>
-                  <a:rPr lang="de-DE" sz="2900" dirty="0"/>
-                  <a:t> </a:t>
-                </a:r>
-                <a:r>
-                  <a:rPr lang="de-DE" sz="2900" dirty="0" err="1"/>
-                  <a:t>target</a:t>
-                </a:r>
-                <a:r>
-                  <a:rPr lang="de-DE" sz="2900" dirty="0"/>
-                  <a:t> </a:t>
-                </a:r>
-                <a:r>
-                  <a:rPr lang="de-DE" sz="2900" dirty="0" err="1"/>
-                  <a:t>bandwidth</a:t>
-                </a:r>
-                <a:r>
-                  <a:rPr lang="de-DE" sz="2900" dirty="0"/>
-                  <a:t> and </a:t>
-                </a:r>
-                <a:r>
-                  <a:rPr lang="de-DE" sz="2900" dirty="0" err="1"/>
-                  <a:t>robustness</a:t>
-                </a:r>
-                <a:endParaRPr lang="de-DE" sz="2900" dirty="0"/>
+                  <a:rPr lang="de-DE" sz="2400" b="0" dirty="0"/>
+                  <a:t>,</a:t>
+                </a:r>
               </a:p>
               <a:p>
                 <a:pPr marL="0" indent="0">
                   <a:buNone/>
                 </a:pPr>
-                <a:endParaRPr lang="de-DE" sz="2900" dirty="0"/>
+                <a:r>
+                  <a:rPr lang="de-DE" sz="2400" dirty="0" err="1"/>
+                  <a:t>with</a:t>
+                </a:r>
+                <a:r>
+                  <a:rPr lang="de-DE" sz="2400" dirty="0"/>
+                  <a:t>  a </a:t>
+                </a:r>
+                <a:r>
+                  <a:rPr lang="de-DE" sz="2400" dirty="0" err="1"/>
+                  <a:t>low</a:t>
+                </a:r>
+                <a:r>
+                  <a:rPr lang="de-DE" sz="2400" dirty="0"/>
+                  <a:t>-pass </a:t>
+                </a:r>
+                <a:r>
+                  <a:rPr lang="de-DE" sz="2400" dirty="0" err="1"/>
+                  <a:t>filter</a:t>
+                </a:r>
+                <a:r>
+                  <a:rPr lang="de-DE" sz="2400" dirty="0"/>
+                  <a:t> </a:t>
+                </a:r>
+                <a14:m>
+                  <m:oMath xmlns:m="http://schemas.openxmlformats.org/officeDocument/2006/math">
+                    <m:r>
+                      <a:rPr lang="de-DE" sz="2400" i="1">
+                        <a:latin typeface="Cambria Math" panose="02040503050406030204" pitchFamily="18" charset="0"/>
+                      </a:rPr>
+                      <m:t>𝐹</m:t>
+                    </m:r>
+                    <m:d>
+                      <m:dPr>
+                        <m:ctrlPr>
+                          <a:rPr lang="de-DE" sz="2400" i="1">
+                            <a:latin typeface="Cambria Math" panose="02040503050406030204" pitchFamily="18" charset="0"/>
+                          </a:rPr>
+                        </m:ctrlPr>
+                      </m:dPr>
+                      <m:e>
+                        <m:r>
+                          <a:rPr lang="de-DE" sz="2400" i="1">
+                            <a:latin typeface="Cambria Math" panose="02040503050406030204" pitchFamily="18" charset="0"/>
+                          </a:rPr>
+                          <m:t>𝑠</m:t>
+                        </m:r>
+                      </m:e>
+                    </m:d>
+                  </m:oMath>
+                </a14:m>
+                <a:r>
+                  <a:rPr lang="de-DE" sz="2400" dirty="0"/>
+                  <a:t>, e.g., </a:t>
+                </a:r>
+                <a14:m>
+                  <m:oMath xmlns:m="http://schemas.openxmlformats.org/officeDocument/2006/math">
+                    <m:r>
+                      <a:rPr lang="de-DE" sz="2400" i="1">
+                        <a:latin typeface="Cambria Math" panose="02040503050406030204" pitchFamily="18" charset="0"/>
+                      </a:rPr>
+                      <m:t>𝐹</m:t>
+                    </m:r>
+                    <m:d>
+                      <m:dPr>
+                        <m:ctrlPr>
+                          <a:rPr lang="de-DE" sz="2400" i="1">
+                            <a:latin typeface="Cambria Math" panose="02040503050406030204" pitchFamily="18" charset="0"/>
+                          </a:rPr>
+                        </m:ctrlPr>
+                      </m:dPr>
+                      <m:e>
+                        <m:r>
+                          <a:rPr lang="de-DE" sz="2400" i="1">
+                            <a:latin typeface="Cambria Math" panose="02040503050406030204" pitchFamily="18" charset="0"/>
+                          </a:rPr>
+                          <m:t>𝑠</m:t>
+                        </m:r>
+                      </m:e>
+                    </m:d>
+                    <m:r>
+                      <a:rPr lang="de-DE" sz="2400" b="0" i="1" smtClean="0">
+                        <a:latin typeface="Cambria Math" panose="02040503050406030204" pitchFamily="18" charset="0"/>
+                      </a:rPr>
+                      <m:t>=</m:t>
+                    </m:r>
+                    <m:f>
+                      <m:fPr>
+                        <m:ctrlPr>
+                          <a:rPr lang="de-DE" sz="2400" b="0" i="1" smtClean="0">
+                            <a:latin typeface="Cambria Math" panose="02040503050406030204" pitchFamily="18" charset="0"/>
+                          </a:rPr>
+                        </m:ctrlPr>
+                      </m:fPr>
+                      <m:num>
+                        <m:r>
+                          <a:rPr lang="de-DE" sz="2400" b="0" i="1" smtClean="0">
+                            <a:latin typeface="Cambria Math" panose="02040503050406030204" pitchFamily="18" charset="0"/>
+                          </a:rPr>
+                          <m:t>1</m:t>
+                        </m:r>
+                      </m:num>
+                      <m:den>
+                        <m:r>
+                          <a:rPr lang="de-DE" sz="2400" b="0" i="1" smtClean="0">
+                            <a:latin typeface="Cambria Math" panose="02040503050406030204" pitchFamily="18" charset="0"/>
+                            <a:ea typeface="Cambria Math" panose="02040503050406030204" pitchFamily="18" charset="0"/>
+                          </a:rPr>
+                          <m:t>𝜆</m:t>
+                        </m:r>
+                        <m:r>
+                          <a:rPr lang="de-DE" sz="2400" b="0" i="1" smtClean="0">
+                            <a:latin typeface="Cambria Math" panose="02040503050406030204" pitchFamily="18" charset="0"/>
+                            <a:ea typeface="Cambria Math" panose="02040503050406030204" pitchFamily="18" charset="0"/>
+                          </a:rPr>
+                          <m:t>∙</m:t>
+                        </m:r>
+                        <m:r>
+                          <a:rPr lang="de-DE" sz="2400" b="0" i="1" smtClean="0">
+                            <a:latin typeface="Cambria Math" panose="02040503050406030204" pitchFamily="18" charset="0"/>
+                            <a:ea typeface="Cambria Math" panose="02040503050406030204" pitchFamily="18" charset="0"/>
+                          </a:rPr>
+                          <m:t>𝑠</m:t>
+                        </m:r>
+                        <m:r>
+                          <a:rPr lang="de-DE" sz="2400" b="0" i="1" smtClean="0">
+                            <a:latin typeface="Cambria Math" panose="02040503050406030204" pitchFamily="18" charset="0"/>
+                            <a:ea typeface="Cambria Math" panose="02040503050406030204" pitchFamily="18" charset="0"/>
+                          </a:rPr>
+                          <m:t>+1</m:t>
+                        </m:r>
+                      </m:den>
+                    </m:f>
+                  </m:oMath>
+                </a14:m>
+                <a:endParaRPr lang="de-DE" sz="2400" dirty="0"/>
               </a:p>
               <a:p>
                 <a:pPr marL="0" indent="0">
                   <a:buNone/>
                 </a:pPr>
-                <a:r>
-                  <a:rPr lang="de-DE" sz="2900" dirty="0"/>
-                  <a:t>Advantages:</a:t>
-                </a:r>
+                <a:endParaRPr lang="de-DE" sz="2400" dirty="0"/>
               </a:p>
               <a:p>
-                <a:r>
-                  <a:rPr lang="de-DE" sz="2900" dirty="0" err="1"/>
-                  <a:t>systematic</a:t>
-                </a:r>
-                <a:r>
-                  <a:rPr lang="de-DE" sz="2900" dirty="0"/>
-                  <a:t> </a:t>
-                </a:r>
-                <a:r>
-                  <a:rPr lang="de-DE" sz="2900" dirty="0" err="1"/>
-                  <a:t>controller</a:t>
-                </a:r>
-                <a:r>
-                  <a:rPr lang="de-DE" sz="2900" dirty="0"/>
-                  <a:t> design </a:t>
-                </a:r>
-                <a:r>
-                  <a:rPr lang="de-DE" sz="2900" dirty="0" err="1"/>
-                  <a:t>based</a:t>
-                </a:r>
-                <a:r>
-                  <a:rPr lang="de-DE" sz="2900" dirty="0"/>
-                  <a:t> on plant </a:t>
-                </a:r>
-                <a:r>
-                  <a:rPr lang="de-DE" sz="2900" dirty="0" err="1"/>
-                  <a:t>model</a:t>
-                </a:r>
-                <a:endParaRPr lang="de-DE" sz="2900" dirty="0"/>
+                <a14:m>
+                  <m:oMath xmlns:m="http://schemas.openxmlformats.org/officeDocument/2006/math">
+                    <m:sSup>
+                      <m:sSupPr>
+                        <m:ctrlPr>
+                          <a:rPr lang="de-DE" sz="2400" i="1">
+                            <a:latin typeface="Cambria Math" panose="02040503050406030204" pitchFamily="18" charset="0"/>
+                          </a:rPr>
+                        </m:ctrlPr>
+                      </m:sSupPr>
+                      <m:e>
+                        <m:r>
+                          <a:rPr lang="de-DE" sz="2400" i="1">
+                            <a:latin typeface="Cambria Math" panose="02040503050406030204" pitchFamily="18" charset="0"/>
+                          </a:rPr>
+                          <m:t>𝐺</m:t>
+                        </m:r>
+                      </m:e>
+                      <m:sup>
+                        <m:r>
+                          <a:rPr lang="de-DE" sz="2400" i="1">
+                            <a:latin typeface="Cambria Math" panose="02040503050406030204" pitchFamily="18" charset="0"/>
+                          </a:rPr>
+                          <m:t>−1</m:t>
+                        </m:r>
+                      </m:sup>
+                    </m:sSup>
+                    <m:d>
+                      <m:dPr>
+                        <m:ctrlPr>
+                          <a:rPr lang="de-DE" sz="2400" i="1">
+                            <a:latin typeface="Cambria Math" panose="02040503050406030204" pitchFamily="18" charset="0"/>
+                          </a:rPr>
+                        </m:ctrlPr>
+                      </m:dPr>
+                      <m:e>
+                        <m:r>
+                          <a:rPr lang="de-DE" sz="2400" i="1">
+                            <a:latin typeface="Cambria Math" panose="02040503050406030204" pitchFamily="18" charset="0"/>
+                          </a:rPr>
+                          <m:t>𝑠</m:t>
+                        </m:r>
+                      </m:e>
+                    </m:d>
+                  </m:oMath>
+                </a14:m>
+                <a:r>
+                  <a:rPr lang="de-DE" sz="2400" dirty="0"/>
+                  <a:t> </a:t>
+                </a:r>
+                <a:r>
+                  <a:rPr lang="de-DE" sz="2400" dirty="0" err="1"/>
+                  <a:t>cancels</a:t>
+                </a:r>
+                <a:r>
+                  <a:rPr lang="de-DE" sz="2400" dirty="0"/>
+                  <a:t> plant </a:t>
+                </a:r>
+                <a:r>
+                  <a:rPr lang="de-DE" sz="2400" dirty="0" err="1"/>
+                  <a:t>dynamics</a:t>
+                </a:r>
+                <a:r>
+                  <a:rPr lang="de-DE" sz="2400" dirty="0"/>
+                  <a:t> (</a:t>
+                </a:r>
+                <a:r>
+                  <a:rPr lang="de-DE" sz="2400" dirty="0" err="1"/>
+                  <a:t>performance</a:t>
+                </a:r>
+                <a:r>
+                  <a:rPr lang="de-DE" sz="2400" dirty="0"/>
+                  <a:t>)</a:t>
+                </a:r>
               </a:p>
               <a:p>
-                <a:r>
-                  <a:rPr lang="de-DE" sz="2900" dirty="0"/>
-                  <a:t>explicit trade-off </a:t>
-                </a:r>
-                <a:r>
-                  <a:rPr lang="de-DE" sz="2900" dirty="0" err="1"/>
-                  <a:t>between</a:t>
-                </a:r>
-                <a:r>
-                  <a:rPr lang="de-DE" sz="2900" dirty="0"/>
-                  <a:t> </a:t>
-                </a:r>
-                <a:r>
-                  <a:rPr lang="de-DE" sz="2900" dirty="0" err="1"/>
-                  <a:t>performance</a:t>
-                </a:r>
-                <a:r>
-                  <a:rPr lang="de-DE" sz="2900" dirty="0"/>
-                  <a:t> and </a:t>
-                </a:r>
-                <a:r>
-                  <a:rPr lang="de-DE" sz="2900" dirty="0" err="1"/>
+                <a14:m>
+                  <m:oMath xmlns:m="http://schemas.openxmlformats.org/officeDocument/2006/math">
+                    <m:r>
+                      <a:rPr lang="de-DE" sz="2400" i="1">
+                        <a:latin typeface="Cambria Math" panose="02040503050406030204" pitchFamily="18" charset="0"/>
+                      </a:rPr>
+                      <m:t>𝐹</m:t>
+                    </m:r>
+                    <m:d>
+                      <m:dPr>
+                        <m:ctrlPr>
+                          <a:rPr lang="de-DE" sz="2400" i="1">
+                            <a:latin typeface="Cambria Math" panose="02040503050406030204" pitchFamily="18" charset="0"/>
+                          </a:rPr>
+                        </m:ctrlPr>
+                      </m:dPr>
+                      <m:e>
+                        <m:r>
+                          <a:rPr lang="de-DE" sz="2400" i="1">
+                            <a:latin typeface="Cambria Math" panose="02040503050406030204" pitchFamily="18" charset="0"/>
+                          </a:rPr>
+                          <m:t>𝑠</m:t>
+                        </m:r>
+                      </m:e>
+                    </m:d>
+                  </m:oMath>
+                </a14:m>
+                <a:r>
+                  <a:rPr lang="de-DE" sz="2400" dirty="0"/>
+                  <a:t> </a:t>
+                </a:r>
+                <a:r>
+                  <a:rPr lang="de-DE" sz="2400" dirty="0" err="1"/>
+                  <a:t>limits</a:t>
+                </a:r>
+                <a:r>
+                  <a:rPr lang="de-DE" sz="2400" dirty="0"/>
+                  <a:t> </a:t>
+                </a:r>
+                <a:r>
+                  <a:rPr lang="de-DE" sz="2400" dirty="0" err="1"/>
+                  <a:t>bandwidth</a:t>
+                </a:r>
+                <a:r>
+                  <a:rPr lang="de-DE" sz="2400" dirty="0"/>
+                  <a:t> (</a:t>
+                </a:r>
+                <a:r>
+                  <a:rPr lang="de-DE" sz="2400" dirty="0" err="1"/>
                   <a:t>robustness</a:t>
                 </a:r>
-                <a:endParaRPr lang="de-DE" sz="2900" dirty="0"/>
+                <a:r>
+                  <a:rPr lang="de-DE" sz="2400" dirty="0"/>
+                  <a:t>)</a:t>
+                </a:r>
               </a:p>
               <a:p>
-                <a:r>
-                  <a:rPr lang="de-DE" sz="2900" dirty="0" err="1"/>
-                  <a:t>often</a:t>
-                </a:r>
-                <a:r>
-                  <a:rPr lang="de-DE" sz="2900" dirty="0"/>
-                  <a:t> </a:t>
-                </a:r>
-                <a:r>
-                  <a:rPr lang="de-DE" sz="2900" dirty="0" err="1"/>
-                  <a:t>leads</a:t>
-                </a:r>
-                <a:r>
-                  <a:rPr lang="de-DE" sz="2900" dirty="0"/>
-                  <a:t> </a:t>
-                </a:r>
-                <a:r>
-                  <a:rPr lang="de-DE" sz="2900" dirty="0" err="1"/>
-                  <a:t>to</a:t>
-                </a:r>
-                <a:r>
-                  <a:rPr lang="de-DE" sz="2900" dirty="0"/>
-                  <a:t> simple PI </a:t>
-                </a:r>
-                <a:r>
-                  <a:rPr lang="de-DE" sz="2900" dirty="0" err="1"/>
-                  <a:t>or</a:t>
-                </a:r>
-                <a:r>
-                  <a:rPr lang="de-DE" sz="2900" dirty="0"/>
-                  <a:t> PID </a:t>
-                </a:r>
-                <a:r>
-                  <a:rPr lang="de-DE" sz="2900" dirty="0" err="1"/>
-                  <a:t>structures</a:t>
-                </a:r>
-                <a:endParaRPr lang="de-DE" sz="2900" dirty="0"/>
+                <a14:m>
+                  <m:oMath xmlns:m="http://schemas.openxmlformats.org/officeDocument/2006/math">
+                    <m:r>
+                      <a:rPr lang="de-DE" sz="2400" i="1">
+                        <a:latin typeface="Cambria Math" panose="02040503050406030204" pitchFamily="18" charset="0"/>
+                        <a:ea typeface="Cambria Math" panose="02040503050406030204" pitchFamily="18" charset="0"/>
+                      </a:rPr>
+                      <m:t>𝜆</m:t>
+                    </m:r>
+                  </m:oMath>
+                </a14:m>
+                <a:r>
+                  <a:rPr lang="de-DE" sz="2400" dirty="0"/>
+                  <a:t>: tuning </a:t>
+                </a:r>
+                <a:r>
+                  <a:rPr lang="de-DE" sz="2400" dirty="0" err="1"/>
+                  <a:t>parameter</a:t>
+                </a:r>
+                <a:r>
+                  <a:rPr lang="de-DE" sz="2400" dirty="0"/>
+                  <a:t> </a:t>
+                </a:r>
+                <a:r>
+                  <a:rPr lang="de-DE" sz="2400" dirty="0" err="1"/>
+                  <a:t>controlling</a:t>
+                </a:r>
+                <a:r>
+                  <a:rPr lang="de-DE" sz="2400" dirty="0"/>
+                  <a:t> trade-off</a:t>
+                </a:r>
+                <a:br>
+                  <a:rPr lang="de-DE" sz="2400" dirty="0"/>
+                </a:br>
+                <a:endParaRPr lang="de-DE" sz="2400" dirty="0"/>
               </a:p>
               <a:p>
                 <a:pPr marL="0" indent="0">
                   <a:buNone/>
                 </a:pPr>
-                <a:endParaRPr lang="de-DE" sz="2900" dirty="0"/>
+                <a:r>
+                  <a:rPr lang="de-DE" sz="2400" dirty="0">
+                    <a:sym typeface="Wingdings" pitchFamily="2" charset="2"/>
+                  </a:rPr>
+                  <a:t> </a:t>
+                </a:r>
+                <a:r>
+                  <a:rPr lang="de-DE" sz="2400" dirty="0" err="1"/>
+                  <a:t>Closed</a:t>
+                </a:r>
+                <a:r>
+                  <a:rPr lang="de-DE" sz="2400" dirty="0"/>
+                  <a:t>-loop </a:t>
+                </a:r>
+                <a:r>
+                  <a:rPr lang="de-DE" sz="2400" dirty="0" err="1"/>
+                  <a:t>behaves</a:t>
+                </a:r>
+                <a:r>
+                  <a:rPr lang="de-DE" sz="2400" dirty="0"/>
+                  <a:t> like a simple </a:t>
+                </a:r>
+                <a:r>
+                  <a:rPr lang="de-DE" sz="2400" dirty="0" err="1"/>
+                  <a:t>low</a:t>
+                </a:r>
+                <a:r>
+                  <a:rPr lang="de-DE" sz="2400" dirty="0"/>
+                  <a:t>-order </a:t>
+                </a:r>
+                <a:r>
+                  <a:rPr lang="de-DE" sz="2400" dirty="0" err="1"/>
+                  <a:t>system</a:t>
+                </a:r>
+                <a:r>
+                  <a:rPr lang="de-DE" sz="2400" dirty="0"/>
+                  <a:t>:</a:t>
+                </a:r>
               </a:p>
               <a:p>
-                <a:pPr marL="0" indent="0">
-                  <a:buNone/>
-                </a:pPr>
-                <a:r>
-                  <a:rPr lang="de-DE" sz="2900" dirty="0" err="1"/>
-                  <a:t>Limitations</a:t>
-                </a:r>
-                <a:r>
-                  <a:rPr lang="de-DE" sz="2900" dirty="0"/>
-                  <a:t>:</a:t>
-                </a:r>
+                <a:r>
+                  <a:rPr lang="de-DE" sz="2400" dirty="0"/>
+                  <a:t>first-order: smooth, </a:t>
+                </a:r>
+                <a:r>
+                  <a:rPr lang="de-DE" sz="2400" dirty="0" err="1"/>
+                  <a:t>no</a:t>
+                </a:r>
+                <a:r>
+                  <a:rPr lang="de-DE" sz="2400" dirty="0"/>
+                  <a:t> </a:t>
+                </a:r>
+                <a:r>
+                  <a:rPr lang="de-DE" sz="2400" dirty="0" err="1"/>
+                  <a:t>overshoot</a:t>
+                </a:r>
+                <a:endParaRPr lang="de-DE" sz="2400" dirty="0"/>
               </a:p>
               <a:p>
                 <a:r>
-                  <a:rPr lang="de-DE" sz="2900" dirty="0" err="1"/>
-                  <a:t>requires</a:t>
-                </a:r>
-                <a:r>
-                  <a:rPr lang="de-DE" sz="2900" dirty="0"/>
-                  <a:t> </a:t>
-                </a:r>
-                <a:r>
-                  <a:rPr lang="de-DE" sz="2900" dirty="0" err="1"/>
-                  <a:t>reasonably</a:t>
-                </a:r>
-                <a:r>
-                  <a:rPr lang="de-DE" sz="2900" dirty="0"/>
-                  <a:t> </a:t>
-                </a:r>
-                <a:r>
-                  <a:rPr lang="de-DE" sz="2900" dirty="0" err="1"/>
-                  <a:t>accurate</a:t>
-                </a:r>
-                <a:r>
-                  <a:rPr lang="de-DE" sz="2900" dirty="0"/>
-                  <a:t> plant </a:t>
-                </a:r>
-                <a:r>
-                  <a:rPr lang="de-DE" sz="2900" dirty="0" err="1"/>
-                  <a:t>model</a:t>
-                </a:r>
-                <a:endParaRPr lang="de-DE" sz="2900" dirty="0"/>
-              </a:p>
-              <a:p>
-                <a:r>
-                  <a:rPr lang="de-DE" sz="2900" dirty="0" err="1"/>
-                  <a:t>performance</a:t>
-                </a:r>
-                <a:r>
-                  <a:rPr lang="de-DE" sz="2900" dirty="0"/>
-                  <a:t> </a:t>
-                </a:r>
-                <a:r>
-                  <a:rPr lang="de-DE" sz="2900" dirty="0" err="1"/>
-                  <a:t>degrades</a:t>
-                </a:r>
-                <a:r>
-                  <a:rPr lang="de-DE" sz="2900" dirty="0"/>
-                  <a:t> </a:t>
-                </a:r>
-                <a:r>
-                  <a:rPr lang="de-DE" sz="2900" dirty="0" err="1"/>
-                  <a:t>if</a:t>
-                </a:r>
-                <a:r>
-                  <a:rPr lang="de-DE" sz="2900" dirty="0"/>
-                  <a:t> </a:t>
-                </a:r>
-                <a:r>
-                  <a:rPr lang="de-DE" sz="2900" dirty="0" err="1"/>
-                  <a:t>model</a:t>
-                </a:r>
-                <a:r>
-                  <a:rPr lang="de-DE" sz="2900" dirty="0"/>
-                  <a:t> </a:t>
-                </a:r>
-                <a:r>
-                  <a:rPr lang="de-DE" sz="2900" dirty="0" err="1"/>
-                  <a:t>mismatch</a:t>
-                </a:r>
-                <a:r>
-                  <a:rPr lang="de-DE" sz="2900" dirty="0"/>
-                  <a:t> </a:t>
-                </a:r>
-                <a:r>
-                  <a:rPr lang="de-DE" sz="2900" dirty="0" err="1"/>
-                  <a:t>is</a:t>
-                </a:r>
-                <a:r>
-                  <a:rPr lang="de-DE" sz="2900" dirty="0"/>
-                  <a:t> large</a:t>
-                </a:r>
+                  <a:rPr lang="de-DE" sz="2400" dirty="0" err="1"/>
+                  <a:t>second</a:t>
+                </a:r>
+                <a:r>
+                  <a:rPr lang="de-DE" sz="2400" dirty="0"/>
+                  <a:t>-order: </a:t>
+                </a:r>
+                <a:r>
+                  <a:rPr lang="de-DE" sz="2400" dirty="0" err="1"/>
+                  <a:t>faster</a:t>
+                </a:r>
+                <a:r>
+                  <a:rPr lang="de-DE" sz="2400" dirty="0"/>
+                  <a:t>, possible </a:t>
+                </a:r>
+                <a:r>
+                  <a:rPr lang="de-DE" sz="2400" dirty="0" err="1"/>
+                  <a:t>oscillation</a:t>
+                </a:r>
+                <a:endParaRPr lang="de-DE" sz="2400" dirty="0"/>
               </a:p>
             </p:txBody>
           </p:sp>
         </mc:Choice>
-        <mc:Fallback xmlns="">
+        <mc:Fallback>
           <p:sp>
             <p:nvSpPr>
               <p:cNvPr id="3" name="Inhaltsplatzhalter 2">
@@ -13905,10 +14036,14 @@
               </p:nvPr>
             </p:nvSpPr>
             <p:spPr>
+              <a:xfrm>
+                <a:off x="838200" y="1690688"/>
+                <a:ext cx="10515600" cy="5030787"/>
+              </a:xfrm>
               <a:blipFill>
                 <a:blip r:embed="rId2"/>
                 <a:stretch>
-                  <a:fillRect l="-724" t="-2035"/>
+                  <a:fillRect l="-965" t="-1508" b="-2010"/>
                 </a:stretch>
               </a:blipFill>
             </p:spPr>
@@ -13956,6 +14091,383 @@
           </a:p>
         </p:txBody>
       </p:sp>
+      <p:sp>
+        <p:nvSpPr>
+          <p:cNvPr id="6" name="Textfeld 5">
+            <a:extLst>
+              <a:ext uri="{FF2B5EF4-FFF2-40B4-BE49-F238E27FC236}">
+                <a16:creationId xmlns:a16="http://schemas.microsoft.com/office/drawing/2014/main" id="{D0B3A41B-2823-0731-704A-529AF3672B58}"/>
+              </a:ext>
+            </a:extLst>
+          </p:cNvPr>
+          <p:cNvSpPr txBox="1"/>
+          <p:nvPr/>
+        </p:nvSpPr>
+        <p:spPr>
+          <a:xfrm>
+            <a:off x="5105400" y="566241"/>
+            <a:ext cx="6568440" cy="461665"/>
+          </a:xfrm>
+          <a:prstGeom prst="rect">
+            <a:avLst/>
+          </a:prstGeom>
+          <a:noFill/>
+          <a:ln>
+            <a:solidFill>
+              <a:schemeClr val="tx1"/>
+            </a:solidFill>
+          </a:ln>
+        </p:spPr>
+        <p:txBody>
+          <a:bodyPr wrap="square">
+            <a:spAutoFit/>
+          </a:bodyPr>
+          <a:lstStyle/>
+          <a:p>
+            <a:pPr>
+              <a:buNone/>
+            </a:pPr>
+            <a:r>
+              <a:rPr lang="de-DE" sz="2400" dirty="0" err="1"/>
+              <a:t>directly</a:t>
+            </a:r>
+            <a:r>
+              <a:rPr lang="de-DE" sz="2400" dirty="0"/>
+              <a:t> </a:t>
+            </a:r>
+            <a:r>
+              <a:rPr lang="de-DE" sz="2400" dirty="0" err="1"/>
+              <a:t>shapes</a:t>
+            </a:r>
+            <a:r>
+              <a:rPr lang="de-DE" sz="2400" dirty="0"/>
+              <a:t> </a:t>
+            </a:r>
+            <a:r>
+              <a:rPr lang="de-DE" sz="2400" dirty="0" err="1"/>
+              <a:t>the</a:t>
+            </a:r>
+            <a:r>
+              <a:rPr lang="de-DE" sz="2400" dirty="0"/>
+              <a:t> </a:t>
+            </a:r>
+            <a:r>
+              <a:rPr lang="de-DE" sz="2400" dirty="0" err="1"/>
+              <a:t>closed</a:t>
+            </a:r>
+            <a:r>
+              <a:rPr lang="de-DE" sz="2400" dirty="0"/>
+              <a:t>-loop </a:t>
+            </a:r>
+            <a:r>
+              <a:rPr lang="de-DE" sz="2400" dirty="0" err="1"/>
+              <a:t>transfer</a:t>
+            </a:r>
+            <a:r>
+              <a:rPr lang="de-DE" sz="2400" dirty="0"/>
+              <a:t> </a:t>
+            </a:r>
+            <a:r>
+              <a:rPr lang="de-DE" sz="2400" dirty="0" err="1"/>
+              <a:t>function</a:t>
+            </a:r>
+            <a:endParaRPr lang="de-DE" sz="2400" dirty="0"/>
+          </a:p>
+        </p:txBody>
+      </p:sp>
+      <mc:AlternateContent xmlns:mc="http://schemas.openxmlformats.org/markup-compatibility/2006">
+        <mc:Choice xmlns:a14="http://schemas.microsoft.com/office/drawing/2010/main" Requires="a14">
+          <p:sp>
+            <p:nvSpPr>
+              <p:cNvPr id="7" name="Textfeld 6">
+                <a:extLst>
+                  <a:ext uri="{FF2B5EF4-FFF2-40B4-BE49-F238E27FC236}">
+                    <a16:creationId xmlns:a16="http://schemas.microsoft.com/office/drawing/2014/main" id="{D7F6EAC6-0F4E-33E2-EF9C-83D1726BD234}"/>
+                  </a:ext>
+                </a:extLst>
+              </p:cNvPr>
+              <p:cNvSpPr txBox="1"/>
+              <p:nvPr/>
+            </p:nvSpPr>
+            <p:spPr>
+              <a:xfrm>
+                <a:off x="7376160" y="6002327"/>
+                <a:ext cx="3977640" cy="461665"/>
+              </a:xfrm>
+              <a:prstGeom prst="rect">
+                <a:avLst/>
+              </a:prstGeom>
+              <a:noFill/>
+            </p:spPr>
+            <p:txBody>
+              <a:bodyPr wrap="square" rtlCol="0">
+                <a:spAutoFit/>
+              </a:bodyPr>
+              <a:lstStyle/>
+              <a:p>
+                <a:r>
+                  <a:rPr lang="de-DE" sz="2400" dirty="0" err="1"/>
+                  <a:t>depending</a:t>
+                </a:r>
+                <a:r>
+                  <a:rPr lang="de-DE" sz="2400" dirty="0"/>
+                  <a:t> on </a:t>
+                </a:r>
+                <a:r>
+                  <a:rPr lang="de-DE" sz="2400" dirty="0" err="1"/>
+                  <a:t>choice</a:t>
+                </a:r>
+                <a:r>
+                  <a:rPr lang="de-DE" sz="2400" dirty="0"/>
+                  <a:t> </a:t>
+                </a:r>
+                <a:r>
+                  <a:rPr lang="de-DE" sz="2400" dirty="0" err="1"/>
+                  <a:t>of</a:t>
+                </a:r>
+                <a:r>
+                  <a:rPr lang="de-DE" sz="2400" dirty="0"/>
+                  <a:t> </a:t>
+                </a:r>
+                <a14:m>
+                  <m:oMath xmlns:m="http://schemas.openxmlformats.org/officeDocument/2006/math">
+                    <m:r>
+                      <a:rPr lang="de-DE" sz="2400" i="1">
+                        <a:latin typeface="Cambria Math" panose="02040503050406030204" pitchFamily="18" charset="0"/>
+                      </a:rPr>
+                      <m:t>𝐹</m:t>
+                    </m:r>
+                    <m:d>
+                      <m:dPr>
+                        <m:ctrlPr>
+                          <a:rPr lang="de-DE" sz="2400" i="1">
+                            <a:latin typeface="Cambria Math" panose="02040503050406030204" pitchFamily="18" charset="0"/>
+                          </a:rPr>
+                        </m:ctrlPr>
+                      </m:dPr>
+                      <m:e>
+                        <m:r>
+                          <a:rPr lang="de-DE" sz="2400" i="1">
+                            <a:latin typeface="Cambria Math" panose="02040503050406030204" pitchFamily="18" charset="0"/>
+                          </a:rPr>
+                          <m:t>𝑠</m:t>
+                        </m:r>
+                      </m:e>
+                    </m:d>
+                  </m:oMath>
+                </a14:m>
+                <a:endParaRPr lang="de-DE" sz="2400" dirty="0"/>
+              </a:p>
+            </p:txBody>
+          </p:sp>
+        </mc:Choice>
+        <mc:Fallback>
+          <p:sp>
+            <p:nvSpPr>
+              <p:cNvPr id="7" name="Textfeld 6">
+                <a:extLst>
+                  <a:ext uri="{FF2B5EF4-FFF2-40B4-BE49-F238E27FC236}">
+                    <a16:creationId xmlns:a16="http://schemas.microsoft.com/office/drawing/2014/main" id="{D7F6EAC6-0F4E-33E2-EF9C-83D1726BD234}"/>
+                  </a:ext>
+                </a:extLst>
+              </p:cNvPr>
+              <p:cNvSpPr txBox="1">
+                <a:spLocks noRot="1" noChangeAspect="1" noMove="1" noResize="1" noEditPoints="1" noAdjustHandles="1" noChangeArrowheads="1" noChangeShapeType="1" noTextEdit="1"/>
+              </p:cNvSpPr>
+              <p:nvPr/>
+            </p:nvSpPr>
+            <p:spPr>
+              <a:xfrm>
+                <a:off x="7376160" y="6002327"/>
+                <a:ext cx="3977640" cy="461665"/>
+              </a:xfrm>
+              <a:prstGeom prst="rect">
+                <a:avLst/>
+              </a:prstGeom>
+              <a:blipFill>
+                <a:blip r:embed="rId3"/>
+                <a:stretch>
+                  <a:fillRect l="-2222" t="-10811" b="-29730"/>
+                </a:stretch>
+              </a:blipFill>
+            </p:spPr>
+            <p:txBody>
+              <a:bodyPr/>
+              <a:lstStyle/>
+              <a:p>
+                <a:r>
+                  <a:rPr lang="de-DE">
+                    <a:noFill/>
+                  </a:rPr>
+                  <a:t> </a:t>
+                </a:r>
+              </a:p>
+            </p:txBody>
+          </p:sp>
+        </mc:Fallback>
+      </mc:AlternateContent>
+      <p:sp>
+        <p:nvSpPr>
+          <p:cNvPr id="8" name="Geschweifte Klammer rechts 7">
+            <a:extLst>
+              <a:ext uri="{FF2B5EF4-FFF2-40B4-BE49-F238E27FC236}">
+                <a16:creationId xmlns:a16="http://schemas.microsoft.com/office/drawing/2014/main" id="{163653C3-969D-F1D0-57C6-ACA856078793}"/>
+              </a:ext>
+            </a:extLst>
+          </p:cNvPr>
+          <p:cNvSpPr/>
+          <p:nvPr/>
+        </p:nvSpPr>
+        <p:spPr>
+          <a:xfrm>
+            <a:off x="6949440" y="5842000"/>
+            <a:ext cx="426720" cy="782320"/>
+          </a:xfrm>
+          <a:prstGeom prst="rightBrace">
+            <a:avLst/>
+          </a:prstGeom>
+        </p:spPr>
+        <p:style>
+          <a:lnRef idx="2">
+            <a:schemeClr val="accent1"/>
+          </a:lnRef>
+          <a:fillRef idx="0">
+            <a:schemeClr val="accent1"/>
+          </a:fillRef>
+          <a:effectRef idx="1">
+            <a:schemeClr val="accent1"/>
+          </a:effectRef>
+          <a:fontRef idx="minor">
+            <a:schemeClr val="tx1"/>
+          </a:fontRef>
+        </p:style>
+        <p:txBody>
+          <a:bodyPr rtlCol="0" anchor="ctr"/>
+          <a:lstStyle/>
+          <a:p>
+            <a:pPr algn="ctr"/>
+            <a:endParaRPr lang="de-DE"/>
+          </a:p>
+        </p:txBody>
+      </p:sp>
+      <p:sp>
+        <p:nvSpPr>
+          <p:cNvPr id="9" name="Textfeld 8">
+            <a:extLst>
+              <a:ext uri="{FF2B5EF4-FFF2-40B4-BE49-F238E27FC236}">
+                <a16:creationId xmlns:a16="http://schemas.microsoft.com/office/drawing/2014/main" id="{755ADA58-317A-EBF7-8E7F-B90B639796D9}"/>
+              </a:ext>
+            </a:extLst>
+          </p:cNvPr>
+          <p:cNvSpPr txBox="1"/>
+          <p:nvPr/>
+        </p:nvSpPr>
+        <p:spPr>
+          <a:xfrm>
+            <a:off x="7457440" y="2519848"/>
+            <a:ext cx="4531365" cy="830997"/>
+          </a:xfrm>
+          <a:prstGeom prst="rect">
+            <a:avLst/>
+          </a:prstGeom>
+          <a:noFill/>
+          <a:ln>
+            <a:solidFill>
+              <a:schemeClr val="tx1"/>
+            </a:solidFill>
+          </a:ln>
+        </p:spPr>
+        <p:txBody>
+          <a:bodyPr wrap="square" rtlCol="0">
+            <a:spAutoFit/>
+          </a:bodyPr>
+          <a:lstStyle/>
+          <a:p>
+            <a:r>
+              <a:rPr lang="de-DE" sz="2400" dirty="0"/>
+              <a:t>PI (</a:t>
+            </a:r>
+            <a:r>
+              <a:rPr lang="de-DE" sz="2400" dirty="0" err="1"/>
+              <a:t>for</a:t>
+            </a:r>
+            <a:r>
+              <a:rPr lang="de-DE" sz="2400" dirty="0"/>
+              <a:t> first-order plant) </a:t>
+            </a:r>
+            <a:r>
+              <a:rPr lang="de-DE" sz="2400" dirty="0" err="1"/>
+              <a:t>or</a:t>
+            </a:r>
+            <a:r>
+              <a:rPr lang="de-DE" sz="2400" dirty="0"/>
+              <a:t> PID (</a:t>
+            </a:r>
+            <a:r>
+              <a:rPr lang="de-DE" sz="2400" dirty="0" err="1"/>
+              <a:t>for</a:t>
+            </a:r>
+            <a:r>
+              <a:rPr lang="de-DE" sz="2400" dirty="0"/>
+              <a:t> </a:t>
+            </a:r>
+            <a:r>
+              <a:rPr lang="de-DE" sz="2400" dirty="0" err="1"/>
+              <a:t>second</a:t>
+            </a:r>
+            <a:r>
+              <a:rPr lang="de-DE" sz="2400" dirty="0"/>
+              <a:t>-order plant) </a:t>
+            </a:r>
+            <a:r>
+              <a:rPr lang="de-DE" sz="2400" dirty="0" err="1"/>
+              <a:t>structure</a:t>
+            </a:r>
+            <a:endParaRPr lang="de-DE" sz="2400" dirty="0"/>
+          </a:p>
+        </p:txBody>
+      </p:sp>
+      <p:cxnSp>
+        <p:nvCxnSpPr>
+          <p:cNvPr id="11" name="Gerade Verbindung mit Pfeil 10">
+            <a:extLst>
+              <a:ext uri="{FF2B5EF4-FFF2-40B4-BE49-F238E27FC236}">
+                <a16:creationId xmlns:a16="http://schemas.microsoft.com/office/drawing/2014/main" id="{F9B4D10C-1B98-212C-4C85-C3BCBC26BA5D}"/>
+              </a:ext>
+            </a:extLst>
+          </p:cNvPr>
+          <p:cNvCxnSpPr>
+            <a:stCxn id="9" idx="0"/>
+          </p:cNvCxnSpPr>
+          <p:nvPr/>
+        </p:nvCxnSpPr>
+        <p:spPr>
+          <a:xfrm flipH="1" flipV="1">
+            <a:off x="9296400" y="2042160"/>
+            <a:ext cx="426723" cy="477688"/>
+          </a:xfrm>
+          <a:prstGeom prst="straightConnector1">
+            <a:avLst/>
+          </a:prstGeom>
+          <a:ln>
+            <a:tailEnd type="triangle"/>
+          </a:ln>
+        </p:spPr>
+        <p:style>
+          <a:lnRef idx="2">
+            <a:schemeClr val="accent1"/>
+          </a:lnRef>
+          <a:fillRef idx="0">
+            <a:schemeClr val="accent1"/>
+          </a:fillRef>
+          <a:effectRef idx="1">
+            <a:schemeClr val="accent1"/>
+          </a:effectRef>
+          <a:fontRef idx="minor">
+            <a:schemeClr val="tx1"/>
+          </a:fontRef>
+        </p:style>
+      </p:cxnSp>
     </p:spTree>
     <p:extLst>
       <p:ext uri="{BB962C8B-B14F-4D97-AF65-F5344CB8AC3E}">
@@ -14014,8 +14526,8 @@
           </a:p>
         </p:txBody>
       </p:sp>
-      <mc:AlternateContent xmlns:mc="http://schemas.openxmlformats.org/markup-compatibility/2006" xmlns:a14="http://schemas.microsoft.com/office/drawing/2010/main">
-        <mc:Choice Requires="a14">
+      <mc:AlternateContent xmlns:mc="http://schemas.openxmlformats.org/markup-compatibility/2006">
+        <mc:Choice xmlns:a14="http://schemas.microsoft.com/office/drawing/2010/main" Requires="a14">
           <p:sp>
             <p:nvSpPr>
               <p:cNvPr id="3" name="Inhaltsplatzhalter 2">
@@ -14035,7 +14547,7 @@
             <p:spPr/>
             <p:txBody>
               <a:bodyPr>
-                <a:normAutofit fontScale="77500" lnSpcReduction="20000"/>
+                <a:normAutofit fontScale="85000" lnSpcReduction="20000"/>
               </a:bodyPr>
               <a:lstStyle/>
               <a:p>
@@ -14449,10 +14961,6 @@
               </a:p>
               <a:p>
                 <a:r>
-                  <a:rPr lang="de-DE" dirty="0"/>
-                  <a:t>Advantage: </a:t>
-                </a:r>
-                <a:r>
                   <a:rPr lang="de-DE" dirty="0" err="1"/>
                   <a:t>direct</a:t>
                 </a:r>
@@ -14491,14 +14999,6 @@
                 <a:endParaRPr lang="de-DE" dirty="0"/>
               </a:p>
               <a:p>
-                <a:r>
-                  <a:rPr lang="de-DE" dirty="0" err="1"/>
-                  <a:t>Limitations</a:t>
-                </a:r>
-                <a:r>
-                  <a:rPr lang="de-DE" dirty="0"/>
-                  <a:t>: </a:t>
-                </a:r>
                 <a:r>
                   <a:rPr lang="de-DE" dirty="0" err="1"/>
                   <a:t>requires</a:t>
@@ -14564,7 +15064,7 @@
             </p:txBody>
           </p:sp>
         </mc:Choice>
-        <mc:Fallback xmlns="">
+        <mc:Fallback>
           <p:sp>
             <p:nvSpPr>
               <p:cNvPr id="3" name="Inhaltsplatzhalter 2">
@@ -14585,7 +15085,7 @@
               <a:blipFill>
                 <a:blip r:embed="rId2"/>
                 <a:stretch>
-                  <a:fillRect l="-844" t="-2616"/>
+                  <a:fillRect l="-965" t="-3198"/>
                 </a:stretch>
               </a:blipFill>
             </p:spPr>
@@ -26234,8 +26734,8 @@
           </a:p>
         </p:txBody>
       </p:sp>
-      <mc:AlternateContent xmlns:mc="http://schemas.openxmlformats.org/markup-compatibility/2006">
-        <mc:Choice xmlns:a14="http://schemas.microsoft.com/office/drawing/2010/main" Requires="a14">
+      <mc:AlternateContent xmlns:mc="http://schemas.openxmlformats.org/markup-compatibility/2006" xmlns:a14="http://schemas.microsoft.com/office/drawing/2010/main">
+        <mc:Choice Requires="a14">
           <p:sp>
             <p:nvSpPr>
               <p:cNvPr id="3" name="Inhaltsplatzhalter 2">
@@ -26568,7 +27068,7 @@
             </p:txBody>
           </p:sp>
         </mc:Choice>
-        <mc:Fallback>
+        <mc:Fallback xmlns="">
           <p:sp>
             <p:nvSpPr>
               <p:cNvPr id="3" name="Inhaltsplatzhalter 2">
